--- a/docs/theme-preview/pptx/newmorphism.pptx
+++ b/docs/theme-preview/pptx/newmorphism.pptx
@@ -12335,7 +12335,7 @@
                 <a:ea typeface="Pretendard" pitchFamily="34" charset="-122"/>
                 <a:cs typeface="Pretendard" pitchFamily="34" charset="-120"/>
               </a:rPr>
-              <a:t>Markdown Semantics</a:t>
+              <a:t>Semantic Blocks</a:t>
             </a:r>
             <a:endParaRPr lang="en-US" sz="2200" dirty="0"/>
           </a:p>
@@ -16751,7 +16751,7 @@
                 <a:ea typeface="Pretendard" pitchFamily="34" charset="-122"/>
                 <a:cs typeface="Pretendard" pitchFamily="34" charset="-120"/>
               </a:rPr>
-              <a:t>Markdown Semantics</a:t>
+              <a:t>Semantic Blocks</a:t>
             </a:r>
             <a:endParaRPr lang="en-US" sz="3400" dirty="0"/>
           </a:p>

--- a/docs/theme-preview/pptx/newmorphism.pptx
+++ b/docs/theme-preview/pptx/newmorphism.pptx
@@ -125,7 +125,7 @@
 </p:presentation>
 </file>
 
-<file path=ppt/charts/chart8.xml><?xml version="1.0" encoding="utf-8"?>
+<file path=ppt/charts/chart6.xml><?xml version="1.0" encoding="utf-8"?>
 <c:chartSpace xmlns:c="http://schemas.openxmlformats.org/drawingml/2006/chart" xmlns:a="http://schemas.openxmlformats.org/drawingml/2006/main" xmlns:r="http://schemas.openxmlformats.org/officeDocument/2006/relationships">
   <c:date1904 val="0"/>
   <c:roundedCorners val="1"/>
@@ -11101,8 +11101,37 @@
         </p:nvSpPr>
         <p:spPr>
           <a:xfrm>
-            <a:off x="914400" y="1417320"/>
-            <a:ext cx="73152" cy="868680"/>
+            <a:off x="786384" y="1956816"/>
+            <a:ext cx="32004" cy="3483864"/>
+          </a:xfrm>
+          <a:prstGeom prst="rect">
+            <a:avLst/>
+          </a:prstGeom>
+          <a:solidFill>
+            <a:srgbClr val="CBD5E1">
+              <a:alpha val="80000"/>
+            </a:srgbClr>
+          </a:solidFill>
+          <a:ln w="12700">
+            <a:solidFill>
+              <a:srgbClr val="CBD5E1">
+                <a:alpha val="0"/>
+              </a:srgbClr>
+            </a:solidFill>
+            <a:prstDash val="solid"/>
+          </a:ln>
+        </p:spPr>
+      </p:sp>
+      <p:sp>
+        <p:nvSpPr>
+          <p:cNvPr id="6" name="Shape 4"/>
+          <p:cNvSpPr/>
+          <p:nvPr/>
+        </p:nvSpPr>
+        <p:spPr>
+          <a:xfrm>
+            <a:off x="914400" y="1865376"/>
+            <a:ext cx="73152" cy="1024128"/>
           </a:xfrm>
           <a:prstGeom prst="rect">
             <a:avLst/>
@@ -11122,14 +11151,14 @@
       </p:sp>
       <p:sp>
         <p:nvSpPr>
-          <p:cNvPr id="6" name="Shape 4"/>
-          <p:cNvSpPr/>
-          <p:nvPr/>
-        </p:nvSpPr>
-        <p:spPr>
-          <a:xfrm>
-            <a:off x="914400" y="2560320"/>
-            <a:ext cx="73152" cy="868680"/>
+          <p:cNvPr id="7" name="Shape 5"/>
+          <p:cNvSpPr/>
+          <p:nvPr/>
+        </p:nvSpPr>
+        <p:spPr>
+          <a:xfrm>
+            <a:off x="914400" y="3191256"/>
+            <a:ext cx="73152" cy="1024128"/>
           </a:xfrm>
           <a:prstGeom prst="rect">
             <a:avLst/>
@@ -11149,14 +11178,14 @@
       </p:sp>
       <p:sp>
         <p:nvSpPr>
-          <p:cNvPr id="7" name="Shape 5"/>
-          <p:cNvSpPr/>
-          <p:nvPr/>
-        </p:nvSpPr>
-        <p:spPr>
-          <a:xfrm>
-            <a:off x="914400" y="3703320"/>
-            <a:ext cx="73152" cy="868680"/>
+          <p:cNvPr id="8" name="Shape 6"/>
+          <p:cNvSpPr/>
+          <p:nvPr/>
+        </p:nvSpPr>
+        <p:spPr>
+          <a:xfrm>
+            <a:off x="914400" y="4507992"/>
+            <a:ext cx="73152" cy="1024128"/>
           </a:xfrm>
           <a:prstGeom prst="rect">
             <a:avLst/>
@@ -11176,18 +11205,18 @@
       </p:sp>
       <p:sp>
         <p:nvSpPr>
-          <p:cNvPr id="8" name="Shape 6"/>
-          <p:cNvSpPr/>
-          <p:nvPr/>
-        </p:nvSpPr>
-        <p:spPr>
-          <a:xfrm>
-            <a:off x="955548" y="1467612"/>
-            <a:ext cx="10241280" cy="868680"/>
+          <p:cNvPr id="9" name="Shape 7"/>
+          <p:cNvSpPr/>
+          <p:nvPr/>
+        </p:nvSpPr>
+        <p:spPr>
+          <a:xfrm>
+            <a:off x="955548" y="1915668"/>
+            <a:ext cx="10241280" cy="1024128"/>
           </a:xfrm>
           <a:prstGeom prst="roundRect">
             <a:avLst>
-              <a:gd name="adj" fmla="val 6316"/>
+              <a:gd name="adj" fmla="val 5357"/>
             </a:avLst>
           </a:prstGeom>
           <a:solidFill>
@@ -11214,18 +11243,18 @@
       </p:sp>
       <p:sp>
         <p:nvSpPr>
-          <p:cNvPr id="9" name="Shape 7"/>
-          <p:cNvSpPr/>
-          <p:nvPr/>
-        </p:nvSpPr>
-        <p:spPr>
-          <a:xfrm>
-            <a:off x="882396" y="1385316"/>
-            <a:ext cx="10241280" cy="868680"/>
+          <p:cNvPr id="10" name="Shape 8"/>
+          <p:cNvSpPr/>
+          <p:nvPr/>
+        </p:nvSpPr>
+        <p:spPr>
+          <a:xfrm>
+            <a:off x="882396" y="1833372"/>
+            <a:ext cx="10241280" cy="1024128"/>
           </a:xfrm>
           <a:prstGeom prst="roundRect">
             <a:avLst>
-              <a:gd name="adj" fmla="val 6316"/>
+              <a:gd name="adj" fmla="val 5357"/>
             </a:avLst>
           </a:prstGeom>
           <a:solidFill>
@@ -11252,18 +11281,18 @@
       </p:sp>
       <p:sp>
         <p:nvSpPr>
-          <p:cNvPr id="10" name="Shape 8"/>
-          <p:cNvSpPr/>
-          <p:nvPr/>
-        </p:nvSpPr>
-        <p:spPr>
-          <a:xfrm>
-            <a:off x="914400" y="1417320"/>
-            <a:ext cx="10241280" cy="868680"/>
+          <p:cNvPr id="11" name="Shape 9"/>
+          <p:cNvSpPr/>
+          <p:nvPr/>
+        </p:nvSpPr>
+        <p:spPr>
+          <a:xfrm>
+            <a:off x="914400" y="1865376"/>
+            <a:ext cx="10241280" cy="1024128"/>
           </a:xfrm>
           <a:prstGeom prst="roundRect">
             <a:avLst>
-              <a:gd name="adj" fmla="val 6316"/>
+              <a:gd name="adj" fmla="val 5357"/>
             </a:avLst>
           </a:prstGeom>
           <a:solidFill>
@@ -11283,7 +11312,7 @@
       </p:sp>
       <p:pic>
         <p:nvPicPr>
-          <p:cNvPr id="11" name="Image 0" descr="preencoded.png">    </p:cNvPr>
+          <p:cNvPr id="12" name="Image 0" descr="preencoded.png">    </p:cNvPr>
           <p:cNvPicPr>
             <a:picLocks noChangeAspect="1"/>
           </p:cNvPicPr>
@@ -11303,8 +11332,8 @@
         </p:blipFill>
         <p:spPr>
           <a:xfrm>
-            <a:off x="914400" y="1417320"/>
-            <a:ext cx="10241280" cy="868680"/>
+            <a:off x="914400" y="1865376"/>
+            <a:ext cx="10241280" cy="1024128"/>
           </a:xfrm>
           <a:prstGeom prst="rect">
             <a:avLst/>
@@ -11313,18 +11342,18 @@
       </p:pic>
       <p:sp>
         <p:nvSpPr>
-          <p:cNvPr id="12" name="Shape 9"/>
-          <p:cNvSpPr/>
-          <p:nvPr/>
-        </p:nvSpPr>
-        <p:spPr>
-          <a:xfrm>
-            <a:off x="955548" y="2610612"/>
-            <a:ext cx="10241280" cy="868680"/>
+          <p:cNvPr id="13" name="Shape 10"/>
+          <p:cNvSpPr/>
+          <p:nvPr/>
+        </p:nvSpPr>
+        <p:spPr>
+          <a:xfrm>
+            <a:off x="955548" y="3241548"/>
+            <a:ext cx="10241280" cy="1024128"/>
           </a:xfrm>
           <a:prstGeom prst="roundRect">
             <a:avLst>
-              <a:gd name="adj" fmla="val 6316"/>
+              <a:gd name="adj" fmla="val 5357"/>
             </a:avLst>
           </a:prstGeom>
           <a:solidFill>
@@ -11351,18 +11380,18 @@
       </p:sp>
       <p:sp>
         <p:nvSpPr>
-          <p:cNvPr id="13" name="Shape 10"/>
-          <p:cNvSpPr/>
-          <p:nvPr/>
-        </p:nvSpPr>
-        <p:spPr>
-          <a:xfrm>
-            <a:off x="882396" y="2528316"/>
-            <a:ext cx="10241280" cy="868680"/>
+          <p:cNvPr id="14" name="Shape 11"/>
+          <p:cNvSpPr/>
+          <p:nvPr/>
+        </p:nvSpPr>
+        <p:spPr>
+          <a:xfrm>
+            <a:off x="882396" y="3159252"/>
+            <a:ext cx="10241280" cy="1024128"/>
           </a:xfrm>
           <a:prstGeom prst="roundRect">
             <a:avLst>
-              <a:gd name="adj" fmla="val 6316"/>
+              <a:gd name="adj" fmla="val 5357"/>
             </a:avLst>
           </a:prstGeom>
           <a:solidFill>
@@ -11389,18 +11418,18 @@
       </p:sp>
       <p:sp>
         <p:nvSpPr>
-          <p:cNvPr id="14" name="Shape 11"/>
-          <p:cNvSpPr/>
-          <p:nvPr/>
-        </p:nvSpPr>
-        <p:spPr>
-          <a:xfrm>
-            <a:off x="914400" y="2560320"/>
-            <a:ext cx="10241280" cy="868680"/>
+          <p:cNvPr id="15" name="Shape 12"/>
+          <p:cNvSpPr/>
+          <p:nvPr/>
+        </p:nvSpPr>
+        <p:spPr>
+          <a:xfrm>
+            <a:off x="914400" y="3191256"/>
+            <a:ext cx="10241280" cy="1024128"/>
           </a:xfrm>
           <a:prstGeom prst="roundRect">
             <a:avLst>
-              <a:gd name="adj" fmla="val 6316"/>
+              <a:gd name="adj" fmla="val 5357"/>
             </a:avLst>
           </a:prstGeom>
           <a:solidFill>
@@ -11420,7 +11449,7 @@
       </p:sp>
       <p:pic>
         <p:nvPicPr>
-          <p:cNvPr id="15" name="Image 1" descr="preencoded.png">    </p:cNvPr>
+          <p:cNvPr id="16" name="Image 1" descr="preencoded.png">    </p:cNvPr>
           <p:cNvPicPr>
             <a:picLocks noChangeAspect="1"/>
           </p:cNvPicPr>
@@ -11440,8 +11469,8 @@
         </p:blipFill>
         <p:spPr>
           <a:xfrm>
-            <a:off x="914400" y="2560320"/>
-            <a:ext cx="10241280" cy="868680"/>
+            <a:off x="914400" y="3191256"/>
+            <a:ext cx="10241280" cy="1024128"/>
           </a:xfrm>
           <a:prstGeom prst="rect">
             <a:avLst/>
@@ -11450,18 +11479,18 @@
       </p:pic>
       <p:sp>
         <p:nvSpPr>
-          <p:cNvPr id="16" name="Shape 12"/>
-          <p:cNvSpPr/>
-          <p:nvPr/>
-        </p:nvSpPr>
-        <p:spPr>
-          <a:xfrm>
-            <a:off x="955548" y="3753612"/>
-            <a:ext cx="10241280" cy="868680"/>
+          <p:cNvPr id="17" name="Shape 13"/>
+          <p:cNvSpPr/>
+          <p:nvPr/>
+        </p:nvSpPr>
+        <p:spPr>
+          <a:xfrm>
+            <a:off x="955548" y="4558284"/>
+            <a:ext cx="10241280" cy="1024128"/>
           </a:xfrm>
           <a:prstGeom prst="roundRect">
             <a:avLst>
-              <a:gd name="adj" fmla="val 6316"/>
+              <a:gd name="adj" fmla="val 5357"/>
             </a:avLst>
           </a:prstGeom>
           <a:solidFill>
@@ -11488,18 +11517,18 @@
       </p:sp>
       <p:sp>
         <p:nvSpPr>
-          <p:cNvPr id="17" name="Shape 13"/>
-          <p:cNvSpPr/>
-          <p:nvPr/>
-        </p:nvSpPr>
-        <p:spPr>
-          <a:xfrm>
-            <a:off x="882396" y="3671316"/>
-            <a:ext cx="10241280" cy="868680"/>
+          <p:cNvPr id="18" name="Shape 14"/>
+          <p:cNvSpPr/>
+          <p:nvPr/>
+        </p:nvSpPr>
+        <p:spPr>
+          <a:xfrm>
+            <a:off x="882396" y="4475988"/>
+            <a:ext cx="10241280" cy="1024128"/>
           </a:xfrm>
           <a:prstGeom prst="roundRect">
             <a:avLst>
-              <a:gd name="adj" fmla="val 6316"/>
+              <a:gd name="adj" fmla="val 5357"/>
             </a:avLst>
           </a:prstGeom>
           <a:solidFill>
@@ -11526,18 +11555,18 @@
       </p:sp>
       <p:sp>
         <p:nvSpPr>
-          <p:cNvPr id="18" name="Shape 14"/>
-          <p:cNvSpPr/>
-          <p:nvPr/>
-        </p:nvSpPr>
-        <p:spPr>
-          <a:xfrm>
-            <a:off x="914400" y="3703320"/>
-            <a:ext cx="10241280" cy="868680"/>
+          <p:cNvPr id="19" name="Shape 15"/>
+          <p:cNvSpPr/>
+          <p:nvPr/>
+        </p:nvSpPr>
+        <p:spPr>
+          <a:xfrm>
+            <a:off x="914400" y="4507992"/>
+            <a:ext cx="10241280" cy="1024128"/>
           </a:xfrm>
           <a:prstGeom prst="roundRect">
             <a:avLst>
-              <a:gd name="adj" fmla="val 6316"/>
+              <a:gd name="adj" fmla="val 5357"/>
             </a:avLst>
           </a:prstGeom>
           <a:solidFill>
@@ -11557,7 +11586,7 @@
       </p:sp>
       <p:pic>
         <p:nvPicPr>
-          <p:cNvPr id="19" name="Image 2" descr="preencoded.png">    </p:cNvPr>
+          <p:cNvPr id="20" name="Image 2" descr="preencoded.png">    </p:cNvPr>
           <p:cNvPicPr>
             <a:picLocks noChangeAspect="1"/>
           </p:cNvPicPr>
@@ -11577,8 +11606,8 @@
         </p:blipFill>
         <p:spPr>
           <a:xfrm>
-            <a:off x="914400" y="3703320"/>
-            <a:ext cx="10241280" cy="868680"/>
+            <a:off x="914400" y="4507992"/>
+            <a:ext cx="10241280" cy="1024128"/>
           </a:xfrm>
           <a:prstGeom prst="rect">
             <a:avLst/>
@@ -11587,7 +11616,7 @@
       </p:pic>
       <p:sp>
         <p:nvSpPr>
-          <p:cNvPr id="20" name="Text 15"/>
+          <p:cNvPr id="21" name="Text 16"/>
           <p:cNvSpPr txBox="1"/>
           <p:nvPr/>
         </p:nvSpPr>
@@ -11629,18 +11658,18 @@
       </p:sp>
       <p:sp>
         <p:nvSpPr>
-          <p:cNvPr id="21" name="Shape 16"/>
-          <p:cNvSpPr/>
-          <p:nvPr/>
-        </p:nvSpPr>
-        <p:spPr>
-          <a:xfrm>
-            <a:off x="1097280" y="1623060"/>
-            <a:ext cx="457200" cy="457200"/>
+          <p:cNvPr id="22" name="Shape 17"/>
+          <p:cNvSpPr/>
+          <p:nvPr/>
+        </p:nvSpPr>
+        <p:spPr>
+          <a:xfrm>
+            <a:off x="1097280" y="2140428"/>
+            <a:ext cx="474025" cy="474025"/>
           </a:xfrm>
           <a:prstGeom prst="roundRect">
             <a:avLst>
-              <a:gd name="adj" fmla="val 8000"/>
+              <a:gd name="adj" fmla="val 7716"/>
             </a:avLst>
           </a:prstGeom>
           <a:solidFill>
@@ -11656,7 +11685,7 @@
       </p:sp>
       <p:pic>
         <p:nvPicPr>
-          <p:cNvPr id="22" name="Image 3" descr="flow icon from tabler-icons (MIT)">    </p:cNvPr>
+          <p:cNvPr id="23" name="Image 3" descr="flow icon from tabler-icons (MIT)">    </p:cNvPr>
           <p:cNvPicPr>
             <a:picLocks noChangeAspect="1"/>
           </p:cNvPicPr>
@@ -11676,8 +11705,8 @@
         </p:blipFill>
         <p:spPr>
           <a:xfrm>
-            <a:off x="1170432" y="1696212"/>
-            <a:ext cx="310896" cy="310896"/>
+            <a:off x="1170432" y="2213580"/>
+            <a:ext cx="327721" cy="327721"/>
           </a:xfrm>
           <a:prstGeom prst="rect">
             <a:avLst/>
@@ -11686,14 +11715,14 @@
       </p:pic>
       <p:sp>
         <p:nvSpPr>
-          <p:cNvPr id="23" name="Text 17"/>
+          <p:cNvPr id="24" name="Text 18"/>
           <p:cNvSpPr txBox="1"/>
           <p:nvPr/>
         </p:nvSpPr>
         <p:spPr>
           <a:xfrm>
-            <a:off x="1682496" y="1508760"/>
-            <a:ext cx="9272016" cy="685800"/>
+            <a:off x="1699321" y="1957548"/>
+            <a:ext cx="9255191" cy="839785"/>
           </a:xfrm>
           <a:prstGeom prst="rect">
             <a:avLst/>
@@ -11745,18 +11774,18 @@
       </p:sp>
       <p:sp>
         <p:nvSpPr>
-          <p:cNvPr id="24" name="Shape 18"/>
-          <p:cNvSpPr/>
-          <p:nvPr/>
-        </p:nvSpPr>
-        <p:spPr>
-          <a:xfrm>
-            <a:off x="1097280" y="2766060"/>
-            <a:ext cx="457200" cy="457200"/>
+          <p:cNvPr id="25" name="Shape 19"/>
+          <p:cNvSpPr/>
+          <p:nvPr/>
+        </p:nvSpPr>
+        <p:spPr>
+          <a:xfrm>
+            <a:off x="1097280" y="3466308"/>
+            <a:ext cx="474025" cy="474025"/>
           </a:xfrm>
           <a:prstGeom prst="roundRect">
             <a:avLst>
-              <a:gd name="adj" fmla="val 8000"/>
+              <a:gd name="adj" fmla="val 7716"/>
             </a:avLst>
           </a:prstGeom>
           <a:solidFill>
@@ -11772,7 +11801,7 @@
       </p:sp>
       <p:pic>
         <p:nvPicPr>
-          <p:cNvPr id="25" name="Image 4" descr="verified icon from tabler-icons (MIT)">    </p:cNvPr>
+          <p:cNvPr id="26" name="Image 4" descr="verified icon from tabler-icons (MIT)">    </p:cNvPr>
           <p:cNvPicPr>
             <a:picLocks noChangeAspect="1"/>
           </p:cNvPicPr>
@@ -11792,8 +11821,8 @@
         </p:blipFill>
         <p:spPr>
           <a:xfrm>
-            <a:off x="1170432" y="2839212"/>
-            <a:ext cx="310896" cy="310896"/>
+            <a:off x="1170432" y="3539460"/>
+            <a:ext cx="327721" cy="327721"/>
           </a:xfrm>
           <a:prstGeom prst="rect">
             <a:avLst/>
@@ -11802,14 +11831,14 @@
       </p:pic>
       <p:sp>
         <p:nvSpPr>
-          <p:cNvPr id="26" name="Text 19"/>
+          <p:cNvPr id="27" name="Text 20"/>
           <p:cNvSpPr txBox="1"/>
           <p:nvPr/>
         </p:nvSpPr>
         <p:spPr>
           <a:xfrm>
-            <a:off x="1682496" y="2651760"/>
-            <a:ext cx="9272016" cy="685800"/>
+            <a:off x="1699321" y="3283428"/>
+            <a:ext cx="9255191" cy="839785"/>
           </a:xfrm>
           <a:prstGeom prst="rect">
             <a:avLst/>
@@ -11861,18 +11890,18 @@
       </p:sp>
       <p:sp>
         <p:nvSpPr>
-          <p:cNvPr id="27" name="Shape 20"/>
-          <p:cNvSpPr/>
-          <p:nvPr/>
-        </p:nvSpPr>
-        <p:spPr>
-          <a:xfrm>
-            <a:off x="1097280" y="3909060"/>
-            <a:ext cx="457200" cy="457200"/>
+          <p:cNvPr id="28" name="Shape 21"/>
+          <p:cNvSpPr/>
+          <p:nvPr/>
+        </p:nvSpPr>
+        <p:spPr>
+          <a:xfrm>
+            <a:off x="1097280" y="4783044"/>
+            <a:ext cx="474025" cy="474025"/>
           </a:xfrm>
           <a:prstGeom prst="roundRect">
             <a:avLst>
-              <a:gd name="adj" fmla="val 8000"/>
+              <a:gd name="adj" fmla="val 7716"/>
             </a:avLst>
           </a:prstGeom>
           <a:solidFill>
@@ -11888,7 +11917,7 @@
       </p:sp>
       <p:pic>
         <p:nvPicPr>
-          <p:cNvPr id="28" name="Image 5" descr="spark icon from tabler-icons (MIT)">    </p:cNvPr>
+          <p:cNvPr id="29" name="Image 5" descr="spark icon from tabler-icons (MIT)">    </p:cNvPr>
           <p:cNvPicPr>
             <a:picLocks noChangeAspect="1"/>
           </p:cNvPicPr>
@@ -11908,8 +11937,8 @@
         </p:blipFill>
         <p:spPr>
           <a:xfrm>
-            <a:off x="1170432" y="3982212"/>
-            <a:ext cx="310896" cy="310896"/>
+            <a:off x="1170432" y="4856196"/>
+            <a:ext cx="327721" cy="327721"/>
           </a:xfrm>
           <a:prstGeom prst="rect">
             <a:avLst/>
@@ -11918,14 +11947,14 @@
       </p:pic>
       <p:sp>
         <p:nvSpPr>
-          <p:cNvPr id="29" name="Text 21"/>
+          <p:cNvPr id="30" name="Text 22"/>
           <p:cNvSpPr txBox="1"/>
           <p:nvPr/>
         </p:nvSpPr>
         <p:spPr>
           <a:xfrm>
-            <a:off x="1682496" y="3794760"/>
-            <a:ext cx="9272016" cy="685800"/>
+            <a:off x="1699321" y="4600164"/>
+            <a:ext cx="9255191" cy="839785"/>
           </a:xfrm>
           <a:prstGeom prst="rect">
             <a:avLst/>
@@ -12112,8 +12141,8 @@
         </p:nvSpPr>
         <p:spPr>
           <a:xfrm>
-            <a:off x="914400" y="1463040"/>
-            <a:ext cx="10241280" cy="73152"/>
+            <a:off x="822960" y="1188720"/>
+            <a:ext cx="10515600" cy="45720"/>
           </a:xfrm>
           <a:prstGeom prst="rect">
             <a:avLst/>
@@ -12133,7 +12162,387 @@
       </p:sp>
       <p:sp>
         <p:nvSpPr>
-          <p:cNvPr id="6" name="Text 4"/>
+          <p:cNvPr id="6" name="Shape 4"/>
+          <p:cNvSpPr/>
+          <p:nvPr/>
+        </p:nvSpPr>
+        <p:spPr>
+          <a:xfrm>
+            <a:off x="822960" y="6199632"/>
+            <a:ext cx="2011680" cy="45720"/>
+          </a:xfrm>
+          <a:prstGeom prst="rect">
+            <a:avLst/>
+          </a:prstGeom>
+          <a:solidFill>
+            <a:srgbClr val="CBD5E1"/>
+          </a:solidFill>
+          <a:ln w="12700">
+            <a:solidFill>
+              <a:srgbClr val="CBD5E1">
+                <a:alpha val="0"/>
+              </a:srgbClr>
+            </a:solidFill>
+            <a:prstDash val="solid"/>
+          </a:ln>
+        </p:spPr>
+      </p:sp>
+      <p:sp>
+        <p:nvSpPr>
+          <p:cNvPr id="7" name="Shape 5"/>
+          <p:cNvSpPr/>
+          <p:nvPr/>
+        </p:nvSpPr>
+        <p:spPr>
+          <a:xfrm>
+            <a:off x="6080760" y="1389888"/>
+            <a:ext cx="22860" cy="4663440"/>
+          </a:xfrm>
+          <a:prstGeom prst="rect">
+            <a:avLst/>
+          </a:prstGeom>
+          <a:solidFill>
+            <a:srgbClr val="D5DCE7">
+              <a:alpha val="90000"/>
+            </a:srgbClr>
+          </a:solidFill>
+          <a:ln w="12700">
+            <a:solidFill>
+              <a:srgbClr val="D5DCE7">
+                <a:alpha val="0"/>
+              </a:srgbClr>
+            </a:solidFill>
+            <a:prstDash val="solid"/>
+          </a:ln>
+        </p:spPr>
+      </p:sp>
+      <p:sp>
+        <p:nvSpPr>
+          <p:cNvPr id="8" name="Shape 6"/>
+          <p:cNvSpPr/>
+          <p:nvPr/>
+        </p:nvSpPr>
+        <p:spPr>
+          <a:xfrm>
+            <a:off x="822960" y="1389888"/>
+            <a:ext cx="73152" cy="658368"/>
+          </a:xfrm>
+          <a:prstGeom prst="rect">
+            <a:avLst/>
+          </a:prstGeom>
+          <a:solidFill>
+            <a:srgbClr val="4F6F8F"/>
+          </a:solidFill>
+          <a:ln w="12700">
+            <a:solidFill>
+              <a:srgbClr val="4F6F8F">
+                <a:alpha val="0"/>
+              </a:srgbClr>
+            </a:solidFill>
+            <a:prstDash val="solid"/>
+          </a:ln>
+        </p:spPr>
+      </p:sp>
+      <p:sp>
+        <p:nvSpPr>
+          <p:cNvPr id="9" name="Shape 7"/>
+          <p:cNvSpPr/>
+          <p:nvPr/>
+        </p:nvSpPr>
+        <p:spPr>
+          <a:xfrm>
+            <a:off x="822960" y="2194560"/>
+            <a:ext cx="73152" cy="658368"/>
+          </a:xfrm>
+          <a:prstGeom prst="rect">
+            <a:avLst/>
+          </a:prstGeom>
+          <a:solidFill>
+            <a:srgbClr val="CBD5E1"/>
+          </a:solidFill>
+          <a:ln w="12700">
+            <a:solidFill>
+              <a:srgbClr val="CBD5E1">
+                <a:alpha val="0"/>
+              </a:srgbClr>
+            </a:solidFill>
+            <a:prstDash val="solid"/>
+          </a:ln>
+        </p:spPr>
+      </p:sp>
+      <p:sp>
+        <p:nvSpPr>
+          <p:cNvPr id="10" name="Shape 8"/>
+          <p:cNvSpPr/>
+          <p:nvPr/>
+        </p:nvSpPr>
+        <p:spPr>
+          <a:xfrm>
+            <a:off x="822960" y="2990088"/>
+            <a:ext cx="73152" cy="658368"/>
+          </a:xfrm>
+          <a:prstGeom prst="rect">
+            <a:avLst/>
+          </a:prstGeom>
+          <a:solidFill>
+            <a:srgbClr val="4F6F8F"/>
+          </a:solidFill>
+          <a:ln w="12700">
+            <a:solidFill>
+              <a:srgbClr val="4F6F8F">
+                <a:alpha val="0"/>
+              </a:srgbClr>
+            </a:solidFill>
+            <a:prstDash val="solid"/>
+          </a:ln>
+        </p:spPr>
+      </p:sp>
+      <p:sp>
+        <p:nvSpPr>
+          <p:cNvPr id="11" name="Shape 9"/>
+          <p:cNvSpPr/>
+          <p:nvPr/>
+        </p:nvSpPr>
+        <p:spPr>
+          <a:xfrm>
+            <a:off x="822960" y="3794760"/>
+            <a:ext cx="73152" cy="658368"/>
+          </a:xfrm>
+          <a:prstGeom prst="rect">
+            <a:avLst/>
+          </a:prstGeom>
+          <a:solidFill>
+            <a:srgbClr val="CBD5E1"/>
+          </a:solidFill>
+          <a:ln w="12700">
+            <a:solidFill>
+              <a:srgbClr val="CBD5E1">
+                <a:alpha val="0"/>
+              </a:srgbClr>
+            </a:solidFill>
+            <a:prstDash val="solid"/>
+          </a:ln>
+        </p:spPr>
+      </p:sp>
+      <p:sp>
+        <p:nvSpPr>
+          <p:cNvPr id="12" name="Shape 10"/>
+          <p:cNvSpPr/>
+          <p:nvPr/>
+        </p:nvSpPr>
+        <p:spPr>
+          <a:xfrm>
+            <a:off x="822960" y="4599432"/>
+            <a:ext cx="73152" cy="658368"/>
+          </a:xfrm>
+          <a:prstGeom prst="rect">
+            <a:avLst/>
+          </a:prstGeom>
+          <a:solidFill>
+            <a:srgbClr val="4F6F8F"/>
+          </a:solidFill>
+          <a:ln w="12700">
+            <a:solidFill>
+              <a:srgbClr val="4F6F8F">
+                <a:alpha val="0"/>
+              </a:srgbClr>
+            </a:solidFill>
+            <a:prstDash val="solid"/>
+          </a:ln>
+        </p:spPr>
+      </p:sp>
+      <p:sp>
+        <p:nvSpPr>
+          <p:cNvPr id="13" name="Shape 11"/>
+          <p:cNvSpPr/>
+          <p:nvPr/>
+        </p:nvSpPr>
+        <p:spPr>
+          <a:xfrm>
+            <a:off x="822960" y="5394960"/>
+            <a:ext cx="73152" cy="658368"/>
+          </a:xfrm>
+          <a:prstGeom prst="rect">
+            <a:avLst/>
+          </a:prstGeom>
+          <a:solidFill>
+            <a:srgbClr val="CBD5E1"/>
+          </a:solidFill>
+          <a:ln w="12700">
+            <a:solidFill>
+              <a:srgbClr val="CBD5E1">
+                <a:alpha val="0"/>
+              </a:srgbClr>
+            </a:solidFill>
+            <a:prstDash val="solid"/>
+          </a:ln>
+        </p:spPr>
+      </p:sp>
+      <p:sp>
+        <p:nvSpPr>
+          <p:cNvPr id="14" name="Shape 12"/>
+          <p:cNvSpPr/>
+          <p:nvPr/>
+        </p:nvSpPr>
+        <p:spPr>
+          <a:xfrm>
+            <a:off x="6272784" y="1389888"/>
+            <a:ext cx="73152" cy="658368"/>
+          </a:xfrm>
+          <a:prstGeom prst="rect">
+            <a:avLst/>
+          </a:prstGeom>
+          <a:solidFill>
+            <a:srgbClr val="4F6F8F"/>
+          </a:solidFill>
+          <a:ln w="12700">
+            <a:solidFill>
+              <a:srgbClr val="4F6F8F">
+                <a:alpha val="0"/>
+              </a:srgbClr>
+            </a:solidFill>
+            <a:prstDash val="solid"/>
+          </a:ln>
+        </p:spPr>
+      </p:sp>
+      <p:sp>
+        <p:nvSpPr>
+          <p:cNvPr id="15" name="Shape 13"/>
+          <p:cNvSpPr/>
+          <p:nvPr/>
+        </p:nvSpPr>
+        <p:spPr>
+          <a:xfrm>
+            <a:off x="6272784" y="2194560"/>
+            <a:ext cx="73152" cy="658368"/>
+          </a:xfrm>
+          <a:prstGeom prst="rect">
+            <a:avLst/>
+          </a:prstGeom>
+          <a:solidFill>
+            <a:srgbClr val="CBD5E1"/>
+          </a:solidFill>
+          <a:ln w="12700">
+            <a:solidFill>
+              <a:srgbClr val="CBD5E1">
+                <a:alpha val="0"/>
+              </a:srgbClr>
+            </a:solidFill>
+            <a:prstDash val="solid"/>
+          </a:ln>
+        </p:spPr>
+      </p:sp>
+      <p:sp>
+        <p:nvSpPr>
+          <p:cNvPr id="16" name="Shape 14"/>
+          <p:cNvSpPr/>
+          <p:nvPr/>
+        </p:nvSpPr>
+        <p:spPr>
+          <a:xfrm>
+            <a:off x="6272784" y="2990088"/>
+            <a:ext cx="73152" cy="658368"/>
+          </a:xfrm>
+          <a:prstGeom prst="rect">
+            <a:avLst/>
+          </a:prstGeom>
+          <a:solidFill>
+            <a:srgbClr val="4F6F8F"/>
+          </a:solidFill>
+          <a:ln w="12700">
+            <a:solidFill>
+              <a:srgbClr val="4F6F8F">
+                <a:alpha val="0"/>
+              </a:srgbClr>
+            </a:solidFill>
+            <a:prstDash val="solid"/>
+          </a:ln>
+        </p:spPr>
+      </p:sp>
+      <p:sp>
+        <p:nvSpPr>
+          <p:cNvPr id="17" name="Shape 15"/>
+          <p:cNvSpPr/>
+          <p:nvPr/>
+        </p:nvSpPr>
+        <p:spPr>
+          <a:xfrm>
+            <a:off x="6272784" y="3794760"/>
+            <a:ext cx="73152" cy="658368"/>
+          </a:xfrm>
+          <a:prstGeom prst="rect">
+            <a:avLst/>
+          </a:prstGeom>
+          <a:solidFill>
+            <a:srgbClr val="CBD5E1"/>
+          </a:solidFill>
+          <a:ln w="12700">
+            <a:solidFill>
+              <a:srgbClr val="CBD5E1">
+                <a:alpha val="0"/>
+              </a:srgbClr>
+            </a:solidFill>
+            <a:prstDash val="solid"/>
+          </a:ln>
+        </p:spPr>
+      </p:sp>
+      <p:sp>
+        <p:nvSpPr>
+          <p:cNvPr id="18" name="Shape 16"/>
+          <p:cNvSpPr/>
+          <p:nvPr/>
+        </p:nvSpPr>
+        <p:spPr>
+          <a:xfrm>
+            <a:off x="6272784" y="4599432"/>
+            <a:ext cx="73152" cy="658368"/>
+          </a:xfrm>
+          <a:prstGeom prst="rect">
+            <a:avLst/>
+          </a:prstGeom>
+          <a:solidFill>
+            <a:srgbClr val="4F6F8F"/>
+          </a:solidFill>
+          <a:ln w="12700">
+            <a:solidFill>
+              <a:srgbClr val="4F6F8F">
+                <a:alpha val="0"/>
+              </a:srgbClr>
+            </a:solidFill>
+            <a:prstDash val="solid"/>
+          </a:ln>
+        </p:spPr>
+      </p:sp>
+      <p:sp>
+        <p:nvSpPr>
+          <p:cNvPr id="19" name="Shape 17"/>
+          <p:cNvSpPr/>
+          <p:nvPr/>
+        </p:nvSpPr>
+        <p:spPr>
+          <a:xfrm>
+            <a:off x="6272784" y="5394960"/>
+            <a:ext cx="73152" cy="658368"/>
+          </a:xfrm>
+          <a:prstGeom prst="rect">
+            <a:avLst/>
+          </a:prstGeom>
+          <a:solidFill>
+            <a:srgbClr val="CBD5E1"/>
+          </a:solidFill>
+          <a:ln w="12700">
+            <a:solidFill>
+              <a:srgbClr val="CBD5E1">
+                <a:alpha val="0"/>
+              </a:srgbClr>
+            </a:solidFill>
+            <a:prstDash val="solid"/>
+          </a:ln>
+        </p:spPr>
+      </p:sp>
+      <p:sp>
+        <p:nvSpPr>
+          <p:cNvPr id="20" name="Text 18"/>
           <p:cNvSpPr txBox="1"/>
           <p:nvPr/>
         </p:nvSpPr>
@@ -12175,14 +12584,14 @@
       </p:sp>
       <p:sp>
         <p:nvSpPr>
-          <p:cNvPr id="7" name="Text 5"/>
+          <p:cNvPr id="21" name="Text 19"/>
           <p:cNvSpPr txBox="1"/>
           <p:nvPr/>
         </p:nvSpPr>
         <p:spPr>
           <a:xfrm>
-            <a:off x="987552" y="1572768"/>
-            <a:ext cx="10094976" cy="355092"/>
+            <a:off x="1042416" y="1481328"/>
+            <a:ext cx="4645152" cy="475488"/>
           </a:xfrm>
           <a:prstGeom prst="rect">
             <a:avLst/>
@@ -12194,14 +12603,14 @@
           <a:bodyPr wrap="square" lIns="0" tIns="25400" rIns="25400" bIns="0" rtlCol="0" anchor="ctr"/>
           <a:lstStyle/>
           <a:p>
-            <a:pPr algn="l" indent="0" marL="0">
+            <a:pPr algn="ctr" indent="0" marL="0">
               <a:lnSpc>
                 <a:spcPct val="120000"/>
               </a:lnSpc>
               <a:buNone/>
             </a:pPr>
             <a:r>
-              <a:rPr lang="en-US" sz="2200" dirty="0">
+              <a:rPr lang="en-US" sz="1800" dirty="0">
                 <a:solidFill>
                   <a:srgbClr val="243041"/>
                 </a:solidFill>
@@ -12209,22 +12618,22 @@
                 <a:ea typeface="Pretendard" pitchFamily="34" charset="-122"/>
                 <a:cs typeface="Pretendard" pitchFamily="34" charset="-120"/>
               </a:rPr>
-              <a:t>Preview Purpose</a:t>
+              <a:t>01  Preview Purpose</a:t>
             </a:r>
-            <a:endParaRPr lang="en-US" sz="2200" dirty="0"/>
+            <a:endParaRPr lang="en-US" sz="1800" dirty="0"/>
           </a:p>
         </p:txBody>
       </p:sp>
       <p:sp>
         <p:nvSpPr>
-          <p:cNvPr id="8" name="Text 6"/>
+          <p:cNvPr id="22" name="Text 20"/>
           <p:cNvSpPr txBox="1"/>
           <p:nvPr/>
         </p:nvSpPr>
         <p:spPr>
           <a:xfrm>
-            <a:off x="987552" y="1927860"/>
-            <a:ext cx="10094976" cy="355092"/>
+            <a:off x="1042416" y="2286000"/>
+            <a:ext cx="4645152" cy="475488"/>
           </a:xfrm>
           <a:prstGeom prst="rect">
             <a:avLst/>
@@ -12236,14 +12645,14 @@
           <a:bodyPr wrap="square" lIns="0" tIns="25400" rIns="25400" bIns="0" rtlCol="0" anchor="ctr"/>
           <a:lstStyle/>
           <a:p>
-            <a:pPr algn="l" indent="0" marL="0">
+            <a:pPr algn="ctr" indent="0" marL="0">
               <a:lnSpc>
                 <a:spcPct val="120000"/>
               </a:lnSpc>
               <a:buNone/>
             </a:pPr>
             <a:r>
-              <a:rPr lang="en-US" sz="2200" dirty="0">
+              <a:rPr lang="en-US" sz="1800" dirty="0">
                 <a:solidFill>
                   <a:srgbClr val="243041"/>
                 </a:solidFill>
@@ -12251,22 +12660,22 @@
                 <a:ea typeface="Pretendard" pitchFamily="34" charset="-122"/>
                 <a:cs typeface="Pretendard" pitchFamily="34" charset="-120"/>
               </a:rPr>
-              <a:t>Composition Contract</a:t>
+              <a:t>02  Composition Contract</a:t>
             </a:r>
-            <a:endParaRPr lang="en-US" sz="2200" dirty="0"/>
+            <a:endParaRPr lang="en-US" sz="1800" dirty="0"/>
           </a:p>
         </p:txBody>
       </p:sp>
       <p:sp>
         <p:nvSpPr>
-          <p:cNvPr id="9" name="Text 7"/>
+          <p:cNvPr id="23" name="Text 21"/>
           <p:cNvSpPr txBox="1"/>
           <p:nvPr/>
         </p:nvSpPr>
         <p:spPr>
           <a:xfrm>
-            <a:off x="987552" y="2282952"/>
-            <a:ext cx="10094976" cy="355092"/>
+            <a:off x="1042416" y="3081528"/>
+            <a:ext cx="4645152" cy="475488"/>
           </a:xfrm>
           <a:prstGeom prst="rect">
             <a:avLst/>
@@ -12278,14 +12687,14 @@
           <a:bodyPr wrap="square" lIns="0" tIns="25400" rIns="25400" bIns="0" rtlCol="0" anchor="ctr"/>
           <a:lstStyle/>
           <a:p>
-            <a:pPr algn="l" indent="0" marL="0">
+            <a:pPr algn="ctr" indent="0" marL="0">
               <a:lnSpc>
                 <a:spcPct val="120000"/>
               </a:lnSpc>
               <a:buNone/>
             </a:pPr>
             <a:r>
-              <a:rPr lang="en-US" sz="2200" dirty="0">
+              <a:rPr lang="en-US" sz="1800" dirty="0">
                 <a:solidFill>
                   <a:srgbClr val="243041"/>
                 </a:solidFill>
@@ -12293,22 +12702,22 @@
                 <a:ea typeface="Pretendard" pitchFamily="34" charset="-122"/>
                 <a:cs typeface="Pretendard" pitchFamily="34" charset="-120"/>
               </a:rPr>
-              <a:t>Style Families</a:t>
+              <a:t>03  Style Families</a:t>
             </a:r>
-            <a:endParaRPr lang="en-US" sz="2200" dirty="0"/>
+            <a:endParaRPr lang="en-US" sz="1800" dirty="0"/>
           </a:p>
         </p:txBody>
       </p:sp>
       <p:sp>
         <p:nvSpPr>
-          <p:cNvPr id="10" name="Text 8"/>
+          <p:cNvPr id="24" name="Text 22"/>
           <p:cNvSpPr txBox="1"/>
           <p:nvPr/>
         </p:nvSpPr>
         <p:spPr>
           <a:xfrm>
-            <a:off x="987552" y="2638044"/>
-            <a:ext cx="10094976" cy="355092"/>
+            <a:off x="1042416" y="3886200"/>
+            <a:ext cx="4645152" cy="475488"/>
           </a:xfrm>
           <a:prstGeom prst="rect">
             <a:avLst/>
@@ -12320,14 +12729,14 @@
           <a:bodyPr wrap="square" lIns="0" tIns="25400" rIns="25400" bIns="0" rtlCol="0" anchor="ctr"/>
           <a:lstStyle/>
           <a:p>
-            <a:pPr algn="l" indent="0" marL="0">
+            <a:pPr algn="ctr" indent="0" marL="0">
               <a:lnSpc>
                 <a:spcPct val="120000"/>
               </a:lnSpc>
               <a:buNone/>
             </a:pPr>
             <a:r>
-              <a:rPr lang="en-US" sz="2200" dirty="0">
+              <a:rPr lang="en-US" sz="1800" dirty="0">
                 <a:solidFill>
                   <a:srgbClr val="243041"/>
                 </a:solidFill>
@@ -12335,22 +12744,22 @@
                 <a:ea typeface="Pretendard" pitchFamily="34" charset="-122"/>
                 <a:cs typeface="Pretendard" pitchFamily="34" charset="-120"/>
               </a:rPr>
-              <a:t>Semantic Blocks</a:t>
+              <a:t>04  Semantic Blocks</a:t>
             </a:r>
-            <a:endParaRPr lang="en-US" sz="2200" dirty="0"/>
+            <a:endParaRPr lang="en-US" sz="1800" dirty="0"/>
           </a:p>
         </p:txBody>
       </p:sp>
       <p:sp>
         <p:nvSpPr>
-          <p:cNvPr id="11" name="Text 9"/>
+          <p:cNvPr id="25" name="Text 23"/>
           <p:cNvSpPr txBox="1"/>
           <p:nvPr/>
         </p:nvSpPr>
         <p:spPr>
           <a:xfrm>
-            <a:off x="987552" y="2993136"/>
-            <a:ext cx="10094976" cy="355092"/>
+            <a:off x="1042416" y="4690872"/>
+            <a:ext cx="4645152" cy="475488"/>
           </a:xfrm>
           <a:prstGeom prst="rect">
             <a:avLst/>
@@ -12362,14 +12771,14 @@
           <a:bodyPr wrap="square" lIns="0" tIns="25400" rIns="25400" bIns="0" rtlCol="0" anchor="ctr"/>
           <a:lstStyle/>
           <a:p>
-            <a:pPr algn="l" indent="0" marL="0">
+            <a:pPr algn="ctr" indent="0" marL="0">
               <a:lnSpc>
                 <a:spcPct val="120000"/>
               </a:lnSpc>
               <a:buNone/>
             </a:pPr>
             <a:r>
-              <a:rPr lang="en-US" sz="2200" dirty="0">
+              <a:rPr lang="en-US" sz="1800" dirty="0">
                 <a:solidFill>
                   <a:srgbClr val="243041"/>
                 </a:solidFill>
@@ -12377,22 +12786,22 @@
                 <a:ea typeface="Pretendard" pitchFamily="34" charset="-122"/>
                 <a:cs typeface="Pretendard" pitchFamily="34" charset="-120"/>
               </a:rPr>
-              <a:t>Pipeline Diagram</a:t>
+              <a:t>05  Pipeline Diagram</a:t>
             </a:r>
-            <a:endParaRPr lang="en-US" sz="2200" dirty="0"/>
+            <a:endParaRPr lang="en-US" sz="1800" dirty="0"/>
           </a:p>
         </p:txBody>
       </p:sp>
       <p:sp>
         <p:nvSpPr>
-          <p:cNvPr id="12" name="Text 10"/>
+          <p:cNvPr id="26" name="Text 24"/>
           <p:cNvSpPr txBox="1"/>
           <p:nvPr/>
         </p:nvSpPr>
         <p:spPr>
           <a:xfrm>
-            <a:off x="987552" y="3348228"/>
-            <a:ext cx="10094976" cy="355092"/>
+            <a:off x="1042416" y="5486400"/>
+            <a:ext cx="4645152" cy="475488"/>
           </a:xfrm>
           <a:prstGeom prst="rect">
             <a:avLst/>
@@ -12404,14 +12813,14 @@
           <a:bodyPr wrap="square" lIns="0" tIns="25400" rIns="25400" bIns="0" rtlCol="0" anchor="ctr"/>
           <a:lstStyle/>
           <a:p>
-            <a:pPr algn="l" indent="0" marL="0">
+            <a:pPr algn="ctr" indent="0" marL="0">
               <a:lnSpc>
                 <a:spcPct val="120000"/>
               </a:lnSpc>
               <a:buNone/>
             </a:pPr>
             <a:r>
-              <a:rPr lang="en-US" sz="2200" dirty="0">
+              <a:rPr lang="en-US" sz="1800" dirty="0">
                 <a:solidFill>
                   <a:srgbClr val="243041"/>
                 </a:solidFill>
@@ -12419,22 +12828,22 @@
                 <a:ea typeface="Pretendard" pitchFamily="34" charset="-122"/>
                 <a:cs typeface="Pretendard" pitchFamily="34" charset="-120"/>
               </a:rPr>
-              <a:t>Table Coherence</a:t>
+              <a:t>06  Table Coherence</a:t>
             </a:r>
-            <a:endParaRPr lang="en-US" sz="2200" dirty="0"/>
+            <a:endParaRPr lang="en-US" sz="1800" dirty="0"/>
           </a:p>
         </p:txBody>
       </p:sp>
       <p:sp>
         <p:nvSpPr>
-          <p:cNvPr id="13" name="Text 11"/>
+          <p:cNvPr id="27" name="Text 25"/>
           <p:cNvSpPr txBox="1"/>
           <p:nvPr/>
         </p:nvSpPr>
         <p:spPr>
           <a:xfrm>
-            <a:off x="987552" y="3703320"/>
-            <a:ext cx="10094976" cy="355092"/>
+            <a:off x="6492240" y="1481328"/>
+            <a:ext cx="4645152" cy="475488"/>
           </a:xfrm>
           <a:prstGeom prst="rect">
             <a:avLst/>
@@ -12446,14 +12855,14 @@
           <a:bodyPr wrap="square" lIns="0" tIns="25400" rIns="25400" bIns="0" rtlCol="0" anchor="ctr"/>
           <a:lstStyle/>
           <a:p>
-            <a:pPr algn="l" indent="0" marL="0">
+            <a:pPr algn="ctr" indent="0" marL="0">
               <a:lnSpc>
                 <a:spcPct val="120000"/>
               </a:lnSpc>
               <a:buNone/>
             </a:pPr>
             <a:r>
-              <a:rPr lang="en-US" sz="2200" dirty="0">
+              <a:rPr lang="en-US" sz="1800" dirty="0">
                 <a:solidFill>
                   <a:srgbClr val="243041"/>
                 </a:solidFill>
@@ -12461,22 +12870,22 @@
                 <a:ea typeface="Pretendard" pitchFamily="34" charset="-122"/>
                 <a:cs typeface="Pretendard" pitchFamily="34" charset="-120"/>
               </a:rPr>
-              <a:t>Chart and Table Pair</a:t>
+              <a:t>07  Chart and Table Pair</a:t>
             </a:r>
-            <a:endParaRPr lang="en-US" sz="2200" dirty="0"/>
+            <a:endParaRPr lang="en-US" sz="1800" dirty="0"/>
           </a:p>
         </p:txBody>
       </p:sp>
       <p:sp>
         <p:nvSpPr>
-          <p:cNvPr id="14" name="Text 12"/>
+          <p:cNvPr id="28" name="Text 26"/>
           <p:cNvSpPr txBox="1"/>
           <p:nvPr/>
         </p:nvSpPr>
         <p:spPr>
           <a:xfrm>
-            <a:off x="987552" y="4058412"/>
-            <a:ext cx="10094976" cy="355092"/>
+            <a:off x="6492240" y="2286000"/>
+            <a:ext cx="4645152" cy="475488"/>
           </a:xfrm>
           <a:prstGeom prst="rect">
             <a:avLst/>
@@ -12488,14 +12897,14 @@
           <a:bodyPr wrap="square" lIns="0" tIns="25400" rIns="25400" bIns="0" rtlCol="0" anchor="ctr"/>
           <a:lstStyle/>
           <a:p>
-            <a:pPr algn="l" indent="0" marL="0">
+            <a:pPr algn="ctr" indent="0" marL="0">
               <a:lnSpc>
                 <a:spcPct val="120000"/>
               </a:lnSpc>
               <a:buNone/>
             </a:pPr>
             <a:r>
-              <a:rPr lang="en-US" sz="2200" dirty="0">
+              <a:rPr lang="en-US" sz="1800" dirty="0">
                 <a:solidFill>
                   <a:srgbClr val="243041"/>
                 </a:solidFill>
@@ -12503,22 +12912,22 @@
                 <a:ea typeface="Pretendard" pitchFamily="34" charset="-122"/>
                 <a:cs typeface="Pretendard" pitchFamily="34" charset="-120"/>
               </a:rPr>
-              <a:t>Editable Proof Objects</a:t>
+              <a:t>08  Editable Proof Objects</a:t>
             </a:r>
-            <a:endParaRPr lang="en-US" sz="2200" dirty="0"/>
+            <a:endParaRPr lang="en-US" sz="1800" dirty="0"/>
           </a:p>
         </p:txBody>
       </p:sp>
       <p:sp>
         <p:nvSpPr>
-          <p:cNvPr id="15" name="Text 13"/>
+          <p:cNvPr id="29" name="Text 27"/>
           <p:cNvSpPr txBox="1"/>
           <p:nvPr/>
         </p:nvSpPr>
         <p:spPr>
           <a:xfrm>
-            <a:off x="987552" y="4413504"/>
-            <a:ext cx="10094976" cy="355092"/>
+            <a:off x="6492240" y="3081528"/>
+            <a:ext cx="4645152" cy="475488"/>
           </a:xfrm>
           <a:prstGeom prst="rect">
             <a:avLst/>
@@ -12530,14 +12939,14 @@
           <a:bodyPr wrap="square" lIns="0" tIns="25400" rIns="25400" bIns="0" rtlCol="0" anchor="ctr"/>
           <a:lstStyle/>
           <a:p>
-            <a:pPr algn="l" indent="0" marL="0">
+            <a:pPr algn="ctr" indent="0" marL="0">
               <a:lnSpc>
                 <a:spcPct val="120000"/>
               </a:lnSpc>
               <a:buNone/>
             </a:pPr>
             <a:r>
-              <a:rPr lang="en-US" sz="2200" dirty="0">
+              <a:rPr lang="en-US" sz="1800" dirty="0">
                 <a:solidFill>
                   <a:srgbClr val="243041"/>
                 </a:solidFill>
@@ -12545,22 +12954,22 @@
                 <a:ea typeface="Pretendard" pitchFamily="34" charset="-122"/>
                 <a:cs typeface="Pretendard" pitchFamily="34" charset="-120"/>
               </a:rPr>
-              <a:t>Object Shape Grammar</a:t>
+              <a:t>09  Object Shape Grammar</a:t>
             </a:r>
-            <a:endParaRPr lang="en-US" sz="2200" dirty="0"/>
+            <a:endParaRPr lang="en-US" sz="1800" dirty="0"/>
           </a:p>
         </p:txBody>
       </p:sp>
       <p:sp>
         <p:nvSpPr>
-          <p:cNvPr id="16" name="Text 14"/>
+          <p:cNvPr id="30" name="Text 28"/>
           <p:cNvSpPr txBox="1"/>
           <p:nvPr/>
         </p:nvSpPr>
         <p:spPr>
           <a:xfrm>
-            <a:off x="987552" y="4768596"/>
-            <a:ext cx="10094976" cy="355092"/>
+            <a:off x="6492240" y="3886200"/>
+            <a:ext cx="4645152" cy="475488"/>
           </a:xfrm>
           <a:prstGeom prst="rect">
             <a:avLst/>
@@ -12572,14 +12981,14 @@
           <a:bodyPr wrap="square" lIns="0" tIns="25400" rIns="25400" bIns="0" rtlCol="0" anchor="ctr"/>
           <a:lstStyle/>
           <a:p>
-            <a:pPr algn="l" indent="0" marL="0">
+            <a:pPr algn="ctr" indent="0" marL="0">
               <a:lnSpc>
                 <a:spcPct val="120000"/>
               </a:lnSpc>
               <a:buNone/>
             </a:pPr>
             <a:r>
-              <a:rPr lang="en-US" sz="2200" dirty="0">
+              <a:rPr lang="en-US" sz="1800" dirty="0">
                 <a:solidFill>
                   <a:srgbClr val="243041"/>
                 </a:solidFill>
@@ -12587,22 +12996,22 @@
                 <a:ea typeface="Pretendard" pitchFamily="34" charset="-122"/>
                 <a:cs typeface="Pretendard" pitchFamily="34" charset="-120"/>
               </a:rPr>
-              <a:t>Icon and Text Aside</a:t>
+              <a:t>10  Icon and Text Aside</a:t>
             </a:r>
-            <a:endParaRPr lang="en-US" sz="2200" dirty="0"/>
+            <a:endParaRPr lang="en-US" sz="1800" dirty="0"/>
           </a:p>
         </p:txBody>
       </p:sp>
       <p:sp>
         <p:nvSpPr>
-          <p:cNvPr id="17" name="Text 15"/>
+          <p:cNvPr id="31" name="Text 29"/>
           <p:cNvSpPr txBox="1"/>
           <p:nvPr/>
         </p:nvSpPr>
         <p:spPr>
           <a:xfrm>
-            <a:off x="987552" y="5123688"/>
-            <a:ext cx="10094976" cy="355092"/>
+            <a:off x="6492240" y="4690872"/>
+            <a:ext cx="4645152" cy="475488"/>
           </a:xfrm>
           <a:prstGeom prst="rect">
             <a:avLst/>
@@ -12614,14 +13023,14 @@
           <a:bodyPr wrap="square" lIns="0" tIns="25400" rIns="25400" bIns="0" rtlCol="0" anchor="ctr"/>
           <a:lstStyle/>
           <a:p>
-            <a:pPr algn="l" indent="0" marL="0">
+            <a:pPr algn="ctr" indent="0" marL="0">
               <a:lnSpc>
                 <a:spcPct val="120000"/>
               </a:lnSpc>
               <a:buNone/>
             </a:pPr>
             <a:r>
-              <a:rPr lang="en-US" sz="2200" dirty="0">
+              <a:rPr lang="en-US" sz="1800" dirty="0">
                 <a:solidFill>
                   <a:srgbClr val="243041"/>
                 </a:solidFill>
@@ -12629,22 +13038,22 @@
                 <a:ea typeface="Pretendard" pitchFamily="34" charset="-122"/>
                 <a:cs typeface="Pretendard" pitchFamily="34" charset="-120"/>
               </a:rPr>
-              <a:t>Overflow Guard</a:t>
+              <a:t>11  Overflow Guard</a:t>
             </a:r>
-            <a:endParaRPr lang="en-US" sz="2200" dirty="0"/>
+            <a:endParaRPr lang="en-US" sz="1800" dirty="0"/>
           </a:p>
         </p:txBody>
       </p:sp>
       <p:sp>
         <p:nvSpPr>
-          <p:cNvPr id="18" name="Text 16"/>
+          <p:cNvPr id="32" name="Text 30"/>
           <p:cNvSpPr txBox="1"/>
           <p:nvPr/>
         </p:nvSpPr>
         <p:spPr>
           <a:xfrm>
-            <a:off x="987552" y="5478780"/>
-            <a:ext cx="10094976" cy="355092"/>
+            <a:off x="6492240" y="5486400"/>
+            <a:ext cx="4645152" cy="475488"/>
           </a:xfrm>
           <a:prstGeom prst="rect">
             <a:avLst/>
@@ -12656,14 +13065,14 @@
           <a:bodyPr wrap="square" lIns="0" tIns="25400" rIns="25400" bIns="0" rtlCol="0" anchor="ctr"/>
           <a:lstStyle/>
           <a:p>
-            <a:pPr algn="l" indent="0" marL="0">
+            <a:pPr algn="ctr" indent="0" marL="0">
               <a:lnSpc>
                 <a:spcPct val="120000"/>
               </a:lnSpc>
               <a:buNone/>
             </a:pPr>
             <a:r>
-              <a:rPr lang="en-US" sz="2200" dirty="0">
+              <a:rPr lang="en-US" sz="1800" dirty="0">
                 <a:solidFill>
                   <a:srgbClr val="243041"/>
                 </a:solidFill>
@@ -12671,9 +13080,9 @@
                 <a:ea typeface="Pretendard" pitchFamily="34" charset="-122"/>
                 <a:cs typeface="Pretendard" pitchFamily="34" charset="-120"/>
               </a:rPr>
-              <a:t>Actions Output Review</a:t>
+              <a:t>12  Actions Output Review</a:t>
             </a:r>
-            <a:endParaRPr lang="en-US" sz="2200" dirty="0"/>
+            <a:endParaRPr lang="en-US" sz="1800" dirty="0"/>
           </a:p>
         </p:txBody>
       </p:sp>
@@ -13359,8 +13768,37 @@
         </p:nvSpPr>
         <p:spPr>
           <a:xfrm>
-            <a:off x="914400" y="1417320"/>
-            <a:ext cx="73152" cy="868680"/>
+            <a:off x="786384" y="1956816"/>
+            <a:ext cx="32004" cy="3483864"/>
+          </a:xfrm>
+          <a:prstGeom prst="rect">
+            <a:avLst/>
+          </a:prstGeom>
+          <a:solidFill>
+            <a:srgbClr val="CBD5E1">
+              <a:alpha val="80000"/>
+            </a:srgbClr>
+          </a:solidFill>
+          <a:ln w="12700">
+            <a:solidFill>
+              <a:srgbClr val="CBD5E1">
+                <a:alpha val="0"/>
+              </a:srgbClr>
+            </a:solidFill>
+            <a:prstDash val="solid"/>
+          </a:ln>
+        </p:spPr>
+      </p:sp>
+      <p:sp>
+        <p:nvSpPr>
+          <p:cNvPr id="6" name="Shape 4"/>
+          <p:cNvSpPr/>
+          <p:nvPr/>
+        </p:nvSpPr>
+        <p:spPr>
+          <a:xfrm>
+            <a:off x="914400" y="1865376"/>
+            <a:ext cx="73152" cy="1024128"/>
           </a:xfrm>
           <a:prstGeom prst="rect">
             <a:avLst/>
@@ -13380,14 +13818,14 @@
       </p:sp>
       <p:sp>
         <p:nvSpPr>
-          <p:cNvPr id="6" name="Shape 4"/>
-          <p:cNvSpPr/>
-          <p:nvPr/>
-        </p:nvSpPr>
-        <p:spPr>
-          <a:xfrm>
-            <a:off x="914400" y="2560320"/>
-            <a:ext cx="73152" cy="868680"/>
+          <p:cNvPr id="7" name="Shape 5"/>
+          <p:cNvSpPr/>
+          <p:nvPr/>
+        </p:nvSpPr>
+        <p:spPr>
+          <a:xfrm>
+            <a:off x="914400" y="3191256"/>
+            <a:ext cx="73152" cy="1024128"/>
           </a:xfrm>
           <a:prstGeom prst="rect">
             <a:avLst/>
@@ -13407,14 +13845,14 @@
       </p:sp>
       <p:sp>
         <p:nvSpPr>
-          <p:cNvPr id="7" name="Shape 5"/>
-          <p:cNvSpPr/>
-          <p:nvPr/>
-        </p:nvSpPr>
-        <p:spPr>
-          <a:xfrm>
-            <a:off x="914400" y="3703320"/>
-            <a:ext cx="73152" cy="868680"/>
+          <p:cNvPr id="8" name="Shape 6"/>
+          <p:cNvSpPr/>
+          <p:nvPr/>
+        </p:nvSpPr>
+        <p:spPr>
+          <a:xfrm>
+            <a:off x="914400" y="4507992"/>
+            <a:ext cx="73152" cy="1024128"/>
           </a:xfrm>
           <a:prstGeom prst="rect">
             <a:avLst/>
@@ -13434,18 +13872,18 @@
       </p:sp>
       <p:sp>
         <p:nvSpPr>
-          <p:cNvPr id="8" name="Shape 6"/>
-          <p:cNvSpPr/>
-          <p:nvPr/>
-        </p:nvSpPr>
-        <p:spPr>
-          <a:xfrm>
-            <a:off x="955548" y="1467612"/>
-            <a:ext cx="10241280" cy="868680"/>
+          <p:cNvPr id="9" name="Shape 7"/>
+          <p:cNvSpPr/>
+          <p:nvPr/>
+        </p:nvSpPr>
+        <p:spPr>
+          <a:xfrm>
+            <a:off x="955548" y="1915668"/>
+            <a:ext cx="10241280" cy="1024128"/>
           </a:xfrm>
           <a:prstGeom prst="roundRect">
             <a:avLst>
-              <a:gd name="adj" fmla="val 6316"/>
+              <a:gd name="adj" fmla="val 5357"/>
             </a:avLst>
           </a:prstGeom>
           <a:solidFill>
@@ -13472,18 +13910,18 @@
       </p:sp>
       <p:sp>
         <p:nvSpPr>
-          <p:cNvPr id="9" name="Shape 7"/>
-          <p:cNvSpPr/>
-          <p:nvPr/>
-        </p:nvSpPr>
-        <p:spPr>
-          <a:xfrm>
-            <a:off x="882396" y="1385316"/>
-            <a:ext cx="10241280" cy="868680"/>
+          <p:cNvPr id="10" name="Shape 8"/>
+          <p:cNvSpPr/>
+          <p:nvPr/>
+        </p:nvSpPr>
+        <p:spPr>
+          <a:xfrm>
+            <a:off x="882396" y="1833372"/>
+            <a:ext cx="10241280" cy="1024128"/>
           </a:xfrm>
           <a:prstGeom prst="roundRect">
             <a:avLst>
-              <a:gd name="adj" fmla="val 6316"/>
+              <a:gd name="adj" fmla="val 5357"/>
             </a:avLst>
           </a:prstGeom>
           <a:solidFill>
@@ -13510,18 +13948,18 @@
       </p:sp>
       <p:sp>
         <p:nvSpPr>
-          <p:cNvPr id="10" name="Shape 8"/>
-          <p:cNvSpPr/>
-          <p:nvPr/>
-        </p:nvSpPr>
-        <p:spPr>
-          <a:xfrm>
-            <a:off x="914400" y="1417320"/>
-            <a:ext cx="10241280" cy="868680"/>
+          <p:cNvPr id="11" name="Shape 9"/>
+          <p:cNvSpPr/>
+          <p:nvPr/>
+        </p:nvSpPr>
+        <p:spPr>
+          <a:xfrm>
+            <a:off x="914400" y="1865376"/>
+            <a:ext cx="10241280" cy="1024128"/>
           </a:xfrm>
           <a:prstGeom prst="roundRect">
             <a:avLst>
-              <a:gd name="adj" fmla="val 6316"/>
+              <a:gd name="adj" fmla="val 5357"/>
             </a:avLst>
           </a:prstGeom>
           <a:solidFill>
@@ -13541,7 +13979,7 @@
       </p:sp>
       <p:pic>
         <p:nvPicPr>
-          <p:cNvPr id="11" name="Image 0" descr="preencoded.png">    </p:cNvPr>
+          <p:cNvPr id="12" name="Image 0" descr="preencoded.png">    </p:cNvPr>
           <p:cNvPicPr>
             <a:picLocks noChangeAspect="1"/>
           </p:cNvPicPr>
@@ -13561,8 +13999,8 @@
         </p:blipFill>
         <p:spPr>
           <a:xfrm>
-            <a:off x="914400" y="1417320"/>
-            <a:ext cx="10241280" cy="868680"/>
+            <a:off x="914400" y="1865376"/>
+            <a:ext cx="10241280" cy="1024128"/>
           </a:xfrm>
           <a:prstGeom prst="rect">
             <a:avLst/>
@@ -13571,18 +14009,18 @@
       </p:pic>
       <p:sp>
         <p:nvSpPr>
-          <p:cNvPr id="12" name="Shape 9"/>
-          <p:cNvSpPr/>
-          <p:nvPr/>
-        </p:nvSpPr>
-        <p:spPr>
-          <a:xfrm>
-            <a:off x="955548" y="2610612"/>
-            <a:ext cx="10241280" cy="868680"/>
+          <p:cNvPr id="13" name="Shape 10"/>
+          <p:cNvSpPr/>
+          <p:nvPr/>
+        </p:nvSpPr>
+        <p:spPr>
+          <a:xfrm>
+            <a:off x="955548" y="3241548"/>
+            <a:ext cx="10241280" cy="1024128"/>
           </a:xfrm>
           <a:prstGeom prst="roundRect">
             <a:avLst>
-              <a:gd name="adj" fmla="val 6316"/>
+              <a:gd name="adj" fmla="val 5357"/>
             </a:avLst>
           </a:prstGeom>
           <a:solidFill>
@@ -13609,18 +14047,18 @@
       </p:sp>
       <p:sp>
         <p:nvSpPr>
-          <p:cNvPr id="13" name="Shape 10"/>
-          <p:cNvSpPr/>
-          <p:nvPr/>
-        </p:nvSpPr>
-        <p:spPr>
-          <a:xfrm>
-            <a:off x="882396" y="2528316"/>
-            <a:ext cx="10241280" cy="868680"/>
+          <p:cNvPr id="14" name="Shape 11"/>
+          <p:cNvSpPr/>
+          <p:nvPr/>
+        </p:nvSpPr>
+        <p:spPr>
+          <a:xfrm>
+            <a:off x="882396" y="3159252"/>
+            <a:ext cx="10241280" cy="1024128"/>
           </a:xfrm>
           <a:prstGeom prst="roundRect">
             <a:avLst>
-              <a:gd name="adj" fmla="val 6316"/>
+              <a:gd name="adj" fmla="val 5357"/>
             </a:avLst>
           </a:prstGeom>
           <a:solidFill>
@@ -13647,18 +14085,18 @@
       </p:sp>
       <p:sp>
         <p:nvSpPr>
-          <p:cNvPr id="14" name="Shape 11"/>
-          <p:cNvSpPr/>
-          <p:nvPr/>
-        </p:nvSpPr>
-        <p:spPr>
-          <a:xfrm>
-            <a:off x="914400" y="2560320"/>
-            <a:ext cx="10241280" cy="868680"/>
+          <p:cNvPr id="15" name="Shape 12"/>
+          <p:cNvSpPr/>
+          <p:nvPr/>
+        </p:nvSpPr>
+        <p:spPr>
+          <a:xfrm>
+            <a:off x="914400" y="3191256"/>
+            <a:ext cx="10241280" cy="1024128"/>
           </a:xfrm>
           <a:prstGeom prst="roundRect">
             <a:avLst>
-              <a:gd name="adj" fmla="val 6316"/>
+              <a:gd name="adj" fmla="val 5357"/>
             </a:avLst>
           </a:prstGeom>
           <a:solidFill>
@@ -13678,7 +14116,7 @@
       </p:sp>
       <p:pic>
         <p:nvPicPr>
-          <p:cNvPr id="15" name="Image 1" descr="preencoded.png">    </p:cNvPr>
+          <p:cNvPr id="16" name="Image 1" descr="preencoded.png">    </p:cNvPr>
           <p:cNvPicPr>
             <a:picLocks noChangeAspect="1"/>
           </p:cNvPicPr>
@@ -13698,8 +14136,8 @@
         </p:blipFill>
         <p:spPr>
           <a:xfrm>
-            <a:off x="914400" y="2560320"/>
-            <a:ext cx="10241280" cy="868680"/>
+            <a:off x="914400" y="3191256"/>
+            <a:ext cx="10241280" cy="1024128"/>
           </a:xfrm>
           <a:prstGeom prst="rect">
             <a:avLst/>
@@ -13708,18 +14146,18 @@
       </p:pic>
       <p:sp>
         <p:nvSpPr>
-          <p:cNvPr id="16" name="Shape 12"/>
-          <p:cNvSpPr/>
-          <p:nvPr/>
-        </p:nvSpPr>
-        <p:spPr>
-          <a:xfrm>
-            <a:off x="955548" y="3753612"/>
-            <a:ext cx="10241280" cy="868680"/>
+          <p:cNvPr id="17" name="Shape 13"/>
+          <p:cNvSpPr/>
+          <p:nvPr/>
+        </p:nvSpPr>
+        <p:spPr>
+          <a:xfrm>
+            <a:off x="955548" y="4558284"/>
+            <a:ext cx="10241280" cy="1024128"/>
           </a:xfrm>
           <a:prstGeom prst="roundRect">
             <a:avLst>
-              <a:gd name="adj" fmla="val 6316"/>
+              <a:gd name="adj" fmla="val 5357"/>
             </a:avLst>
           </a:prstGeom>
           <a:solidFill>
@@ -13746,18 +14184,18 @@
       </p:sp>
       <p:sp>
         <p:nvSpPr>
-          <p:cNvPr id="17" name="Shape 13"/>
-          <p:cNvSpPr/>
-          <p:nvPr/>
-        </p:nvSpPr>
-        <p:spPr>
-          <a:xfrm>
-            <a:off x="882396" y="3671316"/>
-            <a:ext cx="10241280" cy="868680"/>
+          <p:cNvPr id="18" name="Shape 14"/>
+          <p:cNvSpPr/>
+          <p:nvPr/>
+        </p:nvSpPr>
+        <p:spPr>
+          <a:xfrm>
+            <a:off x="882396" y="4475988"/>
+            <a:ext cx="10241280" cy="1024128"/>
           </a:xfrm>
           <a:prstGeom prst="roundRect">
             <a:avLst>
-              <a:gd name="adj" fmla="val 6316"/>
+              <a:gd name="adj" fmla="val 5357"/>
             </a:avLst>
           </a:prstGeom>
           <a:solidFill>
@@ -13784,18 +14222,18 @@
       </p:sp>
       <p:sp>
         <p:nvSpPr>
-          <p:cNvPr id="18" name="Shape 14"/>
-          <p:cNvSpPr/>
-          <p:nvPr/>
-        </p:nvSpPr>
-        <p:spPr>
-          <a:xfrm>
-            <a:off x="914400" y="3703320"/>
-            <a:ext cx="10241280" cy="868680"/>
+          <p:cNvPr id="19" name="Shape 15"/>
+          <p:cNvSpPr/>
+          <p:nvPr/>
+        </p:nvSpPr>
+        <p:spPr>
+          <a:xfrm>
+            <a:off x="914400" y="4507992"/>
+            <a:ext cx="10241280" cy="1024128"/>
           </a:xfrm>
           <a:prstGeom prst="roundRect">
             <a:avLst>
-              <a:gd name="adj" fmla="val 6316"/>
+              <a:gd name="adj" fmla="val 5357"/>
             </a:avLst>
           </a:prstGeom>
           <a:solidFill>
@@ -13815,7 +14253,7 @@
       </p:sp>
       <p:pic>
         <p:nvPicPr>
-          <p:cNvPr id="19" name="Image 2" descr="preencoded.png">    </p:cNvPr>
+          <p:cNvPr id="20" name="Image 2" descr="preencoded.png">    </p:cNvPr>
           <p:cNvPicPr>
             <a:picLocks noChangeAspect="1"/>
           </p:cNvPicPr>
@@ -13835,8 +14273,8 @@
         </p:blipFill>
         <p:spPr>
           <a:xfrm>
-            <a:off x="914400" y="3703320"/>
-            <a:ext cx="10241280" cy="868680"/>
+            <a:off x="914400" y="4507992"/>
+            <a:ext cx="10241280" cy="1024128"/>
           </a:xfrm>
           <a:prstGeom prst="rect">
             <a:avLst/>
@@ -13845,7 +14283,7 @@
       </p:pic>
       <p:sp>
         <p:nvSpPr>
-          <p:cNvPr id="20" name="Text 15"/>
+          <p:cNvPr id="21" name="Text 16"/>
           <p:cNvSpPr txBox="1"/>
           <p:nvPr/>
         </p:nvSpPr>
@@ -13887,18 +14325,18 @@
       </p:sp>
       <p:sp>
         <p:nvSpPr>
-          <p:cNvPr id="21" name="Shape 16"/>
-          <p:cNvSpPr/>
-          <p:nvPr/>
-        </p:nvSpPr>
-        <p:spPr>
-          <a:xfrm>
-            <a:off x="1097280" y="1623060"/>
-            <a:ext cx="457200" cy="457200"/>
+          <p:cNvPr id="22" name="Shape 17"/>
+          <p:cNvSpPr/>
+          <p:nvPr/>
+        </p:nvSpPr>
+        <p:spPr>
+          <a:xfrm>
+            <a:off x="1097280" y="2140428"/>
+            <a:ext cx="474025" cy="474025"/>
           </a:xfrm>
           <a:prstGeom prst="roundRect">
             <a:avLst>
-              <a:gd name="adj" fmla="val 8000"/>
+              <a:gd name="adj" fmla="val 7716"/>
             </a:avLst>
           </a:prstGeom>
           <a:solidFill>
@@ -13914,7 +14352,7 @@
       </p:sp>
       <p:pic>
         <p:nvPicPr>
-          <p:cNvPr id="22" name="Image 3" descr="flow icon from tabler-icons (MIT)">    </p:cNvPr>
+          <p:cNvPr id="23" name="Image 3" descr="flow icon from tabler-icons (MIT)">    </p:cNvPr>
           <p:cNvPicPr>
             <a:picLocks noChangeAspect="1"/>
           </p:cNvPicPr>
@@ -13934,8 +14372,8 @@
         </p:blipFill>
         <p:spPr>
           <a:xfrm>
-            <a:off x="1170432" y="1696212"/>
-            <a:ext cx="310896" cy="310896"/>
+            <a:off x="1170432" y="2213580"/>
+            <a:ext cx="327721" cy="327721"/>
           </a:xfrm>
           <a:prstGeom prst="rect">
             <a:avLst/>
@@ -13944,14 +14382,14 @@
       </p:pic>
       <p:sp>
         <p:nvSpPr>
-          <p:cNvPr id="23" name="Text 17"/>
+          <p:cNvPr id="24" name="Text 18"/>
           <p:cNvSpPr txBox="1"/>
           <p:nvPr/>
         </p:nvSpPr>
         <p:spPr>
           <a:xfrm>
-            <a:off x="1682496" y="1508760"/>
-            <a:ext cx="9272016" cy="685800"/>
+            <a:off x="1699321" y="1957548"/>
+            <a:ext cx="9255191" cy="839785"/>
           </a:xfrm>
           <a:prstGeom prst="rect">
             <a:avLst/>
@@ -14003,18 +14441,18 @@
       </p:sp>
       <p:sp>
         <p:nvSpPr>
-          <p:cNvPr id="24" name="Shape 18"/>
-          <p:cNvSpPr/>
-          <p:nvPr/>
-        </p:nvSpPr>
-        <p:spPr>
-          <a:xfrm>
-            <a:off x="1097280" y="2766060"/>
-            <a:ext cx="457200" cy="457200"/>
+          <p:cNvPr id="25" name="Shape 19"/>
+          <p:cNvSpPr/>
+          <p:nvPr/>
+        </p:nvSpPr>
+        <p:spPr>
+          <a:xfrm>
+            <a:off x="1097280" y="3466308"/>
+            <a:ext cx="474025" cy="474025"/>
           </a:xfrm>
           <a:prstGeom prst="roundRect">
             <a:avLst>
-              <a:gd name="adj" fmla="val 8000"/>
+              <a:gd name="adj" fmla="val 7716"/>
             </a:avLst>
           </a:prstGeom>
           <a:solidFill>
@@ -14030,7 +14468,7 @@
       </p:sp>
       <p:pic>
         <p:nvPicPr>
-          <p:cNvPr id="25" name="Image 4" descr="verified icon from tabler-icons (MIT)">    </p:cNvPr>
+          <p:cNvPr id="26" name="Image 4" descr="verified icon from tabler-icons (MIT)">    </p:cNvPr>
           <p:cNvPicPr>
             <a:picLocks noChangeAspect="1"/>
           </p:cNvPicPr>
@@ -14050,8 +14488,8 @@
         </p:blipFill>
         <p:spPr>
           <a:xfrm>
-            <a:off x="1170432" y="2839212"/>
-            <a:ext cx="310896" cy="310896"/>
+            <a:off x="1170432" y="3539460"/>
+            <a:ext cx="327721" cy="327721"/>
           </a:xfrm>
           <a:prstGeom prst="rect">
             <a:avLst/>
@@ -14060,14 +14498,14 @@
       </p:pic>
       <p:sp>
         <p:nvSpPr>
-          <p:cNvPr id="26" name="Text 19"/>
+          <p:cNvPr id="27" name="Text 20"/>
           <p:cNvSpPr txBox="1"/>
           <p:nvPr/>
         </p:nvSpPr>
         <p:spPr>
           <a:xfrm>
-            <a:off x="1682496" y="2651760"/>
-            <a:ext cx="9272016" cy="685800"/>
+            <a:off x="1699321" y="3283428"/>
+            <a:ext cx="9255191" cy="839785"/>
           </a:xfrm>
           <a:prstGeom prst="rect">
             <a:avLst/>
@@ -14119,18 +14557,18 @@
       </p:sp>
       <p:sp>
         <p:nvSpPr>
-          <p:cNvPr id="27" name="Shape 20"/>
-          <p:cNvSpPr/>
-          <p:nvPr/>
-        </p:nvSpPr>
-        <p:spPr>
-          <a:xfrm>
-            <a:off x="1097280" y="3909060"/>
-            <a:ext cx="457200" cy="457200"/>
+          <p:cNvPr id="28" name="Shape 21"/>
+          <p:cNvSpPr/>
+          <p:nvPr/>
+        </p:nvSpPr>
+        <p:spPr>
+          <a:xfrm>
+            <a:off x="1097280" y="4783044"/>
+            <a:ext cx="474025" cy="474025"/>
           </a:xfrm>
           <a:prstGeom prst="roundRect">
             <a:avLst>
-              <a:gd name="adj" fmla="val 8000"/>
+              <a:gd name="adj" fmla="val 7716"/>
             </a:avLst>
           </a:prstGeom>
           <a:solidFill>
@@ -14146,7 +14584,7 @@
       </p:sp>
       <p:pic>
         <p:nvPicPr>
-          <p:cNvPr id="28" name="Image 5" descr="spark icon from tabler-icons (MIT)">    </p:cNvPr>
+          <p:cNvPr id="29" name="Image 5" descr="spark icon from tabler-icons (MIT)">    </p:cNvPr>
           <p:cNvPicPr>
             <a:picLocks noChangeAspect="1"/>
           </p:cNvPicPr>
@@ -14166,8 +14604,8 @@
         </p:blipFill>
         <p:spPr>
           <a:xfrm>
-            <a:off x="1170432" y="3982212"/>
-            <a:ext cx="310896" cy="310896"/>
+            <a:off x="1170432" y="4856196"/>
+            <a:ext cx="327721" cy="327721"/>
           </a:xfrm>
           <a:prstGeom prst="rect">
             <a:avLst/>
@@ -14176,14 +14614,14 @@
       </p:pic>
       <p:sp>
         <p:nvSpPr>
-          <p:cNvPr id="29" name="Text 21"/>
+          <p:cNvPr id="30" name="Text 22"/>
           <p:cNvSpPr txBox="1"/>
           <p:nvPr/>
         </p:nvSpPr>
         <p:spPr>
           <a:xfrm>
-            <a:off x="1682496" y="3794760"/>
-            <a:ext cx="9272016" cy="685800"/>
+            <a:off x="1699321" y="4600164"/>
+            <a:ext cx="9255191" cy="839785"/>
           </a:xfrm>
           <a:prstGeom prst="rect">
             <a:avLst/>
@@ -14713,8 +15151,37 @@
         </p:nvSpPr>
         <p:spPr>
           <a:xfrm>
-            <a:off x="914400" y="1417320"/>
-            <a:ext cx="73152" cy="868680"/>
+            <a:off x="786384" y="1956816"/>
+            <a:ext cx="32004" cy="3483864"/>
+          </a:xfrm>
+          <a:prstGeom prst="rect">
+            <a:avLst/>
+          </a:prstGeom>
+          <a:solidFill>
+            <a:srgbClr val="CBD5E1">
+              <a:alpha val="80000"/>
+            </a:srgbClr>
+          </a:solidFill>
+          <a:ln w="12700">
+            <a:solidFill>
+              <a:srgbClr val="CBD5E1">
+                <a:alpha val="0"/>
+              </a:srgbClr>
+            </a:solidFill>
+            <a:prstDash val="solid"/>
+          </a:ln>
+        </p:spPr>
+      </p:sp>
+      <p:sp>
+        <p:nvSpPr>
+          <p:cNvPr id="6" name="Shape 4"/>
+          <p:cNvSpPr/>
+          <p:nvPr/>
+        </p:nvSpPr>
+        <p:spPr>
+          <a:xfrm>
+            <a:off x="914400" y="1865376"/>
+            <a:ext cx="73152" cy="1024128"/>
           </a:xfrm>
           <a:prstGeom prst="rect">
             <a:avLst/>
@@ -14734,14 +15201,14 @@
       </p:sp>
       <p:sp>
         <p:nvSpPr>
-          <p:cNvPr id="6" name="Shape 4"/>
-          <p:cNvSpPr/>
-          <p:nvPr/>
-        </p:nvSpPr>
-        <p:spPr>
-          <a:xfrm>
-            <a:off x="914400" y="2560320"/>
-            <a:ext cx="73152" cy="868680"/>
+          <p:cNvPr id="7" name="Shape 5"/>
+          <p:cNvSpPr/>
+          <p:nvPr/>
+        </p:nvSpPr>
+        <p:spPr>
+          <a:xfrm>
+            <a:off x="914400" y="3191256"/>
+            <a:ext cx="73152" cy="1024128"/>
           </a:xfrm>
           <a:prstGeom prst="rect">
             <a:avLst/>
@@ -14761,14 +15228,14 @@
       </p:sp>
       <p:sp>
         <p:nvSpPr>
-          <p:cNvPr id="7" name="Shape 5"/>
-          <p:cNvSpPr/>
-          <p:nvPr/>
-        </p:nvSpPr>
-        <p:spPr>
-          <a:xfrm>
-            <a:off x="914400" y="3703320"/>
-            <a:ext cx="73152" cy="868680"/>
+          <p:cNvPr id="8" name="Shape 6"/>
+          <p:cNvSpPr/>
+          <p:nvPr/>
+        </p:nvSpPr>
+        <p:spPr>
+          <a:xfrm>
+            <a:off x="914400" y="4507992"/>
+            <a:ext cx="73152" cy="1024128"/>
           </a:xfrm>
           <a:prstGeom prst="rect">
             <a:avLst/>
@@ -14788,18 +15255,18 @@
       </p:sp>
       <p:sp>
         <p:nvSpPr>
-          <p:cNvPr id="8" name="Shape 6"/>
-          <p:cNvSpPr/>
-          <p:nvPr/>
-        </p:nvSpPr>
-        <p:spPr>
-          <a:xfrm>
-            <a:off x="955548" y="1467612"/>
-            <a:ext cx="10241280" cy="868680"/>
+          <p:cNvPr id="9" name="Shape 7"/>
+          <p:cNvSpPr/>
+          <p:nvPr/>
+        </p:nvSpPr>
+        <p:spPr>
+          <a:xfrm>
+            <a:off x="955548" y="1915668"/>
+            <a:ext cx="10241280" cy="1024128"/>
           </a:xfrm>
           <a:prstGeom prst="roundRect">
             <a:avLst>
-              <a:gd name="adj" fmla="val 6316"/>
+              <a:gd name="adj" fmla="val 5357"/>
             </a:avLst>
           </a:prstGeom>
           <a:solidFill>
@@ -14826,18 +15293,18 @@
       </p:sp>
       <p:sp>
         <p:nvSpPr>
-          <p:cNvPr id="9" name="Shape 7"/>
-          <p:cNvSpPr/>
-          <p:nvPr/>
-        </p:nvSpPr>
-        <p:spPr>
-          <a:xfrm>
-            <a:off x="882396" y="1385316"/>
-            <a:ext cx="10241280" cy="868680"/>
+          <p:cNvPr id="10" name="Shape 8"/>
+          <p:cNvSpPr/>
+          <p:nvPr/>
+        </p:nvSpPr>
+        <p:spPr>
+          <a:xfrm>
+            <a:off x="882396" y="1833372"/>
+            <a:ext cx="10241280" cy="1024128"/>
           </a:xfrm>
           <a:prstGeom prst="roundRect">
             <a:avLst>
-              <a:gd name="adj" fmla="val 6316"/>
+              <a:gd name="adj" fmla="val 5357"/>
             </a:avLst>
           </a:prstGeom>
           <a:solidFill>
@@ -14864,18 +15331,18 @@
       </p:sp>
       <p:sp>
         <p:nvSpPr>
-          <p:cNvPr id="10" name="Shape 8"/>
-          <p:cNvSpPr/>
-          <p:nvPr/>
-        </p:nvSpPr>
-        <p:spPr>
-          <a:xfrm>
-            <a:off x="914400" y="1417320"/>
-            <a:ext cx="10241280" cy="868680"/>
+          <p:cNvPr id="11" name="Shape 9"/>
+          <p:cNvSpPr/>
+          <p:nvPr/>
+        </p:nvSpPr>
+        <p:spPr>
+          <a:xfrm>
+            <a:off x="914400" y="1865376"/>
+            <a:ext cx="10241280" cy="1024128"/>
           </a:xfrm>
           <a:prstGeom prst="roundRect">
             <a:avLst>
-              <a:gd name="adj" fmla="val 6316"/>
+              <a:gd name="adj" fmla="val 5357"/>
             </a:avLst>
           </a:prstGeom>
           <a:solidFill>
@@ -14895,7 +15362,7 @@
       </p:sp>
       <p:pic>
         <p:nvPicPr>
-          <p:cNvPr id="11" name="Image 0" descr="preencoded.png">    </p:cNvPr>
+          <p:cNvPr id="12" name="Image 0" descr="preencoded.png">    </p:cNvPr>
           <p:cNvPicPr>
             <a:picLocks noChangeAspect="1"/>
           </p:cNvPicPr>
@@ -14915,8 +15382,8 @@
         </p:blipFill>
         <p:spPr>
           <a:xfrm>
-            <a:off x="914400" y="1417320"/>
-            <a:ext cx="10241280" cy="868680"/>
+            <a:off x="914400" y="1865376"/>
+            <a:ext cx="10241280" cy="1024128"/>
           </a:xfrm>
           <a:prstGeom prst="rect">
             <a:avLst/>
@@ -14925,18 +15392,18 @@
       </p:pic>
       <p:sp>
         <p:nvSpPr>
-          <p:cNvPr id="12" name="Shape 9"/>
-          <p:cNvSpPr/>
-          <p:nvPr/>
-        </p:nvSpPr>
-        <p:spPr>
-          <a:xfrm>
-            <a:off x="955548" y="2610612"/>
-            <a:ext cx="10241280" cy="868680"/>
+          <p:cNvPr id="13" name="Shape 10"/>
+          <p:cNvSpPr/>
+          <p:nvPr/>
+        </p:nvSpPr>
+        <p:spPr>
+          <a:xfrm>
+            <a:off x="955548" y="3241548"/>
+            <a:ext cx="10241280" cy="1024128"/>
           </a:xfrm>
           <a:prstGeom prst="roundRect">
             <a:avLst>
-              <a:gd name="adj" fmla="val 6316"/>
+              <a:gd name="adj" fmla="val 5357"/>
             </a:avLst>
           </a:prstGeom>
           <a:solidFill>
@@ -14963,18 +15430,18 @@
       </p:sp>
       <p:sp>
         <p:nvSpPr>
-          <p:cNvPr id="13" name="Shape 10"/>
-          <p:cNvSpPr/>
-          <p:nvPr/>
-        </p:nvSpPr>
-        <p:spPr>
-          <a:xfrm>
-            <a:off x="882396" y="2528316"/>
-            <a:ext cx="10241280" cy="868680"/>
+          <p:cNvPr id="14" name="Shape 11"/>
+          <p:cNvSpPr/>
+          <p:nvPr/>
+        </p:nvSpPr>
+        <p:spPr>
+          <a:xfrm>
+            <a:off x="882396" y="3159252"/>
+            <a:ext cx="10241280" cy="1024128"/>
           </a:xfrm>
           <a:prstGeom prst="roundRect">
             <a:avLst>
-              <a:gd name="adj" fmla="val 6316"/>
+              <a:gd name="adj" fmla="val 5357"/>
             </a:avLst>
           </a:prstGeom>
           <a:solidFill>
@@ -15001,18 +15468,18 @@
       </p:sp>
       <p:sp>
         <p:nvSpPr>
-          <p:cNvPr id="14" name="Shape 11"/>
-          <p:cNvSpPr/>
-          <p:nvPr/>
-        </p:nvSpPr>
-        <p:spPr>
-          <a:xfrm>
-            <a:off x="914400" y="2560320"/>
-            <a:ext cx="10241280" cy="868680"/>
+          <p:cNvPr id="15" name="Shape 12"/>
+          <p:cNvSpPr/>
+          <p:nvPr/>
+        </p:nvSpPr>
+        <p:spPr>
+          <a:xfrm>
+            <a:off x="914400" y="3191256"/>
+            <a:ext cx="10241280" cy="1024128"/>
           </a:xfrm>
           <a:prstGeom prst="roundRect">
             <a:avLst>
-              <a:gd name="adj" fmla="val 6316"/>
+              <a:gd name="adj" fmla="val 5357"/>
             </a:avLst>
           </a:prstGeom>
           <a:solidFill>
@@ -15032,7 +15499,7 @@
       </p:sp>
       <p:pic>
         <p:nvPicPr>
-          <p:cNvPr id="15" name="Image 1" descr="preencoded.png">    </p:cNvPr>
+          <p:cNvPr id="16" name="Image 1" descr="preencoded.png">    </p:cNvPr>
           <p:cNvPicPr>
             <a:picLocks noChangeAspect="1"/>
           </p:cNvPicPr>
@@ -15052,8 +15519,8 @@
         </p:blipFill>
         <p:spPr>
           <a:xfrm>
-            <a:off x="914400" y="2560320"/>
-            <a:ext cx="10241280" cy="868680"/>
+            <a:off x="914400" y="3191256"/>
+            <a:ext cx="10241280" cy="1024128"/>
           </a:xfrm>
           <a:prstGeom prst="rect">
             <a:avLst/>
@@ -15062,18 +15529,18 @@
       </p:pic>
       <p:sp>
         <p:nvSpPr>
-          <p:cNvPr id="16" name="Shape 12"/>
-          <p:cNvSpPr/>
-          <p:nvPr/>
-        </p:nvSpPr>
-        <p:spPr>
-          <a:xfrm>
-            <a:off x="955548" y="3753612"/>
-            <a:ext cx="10241280" cy="868680"/>
+          <p:cNvPr id="17" name="Shape 13"/>
+          <p:cNvSpPr/>
+          <p:nvPr/>
+        </p:nvSpPr>
+        <p:spPr>
+          <a:xfrm>
+            <a:off x="955548" y="4558284"/>
+            <a:ext cx="10241280" cy="1024128"/>
           </a:xfrm>
           <a:prstGeom prst="roundRect">
             <a:avLst>
-              <a:gd name="adj" fmla="val 6316"/>
+              <a:gd name="adj" fmla="val 5357"/>
             </a:avLst>
           </a:prstGeom>
           <a:solidFill>
@@ -15100,18 +15567,18 @@
       </p:sp>
       <p:sp>
         <p:nvSpPr>
-          <p:cNvPr id="17" name="Shape 13"/>
-          <p:cNvSpPr/>
-          <p:nvPr/>
-        </p:nvSpPr>
-        <p:spPr>
-          <a:xfrm>
-            <a:off x="882396" y="3671316"/>
-            <a:ext cx="10241280" cy="868680"/>
+          <p:cNvPr id="18" name="Shape 14"/>
+          <p:cNvSpPr/>
+          <p:nvPr/>
+        </p:nvSpPr>
+        <p:spPr>
+          <a:xfrm>
+            <a:off x="882396" y="4475988"/>
+            <a:ext cx="10241280" cy="1024128"/>
           </a:xfrm>
           <a:prstGeom prst="roundRect">
             <a:avLst>
-              <a:gd name="adj" fmla="val 6316"/>
+              <a:gd name="adj" fmla="val 5357"/>
             </a:avLst>
           </a:prstGeom>
           <a:solidFill>
@@ -15138,18 +15605,18 @@
       </p:sp>
       <p:sp>
         <p:nvSpPr>
-          <p:cNvPr id="18" name="Shape 14"/>
-          <p:cNvSpPr/>
-          <p:nvPr/>
-        </p:nvSpPr>
-        <p:spPr>
-          <a:xfrm>
-            <a:off x="914400" y="3703320"/>
-            <a:ext cx="10241280" cy="868680"/>
+          <p:cNvPr id="19" name="Shape 15"/>
+          <p:cNvSpPr/>
+          <p:nvPr/>
+        </p:nvSpPr>
+        <p:spPr>
+          <a:xfrm>
+            <a:off x="914400" y="4507992"/>
+            <a:ext cx="10241280" cy="1024128"/>
           </a:xfrm>
           <a:prstGeom prst="roundRect">
             <a:avLst>
-              <a:gd name="adj" fmla="val 6316"/>
+              <a:gd name="adj" fmla="val 5357"/>
             </a:avLst>
           </a:prstGeom>
           <a:solidFill>
@@ -15169,7 +15636,7 @@
       </p:sp>
       <p:pic>
         <p:nvPicPr>
-          <p:cNvPr id="19" name="Image 2" descr="preencoded.png">    </p:cNvPr>
+          <p:cNvPr id="20" name="Image 2" descr="preencoded.png">    </p:cNvPr>
           <p:cNvPicPr>
             <a:picLocks noChangeAspect="1"/>
           </p:cNvPicPr>
@@ -15189,8 +15656,8 @@
         </p:blipFill>
         <p:spPr>
           <a:xfrm>
-            <a:off x="914400" y="3703320"/>
-            <a:ext cx="10241280" cy="868680"/>
+            <a:off x="914400" y="4507992"/>
+            <a:ext cx="10241280" cy="1024128"/>
           </a:xfrm>
           <a:prstGeom prst="rect">
             <a:avLst/>
@@ -15199,7 +15666,7 @@
       </p:pic>
       <p:sp>
         <p:nvSpPr>
-          <p:cNvPr id="20" name="Text 15"/>
+          <p:cNvPr id="21" name="Text 16"/>
           <p:cNvSpPr txBox="1"/>
           <p:nvPr/>
         </p:nvSpPr>
@@ -15241,18 +15708,18 @@
       </p:sp>
       <p:sp>
         <p:nvSpPr>
-          <p:cNvPr id="21" name="Shape 16"/>
-          <p:cNvSpPr/>
-          <p:nvPr/>
-        </p:nvSpPr>
-        <p:spPr>
-          <a:xfrm>
-            <a:off x="1097280" y="1623060"/>
-            <a:ext cx="457200" cy="457200"/>
+          <p:cNvPr id="22" name="Shape 17"/>
+          <p:cNvSpPr/>
+          <p:nvPr/>
+        </p:nvSpPr>
+        <p:spPr>
+          <a:xfrm>
+            <a:off x="1097280" y="2140428"/>
+            <a:ext cx="474025" cy="474025"/>
           </a:xfrm>
           <a:prstGeom prst="roundRect">
             <a:avLst>
-              <a:gd name="adj" fmla="val 8000"/>
+              <a:gd name="adj" fmla="val 7716"/>
             </a:avLst>
           </a:prstGeom>
           <a:solidFill>
@@ -15268,7 +15735,7 @@
       </p:sp>
       <p:pic>
         <p:nvPicPr>
-          <p:cNvPr id="22" name="Image 3" descr="flow icon from tabler-icons (MIT)">    </p:cNvPr>
+          <p:cNvPr id="23" name="Image 3" descr="flow icon from tabler-icons (MIT)">    </p:cNvPr>
           <p:cNvPicPr>
             <a:picLocks noChangeAspect="1"/>
           </p:cNvPicPr>
@@ -15288,8 +15755,8 @@
         </p:blipFill>
         <p:spPr>
           <a:xfrm>
-            <a:off x="1170432" y="1696212"/>
-            <a:ext cx="310896" cy="310896"/>
+            <a:off x="1170432" y="2213580"/>
+            <a:ext cx="327721" cy="327721"/>
           </a:xfrm>
           <a:prstGeom prst="rect">
             <a:avLst/>
@@ -15298,14 +15765,14 @@
       </p:pic>
       <p:sp>
         <p:nvSpPr>
-          <p:cNvPr id="23" name="Text 17"/>
+          <p:cNvPr id="24" name="Text 18"/>
           <p:cNvSpPr txBox="1"/>
           <p:nvPr/>
         </p:nvSpPr>
         <p:spPr>
           <a:xfrm>
-            <a:off x="1682496" y="1508760"/>
-            <a:ext cx="9272016" cy="685800"/>
+            <a:off x="1699321" y="1957548"/>
+            <a:ext cx="9255191" cy="839785"/>
           </a:xfrm>
           <a:prstGeom prst="rect">
             <a:avLst/>
@@ -15332,7 +15799,7 @@
                 <a:ea typeface="Pretendard" pitchFamily="34" charset="-122"/>
                 <a:cs typeface="Pretendard" pitchFamily="34" charset="-120"/>
               </a:rPr>
-              <a:t>Plain / clean</a:t>
+              <a:t>Clean / minimalism</a:t>
             </a:r>
             <a:pPr algn="l" indent="0" marL="0">
               <a:lnSpc>
@@ -15349,7 +15816,7 @@
                 <a:ea typeface="Pretendard" pitchFamily="34" charset="-122"/>
                 <a:cs typeface="Pretendard" pitchFamily="34" charset="-120"/>
               </a:rPr>
-              <a:t>  low-decoration baselines.</a:t>
+              <a:t>  restrained structural baselines.</a:t>
             </a:r>
             <a:endParaRPr lang="en-US" sz="2200" dirty="0"/>
           </a:p>
@@ -15357,18 +15824,18 @@
       </p:sp>
       <p:sp>
         <p:nvSpPr>
-          <p:cNvPr id="24" name="Shape 18"/>
-          <p:cNvSpPr/>
-          <p:nvPr/>
-        </p:nvSpPr>
-        <p:spPr>
-          <a:xfrm>
-            <a:off x="1097280" y="2766060"/>
-            <a:ext cx="457200" cy="457200"/>
+          <p:cNvPr id="25" name="Shape 19"/>
+          <p:cNvSpPr/>
+          <p:nvPr/>
+        </p:nvSpPr>
+        <p:spPr>
+          <a:xfrm>
+            <a:off x="1097280" y="3466308"/>
+            <a:ext cx="474025" cy="474025"/>
           </a:xfrm>
           <a:prstGeom prst="roundRect">
             <a:avLst>
-              <a:gd name="adj" fmla="val 8000"/>
+              <a:gd name="adj" fmla="val 7716"/>
             </a:avLst>
           </a:prstGeom>
           <a:solidFill>
@@ -15384,7 +15851,7 @@
       </p:sp>
       <p:pic>
         <p:nvPicPr>
-          <p:cNvPr id="25" name="Image 4" descr="verified icon from tabler-icons (MIT)">    </p:cNvPr>
+          <p:cNvPr id="26" name="Image 4" descr="verified icon from tabler-icons (MIT)">    </p:cNvPr>
           <p:cNvPicPr>
             <a:picLocks noChangeAspect="1"/>
           </p:cNvPicPr>
@@ -15404,8 +15871,8 @@
         </p:blipFill>
         <p:spPr>
           <a:xfrm>
-            <a:off x="1170432" y="2839212"/>
-            <a:ext cx="310896" cy="310896"/>
+            <a:off x="1170432" y="3539460"/>
+            <a:ext cx="327721" cy="327721"/>
           </a:xfrm>
           <a:prstGeom prst="rect">
             <a:avLst/>
@@ -15414,14 +15881,14 @@
       </p:pic>
       <p:sp>
         <p:nvSpPr>
-          <p:cNvPr id="26" name="Text 19"/>
+          <p:cNvPr id="27" name="Text 20"/>
           <p:cNvSpPr txBox="1"/>
           <p:nvPr/>
         </p:nvSpPr>
         <p:spPr>
           <a:xfrm>
-            <a:off x="1682496" y="2651760"/>
-            <a:ext cx="9272016" cy="685800"/>
+            <a:off x="1699321" y="3283428"/>
+            <a:ext cx="9255191" cy="839785"/>
           </a:xfrm>
           <a:prstGeom prst="rect">
             <a:avLst/>
@@ -15473,18 +15940,18 @@
       </p:sp>
       <p:sp>
         <p:nvSpPr>
-          <p:cNvPr id="27" name="Shape 20"/>
-          <p:cNvSpPr/>
-          <p:nvPr/>
-        </p:nvSpPr>
-        <p:spPr>
-          <a:xfrm>
-            <a:off x="1097280" y="3909060"/>
-            <a:ext cx="457200" cy="457200"/>
+          <p:cNvPr id="28" name="Shape 21"/>
+          <p:cNvSpPr/>
+          <p:nvPr/>
+        </p:nvSpPr>
+        <p:spPr>
+          <a:xfrm>
+            <a:off x="1097280" y="4783044"/>
+            <a:ext cx="474025" cy="474025"/>
           </a:xfrm>
           <a:prstGeom prst="roundRect">
             <a:avLst>
-              <a:gd name="adj" fmla="val 8000"/>
+              <a:gd name="adj" fmla="val 7716"/>
             </a:avLst>
           </a:prstGeom>
           <a:solidFill>
@@ -15500,7 +15967,7 @@
       </p:sp>
       <p:pic>
         <p:nvPicPr>
-          <p:cNvPr id="28" name="Image 5" descr="spark icon from tabler-icons (MIT)">    </p:cNvPr>
+          <p:cNvPr id="29" name="Image 5" descr="spark icon from tabler-icons (MIT)">    </p:cNvPr>
           <p:cNvPicPr>
             <a:picLocks noChangeAspect="1"/>
           </p:cNvPicPr>
@@ -15520,8 +15987,8 @@
         </p:blipFill>
         <p:spPr>
           <a:xfrm>
-            <a:off x="1170432" y="3982212"/>
-            <a:ext cx="310896" cy="310896"/>
+            <a:off x="1170432" y="4856196"/>
+            <a:ext cx="327721" cy="327721"/>
           </a:xfrm>
           <a:prstGeom prst="rect">
             <a:avLst/>
@@ -15530,14 +15997,14 @@
       </p:pic>
       <p:sp>
         <p:nvSpPr>
-          <p:cNvPr id="29" name="Text 21"/>
+          <p:cNvPr id="30" name="Text 22"/>
           <p:cNvSpPr txBox="1"/>
           <p:nvPr/>
         </p:nvSpPr>
         <p:spPr>
           <a:xfrm>
-            <a:off x="1682496" y="3794760"/>
-            <a:ext cx="9272016" cy="685800"/>
+            <a:off x="1699321" y="4600164"/>
+            <a:ext cx="9255191" cy="839785"/>
           </a:xfrm>
           <a:prstGeom prst="rect">
             <a:avLst/>

--- a/docs/theme-preview/pptx/newmorphism.pptx
+++ b/docs/theme-preview/pptx/newmorphism.pptx
@@ -9238,7 +9238,7 @@
       </p:sp>
       <p:pic>
         <p:nvPicPr>
-          <p:cNvPr id="27" name="Image 4" descr="flow icon from tabler-icons (MIT)">    </p:cNvPr>
+          <p:cNvPr id="27" name="Image 4" descr="article icon from tabler-icons (MIT)">    </p:cNvPr>
           <p:cNvPicPr>
             <a:picLocks noChangeAspect="1"/>
           </p:cNvPicPr>
@@ -9354,7 +9354,7 @@
       </p:sp>
       <p:pic>
         <p:nvPicPr>
-          <p:cNvPr id="30" name="Image 5" descr="verified icon from tabler-icons (MIT)">    </p:cNvPr>
+          <p:cNvPr id="30" name="Image 5" descr="article icon from tabler-icons (MIT)">    </p:cNvPr>
           <p:cNvPicPr>
             <a:picLocks noChangeAspect="1"/>
           </p:cNvPicPr>
@@ -9470,7 +9470,7 @@
       </p:sp>
       <p:pic>
         <p:nvPicPr>
-          <p:cNvPr id="33" name="Image 6" descr="spark icon from tabler-icons (MIT)">    </p:cNvPr>
+          <p:cNvPr id="33" name="Image 6" descr="article icon from tabler-icons (MIT)">    </p:cNvPr>
           <p:cNvPicPr>
             <a:picLocks noChangeAspect="1"/>
           </p:cNvPicPr>
@@ -9586,7 +9586,7 @@
       </p:sp>
       <p:pic>
         <p:nvPicPr>
-          <p:cNvPr id="36" name="Image 7" descr="chart icon from tabler-icons (MIT)">    </p:cNvPr>
+          <p:cNvPr id="36" name="Image 7" descr="table icon from tabler-icons (MIT)">    </p:cNvPr>
           <p:cNvPicPr>
             <a:picLocks noChangeAspect="1"/>
           </p:cNvPicPr>
@@ -10529,7 +10529,7 @@
       </p:sp>
       <p:pic>
         <p:nvPicPr>
-          <p:cNvPr id="27" name="Image 4" descr="flow icon from tabler-icons (MIT)">    </p:cNvPr>
+          <p:cNvPr id="27" name="Image 4" descr="verified icon from tabler-icons (MIT)">    </p:cNvPr>
           <p:cNvPicPr>
             <a:picLocks noChangeAspect="1"/>
           </p:cNvPicPr>
@@ -10645,7 +10645,7 @@
       </p:sp>
       <p:pic>
         <p:nvPicPr>
-          <p:cNvPr id="30" name="Image 5" descr="verified icon from tabler-icons (MIT)">    </p:cNvPr>
+          <p:cNvPr id="30" name="Image 5" descr="table icon from tabler-icons (MIT)">    </p:cNvPr>
           <p:cNvPicPr>
             <a:picLocks noChangeAspect="1"/>
           </p:cNvPicPr>
@@ -10761,7 +10761,7 @@
       </p:sp>
       <p:pic>
         <p:nvPicPr>
-          <p:cNvPr id="33" name="Image 6" descr="spark icon from tabler-icons (MIT)">    </p:cNvPr>
+          <p:cNvPr id="33" name="Image 6" descr="article icon from tabler-icons (MIT)">    </p:cNvPr>
           <p:cNvPicPr>
             <a:picLocks noChangeAspect="1"/>
           </p:cNvPicPr>
@@ -10877,7 +10877,7 @@
       </p:sp>
       <p:pic>
         <p:nvPicPr>
-          <p:cNvPr id="36" name="Image 7" descr="chart icon from tabler-icons (MIT)">    </p:cNvPr>
+          <p:cNvPr id="36" name="Image 7" descr="article icon from tabler-icons (MIT)">    </p:cNvPr>
           <p:cNvPicPr>
             <a:picLocks noChangeAspect="1"/>
           </p:cNvPicPr>
@@ -14352,7 +14352,7 @@
       </p:sp>
       <p:pic>
         <p:nvPicPr>
-          <p:cNvPr id="23" name="Image 3" descr="flow icon from tabler-icons (MIT)">    </p:cNvPr>
+          <p:cNvPr id="23" name="Image 3" descr="article icon from tabler-icons (MIT)">    </p:cNvPr>
           <p:cNvPicPr>
             <a:picLocks noChangeAspect="1"/>
           </p:cNvPicPr>
@@ -14468,7 +14468,7 @@
       </p:sp>
       <p:pic>
         <p:nvPicPr>
-          <p:cNvPr id="26" name="Image 4" descr="verified icon from tabler-icons (MIT)">    </p:cNvPr>
+          <p:cNvPr id="26" name="Image 4" descr="chart icon from tabler-icons (MIT)">    </p:cNvPr>
           <p:cNvPicPr>
             <a:picLocks noChangeAspect="1"/>
           </p:cNvPicPr>
@@ -14584,7 +14584,7 @@
       </p:sp>
       <p:pic>
         <p:nvPicPr>
-          <p:cNvPr id="29" name="Image 5" descr="spark icon from tabler-icons (MIT)">    </p:cNvPr>
+          <p:cNvPr id="29" name="Image 5" descr="article icon from tabler-icons (MIT)">    </p:cNvPr>
           <p:cNvPicPr>
             <a:picLocks noChangeAspect="1"/>
           </p:cNvPicPr>
@@ -15735,7 +15735,7 @@
       </p:sp>
       <p:pic>
         <p:nvPicPr>
-          <p:cNvPr id="23" name="Image 3" descr="flow icon from tabler-icons (MIT)">    </p:cNvPr>
+          <p:cNvPr id="23" name="Image 3" descr="article icon from tabler-icons (MIT)">    </p:cNvPr>
           <p:cNvPicPr>
             <a:picLocks noChangeAspect="1"/>
           </p:cNvPicPr>
@@ -15851,7 +15851,7 @@
       </p:sp>
       <p:pic>
         <p:nvPicPr>
-          <p:cNvPr id="26" name="Image 4" descr="verified icon from tabler-icons (MIT)">    </p:cNvPr>
+          <p:cNvPr id="26" name="Image 4" descr="article icon from tabler-icons (MIT)">    </p:cNvPr>
           <p:cNvPicPr>
             <a:picLocks noChangeAspect="1"/>
           </p:cNvPicPr>
@@ -15967,7 +15967,7 @@
       </p:sp>
       <p:pic>
         <p:nvPicPr>
-          <p:cNvPr id="29" name="Image 5" descr="spark icon from tabler-icons (MIT)">    </p:cNvPr>
+          <p:cNvPr id="29" name="Image 5" descr="article icon from tabler-icons (MIT)">    </p:cNvPr>
           <p:cNvPicPr>
             <a:picLocks noChangeAspect="1"/>
           </p:cNvPicPr>
@@ -17253,7 +17253,7 @@
       </p:sp>
       <p:pic>
         <p:nvPicPr>
-          <p:cNvPr id="27" name="Image 4" descr="flow icon from tabler-icons (MIT)">    </p:cNvPr>
+          <p:cNvPr id="27" name="Image 4" descr="table icon from tabler-icons (MIT)">    </p:cNvPr>
           <p:cNvPicPr>
             <a:picLocks noChangeAspect="1"/>
           </p:cNvPicPr>
@@ -17369,7 +17369,7 @@
       </p:sp>
       <p:pic>
         <p:nvPicPr>
-          <p:cNvPr id="30" name="Image 5" descr="verified icon from tabler-icons (MIT)">    </p:cNvPr>
+          <p:cNvPr id="30" name="Image 5" descr="article icon from tabler-icons (MIT)">    </p:cNvPr>
           <p:cNvPicPr>
             <a:picLocks noChangeAspect="1"/>
           </p:cNvPicPr>
@@ -17485,7 +17485,7 @@
       </p:sp>
       <p:pic>
         <p:nvPicPr>
-          <p:cNvPr id="33" name="Image 6" descr="spark icon from tabler-icons (MIT)">    </p:cNvPr>
+          <p:cNvPr id="33" name="Image 6" descr="article icon from tabler-icons (MIT)">    </p:cNvPr>
           <p:cNvPicPr>
             <a:picLocks noChangeAspect="1"/>
           </p:cNvPicPr>
@@ -17601,7 +17601,7 @@
       </p:sp>
       <p:pic>
         <p:nvPicPr>
-          <p:cNvPr id="36" name="Image 7" descr="chart icon from tabler-icons (MIT)">    </p:cNvPr>
+          <p:cNvPr id="36" name="Image 7" descr="table icon from tabler-icons (MIT)">    </p:cNvPr>
           <p:cNvPicPr>
             <a:picLocks noChangeAspect="1"/>
           </p:cNvPicPr>

--- a/docs/theme-preview/pptx/newmorphism.pptx
+++ b/docs/theme-preview/pptx/newmorphism.pptx
@@ -12576,7 +12576,7 @@
                 <a:ea typeface="Pretendard" pitchFamily="34" charset="-122"/>
                 <a:cs typeface="Pretendard" pitchFamily="34" charset="-120"/>
               </a:rPr>
-              <a:t>목차</a:t>
+              <a:t>Agenda</a:t>
             </a:r>
             <a:endParaRPr lang="en-US" sz="3800" dirty="0"/>
           </a:p>

--- a/docs/theme-preview/pptx/newmorphism.pptx
+++ b/docs/theme-preview/pptx/newmorphism.pptx
@@ -3096,28 +3096,138 @@
         </p:nvSpPr>
         <p:spPr>
           <a:xfrm>
-            <a:off x="914400" y="1463040"/>
-            <a:ext cx="10241280" cy="73152"/>
-          </a:xfrm>
-          <a:prstGeom prst="rect">
-            <a:avLst/>
-          </a:prstGeom>
-          <a:solidFill>
-            <a:srgbClr val="4F6F8F"/>
-          </a:solidFill>
-          <a:ln w="12700">
-            <a:solidFill>
-              <a:srgbClr val="4F6F8F">
+            <a:off x="955548" y="1467612"/>
+            <a:ext cx="10241280" cy="4526280"/>
+          </a:xfrm>
+          <a:prstGeom prst="roundRect">
+            <a:avLst>
+              <a:gd name="adj" fmla="val 1212"/>
+            </a:avLst>
+          </a:prstGeom>
+          <a:solidFill>
+            <a:srgbClr val="B8C3D2">
+              <a:alpha val="26000"/>
+            </a:srgbClr>
+          </a:solidFill>
+          <a:ln w="12700">
+            <a:solidFill>
+              <a:srgbClr val="D5DCE7">
                 <a:alpha val="0"/>
               </a:srgbClr>
             </a:solidFill>
             <a:prstDash val="solid"/>
           </a:ln>
-        </p:spPr>
-      </p:sp>
-      <p:sp>
-        <p:nvSpPr>
-          <p:cNvPr id="6" name="Text 4"/>
+          <a:effectLst>
+            <a:outerShdw sx="100000" sy="100000" kx="0" ky="0" algn="bl" rotWithShape="0" blurRad="13970" dist="50800" dir="2700000">
+              <a:srgbClr val="AAB5C4">
+                <a:alpha val="20000"/>
+              </a:srgbClr>
+            </a:outerShdw>
+          </a:effectLst>
+        </p:spPr>
+      </p:sp>
+      <p:sp>
+        <p:nvSpPr>
+          <p:cNvPr id="6" name="Shape 4"/>
+          <p:cNvSpPr/>
+          <p:nvPr/>
+        </p:nvSpPr>
+        <p:spPr>
+          <a:xfrm>
+            <a:off x="882396" y="1385316"/>
+            <a:ext cx="10241280" cy="4526280"/>
+          </a:xfrm>
+          <a:prstGeom prst="roundRect">
+            <a:avLst>
+              <a:gd name="adj" fmla="val 1212"/>
+            </a:avLst>
+          </a:prstGeom>
+          <a:solidFill>
+            <a:srgbClr val="FFFFFF">
+              <a:alpha val="42000"/>
+            </a:srgbClr>
+          </a:solidFill>
+          <a:ln w="12700">
+            <a:solidFill>
+              <a:srgbClr val="FFFFFF">
+                <a:alpha val="0"/>
+              </a:srgbClr>
+            </a:solidFill>
+            <a:prstDash val="solid"/>
+          </a:ln>
+          <a:effectLst>
+            <a:outerShdw sx="100000" sy="100000" kx="0" ky="0" algn="bl" rotWithShape="0" blurRad="10160" dist="50800" dir="13500000">
+              <a:srgbClr val="FFFFFF">
+                <a:alpha val="36000"/>
+              </a:srgbClr>
+            </a:outerShdw>
+          </a:effectLst>
+        </p:spPr>
+      </p:sp>
+      <p:sp>
+        <p:nvSpPr>
+          <p:cNvPr id="7" name="Shape 5"/>
+          <p:cNvSpPr/>
+          <p:nvPr/>
+        </p:nvSpPr>
+        <p:spPr>
+          <a:xfrm>
+            <a:off x="914400" y="1417320"/>
+            <a:ext cx="10241280" cy="4526280"/>
+          </a:xfrm>
+          <a:prstGeom prst="roundRect">
+            <a:avLst>
+              <a:gd name="adj" fmla="val 1212"/>
+            </a:avLst>
+          </a:prstGeom>
+          <a:solidFill>
+            <a:srgbClr val="E9EEF5">
+              <a:alpha val="6000"/>
+            </a:srgbClr>
+          </a:solidFill>
+          <a:ln w="12700">
+            <a:solidFill>
+              <a:srgbClr val="FFFFFF">
+                <a:alpha val="28000"/>
+              </a:srgbClr>
+            </a:solidFill>
+            <a:prstDash val="solid"/>
+          </a:ln>
+        </p:spPr>
+      </p:sp>
+      <p:pic>
+        <p:nvPicPr>
+          <p:cNvPr id="8" name="Image 0" descr="preencoded.png">    </p:cNvPr>
+          <p:cNvPicPr>
+            <a:picLocks noChangeAspect="1"/>
+          </p:cNvPicPr>
+          <p:nvPr/>
+        </p:nvPicPr>
+        <p:blipFill>
+          <a:blip r:embed="rId1">
+            <a:extLst>
+              <a:ext uri="{96DAC541-7B7A-43D3-8B79-37D633B846F1}">
+                <asvg:svgBlip xmlns:asvg="http://schemas.microsoft.com/office/drawing/2016/SVG/main" r:embed="rId2"/>
+              </a:ext>
+            </a:extLst>
+          </a:blip>
+          <a:stretch>
+            <a:fillRect/>
+          </a:stretch>
+        </p:blipFill>
+        <p:spPr>
+          <a:xfrm>
+            <a:off x="914400" y="1417320"/>
+            <a:ext cx="10241280" cy="4526280"/>
+          </a:xfrm>
+          <a:prstGeom prst="rect">
+            <a:avLst/>
+          </a:prstGeom>
+        </p:spPr>
+      </p:pic>
+      <p:sp>
+        <p:nvSpPr>
+          <p:cNvPr id="9" name="Text 6"/>
           <p:cNvSpPr txBox="1"/>
           <p:nvPr/>
         </p:nvSpPr>
@@ -3172,8 +3282,8 @@
           </p:nvPr>
         </p:nvGraphicFramePr>
         <p:xfrm>
-          <a:off x="914400" y="1463040"/>
-          <a:ext cx="10241280" cy="4480560"/>
+          <a:off x="914400" y="1417320"/>
+          <a:ext cx="10241280" cy="4526280"/>
         </p:xfrm>
         <a:graphic>
           <a:graphicData uri="http://schemas.openxmlformats.org/drawingml/2006/table">
@@ -3184,7 +3294,7 @@
                 <a:gridCol w="3413760"/>
                 <a:gridCol w="3413760"/>
               </a:tblGrid>
-              <a:tr h="896112">
+              <a:tr h="905256">
                 <a:tc>
                   <a:txBody>
                     <a:bodyPr/>
@@ -3194,7 +3304,7 @@
                         <a:buNone/>
                       </a:pPr>
                       <a:r>
-                        <a:rPr lang="en-US" sz="2200" b="1" dirty="0">
+                        <a:rPr lang="en-US" sz="1800" b="1" dirty="0">
                           <a:solidFill>
                             <a:srgbClr val="FFFFFF"/>
                           </a:solidFill>
@@ -3204,7 +3314,7 @@
                         </a:rPr>
                         <a:t>Object</a:t>
                       </a:r>
-                      <a:endParaRPr lang="en-US" sz="2200" dirty="0">
+                      <a:endParaRPr lang="en-US" sz="1800" dirty="0">
                         <a:latin typeface="Pretendard" charset="0"/>
                         <a:ea typeface="Pretendard" charset="0"/>
                         <a:cs typeface="Pretendard" charset="0"/>
@@ -3262,7 +3372,7 @@
                         <a:buNone/>
                       </a:pPr>
                       <a:r>
-                        <a:rPr lang="en-US" sz="2200" b="1" dirty="0">
+                        <a:rPr lang="en-US" sz="1800" b="1" dirty="0">
                           <a:solidFill>
                             <a:srgbClr val="FFFFFF"/>
                           </a:solidFill>
@@ -3272,7 +3382,7 @@
                         </a:rPr>
                         <a:t>Renderer expectation</a:t>
                       </a:r>
-                      <a:endParaRPr lang="en-US" sz="2200" dirty="0">
+                      <a:endParaRPr lang="en-US" sz="1800" dirty="0">
                         <a:latin typeface="Pretendard" charset="0"/>
                         <a:ea typeface="Pretendard" charset="0"/>
                         <a:cs typeface="Pretendard" charset="0"/>
@@ -3330,7 +3440,7 @@
                         <a:buNone/>
                       </a:pPr>
                       <a:r>
-                        <a:rPr lang="en-US" sz="2200" b="1" dirty="0">
+                        <a:rPr lang="en-US" sz="1800" b="1" dirty="0">
                           <a:solidFill>
                             <a:srgbClr val="FFFFFF"/>
                           </a:solidFill>
@@ -3340,7 +3450,7 @@
                         </a:rPr>
                         <a:t>QA signal</a:t>
                       </a:r>
-                      <a:endParaRPr lang="en-US" sz="2200" dirty="0">
+                      <a:endParaRPr lang="en-US" sz="1800" dirty="0">
                         <a:latin typeface="Pretendard" charset="0"/>
                         <a:ea typeface="Pretendard" charset="0"/>
                         <a:cs typeface="Pretendard" charset="0"/>
@@ -3390,7 +3500,7 @@
                   </a:tcPr>
                 </a:tc>
               </a:tr>
-              <a:tr h="896112">
+              <a:tr h="905256">
                 <a:tc>
                   <a:txBody>
                     <a:bodyPr/>
@@ -3400,7 +3510,7 @@
                         <a:buNone/>
                       </a:pPr>
                       <a:r>
-                        <a:rPr lang="en-US" sz="2200" b="1" dirty="0">
+                        <a:rPr lang="en-US" sz="1800" b="1" dirty="0">
                           <a:solidFill>
                             <a:srgbClr val="243041"/>
                           </a:solidFill>
@@ -3410,7 +3520,7 @@
                         </a:rPr>
                         <a:t>Text box</a:t>
                       </a:r>
-                      <a:endParaRPr lang="en-US" sz="2200" dirty="0">
+                      <a:endParaRPr lang="en-US" sz="1800" dirty="0">
                         <a:latin typeface="Pretendard" charset="0"/>
                         <a:ea typeface="Pretendard" charset="0"/>
                         <a:cs typeface="Pretendard" charset="0"/>
@@ -3465,7 +3575,7 @@
                         <a:buNone/>
                       </a:pPr>
                       <a:r>
-                        <a:rPr lang="en-US" sz="2200" dirty="0">
+                        <a:rPr lang="en-US" sz="1800" dirty="0">
                           <a:solidFill>
                             <a:srgbClr val="243041"/>
                           </a:solidFill>
@@ -3475,7 +3585,7 @@
                         </a:rPr>
                         <a:t>editable, middle aligned</a:t>
                       </a:r>
-                      <a:endParaRPr lang="en-US" sz="2200" dirty="0">
+                      <a:endParaRPr lang="en-US" sz="1800" dirty="0">
                         <a:latin typeface="Pretendard" charset="0"/>
                         <a:ea typeface="Pretendard" charset="0"/>
                         <a:cs typeface="Pretendard" charset="0"/>
@@ -3530,7 +3640,7 @@
                         <a:buNone/>
                       </a:pPr>
                       <a:r>
-                        <a:rPr lang="en-US" sz="2200" dirty="0">
+                        <a:rPr lang="en-US" sz="1800" dirty="0">
                           <a:solidFill>
                             <a:srgbClr val="243041"/>
                           </a:solidFill>
@@ -3540,7 +3650,7 @@
                         </a:rPr>
                         <a:t>readable minimum size</a:t>
                       </a:r>
-                      <a:endParaRPr lang="en-US" sz="2200" dirty="0">
+                      <a:endParaRPr lang="en-US" sz="1800" dirty="0">
                         <a:latin typeface="Pretendard" charset="0"/>
                         <a:ea typeface="Pretendard" charset="0"/>
                         <a:cs typeface="Pretendard" charset="0"/>
@@ -3587,7 +3697,7 @@
                   </a:tcPr>
                 </a:tc>
               </a:tr>
-              <a:tr h="896112">
+              <a:tr h="905256">
                 <a:tc>
                   <a:txBody>
                     <a:bodyPr/>
@@ -3597,7 +3707,7 @@
                         <a:buNone/>
                       </a:pPr>
                       <a:r>
-                        <a:rPr lang="en-US" sz="2200" b="1" dirty="0">
+                        <a:rPr lang="en-US" sz="1800" b="1" dirty="0">
                           <a:solidFill>
                             <a:srgbClr val="243041"/>
                           </a:solidFill>
@@ -3607,7 +3717,7 @@
                         </a:rPr>
                         <a:t>Table</a:t>
                       </a:r>
-                      <a:endParaRPr lang="en-US" sz="2200" dirty="0">
+                      <a:endParaRPr lang="en-US" sz="1800" dirty="0">
                         <a:latin typeface="Pretendard" charset="0"/>
                         <a:ea typeface="Pretendard" charset="0"/>
                         <a:cs typeface="Pretendard" charset="0"/>
@@ -3667,7 +3777,7 @@
                         <a:buNone/>
                       </a:pPr>
                       <a:r>
-                        <a:rPr lang="en-US" sz="2200" dirty="0">
+                        <a:rPr lang="en-US" sz="1800" dirty="0">
                           <a:solidFill>
                             <a:srgbClr val="243041"/>
                           </a:solidFill>
@@ -3677,7 +3787,7 @@
                         </a:rPr>
                         <a:t>native table object</a:t>
                       </a:r>
-                      <a:endParaRPr lang="en-US" sz="2200" dirty="0">
+                      <a:endParaRPr lang="en-US" sz="1800" dirty="0">
                         <a:latin typeface="Pretendard" charset="0"/>
                         <a:ea typeface="Pretendard" charset="0"/>
                         <a:cs typeface="Pretendard" charset="0"/>
@@ -3737,7 +3847,7 @@
                         <a:buNone/>
                       </a:pPr>
                       <a:r>
-                        <a:rPr lang="en-US" sz="2200" dirty="0">
+                        <a:rPr lang="en-US" sz="1800" dirty="0">
                           <a:solidFill>
                             <a:srgbClr val="243041"/>
                           </a:solidFill>
@@ -3747,7 +3857,7 @@
                         </a:rPr>
                         <a:t>header fill and cell padding</a:t>
                       </a:r>
-                      <a:endParaRPr lang="en-US" sz="2200" dirty="0">
+                      <a:endParaRPr lang="en-US" sz="1800" dirty="0">
                         <a:latin typeface="Pretendard" charset="0"/>
                         <a:ea typeface="Pretendard" charset="0"/>
                         <a:cs typeface="Pretendard" charset="0"/>
@@ -3799,7 +3909,7 @@
                   </a:tcPr>
                 </a:tc>
               </a:tr>
-              <a:tr h="896112">
+              <a:tr h="905256">
                 <a:tc>
                   <a:txBody>
                     <a:bodyPr/>
@@ -3809,7 +3919,7 @@
                         <a:buNone/>
                       </a:pPr>
                       <a:r>
-                        <a:rPr lang="en-US" sz="2200" b="1" dirty="0">
+                        <a:rPr lang="en-US" sz="1800" b="1" dirty="0">
                           <a:solidFill>
                             <a:srgbClr val="243041"/>
                           </a:solidFill>
@@ -3819,7 +3929,7 @@
                         </a:rPr>
                         <a:t>Diagram</a:t>
                       </a:r>
-                      <a:endParaRPr lang="en-US" sz="2200" dirty="0">
+                      <a:endParaRPr lang="en-US" sz="1800" dirty="0">
                         <a:latin typeface="Pretendard" charset="0"/>
                         <a:ea typeface="Pretendard" charset="0"/>
                         <a:cs typeface="Pretendard" charset="0"/>
@@ -3874,7 +3984,7 @@
                         <a:buNone/>
                       </a:pPr>
                       <a:r>
-                        <a:rPr lang="en-US" sz="2200" dirty="0">
+                        <a:rPr lang="en-US" sz="1800" dirty="0">
                           <a:solidFill>
                             <a:srgbClr val="243041"/>
                           </a:solidFill>
@@ -3884,7 +3994,7 @@
                         </a:rPr>
                         <a:t>nodes and connectors</a:t>
                       </a:r>
-                      <a:endParaRPr lang="en-US" sz="2200" dirty="0">
+                      <a:endParaRPr lang="en-US" sz="1800" dirty="0">
                         <a:latin typeface="Pretendard" charset="0"/>
                         <a:ea typeface="Pretendard" charset="0"/>
                         <a:cs typeface="Pretendard" charset="0"/>
@@ -3939,7 +4049,7 @@
                         <a:buNone/>
                       </a:pPr>
                       <a:r>
-                        <a:rPr lang="en-US" sz="2200" dirty="0">
+                        <a:rPr lang="en-US" sz="1800" dirty="0">
                           <a:solidFill>
                             <a:srgbClr val="243041"/>
                           </a:solidFill>
@@ -3949,7 +4059,7 @@
                         </a:rPr>
                         <a:t>no clipped labels</a:t>
                       </a:r>
-                      <a:endParaRPr lang="en-US" sz="2200" dirty="0">
+                      <a:endParaRPr lang="en-US" sz="1800" dirty="0">
                         <a:latin typeface="Pretendard" charset="0"/>
                         <a:ea typeface="Pretendard" charset="0"/>
                         <a:cs typeface="Pretendard" charset="0"/>
@@ -3996,7 +4106,7 @@
                   </a:tcPr>
                 </a:tc>
               </a:tr>
-              <a:tr h="896112">
+              <a:tr h="905256">
                 <a:tc>
                   <a:txBody>
                     <a:bodyPr/>
@@ -4006,7 +4116,7 @@
                         <a:buNone/>
                       </a:pPr>
                       <a:r>
-                        <a:rPr lang="en-US" sz="2200" b="1" dirty="0">
+                        <a:rPr lang="en-US" sz="1800" b="1" dirty="0">
                           <a:solidFill>
                             <a:srgbClr val="243041"/>
                           </a:solidFill>
@@ -4016,7 +4126,7 @@
                         </a:rPr>
                         <a:t>Chart</a:t>
                       </a:r>
-                      <a:endParaRPr lang="en-US" sz="2200" dirty="0">
+                      <a:endParaRPr lang="en-US" sz="1800" dirty="0">
                         <a:latin typeface="Pretendard" charset="0"/>
                         <a:ea typeface="Pretendard" charset="0"/>
                         <a:cs typeface="Pretendard" charset="0"/>
@@ -4076,7 +4186,7 @@
                         <a:buNone/>
                       </a:pPr>
                       <a:r>
-                        <a:rPr lang="en-US" sz="2200" dirty="0">
+                        <a:rPr lang="en-US" sz="1800" dirty="0">
                           <a:solidFill>
                             <a:srgbClr val="243041"/>
                           </a:solidFill>
@@ -4086,7 +4196,7 @@
                         </a:rPr>
                         <a:t>theme-colored data object</a:t>
                       </a:r>
-                      <a:endParaRPr lang="en-US" sz="2200" dirty="0">
+                      <a:endParaRPr lang="en-US" sz="1800" dirty="0">
                         <a:latin typeface="Pretendard" charset="0"/>
                         <a:ea typeface="Pretendard" charset="0"/>
                         <a:cs typeface="Pretendard" charset="0"/>
@@ -4146,7 +4256,7 @@
                         <a:buNone/>
                       </a:pPr>
                       <a:r>
-                        <a:rPr lang="en-US" sz="2200" dirty="0">
+                        <a:rPr lang="en-US" sz="1800" dirty="0">
                           <a:solidFill>
                             <a:srgbClr val="243041"/>
                           </a:solidFill>
@@ -4156,7 +4266,7 @@
                         </a:rPr>
                         <a:t>contrast and value clarity</a:t>
                       </a:r>
-                      <a:endParaRPr lang="en-US" sz="2200" dirty="0">
+                      <a:endParaRPr lang="en-US" sz="1800" dirty="0">
                         <a:latin typeface="Pretendard" charset="0"/>
                         <a:ea typeface="Pretendard" charset="0"/>
                         <a:cs typeface="Pretendard" charset="0"/>
@@ -4839,28 +4949,138 @@
         </p:nvSpPr>
         <p:spPr>
           <a:xfrm>
-            <a:off x="914400" y="1463040"/>
-            <a:ext cx="10241280" cy="73152"/>
-          </a:xfrm>
-          <a:prstGeom prst="rect">
-            <a:avLst/>
-          </a:prstGeom>
-          <a:solidFill>
-            <a:srgbClr val="4F6F8F"/>
-          </a:solidFill>
-          <a:ln w="12700">
-            <a:solidFill>
-              <a:srgbClr val="4F6F8F">
+            <a:off x="955548" y="1467612"/>
+            <a:ext cx="10241280" cy="4526280"/>
+          </a:xfrm>
+          <a:prstGeom prst="roundRect">
+            <a:avLst>
+              <a:gd name="adj" fmla="val 1212"/>
+            </a:avLst>
+          </a:prstGeom>
+          <a:solidFill>
+            <a:srgbClr val="B8C3D2">
+              <a:alpha val="26000"/>
+            </a:srgbClr>
+          </a:solidFill>
+          <a:ln w="12700">
+            <a:solidFill>
+              <a:srgbClr val="D5DCE7">
                 <a:alpha val="0"/>
               </a:srgbClr>
             </a:solidFill>
             <a:prstDash val="solid"/>
           </a:ln>
-        </p:spPr>
-      </p:sp>
-      <p:sp>
-        <p:nvSpPr>
-          <p:cNvPr id="6" name="Text 4"/>
+          <a:effectLst>
+            <a:outerShdw sx="100000" sy="100000" kx="0" ky="0" algn="bl" rotWithShape="0" blurRad="13970" dist="50800" dir="2700000">
+              <a:srgbClr val="AAB5C4">
+                <a:alpha val="20000"/>
+              </a:srgbClr>
+            </a:outerShdw>
+          </a:effectLst>
+        </p:spPr>
+      </p:sp>
+      <p:sp>
+        <p:nvSpPr>
+          <p:cNvPr id="6" name="Shape 4"/>
+          <p:cNvSpPr/>
+          <p:nvPr/>
+        </p:nvSpPr>
+        <p:spPr>
+          <a:xfrm>
+            <a:off x="882396" y="1385316"/>
+            <a:ext cx="10241280" cy="4526280"/>
+          </a:xfrm>
+          <a:prstGeom prst="roundRect">
+            <a:avLst>
+              <a:gd name="adj" fmla="val 1212"/>
+            </a:avLst>
+          </a:prstGeom>
+          <a:solidFill>
+            <a:srgbClr val="FFFFFF">
+              <a:alpha val="42000"/>
+            </a:srgbClr>
+          </a:solidFill>
+          <a:ln w="12700">
+            <a:solidFill>
+              <a:srgbClr val="FFFFFF">
+                <a:alpha val="0"/>
+              </a:srgbClr>
+            </a:solidFill>
+            <a:prstDash val="solid"/>
+          </a:ln>
+          <a:effectLst>
+            <a:outerShdw sx="100000" sy="100000" kx="0" ky="0" algn="bl" rotWithShape="0" blurRad="10160" dist="50800" dir="13500000">
+              <a:srgbClr val="FFFFFF">
+                <a:alpha val="36000"/>
+              </a:srgbClr>
+            </a:outerShdw>
+          </a:effectLst>
+        </p:spPr>
+      </p:sp>
+      <p:sp>
+        <p:nvSpPr>
+          <p:cNvPr id="7" name="Shape 5"/>
+          <p:cNvSpPr/>
+          <p:nvPr/>
+        </p:nvSpPr>
+        <p:spPr>
+          <a:xfrm>
+            <a:off x="914400" y="1417320"/>
+            <a:ext cx="10241280" cy="4526280"/>
+          </a:xfrm>
+          <a:prstGeom prst="roundRect">
+            <a:avLst>
+              <a:gd name="adj" fmla="val 1212"/>
+            </a:avLst>
+          </a:prstGeom>
+          <a:solidFill>
+            <a:srgbClr val="E9EEF5">
+              <a:alpha val="6000"/>
+            </a:srgbClr>
+          </a:solidFill>
+          <a:ln w="12700">
+            <a:solidFill>
+              <a:srgbClr val="FFFFFF">
+                <a:alpha val="28000"/>
+              </a:srgbClr>
+            </a:solidFill>
+            <a:prstDash val="solid"/>
+          </a:ln>
+        </p:spPr>
+      </p:sp>
+      <p:pic>
+        <p:nvPicPr>
+          <p:cNvPr id="8" name="Image 0" descr="preencoded.png">    </p:cNvPr>
+          <p:cNvPicPr>
+            <a:picLocks noChangeAspect="1"/>
+          </p:cNvPicPr>
+          <p:nvPr/>
+        </p:nvPicPr>
+        <p:blipFill>
+          <a:blip r:embed="rId1">
+            <a:extLst>
+              <a:ext uri="{96DAC541-7B7A-43D3-8B79-37D633B846F1}">
+                <asvg:svgBlip xmlns:asvg="http://schemas.microsoft.com/office/drawing/2016/SVG/main" r:embed="rId2"/>
+              </a:ext>
+            </a:extLst>
+          </a:blip>
+          <a:stretch>
+            <a:fillRect/>
+          </a:stretch>
+        </p:blipFill>
+        <p:spPr>
+          <a:xfrm>
+            <a:off x="914400" y="1417320"/>
+            <a:ext cx="10241280" cy="4526280"/>
+          </a:xfrm>
+          <a:prstGeom prst="rect">
+            <a:avLst/>
+          </a:prstGeom>
+        </p:spPr>
+      </p:pic>
+      <p:sp>
+        <p:nvSpPr>
+          <p:cNvPr id="9" name="Text 6"/>
           <p:cNvSpPr txBox="1"/>
           <p:nvPr/>
         </p:nvSpPr>
@@ -4915,8 +5135,8 @@
           </p:nvPr>
         </p:nvGraphicFramePr>
         <p:xfrm>
-          <a:off x="914400" y="1463040"/>
-          <a:ext cx="10241280" cy="4480560"/>
+          <a:off x="914400" y="1417320"/>
+          <a:ext cx="10241280" cy="4526280"/>
         </p:xfrm>
         <a:graphic>
           <a:graphicData uri="http://schemas.openxmlformats.org/drawingml/2006/table">
@@ -4927,7 +5147,7 @@
                 <a:gridCol w="3413760"/>
                 <a:gridCol w="3413760"/>
               </a:tblGrid>
-              <a:tr h="1120140">
+              <a:tr h="1131570">
                 <a:tc>
                   <a:txBody>
                     <a:bodyPr/>
@@ -4937,7 +5157,7 @@
                         <a:buNone/>
                       </a:pPr>
                       <a:r>
-                        <a:rPr lang="en-US" sz="2200" b="1" dirty="0">
+                        <a:rPr lang="en-US" sz="1800" b="1" dirty="0">
                           <a:solidFill>
                             <a:srgbClr val="FFFFFF"/>
                           </a:solidFill>
@@ -4947,7 +5167,7 @@
                         </a:rPr>
                         <a:t>Stage</a:t>
                       </a:r>
-                      <a:endParaRPr lang="en-US" sz="2200" dirty="0">
+                      <a:endParaRPr lang="en-US" sz="1800" dirty="0">
                         <a:latin typeface="Pretendard" charset="0"/>
                         <a:ea typeface="Pretendard" charset="0"/>
                         <a:cs typeface="Pretendard" charset="0"/>
@@ -5005,7 +5225,7 @@
                         <a:buNone/>
                       </a:pPr>
                       <a:r>
-                        <a:rPr lang="en-US" sz="2200" b="1" dirty="0">
+                        <a:rPr lang="en-US" sz="1800" b="1" dirty="0">
                           <a:solidFill>
                             <a:srgbClr val="FFFFFF"/>
                           </a:solidFill>
@@ -5015,7 +5235,7 @@
                         </a:rPr>
                         <a:t>Coverage</a:t>
                       </a:r>
-                      <a:endParaRPr lang="en-US" sz="2200" dirty="0">
+                      <a:endParaRPr lang="en-US" sz="1800" dirty="0">
                         <a:latin typeface="Pretendard" charset="0"/>
                         <a:ea typeface="Pretendard" charset="0"/>
                         <a:cs typeface="Pretendard" charset="0"/>
@@ -5073,7 +5293,7 @@
                         <a:buNone/>
                       </a:pPr>
                       <a:r>
-                        <a:rPr lang="en-US" sz="2200" b="1" dirty="0">
+                        <a:rPr lang="en-US" sz="1800" b="1" dirty="0">
                           <a:solidFill>
                             <a:srgbClr val="FFFFFF"/>
                           </a:solidFill>
@@ -5083,7 +5303,7 @@
                         </a:rPr>
                         <a:t>Defects</a:t>
                       </a:r>
-                      <a:endParaRPr lang="en-US" sz="2200" dirty="0">
+                      <a:endParaRPr lang="en-US" sz="1800" dirty="0">
                         <a:latin typeface="Pretendard" charset="0"/>
                         <a:ea typeface="Pretendard" charset="0"/>
                         <a:cs typeface="Pretendard" charset="0"/>
@@ -5133,7 +5353,7 @@
                   </a:tcPr>
                 </a:tc>
               </a:tr>
-              <a:tr h="1120140">
+              <a:tr h="1131570">
                 <a:tc>
                   <a:txBody>
                     <a:bodyPr/>
@@ -5143,7 +5363,7 @@
                         <a:buNone/>
                       </a:pPr>
                       <a:r>
-                        <a:rPr lang="en-US" sz="2200" b="1" dirty="0">
+                        <a:rPr lang="en-US" sz="1800" b="1" dirty="0">
                           <a:solidFill>
                             <a:srgbClr val="243041"/>
                           </a:solidFill>
@@ -5153,7 +5373,7 @@
                         </a:rPr>
                         <a:t>Parser</a:t>
                       </a:r>
-                      <a:endParaRPr lang="en-US" sz="2200" dirty="0">
+                      <a:endParaRPr lang="en-US" sz="1800" dirty="0">
                         <a:latin typeface="Pretendard" charset="0"/>
                         <a:ea typeface="Pretendard" charset="0"/>
                         <a:cs typeface="Pretendard" charset="0"/>
@@ -5208,7 +5428,7 @@
                         <a:buNone/>
                       </a:pPr>
                       <a:r>
-                        <a:rPr lang="en-US" sz="2200" dirty="0">
+                        <a:rPr lang="en-US" sz="1800" dirty="0">
                           <a:solidFill>
                             <a:srgbClr val="243041"/>
                           </a:solidFill>
@@ -5218,7 +5438,7 @@
                         </a:rPr>
                         <a:t>92</a:t>
                       </a:r>
-                      <a:endParaRPr lang="en-US" sz="2200" dirty="0">
+                      <a:endParaRPr lang="en-US" sz="1800" dirty="0">
                         <a:latin typeface="Pretendard" charset="0"/>
                         <a:ea typeface="Pretendard" charset="0"/>
                         <a:cs typeface="Pretendard" charset="0"/>
@@ -5273,7 +5493,7 @@
                         <a:buNone/>
                       </a:pPr>
                       <a:r>
-                        <a:rPr lang="en-US" sz="2200" dirty="0">
+                        <a:rPr lang="en-US" sz="1800" dirty="0">
                           <a:solidFill>
                             <a:srgbClr val="243041"/>
                           </a:solidFill>
@@ -5283,7 +5503,7 @@
                         </a:rPr>
                         <a:t>3</a:t>
                       </a:r>
-                      <a:endParaRPr lang="en-US" sz="2200" dirty="0">
+                      <a:endParaRPr lang="en-US" sz="1800" dirty="0">
                         <a:latin typeface="Pretendard" charset="0"/>
                         <a:ea typeface="Pretendard" charset="0"/>
                         <a:cs typeface="Pretendard" charset="0"/>
@@ -5330,7 +5550,7 @@
                   </a:tcPr>
                 </a:tc>
               </a:tr>
-              <a:tr h="1120140">
+              <a:tr h="1131570">
                 <a:tc>
                   <a:txBody>
                     <a:bodyPr/>
@@ -5340,7 +5560,7 @@
                         <a:buNone/>
                       </a:pPr>
                       <a:r>
-                        <a:rPr lang="en-US" sz="2200" b="1" dirty="0">
+                        <a:rPr lang="en-US" sz="1800" b="1" dirty="0">
                           <a:solidFill>
                             <a:srgbClr val="243041"/>
                           </a:solidFill>
@@ -5350,7 +5570,7 @@
                         </a:rPr>
                         <a:t>Layout</a:t>
                       </a:r>
-                      <a:endParaRPr lang="en-US" sz="2200" dirty="0">
+                      <a:endParaRPr lang="en-US" sz="1800" dirty="0">
                         <a:latin typeface="Pretendard" charset="0"/>
                         <a:ea typeface="Pretendard" charset="0"/>
                         <a:cs typeface="Pretendard" charset="0"/>
@@ -5410,7 +5630,7 @@
                         <a:buNone/>
                       </a:pPr>
                       <a:r>
-                        <a:rPr lang="en-US" sz="2200" dirty="0">
+                        <a:rPr lang="en-US" sz="1800" dirty="0">
                           <a:solidFill>
                             <a:srgbClr val="243041"/>
                           </a:solidFill>
@@ -5420,7 +5640,7 @@
                         </a:rPr>
                         <a:t>88</a:t>
                       </a:r>
-                      <a:endParaRPr lang="en-US" sz="2200" dirty="0">
+                      <a:endParaRPr lang="en-US" sz="1800" dirty="0">
                         <a:latin typeface="Pretendard" charset="0"/>
                         <a:ea typeface="Pretendard" charset="0"/>
                         <a:cs typeface="Pretendard" charset="0"/>
@@ -5480,7 +5700,7 @@
                         <a:buNone/>
                       </a:pPr>
                       <a:r>
-                        <a:rPr lang="en-US" sz="2200" dirty="0">
+                        <a:rPr lang="en-US" sz="1800" dirty="0">
                           <a:solidFill>
                             <a:srgbClr val="243041"/>
                           </a:solidFill>
@@ -5490,7 +5710,7 @@
                         </a:rPr>
                         <a:t>5</a:t>
                       </a:r>
-                      <a:endParaRPr lang="en-US" sz="2200" dirty="0">
+                      <a:endParaRPr lang="en-US" sz="1800" dirty="0">
                         <a:latin typeface="Pretendard" charset="0"/>
                         <a:ea typeface="Pretendard" charset="0"/>
                         <a:cs typeface="Pretendard" charset="0"/>
@@ -5542,7 +5762,7 @@
                   </a:tcPr>
                 </a:tc>
               </a:tr>
-              <a:tr h="1120140">
+              <a:tr h="1131570">
                 <a:tc>
                   <a:txBody>
                     <a:bodyPr/>
@@ -5552,7 +5772,7 @@
                         <a:buNone/>
                       </a:pPr>
                       <a:r>
-                        <a:rPr lang="en-US" sz="2200" b="1" dirty="0">
+                        <a:rPr lang="en-US" sz="1800" b="1" dirty="0">
                           <a:solidFill>
                             <a:srgbClr val="243041"/>
                           </a:solidFill>
@@ -5562,7 +5782,7 @@
                         </a:rPr>
                         <a:t>PPTX</a:t>
                       </a:r>
-                      <a:endParaRPr lang="en-US" sz="2200" dirty="0">
+                      <a:endParaRPr lang="en-US" sz="1800" dirty="0">
                         <a:latin typeface="Pretendard" charset="0"/>
                         <a:ea typeface="Pretendard" charset="0"/>
                         <a:cs typeface="Pretendard" charset="0"/>
@@ -5617,7 +5837,7 @@
                         <a:buNone/>
                       </a:pPr>
                       <a:r>
-                        <a:rPr lang="en-US" sz="2200" dirty="0">
+                        <a:rPr lang="en-US" sz="1800" dirty="0">
                           <a:solidFill>
                             <a:srgbClr val="243041"/>
                           </a:solidFill>
@@ -5627,7 +5847,7 @@
                         </a:rPr>
                         <a:t>95</a:t>
                       </a:r>
-                      <a:endParaRPr lang="en-US" sz="2200" dirty="0">
+                      <a:endParaRPr lang="en-US" sz="1800" dirty="0">
                         <a:latin typeface="Pretendard" charset="0"/>
                         <a:ea typeface="Pretendard" charset="0"/>
                         <a:cs typeface="Pretendard" charset="0"/>
@@ -5682,7 +5902,7 @@
                         <a:buNone/>
                       </a:pPr>
                       <a:r>
-                        <a:rPr lang="en-US" sz="2200" dirty="0">
+                        <a:rPr lang="en-US" sz="1800" dirty="0">
                           <a:solidFill>
                             <a:srgbClr val="243041"/>
                           </a:solidFill>
@@ -5692,7 +5912,7 @@
                         </a:rPr>
                         <a:t>2</a:t>
                       </a:r>
-                      <a:endParaRPr lang="en-US" sz="2200" dirty="0">
+                      <a:endParaRPr lang="en-US" sz="1800" dirty="0">
                         <a:latin typeface="Pretendard" charset="0"/>
                         <a:ea typeface="Pretendard" charset="0"/>
                         <a:cs typeface="Pretendard" charset="0"/>

--- a/docs/theme-preview/pptx/newmorphism.pptx
+++ b/docs/theme-preview/pptx/newmorphism.pptx
@@ -24,9 +24,14 @@
     <p:sldId id="272" r:id="rId18"/>
     <p:sldId id="273" r:id="rId19"/>
     <p:sldId id="274" r:id="rId20"/>
+    <p:sldId id="275" r:id="rId21"/>
+    <p:sldId id="276" r:id="rId22"/>
+    <p:sldId id="277" r:id="rId23"/>
+    <p:sldId id="278" r:id="rId24"/>
+    <p:sldId id="279" r:id="rId25"/>
   </p:sldIdLst>
   <p:notesMasterIdLst>
-    <p:notesMasterId r:id="rId21"/>
+    <p:notesMasterId r:id="rId26"/>
   </p:notesMasterIdLst>
   <p:sldSz cx="12191695" cy="6858000"/>
   <p:notesSz cx="6858000" cy="12191695"/>
@@ -125,7 +130,7 @@
 </p:presentation>
 </file>
 
-<file path=ppt/charts/chart6.xml><?xml version="1.0" encoding="utf-8"?>
+<file path=ppt/charts/chart7.xml><?xml version="1.0" encoding="utf-8"?>
 <c:chartSpace xmlns:c="http://schemas.openxmlformats.org/drawingml/2006/chart" xmlns:a="http://schemas.openxmlformats.org/drawingml/2006/main" xmlns:r="http://schemas.openxmlformats.org/officeDocument/2006/relationships">
   <c:date1904 val="0"/>
   <c:roundedCorners val="1"/>
@@ -452,6 +457,246 @@
         </a:p>
       </c:txPr>
     </c:legend>
+    <c:plotVisOnly val="1"/>
+    <c:dispBlanksAs val="span"/>
+  </c:chart>
+  <c:spPr>
+    <a:noFill/>
+    <a:ln>
+      <a:noFill/>
+    </a:ln>
+    <a:effectLst/>
+  </c:spPr>
+  <c:externalData r:id="rId1">
+    <c:autoUpdate val="0"/>
+  </c:externalData>
+</c:chartSpace>
+</file>
+
+<file path=ppt/charts/chart8.xml><?xml version="1.0" encoding="utf-8"?>
+<c:chartSpace xmlns:c="http://schemas.openxmlformats.org/drawingml/2006/chart" xmlns:a="http://schemas.openxmlformats.org/drawingml/2006/main" xmlns:r="http://schemas.openxmlformats.org/officeDocument/2006/relationships">
+  <c:date1904 val="0"/>
+  <c:roundedCorners val="1"/>
+  <c:chart>
+    <c:autoTitleDeleted val="1"/>
+    <c:plotArea>
+      <c:layout/>
+      <c:barChart>
+        <c:barDir val="col"/>
+        <c:grouping val="clustered"/>
+        <c:varyColors val="0"/>
+        <c:ser>
+          <c:idx val="0"/>
+          <c:order val="0"/>
+          <c:tx>
+            <c:strRef>
+              <c:f>Sheet1!$B$1</c:f>
+              <c:strCache>
+                <c:ptCount val="1"/>
+                <c:pt idx="0">
+                  <c:v>Score</c:v>
+                </c:pt>
+              </c:strCache>
+            </c:strRef>
+          </c:tx>
+          <c:spPr>
+            <a:solidFill>
+              <a:srgbClr val="4F6F8F"/>
+            </a:solidFill>
+            <a:effectLst/>
+          </c:spPr>
+          <c:invertIfNegative val="0"/>
+          <c:dLbls>
+            <c:numFmt formatCode="#,##0" sourceLinked="0"/>
+            <c:txPr>
+              <a:bodyPr/>
+              <a:lstStyle/>
+              <a:p>
+                <a:pPr>
+                  <a:defRPr b="0" i="0" strike="noStrike" sz="1200" u="none">
+                    <a:solidFill>
+                      <a:srgbClr val="000000"/>
+                    </a:solidFill>
+                    <a:latin typeface="Arial"/>
+                  </a:defRPr>
+                </a:pPr>
+              </a:p>
+            </c:txPr>
+            <c:showLegendKey val="0"/>
+            <c:showVal val="1"/>
+            <c:showCatName val="0"/>
+            <c:showSerName val="0"/>
+            <c:showPercent val="0"/>
+            <c:showBubbleSize val="0"/>
+            <c:showLeaderLines val="0"/>
+          </c:dLbls>
+          <c:cat>
+            <c:multiLvlStrRef>
+              <c:f>Sheet1!$A$2:$A$4</c:f>
+              <c:multiLvlStrCache>
+                <c:ptCount val="3"/>
+                <c:lvl>
+                  <c:pt idx="0">
+                    <c:v>Parse</c:v>
+                  </c:pt>
+                  <c:pt idx="1">
+                    <c:v>Plan</c:v>
+                  </c:pt>
+                  <c:pt idx="2">
+                    <c:v>Render</c:v>
+                  </c:pt>
+                </c:lvl>
+              </c:multiLvlStrCache>
+            </c:multiLvlStrRef>
+          </c:cat>
+          <c:val>
+            <c:numRef>
+              <c:f>Sheet1!$B$2:$B$4</c:f>
+              <c:numCache>
+                <c:formatCode>General</c:formatCode>
+                <c:ptCount val="3"/>
+                <c:pt idx="0">
+                  <c:v>78</c:v>
+                </c:pt>
+                <c:pt idx="1">
+                  <c:v>86</c:v>
+                </c:pt>
+                <c:pt idx="2">
+                  <c:v>93</c:v>
+                </c:pt>
+              </c:numCache>
+            </c:numRef>
+          </c:val>
+        </c:ser>
+        <c:dLbls>
+          <c:numFmt formatCode="#,##0" sourceLinked="0"/>
+          <c:txPr>
+            <a:bodyPr/>
+            <a:lstStyle/>
+            <a:p>
+              <a:pPr>
+                <a:defRPr b="0" i="0" strike="noStrike" sz="1200" u="none">
+                  <a:solidFill>
+                    <a:srgbClr val="000000"/>
+                  </a:solidFill>
+                  <a:latin typeface="Arial"/>
+                </a:defRPr>
+              </a:pPr>
+            </a:p>
+          </c:txPr>
+          <c:showLegendKey val="0"/>
+          <c:showVal val="1"/>
+          <c:showCatName val="0"/>
+          <c:showSerName val="0"/>
+          <c:showPercent val="0"/>
+          <c:showBubbleSize val="0"/>
+          <c:showLeaderLines val="0"/>
+        </c:dLbls>
+        <c:gapWidth val="150"/>
+        <c:overlap val="0"/>
+        <c:axId val="2094734554"/>
+        <c:axId val="2094734552"/>
+        <c:axId val="2094734556"/>
+      </c:barChart>
+      <c:catAx>
+        <c:axId val="2094734554"/>
+        <c:scaling>
+          <c:orientation val="minMax"/>
+        </c:scaling>
+        <c:delete val="0"/>
+        <c:axPos val="b"/>
+        <c:numFmt formatCode="General" sourceLinked="1"/>
+        <c:majorTickMark val="out"/>
+        <c:minorTickMark val="none"/>
+        <c:tickLblPos val="low"/>
+        <c:spPr>
+          <a:ln w="12700" cap="flat">
+            <a:solidFill>
+              <a:srgbClr val="888888"/>
+            </a:solidFill>
+            <a:prstDash val="solid"/>
+            <a:round/>
+          </a:ln>
+        </c:spPr>
+        <c:txPr>
+          <a:bodyPr/>
+          <a:lstStyle/>
+          <a:p>
+            <a:pPr>
+              <a:defRPr sz="1100" b="0" i="0" u="none" strike="noStrike">
+                <a:solidFill>
+                  <a:srgbClr val="243041"/>
+                </a:solidFill>
+                <a:latin typeface="Pretendard"/>
+              </a:defRPr>
+            </a:pPr>
+            <a:endParaRPr lang="en-US"/>
+          </a:p>
+        </c:txPr>
+        <c:crossAx val="2094734552"/>
+        <c:crosses val="autoZero"/>
+        <c:auto val="1"/>
+        <c:lblAlgn val="ctr"/>
+        <c:noMultiLvlLbl val="1"/>
+      </c:catAx>
+      <c:valAx>
+        <c:axId val="2094734552"/>
+        <c:scaling>
+          <c:orientation val="minMax"/>
+        </c:scaling>
+        <c:delete val="0"/>
+        <c:axPos val="l"/>
+        <c:majorGridlines>
+          <c:spPr>
+            <a:ln w="12700" cap="flat">
+              <a:solidFill>
+                <a:srgbClr val="D5DCE7"/>
+              </a:solidFill>
+              <a:prstDash val="solid"/>
+              <a:round/>
+            </a:ln>
+          </c:spPr>
+        </c:majorGridlines>
+        <c:numFmt formatCode="General" sourceLinked="0"/>
+        <c:majorTickMark val="out"/>
+        <c:minorTickMark val="none"/>
+        <c:tickLblPos val="nextTo"/>
+        <c:spPr>
+          <a:ln w="12700" cap="flat">
+            <a:solidFill>
+              <a:srgbClr val="888888"/>
+            </a:solidFill>
+            <a:prstDash val="solid"/>
+            <a:round/>
+          </a:ln>
+        </c:spPr>
+        <c:txPr>
+          <a:bodyPr/>
+          <a:lstStyle/>
+          <a:p>
+            <a:pPr>
+              <a:defRPr sz="1100" b="0" i="0" u="none" strike="noStrike">
+                <a:solidFill>
+                  <a:srgbClr val="536579"/>
+                </a:solidFill>
+                <a:latin typeface="Pretendard"/>
+              </a:defRPr>
+            </a:pPr>
+            <a:endParaRPr lang="en-US"/>
+          </a:p>
+        </c:txPr>
+        <c:crossAx val="2094734554"/>
+        <c:crosses val="autoZero"/>
+        <c:crossBetween val="between"/>
+      </c:valAx>
+      <c:spPr>
+        <a:noFill/>
+        <a:ln>
+          <a:noFill/>
+        </a:ln>
+        <a:effectLst/>
+      </c:spPr>
+    </c:plotArea>
     <c:plotVisOnly val="1"/>
     <c:dispBlanksAs val="span"/>
   </c:chart>
@@ -1873,6 +2118,446 @@
 </p:notes>
 </file>
 
+<file path=ppt/notesSlides/notesSlide20.xml><?xml version="1.0" encoding="utf-8"?>
+<p:notes xmlns:a="http://schemas.openxmlformats.org/drawingml/2006/main" xmlns:r="http://schemas.openxmlformats.org/officeDocument/2006/relationships" xmlns:p="http://schemas.openxmlformats.org/presentationml/2006/main">
+  <p:cSld>
+    <p:spTree>
+      <p:nvGrpSpPr>
+        <p:cNvPr id="1" name=""/>
+        <p:cNvGrpSpPr/>
+        <p:nvPr/>
+      </p:nvGrpSpPr>
+      <p:grpSpPr>
+        <a:xfrm>
+          <a:off x="0" y="0"/>
+          <a:ext cx="0" cy="0"/>
+          <a:chOff x="0" y="0"/>
+          <a:chExt cx="0" cy="0"/>
+        </a:xfrm>
+      </p:grpSpPr>
+      <p:sp>
+        <p:nvSpPr>
+          <p:cNvPr id="2" name="Slide Image Placeholder 1"/>
+          <p:cNvSpPr>
+            <a:spLocks noGrp="1" noRot="1" noChangeAspect="1"/>
+          </p:cNvSpPr>
+          <p:nvPr>
+            <p:ph type="sldImg"/>
+          </p:nvPr>
+        </p:nvSpPr>
+        <p:spPr/>
+      </p:sp>
+      <p:sp>
+        <p:nvSpPr>
+          <p:cNvPr id="3" name="Notes Placeholder 2"/>
+          <p:cNvSpPr>
+            <a:spLocks noGrp="1"/>
+          </p:cNvSpPr>
+          <p:nvPr>
+            <p:ph type="body" idx="1"/>
+          </p:nvPr>
+        </p:nvSpPr>
+        <p:spPr/>
+        <p:txBody>
+          <a:bodyPr/>
+          <a:lstStyle/>
+          <a:p>
+            <a:r>
+              <a:rPr lang="en-US" dirty="0"/>
+              <a:t/>
+            </a:r>
+            <a:endParaRPr lang="en-US" dirty="0"/>
+          </a:p>
+        </p:txBody>
+      </p:sp>
+      <p:sp>
+        <p:nvSpPr>
+          <p:cNvPr id="4" name="Slide Number Placeholder 3"/>
+          <p:cNvSpPr>
+            <a:spLocks noGrp="1"/>
+          </p:cNvSpPr>
+          <p:nvPr>
+            <p:ph type="sldNum" sz="quarter" idx="10"/>
+          </p:nvPr>
+        </p:nvSpPr>
+        <p:spPr/>
+        <p:txBody>
+          <a:bodyPr/>
+          <a:lstStyle/>
+          <a:p>
+            <a:fld id="{F7021451-1387-4CA6-816F-3879F97B5CBC}" type="slidenum">
+              <a:rPr lang="en-US"/>
+              <a:t>20</a:t>
+            </a:fld>
+            <a:endParaRPr lang="en-US"/>
+          </a:p>
+        </p:txBody>
+      </p:sp>
+    </p:spTree>
+    <p:extLst>
+      <p:ext uri="{BB962C8B-B14F-4D97-AF65-F5344CB8AC3E}">
+        <p14:creationId xmlns:p14="http://schemas.microsoft.com/office/powerpoint/2010/main" val="1024086991"/>
+      </p:ext>
+    </p:extLst>
+  </p:cSld>
+  <p:clrMapOvr>
+    <a:masterClrMapping/>
+  </p:clrMapOvr>
+</p:notes>
+</file>
+
+<file path=ppt/notesSlides/notesSlide21.xml><?xml version="1.0" encoding="utf-8"?>
+<p:notes xmlns:a="http://schemas.openxmlformats.org/drawingml/2006/main" xmlns:r="http://schemas.openxmlformats.org/officeDocument/2006/relationships" xmlns:p="http://schemas.openxmlformats.org/presentationml/2006/main">
+  <p:cSld>
+    <p:spTree>
+      <p:nvGrpSpPr>
+        <p:cNvPr id="1" name=""/>
+        <p:cNvGrpSpPr/>
+        <p:nvPr/>
+      </p:nvGrpSpPr>
+      <p:grpSpPr>
+        <a:xfrm>
+          <a:off x="0" y="0"/>
+          <a:ext cx="0" cy="0"/>
+          <a:chOff x="0" y="0"/>
+          <a:chExt cx="0" cy="0"/>
+        </a:xfrm>
+      </p:grpSpPr>
+      <p:sp>
+        <p:nvSpPr>
+          <p:cNvPr id="2" name="Slide Image Placeholder 1"/>
+          <p:cNvSpPr>
+            <a:spLocks noGrp="1" noRot="1" noChangeAspect="1"/>
+          </p:cNvSpPr>
+          <p:nvPr>
+            <p:ph type="sldImg"/>
+          </p:nvPr>
+        </p:nvSpPr>
+        <p:spPr/>
+      </p:sp>
+      <p:sp>
+        <p:nvSpPr>
+          <p:cNvPr id="3" name="Notes Placeholder 2"/>
+          <p:cNvSpPr>
+            <a:spLocks noGrp="1"/>
+          </p:cNvSpPr>
+          <p:nvPr>
+            <p:ph type="body" idx="1"/>
+          </p:nvPr>
+        </p:nvSpPr>
+        <p:spPr/>
+        <p:txBody>
+          <a:bodyPr/>
+          <a:lstStyle/>
+          <a:p>
+            <a:r>
+              <a:rPr lang="en-US" dirty="0"/>
+              <a:t/>
+            </a:r>
+            <a:endParaRPr lang="en-US" dirty="0"/>
+          </a:p>
+        </p:txBody>
+      </p:sp>
+      <p:sp>
+        <p:nvSpPr>
+          <p:cNvPr id="4" name="Slide Number Placeholder 3"/>
+          <p:cNvSpPr>
+            <a:spLocks noGrp="1"/>
+          </p:cNvSpPr>
+          <p:nvPr>
+            <p:ph type="sldNum" sz="quarter" idx="10"/>
+          </p:nvPr>
+        </p:nvSpPr>
+        <p:spPr/>
+        <p:txBody>
+          <a:bodyPr/>
+          <a:lstStyle/>
+          <a:p>
+            <a:fld id="{F7021451-1387-4CA6-816F-3879F97B5CBC}" type="slidenum">
+              <a:rPr lang="en-US"/>
+              <a:t>21</a:t>
+            </a:fld>
+            <a:endParaRPr lang="en-US"/>
+          </a:p>
+        </p:txBody>
+      </p:sp>
+    </p:spTree>
+    <p:extLst>
+      <p:ext uri="{BB962C8B-B14F-4D97-AF65-F5344CB8AC3E}">
+        <p14:creationId xmlns:p14="http://schemas.microsoft.com/office/powerpoint/2010/main" val="1024086991"/>
+      </p:ext>
+    </p:extLst>
+  </p:cSld>
+  <p:clrMapOvr>
+    <a:masterClrMapping/>
+  </p:clrMapOvr>
+</p:notes>
+</file>
+
+<file path=ppt/notesSlides/notesSlide22.xml><?xml version="1.0" encoding="utf-8"?>
+<p:notes xmlns:a="http://schemas.openxmlformats.org/drawingml/2006/main" xmlns:r="http://schemas.openxmlformats.org/officeDocument/2006/relationships" xmlns:p="http://schemas.openxmlformats.org/presentationml/2006/main">
+  <p:cSld>
+    <p:spTree>
+      <p:nvGrpSpPr>
+        <p:cNvPr id="1" name=""/>
+        <p:cNvGrpSpPr/>
+        <p:nvPr/>
+      </p:nvGrpSpPr>
+      <p:grpSpPr>
+        <a:xfrm>
+          <a:off x="0" y="0"/>
+          <a:ext cx="0" cy="0"/>
+          <a:chOff x="0" y="0"/>
+          <a:chExt cx="0" cy="0"/>
+        </a:xfrm>
+      </p:grpSpPr>
+      <p:sp>
+        <p:nvSpPr>
+          <p:cNvPr id="2" name="Slide Image Placeholder 1"/>
+          <p:cNvSpPr>
+            <a:spLocks noGrp="1" noRot="1" noChangeAspect="1"/>
+          </p:cNvSpPr>
+          <p:nvPr>
+            <p:ph type="sldImg"/>
+          </p:nvPr>
+        </p:nvSpPr>
+        <p:spPr/>
+      </p:sp>
+      <p:sp>
+        <p:nvSpPr>
+          <p:cNvPr id="3" name="Notes Placeholder 2"/>
+          <p:cNvSpPr>
+            <a:spLocks noGrp="1"/>
+          </p:cNvSpPr>
+          <p:nvPr>
+            <p:ph type="body" idx="1"/>
+          </p:nvPr>
+        </p:nvSpPr>
+        <p:spPr/>
+        <p:txBody>
+          <a:bodyPr/>
+          <a:lstStyle/>
+          <a:p>
+            <a:r>
+              <a:rPr lang="en-US" dirty="0"/>
+              <a:t/>
+            </a:r>
+            <a:endParaRPr lang="en-US" dirty="0"/>
+          </a:p>
+        </p:txBody>
+      </p:sp>
+      <p:sp>
+        <p:nvSpPr>
+          <p:cNvPr id="4" name="Slide Number Placeholder 3"/>
+          <p:cNvSpPr>
+            <a:spLocks noGrp="1"/>
+          </p:cNvSpPr>
+          <p:nvPr>
+            <p:ph type="sldNum" sz="quarter" idx="10"/>
+          </p:nvPr>
+        </p:nvSpPr>
+        <p:spPr/>
+        <p:txBody>
+          <a:bodyPr/>
+          <a:lstStyle/>
+          <a:p>
+            <a:fld id="{F7021451-1387-4CA6-816F-3879F97B5CBC}" type="slidenum">
+              <a:rPr lang="en-US"/>
+              <a:t>22</a:t>
+            </a:fld>
+            <a:endParaRPr lang="en-US"/>
+          </a:p>
+        </p:txBody>
+      </p:sp>
+    </p:spTree>
+    <p:extLst>
+      <p:ext uri="{BB962C8B-B14F-4D97-AF65-F5344CB8AC3E}">
+        <p14:creationId xmlns:p14="http://schemas.microsoft.com/office/powerpoint/2010/main" val="1024086991"/>
+      </p:ext>
+    </p:extLst>
+  </p:cSld>
+  <p:clrMapOvr>
+    <a:masterClrMapping/>
+  </p:clrMapOvr>
+</p:notes>
+</file>
+
+<file path=ppt/notesSlides/notesSlide23.xml><?xml version="1.0" encoding="utf-8"?>
+<p:notes xmlns:a="http://schemas.openxmlformats.org/drawingml/2006/main" xmlns:r="http://schemas.openxmlformats.org/officeDocument/2006/relationships" xmlns:p="http://schemas.openxmlformats.org/presentationml/2006/main">
+  <p:cSld>
+    <p:spTree>
+      <p:nvGrpSpPr>
+        <p:cNvPr id="1" name=""/>
+        <p:cNvGrpSpPr/>
+        <p:nvPr/>
+      </p:nvGrpSpPr>
+      <p:grpSpPr>
+        <a:xfrm>
+          <a:off x="0" y="0"/>
+          <a:ext cx="0" cy="0"/>
+          <a:chOff x="0" y="0"/>
+          <a:chExt cx="0" cy="0"/>
+        </a:xfrm>
+      </p:grpSpPr>
+      <p:sp>
+        <p:nvSpPr>
+          <p:cNvPr id="2" name="Slide Image Placeholder 1"/>
+          <p:cNvSpPr>
+            <a:spLocks noGrp="1" noRot="1" noChangeAspect="1"/>
+          </p:cNvSpPr>
+          <p:nvPr>
+            <p:ph type="sldImg"/>
+          </p:nvPr>
+        </p:nvSpPr>
+        <p:spPr/>
+      </p:sp>
+      <p:sp>
+        <p:nvSpPr>
+          <p:cNvPr id="3" name="Notes Placeholder 2"/>
+          <p:cNvSpPr>
+            <a:spLocks noGrp="1"/>
+          </p:cNvSpPr>
+          <p:nvPr>
+            <p:ph type="body" idx="1"/>
+          </p:nvPr>
+        </p:nvSpPr>
+        <p:spPr/>
+        <p:txBody>
+          <a:bodyPr/>
+          <a:lstStyle/>
+          <a:p>
+            <a:r>
+              <a:rPr lang="en-US" dirty="0"/>
+              <a:t/>
+            </a:r>
+            <a:endParaRPr lang="en-US" dirty="0"/>
+          </a:p>
+        </p:txBody>
+      </p:sp>
+      <p:sp>
+        <p:nvSpPr>
+          <p:cNvPr id="4" name="Slide Number Placeholder 3"/>
+          <p:cNvSpPr>
+            <a:spLocks noGrp="1"/>
+          </p:cNvSpPr>
+          <p:nvPr>
+            <p:ph type="sldNum" sz="quarter" idx="10"/>
+          </p:nvPr>
+        </p:nvSpPr>
+        <p:spPr/>
+        <p:txBody>
+          <a:bodyPr/>
+          <a:lstStyle/>
+          <a:p>
+            <a:fld id="{F7021451-1387-4CA6-816F-3879F97B5CBC}" type="slidenum">
+              <a:rPr lang="en-US"/>
+              <a:t>23</a:t>
+            </a:fld>
+            <a:endParaRPr lang="en-US"/>
+          </a:p>
+        </p:txBody>
+      </p:sp>
+    </p:spTree>
+    <p:extLst>
+      <p:ext uri="{BB962C8B-B14F-4D97-AF65-F5344CB8AC3E}">
+        <p14:creationId xmlns:p14="http://schemas.microsoft.com/office/powerpoint/2010/main" val="1024086991"/>
+      </p:ext>
+    </p:extLst>
+  </p:cSld>
+  <p:clrMapOvr>
+    <a:masterClrMapping/>
+  </p:clrMapOvr>
+</p:notes>
+</file>
+
+<file path=ppt/notesSlides/notesSlide24.xml><?xml version="1.0" encoding="utf-8"?>
+<p:notes xmlns:a="http://schemas.openxmlformats.org/drawingml/2006/main" xmlns:r="http://schemas.openxmlformats.org/officeDocument/2006/relationships" xmlns:p="http://schemas.openxmlformats.org/presentationml/2006/main">
+  <p:cSld>
+    <p:spTree>
+      <p:nvGrpSpPr>
+        <p:cNvPr id="1" name=""/>
+        <p:cNvGrpSpPr/>
+        <p:nvPr/>
+      </p:nvGrpSpPr>
+      <p:grpSpPr>
+        <a:xfrm>
+          <a:off x="0" y="0"/>
+          <a:ext cx="0" cy="0"/>
+          <a:chOff x="0" y="0"/>
+          <a:chExt cx="0" cy="0"/>
+        </a:xfrm>
+      </p:grpSpPr>
+      <p:sp>
+        <p:nvSpPr>
+          <p:cNvPr id="2" name="Slide Image Placeholder 1"/>
+          <p:cNvSpPr>
+            <a:spLocks noGrp="1" noRot="1" noChangeAspect="1"/>
+          </p:cNvSpPr>
+          <p:nvPr>
+            <p:ph type="sldImg"/>
+          </p:nvPr>
+        </p:nvSpPr>
+        <p:spPr/>
+      </p:sp>
+      <p:sp>
+        <p:nvSpPr>
+          <p:cNvPr id="3" name="Notes Placeholder 2"/>
+          <p:cNvSpPr>
+            <a:spLocks noGrp="1"/>
+          </p:cNvSpPr>
+          <p:nvPr>
+            <p:ph type="body" idx="1"/>
+          </p:nvPr>
+        </p:nvSpPr>
+        <p:spPr/>
+        <p:txBody>
+          <a:bodyPr/>
+          <a:lstStyle/>
+          <a:p>
+            <a:r>
+              <a:rPr lang="en-US" dirty="0"/>
+              <a:t/>
+            </a:r>
+            <a:endParaRPr lang="en-US" dirty="0"/>
+          </a:p>
+        </p:txBody>
+      </p:sp>
+      <p:sp>
+        <p:nvSpPr>
+          <p:cNvPr id="4" name="Slide Number Placeholder 3"/>
+          <p:cNvSpPr>
+            <a:spLocks noGrp="1"/>
+          </p:cNvSpPr>
+          <p:nvPr>
+            <p:ph type="sldNum" sz="quarter" idx="10"/>
+          </p:nvPr>
+        </p:nvSpPr>
+        <p:spPr/>
+        <p:txBody>
+          <a:bodyPr/>
+          <a:lstStyle/>
+          <a:p>
+            <a:fld id="{F7021451-1387-4CA6-816F-3879F97B5CBC}" type="slidenum">
+              <a:rPr lang="en-US"/>
+              <a:t>24</a:t>
+            </a:fld>
+            <a:endParaRPr lang="en-US"/>
+          </a:p>
+        </p:txBody>
+      </p:sp>
+    </p:spTree>
+    <p:extLst>
+      <p:ext uri="{BB962C8B-B14F-4D97-AF65-F5344CB8AC3E}">
+        <p14:creationId xmlns:p14="http://schemas.microsoft.com/office/powerpoint/2010/main" val="1024086991"/>
+      </p:ext>
+    </p:extLst>
+  </p:cSld>
+  <p:clrMapOvr>
+    <a:masterClrMapping/>
+  </p:clrMapOvr>
+</p:notes>
+</file>
+
 <file path=ppt/notesSlides/notesSlide3.xml><?xml version="1.0" encoding="utf-8"?>
 <p:notes xmlns:a="http://schemas.openxmlformats.org/drawingml/2006/main" xmlns:r="http://schemas.openxmlformats.org/officeDocument/2006/relationships" xmlns:p="http://schemas.openxmlformats.org/presentationml/2006/main">
   <p:cSld>
@@ -2953,7 +3638,7 @@
                 <a:ea typeface="Pretendard" pitchFamily="34" charset="-122"/>
                 <a:cs typeface="Pretendard" pitchFamily="34" charset="-120"/>
               </a:rPr>
-              <a:t>MDPR Composition Grammar QA</a:t>
+              <a:t>MDPR Design Grammar</a:t>
             </a:r>
             <a:endParaRPr lang="en-US" sz="4800" dirty="0"/>
           </a:p>
@@ -3090,6 +3775,2073 @@
       </p:sp>
       <p:sp>
         <p:nvSpPr>
+          <p:cNvPr id="5" name="Text 3"/>
+          <p:cNvSpPr txBox="1"/>
+          <p:nvPr/>
+        </p:nvSpPr>
+        <p:spPr>
+          <a:xfrm>
+            <a:off x="731520" y="457200"/>
+            <a:ext cx="10698480" cy="731520"/>
+          </a:xfrm>
+          <a:prstGeom prst="rect">
+            <a:avLst/>
+          </a:prstGeom>
+          <a:noFill/>
+          <a:ln/>
+        </p:spPr>
+        <p:txBody>
+          <a:bodyPr wrap="square" lIns="0" tIns="0" rIns="0" bIns="0" rtlCol="0" anchor="ctr"/>
+          <a:lstStyle/>
+          <a:p>
+            <a:pPr algn="ctr" indent="0" marL="0">
+              <a:lnSpc>
+                <a:spcPct val="120000"/>
+              </a:lnSpc>
+              <a:buNone/>
+            </a:pPr>
+            <a:r>
+              <a:rPr lang="en-US" sz="3400" b="1" dirty="0">
+                <a:solidFill>
+                  <a:srgbClr val="243041"/>
+                </a:solidFill>
+                <a:latin typeface="Pretendard" pitchFamily="34" charset="0"/>
+                <a:ea typeface="Pretendard" pitchFamily="34" charset="-122"/>
+                <a:cs typeface="Pretendard" pitchFamily="34" charset="-120"/>
+              </a:rPr>
+              <a:t>Pipeline Diagram</a:t>
+            </a:r>
+            <a:endParaRPr lang="en-US" sz="3400" dirty="0"/>
+          </a:p>
+        </p:txBody>
+      </p:sp>
+      <p:sp>
+        <p:nvSpPr>
+          <p:cNvPr id="6" name="Shape 4"/>
+          <p:cNvSpPr/>
+          <p:nvPr/>
+        </p:nvSpPr>
+        <p:spPr>
+          <a:xfrm>
+            <a:off x="4002024" y="3095244"/>
+            <a:ext cx="457200" cy="0"/>
+          </a:xfrm>
+          <a:prstGeom prst="line">
+            <a:avLst/>
+          </a:prstGeom>
+          <a:noFill/>
+          <a:ln w="12700">
+            <a:solidFill>
+              <a:srgbClr val="4F6F8F"/>
+            </a:solidFill>
+            <a:prstDash val="solid"/>
+            <a:tailEnd type="triangle"/>
+          </a:ln>
+        </p:spPr>
+      </p:sp>
+      <p:sp>
+        <p:nvSpPr>
+          <p:cNvPr id="7" name="Shape 5"/>
+          <p:cNvSpPr/>
+          <p:nvPr/>
+        </p:nvSpPr>
+        <p:spPr>
+          <a:xfrm>
+            <a:off x="7748016" y="3095244"/>
+            <a:ext cx="457200" cy="0"/>
+          </a:xfrm>
+          <a:prstGeom prst="line">
+            <a:avLst/>
+          </a:prstGeom>
+          <a:noFill/>
+          <a:ln w="12700">
+            <a:solidFill>
+              <a:srgbClr val="4F6F8F"/>
+            </a:solidFill>
+            <a:prstDash val="solid"/>
+            <a:tailEnd type="triangle"/>
+          </a:ln>
+        </p:spPr>
+      </p:sp>
+      <p:sp>
+        <p:nvSpPr>
+          <p:cNvPr id="8" name="Shape 6"/>
+          <p:cNvSpPr/>
+          <p:nvPr/>
+        </p:nvSpPr>
+        <p:spPr>
+          <a:xfrm>
+            <a:off x="9849612" y="3627791"/>
+            <a:ext cx="0" cy="416235"/>
+          </a:xfrm>
+          <a:prstGeom prst="line">
+            <a:avLst/>
+          </a:prstGeom>
+          <a:noFill/>
+          <a:ln w="12700">
+            <a:solidFill>
+              <a:srgbClr val="4F6F8F"/>
+            </a:solidFill>
+            <a:prstDash val="solid"/>
+            <a:tailEnd type="triangle"/>
+          </a:ln>
+        </p:spPr>
+      </p:sp>
+      <p:sp>
+        <p:nvSpPr>
+          <p:cNvPr id="9" name="Shape 7"/>
+          <p:cNvSpPr/>
+          <p:nvPr/>
+        </p:nvSpPr>
+        <p:spPr>
+          <a:xfrm>
+            <a:off x="7748016" y="4576572"/>
+            <a:ext cx="457200" cy="0"/>
+          </a:xfrm>
+          <a:prstGeom prst="line">
+            <a:avLst/>
+          </a:prstGeom>
+          <a:noFill/>
+          <a:ln w="12700">
+            <a:solidFill>
+              <a:srgbClr val="4F6F8F"/>
+            </a:solidFill>
+            <a:prstDash val="solid"/>
+            <a:headEnd type="triangle"/>
+          </a:ln>
+        </p:spPr>
+      </p:sp>
+      <p:sp>
+        <p:nvSpPr>
+          <p:cNvPr id="10" name="Shape 8"/>
+          <p:cNvSpPr/>
+          <p:nvPr/>
+        </p:nvSpPr>
+        <p:spPr>
+          <a:xfrm>
+            <a:off x="4002024" y="4576572"/>
+            <a:ext cx="457200" cy="0"/>
+          </a:xfrm>
+          <a:prstGeom prst="line">
+            <a:avLst/>
+          </a:prstGeom>
+          <a:noFill/>
+          <a:ln w="12700">
+            <a:solidFill>
+              <a:srgbClr val="4F6F8F"/>
+            </a:solidFill>
+            <a:prstDash val="solid"/>
+            <a:headEnd type="triangle"/>
+          </a:ln>
+        </p:spPr>
+      </p:sp>
+      <p:sp>
+        <p:nvSpPr>
+          <p:cNvPr id="11" name="Shape 9"/>
+          <p:cNvSpPr/>
+          <p:nvPr/>
+        </p:nvSpPr>
+        <p:spPr>
+          <a:xfrm>
+            <a:off x="640080" y="2510028"/>
+            <a:ext cx="3435096" cy="1170432"/>
+          </a:xfrm>
+          <a:prstGeom prst="roundRect">
+            <a:avLst>
+              <a:gd name="adj" fmla="val 4688"/>
+            </a:avLst>
+          </a:prstGeom>
+          <a:solidFill>
+            <a:srgbClr val="E9EEF5"/>
+          </a:solidFill>
+          <a:ln w="12700">
+            <a:solidFill>
+              <a:srgbClr val="4F6F8F"/>
+            </a:solidFill>
+            <a:prstDash val="solid"/>
+          </a:ln>
+          <a:effectLst>
+            <a:outerShdw sx="100000" sy="100000" kx="0" ky="0" algn="bl" rotWithShape="0" blurRad="12700" dist="50800" dir="2700000">
+              <a:srgbClr val="000000">
+                <a:alpha val="12000"/>
+              </a:srgbClr>
+            </a:outerShdw>
+          </a:effectLst>
+        </p:spPr>
+      </p:sp>
+      <p:sp>
+        <p:nvSpPr>
+          <p:cNvPr id="12" name="Shape 10"/>
+          <p:cNvSpPr/>
+          <p:nvPr/>
+        </p:nvSpPr>
+        <p:spPr>
+          <a:xfrm>
+            <a:off x="640080" y="2510028"/>
+            <a:ext cx="3435096" cy="109728"/>
+          </a:xfrm>
+          <a:prstGeom prst="rect">
+            <a:avLst/>
+          </a:prstGeom>
+          <a:solidFill>
+            <a:srgbClr val="4F6F8F"/>
+          </a:solidFill>
+          <a:ln w="12700">
+            <a:solidFill>
+              <a:srgbClr val="4F6F8F">
+                <a:alpha val="0"/>
+              </a:srgbClr>
+            </a:solidFill>
+            <a:prstDash val="solid"/>
+          </a:ln>
+        </p:spPr>
+      </p:sp>
+      <p:sp>
+        <p:nvSpPr>
+          <p:cNvPr id="13" name="Shape 11"/>
+          <p:cNvSpPr/>
+          <p:nvPr/>
+        </p:nvSpPr>
+        <p:spPr>
+          <a:xfrm>
+            <a:off x="804672" y="2907975"/>
+            <a:ext cx="374538" cy="374538"/>
+          </a:xfrm>
+          <a:prstGeom prst="ellipse">
+            <a:avLst/>
+          </a:prstGeom>
+          <a:solidFill>
+            <a:srgbClr val="4F6F8F"/>
+          </a:solidFill>
+          <a:ln w="12700">
+            <a:solidFill>
+              <a:srgbClr val="4F6F8F">
+                <a:alpha val="0"/>
+              </a:srgbClr>
+            </a:solidFill>
+            <a:prstDash val="solid"/>
+          </a:ln>
+        </p:spPr>
+      </p:sp>
+      <p:sp>
+        <p:nvSpPr>
+          <p:cNvPr id="14" name="Text 12"/>
+          <p:cNvSpPr txBox="1"/>
+          <p:nvPr/>
+        </p:nvSpPr>
+        <p:spPr>
+          <a:xfrm>
+            <a:off x="804672" y="2907975"/>
+            <a:ext cx="374538" cy="374538"/>
+          </a:xfrm>
+          <a:prstGeom prst="rect">
+            <a:avLst/>
+          </a:prstGeom>
+          <a:noFill/>
+          <a:ln/>
+        </p:spPr>
+        <p:txBody>
+          <a:bodyPr wrap="square" lIns="0" tIns="0" rIns="0" bIns="0" rtlCol="0" anchor="ctr">
+            <a:normAutofit/>
+          </a:bodyPr>
+          <a:lstStyle/>
+          <a:p>
+            <a:pPr algn="ctr" indent="0" marL="0">
+              <a:lnSpc>
+                <a:spcPct val="120000"/>
+              </a:lnSpc>
+              <a:buNone/>
+            </a:pPr>
+            <a:r>
+              <a:rPr lang="en-US" sz="1500" b="1" dirty="0">
+                <a:solidFill>
+                  <a:srgbClr val="E9EEF5"/>
+                </a:solidFill>
+                <a:latin typeface="Pretendard" pitchFamily="34" charset="0"/>
+                <a:ea typeface="Pretendard" pitchFamily="34" charset="-122"/>
+                <a:cs typeface="Pretendard" pitchFamily="34" charset="-120"/>
+              </a:rPr>
+              <a:t>1</a:t>
+            </a:r>
+            <a:endParaRPr lang="en-US" sz="1500" dirty="0"/>
+          </a:p>
+        </p:txBody>
+      </p:sp>
+      <p:sp>
+        <p:nvSpPr>
+          <p:cNvPr id="15" name="Text 13"/>
+          <p:cNvSpPr txBox="1"/>
+          <p:nvPr/>
+        </p:nvSpPr>
+        <p:spPr>
+          <a:xfrm>
+            <a:off x="1325514" y="2638044"/>
+            <a:ext cx="2585070" cy="914400"/>
+          </a:xfrm>
+          <a:prstGeom prst="rect">
+            <a:avLst/>
+          </a:prstGeom>
+          <a:noFill/>
+          <a:ln/>
+        </p:spPr>
+        <p:txBody>
+          <a:bodyPr wrap="square" lIns="0" tIns="25400" rIns="25400" bIns="0" rtlCol="0" anchor="ctr">
+            <a:normAutofit/>
+          </a:bodyPr>
+          <a:lstStyle/>
+          <a:p>
+            <a:pPr algn="l" indent="0" marL="0">
+              <a:lnSpc>
+                <a:spcPct val="92000"/>
+              </a:lnSpc>
+              <a:buNone/>
+            </a:pPr>
+            <a:r>
+              <a:rPr lang="en-US" sz="1600" dirty="0">
+                <a:solidFill>
+                  <a:srgbClr val="243041"/>
+                </a:solidFill>
+                <a:latin typeface="Pretendard" pitchFamily="34" charset="0"/>
+                <a:ea typeface="Pretendard" pitchFamily="34" charset="-122"/>
+                <a:cs typeface="Pretendard" pitchFamily="34" charset="-120"/>
+              </a:rPr>
+              <a:t>Markdown source</a:t>
+            </a:r>
+            <a:endParaRPr lang="en-US" sz="1600" dirty="0"/>
+          </a:p>
+        </p:txBody>
+      </p:sp>
+      <p:sp>
+        <p:nvSpPr>
+          <p:cNvPr id="16" name="Shape 14"/>
+          <p:cNvSpPr/>
+          <p:nvPr/>
+        </p:nvSpPr>
+        <p:spPr>
+          <a:xfrm>
+            <a:off x="4386072" y="2510028"/>
+            <a:ext cx="3435096" cy="1170432"/>
+          </a:xfrm>
+          <a:prstGeom prst="roundRect">
+            <a:avLst>
+              <a:gd name="adj" fmla="val 4688"/>
+            </a:avLst>
+          </a:prstGeom>
+          <a:solidFill>
+            <a:srgbClr val="E9EEF5"/>
+          </a:solidFill>
+          <a:ln w="12700">
+            <a:solidFill>
+              <a:srgbClr val="4F6F8F"/>
+            </a:solidFill>
+            <a:prstDash val="solid"/>
+          </a:ln>
+          <a:effectLst>
+            <a:outerShdw sx="100000" sy="100000" kx="0" ky="0" algn="bl" rotWithShape="0" blurRad="12700" dist="50800" dir="2700000">
+              <a:srgbClr val="000000">
+                <a:alpha val="12000"/>
+              </a:srgbClr>
+            </a:outerShdw>
+          </a:effectLst>
+        </p:spPr>
+      </p:sp>
+      <p:sp>
+        <p:nvSpPr>
+          <p:cNvPr id="17" name="Shape 15"/>
+          <p:cNvSpPr/>
+          <p:nvPr/>
+        </p:nvSpPr>
+        <p:spPr>
+          <a:xfrm>
+            <a:off x="4386072" y="2510028"/>
+            <a:ext cx="3435096" cy="109728"/>
+          </a:xfrm>
+          <a:prstGeom prst="rect">
+            <a:avLst/>
+          </a:prstGeom>
+          <a:solidFill>
+            <a:srgbClr val="4F6F8F"/>
+          </a:solidFill>
+          <a:ln w="12700">
+            <a:solidFill>
+              <a:srgbClr val="4F6F8F">
+                <a:alpha val="0"/>
+              </a:srgbClr>
+            </a:solidFill>
+            <a:prstDash val="solid"/>
+          </a:ln>
+        </p:spPr>
+      </p:sp>
+      <p:sp>
+        <p:nvSpPr>
+          <p:cNvPr id="18" name="Shape 16"/>
+          <p:cNvSpPr/>
+          <p:nvPr/>
+        </p:nvSpPr>
+        <p:spPr>
+          <a:xfrm>
+            <a:off x="4550664" y="2907975"/>
+            <a:ext cx="374538" cy="374538"/>
+          </a:xfrm>
+          <a:prstGeom prst="ellipse">
+            <a:avLst/>
+          </a:prstGeom>
+          <a:solidFill>
+            <a:srgbClr val="4F6F8F"/>
+          </a:solidFill>
+          <a:ln w="12700">
+            <a:solidFill>
+              <a:srgbClr val="4F6F8F">
+                <a:alpha val="0"/>
+              </a:srgbClr>
+            </a:solidFill>
+            <a:prstDash val="solid"/>
+          </a:ln>
+        </p:spPr>
+      </p:sp>
+      <p:sp>
+        <p:nvSpPr>
+          <p:cNvPr id="19" name="Text 17"/>
+          <p:cNvSpPr txBox="1"/>
+          <p:nvPr/>
+        </p:nvSpPr>
+        <p:spPr>
+          <a:xfrm>
+            <a:off x="4550664" y="2907975"/>
+            <a:ext cx="374538" cy="374538"/>
+          </a:xfrm>
+          <a:prstGeom prst="rect">
+            <a:avLst/>
+          </a:prstGeom>
+          <a:noFill/>
+          <a:ln/>
+        </p:spPr>
+        <p:txBody>
+          <a:bodyPr wrap="square" lIns="0" tIns="0" rIns="0" bIns="0" rtlCol="0" anchor="ctr">
+            <a:normAutofit/>
+          </a:bodyPr>
+          <a:lstStyle/>
+          <a:p>
+            <a:pPr algn="ctr" indent="0" marL="0">
+              <a:lnSpc>
+                <a:spcPct val="120000"/>
+              </a:lnSpc>
+              <a:buNone/>
+            </a:pPr>
+            <a:r>
+              <a:rPr lang="en-US" sz="1500" b="1" dirty="0">
+                <a:solidFill>
+                  <a:srgbClr val="E9EEF5"/>
+                </a:solidFill>
+                <a:latin typeface="Pretendard" pitchFamily="34" charset="0"/>
+                <a:ea typeface="Pretendard" pitchFamily="34" charset="-122"/>
+                <a:cs typeface="Pretendard" pitchFamily="34" charset="-120"/>
+              </a:rPr>
+              <a:t>2</a:t>
+            </a:r>
+            <a:endParaRPr lang="en-US" sz="1500" dirty="0"/>
+          </a:p>
+        </p:txBody>
+      </p:sp>
+      <p:sp>
+        <p:nvSpPr>
+          <p:cNvPr id="20" name="Text 18"/>
+          <p:cNvSpPr txBox="1"/>
+          <p:nvPr/>
+        </p:nvSpPr>
+        <p:spPr>
+          <a:xfrm>
+            <a:off x="5071506" y="2638044"/>
+            <a:ext cx="2585070" cy="914400"/>
+          </a:xfrm>
+          <a:prstGeom prst="rect">
+            <a:avLst/>
+          </a:prstGeom>
+          <a:noFill/>
+          <a:ln/>
+        </p:spPr>
+        <p:txBody>
+          <a:bodyPr wrap="square" lIns="0" tIns="25400" rIns="25400" bIns="0" rtlCol="0" anchor="ctr">
+            <a:normAutofit/>
+          </a:bodyPr>
+          <a:lstStyle/>
+          <a:p>
+            <a:pPr algn="l" indent="0" marL="0">
+              <a:lnSpc>
+                <a:spcPct val="92000"/>
+              </a:lnSpc>
+              <a:buNone/>
+            </a:pPr>
+            <a:r>
+              <a:rPr lang="en-US" sz="1600" dirty="0">
+                <a:solidFill>
+                  <a:srgbClr val="243041"/>
+                </a:solidFill>
+                <a:latin typeface="Pretendard" pitchFamily="34" charset="0"/>
+                <a:ea typeface="Pretendard" pitchFamily="34" charset="-122"/>
+                <a:cs typeface="Pretendard" pitchFamily="34" charset="-120"/>
+              </a:rPr>
+              <a:t>Parse blocks</a:t>
+            </a:r>
+            <a:endParaRPr lang="en-US" sz="1600" dirty="0"/>
+          </a:p>
+        </p:txBody>
+      </p:sp>
+      <p:sp>
+        <p:nvSpPr>
+          <p:cNvPr id="21" name="Shape 19"/>
+          <p:cNvSpPr/>
+          <p:nvPr/>
+        </p:nvSpPr>
+        <p:spPr>
+          <a:xfrm>
+            <a:off x="8132064" y="2510028"/>
+            <a:ext cx="3435096" cy="1170432"/>
+          </a:xfrm>
+          <a:prstGeom prst="roundRect">
+            <a:avLst>
+              <a:gd name="adj" fmla="val 4688"/>
+            </a:avLst>
+          </a:prstGeom>
+          <a:solidFill>
+            <a:srgbClr val="E9EEF5"/>
+          </a:solidFill>
+          <a:ln w="12700">
+            <a:solidFill>
+              <a:srgbClr val="4F6F8F"/>
+            </a:solidFill>
+            <a:prstDash val="solid"/>
+          </a:ln>
+          <a:effectLst>
+            <a:outerShdw sx="100000" sy="100000" kx="0" ky="0" algn="bl" rotWithShape="0" blurRad="12700" dist="50800" dir="2700000">
+              <a:srgbClr val="000000">
+                <a:alpha val="12000"/>
+              </a:srgbClr>
+            </a:outerShdw>
+          </a:effectLst>
+        </p:spPr>
+      </p:sp>
+      <p:sp>
+        <p:nvSpPr>
+          <p:cNvPr id="22" name="Shape 20"/>
+          <p:cNvSpPr/>
+          <p:nvPr/>
+        </p:nvSpPr>
+        <p:spPr>
+          <a:xfrm>
+            <a:off x="8132064" y="2510028"/>
+            <a:ext cx="3435096" cy="109728"/>
+          </a:xfrm>
+          <a:prstGeom prst="rect">
+            <a:avLst/>
+          </a:prstGeom>
+          <a:solidFill>
+            <a:srgbClr val="4F6F8F"/>
+          </a:solidFill>
+          <a:ln w="12700">
+            <a:solidFill>
+              <a:srgbClr val="4F6F8F">
+                <a:alpha val="0"/>
+              </a:srgbClr>
+            </a:solidFill>
+            <a:prstDash val="solid"/>
+          </a:ln>
+        </p:spPr>
+      </p:sp>
+      <p:sp>
+        <p:nvSpPr>
+          <p:cNvPr id="23" name="Shape 21"/>
+          <p:cNvSpPr/>
+          <p:nvPr/>
+        </p:nvSpPr>
+        <p:spPr>
+          <a:xfrm>
+            <a:off x="8296656" y="2907975"/>
+            <a:ext cx="374538" cy="374538"/>
+          </a:xfrm>
+          <a:prstGeom prst="ellipse">
+            <a:avLst/>
+          </a:prstGeom>
+          <a:solidFill>
+            <a:srgbClr val="4F6F8F"/>
+          </a:solidFill>
+          <a:ln w="12700">
+            <a:solidFill>
+              <a:srgbClr val="4F6F8F">
+                <a:alpha val="0"/>
+              </a:srgbClr>
+            </a:solidFill>
+            <a:prstDash val="solid"/>
+          </a:ln>
+        </p:spPr>
+      </p:sp>
+      <p:sp>
+        <p:nvSpPr>
+          <p:cNvPr id="24" name="Text 22"/>
+          <p:cNvSpPr txBox="1"/>
+          <p:nvPr/>
+        </p:nvSpPr>
+        <p:spPr>
+          <a:xfrm>
+            <a:off x="8296656" y="2907975"/>
+            <a:ext cx="374538" cy="374538"/>
+          </a:xfrm>
+          <a:prstGeom prst="rect">
+            <a:avLst/>
+          </a:prstGeom>
+          <a:noFill/>
+          <a:ln/>
+        </p:spPr>
+        <p:txBody>
+          <a:bodyPr wrap="square" lIns="0" tIns="0" rIns="0" bIns="0" rtlCol="0" anchor="ctr">
+            <a:normAutofit/>
+          </a:bodyPr>
+          <a:lstStyle/>
+          <a:p>
+            <a:pPr algn="ctr" indent="0" marL="0">
+              <a:lnSpc>
+                <a:spcPct val="120000"/>
+              </a:lnSpc>
+              <a:buNone/>
+            </a:pPr>
+            <a:r>
+              <a:rPr lang="en-US" sz="1500" b="1" dirty="0">
+                <a:solidFill>
+                  <a:srgbClr val="E9EEF5"/>
+                </a:solidFill>
+                <a:latin typeface="Pretendard" pitchFamily="34" charset="0"/>
+                <a:ea typeface="Pretendard" pitchFamily="34" charset="-122"/>
+                <a:cs typeface="Pretendard" pitchFamily="34" charset="-120"/>
+              </a:rPr>
+              <a:t>3</a:t>
+            </a:r>
+            <a:endParaRPr lang="en-US" sz="1500" dirty="0"/>
+          </a:p>
+        </p:txBody>
+      </p:sp>
+      <p:sp>
+        <p:nvSpPr>
+          <p:cNvPr id="25" name="Text 23"/>
+          <p:cNvSpPr txBox="1"/>
+          <p:nvPr/>
+        </p:nvSpPr>
+        <p:spPr>
+          <a:xfrm>
+            <a:off x="8817498" y="2638044"/>
+            <a:ext cx="2585070" cy="914400"/>
+          </a:xfrm>
+          <a:prstGeom prst="rect">
+            <a:avLst/>
+          </a:prstGeom>
+          <a:noFill/>
+          <a:ln/>
+        </p:spPr>
+        <p:txBody>
+          <a:bodyPr wrap="square" lIns="0" tIns="25400" rIns="25400" bIns="0" rtlCol="0" anchor="ctr">
+            <a:normAutofit/>
+          </a:bodyPr>
+          <a:lstStyle/>
+          <a:p>
+            <a:pPr algn="l" indent="0" marL="0">
+              <a:lnSpc>
+                <a:spcPct val="92000"/>
+              </a:lnSpc>
+              <a:buNone/>
+            </a:pPr>
+            <a:r>
+              <a:rPr lang="en-US" sz="1600" dirty="0">
+                <a:solidFill>
+                  <a:srgbClr val="243041"/>
+                </a:solidFill>
+                <a:latin typeface="Pretendard" pitchFamily="34" charset="0"/>
+                <a:ea typeface="Pretendard" pitchFamily="34" charset="-122"/>
+                <a:cs typeface="Pretendard" pitchFamily="34" charset="-120"/>
+              </a:rPr>
+              <a:t>Split slides</a:t>
+            </a:r>
+            <a:endParaRPr lang="en-US" sz="1600" dirty="0"/>
+          </a:p>
+        </p:txBody>
+      </p:sp>
+      <p:sp>
+        <p:nvSpPr>
+          <p:cNvPr id="26" name="Shape 24"/>
+          <p:cNvSpPr/>
+          <p:nvPr/>
+        </p:nvSpPr>
+        <p:spPr>
+          <a:xfrm>
+            <a:off x="8132064" y="3991356"/>
+            <a:ext cx="3435096" cy="1170432"/>
+          </a:xfrm>
+          <a:prstGeom prst="roundRect">
+            <a:avLst>
+              <a:gd name="adj" fmla="val 4688"/>
+            </a:avLst>
+          </a:prstGeom>
+          <a:solidFill>
+            <a:srgbClr val="E9EEF5"/>
+          </a:solidFill>
+          <a:ln w="12700">
+            <a:solidFill>
+              <a:srgbClr val="4F6F8F"/>
+            </a:solidFill>
+            <a:prstDash val="solid"/>
+          </a:ln>
+          <a:effectLst>
+            <a:outerShdw sx="100000" sy="100000" kx="0" ky="0" algn="bl" rotWithShape="0" blurRad="12700" dist="50800" dir="2700000">
+              <a:srgbClr val="000000">
+                <a:alpha val="12000"/>
+              </a:srgbClr>
+            </a:outerShdw>
+          </a:effectLst>
+        </p:spPr>
+      </p:sp>
+      <p:sp>
+        <p:nvSpPr>
+          <p:cNvPr id="27" name="Shape 25"/>
+          <p:cNvSpPr/>
+          <p:nvPr/>
+        </p:nvSpPr>
+        <p:spPr>
+          <a:xfrm>
+            <a:off x="8132064" y="3991356"/>
+            <a:ext cx="3435096" cy="109728"/>
+          </a:xfrm>
+          <a:prstGeom prst="rect">
+            <a:avLst/>
+          </a:prstGeom>
+          <a:solidFill>
+            <a:srgbClr val="4F6F8F"/>
+          </a:solidFill>
+          <a:ln w="12700">
+            <a:solidFill>
+              <a:srgbClr val="4F6F8F">
+                <a:alpha val="0"/>
+              </a:srgbClr>
+            </a:solidFill>
+            <a:prstDash val="solid"/>
+          </a:ln>
+        </p:spPr>
+      </p:sp>
+      <p:sp>
+        <p:nvSpPr>
+          <p:cNvPr id="28" name="Shape 26"/>
+          <p:cNvSpPr/>
+          <p:nvPr/>
+        </p:nvSpPr>
+        <p:spPr>
+          <a:xfrm>
+            <a:off x="8296656" y="4389303"/>
+            <a:ext cx="374538" cy="374538"/>
+          </a:xfrm>
+          <a:prstGeom prst="ellipse">
+            <a:avLst/>
+          </a:prstGeom>
+          <a:solidFill>
+            <a:srgbClr val="4F6F8F"/>
+          </a:solidFill>
+          <a:ln w="12700">
+            <a:solidFill>
+              <a:srgbClr val="4F6F8F">
+                <a:alpha val="0"/>
+              </a:srgbClr>
+            </a:solidFill>
+            <a:prstDash val="solid"/>
+          </a:ln>
+        </p:spPr>
+      </p:sp>
+      <p:sp>
+        <p:nvSpPr>
+          <p:cNvPr id="29" name="Text 27"/>
+          <p:cNvSpPr txBox="1"/>
+          <p:nvPr/>
+        </p:nvSpPr>
+        <p:spPr>
+          <a:xfrm>
+            <a:off x="8296656" y="4389303"/>
+            <a:ext cx="374538" cy="374538"/>
+          </a:xfrm>
+          <a:prstGeom prst="rect">
+            <a:avLst/>
+          </a:prstGeom>
+          <a:noFill/>
+          <a:ln/>
+        </p:spPr>
+        <p:txBody>
+          <a:bodyPr wrap="square" lIns="0" tIns="0" rIns="0" bIns="0" rtlCol="0" anchor="ctr">
+            <a:normAutofit/>
+          </a:bodyPr>
+          <a:lstStyle/>
+          <a:p>
+            <a:pPr algn="ctr" indent="0" marL="0">
+              <a:lnSpc>
+                <a:spcPct val="120000"/>
+              </a:lnSpc>
+              <a:buNone/>
+            </a:pPr>
+            <a:r>
+              <a:rPr lang="en-US" sz="1500" b="1" dirty="0">
+                <a:solidFill>
+                  <a:srgbClr val="E9EEF5"/>
+                </a:solidFill>
+                <a:latin typeface="Pretendard" pitchFamily="34" charset="0"/>
+                <a:ea typeface="Pretendard" pitchFamily="34" charset="-122"/>
+                <a:cs typeface="Pretendard" pitchFamily="34" charset="-120"/>
+              </a:rPr>
+              <a:t>4</a:t>
+            </a:r>
+            <a:endParaRPr lang="en-US" sz="1500" dirty="0"/>
+          </a:p>
+        </p:txBody>
+      </p:sp>
+      <p:sp>
+        <p:nvSpPr>
+          <p:cNvPr id="30" name="Text 28"/>
+          <p:cNvSpPr txBox="1"/>
+          <p:nvPr/>
+        </p:nvSpPr>
+        <p:spPr>
+          <a:xfrm>
+            <a:off x="8817498" y="4119372"/>
+            <a:ext cx="2585070" cy="914400"/>
+          </a:xfrm>
+          <a:prstGeom prst="rect">
+            <a:avLst/>
+          </a:prstGeom>
+          <a:noFill/>
+          <a:ln/>
+        </p:spPr>
+        <p:txBody>
+          <a:bodyPr wrap="square" lIns="0" tIns="25400" rIns="25400" bIns="0" rtlCol="0" anchor="ctr">
+            <a:normAutofit/>
+          </a:bodyPr>
+          <a:lstStyle/>
+          <a:p>
+            <a:pPr algn="l" indent="0" marL="0">
+              <a:lnSpc>
+                <a:spcPct val="92000"/>
+              </a:lnSpc>
+              <a:buNone/>
+            </a:pPr>
+            <a:r>
+              <a:rPr lang="en-US" sz="1600" dirty="0">
+                <a:solidFill>
+                  <a:srgbClr val="243041"/>
+                </a:solidFill>
+                <a:latin typeface="Pretendard" pitchFamily="34" charset="0"/>
+                <a:ea typeface="Pretendard" pitchFamily="34" charset="-122"/>
+                <a:cs typeface="Pretendard" pitchFamily="34" charset="-120"/>
+              </a:rPr>
+              <a:t>Layout objects</a:t>
+            </a:r>
+            <a:endParaRPr lang="en-US" sz="1600" dirty="0"/>
+          </a:p>
+        </p:txBody>
+      </p:sp>
+      <p:sp>
+        <p:nvSpPr>
+          <p:cNvPr id="31" name="Shape 29"/>
+          <p:cNvSpPr/>
+          <p:nvPr/>
+        </p:nvSpPr>
+        <p:spPr>
+          <a:xfrm>
+            <a:off x="4386072" y="3991356"/>
+            <a:ext cx="3435096" cy="1170432"/>
+          </a:xfrm>
+          <a:prstGeom prst="roundRect">
+            <a:avLst>
+              <a:gd name="adj" fmla="val 4688"/>
+            </a:avLst>
+          </a:prstGeom>
+          <a:solidFill>
+            <a:srgbClr val="E9EEF5"/>
+          </a:solidFill>
+          <a:ln w="12700">
+            <a:solidFill>
+              <a:srgbClr val="4F6F8F"/>
+            </a:solidFill>
+            <a:prstDash val="solid"/>
+          </a:ln>
+          <a:effectLst>
+            <a:outerShdw sx="100000" sy="100000" kx="0" ky="0" algn="bl" rotWithShape="0" blurRad="12700" dist="50800" dir="2700000">
+              <a:srgbClr val="000000">
+                <a:alpha val="12000"/>
+              </a:srgbClr>
+            </a:outerShdw>
+          </a:effectLst>
+        </p:spPr>
+      </p:sp>
+      <p:sp>
+        <p:nvSpPr>
+          <p:cNvPr id="32" name="Shape 30"/>
+          <p:cNvSpPr/>
+          <p:nvPr/>
+        </p:nvSpPr>
+        <p:spPr>
+          <a:xfrm>
+            <a:off x="4386072" y="3991356"/>
+            <a:ext cx="3435096" cy="109728"/>
+          </a:xfrm>
+          <a:prstGeom prst="rect">
+            <a:avLst/>
+          </a:prstGeom>
+          <a:solidFill>
+            <a:srgbClr val="4F6F8F"/>
+          </a:solidFill>
+          <a:ln w="12700">
+            <a:solidFill>
+              <a:srgbClr val="4F6F8F">
+                <a:alpha val="0"/>
+              </a:srgbClr>
+            </a:solidFill>
+            <a:prstDash val="solid"/>
+          </a:ln>
+        </p:spPr>
+      </p:sp>
+      <p:sp>
+        <p:nvSpPr>
+          <p:cNvPr id="33" name="Shape 31"/>
+          <p:cNvSpPr/>
+          <p:nvPr/>
+        </p:nvSpPr>
+        <p:spPr>
+          <a:xfrm>
+            <a:off x="4550664" y="4389303"/>
+            <a:ext cx="374538" cy="374538"/>
+          </a:xfrm>
+          <a:prstGeom prst="ellipse">
+            <a:avLst/>
+          </a:prstGeom>
+          <a:solidFill>
+            <a:srgbClr val="4F6F8F"/>
+          </a:solidFill>
+          <a:ln w="12700">
+            <a:solidFill>
+              <a:srgbClr val="4F6F8F">
+                <a:alpha val="0"/>
+              </a:srgbClr>
+            </a:solidFill>
+            <a:prstDash val="solid"/>
+          </a:ln>
+        </p:spPr>
+      </p:sp>
+      <p:sp>
+        <p:nvSpPr>
+          <p:cNvPr id="34" name="Text 32"/>
+          <p:cNvSpPr txBox="1"/>
+          <p:nvPr/>
+        </p:nvSpPr>
+        <p:spPr>
+          <a:xfrm>
+            <a:off x="4550664" y="4389303"/>
+            <a:ext cx="374538" cy="374538"/>
+          </a:xfrm>
+          <a:prstGeom prst="rect">
+            <a:avLst/>
+          </a:prstGeom>
+          <a:noFill/>
+          <a:ln/>
+        </p:spPr>
+        <p:txBody>
+          <a:bodyPr wrap="square" lIns="0" tIns="0" rIns="0" bIns="0" rtlCol="0" anchor="ctr">
+            <a:normAutofit/>
+          </a:bodyPr>
+          <a:lstStyle/>
+          <a:p>
+            <a:pPr algn="ctr" indent="0" marL="0">
+              <a:lnSpc>
+                <a:spcPct val="120000"/>
+              </a:lnSpc>
+              <a:buNone/>
+            </a:pPr>
+            <a:r>
+              <a:rPr lang="en-US" sz="1500" b="1" dirty="0">
+                <a:solidFill>
+                  <a:srgbClr val="E9EEF5"/>
+                </a:solidFill>
+                <a:latin typeface="Pretendard" pitchFamily="34" charset="0"/>
+                <a:ea typeface="Pretendard" pitchFamily="34" charset="-122"/>
+                <a:cs typeface="Pretendard" pitchFamily="34" charset="-120"/>
+              </a:rPr>
+              <a:t>5</a:t>
+            </a:r>
+            <a:endParaRPr lang="en-US" sz="1500" dirty="0"/>
+          </a:p>
+        </p:txBody>
+      </p:sp>
+      <p:sp>
+        <p:nvSpPr>
+          <p:cNvPr id="35" name="Text 33"/>
+          <p:cNvSpPr txBox="1"/>
+          <p:nvPr/>
+        </p:nvSpPr>
+        <p:spPr>
+          <a:xfrm>
+            <a:off x="5071506" y="4119372"/>
+            <a:ext cx="2585070" cy="914400"/>
+          </a:xfrm>
+          <a:prstGeom prst="rect">
+            <a:avLst/>
+          </a:prstGeom>
+          <a:noFill/>
+          <a:ln/>
+        </p:spPr>
+        <p:txBody>
+          <a:bodyPr wrap="square" lIns="0" tIns="25400" rIns="25400" bIns="0" rtlCol="0" anchor="ctr">
+            <a:normAutofit/>
+          </a:bodyPr>
+          <a:lstStyle/>
+          <a:p>
+            <a:pPr algn="l" indent="0" marL="0">
+              <a:lnSpc>
+                <a:spcPct val="92000"/>
+              </a:lnSpc>
+              <a:buNone/>
+            </a:pPr>
+            <a:r>
+              <a:rPr lang="en-US" sz="1600" dirty="0">
+                <a:solidFill>
+                  <a:srgbClr val="243041"/>
+                </a:solidFill>
+                <a:latin typeface="Pretendard" pitchFamily="34" charset="0"/>
+                <a:ea typeface="Pretendard" pitchFamily="34" charset="-122"/>
+                <a:cs typeface="Pretendard" pitchFamily="34" charset="-120"/>
+              </a:rPr>
+              <a:t>Validate overflow</a:t>
+            </a:r>
+            <a:endParaRPr lang="en-US" sz="1600" dirty="0"/>
+          </a:p>
+        </p:txBody>
+      </p:sp>
+      <p:sp>
+        <p:nvSpPr>
+          <p:cNvPr id="36" name="Shape 34"/>
+          <p:cNvSpPr/>
+          <p:nvPr/>
+        </p:nvSpPr>
+        <p:spPr>
+          <a:xfrm>
+            <a:off x="640080" y="3991356"/>
+            <a:ext cx="3435096" cy="1170432"/>
+          </a:xfrm>
+          <a:prstGeom prst="roundRect">
+            <a:avLst>
+              <a:gd name="adj" fmla="val 4688"/>
+            </a:avLst>
+          </a:prstGeom>
+          <a:solidFill>
+            <a:srgbClr val="E9EEF5"/>
+          </a:solidFill>
+          <a:ln w="12700">
+            <a:solidFill>
+              <a:srgbClr val="4F6F8F"/>
+            </a:solidFill>
+            <a:prstDash val="solid"/>
+          </a:ln>
+          <a:effectLst>
+            <a:outerShdw sx="100000" sy="100000" kx="0" ky="0" algn="bl" rotWithShape="0" blurRad="12700" dist="50800" dir="2700000">
+              <a:srgbClr val="000000">
+                <a:alpha val="12000"/>
+              </a:srgbClr>
+            </a:outerShdw>
+          </a:effectLst>
+        </p:spPr>
+      </p:sp>
+      <p:sp>
+        <p:nvSpPr>
+          <p:cNvPr id="37" name="Shape 35"/>
+          <p:cNvSpPr/>
+          <p:nvPr/>
+        </p:nvSpPr>
+        <p:spPr>
+          <a:xfrm>
+            <a:off x="640080" y="3991356"/>
+            <a:ext cx="3435096" cy="109728"/>
+          </a:xfrm>
+          <a:prstGeom prst="rect">
+            <a:avLst/>
+          </a:prstGeom>
+          <a:solidFill>
+            <a:srgbClr val="4F6F8F"/>
+          </a:solidFill>
+          <a:ln w="12700">
+            <a:solidFill>
+              <a:srgbClr val="4F6F8F">
+                <a:alpha val="0"/>
+              </a:srgbClr>
+            </a:solidFill>
+            <a:prstDash val="solid"/>
+          </a:ln>
+        </p:spPr>
+      </p:sp>
+      <p:sp>
+        <p:nvSpPr>
+          <p:cNvPr id="38" name="Shape 36"/>
+          <p:cNvSpPr/>
+          <p:nvPr/>
+        </p:nvSpPr>
+        <p:spPr>
+          <a:xfrm>
+            <a:off x="804672" y="4389303"/>
+            <a:ext cx="374538" cy="374538"/>
+          </a:xfrm>
+          <a:prstGeom prst="ellipse">
+            <a:avLst/>
+          </a:prstGeom>
+          <a:solidFill>
+            <a:srgbClr val="4F6F8F"/>
+          </a:solidFill>
+          <a:ln w="12700">
+            <a:solidFill>
+              <a:srgbClr val="4F6F8F">
+                <a:alpha val="0"/>
+              </a:srgbClr>
+            </a:solidFill>
+            <a:prstDash val="solid"/>
+          </a:ln>
+        </p:spPr>
+      </p:sp>
+      <p:sp>
+        <p:nvSpPr>
+          <p:cNvPr id="39" name="Text 37"/>
+          <p:cNvSpPr txBox="1"/>
+          <p:nvPr/>
+        </p:nvSpPr>
+        <p:spPr>
+          <a:xfrm>
+            <a:off x="804672" y="4389303"/>
+            <a:ext cx="374538" cy="374538"/>
+          </a:xfrm>
+          <a:prstGeom prst="rect">
+            <a:avLst/>
+          </a:prstGeom>
+          <a:noFill/>
+          <a:ln/>
+        </p:spPr>
+        <p:txBody>
+          <a:bodyPr wrap="square" lIns="0" tIns="0" rIns="0" bIns="0" rtlCol="0" anchor="ctr">
+            <a:normAutofit/>
+          </a:bodyPr>
+          <a:lstStyle/>
+          <a:p>
+            <a:pPr algn="ctr" indent="0" marL="0">
+              <a:lnSpc>
+                <a:spcPct val="120000"/>
+              </a:lnSpc>
+              <a:buNone/>
+            </a:pPr>
+            <a:r>
+              <a:rPr lang="en-US" sz="1500" b="1" dirty="0">
+                <a:solidFill>
+                  <a:srgbClr val="E9EEF5"/>
+                </a:solidFill>
+                <a:latin typeface="Pretendard" pitchFamily="34" charset="0"/>
+                <a:ea typeface="Pretendard" pitchFamily="34" charset="-122"/>
+                <a:cs typeface="Pretendard" pitchFamily="34" charset="-120"/>
+              </a:rPr>
+              <a:t>6</a:t>
+            </a:r>
+            <a:endParaRPr lang="en-US" sz="1500" dirty="0"/>
+          </a:p>
+        </p:txBody>
+      </p:sp>
+      <p:sp>
+        <p:nvSpPr>
+          <p:cNvPr id="40" name="Text 38"/>
+          <p:cNvSpPr txBox="1"/>
+          <p:nvPr/>
+        </p:nvSpPr>
+        <p:spPr>
+          <a:xfrm>
+            <a:off x="1325514" y="4119372"/>
+            <a:ext cx="2585070" cy="914400"/>
+          </a:xfrm>
+          <a:prstGeom prst="rect">
+            <a:avLst/>
+          </a:prstGeom>
+          <a:noFill/>
+          <a:ln/>
+        </p:spPr>
+        <p:txBody>
+          <a:bodyPr wrap="square" lIns="0" tIns="25400" rIns="25400" bIns="0" rtlCol="0" anchor="ctr">
+            <a:normAutofit/>
+          </a:bodyPr>
+          <a:lstStyle/>
+          <a:p>
+            <a:pPr algn="l" indent="0" marL="0">
+              <a:lnSpc>
+                <a:spcPct val="92000"/>
+              </a:lnSpc>
+              <a:buNone/>
+            </a:pPr>
+            <a:r>
+              <a:rPr lang="en-US" sz="1600" dirty="0">
+                <a:solidFill>
+                  <a:srgbClr val="243041"/>
+                </a:solidFill>
+                <a:latin typeface="Pretendard" pitchFamily="34" charset="0"/>
+                <a:ea typeface="Pretendard" pitchFamily="34" charset="-122"/>
+                <a:cs typeface="Pretendard" pitchFamily="34" charset="-120"/>
+              </a:rPr>
+              <a:t>Render PPTX HTML PDF</a:t>
+            </a:r>
+            <a:endParaRPr lang="en-US" sz="1600" dirty="0"/>
+          </a:p>
+        </p:txBody>
+      </p:sp>
+    </p:spTree>
+  </p:cSld>
+  <p:clrMapOvr>
+    <a:masterClrMapping/>
+  </p:clrMapOvr>
+</p:sld>
+</file>
+
+<file path=ppt/slides/slide11.xml><?xml version="1.0" encoding="utf-8"?>
+<p:sld xmlns:a="http://schemas.openxmlformats.org/drawingml/2006/main" xmlns:r="http://schemas.openxmlformats.org/officeDocument/2006/relationships" xmlns:p="http://schemas.openxmlformats.org/presentationml/2006/main">
+  <p:cSld name="Slide 11">
+    <p:bg>
+      <p:bgPr>
+        <a:solidFill>
+          <a:srgbClr val="E9EEF5"/>
+        </a:solidFill>
+      </p:bgPr>
+    </p:bg>
+    <p:spTree>
+      <p:nvGrpSpPr>
+        <p:cNvPr id="1" name=""/>
+        <p:cNvGrpSpPr/>
+        <p:nvPr/>
+      </p:nvGrpSpPr>
+      <p:grpSpPr>
+        <a:xfrm>
+          <a:off x="0" y="0"/>
+          <a:ext cx="0" cy="0"/>
+          <a:chOff x="0" y="0"/>
+          <a:chExt cx="0" cy="0"/>
+        </a:xfrm>
+      </p:grpSpPr>
+      <p:sp>
+        <p:nvSpPr>
+          <p:cNvPr id="2" name="Shape 0"/>
+          <p:cNvSpPr/>
+          <p:nvPr/>
+        </p:nvSpPr>
+        <p:spPr>
+          <a:xfrm>
+            <a:off x="10362895" y="502920"/>
+            <a:ext cx="822960" cy="822960"/>
+          </a:xfrm>
+          <a:prstGeom prst="ellipse">
+            <a:avLst/>
+          </a:prstGeom>
+          <a:solidFill>
+            <a:srgbClr val="F7FAFC">
+              <a:alpha val="92000"/>
+            </a:srgbClr>
+          </a:solidFill>
+          <a:ln w="12700">
+            <a:solidFill>
+              <a:srgbClr val="FFFFFF">
+                <a:alpha val="0"/>
+              </a:srgbClr>
+            </a:solidFill>
+            <a:prstDash val="solid"/>
+          </a:ln>
+          <a:effectLst>
+            <a:outerShdw sx="100000" sy="100000" kx="0" ky="0" algn="bl" rotWithShape="0" blurRad="15240" dist="50800" dir="2700000">
+              <a:srgbClr val="C7D0DE">
+                <a:alpha val="22000"/>
+              </a:srgbClr>
+            </a:outerShdw>
+          </a:effectLst>
+        </p:spPr>
+      </p:sp>
+      <p:sp>
+        <p:nvSpPr>
+          <p:cNvPr id="3" name="Shape 1"/>
+          <p:cNvSpPr/>
+          <p:nvPr/>
+        </p:nvSpPr>
+        <p:spPr>
+          <a:xfrm>
+            <a:off x="530352" y="5687568"/>
+            <a:ext cx="658368" cy="658368"/>
+          </a:xfrm>
+          <a:prstGeom prst="ellipse">
+            <a:avLst/>
+          </a:prstGeom>
+          <a:solidFill>
+            <a:srgbClr val="E9EEF5"/>
+          </a:solidFill>
+          <a:ln w="12700">
+            <a:solidFill>
+              <a:srgbClr val="FFFFFF">
+                <a:alpha val="42000"/>
+              </a:srgbClr>
+            </a:solidFill>
+            <a:prstDash val="solid"/>
+          </a:ln>
+          <a:effectLst>
+            <a:outerShdw sx="100000" sy="100000" kx="0" ky="0" algn="bl" rotWithShape="0" blurRad="12700" dist="50800" dir="2700000">
+              <a:srgbClr val="B8C3D2">
+                <a:alpha val="18000"/>
+              </a:srgbClr>
+            </a:outerShdw>
+          </a:effectLst>
+        </p:spPr>
+      </p:sp>
+      <p:sp>
+        <p:nvSpPr>
+          <p:cNvPr id="4" name="Shape 2"/>
+          <p:cNvSpPr/>
+          <p:nvPr/>
+        </p:nvSpPr>
+        <p:spPr>
+          <a:xfrm>
+            <a:off x="731520" y="1207008"/>
+            <a:ext cx="1325880" cy="54864"/>
+          </a:xfrm>
+          <a:prstGeom prst="rect">
+            <a:avLst/>
+          </a:prstGeom>
+          <a:solidFill>
+            <a:srgbClr val="4F6F8F"/>
+          </a:solidFill>
+          <a:ln w="12700">
+            <a:solidFill>
+              <a:srgbClr val="4F6F8F">
+                <a:alpha val="0"/>
+              </a:srgbClr>
+            </a:solidFill>
+            <a:prstDash val="solid"/>
+          </a:ln>
+        </p:spPr>
+      </p:sp>
+      <p:sp>
+        <p:nvSpPr>
+          <p:cNvPr id="5" name="Shape 3"/>
+          <p:cNvSpPr/>
+          <p:nvPr/>
+        </p:nvSpPr>
+        <p:spPr>
+          <a:xfrm>
+            <a:off x="914400" y="1463040"/>
+            <a:ext cx="10241280" cy="73152"/>
+          </a:xfrm>
+          <a:prstGeom prst="rect">
+            <a:avLst/>
+          </a:prstGeom>
+          <a:solidFill>
+            <a:srgbClr val="4F6F8F"/>
+          </a:solidFill>
+          <a:ln w="12700">
+            <a:solidFill>
+              <a:srgbClr val="4F6F8F">
+                <a:alpha val="0"/>
+              </a:srgbClr>
+            </a:solidFill>
+            <a:prstDash val="solid"/>
+          </a:ln>
+        </p:spPr>
+      </p:sp>
+      <p:sp>
+        <p:nvSpPr>
+          <p:cNvPr id="6" name="Text 4"/>
+          <p:cNvSpPr txBox="1"/>
+          <p:nvPr/>
+        </p:nvSpPr>
+        <p:spPr>
+          <a:xfrm>
+            <a:off x="731520" y="457200"/>
+            <a:ext cx="10698480" cy="731520"/>
+          </a:xfrm>
+          <a:prstGeom prst="rect">
+            <a:avLst/>
+          </a:prstGeom>
+          <a:noFill/>
+          <a:ln/>
+        </p:spPr>
+        <p:txBody>
+          <a:bodyPr wrap="square" lIns="0" tIns="0" rIns="0" bIns="0" rtlCol="0" anchor="ctr"/>
+          <a:lstStyle/>
+          <a:p>
+            <a:pPr algn="ctr" indent="0" marL="0">
+              <a:lnSpc>
+                <a:spcPct val="120000"/>
+              </a:lnSpc>
+              <a:buNone/>
+            </a:pPr>
+            <a:r>
+              <a:rPr lang="en-US" sz="3400" b="1" dirty="0">
+                <a:solidFill>
+                  <a:srgbClr val="243041"/>
+                </a:solidFill>
+                <a:latin typeface="Pretendard" pitchFamily="34" charset="0"/>
+                <a:ea typeface="Pretendard" pitchFamily="34" charset="-122"/>
+                <a:cs typeface="Pretendard" pitchFamily="34" charset="-120"/>
+              </a:rPr>
+              <a:t>Decoration Pattern Catalog</a:t>
+            </a:r>
+            <a:endParaRPr lang="en-US" sz="3400" dirty="0"/>
+          </a:p>
+        </p:txBody>
+      </p:sp>
+      <p:sp>
+        <p:nvSpPr>
+          <p:cNvPr id="7" name="Text 5"/>
+          <p:cNvSpPr txBox="1"/>
+          <p:nvPr/>
+        </p:nvSpPr>
+        <p:spPr>
+          <a:xfrm>
+            <a:off x="987552" y="1572768"/>
+            <a:ext cx="10094976" cy="4261104"/>
+          </a:xfrm>
+          <a:prstGeom prst="rect">
+            <a:avLst/>
+          </a:prstGeom>
+          <a:noFill/>
+          <a:ln/>
+        </p:spPr>
+        <p:txBody>
+          <a:bodyPr wrap="square" lIns="0" tIns="25400" rIns="25400" bIns="0" rtlCol="0" anchor="t"/>
+          <a:lstStyle/>
+          <a:p>
+            <a:pPr algn="l" indent="0" marL="0">
+              <a:lnSpc>
+                <a:spcPct val="120000"/>
+              </a:lnSpc>
+              <a:buNone/>
+            </a:pPr>
+            <a:r>
+              <a:rPr lang="en-US" sz="2200" b="1" dirty="0">
+                <a:solidFill>
+                  <a:srgbClr val="4F6F8F"/>
+                </a:solidFill>
+                <a:latin typeface="Pretendard" pitchFamily="34" charset="0"/>
+                <a:ea typeface="Pretendard" pitchFamily="34" charset="-122"/>
+                <a:cs typeface="Pretendard" pitchFamily="34" charset="-120"/>
+              </a:rPr>
+              <a:t>- Surfaces</a:t>
+            </a:r>
+            <a:pPr algn="l" indent="0" marL="0">
+              <a:lnSpc>
+                <a:spcPct val="120000"/>
+              </a:lnSpc>
+              <a:buNone/>
+            </a:pPr>
+            <a:r>
+              <a:rPr lang="en-US" sz="2200" dirty="0">
+                <a:solidFill>
+                  <a:srgbClr val="243041"/>
+                </a:solidFill>
+                <a:latin typeface="Pretendard" pitchFamily="34" charset="0"/>
+                <a:ea typeface="Pretendard" pitchFamily="34" charset="-122"/>
+                <a:cs typeface="Pretendard" pitchFamily="34" charset="-120"/>
+              </a:rPr>
+              <a:t>  rounded-card, two-corner-card, flag-drop, ticket-panel, notched-panel, circle-vine.</a:t>
+            </a:r>
+            <a:endParaRPr lang="en-US" sz="2200" dirty="0"/>
+          </a:p>
+          <a:p>
+            <a:pPr algn="l" indent="0" marL="0">
+              <a:lnSpc>
+                <a:spcPct val="120000"/>
+              </a:lnSpc>
+              <a:buNone/>
+            </a:pPr>
+            <a:r>
+              <a:rPr lang="en-US" sz="2200" b="1" dirty="0">
+                <a:solidFill>
+                  <a:srgbClr val="4F6F8F"/>
+                </a:solidFill>
+                <a:latin typeface="Pretendard" pitchFamily="34" charset="0"/>
+                <a:ea typeface="Pretendard" pitchFamily="34" charset="-122"/>
+                <a:cs typeface="Pretendard" pitchFamily="34" charset="-120"/>
+              </a:rPr>
+              <a:t>- Layouts</a:t>
+            </a:r>
+            <a:endParaRPr lang="en-US" sz="2200" dirty="0"/>
+          </a:p>
+          <a:p>
+            <a:pPr algn="l" indent="0" marL="0">
+              <a:lnSpc>
+                <a:spcPct val="120000"/>
+              </a:lnSpc>
+              <a:buNone/>
+            </a:pPr>
+            <a:r>
+              <a:rPr lang="en-US" sz="2200" dirty="0">
+                <a:solidFill>
+                  <a:srgbClr val="243041"/>
+                </a:solidFill>
+                <a:latin typeface="Pretendard" pitchFamily="34" charset="0"/>
+                <a:ea typeface="Pretendard" pitchFamily="34" charset="-122"/>
+                <a:cs typeface="Pretendard" pitchFamily="34" charset="-120"/>
+              </a:rPr>
+              <a:t>  toc-strips, two-column-compare, three-card-grid, six-tile-grid, timeline-rail, pipeline-chain.</a:t>
+            </a:r>
+            <a:endParaRPr lang="en-US" sz="2200" dirty="0"/>
+          </a:p>
+          <a:p>
+            <a:pPr algn="l" indent="0" marL="0">
+              <a:lnSpc>
+                <a:spcPct val="120000"/>
+              </a:lnSpc>
+              <a:buNone/>
+            </a:pPr>
+            <a:r>
+              <a:rPr lang="en-US" sz="2200" b="1" dirty="0">
+                <a:solidFill>
+                  <a:srgbClr val="4F6F8F"/>
+                </a:solidFill>
+                <a:latin typeface="Pretendard" pitchFamily="34" charset="0"/>
+                <a:ea typeface="Pretendard" pitchFamily="34" charset="-122"/>
+                <a:cs typeface="Pretendard" pitchFamily="34" charset="-120"/>
+              </a:rPr>
+              <a:t>- Evidence</a:t>
+            </a:r>
+            <a:endParaRPr lang="en-US" sz="2200" dirty="0"/>
+          </a:p>
+          <a:p>
+            <a:pPr algn="l" indent="0" marL="0">
+              <a:lnSpc>
+                <a:spcPct val="120000"/>
+              </a:lnSpc>
+              <a:buNone/>
+            </a:pPr>
+            <a:r>
+              <a:rPr lang="en-US" sz="2200" dirty="0">
+                <a:solidFill>
+                  <a:srgbClr val="243041"/>
+                </a:solidFill>
+                <a:latin typeface="Pretendard" pitchFamily="34" charset="0"/>
+                <a:ea typeface="Pretendard" pitchFamily="34" charset="-122"/>
+                <a:cs typeface="Pretendard" pitchFamily="34" charset="-120"/>
+              </a:rPr>
+              <a:t>  chart-table-pair, metric-proof, arc-ring-proof, gauge-proof, connected-strip, mixed-object-pack.</a:t>
+            </a:r>
+            <a:endParaRPr lang="en-US" sz="2200" dirty="0"/>
+          </a:p>
+          <a:p>
+            <a:pPr algn="l" indent="0" marL="0">
+              <a:lnSpc>
+                <a:spcPct val="120000"/>
+              </a:lnSpc>
+              <a:buNone/>
+            </a:pPr>
+            <a:r>
+              <a:rPr lang="en-US" sz="2200" b="1" dirty="0">
+                <a:solidFill>
+                  <a:srgbClr val="4F6F8F"/>
+                </a:solidFill>
+                <a:latin typeface="Pretendard" pitchFamily="34" charset="0"/>
+                <a:ea typeface="Pretendard" pitchFamily="34" charset="-122"/>
+                <a:cs typeface="Pretendard" pitchFamily="34" charset="-120"/>
+              </a:rPr>
+              <a:t>- Connectors</a:t>
+            </a:r>
+            <a:endParaRPr lang="en-US" sz="2200" dirty="0"/>
+          </a:p>
+          <a:p>
+            <a:pPr algn="l" indent="0" marL="0">
+              <a:lnSpc>
+                <a:spcPct val="120000"/>
+              </a:lnSpc>
+              <a:buNone/>
+            </a:pPr>
+            <a:r>
+              <a:rPr lang="en-US" sz="2200" dirty="0">
+                <a:solidFill>
+                  <a:srgbClr val="243041"/>
+                </a:solidFill>
+                <a:latin typeface="Pretendard" pitchFamily="34" charset="0"/>
+                <a:ea typeface="Pretendard" pitchFamily="34" charset="-122"/>
+                <a:cs typeface="Pretendard" pitchFamily="34" charset="-120"/>
+              </a:rPr>
+              <a:t>  straight-arrow, elbow-arrow, boundary-attach, overlap-joint, parallel-flow, contrast-flow.</a:t>
+            </a:r>
+            <a:endParaRPr lang="en-US" sz="2200" dirty="0"/>
+          </a:p>
+        </p:txBody>
+      </p:sp>
+    </p:spTree>
+  </p:cSld>
+  <p:clrMapOvr>
+    <a:masterClrMapping/>
+  </p:clrMapOvr>
+</p:sld>
+</file>
+
+<file path=ppt/slides/slide12.xml><?xml version="1.0" encoding="utf-8"?>
+<p:sld xmlns:a="http://schemas.openxmlformats.org/drawingml/2006/main" xmlns:r="http://schemas.openxmlformats.org/officeDocument/2006/relationships" xmlns:p="http://schemas.openxmlformats.org/presentationml/2006/main">
+  <p:cSld name="Slide 12">
+    <p:bg>
+      <p:bgPr>
+        <a:solidFill>
+          <a:srgbClr val="E9EEF5"/>
+        </a:solidFill>
+      </p:bgPr>
+    </p:bg>
+    <p:spTree>
+      <p:nvGrpSpPr>
+        <p:cNvPr id="1" name=""/>
+        <p:cNvGrpSpPr/>
+        <p:nvPr/>
+      </p:nvGrpSpPr>
+      <p:grpSpPr>
+        <a:xfrm>
+          <a:off x="0" y="0"/>
+          <a:ext cx="0" cy="0"/>
+          <a:chOff x="0" y="0"/>
+          <a:chExt cx="0" cy="0"/>
+        </a:xfrm>
+      </p:grpSpPr>
+      <p:sp>
+        <p:nvSpPr>
+          <p:cNvPr id="2" name="Shape 0"/>
+          <p:cNvSpPr/>
+          <p:nvPr/>
+        </p:nvSpPr>
+        <p:spPr>
+          <a:xfrm>
+            <a:off x="10362895" y="502920"/>
+            <a:ext cx="822960" cy="822960"/>
+          </a:xfrm>
+          <a:prstGeom prst="ellipse">
+            <a:avLst/>
+          </a:prstGeom>
+          <a:solidFill>
+            <a:srgbClr val="F7FAFC">
+              <a:alpha val="92000"/>
+            </a:srgbClr>
+          </a:solidFill>
+          <a:ln w="12700">
+            <a:solidFill>
+              <a:srgbClr val="FFFFFF">
+                <a:alpha val="0"/>
+              </a:srgbClr>
+            </a:solidFill>
+            <a:prstDash val="solid"/>
+          </a:ln>
+          <a:effectLst>
+            <a:outerShdw sx="100000" sy="100000" kx="0" ky="0" algn="bl" rotWithShape="0" blurRad="15240" dist="50800" dir="2700000">
+              <a:srgbClr val="C7D0DE">
+                <a:alpha val="22000"/>
+              </a:srgbClr>
+            </a:outerShdw>
+          </a:effectLst>
+        </p:spPr>
+      </p:sp>
+      <p:sp>
+        <p:nvSpPr>
+          <p:cNvPr id="3" name="Shape 1"/>
+          <p:cNvSpPr/>
+          <p:nvPr/>
+        </p:nvSpPr>
+        <p:spPr>
+          <a:xfrm>
+            <a:off x="530352" y="5687568"/>
+            <a:ext cx="658368" cy="658368"/>
+          </a:xfrm>
+          <a:prstGeom prst="ellipse">
+            <a:avLst/>
+          </a:prstGeom>
+          <a:solidFill>
+            <a:srgbClr val="E9EEF5"/>
+          </a:solidFill>
+          <a:ln w="12700">
+            <a:solidFill>
+              <a:srgbClr val="FFFFFF">
+                <a:alpha val="42000"/>
+              </a:srgbClr>
+            </a:solidFill>
+            <a:prstDash val="solid"/>
+          </a:ln>
+          <a:effectLst>
+            <a:outerShdw sx="100000" sy="100000" kx="0" ky="0" algn="bl" rotWithShape="0" blurRad="12700" dist="50800" dir="2700000">
+              <a:srgbClr val="B8C3D2">
+                <a:alpha val="18000"/>
+              </a:srgbClr>
+            </a:outerShdw>
+          </a:effectLst>
+        </p:spPr>
+      </p:sp>
+      <p:sp>
+        <p:nvSpPr>
+          <p:cNvPr id="4" name="Shape 2"/>
+          <p:cNvSpPr/>
+          <p:nvPr/>
+        </p:nvSpPr>
+        <p:spPr>
+          <a:xfrm>
+            <a:off x="731520" y="1207008"/>
+            <a:ext cx="1325880" cy="54864"/>
+          </a:xfrm>
+          <a:prstGeom prst="rect">
+            <a:avLst/>
+          </a:prstGeom>
+          <a:solidFill>
+            <a:srgbClr val="4F6F8F"/>
+          </a:solidFill>
+          <a:ln w="12700">
+            <a:solidFill>
+              <a:srgbClr val="4F6F8F">
+                <a:alpha val="0"/>
+              </a:srgbClr>
+            </a:solidFill>
+            <a:prstDash val="solid"/>
+          </a:ln>
+        </p:spPr>
+      </p:sp>
+      <p:sp>
+        <p:nvSpPr>
+          <p:cNvPr id="5" name="Shape 3"/>
+          <p:cNvSpPr/>
+          <p:nvPr/>
+        </p:nvSpPr>
+        <p:spPr>
+          <a:xfrm>
+            <a:off x="822960" y="1554480"/>
+            <a:ext cx="4937760" cy="73152"/>
+          </a:xfrm>
+          <a:prstGeom prst="rect">
+            <a:avLst/>
+          </a:prstGeom>
+          <a:solidFill>
+            <a:srgbClr val="4F6F8F"/>
+          </a:solidFill>
+          <a:ln w="12700">
+            <a:solidFill>
+              <a:srgbClr val="4F6F8F">
+                <a:alpha val="0"/>
+              </a:srgbClr>
+            </a:solidFill>
+            <a:prstDash val="solid"/>
+          </a:ln>
+        </p:spPr>
+      </p:sp>
+      <p:sp>
+        <p:nvSpPr>
+          <p:cNvPr id="6" name="Shape 4"/>
+          <p:cNvSpPr/>
+          <p:nvPr/>
+        </p:nvSpPr>
+        <p:spPr>
+          <a:xfrm>
+            <a:off x="6400800" y="1554480"/>
+            <a:ext cx="4937760" cy="73152"/>
+          </a:xfrm>
+          <a:prstGeom prst="rect">
+            <a:avLst/>
+          </a:prstGeom>
+          <a:solidFill>
+            <a:srgbClr val="4F6F8F"/>
+          </a:solidFill>
+          <a:ln w="12700">
+            <a:solidFill>
+              <a:srgbClr val="4F6F8F">
+                <a:alpha val="0"/>
+              </a:srgbClr>
+            </a:solidFill>
+            <a:prstDash val="solid"/>
+          </a:ln>
+        </p:spPr>
+      </p:sp>
+      <p:sp>
+        <p:nvSpPr>
+          <p:cNvPr id="7" name="Text 5"/>
+          <p:cNvSpPr txBox="1"/>
+          <p:nvPr/>
+        </p:nvSpPr>
+        <p:spPr>
+          <a:xfrm>
+            <a:off x="731520" y="457200"/>
+            <a:ext cx="10698480" cy="731520"/>
+          </a:xfrm>
+          <a:prstGeom prst="rect">
+            <a:avLst/>
+          </a:prstGeom>
+          <a:noFill/>
+          <a:ln/>
+        </p:spPr>
+        <p:txBody>
+          <a:bodyPr wrap="square" lIns="0" tIns="0" rIns="0" bIns="0" rtlCol="0" anchor="ctr"/>
+          <a:lstStyle/>
+          <a:p>
+            <a:pPr algn="ctr" indent="0" marL="0">
+              <a:lnSpc>
+                <a:spcPct val="120000"/>
+              </a:lnSpc>
+              <a:buNone/>
+            </a:pPr>
+            <a:r>
+              <a:rPr lang="en-US" sz="3400" b="1" dirty="0">
+                <a:solidFill>
+                  <a:srgbClr val="243041"/>
+                </a:solidFill>
+                <a:latin typeface="Pretendard" pitchFamily="34" charset="0"/>
+                <a:ea typeface="Pretendard" pitchFamily="34" charset="-122"/>
+                <a:cs typeface="Pretendard" pitchFamily="34" charset="-120"/>
+              </a:rPr>
+              <a:t>Decoration Pattern Catalog (Cont. 2/2)</a:t>
+            </a:r>
+            <a:endParaRPr lang="en-US" sz="3400" dirty="0"/>
+          </a:p>
+        </p:txBody>
+      </p:sp>
+      <p:sp>
+        <p:nvSpPr>
+          <p:cNvPr id="8" name="Text 6"/>
+          <p:cNvSpPr txBox="1"/>
+          <p:nvPr/>
+        </p:nvSpPr>
+        <p:spPr>
+          <a:xfrm>
+            <a:off x="896112" y="1664208"/>
+            <a:ext cx="4791456" cy="4169664"/>
+          </a:xfrm>
+          <a:prstGeom prst="rect">
+            <a:avLst/>
+          </a:prstGeom>
+          <a:noFill/>
+          <a:ln/>
+        </p:spPr>
+        <p:txBody>
+          <a:bodyPr wrap="square" lIns="0" tIns="25400" rIns="25400" bIns="0" rtlCol="0" anchor="t"/>
+          <a:lstStyle/>
+          <a:p>
+            <a:pPr algn="l" indent="0" marL="0">
+              <a:lnSpc>
+                <a:spcPct val="120000"/>
+              </a:lnSpc>
+              <a:buNone/>
+            </a:pPr>
+            <a:r>
+              <a:rPr lang="en-US" sz="2200" b="1" dirty="0">
+                <a:solidFill>
+                  <a:srgbClr val="4F6F8F"/>
+                </a:solidFill>
+                <a:latin typeface="Pretendard" pitchFamily="34" charset="0"/>
+                <a:ea typeface="Pretendard" pitchFamily="34" charset="-122"/>
+                <a:cs typeface="Pretendard" pitchFamily="34" charset="-120"/>
+              </a:rPr>
+              <a:t>- Icons</a:t>
+            </a:r>
+            <a:pPr algn="l" indent="0" marL="0">
+              <a:lnSpc>
+                <a:spcPct val="120000"/>
+              </a:lnSpc>
+              <a:buNone/>
+            </a:pPr>
+            <a:r>
+              <a:rPr lang="en-US" sz="2200" dirty="0">
+                <a:solidFill>
+                  <a:srgbClr val="243041"/>
+                </a:solidFill>
+                <a:latin typeface="Pretendard" pitchFamily="34" charset="0"/>
+                <a:ea typeface="Pretendard" pitchFamily="34" charset="-122"/>
+                <a:cs typeface="Pretendard" pitchFamily="34" charset="-120"/>
+              </a:rPr>
+              <a:t>  number-badge, mono-icon-slot, letter-disc, quiet-aside, image-safe-frame, brand-glyph.</a:t>
+            </a:r>
+            <a:endParaRPr lang="en-US" sz="2200" dirty="0"/>
+          </a:p>
+        </p:txBody>
+      </p:sp>
+      <p:sp>
+        <p:nvSpPr>
+          <p:cNvPr id="9" name="Text 7"/>
+          <p:cNvSpPr txBox="1"/>
+          <p:nvPr/>
+        </p:nvSpPr>
+        <p:spPr>
+          <a:xfrm>
+            <a:off x="6473952" y="1664208"/>
+            <a:ext cx="4791456" cy="4169664"/>
+          </a:xfrm>
+          <a:prstGeom prst="rect">
+            <a:avLst/>
+          </a:prstGeom>
+          <a:noFill/>
+          <a:ln/>
+        </p:spPr>
+        <p:txBody>
+          <a:bodyPr wrap="square" lIns="0" tIns="25400" rIns="25400" bIns="0" rtlCol="0" anchor="t"/>
+          <a:lstStyle/>
+          <a:p>
+            <a:pPr algn="l" indent="0" marL="0">
+              <a:lnSpc>
+                <a:spcPct val="120000"/>
+              </a:lnSpc>
+              <a:buNone/>
+            </a:pPr>
+            <a:r>
+              <a:rPr lang="en-US" sz="2200" b="1" dirty="0">
+                <a:solidFill>
+                  <a:srgbClr val="4F6F8F"/>
+                </a:solidFill>
+                <a:latin typeface="Pretendard" pitchFamily="34" charset="0"/>
+                <a:ea typeface="Pretendard" pitchFamily="34" charset="-122"/>
+                <a:cs typeface="Pretendard" pitchFamily="34" charset="-120"/>
+              </a:rPr>
+              <a:t>- Page grammar</a:t>
+            </a:r>
+            <a:pPr algn="l" indent="0" marL="0">
+              <a:lnSpc>
+                <a:spcPct val="120000"/>
+              </a:lnSpc>
+              <a:buNone/>
+            </a:pPr>
+            <a:r>
+              <a:rPr lang="en-US" sz="2200" dirty="0">
+                <a:solidFill>
+                  <a:srgbClr val="243041"/>
+                </a:solidFill>
+                <a:latin typeface="Pretendard" pitchFamily="34" charset="0"/>
+                <a:ea typeface="Pretendard" pitchFamily="34" charset="-122"/>
+                <a:cs typeface="Pretendard" pitchFamily="34" charset="-120"/>
+              </a:rPr>
+              <a:t>  magazine-rail, grid-baseline, glass-surface, newmorphic-panel, data-rail, minimal-rule.</a:t>
+            </a:r>
+            <a:endParaRPr lang="en-US" sz="2200" dirty="0"/>
+          </a:p>
+        </p:txBody>
+      </p:sp>
+    </p:spTree>
+  </p:cSld>
+  <p:clrMapOvr>
+    <a:masterClrMapping/>
+  </p:clrMapOvr>
+</p:sld>
+</file>
+
+<file path=ppt/slides/slide13.xml><?xml version="1.0" encoding="utf-8"?>
+<p:sld xmlns:a="http://schemas.openxmlformats.org/drawingml/2006/main" xmlns:r="http://schemas.openxmlformats.org/officeDocument/2006/relationships" xmlns:p="http://schemas.openxmlformats.org/presentationml/2006/main">
+  <p:cSld name="Slide 13">
+    <p:bg>
+      <p:bgPr>
+        <a:solidFill>
+          <a:srgbClr val="E9EEF5"/>
+        </a:solidFill>
+      </p:bgPr>
+    </p:bg>
+    <p:spTree>
+      <p:nvGrpSpPr>
+        <p:cNvPr id="1" name=""/>
+        <p:cNvGrpSpPr/>
+        <p:nvPr/>
+      </p:nvGrpSpPr>
+      <p:grpSpPr>
+        <a:xfrm>
+          <a:off x="0" y="0"/>
+          <a:ext cx="0" cy="0"/>
+          <a:chOff x="0" y="0"/>
+          <a:chExt cx="0" cy="0"/>
+        </a:xfrm>
+      </p:grpSpPr>
+      <p:sp>
+        <p:nvSpPr>
+          <p:cNvPr id="2" name="Shape 0"/>
+          <p:cNvSpPr/>
+          <p:nvPr/>
+        </p:nvSpPr>
+        <p:spPr>
+          <a:xfrm>
+            <a:off x="10362895" y="502920"/>
+            <a:ext cx="822960" cy="822960"/>
+          </a:xfrm>
+          <a:prstGeom prst="ellipse">
+            <a:avLst/>
+          </a:prstGeom>
+          <a:solidFill>
+            <a:srgbClr val="F7FAFC">
+              <a:alpha val="92000"/>
+            </a:srgbClr>
+          </a:solidFill>
+          <a:ln w="12700">
+            <a:solidFill>
+              <a:srgbClr val="FFFFFF">
+                <a:alpha val="0"/>
+              </a:srgbClr>
+            </a:solidFill>
+            <a:prstDash val="solid"/>
+          </a:ln>
+          <a:effectLst>
+            <a:outerShdw sx="100000" sy="100000" kx="0" ky="0" algn="bl" rotWithShape="0" blurRad="15240" dist="50800" dir="2700000">
+              <a:srgbClr val="C7D0DE">
+                <a:alpha val="22000"/>
+              </a:srgbClr>
+            </a:outerShdw>
+          </a:effectLst>
+        </p:spPr>
+      </p:sp>
+      <p:sp>
+        <p:nvSpPr>
+          <p:cNvPr id="3" name="Shape 1"/>
+          <p:cNvSpPr/>
+          <p:nvPr/>
+        </p:nvSpPr>
+        <p:spPr>
+          <a:xfrm>
+            <a:off x="530352" y="5687568"/>
+            <a:ext cx="658368" cy="658368"/>
+          </a:xfrm>
+          <a:prstGeom prst="ellipse">
+            <a:avLst/>
+          </a:prstGeom>
+          <a:solidFill>
+            <a:srgbClr val="E9EEF5"/>
+          </a:solidFill>
+          <a:ln w="12700">
+            <a:solidFill>
+              <a:srgbClr val="FFFFFF">
+                <a:alpha val="42000"/>
+              </a:srgbClr>
+            </a:solidFill>
+            <a:prstDash val="solid"/>
+          </a:ln>
+          <a:effectLst>
+            <a:outerShdw sx="100000" sy="100000" kx="0" ky="0" algn="bl" rotWithShape="0" blurRad="12700" dist="50800" dir="2700000">
+              <a:srgbClr val="B8C3D2">
+                <a:alpha val="18000"/>
+              </a:srgbClr>
+            </a:outerShdw>
+          </a:effectLst>
+        </p:spPr>
+      </p:sp>
+      <p:sp>
+        <p:nvSpPr>
+          <p:cNvPr id="4" name="Shape 2"/>
+          <p:cNvSpPr/>
+          <p:nvPr/>
+        </p:nvSpPr>
+        <p:spPr>
+          <a:xfrm>
+            <a:off x="731520" y="1207008"/>
+            <a:ext cx="1325880" cy="54864"/>
+          </a:xfrm>
+          <a:prstGeom prst="rect">
+            <a:avLst/>
+          </a:prstGeom>
+          <a:solidFill>
+            <a:srgbClr val="4F6F8F"/>
+          </a:solidFill>
+          <a:ln w="12700">
+            <a:solidFill>
+              <a:srgbClr val="4F6F8F">
+                <a:alpha val="0"/>
+              </a:srgbClr>
+            </a:solidFill>
+            <a:prstDash val="solid"/>
+          </a:ln>
+        </p:spPr>
+      </p:sp>
+      <p:sp>
+        <p:nvSpPr>
           <p:cNvPr id="5" name="Shape 3"/>
           <p:cNvSpPr/>
           <p:nvPr/>
@@ -3269,7 +6021,7 @@
       </p:sp>
       <p:graphicFrame>
         <p:nvGraphicFramePr>
-          <p:cNvPr id="11" name="Table 0"/>
+          <p:cNvPr id="14" name="Table 0"/>
           <p:cNvGraphicFramePr>
             <a:graphicFrameLocks noGrp="1"/>
           </p:cNvGraphicFramePr>
@@ -4330,9 +7082,9 @@
 </p:sld>
 </file>
 
-<file path=ppt/slides/slide11.xml><?xml version="1.0" encoding="utf-8"?>
+<file path=ppt/slides/slide14.xml><?xml version="1.0" encoding="utf-8"?>
 <p:sld xmlns:a="http://schemas.openxmlformats.org/drawingml/2006/main" xmlns:r="http://schemas.openxmlformats.org/officeDocument/2006/relationships" xmlns:p="http://schemas.openxmlformats.org/presentationml/2006/main">
-  <p:cSld name="Slide 11">
+  <p:cSld name="Slide 14">
     <p:bg>
       <p:bgPr>
         <a:solidFill>
@@ -4820,9 +7572,9 @@
 </p:sld>
 </file>
 
-<file path=ppt/slides/slide12.xml><?xml version="1.0" encoding="utf-8"?>
+<file path=ppt/slides/slide15.xml><?xml version="1.0" encoding="utf-8"?>
 <p:sld xmlns:a="http://schemas.openxmlformats.org/drawingml/2006/main" xmlns:r="http://schemas.openxmlformats.org/officeDocument/2006/relationships" xmlns:p="http://schemas.openxmlformats.org/presentationml/2006/main">
-  <p:cSld name="Slide 12">
+  <p:cSld name="Slide 15">
     <p:bg>
       <p:bgPr>
         <a:solidFill>
@@ -5122,7 +7874,7 @@
       </p:sp>
       <p:graphicFrame>
         <p:nvGraphicFramePr>
-          <p:cNvPr id="13" name="Table 0"/>
+          <p:cNvPr id="16" name="Table 0"/>
           <p:cNvGraphicFramePr>
             <a:graphicFrameLocks noGrp="1"/>
           </p:cNvGraphicFramePr>
@@ -5971,9 +8723,9 @@
 </p:sld>
 </file>
 
-<file path=ppt/slides/slide13.xml><?xml version="1.0" encoding="utf-8"?>
+<file path=ppt/slides/slide16.xml><?xml version="1.0" encoding="utf-8"?>
 <p:sld xmlns:a="http://schemas.openxmlformats.org/drawingml/2006/main" xmlns:r="http://schemas.openxmlformats.org/officeDocument/2006/relationships" xmlns:p="http://schemas.openxmlformats.org/presentationml/2006/main">
-  <p:cSld name="Slide 13">
+  <p:cSld name="Slide 16">
     <p:bg>
       <p:bgPr>
         <a:solidFill>
@@ -6982,9 +9734,9 @@
 </p:sld>
 </file>
 
-<file path=ppt/slides/slide14.xml><?xml version="1.0" encoding="utf-8"?>
+<file path=ppt/slides/slide17.xml><?xml version="1.0" encoding="utf-8"?>
 <p:sld xmlns:a="http://schemas.openxmlformats.org/drawingml/2006/main" xmlns:r="http://schemas.openxmlformats.org/officeDocument/2006/relationships" xmlns:p="http://schemas.openxmlformats.org/presentationml/2006/main">
-  <p:cSld name="Slide 14">
+  <p:cSld name="Slide 17">
     <p:bg>
       <p:bgPr>
         <a:solidFill>
@@ -7930,9 +10682,9 @@
 </p:sld>
 </file>
 
-<file path=ppt/slides/slide15.xml><?xml version="1.0" encoding="utf-8"?>
+<file path=ppt/slides/slide18.xml><?xml version="1.0" encoding="utf-8"?>
 <p:sld xmlns:a="http://schemas.openxmlformats.org/drawingml/2006/main" xmlns:r="http://schemas.openxmlformats.org/officeDocument/2006/relationships" xmlns:p="http://schemas.openxmlformats.org/presentationml/2006/main">
-  <p:cSld name="Slide 15">
+  <p:cSld name="Slide 18">
     <p:bg>
       <p:bgPr>
         <a:solidFill>
@@ -8267,9 +11019,9 @@
 </p:sld>
 </file>
 
-<file path=ppt/slides/slide16.xml><?xml version="1.0" encoding="utf-8"?>
+<file path=ppt/slides/slide19.xml><?xml version="1.0" encoding="utf-8"?>
 <p:sld xmlns:a="http://schemas.openxmlformats.org/drawingml/2006/main" xmlns:r="http://schemas.openxmlformats.org/officeDocument/2006/relationships" xmlns:p="http://schemas.openxmlformats.org/presentationml/2006/main">
-  <p:cSld name="Slide 16">
+  <p:cSld name="Slide 19">
     <p:bg>
       <p:bgPr>
         <a:solidFill>
@@ -8610,9 +11362,1229 @@
 </p:sld>
 </file>
 
-<file path=ppt/slides/slide17.xml><?xml version="1.0" encoding="utf-8"?>
+<file path=ppt/slides/slide2.xml><?xml version="1.0" encoding="utf-8"?>
 <p:sld xmlns:a="http://schemas.openxmlformats.org/drawingml/2006/main" xmlns:r="http://schemas.openxmlformats.org/officeDocument/2006/relationships" xmlns:p="http://schemas.openxmlformats.org/presentationml/2006/main">
-  <p:cSld name="Slide 17">
+  <p:cSld name="Slide 2">
+    <p:bg>
+      <p:bgPr>
+        <a:solidFill>
+          <a:srgbClr val="E9EEF5"/>
+        </a:solidFill>
+      </p:bgPr>
+    </p:bg>
+    <p:spTree>
+      <p:nvGrpSpPr>
+        <p:cNvPr id="1" name=""/>
+        <p:cNvGrpSpPr/>
+        <p:nvPr/>
+      </p:nvGrpSpPr>
+      <p:grpSpPr>
+        <a:xfrm>
+          <a:off x="0" y="0"/>
+          <a:ext cx="0" cy="0"/>
+          <a:chOff x="0" y="0"/>
+          <a:chExt cx="0" cy="0"/>
+        </a:xfrm>
+      </p:grpSpPr>
+      <p:sp>
+        <p:nvSpPr>
+          <p:cNvPr id="2" name="Shape 0"/>
+          <p:cNvSpPr/>
+          <p:nvPr/>
+        </p:nvSpPr>
+        <p:spPr>
+          <a:xfrm>
+            <a:off x="10362895" y="502920"/>
+            <a:ext cx="822960" cy="822960"/>
+          </a:xfrm>
+          <a:prstGeom prst="ellipse">
+            <a:avLst/>
+          </a:prstGeom>
+          <a:solidFill>
+            <a:srgbClr val="F7FAFC">
+              <a:alpha val="92000"/>
+            </a:srgbClr>
+          </a:solidFill>
+          <a:ln w="12700">
+            <a:solidFill>
+              <a:srgbClr val="FFFFFF">
+                <a:alpha val="0"/>
+              </a:srgbClr>
+            </a:solidFill>
+            <a:prstDash val="solid"/>
+          </a:ln>
+          <a:effectLst>
+            <a:outerShdw sx="100000" sy="100000" kx="0" ky="0" algn="bl" rotWithShape="0" blurRad="15240" dist="50800" dir="2700000">
+              <a:srgbClr val="C7D0DE">
+                <a:alpha val="22000"/>
+              </a:srgbClr>
+            </a:outerShdw>
+          </a:effectLst>
+        </p:spPr>
+      </p:sp>
+      <p:sp>
+        <p:nvSpPr>
+          <p:cNvPr id="3" name="Shape 1"/>
+          <p:cNvSpPr/>
+          <p:nvPr/>
+        </p:nvSpPr>
+        <p:spPr>
+          <a:xfrm>
+            <a:off x="530352" y="5687568"/>
+            <a:ext cx="658368" cy="658368"/>
+          </a:xfrm>
+          <a:prstGeom prst="ellipse">
+            <a:avLst/>
+          </a:prstGeom>
+          <a:solidFill>
+            <a:srgbClr val="E9EEF5"/>
+          </a:solidFill>
+          <a:ln w="12700">
+            <a:solidFill>
+              <a:srgbClr val="FFFFFF">
+                <a:alpha val="42000"/>
+              </a:srgbClr>
+            </a:solidFill>
+            <a:prstDash val="solid"/>
+          </a:ln>
+          <a:effectLst>
+            <a:outerShdw sx="100000" sy="100000" kx="0" ky="0" algn="bl" rotWithShape="0" blurRad="12700" dist="50800" dir="2700000">
+              <a:srgbClr val="B8C3D2">
+                <a:alpha val="18000"/>
+              </a:srgbClr>
+            </a:outerShdw>
+          </a:effectLst>
+        </p:spPr>
+      </p:sp>
+      <p:sp>
+        <p:nvSpPr>
+          <p:cNvPr id="4" name="Shape 2"/>
+          <p:cNvSpPr/>
+          <p:nvPr/>
+        </p:nvSpPr>
+        <p:spPr>
+          <a:xfrm>
+            <a:off x="731520" y="1207008"/>
+            <a:ext cx="1325880" cy="54864"/>
+          </a:xfrm>
+          <a:prstGeom prst="rect">
+            <a:avLst/>
+          </a:prstGeom>
+          <a:solidFill>
+            <a:srgbClr val="4F6F8F"/>
+          </a:solidFill>
+          <a:ln w="12700">
+            <a:solidFill>
+              <a:srgbClr val="4F6F8F">
+                <a:alpha val="0"/>
+              </a:srgbClr>
+            </a:solidFill>
+            <a:prstDash val="solid"/>
+          </a:ln>
+        </p:spPr>
+      </p:sp>
+      <p:sp>
+        <p:nvSpPr>
+          <p:cNvPr id="5" name="Shape 3"/>
+          <p:cNvSpPr/>
+          <p:nvPr/>
+        </p:nvSpPr>
+        <p:spPr>
+          <a:xfrm>
+            <a:off x="822960" y="1188720"/>
+            <a:ext cx="10515600" cy="45720"/>
+          </a:xfrm>
+          <a:prstGeom prst="rect">
+            <a:avLst/>
+          </a:prstGeom>
+          <a:solidFill>
+            <a:srgbClr val="4F6F8F"/>
+          </a:solidFill>
+          <a:ln w="12700">
+            <a:solidFill>
+              <a:srgbClr val="4F6F8F">
+                <a:alpha val="0"/>
+              </a:srgbClr>
+            </a:solidFill>
+            <a:prstDash val="solid"/>
+          </a:ln>
+        </p:spPr>
+      </p:sp>
+      <p:sp>
+        <p:nvSpPr>
+          <p:cNvPr id="6" name="Shape 4"/>
+          <p:cNvSpPr/>
+          <p:nvPr/>
+        </p:nvSpPr>
+        <p:spPr>
+          <a:xfrm>
+            <a:off x="822960" y="6382512"/>
+            <a:ext cx="2011680" cy="45720"/>
+          </a:xfrm>
+          <a:prstGeom prst="rect">
+            <a:avLst/>
+          </a:prstGeom>
+          <a:solidFill>
+            <a:srgbClr val="CBD5E1"/>
+          </a:solidFill>
+          <a:ln w="12700">
+            <a:solidFill>
+              <a:srgbClr val="CBD5E1">
+                <a:alpha val="0"/>
+              </a:srgbClr>
+            </a:solidFill>
+            <a:prstDash val="solid"/>
+          </a:ln>
+        </p:spPr>
+      </p:sp>
+      <p:sp>
+        <p:nvSpPr>
+          <p:cNvPr id="7" name="Shape 5"/>
+          <p:cNvSpPr/>
+          <p:nvPr/>
+        </p:nvSpPr>
+        <p:spPr>
+          <a:xfrm>
+            <a:off x="6080760" y="1389888"/>
+            <a:ext cx="22860" cy="4846320"/>
+          </a:xfrm>
+          <a:prstGeom prst="rect">
+            <a:avLst/>
+          </a:prstGeom>
+          <a:solidFill>
+            <a:srgbClr val="D5DCE7">
+              <a:alpha val="90000"/>
+            </a:srgbClr>
+          </a:solidFill>
+          <a:ln w="12700">
+            <a:solidFill>
+              <a:srgbClr val="D5DCE7">
+                <a:alpha val="0"/>
+              </a:srgbClr>
+            </a:solidFill>
+            <a:prstDash val="solid"/>
+          </a:ln>
+        </p:spPr>
+      </p:sp>
+      <p:sp>
+        <p:nvSpPr>
+          <p:cNvPr id="8" name="Shape 6"/>
+          <p:cNvSpPr/>
+          <p:nvPr/>
+        </p:nvSpPr>
+        <p:spPr>
+          <a:xfrm>
+            <a:off x="822960" y="1389888"/>
+            <a:ext cx="73152" cy="566928"/>
+          </a:xfrm>
+          <a:prstGeom prst="rect">
+            <a:avLst/>
+          </a:prstGeom>
+          <a:solidFill>
+            <a:srgbClr val="4F6F8F"/>
+          </a:solidFill>
+          <a:ln w="12700">
+            <a:solidFill>
+              <a:srgbClr val="4F6F8F">
+                <a:alpha val="0"/>
+              </a:srgbClr>
+            </a:solidFill>
+            <a:prstDash val="solid"/>
+          </a:ln>
+        </p:spPr>
+      </p:sp>
+      <p:sp>
+        <p:nvSpPr>
+          <p:cNvPr id="9" name="Shape 7"/>
+          <p:cNvSpPr/>
+          <p:nvPr/>
+        </p:nvSpPr>
+        <p:spPr>
+          <a:xfrm>
+            <a:off x="822960" y="2103120"/>
+            <a:ext cx="73152" cy="566928"/>
+          </a:xfrm>
+          <a:prstGeom prst="rect">
+            <a:avLst/>
+          </a:prstGeom>
+          <a:solidFill>
+            <a:srgbClr val="CBD5E1"/>
+          </a:solidFill>
+          <a:ln w="12700">
+            <a:solidFill>
+              <a:srgbClr val="CBD5E1">
+                <a:alpha val="0"/>
+              </a:srgbClr>
+            </a:solidFill>
+            <a:prstDash val="solid"/>
+          </a:ln>
+        </p:spPr>
+      </p:sp>
+      <p:sp>
+        <p:nvSpPr>
+          <p:cNvPr id="10" name="Shape 8"/>
+          <p:cNvSpPr/>
+          <p:nvPr/>
+        </p:nvSpPr>
+        <p:spPr>
+          <a:xfrm>
+            <a:off x="822960" y="2816352"/>
+            <a:ext cx="73152" cy="566928"/>
+          </a:xfrm>
+          <a:prstGeom prst="rect">
+            <a:avLst/>
+          </a:prstGeom>
+          <a:solidFill>
+            <a:srgbClr val="4F6F8F"/>
+          </a:solidFill>
+          <a:ln w="12700">
+            <a:solidFill>
+              <a:srgbClr val="4F6F8F">
+                <a:alpha val="0"/>
+              </a:srgbClr>
+            </a:solidFill>
+            <a:prstDash val="solid"/>
+          </a:ln>
+        </p:spPr>
+      </p:sp>
+      <p:sp>
+        <p:nvSpPr>
+          <p:cNvPr id="11" name="Shape 9"/>
+          <p:cNvSpPr/>
+          <p:nvPr/>
+        </p:nvSpPr>
+        <p:spPr>
+          <a:xfrm>
+            <a:off x="822960" y="3529584"/>
+            <a:ext cx="73152" cy="566928"/>
+          </a:xfrm>
+          <a:prstGeom prst="rect">
+            <a:avLst/>
+          </a:prstGeom>
+          <a:solidFill>
+            <a:srgbClr val="CBD5E1"/>
+          </a:solidFill>
+          <a:ln w="12700">
+            <a:solidFill>
+              <a:srgbClr val="CBD5E1">
+                <a:alpha val="0"/>
+              </a:srgbClr>
+            </a:solidFill>
+            <a:prstDash val="solid"/>
+          </a:ln>
+        </p:spPr>
+      </p:sp>
+      <p:sp>
+        <p:nvSpPr>
+          <p:cNvPr id="12" name="Shape 10"/>
+          <p:cNvSpPr/>
+          <p:nvPr/>
+        </p:nvSpPr>
+        <p:spPr>
+          <a:xfrm>
+            <a:off x="822960" y="4242816"/>
+            <a:ext cx="73152" cy="566928"/>
+          </a:xfrm>
+          <a:prstGeom prst="rect">
+            <a:avLst/>
+          </a:prstGeom>
+          <a:solidFill>
+            <a:srgbClr val="4F6F8F"/>
+          </a:solidFill>
+          <a:ln w="12700">
+            <a:solidFill>
+              <a:srgbClr val="4F6F8F">
+                <a:alpha val="0"/>
+              </a:srgbClr>
+            </a:solidFill>
+            <a:prstDash val="solid"/>
+          </a:ln>
+        </p:spPr>
+      </p:sp>
+      <p:sp>
+        <p:nvSpPr>
+          <p:cNvPr id="13" name="Shape 11"/>
+          <p:cNvSpPr/>
+          <p:nvPr/>
+        </p:nvSpPr>
+        <p:spPr>
+          <a:xfrm>
+            <a:off x="822960" y="4956048"/>
+            <a:ext cx="73152" cy="566928"/>
+          </a:xfrm>
+          <a:prstGeom prst="rect">
+            <a:avLst/>
+          </a:prstGeom>
+          <a:solidFill>
+            <a:srgbClr val="CBD5E1"/>
+          </a:solidFill>
+          <a:ln w="12700">
+            <a:solidFill>
+              <a:srgbClr val="CBD5E1">
+                <a:alpha val="0"/>
+              </a:srgbClr>
+            </a:solidFill>
+            <a:prstDash val="solid"/>
+          </a:ln>
+        </p:spPr>
+      </p:sp>
+      <p:sp>
+        <p:nvSpPr>
+          <p:cNvPr id="14" name="Shape 12"/>
+          <p:cNvSpPr/>
+          <p:nvPr/>
+        </p:nvSpPr>
+        <p:spPr>
+          <a:xfrm>
+            <a:off x="822960" y="5669280"/>
+            <a:ext cx="73152" cy="566928"/>
+          </a:xfrm>
+          <a:prstGeom prst="rect">
+            <a:avLst/>
+          </a:prstGeom>
+          <a:solidFill>
+            <a:srgbClr val="4F6F8F"/>
+          </a:solidFill>
+          <a:ln w="12700">
+            <a:solidFill>
+              <a:srgbClr val="4F6F8F">
+                <a:alpha val="0"/>
+              </a:srgbClr>
+            </a:solidFill>
+            <a:prstDash val="solid"/>
+          </a:ln>
+        </p:spPr>
+      </p:sp>
+      <p:sp>
+        <p:nvSpPr>
+          <p:cNvPr id="15" name="Shape 13"/>
+          <p:cNvSpPr/>
+          <p:nvPr/>
+        </p:nvSpPr>
+        <p:spPr>
+          <a:xfrm>
+            <a:off x="6272784" y="1389888"/>
+            <a:ext cx="73152" cy="566928"/>
+          </a:xfrm>
+          <a:prstGeom prst="rect">
+            <a:avLst/>
+          </a:prstGeom>
+          <a:solidFill>
+            <a:srgbClr val="CBD5E1"/>
+          </a:solidFill>
+          <a:ln w="12700">
+            <a:solidFill>
+              <a:srgbClr val="CBD5E1">
+                <a:alpha val="0"/>
+              </a:srgbClr>
+            </a:solidFill>
+            <a:prstDash val="solid"/>
+          </a:ln>
+        </p:spPr>
+      </p:sp>
+      <p:sp>
+        <p:nvSpPr>
+          <p:cNvPr id="16" name="Shape 14"/>
+          <p:cNvSpPr/>
+          <p:nvPr/>
+        </p:nvSpPr>
+        <p:spPr>
+          <a:xfrm>
+            <a:off x="6272784" y="2103120"/>
+            <a:ext cx="73152" cy="566928"/>
+          </a:xfrm>
+          <a:prstGeom prst="rect">
+            <a:avLst/>
+          </a:prstGeom>
+          <a:solidFill>
+            <a:srgbClr val="4F6F8F"/>
+          </a:solidFill>
+          <a:ln w="12700">
+            <a:solidFill>
+              <a:srgbClr val="4F6F8F">
+                <a:alpha val="0"/>
+              </a:srgbClr>
+            </a:solidFill>
+            <a:prstDash val="solid"/>
+          </a:ln>
+        </p:spPr>
+      </p:sp>
+      <p:sp>
+        <p:nvSpPr>
+          <p:cNvPr id="17" name="Shape 15"/>
+          <p:cNvSpPr/>
+          <p:nvPr/>
+        </p:nvSpPr>
+        <p:spPr>
+          <a:xfrm>
+            <a:off x="6272784" y="2816352"/>
+            <a:ext cx="73152" cy="566928"/>
+          </a:xfrm>
+          <a:prstGeom prst="rect">
+            <a:avLst/>
+          </a:prstGeom>
+          <a:solidFill>
+            <a:srgbClr val="CBD5E1"/>
+          </a:solidFill>
+          <a:ln w="12700">
+            <a:solidFill>
+              <a:srgbClr val="CBD5E1">
+                <a:alpha val="0"/>
+              </a:srgbClr>
+            </a:solidFill>
+            <a:prstDash val="solid"/>
+          </a:ln>
+        </p:spPr>
+      </p:sp>
+      <p:sp>
+        <p:nvSpPr>
+          <p:cNvPr id="18" name="Shape 16"/>
+          <p:cNvSpPr/>
+          <p:nvPr/>
+        </p:nvSpPr>
+        <p:spPr>
+          <a:xfrm>
+            <a:off x="6272784" y="3529584"/>
+            <a:ext cx="73152" cy="566928"/>
+          </a:xfrm>
+          <a:prstGeom prst="rect">
+            <a:avLst/>
+          </a:prstGeom>
+          <a:solidFill>
+            <a:srgbClr val="4F6F8F"/>
+          </a:solidFill>
+          <a:ln w="12700">
+            <a:solidFill>
+              <a:srgbClr val="4F6F8F">
+                <a:alpha val="0"/>
+              </a:srgbClr>
+            </a:solidFill>
+            <a:prstDash val="solid"/>
+          </a:ln>
+        </p:spPr>
+      </p:sp>
+      <p:sp>
+        <p:nvSpPr>
+          <p:cNvPr id="19" name="Shape 17"/>
+          <p:cNvSpPr/>
+          <p:nvPr/>
+        </p:nvSpPr>
+        <p:spPr>
+          <a:xfrm>
+            <a:off x="6272784" y="4242816"/>
+            <a:ext cx="73152" cy="566928"/>
+          </a:xfrm>
+          <a:prstGeom prst="rect">
+            <a:avLst/>
+          </a:prstGeom>
+          <a:solidFill>
+            <a:srgbClr val="CBD5E1"/>
+          </a:solidFill>
+          <a:ln w="12700">
+            <a:solidFill>
+              <a:srgbClr val="CBD5E1">
+                <a:alpha val="0"/>
+              </a:srgbClr>
+            </a:solidFill>
+            <a:prstDash val="solid"/>
+          </a:ln>
+        </p:spPr>
+      </p:sp>
+      <p:sp>
+        <p:nvSpPr>
+          <p:cNvPr id="20" name="Shape 18"/>
+          <p:cNvSpPr/>
+          <p:nvPr/>
+        </p:nvSpPr>
+        <p:spPr>
+          <a:xfrm>
+            <a:off x="6272784" y="4956048"/>
+            <a:ext cx="73152" cy="566928"/>
+          </a:xfrm>
+          <a:prstGeom prst="rect">
+            <a:avLst/>
+          </a:prstGeom>
+          <a:solidFill>
+            <a:srgbClr val="4F6F8F"/>
+          </a:solidFill>
+          <a:ln w="12700">
+            <a:solidFill>
+              <a:srgbClr val="4F6F8F">
+                <a:alpha val="0"/>
+              </a:srgbClr>
+            </a:solidFill>
+            <a:prstDash val="solid"/>
+          </a:ln>
+        </p:spPr>
+      </p:sp>
+      <p:sp>
+        <p:nvSpPr>
+          <p:cNvPr id="21" name="Shape 19"/>
+          <p:cNvSpPr/>
+          <p:nvPr/>
+        </p:nvSpPr>
+        <p:spPr>
+          <a:xfrm>
+            <a:off x="6272784" y="5669280"/>
+            <a:ext cx="73152" cy="566928"/>
+          </a:xfrm>
+          <a:prstGeom prst="rect">
+            <a:avLst/>
+          </a:prstGeom>
+          <a:solidFill>
+            <a:srgbClr val="CBD5E1"/>
+          </a:solidFill>
+          <a:ln w="12700">
+            <a:solidFill>
+              <a:srgbClr val="CBD5E1">
+                <a:alpha val="0"/>
+              </a:srgbClr>
+            </a:solidFill>
+            <a:prstDash val="solid"/>
+          </a:ln>
+        </p:spPr>
+      </p:sp>
+      <p:sp>
+        <p:nvSpPr>
+          <p:cNvPr id="22" name="Text 20"/>
+          <p:cNvSpPr txBox="1"/>
+          <p:nvPr/>
+        </p:nvSpPr>
+        <p:spPr>
+          <a:xfrm>
+            <a:off x="731520" y="384048"/>
+            <a:ext cx="10698480" cy="822960"/>
+          </a:xfrm>
+          <a:prstGeom prst="rect">
+            <a:avLst/>
+          </a:prstGeom>
+          <a:noFill/>
+          <a:ln/>
+        </p:spPr>
+        <p:txBody>
+          <a:bodyPr wrap="square" lIns="0" tIns="0" rIns="0" bIns="0" rtlCol="0" anchor="ctr"/>
+          <a:lstStyle/>
+          <a:p>
+            <a:pPr algn="ctr" indent="0" marL="0">
+              <a:lnSpc>
+                <a:spcPct val="120000"/>
+              </a:lnSpc>
+              <a:buNone/>
+            </a:pPr>
+            <a:r>
+              <a:rPr lang="en-US" sz="3800" b="1" dirty="0">
+                <a:solidFill>
+                  <a:srgbClr val="243041"/>
+                </a:solidFill>
+                <a:latin typeface="Pretendard" pitchFamily="34" charset="0"/>
+                <a:ea typeface="Pretendard" pitchFamily="34" charset="-122"/>
+                <a:cs typeface="Pretendard" pitchFamily="34" charset="-120"/>
+              </a:rPr>
+              <a:t>Agenda</a:t>
+            </a:r>
+            <a:endParaRPr lang="en-US" sz="3800" dirty="0"/>
+          </a:p>
+        </p:txBody>
+      </p:sp>
+      <p:sp>
+        <p:nvSpPr>
+          <p:cNvPr id="23" name="Text 21"/>
+          <p:cNvSpPr txBox="1"/>
+          <p:nvPr/>
+        </p:nvSpPr>
+        <p:spPr>
+          <a:xfrm>
+            <a:off x="1042416" y="1481328"/>
+            <a:ext cx="4645152" cy="384048"/>
+          </a:xfrm>
+          <a:prstGeom prst="rect">
+            <a:avLst/>
+          </a:prstGeom>
+          <a:noFill/>
+          <a:ln/>
+        </p:spPr>
+        <p:txBody>
+          <a:bodyPr wrap="square" lIns="0" tIns="25400" rIns="25400" bIns="0" rtlCol="0" anchor="ctr"/>
+          <a:lstStyle/>
+          <a:p>
+            <a:pPr algn="ctr" indent="0" marL="0">
+              <a:lnSpc>
+                <a:spcPct val="120000"/>
+              </a:lnSpc>
+              <a:buNone/>
+            </a:pPr>
+            <a:r>
+              <a:rPr lang="en-US" sz="1800" dirty="0">
+                <a:solidFill>
+                  <a:srgbClr val="243041"/>
+                </a:solidFill>
+                <a:latin typeface="Pretendard" pitchFamily="34" charset="0"/>
+                <a:ea typeface="Pretendard" pitchFamily="34" charset="-122"/>
+                <a:cs typeface="Pretendard" pitchFamily="34" charset="-120"/>
+              </a:rPr>
+              <a:t>01  Teaser Summary</a:t>
+            </a:r>
+            <a:endParaRPr lang="en-US" sz="1800" dirty="0"/>
+          </a:p>
+        </p:txBody>
+      </p:sp>
+      <p:sp>
+        <p:nvSpPr>
+          <p:cNvPr id="24" name="Text 22"/>
+          <p:cNvSpPr txBox="1"/>
+          <p:nvPr/>
+        </p:nvSpPr>
+        <p:spPr>
+          <a:xfrm>
+            <a:off x="1042416" y="2194560"/>
+            <a:ext cx="4645152" cy="384048"/>
+          </a:xfrm>
+          <a:prstGeom prst="rect">
+            <a:avLst/>
+          </a:prstGeom>
+          <a:noFill/>
+          <a:ln/>
+        </p:spPr>
+        <p:txBody>
+          <a:bodyPr wrap="square" lIns="0" tIns="25400" rIns="25400" bIns="0" rtlCol="0" anchor="ctr"/>
+          <a:lstStyle/>
+          <a:p>
+            <a:pPr algn="ctr" indent="0" marL="0">
+              <a:lnSpc>
+                <a:spcPct val="120000"/>
+              </a:lnSpc>
+              <a:buNone/>
+            </a:pPr>
+            <a:r>
+              <a:rPr lang="en-US" sz="1800" dirty="0">
+                <a:solidFill>
+                  <a:srgbClr val="243041"/>
+                </a:solidFill>
+                <a:latin typeface="Pretendard" pitchFamily="34" charset="0"/>
+                <a:ea typeface="Pretendard" pitchFamily="34" charset="-122"/>
+                <a:cs typeface="Pretendard" pitchFamily="34" charset="-120"/>
+              </a:rPr>
+              <a:t>02  Composition Contract</a:t>
+            </a:r>
+            <a:endParaRPr lang="en-US" sz="1800" dirty="0"/>
+          </a:p>
+        </p:txBody>
+      </p:sp>
+      <p:sp>
+        <p:nvSpPr>
+          <p:cNvPr id="25" name="Text 23"/>
+          <p:cNvSpPr txBox="1"/>
+          <p:nvPr/>
+        </p:nvSpPr>
+        <p:spPr>
+          <a:xfrm>
+            <a:off x="1042416" y="2907792"/>
+            <a:ext cx="4645152" cy="384048"/>
+          </a:xfrm>
+          <a:prstGeom prst="rect">
+            <a:avLst/>
+          </a:prstGeom>
+          <a:noFill/>
+          <a:ln/>
+        </p:spPr>
+        <p:txBody>
+          <a:bodyPr wrap="square" lIns="0" tIns="25400" rIns="25400" bIns="0" rtlCol="0" anchor="ctr"/>
+          <a:lstStyle/>
+          <a:p>
+            <a:pPr algn="ctr" indent="0" marL="0">
+              <a:lnSpc>
+                <a:spcPct val="120000"/>
+              </a:lnSpc>
+              <a:buNone/>
+            </a:pPr>
+            <a:r>
+              <a:rPr lang="en-US" sz="1800" dirty="0">
+                <a:solidFill>
+                  <a:srgbClr val="243041"/>
+                </a:solidFill>
+                <a:latin typeface="Pretendard" pitchFamily="34" charset="0"/>
+                <a:ea typeface="Pretendard" pitchFamily="34" charset="-122"/>
+                <a:cs typeface="Pretendard" pitchFamily="34" charset="-120"/>
+              </a:rPr>
+              <a:t>03  Pruned Style Families</a:t>
+            </a:r>
+            <a:endParaRPr lang="en-US" sz="1800" dirty="0"/>
+          </a:p>
+        </p:txBody>
+      </p:sp>
+      <p:sp>
+        <p:nvSpPr>
+          <p:cNvPr id="26" name="Text 24"/>
+          <p:cNvSpPr txBox="1"/>
+          <p:nvPr/>
+        </p:nvSpPr>
+        <p:spPr>
+          <a:xfrm>
+            <a:off x="1042416" y="3621024"/>
+            <a:ext cx="4645152" cy="384048"/>
+          </a:xfrm>
+          <a:prstGeom prst="rect">
+            <a:avLst/>
+          </a:prstGeom>
+          <a:noFill/>
+          <a:ln/>
+        </p:spPr>
+        <p:txBody>
+          <a:bodyPr wrap="square" lIns="0" tIns="25400" rIns="25400" bIns="0" rtlCol="0" anchor="ctr"/>
+          <a:lstStyle/>
+          <a:p>
+            <a:pPr algn="ctr" indent="0" marL="0">
+              <a:lnSpc>
+                <a:spcPct val="120000"/>
+              </a:lnSpc>
+              <a:buNone/>
+            </a:pPr>
+            <a:r>
+              <a:rPr lang="en-US" sz="1800" dirty="0">
+                <a:solidFill>
+                  <a:srgbClr val="243041"/>
+                </a:solidFill>
+                <a:latin typeface="Pretendard" pitchFamily="34" charset="0"/>
+                <a:ea typeface="Pretendard" pitchFamily="34" charset="-122"/>
+                <a:cs typeface="Pretendard" pitchFamily="34" charset="-120"/>
+              </a:rPr>
+              <a:t>04  Semantic Blocks</a:t>
+            </a:r>
+            <a:endParaRPr lang="en-US" sz="1800" dirty="0"/>
+          </a:p>
+        </p:txBody>
+      </p:sp>
+      <p:sp>
+        <p:nvSpPr>
+          <p:cNvPr id="27" name="Text 25"/>
+          <p:cNvSpPr txBox="1"/>
+          <p:nvPr/>
+        </p:nvSpPr>
+        <p:spPr>
+          <a:xfrm>
+            <a:off x="1042416" y="4334256"/>
+            <a:ext cx="4645152" cy="384048"/>
+          </a:xfrm>
+          <a:prstGeom prst="rect">
+            <a:avLst/>
+          </a:prstGeom>
+          <a:noFill/>
+          <a:ln/>
+        </p:spPr>
+        <p:txBody>
+          <a:bodyPr wrap="square" lIns="0" tIns="25400" rIns="25400" bIns="0" rtlCol="0" anchor="ctr"/>
+          <a:lstStyle/>
+          <a:p>
+            <a:pPr algn="ctr" indent="0" marL="0">
+              <a:lnSpc>
+                <a:spcPct val="120000"/>
+              </a:lnSpc>
+              <a:buNone/>
+            </a:pPr>
+            <a:r>
+              <a:rPr lang="en-US" sz="1800" dirty="0">
+                <a:solidFill>
+                  <a:srgbClr val="243041"/>
+                </a:solidFill>
+                <a:latin typeface="Pretendard" pitchFamily="34" charset="0"/>
+                <a:ea typeface="Pretendard" pitchFamily="34" charset="-122"/>
+                <a:cs typeface="Pretendard" pitchFamily="34" charset="-120"/>
+              </a:rPr>
+              <a:t>05  Pipeline Diagram</a:t>
+            </a:r>
+            <a:endParaRPr lang="en-US" sz="1800" dirty="0"/>
+          </a:p>
+        </p:txBody>
+      </p:sp>
+      <p:sp>
+        <p:nvSpPr>
+          <p:cNvPr id="28" name="Text 26"/>
+          <p:cNvSpPr txBox="1"/>
+          <p:nvPr/>
+        </p:nvSpPr>
+        <p:spPr>
+          <a:xfrm>
+            <a:off x="1042416" y="5047488"/>
+            <a:ext cx="4645152" cy="384048"/>
+          </a:xfrm>
+          <a:prstGeom prst="rect">
+            <a:avLst/>
+          </a:prstGeom>
+          <a:noFill/>
+          <a:ln/>
+        </p:spPr>
+        <p:txBody>
+          <a:bodyPr wrap="square" lIns="0" tIns="25400" rIns="25400" bIns="0" rtlCol="0" anchor="ctr"/>
+          <a:lstStyle/>
+          <a:p>
+            <a:pPr algn="ctr" indent="0" marL="0">
+              <a:lnSpc>
+                <a:spcPct val="120000"/>
+              </a:lnSpc>
+              <a:buNone/>
+            </a:pPr>
+            <a:r>
+              <a:rPr lang="en-US" sz="1800" dirty="0">
+                <a:solidFill>
+                  <a:srgbClr val="243041"/>
+                </a:solidFill>
+                <a:latin typeface="Pretendard" pitchFamily="34" charset="0"/>
+                <a:ea typeface="Pretendard" pitchFamily="34" charset="-122"/>
+                <a:cs typeface="Pretendard" pitchFamily="34" charset="-120"/>
+              </a:rPr>
+              <a:t>06  Decoration Pattern Catalog</a:t>
+            </a:r>
+            <a:endParaRPr lang="en-US" sz="1800" dirty="0"/>
+          </a:p>
+        </p:txBody>
+      </p:sp>
+      <p:sp>
+        <p:nvSpPr>
+          <p:cNvPr id="29" name="Text 27"/>
+          <p:cNvSpPr txBox="1"/>
+          <p:nvPr/>
+        </p:nvSpPr>
+        <p:spPr>
+          <a:xfrm>
+            <a:off x="1042416" y="5760720"/>
+            <a:ext cx="4645152" cy="384048"/>
+          </a:xfrm>
+          <a:prstGeom prst="rect">
+            <a:avLst/>
+          </a:prstGeom>
+          <a:noFill/>
+          <a:ln/>
+        </p:spPr>
+        <p:txBody>
+          <a:bodyPr wrap="square" lIns="0" tIns="25400" rIns="25400" bIns="0" rtlCol="0" anchor="ctr"/>
+          <a:lstStyle/>
+          <a:p>
+            <a:pPr algn="ctr" indent="0" marL="0">
+              <a:lnSpc>
+                <a:spcPct val="120000"/>
+              </a:lnSpc>
+              <a:buNone/>
+            </a:pPr>
+            <a:r>
+              <a:rPr lang="en-US" sz="1800" dirty="0">
+                <a:solidFill>
+                  <a:srgbClr val="243041"/>
+                </a:solidFill>
+                <a:latin typeface="Pretendard" pitchFamily="34" charset="0"/>
+                <a:ea typeface="Pretendard" pitchFamily="34" charset="-122"/>
+                <a:cs typeface="Pretendard" pitchFamily="34" charset="-120"/>
+              </a:rPr>
+              <a:t>07  Table Coherence</a:t>
+            </a:r>
+            <a:endParaRPr lang="en-US" sz="1800" dirty="0"/>
+          </a:p>
+        </p:txBody>
+      </p:sp>
+      <p:sp>
+        <p:nvSpPr>
+          <p:cNvPr id="30" name="Text 28"/>
+          <p:cNvSpPr txBox="1"/>
+          <p:nvPr/>
+        </p:nvSpPr>
+        <p:spPr>
+          <a:xfrm>
+            <a:off x="6492240" y="1481328"/>
+            <a:ext cx="4645152" cy="384048"/>
+          </a:xfrm>
+          <a:prstGeom prst="rect">
+            <a:avLst/>
+          </a:prstGeom>
+          <a:noFill/>
+          <a:ln/>
+        </p:spPr>
+        <p:txBody>
+          <a:bodyPr wrap="square" lIns="0" tIns="25400" rIns="25400" bIns="0" rtlCol="0" anchor="ctr"/>
+          <a:lstStyle/>
+          <a:p>
+            <a:pPr algn="ctr" indent="0" marL="0">
+              <a:lnSpc>
+                <a:spcPct val="120000"/>
+              </a:lnSpc>
+              <a:buNone/>
+            </a:pPr>
+            <a:r>
+              <a:rPr lang="en-US" sz="1800" dirty="0">
+                <a:solidFill>
+                  <a:srgbClr val="243041"/>
+                </a:solidFill>
+                <a:latin typeface="Pretendard" pitchFamily="34" charset="0"/>
+                <a:ea typeface="Pretendard" pitchFamily="34" charset="-122"/>
+                <a:cs typeface="Pretendard" pitchFamily="34" charset="-120"/>
+              </a:rPr>
+              <a:t>08  Chart and Table Pair</a:t>
+            </a:r>
+            <a:endParaRPr lang="en-US" sz="1800" dirty="0"/>
+          </a:p>
+        </p:txBody>
+      </p:sp>
+      <p:sp>
+        <p:nvSpPr>
+          <p:cNvPr id="31" name="Text 29"/>
+          <p:cNvSpPr txBox="1"/>
+          <p:nvPr/>
+        </p:nvSpPr>
+        <p:spPr>
+          <a:xfrm>
+            <a:off x="6492240" y="2194560"/>
+            <a:ext cx="4645152" cy="384048"/>
+          </a:xfrm>
+          <a:prstGeom prst="rect">
+            <a:avLst/>
+          </a:prstGeom>
+          <a:noFill/>
+          <a:ln/>
+        </p:spPr>
+        <p:txBody>
+          <a:bodyPr wrap="square" lIns="0" tIns="25400" rIns="25400" bIns="0" rtlCol="0" anchor="ctr"/>
+          <a:lstStyle/>
+          <a:p>
+            <a:pPr algn="ctr" indent="0" marL="0">
+              <a:lnSpc>
+                <a:spcPct val="120000"/>
+              </a:lnSpc>
+              <a:buNone/>
+            </a:pPr>
+            <a:r>
+              <a:rPr lang="en-US" sz="1800" dirty="0">
+                <a:solidFill>
+                  <a:srgbClr val="243041"/>
+                </a:solidFill>
+                <a:latin typeface="Pretendard" pitchFamily="34" charset="0"/>
+                <a:ea typeface="Pretendard" pitchFamily="34" charset="-122"/>
+                <a:cs typeface="Pretendard" pitchFamily="34" charset="-120"/>
+              </a:rPr>
+              <a:t>09  Editable Proof Objects</a:t>
+            </a:r>
+            <a:endParaRPr lang="en-US" sz="1800" dirty="0"/>
+          </a:p>
+        </p:txBody>
+      </p:sp>
+      <p:sp>
+        <p:nvSpPr>
+          <p:cNvPr id="32" name="Text 30"/>
+          <p:cNvSpPr txBox="1"/>
+          <p:nvPr/>
+        </p:nvSpPr>
+        <p:spPr>
+          <a:xfrm>
+            <a:off x="6492240" y="2907792"/>
+            <a:ext cx="4645152" cy="384048"/>
+          </a:xfrm>
+          <a:prstGeom prst="rect">
+            <a:avLst/>
+          </a:prstGeom>
+          <a:noFill/>
+          <a:ln/>
+        </p:spPr>
+        <p:txBody>
+          <a:bodyPr wrap="square" lIns="0" tIns="25400" rIns="25400" bIns="0" rtlCol="0" anchor="ctr"/>
+          <a:lstStyle/>
+          <a:p>
+            <a:pPr algn="ctr" indent="0" marL="0">
+              <a:lnSpc>
+                <a:spcPct val="120000"/>
+              </a:lnSpc>
+              <a:buNone/>
+            </a:pPr>
+            <a:r>
+              <a:rPr lang="en-US" sz="1800" dirty="0">
+                <a:solidFill>
+                  <a:srgbClr val="243041"/>
+                </a:solidFill>
+                <a:latin typeface="Pretendard" pitchFamily="34" charset="0"/>
+                <a:ea typeface="Pretendard" pitchFamily="34" charset="-122"/>
+                <a:cs typeface="Pretendard" pitchFamily="34" charset="-120"/>
+              </a:rPr>
+              <a:t>10  Object Shape Grammar</a:t>
+            </a:r>
+            <a:endParaRPr lang="en-US" sz="1800" dirty="0"/>
+          </a:p>
+        </p:txBody>
+      </p:sp>
+      <p:sp>
+        <p:nvSpPr>
+          <p:cNvPr id="33" name="Text 31"/>
+          <p:cNvSpPr txBox="1"/>
+          <p:nvPr/>
+        </p:nvSpPr>
+        <p:spPr>
+          <a:xfrm>
+            <a:off x="6492240" y="3621024"/>
+            <a:ext cx="4645152" cy="384048"/>
+          </a:xfrm>
+          <a:prstGeom prst="rect">
+            <a:avLst/>
+          </a:prstGeom>
+          <a:noFill/>
+          <a:ln/>
+        </p:spPr>
+        <p:txBody>
+          <a:bodyPr wrap="square" lIns="0" tIns="25400" rIns="25400" bIns="0" rtlCol="0" anchor="ctr"/>
+          <a:lstStyle/>
+          <a:p>
+            <a:pPr algn="ctr" indent="0" marL="0">
+              <a:lnSpc>
+                <a:spcPct val="120000"/>
+              </a:lnSpc>
+              <a:buNone/>
+            </a:pPr>
+            <a:r>
+              <a:rPr lang="en-US" sz="1800" dirty="0">
+                <a:solidFill>
+                  <a:srgbClr val="243041"/>
+                </a:solidFill>
+                <a:latin typeface="Pretendard" pitchFamily="34" charset="0"/>
+                <a:ea typeface="Pretendard" pitchFamily="34" charset="-122"/>
+                <a:cs typeface="Pretendard" pitchFamily="34" charset="-120"/>
+              </a:rPr>
+              <a:t>11  Icon and Text Aside</a:t>
+            </a:r>
+            <a:endParaRPr lang="en-US" sz="1800" dirty="0"/>
+          </a:p>
+        </p:txBody>
+      </p:sp>
+      <p:sp>
+        <p:nvSpPr>
+          <p:cNvPr id="34" name="Text 32"/>
+          <p:cNvSpPr txBox="1"/>
+          <p:nvPr/>
+        </p:nvSpPr>
+        <p:spPr>
+          <a:xfrm>
+            <a:off x="6492240" y="4334256"/>
+            <a:ext cx="4645152" cy="384048"/>
+          </a:xfrm>
+          <a:prstGeom prst="rect">
+            <a:avLst/>
+          </a:prstGeom>
+          <a:noFill/>
+          <a:ln/>
+        </p:spPr>
+        <p:txBody>
+          <a:bodyPr wrap="square" lIns="0" tIns="25400" rIns="25400" bIns="0" rtlCol="0" anchor="ctr"/>
+          <a:lstStyle/>
+          <a:p>
+            <a:pPr algn="ctr" indent="0" marL="0">
+              <a:lnSpc>
+                <a:spcPct val="120000"/>
+              </a:lnSpc>
+              <a:buNone/>
+            </a:pPr>
+            <a:r>
+              <a:rPr lang="en-US" sz="1800" dirty="0">
+                <a:solidFill>
+                  <a:srgbClr val="243041"/>
+                </a:solidFill>
+                <a:latin typeface="Pretendard" pitchFamily="34" charset="0"/>
+                <a:ea typeface="Pretendard" pitchFamily="34" charset="-122"/>
+                <a:cs typeface="Pretendard" pitchFamily="34" charset="-120"/>
+              </a:rPr>
+              <a:t>12  Overflow Guard</a:t>
+            </a:r>
+            <a:endParaRPr lang="en-US" sz="1800" dirty="0"/>
+          </a:p>
+        </p:txBody>
+      </p:sp>
+      <p:sp>
+        <p:nvSpPr>
+          <p:cNvPr id="35" name="Text 33"/>
+          <p:cNvSpPr txBox="1"/>
+          <p:nvPr/>
+        </p:nvSpPr>
+        <p:spPr>
+          <a:xfrm>
+            <a:off x="6492240" y="5047488"/>
+            <a:ext cx="4645152" cy="384048"/>
+          </a:xfrm>
+          <a:prstGeom prst="rect">
+            <a:avLst/>
+          </a:prstGeom>
+          <a:noFill/>
+          <a:ln/>
+        </p:spPr>
+        <p:txBody>
+          <a:bodyPr wrap="square" lIns="0" tIns="25400" rIns="25400" bIns="0" rtlCol="0" anchor="ctr"/>
+          <a:lstStyle/>
+          <a:p>
+            <a:pPr algn="ctr" indent="0" marL="0">
+              <a:lnSpc>
+                <a:spcPct val="120000"/>
+              </a:lnSpc>
+              <a:buNone/>
+            </a:pPr>
+            <a:r>
+              <a:rPr lang="en-US" sz="1800" dirty="0">
+                <a:solidFill>
+                  <a:srgbClr val="243041"/>
+                </a:solidFill>
+                <a:latin typeface="Pretendard" pitchFamily="34" charset="0"/>
+                <a:ea typeface="Pretendard" pitchFamily="34" charset="-122"/>
+                <a:cs typeface="Pretendard" pitchFamily="34" charset="-120"/>
+              </a:rPr>
+              <a:t>13  Image Safe Frame</a:t>
+            </a:r>
+            <a:endParaRPr lang="en-US" sz="1800" dirty="0"/>
+          </a:p>
+        </p:txBody>
+      </p:sp>
+      <p:sp>
+        <p:nvSpPr>
+          <p:cNvPr id="36" name="Text 34"/>
+          <p:cNvSpPr txBox="1"/>
+          <p:nvPr/>
+        </p:nvSpPr>
+        <p:spPr>
+          <a:xfrm>
+            <a:off x="6492240" y="5760720"/>
+            <a:ext cx="4645152" cy="384048"/>
+          </a:xfrm>
+          <a:prstGeom prst="rect">
+            <a:avLst/>
+          </a:prstGeom>
+          <a:noFill/>
+          <a:ln/>
+        </p:spPr>
+        <p:txBody>
+          <a:bodyPr wrap="square" lIns="0" tIns="25400" rIns="25400" bIns="0" rtlCol="0" anchor="ctr"/>
+          <a:lstStyle/>
+          <a:p>
+            <a:pPr algn="ctr" indent="0" marL="0">
+              <a:lnSpc>
+                <a:spcPct val="120000"/>
+              </a:lnSpc>
+              <a:buNone/>
+            </a:pPr>
+            <a:r>
+              <a:rPr lang="en-US" sz="1800" dirty="0">
+                <a:solidFill>
+                  <a:srgbClr val="243041"/>
+                </a:solidFill>
+                <a:latin typeface="Pretendard" pitchFamily="34" charset="0"/>
+                <a:ea typeface="Pretendard" pitchFamily="34" charset="-122"/>
+                <a:cs typeface="Pretendard" pitchFamily="34" charset="-120"/>
+              </a:rPr>
+              <a:t>14  Mixed Object Packing</a:t>
+            </a:r>
+            <a:endParaRPr lang="en-US" sz="1800" dirty="0"/>
+          </a:p>
+        </p:txBody>
+      </p:sp>
+    </p:spTree>
+  </p:cSld>
+  <p:clrMapOvr>
+    <a:masterClrMapping/>
+  </p:clrMapOvr>
+</p:sld>
+</file>
+
+<file path=ppt/slides/slide20.xml><?xml version="1.0" encoding="utf-8"?>
+<p:sld xmlns:a="http://schemas.openxmlformats.org/drawingml/2006/main" xmlns:r="http://schemas.openxmlformats.org/officeDocument/2006/relationships" xmlns:p="http://schemas.openxmlformats.org/presentationml/2006/main">
+  <p:cSld name="Slide 20">
     <p:bg>
       <p:bgPr>
         <a:solidFill>
@@ -9494,8 +13466,8 @@
         </p:nvSpPr>
         <p:spPr>
           <a:xfrm>
-            <a:off x="1689354" y="1627632"/>
-            <a:ext cx="3961638" cy="1591056"/>
+            <a:off x="1689354" y="2033016"/>
+            <a:ext cx="3961638" cy="780288"/>
           </a:xfrm>
           <a:prstGeom prst="rect">
             <a:avLst/>
@@ -9610,8 +13582,8 @@
         </p:nvSpPr>
         <p:spPr>
           <a:xfrm>
-            <a:off x="7175754" y="1627632"/>
-            <a:ext cx="3961638" cy="1591056"/>
+            <a:off x="7175754" y="1865376"/>
+            <a:ext cx="3961638" cy="1115568"/>
           </a:xfrm>
           <a:prstGeom prst="rect">
             <a:avLst/>
@@ -9726,8 +13698,8 @@
         </p:nvSpPr>
         <p:spPr>
           <a:xfrm>
-            <a:off x="1689354" y="3913632"/>
-            <a:ext cx="3961638" cy="1591056"/>
+            <a:off x="1689354" y="4151376"/>
+            <a:ext cx="3961638" cy="1115568"/>
           </a:xfrm>
           <a:prstGeom prst="rect">
             <a:avLst/>
@@ -9842,8 +13814,8 @@
         </p:nvSpPr>
         <p:spPr>
           <a:xfrm>
-            <a:off x="7175754" y="3913632"/>
-            <a:ext cx="3961638" cy="1591056"/>
+            <a:off x="7175754" y="4151376"/>
+            <a:ext cx="3961638" cy="1115568"/>
           </a:xfrm>
           <a:prstGeom prst="rect">
             <a:avLst/>
@@ -9901,9 +13873,9 @@
 </p:sld>
 </file>
 
-<file path=ppt/slides/slide18.xml><?xml version="1.0" encoding="utf-8"?>
+<file path=ppt/slides/slide21.xml><?xml version="1.0" encoding="utf-8"?>
 <p:sld xmlns:a="http://schemas.openxmlformats.org/drawingml/2006/main" xmlns:r="http://schemas.openxmlformats.org/officeDocument/2006/relationships" xmlns:p="http://schemas.openxmlformats.org/presentationml/2006/main">
-  <p:cSld name="Slide 18">
+  <p:cSld name="Slide 21">
     <p:bg>
       <p:bgPr>
         <a:solidFill>
@@ -10785,8 +14757,8 @@
         </p:nvSpPr>
         <p:spPr>
           <a:xfrm>
-            <a:off x="1689354" y="1627632"/>
-            <a:ext cx="3961638" cy="1591056"/>
+            <a:off x="1689354" y="1865376"/>
+            <a:ext cx="3961638" cy="1115568"/>
           </a:xfrm>
           <a:prstGeom prst="rect">
             <a:avLst/>
@@ -10901,8 +14873,8 @@
         </p:nvSpPr>
         <p:spPr>
           <a:xfrm>
-            <a:off x="7175754" y="1627632"/>
-            <a:ext cx="3961638" cy="1591056"/>
+            <a:off x="7175754" y="1697736"/>
+            <a:ext cx="3961638" cy="1450848"/>
           </a:xfrm>
           <a:prstGeom prst="rect">
             <a:avLst/>
@@ -11017,8 +14989,8 @@
         </p:nvSpPr>
         <p:spPr>
           <a:xfrm>
-            <a:off x="1689354" y="3913632"/>
-            <a:ext cx="3961638" cy="1591056"/>
+            <a:off x="1689354" y="4151376"/>
+            <a:ext cx="3961638" cy="1115568"/>
           </a:xfrm>
           <a:prstGeom prst="rect">
             <a:avLst/>
@@ -11133,8 +15105,8 @@
         </p:nvSpPr>
         <p:spPr>
           <a:xfrm>
-            <a:off x="7175754" y="3913632"/>
-            <a:ext cx="3961638" cy="1591056"/>
+            <a:off x="7175754" y="4151376"/>
+            <a:ext cx="3961638" cy="1115568"/>
           </a:xfrm>
           <a:prstGeom prst="rect">
             <a:avLst/>
@@ -11192,9 +15164,1709 @@
 </p:sld>
 </file>
 
-<file path=ppt/slides/slide19.xml><?xml version="1.0" encoding="utf-8"?>
+<file path=ppt/slides/slide22.xml><?xml version="1.0" encoding="utf-8"?>
 <p:sld xmlns:a="http://schemas.openxmlformats.org/drawingml/2006/main" xmlns:r="http://schemas.openxmlformats.org/officeDocument/2006/relationships" xmlns:p="http://schemas.openxmlformats.org/presentationml/2006/main">
-  <p:cSld name="Slide 19">
+  <p:cSld name="Slide 22">
+    <p:bg>
+      <p:bgPr>
+        <a:solidFill>
+          <a:srgbClr val="E9EEF5"/>
+        </a:solidFill>
+      </p:bgPr>
+    </p:bg>
+    <p:spTree>
+      <p:nvGrpSpPr>
+        <p:cNvPr id="1" name=""/>
+        <p:cNvGrpSpPr/>
+        <p:nvPr/>
+      </p:nvGrpSpPr>
+      <p:grpSpPr>
+        <a:xfrm>
+          <a:off x="0" y="0"/>
+          <a:ext cx="0" cy="0"/>
+          <a:chOff x="0" y="0"/>
+          <a:chExt cx="0" cy="0"/>
+        </a:xfrm>
+      </p:grpSpPr>
+      <p:sp>
+        <p:nvSpPr>
+          <p:cNvPr id="2" name="Shape 0"/>
+          <p:cNvSpPr/>
+          <p:nvPr/>
+        </p:nvSpPr>
+        <p:spPr>
+          <a:xfrm>
+            <a:off x="10362895" y="502920"/>
+            <a:ext cx="822960" cy="822960"/>
+          </a:xfrm>
+          <a:prstGeom prst="ellipse">
+            <a:avLst/>
+          </a:prstGeom>
+          <a:solidFill>
+            <a:srgbClr val="F7FAFC">
+              <a:alpha val="92000"/>
+            </a:srgbClr>
+          </a:solidFill>
+          <a:ln w="12700">
+            <a:solidFill>
+              <a:srgbClr val="FFFFFF">
+                <a:alpha val="0"/>
+              </a:srgbClr>
+            </a:solidFill>
+            <a:prstDash val="solid"/>
+          </a:ln>
+          <a:effectLst>
+            <a:outerShdw sx="100000" sy="100000" kx="0" ky="0" algn="bl" rotWithShape="0" blurRad="15240" dist="50800" dir="2700000">
+              <a:srgbClr val="C7D0DE">
+                <a:alpha val="22000"/>
+              </a:srgbClr>
+            </a:outerShdw>
+          </a:effectLst>
+        </p:spPr>
+      </p:sp>
+      <p:sp>
+        <p:nvSpPr>
+          <p:cNvPr id="3" name="Shape 1"/>
+          <p:cNvSpPr/>
+          <p:nvPr/>
+        </p:nvSpPr>
+        <p:spPr>
+          <a:xfrm>
+            <a:off x="530352" y="5687568"/>
+            <a:ext cx="658368" cy="658368"/>
+          </a:xfrm>
+          <a:prstGeom prst="ellipse">
+            <a:avLst/>
+          </a:prstGeom>
+          <a:solidFill>
+            <a:srgbClr val="E9EEF5"/>
+          </a:solidFill>
+          <a:ln w="12700">
+            <a:solidFill>
+              <a:srgbClr val="FFFFFF">
+                <a:alpha val="42000"/>
+              </a:srgbClr>
+            </a:solidFill>
+            <a:prstDash val="solid"/>
+          </a:ln>
+          <a:effectLst>
+            <a:outerShdw sx="100000" sy="100000" kx="0" ky="0" algn="bl" rotWithShape="0" blurRad="12700" dist="50800" dir="2700000">
+              <a:srgbClr val="B8C3D2">
+                <a:alpha val="18000"/>
+              </a:srgbClr>
+            </a:outerShdw>
+          </a:effectLst>
+        </p:spPr>
+      </p:sp>
+      <p:sp>
+        <p:nvSpPr>
+          <p:cNvPr id="4" name="Shape 2"/>
+          <p:cNvSpPr/>
+          <p:nvPr/>
+        </p:nvSpPr>
+        <p:spPr>
+          <a:xfrm>
+            <a:off x="731520" y="1207008"/>
+            <a:ext cx="1325880" cy="54864"/>
+          </a:xfrm>
+          <a:prstGeom prst="rect">
+            <a:avLst/>
+          </a:prstGeom>
+          <a:solidFill>
+            <a:srgbClr val="4F6F8F"/>
+          </a:solidFill>
+          <a:ln w="12700">
+            <a:solidFill>
+              <a:srgbClr val="4F6F8F">
+                <a:alpha val="0"/>
+              </a:srgbClr>
+            </a:solidFill>
+            <a:prstDash val="solid"/>
+          </a:ln>
+        </p:spPr>
+      </p:sp>
+      <p:sp>
+        <p:nvSpPr>
+          <p:cNvPr id="5" name="Shape 3"/>
+          <p:cNvSpPr/>
+          <p:nvPr/>
+        </p:nvSpPr>
+        <p:spPr>
+          <a:xfrm>
+            <a:off x="822960" y="1463040"/>
+            <a:ext cx="5623560" cy="73152"/>
+          </a:xfrm>
+          <a:prstGeom prst="rect">
+            <a:avLst/>
+          </a:prstGeom>
+          <a:solidFill>
+            <a:srgbClr val="4F6F8F"/>
+          </a:solidFill>
+          <a:ln w="12700">
+            <a:solidFill>
+              <a:srgbClr val="4F6F8F">
+                <a:alpha val="0"/>
+              </a:srgbClr>
+            </a:solidFill>
+            <a:prstDash val="solid"/>
+          </a:ln>
+        </p:spPr>
+      </p:sp>
+      <p:sp>
+        <p:nvSpPr>
+          <p:cNvPr id="6" name="Shape 4"/>
+          <p:cNvSpPr/>
+          <p:nvPr/>
+        </p:nvSpPr>
+        <p:spPr>
+          <a:xfrm>
+            <a:off x="6853428" y="1513332"/>
+            <a:ext cx="4434840" cy="4526280"/>
+          </a:xfrm>
+          <a:prstGeom prst="roundRect">
+            <a:avLst>
+              <a:gd name="adj" fmla="val 1237"/>
+            </a:avLst>
+          </a:prstGeom>
+          <a:solidFill>
+            <a:srgbClr val="B8C3D2">
+              <a:alpha val="26000"/>
+            </a:srgbClr>
+          </a:solidFill>
+          <a:ln w="12700">
+            <a:solidFill>
+              <a:srgbClr val="D5DCE7">
+                <a:alpha val="0"/>
+              </a:srgbClr>
+            </a:solidFill>
+            <a:prstDash val="solid"/>
+          </a:ln>
+          <a:effectLst>
+            <a:outerShdw sx="100000" sy="100000" kx="0" ky="0" algn="bl" rotWithShape="0" blurRad="13970" dist="50800" dir="2700000">
+              <a:srgbClr val="AAB5C4">
+                <a:alpha val="20000"/>
+              </a:srgbClr>
+            </a:outerShdw>
+          </a:effectLst>
+        </p:spPr>
+      </p:sp>
+      <p:sp>
+        <p:nvSpPr>
+          <p:cNvPr id="7" name="Shape 5"/>
+          <p:cNvSpPr/>
+          <p:nvPr/>
+        </p:nvSpPr>
+        <p:spPr>
+          <a:xfrm>
+            <a:off x="6780276" y="1431036"/>
+            <a:ext cx="4434840" cy="4526280"/>
+          </a:xfrm>
+          <a:prstGeom prst="roundRect">
+            <a:avLst>
+              <a:gd name="adj" fmla="val 1237"/>
+            </a:avLst>
+          </a:prstGeom>
+          <a:solidFill>
+            <a:srgbClr val="FFFFFF">
+              <a:alpha val="42000"/>
+            </a:srgbClr>
+          </a:solidFill>
+          <a:ln w="12700">
+            <a:solidFill>
+              <a:srgbClr val="FFFFFF">
+                <a:alpha val="0"/>
+              </a:srgbClr>
+            </a:solidFill>
+            <a:prstDash val="solid"/>
+          </a:ln>
+          <a:effectLst>
+            <a:outerShdw sx="100000" sy="100000" kx="0" ky="0" algn="bl" rotWithShape="0" blurRad="10160" dist="50800" dir="13500000">
+              <a:srgbClr val="FFFFFF">
+                <a:alpha val="36000"/>
+              </a:srgbClr>
+            </a:outerShdw>
+          </a:effectLst>
+        </p:spPr>
+      </p:sp>
+      <p:sp>
+        <p:nvSpPr>
+          <p:cNvPr id="8" name="Shape 6"/>
+          <p:cNvSpPr/>
+          <p:nvPr/>
+        </p:nvSpPr>
+        <p:spPr>
+          <a:xfrm>
+            <a:off x="6812280" y="1463040"/>
+            <a:ext cx="4434840" cy="4526280"/>
+          </a:xfrm>
+          <a:prstGeom prst="roundRect">
+            <a:avLst>
+              <a:gd name="adj" fmla="val 1237"/>
+            </a:avLst>
+          </a:prstGeom>
+          <a:solidFill>
+            <a:srgbClr val="E9EEF5">
+              <a:alpha val="6000"/>
+            </a:srgbClr>
+          </a:solidFill>
+          <a:ln w="12700">
+            <a:solidFill>
+              <a:srgbClr val="FFFFFF">
+                <a:alpha val="28000"/>
+              </a:srgbClr>
+            </a:solidFill>
+            <a:prstDash val="solid"/>
+          </a:ln>
+        </p:spPr>
+      </p:sp>
+      <p:pic>
+        <p:nvPicPr>
+          <p:cNvPr id="9" name="Image 0" descr="preencoded.png">    </p:cNvPr>
+          <p:cNvPicPr>
+            <a:picLocks noChangeAspect="1"/>
+          </p:cNvPicPr>
+          <p:nvPr/>
+        </p:nvPicPr>
+        <p:blipFill>
+          <a:blip r:embed="rId1">
+            <a:extLst>
+              <a:ext uri="{96DAC541-7B7A-43D3-8B79-37D633B846F1}">
+                <asvg:svgBlip xmlns:asvg="http://schemas.microsoft.com/office/drawing/2016/SVG/main" r:embed="rId2"/>
+              </a:ext>
+            </a:extLst>
+          </a:blip>
+          <a:stretch>
+            <a:fillRect/>
+          </a:stretch>
+        </p:blipFill>
+        <p:spPr>
+          <a:xfrm>
+            <a:off x="6812280" y="1463040"/>
+            <a:ext cx="4434840" cy="4526280"/>
+          </a:xfrm>
+          <a:prstGeom prst="rect">
+            <a:avLst/>
+          </a:prstGeom>
+        </p:spPr>
+      </p:pic>
+      <p:sp>
+        <p:nvSpPr>
+          <p:cNvPr id="10" name="Text 7"/>
+          <p:cNvSpPr txBox="1"/>
+          <p:nvPr/>
+        </p:nvSpPr>
+        <p:spPr>
+          <a:xfrm>
+            <a:off x="731520" y="457200"/>
+            <a:ext cx="10698480" cy="731520"/>
+          </a:xfrm>
+          <a:prstGeom prst="rect">
+            <a:avLst/>
+          </a:prstGeom>
+          <a:noFill/>
+          <a:ln/>
+        </p:spPr>
+        <p:txBody>
+          <a:bodyPr wrap="square" lIns="0" tIns="0" rIns="0" bIns="0" rtlCol="0" anchor="ctr"/>
+          <a:lstStyle/>
+          <a:p>
+            <a:pPr algn="ctr" indent="0" marL="0">
+              <a:lnSpc>
+                <a:spcPct val="120000"/>
+              </a:lnSpc>
+              <a:buNone/>
+            </a:pPr>
+            <a:r>
+              <a:rPr lang="en-US" sz="3400" b="1" dirty="0">
+                <a:solidFill>
+                  <a:srgbClr val="243041"/>
+                </a:solidFill>
+                <a:latin typeface="Pretendard" pitchFamily="34" charset="0"/>
+                <a:ea typeface="Pretendard" pitchFamily="34" charset="-122"/>
+                <a:cs typeface="Pretendard" pitchFamily="34" charset="-120"/>
+              </a:rPr>
+              <a:t>Image Safe Frame</a:t>
+            </a:r>
+            <a:endParaRPr lang="en-US" sz="3400" dirty="0"/>
+          </a:p>
+        </p:txBody>
+      </p:sp>
+      <p:sp>
+        <p:nvSpPr>
+          <p:cNvPr id="11" name="Text 8"/>
+          <p:cNvSpPr txBox="1"/>
+          <p:nvPr/>
+        </p:nvSpPr>
+        <p:spPr>
+          <a:xfrm>
+            <a:off x="896112" y="1572768"/>
+            <a:ext cx="5477256" cy="4306824"/>
+          </a:xfrm>
+          <a:prstGeom prst="rect">
+            <a:avLst/>
+          </a:prstGeom>
+          <a:noFill/>
+          <a:ln/>
+        </p:spPr>
+        <p:txBody>
+          <a:bodyPr wrap="square" lIns="0" tIns="25400" rIns="25400" bIns="0" rtlCol="0" anchor="t"/>
+          <a:lstStyle/>
+          <a:p>
+            <a:pPr algn="l" indent="0" marL="0">
+              <a:lnSpc>
+                <a:spcPct val="120000"/>
+              </a:lnSpc>
+              <a:buNone/>
+            </a:pPr>
+            <a:r>
+              <a:rPr lang="en-US" sz="2200" b="1" dirty="0">
+                <a:solidFill>
+                  <a:srgbClr val="4F6F8F"/>
+                </a:solidFill>
+                <a:latin typeface="Pretendard" pitchFamily="34" charset="0"/>
+                <a:ea typeface="Pretendard" pitchFamily="34" charset="-122"/>
+                <a:cs typeface="Pretendard" pitchFamily="34" charset="-120"/>
+              </a:rPr>
+              <a:t>- Image role</a:t>
+            </a:r>
+            <a:pPr algn="l" indent="0" marL="0">
+              <a:lnSpc>
+                <a:spcPct val="120000"/>
+              </a:lnSpc>
+              <a:buNone/>
+            </a:pPr>
+            <a:r>
+              <a:rPr lang="en-US" sz="2200" dirty="0">
+                <a:solidFill>
+                  <a:srgbClr val="243041"/>
+                </a:solidFill>
+                <a:latin typeface="Pretendard" pitchFamily="34" charset="0"/>
+                <a:ea typeface="Pretendard" pitchFamily="34" charset="-122"/>
+                <a:cs typeface="Pretendard" pitchFamily="34" charset="-120"/>
+              </a:rPr>
+              <a:t>  picture content uses an internal safe frame.</a:t>
+            </a:r>
+            <a:endParaRPr lang="en-US" sz="2200" dirty="0"/>
+          </a:p>
+          <a:p>
+            <a:pPr algn="l" indent="0" marL="0">
+              <a:lnSpc>
+                <a:spcPct val="120000"/>
+              </a:lnSpc>
+              <a:buNone/>
+            </a:pPr>
+            <a:r>
+              <a:rPr lang="en-US" sz="2200" b="1" dirty="0">
+                <a:solidFill>
+                  <a:srgbClr val="4F6F8F"/>
+                </a:solidFill>
+                <a:latin typeface="Pretendard" pitchFamily="34" charset="0"/>
+                <a:ea typeface="Pretendard" pitchFamily="34" charset="-122"/>
+                <a:cs typeface="Pretendard" pitchFamily="34" charset="-120"/>
+              </a:rPr>
+              <a:t>- Surface rule</a:t>
+            </a:r>
+            <a:endParaRPr lang="en-US" sz="2200" dirty="0"/>
+          </a:p>
+          <a:p>
+            <a:pPr algn="l" indent="0" marL="0">
+              <a:lnSpc>
+                <a:spcPct val="120000"/>
+              </a:lnSpc>
+              <a:buNone/>
+            </a:pPr>
+            <a:r>
+              <a:rPr lang="en-US" sz="2200" dirty="0">
+                <a:solidFill>
+                  <a:srgbClr val="243041"/>
+                </a:solidFill>
+                <a:latin typeface="Pretendard" pitchFamily="34" charset="0"/>
+                <a:ea typeface="Pretendard" pitchFamily="34" charset="-122"/>
+                <a:cs typeface="Pretendard" pitchFamily="34" charset="-120"/>
+              </a:rPr>
+              <a:t>  background decoration stays outside the picture bounds.</a:t>
+            </a:r>
+            <a:endParaRPr lang="en-US" sz="2200" dirty="0"/>
+          </a:p>
+          <a:p>
+            <a:pPr algn="l" indent="0" marL="0">
+              <a:lnSpc>
+                <a:spcPct val="120000"/>
+              </a:lnSpc>
+              <a:buNone/>
+            </a:pPr>
+            <a:r>
+              <a:rPr lang="en-US" sz="2200" b="1" dirty="0">
+                <a:solidFill>
+                  <a:srgbClr val="4F6F8F"/>
+                </a:solidFill>
+                <a:latin typeface="Pretendard" pitchFamily="34" charset="0"/>
+                <a:ea typeface="Pretendard" pitchFamily="34" charset="-122"/>
+                <a:cs typeface="Pretendard" pitchFamily="34" charset="-120"/>
+              </a:rPr>
+              <a:t>- Bounds rule</a:t>
+            </a:r>
+            <a:endParaRPr lang="en-US" sz="2200" dirty="0"/>
+          </a:p>
+          <a:p>
+            <a:pPr algn="l" indent="0" marL="0">
+              <a:lnSpc>
+                <a:spcPct val="120000"/>
+              </a:lnSpc>
+              <a:buNone/>
+            </a:pPr>
+            <a:r>
+              <a:rPr lang="en-US" sz="2200" dirty="0">
+                <a:solidFill>
+                  <a:srgbClr val="243041"/>
+                </a:solidFill>
+                <a:latin typeface="Pretendard" pitchFamily="34" charset="0"/>
+                <a:ea typeface="Pretendard" pitchFamily="34" charset="-122"/>
+                <a:cs typeface="Pretendard" pitchFamily="34" charset="-120"/>
+              </a:rPr>
+              <a:t>  child images never exceed their owning image region.</a:t>
+            </a:r>
+            <a:endParaRPr lang="en-US" sz="2200" dirty="0"/>
+          </a:p>
+        </p:txBody>
+      </p:sp>
+      <p:pic>
+        <p:nvPicPr>
+          <p:cNvPr id="12" name="Image 1" descr="Safe frame diagram">    </p:cNvPr>
+          <p:cNvPicPr>
+            <a:picLocks noChangeAspect="1"/>
+          </p:cNvPicPr>
+          <p:nvPr/>
+        </p:nvPicPr>
+        <p:blipFill>
+          <a:blip r:embed="rId3">
+            <a:extLst>
+              <a:ext uri="{96DAC541-7B7A-43D3-8B79-37D633B846F1}">
+                <asvg:svgBlip xmlns:asvg="http://schemas.microsoft.com/office/drawing/2016/SVG/main" r:embed="rId4"/>
+              </a:ext>
+            </a:extLst>
+          </a:blip>
+          <a:stretch>
+            <a:fillRect/>
+          </a:stretch>
+        </p:blipFill>
+        <p:spPr>
+          <a:xfrm>
+            <a:off x="6940296" y="1591056"/>
+            <a:ext cx="4178808" cy="4270248"/>
+          </a:xfrm>
+          <a:prstGeom prst="rect">
+            <a:avLst/>
+          </a:prstGeom>
+        </p:spPr>
+      </p:pic>
+    </p:spTree>
+  </p:cSld>
+  <p:clrMapOvr>
+    <a:masterClrMapping/>
+  </p:clrMapOvr>
+</p:sld>
+</file>
+
+<file path=ppt/slides/slide23.xml><?xml version="1.0" encoding="utf-8"?>
+<p:sld xmlns:a="http://schemas.openxmlformats.org/drawingml/2006/main" xmlns:r="http://schemas.openxmlformats.org/officeDocument/2006/relationships" xmlns:p="http://schemas.openxmlformats.org/presentationml/2006/main">
+  <p:cSld name="Slide 23">
+    <p:bg>
+      <p:bgPr>
+        <a:solidFill>
+          <a:srgbClr val="E9EEF5"/>
+        </a:solidFill>
+      </p:bgPr>
+    </p:bg>
+    <p:spTree>
+      <p:nvGrpSpPr>
+        <p:cNvPr id="1" name=""/>
+        <p:cNvGrpSpPr/>
+        <p:nvPr/>
+      </p:nvGrpSpPr>
+      <p:grpSpPr>
+        <a:xfrm>
+          <a:off x="0" y="0"/>
+          <a:ext cx="0" cy="0"/>
+          <a:chOff x="0" y="0"/>
+          <a:chExt cx="0" cy="0"/>
+        </a:xfrm>
+      </p:grpSpPr>
+      <p:sp>
+        <p:nvSpPr>
+          <p:cNvPr id="2" name="Shape 0"/>
+          <p:cNvSpPr/>
+          <p:nvPr/>
+        </p:nvSpPr>
+        <p:spPr>
+          <a:xfrm>
+            <a:off x="10362895" y="502920"/>
+            <a:ext cx="822960" cy="822960"/>
+          </a:xfrm>
+          <a:prstGeom prst="ellipse">
+            <a:avLst/>
+          </a:prstGeom>
+          <a:solidFill>
+            <a:srgbClr val="F7FAFC">
+              <a:alpha val="92000"/>
+            </a:srgbClr>
+          </a:solidFill>
+          <a:ln w="12700">
+            <a:solidFill>
+              <a:srgbClr val="FFFFFF">
+                <a:alpha val="0"/>
+              </a:srgbClr>
+            </a:solidFill>
+            <a:prstDash val="solid"/>
+          </a:ln>
+          <a:effectLst>
+            <a:outerShdw sx="100000" sy="100000" kx="0" ky="0" algn="bl" rotWithShape="0" blurRad="15240" dist="50800" dir="2700000">
+              <a:srgbClr val="C7D0DE">
+                <a:alpha val="22000"/>
+              </a:srgbClr>
+            </a:outerShdw>
+          </a:effectLst>
+        </p:spPr>
+      </p:sp>
+      <p:sp>
+        <p:nvSpPr>
+          <p:cNvPr id="3" name="Shape 1"/>
+          <p:cNvSpPr/>
+          <p:nvPr/>
+        </p:nvSpPr>
+        <p:spPr>
+          <a:xfrm>
+            <a:off x="530352" y="5687568"/>
+            <a:ext cx="658368" cy="658368"/>
+          </a:xfrm>
+          <a:prstGeom prst="ellipse">
+            <a:avLst/>
+          </a:prstGeom>
+          <a:solidFill>
+            <a:srgbClr val="E9EEF5"/>
+          </a:solidFill>
+          <a:ln w="12700">
+            <a:solidFill>
+              <a:srgbClr val="FFFFFF">
+                <a:alpha val="42000"/>
+              </a:srgbClr>
+            </a:solidFill>
+            <a:prstDash val="solid"/>
+          </a:ln>
+          <a:effectLst>
+            <a:outerShdw sx="100000" sy="100000" kx="0" ky="0" algn="bl" rotWithShape="0" blurRad="12700" dist="50800" dir="2700000">
+              <a:srgbClr val="B8C3D2">
+                <a:alpha val="18000"/>
+              </a:srgbClr>
+            </a:outerShdw>
+          </a:effectLst>
+        </p:spPr>
+      </p:sp>
+      <p:sp>
+        <p:nvSpPr>
+          <p:cNvPr id="4" name="Shape 2"/>
+          <p:cNvSpPr/>
+          <p:nvPr/>
+        </p:nvSpPr>
+        <p:spPr>
+          <a:xfrm>
+            <a:off x="731520" y="1207008"/>
+            <a:ext cx="1325880" cy="54864"/>
+          </a:xfrm>
+          <a:prstGeom prst="rect">
+            <a:avLst/>
+          </a:prstGeom>
+          <a:solidFill>
+            <a:srgbClr val="4F6F8F"/>
+          </a:solidFill>
+          <a:ln w="12700">
+            <a:solidFill>
+              <a:srgbClr val="4F6F8F">
+                <a:alpha val="0"/>
+              </a:srgbClr>
+            </a:solidFill>
+            <a:prstDash val="solid"/>
+          </a:ln>
+        </p:spPr>
+      </p:sp>
+      <p:sp>
+        <p:nvSpPr>
+          <p:cNvPr id="5" name="Shape 3"/>
+          <p:cNvSpPr/>
+          <p:nvPr/>
+        </p:nvSpPr>
+        <p:spPr>
+          <a:xfrm>
+            <a:off x="841248" y="4041648"/>
+            <a:ext cx="4572000" cy="73152"/>
+          </a:xfrm>
+          <a:prstGeom prst="rect">
+            <a:avLst/>
+          </a:prstGeom>
+          <a:solidFill>
+            <a:srgbClr val="4F6F8F"/>
+          </a:solidFill>
+          <a:ln w="12700">
+            <a:solidFill>
+              <a:srgbClr val="4F6F8F">
+                <a:alpha val="0"/>
+              </a:srgbClr>
+            </a:solidFill>
+            <a:prstDash val="solid"/>
+          </a:ln>
+        </p:spPr>
+      </p:sp>
+      <p:sp>
+        <p:nvSpPr>
+          <p:cNvPr id="6" name="Shape 4"/>
+          <p:cNvSpPr/>
+          <p:nvPr/>
+        </p:nvSpPr>
+        <p:spPr>
+          <a:xfrm>
+            <a:off x="790956" y="1495044"/>
+            <a:ext cx="4617720" cy="2359152"/>
+          </a:xfrm>
+          <a:prstGeom prst="roundRect">
+            <a:avLst>
+              <a:gd name="adj" fmla="val 2326"/>
+            </a:avLst>
+          </a:prstGeom>
+          <a:solidFill>
+            <a:srgbClr val="B8C3D2">
+              <a:alpha val="26000"/>
+            </a:srgbClr>
+          </a:solidFill>
+          <a:ln w="12700">
+            <a:solidFill>
+              <a:srgbClr val="D5DCE7">
+                <a:alpha val="0"/>
+              </a:srgbClr>
+            </a:solidFill>
+            <a:prstDash val="solid"/>
+          </a:ln>
+          <a:effectLst>
+            <a:outerShdw sx="100000" sy="100000" kx="0" ky="0" algn="bl" rotWithShape="0" blurRad="13970" dist="50800" dir="2700000">
+              <a:srgbClr val="AAB5C4">
+                <a:alpha val="20000"/>
+              </a:srgbClr>
+            </a:outerShdw>
+          </a:effectLst>
+        </p:spPr>
+      </p:sp>
+      <p:sp>
+        <p:nvSpPr>
+          <p:cNvPr id="7" name="Shape 5"/>
+          <p:cNvSpPr/>
+          <p:nvPr/>
+        </p:nvSpPr>
+        <p:spPr>
+          <a:xfrm>
+            <a:off x="717804" y="1412748"/>
+            <a:ext cx="4617720" cy="2359152"/>
+          </a:xfrm>
+          <a:prstGeom prst="roundRect">
+            <a:avLst>
+              <a:gd name="adj" fmla="val 2326"/>
+            </a:avLst>
+          </a:prstGeom>
+          <a:solidFill>
+            <a:srgbClr val="FFFFFF">
+              <a:alpha val="42000"/>
+            </a:srgbClr>
+          </a:solidFill>
+          <a:ln w="12700">
+            <a:solidFill>
+              <a:srgbClr val="FFFFFF">
+                <a:alpha val="0"/>
+              </a:srgbClr>
+            </a:solidFill>
+            <a:prstDash val="solid"/>
+          </a:ln>
+          <a:effectLst>
+            <a:outerShdw sx="100000" sy="100000" kx="0" ky="0" algn="bl" rotWithShape="0" blurRad="10160" dist="50800" dir="13500000">
+              <a:srgbClr val="FFFFFF">
+                <a:alpha val="36000"/>
+              </a:srgbClr>
+            </a:outerShdw>
+          </a:effectLst>
+        </p:spPr>
+      </p:sp>
+      <p:sp>
+        <p:nvSpPr>
+          <p:cNvPr id="8" name="Shape 6"/>
+          <p:cNvSpPr/>
+          <p:nvPr/>
+        </p:nvSpPr>
+        <p:spPr>
+          <a:xfrm>
+            <a:off x="749808" y="1444752"/>
+            <a:ext cx="4617720" cy="2359152"/>
+          </a:xfrm>
+          <a:prstGeom prst="roundRect">
+            <a:avLst>
+              <a:gd name="adj" fmla="val 2326"/>
+            </a:avLst>
+          </a:prstGeom>
+          <a:solidFill>
+            <a:srgbClr val="E9EEF5">
+              <a:alpha val="6000"/>
+            </a:srgbClr>
+          </a:solidFill>
+          <a:ln w="12700">
+            <a:solidFill>
+              <a:srgbClr val="FFFFFF">
+                <a:alpha val="28000"/>
+              </a:srgbClr>
+            </a:solidFill>
+            <a:prstDash val="solid"/>
+          </a:ln>
+        </p:spPr>
+      </p:sp>
+      <p:pic>
+        <p:nvPicPr>
+          <p:cNvPr id="9" name="Image 0" descr="preencoded.png">    </p:cNvPr>
+          <p:cNvPicPr>
+            <a:picLocks noChangeAspect="1"/>
+          </p:cNvPicPr>
+          <p:nvPr/>
+        </p:nvPicPr>
+        <p:blipFill>
+          <a:blip r:embed="rId1">
+            <a:extLst>
+              <a:ext uri="{96DAC541-7B7A-43D3-8B79-37D633B846F1}">
+                <asvg:svgBlip xmlns:asvg="http://schemas.microsoft.com/office/drawing/2016/SVG/main" r:embed="rId2"/>
+              </a:ext>
+            </a:extLst>
+          </a:blip>
+          <a:stretch>
+            <a:fillRect/>
+          </a:stretch>
+        </p:blipFill>
+        <p:spPr>
+          <a:xfrm>
+            <a:off x="749808" y="1444752"/>
+            <a:ext cx="4617720" cy="2359152"/>
+          </a:xfrm>
+          <a:prstGeom prst="rect">
+            <a:avLst/>
+          </a:prstGeom>
+        </p:spPr>
+      </p:pic>
+      <p:sp>
+        <p:nvSpPr>
+          <p:cNvPr id="10" name="Shape 7"/>
+          <p:cNvSpPr/>
+          <p:nvPr/>
+        </p:nvSpPr>
+        <p:spPr>
+          <a:xfrm>
+            <a:off x="5618988" y="1531620"/>
+            <a:ext cx="5532120" cy="2212848"/>
+          </a:xfrm>
+          <a:prstGeom prst="roundRect">
+            <a:avLst>
+              <a:gd name="adj" fmla="val 2479"/>
+            </a:avLst>
+          </a:prstGeom>
+          <a:solidFill>
+            <a:srgbClr val="B8C3D2">
+              <a:alpha val="26000"/>
+            </a:srgbClr>
+          </a:solidFill>
+          <a:ln w="12700">
+            <a:solidFill>
+              <a:srgbClr val="D5DCE7">
+                <a:alpha val="0"/>
+              </a:srgbClr>
+            </a:solidFill>
+            <a:prstDash val="solid"/>
+          </a:ln>
+          <a:effectLst>
+            <a:outerShdw sx="100000" sy="100000" kx="0" ky="0" algn="bl" rotWithShape="0" blurRad="13970" dist="50800" dir="2700000">
+              <a:srgbClr val="AAB5C4">
+                <a:alpha val="20000"/>
+              </a:srgbClr>
+            </a:outerShdw>
+          </a:effectLst>
+        </p:spPr>
+      </p:sp>
+      <p:sp>
+        <p:nvSpPr>
+          <p:cNvPr id="11" name="Shape 8"/>
+          <p:cNvSpPr/>
+          <p:nvPr/>
+        </p:nvSpPr>
+        <p:spPr>
+          <a:xfrm>
+            <a:off x="5545836" y="1449324"/>
+            <a:ext cx="5532120" cy="2212848"/>
+          </a:xfrm>
+          <a:prstGeom prst="roundRect">
+            <a:avLst>
+              <a:gd name="adj" fmla="val 2479"/>
+            </a:avLst>
+          </a:prstGeom>
+          <a:solidFill>
+            <a:srgbClr val="FFFFFF">
+              <a:alpha val="42000"/>
+            </a:srgbClr>
+          </a:solidFill>
+          <a:ln w="12700">
+            <a:solidFill>
+              <a:srgbClr val="FFFFFF">
+                <a:alpha val="0"/>
+              </a:srgbClr>
+            </a:solidFill>
+            <a:prstDash val="solid"/>
+          </a:ln>
+          <a:effectLst>
+            <a:outerShdw sx="100000" sy="100000" kx="0" ky="0" algn="bl" rotWithShape="0" blurRad="10160" dist="50800" dir="13500000">
+              <a:srgbClr val="FFFFFF">
+                <a:alpha val="36000"/>
+              </a:srgbClr>
+            </a:outerShdw>
+          </a:effectLst>
+        </p:spPr>
+      </p:sp>
+      <p:sp>
+        <p:nvSpPr>
+          <p:cNvPr id="12" name="Shape 9"/>
+          <p:cNvSpPr/>
+          <p:nvPr/>
+        </p:nvSpPr>
+        <p:spPr>
+          <a:xfrm>
+            <a:off x="5577840" y="1481328"/>
+            <a:ext cx="5532120" cy="2212848"/>
+          </a:xfrm>
+          <a:prstGeom prst="roundRect">
+            <a:avLst>
+              <a:gd name="adj" fmla="val 2479"/>
+            </a:avLst>
+          </a:prstGeom>
+          <a:solidFill>
+            <a:srgbClr val="E9EEF5">
+              <a:alpha val="6000"/>
+            </a:srgbClr>
+          </a:solidFill>
+          <a:ln w="12700">
+            <a:solidFill>
+              <a:srgbClr val="FFFFFF">
+                <a:alpha val="28000"/>
+              </a:srgbClr>
+            </a:solidFill>
+            <a:prstDash val="solid"/>
+          </a:ln>
+        </p:spPr>
+      </p:sp>
+      <p:pic>
+        <p:nvPicPr>
+          <p:cNvPr id="13" name="Image 1" descr="preencoded.png">    </p:cNvPr>
+          <p:cNvPicPr>
+            <a:picLocks noChangeAspect="1"/>
+          </p:cNvPicPr>
+          <p:nvPr/>
+        </p:nvPicPr>
+        <p:blipFill>
+          <a:blip r:embed="rId3">
+            <a:extLst>
+              <a:ext uri="{96DAC541-7B7A-43D3-8B79-37D633B846F1}">
+                <asvg:svgBlip xmlns:asvg="http://schemas.microsoft.com/office/drawing/2016/SVG/main" r:embed="rId4"/>
+              </a:ext>
+            </a:extLst>
+          </a:blip>
+          <a:stretch>
+            <a:fillRect/>
+          </a:stretch>
+        </p:blipFill>
+        <p:spPr>
+          <a:xfrm>
+            <a:off x="5577840" y="1481328"/>
+            <a:ext cx="5532120" cy="2212848"/>
+          </a:xfrm>
+          <a:prstGeom prst="rect">
+            <a:avLst/>
+          </a:prstGeom>
+        </p:spPr>
+      </p:pic>
+      <p:sp>
+        <p:nvSpPr>
+          <p:cNvPr id="14" name="Shape 10"/>
+          <p:cNvSpPr/>
+          <p:nvPr/>
+        </p:nvSpPr>
+        <p:spPr>
+          <a:xfrm>
+            <a:off x="5618988" y="3963924"/>
+            <a:ext cx="5532120" cy="2011680"/>
+          </a:xfrm>
+          <a:prstGeom prst="roundRect">
+            <a:avLst>
+              <a:gd name="adj" fmla="val 2727"/>
+            </a:avLst>
+          </a:prstGeom>
+          <a:solidFill>
+            <a:srgbClr val="B8C3D2">
+              <a:alpha val="26000"/>
+            </a:srgbClr>
+          </a:solidFill>
+          <a:ln w="12700">
+            <a:solidFill>
+              <a:srgbClr val="D5DCE7">
+                <a:alpha val="0"/>
+              </a:srgbClr>
+            </a:solidFill>
+            <a:prstDash val="solid"/>
+          </a:ln>
+          <a:effectLst>
+            <a:outerShdw sx="100000" sy="100000" kx="0" ky="0" algn="bl" rotWithShape="0" blurRad="13970" dist="50800" dir="2700000">
+              <a:srgbClr val="AAB5C4">
+                <a:alpha val="20000"/>
+              </a:srgbClr>
+            </a:outerShdw>
+          </a:effectLst>
+        </p:spPr>
+      </p:sp>
+      <p:sp>
+        <p:nvSpPr>
+          <p:cNvPr id="15" name="Shape 11"/>
+          <p:cNvSpPr/>
+          <p:nvPr/>
+        </p:nvSpPr>
+        <p:spPr>
+          <a:xfrm>
+            <a:off x="5545836" y="3881628"/>
+            <a:ext cx="5532120" cy="2011680"/>
+          </a:xfrm>
+          <a:prstGeom prst="roundRect">
+            <a:avLst>
+              <a:gd name="adj" fmla="val 2727"/>
+            </a:avLst>
+          </a:prstGeom>
+          <a:solidFill>
+            <a:srgbClr val="FFFFFF">
+              <a:alpha val="42000"/>
+            </a:srgbClr>
+          </a:solidFill>
+          <a:ln w="12700">
+            <a:solidFill>
+              <a:srgbClr val="FFFFFF">
+                <a:alpha val="0"/>
+              </a:srgbClr>
+            </a:solidFill>
+            <a:prstDash val="solid"/>
+          </a:ln>
+          <a:effectLst>
+            <a:outerShdw sx="100000" sy="100000" kx="0" ky="0" algn="bl" rotWithShape="0" blurRad="10160" dist="50800" dir="13500000">
+              <a:srgbClr val="FFFFFF">
+                <a:alpha val="36000"/>
+              </a:srgbClr>
+            </a:outerShdw>
+          </a:effectLst>
+        </p:spPr>
+      </p:sp>
+      <p:sp>
+        <p:nvSpPr>
+          <p:cNvPr id="16" name="Shape 12"/>
+          <p:cNvSpPr/>
+          <p:nvPr/>
+        </p:nvSpPr>
+        <p:spPr>
+          <a:xfrm>
+            <a:off x="5577840" y="3913632"/>
+            <a:ext cx="5532120" cy="2011680"/>
+          </a:xfrm>
+          <a:prstGeom prst="roundRect">
+            <a:avLst>
+              <a:gd name="adj" fmla="val 2727"/>
+            </a:avLst>
+          </a:prstGeom>
+          <a:solidFill>
+            <a:srgbClr val="E9EEF5">
+              <a:alpha val="6000"/>
+            </a:srgbClr>
+          </a:solidFill>
+          <a:ln w="12700">
+            <a:solidFill>
+              <a:srgbClr val="FFFFFF">
+                <a:alpha val="28000"/>
+              </a:srgbClr>
+            </a:solidFill>
+            <a:prstDash val="solid"/>
+          </a:ln>
+        </p:spPr>
+      </p:sp>
+      <p:pic>
+        <p:nvPicPr>
+          <p:cNvPr id="17" name="Image 2" descr="preencoded.png">    </p:cNvPr>
+          <p:cNvPicPr>
+            <a:picLocks noChangeAspect="1"/>
+          </p:cNvPicPr>
+          <p:nvPr/>
+        </p:nvPicPr>
+        <p:blipFill>
+          <a:blip r:embed="rId5">
+            <a:extLst>
+              <a:ext uri="{96DAC541-7B7A-43D3-8B79-37D633B846F1}">
+                <asvg:svgBlip xmlns:asvg="http://schemas.microsoft.com/office/drawing/2016/SVG/main" r:embed="rId6"/>
+              </a:ext>
+            </a:extLst>
+          </a:blip>
+          <a:stretch>
+            <a:fillRect/>
+          </a:stretch>
+        </p:blipFill>
+        <p:spPr>
+          <a:xfrm>
+            <a:off x="5577840" y="3913632"/>
+            <a:ext cx="5532120" cy="2011680"/>
+          </a:xfrm>
+          <a:prstGeom prst="rect">
+            <a:avLst/>
+          </a:prstGeom>
+        </p:spPr>
+      </p:pic>
+      <p:sp>
+        <p:nvSpPr>
+          <p:cNvPr id="18" name="Text 13"/>
+          <p:cNvSpPr txBox="1"/>
+          <p:nvPr/>
+        </p:nvSpPr>
+        <p:spPr>
+          <a:xfrm>
+            <a:off x="731520" y="457200"/>
+            <a:ext cx="10698480" cy="731520"/>
+          </a:xfrm>
+          <a:prstGeom prst="rect">
+            <a:avLst/>
+          </a:prstGeom>
+          <a:noFill/>
+          <a:ln/>
+        </p:spPr>
+        <p:txBody>
+          <a:bodyPr wrap="square" lIns="0" tIns="0" rIns="0" bIns="0" rtlCol="0" anchor="ctr"/>
+          <a:lstStyle/>
+          <a:p>
+            <a:pPr algn="ctr" indent="0" marL="0">
+              <a:lnSpc>
+                <a:spcPct val="120000"/>
+              </a:lnSpc>
+              <a:buNone/>
+            </a:pPr>
+            <a:r>
+              <a:rPr lang="en-US" sz="3400" b="1" dirty="0">
+                <a:solidFill>
+                  <a:srgbClr val="243041"/>
+                </a:solidFill>
+                <a:latin typeface="Pretendard" pitchFamily="34" charset="0"/>
+                <a:ea typeface="Pretendard" pitchFamily="34" charset="-122"/>
+                <a:cs typeface="Pretendard" pitchFamily="34" charset="-120"/>
+              </a:rPr>
+              <a:t>Mixed Object Packing</a:t>
+            </a:r>
+            <a:endParaRPr lang="en-US" sz="3400" dirty="0"/>
+          </a:p>
+        </p:txBody>
+      </p:sp>
+      <p:graphicFrame>
+        <p:nvGraphicFramePr>
+          <p:cNvPr id="19" name="Chart 0" descr=""/>
+          <p:cNvGraphicFramePr/>
+          <p:nvPr/>
+        </p:nvGraphicFramePr>
+        <p:xfrm>
+          <a:off x="877824" y="1591056"/>
+          <a:ext cx="4361688" cy="2066544"/>
+        </p:xfrm>
+        <a:graphic xmlns:a="http://schemas.openxmlformats.org/drawingml/2006/main">
+          <a:graphicData uri="http://schemas.openxmlformats.org/drawingml/2006/chart">
+            <c:chart xmlns:c="http://schemas.openxmlformats.org/drawingml/2006/chart" r:id="rId7"/>
+          </a:graphicData>
+        </a:graphic>
+      </p:graphicFrame>
+      <p:graphicFrame>
+        <p:nvGraphicFramePr>
+          <p:cNvPr id="24" name="Table 0"/>
+          <p:cNvGraphicFramePr>
+            <a:graphicFrameLocks noGrp="1"/>
+          </p:cNvGraphicFramePr>
+          <p:nvPr>
+            <p:extLst>
+              <p:ext uri="{D42A27DB-BD31-4B8C-83A1-F6EECF244321}">
+                <p14:modId xmlns:p14="http://schemas.microsoft.com/office/powerpoint/2010/main" val="1579011935"/>
+              </p:ext>
+            </p:extLst>
+          </p:nvPr>
+        </p:nvGraphicFramePr>
+        <p:xfrm>
+          <a:off x="5577840" y="1481328"/>
+          <a:ext cx="5532120" cy="2212848"/>
+        </p:xfrm>
+        <a:graphic>
+          <a:graphicData uri="http://schemas.openxmlformats.org/drawingml/2006/table">
+            <a:tbl>
+              <a:tblPr/>
+              <a:tblGrid>
+                <a:gridCol w="2766060"/>
+                <a:gridCol w="2766060"/>
+              </a:tblGrid>
+              <a:tr h="737616">
+                <a:tc>
+                  <a:txBody>
+                    <a:bodyPr/>
+                    <a:lstStyle/>
+                    <a:p>
+                      <a:pPr algn="ctr" indent="0" marL="0">
+                        <a:buNone/>
+                      </a:pPr>
+                      <a:r>
+                        <a:rPr lang="en-US" sz="1800" b="1" dirty="0">
+                          <a:solidFill>
+                            <a:srgbClr val="FFFFFF"/>
+                          </a:solidFill>
+                          <a:latin typeface="Pretendard" pitchFamily="34" charset="0"/>
+                          <a:ea typeface="Pretendard" pitchFamily="34" charset="-122"/>
+                          <a:cs typeface="Pretendard" pitchFamily="34" charset="-120"/>
+                        </a:rPr>
+                        <a:t>Object</a:t>
+                      </a:r>
+                      <a:endParaRPr lang="en-US" sz="1800" dirty="0">
+                        <a:latin typeface="Pretendard" charset="0"/>
+                        <a:ea typeface="Pretendard" charset="0"/>
+                        <a:cs typeface="Pretendard" charset="0"/>
+                      </a:endParaRPr>
+                    </a:p>
+                  </a:txBody>
+                  <a:tcPr marL="54864" marR="54864" marT="36576" marB="36576" anchor="ctr">
+                    <a:lnL w="12700" cap="flat" cmpd="sng" algn="ctr">
+                      <a:solidFill>
+                        <a:srgbClr val="D5DCE7"/>
+                      </a:solidFill>
+                      <a:prstDash val="solid"/>
+                      <a:round/>
+                      <a:headEnd type="none" w="med" len="med"/>
+                      <a:tailEnd type="none" w="med" len="med"/>
+                    </a:lnL>
+                    <a:lnR w="12700" cap="flat" cmpd="sng" algn="ctr">
+                      <a:solidFill>
+                        <a:srgbClr val="D5DCE7"/>
+                      </a:solidFill>
+                      <a:prstDash val="solid"/>
+                      <a:round/>
+                      <a:headEnd type="none" w="med" len="med"/>
+                      <a:tailEnd type="none" w="med" len="med"/>
+                    </a:lnR>
+                    <a:lnT w="12700" cap="flat" cmpd="sng" algn="ctr">
+                      <a:solidFill>
+                        <a:srgbClr val="D5DCE7"/>
+                      </a:solidFill>
+                      <a:prstDash val="solid"/>
+                      <a:round/>
+                      <a:headEnd type="none" w="med" len="med"/>
+                      <a:tailEnd type="none" w="med" len="med"/>
+                    </a:lnT>
+                    <a:lnB w="12700" cap="flat" cmpd="sng" algn="ctr">
+                      <a:solidFill>
+                        <a:srgbClr val="D5DCE7"/>
+                      </a:solidFill>
+                      <a:prstDash val="solid"/>
+                      <a:round/>
+                      <a:headEnd type="none" w="med" len="med"/>
+                      <a:tailEnd type="none" w="med" len="med"/>
+                    </a:lnB>
+                    <a:solidFill>
+                      <a:srgbClr val="4F6F8F"/>
+                    </a:solidFill>
+                  </a:tcPr>
+                </a:tc>
+                <a:tc>
+                  <a:txBody>
+                    <a:bodyPr/>
+                    <a:lstStyle/>
+                    <a:p>
+                      <a:pPr algn="ctr" indent="0" marL="0">
+                        <a:buNone/>
+                      </a:pPr>
+                      <a:r>
+                        <a:rPr lang="en-US" sz="1800" b="1" dirty="0">
+                          <a:solidFill>
+                            <a:srgbClr val="FFFFFF"/>
+                          </a:solidFill>
+                          <a:latin typeface="Pretendard" pitchFamily="34" charset="0"/>
+                          <a:ea typeface="Pretendard" pitchFamily="34" charset="-122"/>
+                          <a:cs typeface="Pretendard" pitchFamily="34" charset="-120"/>
+                        </a:rPr>
+                        <a:t>Signal</a:t>
+                      </a:r>
+                      <a:endParaRPr lang="en-US" sz="1800" dirty="0">
+                        <a:latin typeface="Pretendard" charset="0"/>
+                        <a:ea typeface="Pretendard" charset="0"/>
+                        <a:cs typeface="Pretendard" charset="0"/>
+                      </a:endParaRPr>
+                    </a:p>
+                  </a:txBody>
+                  <a:tcPr marL="54864" marR="54864" marT="36576" marB="36576" anchor="ctr">
+                    <a:lnL w="12700" cap="flat" cmpd="sng" algn="ctr">
+                      <a:solidFill>
+                        <a:srgbClr val="D5DCE7"/>
+                      </a:solidFill>
+                      <a:prstDash val="solid"/>
+                      <a:round/>
+                      <a:headEnd type="none" w="med" len="med"/>
+                      <a:tailEnd type="none" w="med" len="med"/>
+                    </a:lnL>
+                    <a:lnR w="12700" cap="flat" cmpd="sng" algn="ctr">
+                      <a:solidFill>
+                        <a:srgbClr val="D5DCE7"/>
+                      </a:solidFill>
+                      <a:prstDash val="solid"/>
+                      <a:round/>
+                      <a:headEnd type="none" w="med" len="med"/>
+                      <a:tailEnd type="none" w="med" len="med"/>
+                    </a:lnR>
+                    <a:lnT w="12700" cap="flat" cmpd="sng" algn="ctr">
+                      <a:solidFill>
+                        <a:srgbClr val="D5DCE7"/>
+                      </a:solidFill>
+                      <a:prstDash val="solid"/>
+                      <a:round/>
+                      <a:headEnd type="none" w="med" len="med"/>
+                      <a:tailEnd type="none" w="med" len="med"/>
+                    </a:lnT>
+                    <a:lnB w="12700" cap="flat" cmpd="sng" algn="ctr">
+                      <a:solidFill>
+                        <a:srgbClr val="D5DCE7"/>
+                      </a:solidFill>
+                      <a:prstDash val="solid"/>
+                      <a:round/>
+                      <a:headEnd type="none" w="med" len="med"/>
+                      <a:tailEnd type="none" w="med" len="med"/>
+                    </a:lnB>
+                    <a:solidFill>
+                      <a:srgbClr val="4F6F8F"/>
+                    </a:solidFill>
+                  </a:tcPr>
+                </a:tc>
+              </a:tr>
+              <a:tr h="737616">
+                <a:tc>
+                  <a:txBody>
+                    <a:bodyPr/>
+                    <a:lstStyle/>
+                    <a:p>
+                      <a:pPr algn="l" indent="0" marL="0">
+                        <a:buNone/>
+                      </a:pPr>
+                      <a:r>
+                        <a:rPr lang="en-US" sz="1800" b="1" dirty="0">
+                          <a:solidFill>
+                            <a:srgbClr val="243041"/>
+                          </a:solidFill>
+                          <a:latin typeface="Pretendard" pitchFamily="34" charset="0"/>
+                          <a:ea typeface="Pretendard" pitchFamily="34" charset="-122"/>
+                          <a:cs typeface="Pretendard" pitchFamily="34" charset="-120"/>
+                        </a:rPr>
+                        <a:t>Chart</a:t>
+                      </a:r>
+                      <a:endParaRPr lang="en-US" sz="1800" dirty="0">
+                        <a:latin typeface="Pretendard" charset="0"/>
+                        <a:ea typeface="Pretendard" charset="0"/>
+                        <a:cs typeface="Pretendard" charset="0"/>
+                      </a:endParaRPr>
+                    </a:p>
+                  </a:txBody>
+                  <a:tcPr marL="54864" marR="54864" marT="36576" marB="36576" anchor="ctr">
+                    <a:lnL w="12700" cap="flat" cmpd="sng" algn="ctr">
+                      <a:solidFill>
+                        <a:srgbClr val="D5DCE7"/>
+                      </a:solidFill>
+                      <a:prstDash val="solid"/>
+                      <a:round/>
+                      <a:headEnd type="none" w="med" len="med"/>
+                      <a:tailEnd type="none" w="med" len="med"/>
+                    </a:lnL>
+                    <a:lnR w="12700" cap="flat" cmpd="sng" algn="ctr">
+                      <a:solidFill>
+                        <a:srgbClr val="D5DCE7"/>
+                      </a:solidFill>
+                      <a:prstDash val="solid"/>
+                      <a:round/>
+                      <a:headEnd type="none" w="med" len="med"/>
+                      <a:tailEnd type="none" w="med" len="med"/>
+                    </a:lnR>
+                    <a:lnT w="12700" cap="flat" cmpd="sng" algn="ctr">
+                      <a:solidFill>
+                        <a:srgbClr val="D5DCE7"/>
+                      </a:solidFill>
+                      <a:prstDash val="solid"/>
+                      <a:round/>
+                      <a:headEnd type="none" w="med" len="med"/>
+                      <a:tailEnd type="none" w="med" len="med"/>
+                    </a:lnT>
+                    <a:lnB w="12700" cap="flat" cmpd="sng" algn="ctr">
+                      <a:solidFill>
+                        <a:srgbClr val="D5DCE7"/>
+                      </a:solidFill>
+                      <a:prstDash val="solid"/>
+                      <a:round/>
+                      <a:headEnd type="none" w="med" len="med"/>
+                      <a:tailEnd type="none" w="med" len="med"/>
+                    </a:lnB>
+                  </a:tcPr>
+                </a:tc>
+                <a:tc>
+                  <a:txBody>
+                    <a:bodyPr/>
+                    <a:lstStyle/>
+                    <a:p>
+                      <a:pPr algn="l" indent="0" marL="0">
+                        <a:buNone/>
+                      </a:pPr>
+                      <a:r>
+                        <a:rPr lang="en-US" sz="1800" dirty="0">
+                          <a:solidFill>
+                            <a:srgbClr val="243041"/>
+                          </a:solidFill>
+                          <a:latin typeface="Pretendard" pitchFamily="34" charset="0"/>
+                          <a:ea typeface="Pretendard" pitchFamily="34" charset="-122"/>
+                          <a:cs typeface="Pretendard" pitchFamily="34" charset="-120"/>
+                        </a:rPr>
+                        <a:t>trend</a:t>
+                      </a:r>
+                      <a:endParaRPr lang="en-US" sz="1800" dirty="0">
+                        <a:latin typeface="Pretendard" charset="0"/>
+                        <a:ea typeface="Pretendard" charset="0"/>
+                        <a:cs typeface="Pretendard" charset="0"/>
+                      </a:endParaRPr>
+                    </a:p>
+                  </a:txBody>
+                  <a:tcPr marL="54864" marR="54864" marT="36576" marB="36576" anchor="ctr">
+                    <a:lnL w="12700" cap="flat" cmpd="sng" algn="ctr">
+                      <a:solidFill>
+                        <a:srgbClr val="D5DCE7"/>
+                      </a:solidFill>
+                      <a:prstDash val="solid"/>
+                      <a:round/>
+                      <a:headEnd type="none" w="med" len="med"/>
+                      <a:tailEnd type="none" w="med" len="med"/>
+                    </a:lnL>
+                    <a:lnR w="12700" cap="flat" cmpd="sng" algn="ctr">
+                      <a:solidFill>
+                        <a:srgbClr val="D5DCE7"/>
+                      </a:solidFill>
+                      <a:prstDash val="solid"/>
+                      <a:round/>
+                      <a:headEnd type="none" w="med" len="med"/>
+                      <a:tailEnd type="none" w="med" len="med"/>
+                    </a:lnR>
+                    <a:lnT w="12700" cap="flat" cmpd="sng" algn="ctr">
+                      <a:solidFill>
+                        <a:srgbClr val="D5DCE7"/>
+                      </a:solidFill>
+                      <a:prstDash val="solid"/>
+                      <a:round/>
+                      <a:headEnd type="none" w="med" len="med"/>
+                      <a:tailEnd type="none" w="med" len="med"/>
+                    </a:lnT>
+                    <a:lnB w="12700" cap="flat" cmpd="sng" algn="ctr">
+                      <a:solidFill>
+                        <a:srgbClr val="D5DCE7"/>
+                      </a:solidFill>
+                      <a:prstDash val="solid"/>
+                      <a:round/>
+                      <a:headEnd type="none" w="med" len="med"/>
+                      <a:tailEnd type="none" w="med" len="med"/>
+                    </a:lnB>
+                  </a:tcPr>
+                </a:tc>
+              </a:tr>
+              <a:tr h="737616">
+                <a:tc>
+                  <a:txBody>
+                    <a:bodyPr/>
+                    <a:lstStyle/>
+                    <a:p>
+                      <a:pPr algn="l" indent="0" marL="0">
+                        <a:buNone/>
+                      </a:pPr>
+                      <a:r>
+                        <a:rPr lang="en-US" sz="1800" b="1" dirty="0">
+                          <a:solidFill>
+                            <a:srgbClr val="243041"/>
+                          </a:solidFill>
+                          <a:latin typeface="Pretendard" pitchFamily="34" charset="0"/>
+                          <a:ea typeface="Pretendard" pitchFamily="34" charset="-122"/>
+                          <a:cs typeface="Pretendard" pitchFamily="34" charset="-120"/>
+                        </a:rPr>
+                        <a:t>Image</a:t>
+                      </a:r>
+                      <a:endParaRPr lang="en-US" sz="1800" dirty="0">
+                        <a:latin typeface="Pretendard" charset="0"/>
+                        <a:ea typeface="Pretendard" charset="0"/>
+                        <a:cs typeface="Pretendard" charset="0"/>
+                      </a:endParaRPr>
+                    </a:p>
+                  </a:txBody>
+                  <a:tcPr marL="54864" marR="54864" marT="36576" marB="36576" anchor="ctr">
+                    <a:lnL w="12700" cap="flat" cmpd="sng" algn="ctr">
+                      <a:solidFill>
+                        <a:srgbClr val="D5DCE7"/>
+                      </a:solidFill>
+                      <a:prstDash val="solid"/>
+                      <a:round/>
+                      <a:headEnd type="none" w="med" len="med"/>
+                      <a:tailEnd type="none" w="med" len="med"/>
+                    </a:lnL>
+                    <a:lnR w="12700" cap="flat" cmpd="sng" algn="ctr">
+                      <a:solidFill>
+                        <a:srgbClr val="D5DCE7"/>
+                      </a:solidFill>
+                      <a:prstDash val="solid"/>
+                      <a:round/>
+                      <a:headEnd type="none" w="med" len="med"/>
+                      <a:tailEnd type="none" w="med" len="med"/>
+                    </a:lnR>
+                    <a:lnT w="12700" cap="flat" cmpd="sng" algn="ctr">
+                      <a:solidFill>
+                        <a:srgbClr val="D5DCE7"/>
+                      </a:solidFill>
+                      <a:prstDash val="solid"/>
+                      <a:round/>
+                      <a:headEnd type="none" w="med" len="med"/>
+                      <a:tailEnd type="none" w="med" len="med"/>
+                    </a:lnT>
+                    <a:lnB w="12700" cap="flat" cmpd="sng" algn="ctr">
+                      <a:solidFill>
+                        <a:srgbClr val="D5DCE7"/>
+                      </a:solidFill>
+                      <a:prstDash val="solid"/>
+                      <a:round/>
+                      <a:headEnd type="none" w="med" len="med"/>
+                      <a:tailEnd type="none" w="med" len="med"/>
+                    </a:lnB>
+                    <a:solidFill>
+                      <a:srgbClr val="E9EEF5">
+                        <a:alpha val="80000"/>
+                      </a:srgbClr>
+                    </a:solidFill>
+                  </a:tcPr>
+                </a:tc>
+                <a:tc>
+                  <a:txBody>
+                    <a:bodyPr/>
+                    <a:lstStyle/>
+                    <a:p>
+                      <a:pPr algn="l" indent="0" marL="0">
+                        <a:buNone/>
+                      </a:pPr>
+                      <a:r>
+                        <a:rPr lang="en-US" sz="1800" dirty="0">
+                          <a:solidFill>
+                            <a:srgbClr val="243041"/>
+                          </a:solidFill>
+                          <a:latin typeface="Pretendard" pitchFamily="34" charset="0"/>
+                          <a:ea typeface="Pretendard" pitchFamily="34" charset="-122"/>
+                          <a:cs typeface="Pretendard" pitchFamily="34" charset="-120"/>
+                        </a:rPr>
+                        <a:t>bounded</a:t>
+                      </a:r>
+                      <a:endParaRPr lang="en-US" sz="1800" dirty="0">
+                        <a:latin typeface="Pretendard" charset="0"/>
+                        <a:ea typeface="Pretendard" charset="0"/>
+                        <a:cs typeface="Pretendard" charset="0"/>
+                      </a:endParaRPr>
+                    </a:p>
+                  </a:txBody>
+                  <a:tcPr marL="54864" marR="54864" marT="36576" marB="36576" anchor="ctr">
+                    <a:lnL w="12700" cap="flat" cmpd="sng" algn="ctr">
+                      <a:solidFill>
+                        <a:srgbClr val="D5DCE7"/>
+                      </a:solidFill>
+                      <a:prstDash val="solid"/>
+                      <a:round/>
+                      <a:headEnd type="none" w="med" len="med"/>
+                      <a:tailEnd type="none" w="med" len="med"/>
+                    </a:lnL>
+                    <a:lnR w="12700" cap="flat" cmpd="sng" algn="ctr">
+                      <a:solidFill>
+                        <a:srgbClr val="D5DCE7"/>
+                      </a:solidFill>
+                      <a:prstDash val="solid"/>
+                      <a:round/>
+                      <a:headEnd type="none" w="med" len="med"/>
+                      <a:tailEnd type="none" w="med" len="med"/>
+                    </a:lnR>
+                    <a:lnT w="12700" cap="flat" cmpd="sng" algn="ctr">
+                      <a:solidFill>
+                        <a:srgbClr val="D5DCE7"/>
+                      </a:solidFill>
+                      <a:prstDash val="solid"/>
+                      <a:round/>
+                      <a:headEnd type="none" w="med" len="med"/>
+                      <a:tailEnd type="none" w="med" len="med"/>
+                    </a:lnT>
+                    <a:lnB w="12700" cap="flat" cmpd="sng" algn="ctr">
+                      <a:solidFill>
+                        <a:srgbClr val="D5DCE7"/>
+                      </a:solidFill>
+                      <a:prstDash val="solid"/>
+                      <a:round/>
+                      <a:headEnd type="none" w="med" len="med"/>
+                      <a:tailEnd type="none" w="med" len="med"/>
+                    </a:lnB>
+                    <a:solidFill>
+                      <a:srgbClr val="E9EEF5">
+                        <a:alpha val="80000"/>
+                      </a:srgbClr>
+                    </a:solidFill>
+                  </a:tcPr>
+                </a:tc>
+              </a:tr>
+            </a:tbl>
+          </a:graphicData>
+        </a:graphic>
+      </p:graphicFrame>
+      <p:sp>
+        <p:nvSpPr>
+          <p:cNvPr id="21" name="Text 14"/>
+          <p:cNvSpPr txBox="1"/>
+          <p:nvPr/>
+        </p:nvSpPr>
+        <p:spPr>
+          <a:xfrm>
+            <a:off x="914400" y="4151376"/>
+            <a:ext cx="4425696" cy="1499616"/>
+          </a:xfrm>
+          <a:prstGeom prst="rect">
+            <a:avLst/>
+          </a:prstGeom>
+          <a:noFill/>
+          <a:ln/>
+        </p:spPr>
+        <p:txBody>
+          <a:bodyPr wrap="square" lIns="0" tIns="25400" rIns="25400" bIns="0" rtlCol="0" anchor="t"/>
+          <a:lstStyle/>
+          <a:p>
+            <a:pPr algn="l" indent="0" marL="0">
+              <a:lnSpc>
+                <a:spcPct val="120000"/>
+              </a:lnSpc>
+              <a:buNone/>
+            </a:pPr>
+            <a:r>
+              <a:rPr lang="en-US" sz="1800" b="1" dirty="0">
+                <a:solidFill>
+                  <a:srgbClr val="4F6F8F"/>
+                </a:solidFill>
+                <a:latin typeface="Pretendard" pitchFamily="34" charset="0"/>
+                <a:ea typeface="Pretendard" pitchFamily="34" charset="-122"/>
+                <a:cs typeface="Pretendard" pitchFamily="34" charset="-120"/>
+              </a:rPr>
+              <a:t>- Reading order</a:t>
+            </a:r>
+            <a:pPr algn="l" indent="0" marL="0">
+              <a:lnSpc>
+                <a:spcPct val="120000"/>
+              </a:lnSpc>
+              <a:buNone/>
+            </a:pPr>
+            <a:r>
+              <a:rPr lang="en-US" sz="1800" dirty="0">
+                <a:solidFill>
+                  <a:srgbClr val="243041"/>
+                </a:solidFill>
+                <a:latin typeface="Pretendard" pitchFamily="34" charset="0"/>
+                <a:ea typeface="Pretendard" pitchFamily="34" charset="-122"/>
+                <a:cs typeface="Pretendard" pitchFamily="34" charset="-120"/>
+              </a:rPr>
+              <a:t>  chart and table remain the primary evidence.</a:t>
+            </a:r>
+            <a:endParaRPr lang="en-US" sz="1800" dirty="0"/>
+          </a:p>
+          <a:p>
+            <a:pPr algn="l" indent="0" marL="0">
+              <a:lnSpc>
+                <a:spcPct val="120000"/>
+              </a:lnSpc>
+              <a:buNone/>
+            </a:pPr>
+            <a:r>
+              <a:rPr lang="en-US" sz="1800" b="1" dirty="0">
+                <a:solidFill>
+                  <a:srgbClr val="4F6F8F"/>
+                </a:solidFill>
+                <a:latin typeface="Pretendard" pitchFamily="34" charset="0"/>
+                <a:ea typeface="Pretendard" pitchFamily="34" charset="-122"/>
+                <a:cs typeface="Pretendard" pitchFamily="34" charset="-120"/>
+              </a:rPr>
+              <a:t>- Image role</a:t>
+            </a:r>
+            <a:endParaRPr lang="en-US" sz="1800" dirty="0"/>
+          </a:p>
+          <a:p>
+            <a:pPr algn="l" indent="0" marL="0">
+              <a:lnSpc>
+                <a:spcPct val="120000"/>
+              </a:lnSpc>
+              <a:buNone/>
+            </a:pPr>
+            <a:r>
+              <a:rPr lang="en-US" sz="1800" dirty="0">
+                <a:solidFill>
+                  <a:srgbClr val="243041"/>
+                </a:solidFill>
+                <a:latin typeface="Pretendard" pitchFamily="34" charset="0"/>
+                <a:ea typeface="Pretendard" pitchFamily="34" charset="-122"/>
+                <a:cs typeface="Pretendard" pitchFamily="34" charset="-120"/>
+              </a:rPr>
+              <a:t>  visual evidence stays bounded in a separate safe frame.</a:t>
+            </a:r>
+            <a:endParaRPr lang="en-US" sz="1800" dirty="0"/>
+          </a:p>
+        </p:txBody>
+      </p:sp>
+      <p:pic>
+        <p:nvPicPr>
+          <p:cNvPr id="22" name="Image 3" descr="Safe frame diagram">    </p:cNvPr>
+          <p:cNvPicPr>
+            <a:picLocks noChangeAspect="1"/>
+          </p:cNvPicPr>
+          <p:nvPr/>
+        </p:nvPicPr>
+        <p:blipFill>
+          <a:blip r:embed="rId8">
+            <a:extLst>
+              <a:ext uri="{96DAC541-7B7A-43D3-8B79-37D633B846F1}">
+                <asvg:svgBlip xmlns:asvg="http://schemas.microsoft.com/office/drawing/2016/SVG/main" r:embed="rId9"/>
+              </a:ext>
+            </a:extLst>
+          </a:blip>
+          <a:stretch>
+            <a:fillRect/>
+          </a:stretch>
+        </p:blipFill>
+        <p:spPr>
+          <a:xfrm>
+            <a:off x="5648249" y="3984041"/>
+            <a:ext cx="5391302" cy="1870862"/>
+          </a:xfrm>
+          <a:prstGeom prst="rect">
+            <a:avLst/>
+          </a:prstGeom>
+        </p:spPr>
+      </p:pic>
+    </p:spTree>
+  </p:cSld>
+  <p:clrMapOvr>
+    <a:masterClrMapping/>
+  </p:clrMapOvr>
+</p:sld>
+</file>
+
+<file path=ppt/slides/slide24.xml><?xml version="1.0" encoding="utf-8"?>
+<p:sld xmlns:a="http://schemas.openxmlformats.org/drawingml/2006/main" xmlns:r="http://schemas.openxmlformats.org/officeDocument/2006/relationships" xmlns:p="http://schemas.openxmlformats.org/presentationml/2006/main">
+  <p:cSld name="Slide 24">
     <p:bg>
       <p:bgPr>
         <a:solidFill>
@@ -11941,8 +17613,8 @@
         </p:nvSpPr>
         <p:spPr>
           <a:xfrm>
-            <a:off x="1699321" y="1957548"/>
-            <a:ext cx="9255191" cy="839785"/>
+            <a:off x="1699321" y="1987296"/>
+            <a:ext cx="9255191" cy="780288"/>
           </a:xfrm>
           <a:prstGeom prst="rect">
             <a:avLst/>
@@ -12057,8 +17729,8 @@
         </p:nvSpPr>
         <p:spPr>
           <a:xfrm>
-            <a:off x="1699321" y="3283428"/>
-            <a:ext cx="9255191" cy="839785"/>
+            <a:off x="1699321" y="3313176"/>
+            <a:ext cx="9255191" cy="780288"/>
           </a:xfrm>
           <a:prstGeom prst="rect">
             <a:avLst/>
@@ -12173,8 +17845,8 @@
         </p:nvSpPr>
         <p:spPr>
           <a:xfrm>
-            <a:off x="1699321" y="4600164"/>
-            <a:ext cx="9255191" cy="839785"/>
+            <a:off x="1699321" y="4629912"/>
+            <a:ext cx="9255191" cy="780288"/>
           </a:xfrm>
           <a:prstGeom prst="rect">
             <a:avLst/>
@@ -12232,1088 +17904,6 @@
 </p:sld>
 </file>
 
-<file path=ppt/slides/slide2.xml><?xml version="1.0" encoding="utf-8"?>
-<p:sld xmlns:a="http://schemas.openxmlformats.org/drawingml/2006/main" xmlns:r="http://schemas.openxmlformats.org/officeDocument/2006/relationships" xmlns:p="http://schemas.openxmlformats.org/presentationml/2006/main">
-  <p:cSld name="Slide 2">
-    <p:bg>
-      <p:bgPr>
-        <a:solidFill>
-          <a:srgbClr val="E9EEF5"/>
-        </a:solidFill>
-      </p:bgPr>
-    </p:bg>
-    <p:spTree>
-      <p:nvGrpSpPr>
-        <p:cNvPr id="1" name=""/>
-        <p:cNvGrpSpPr/>
-        <p:nvPr/>
-      </p:nvGrpSpPr>
-      <p:grpSpPr>
-        <a:xfrm>
-          <a:off x="0" y="0"/>
-          <a:ext cx="0" cy="0"/>
-          <a:chOff x="0" y="0"/>
-          <a:chExt cx="0" cy="0"/>
-        </a:xfrm>
-      </p:grpSpPr>
-      <p:sp>
-        <p:nvSpPr>
-          <p:cNvPr id="2" name="Shape 0"/>
-          <p:cNvSpPr/>
-          <p:nvPr/>
-        </p:nvSpPr>
-        <p:spPr>
-          <a:xfrm>
-            <a:off x="10362895" y="502920"/>
-            <a:ext cx="822960" cy="822960"/>
-          </a:xfrm>
-          <a:prstGeom prst="ellipse">
-            <a:avLst/>
-          </a:prstGeom>
-          <a:solidFill>
-            <a:srgbClr val="F7FAFC">
-              <a:alpha val="92000"/>
-            </a:srgbClr>
-          </a:solidFill>
-          <a:ln w="12700">
-            <a:solidFill>
-              <a:srgbClr val="FFFFFF">
-                <a:alpha val="0"/>
-              </a:srgbClr>
-            </a:solidFill>
-            <a:prstDash val="solid"/>
-          </a:ln>
-          <a:effectLst>
-            <a:outerShdw sx="100000" sy="100000" kx="0" ky="0" algn="bl" rotWithShape="0" blurRad="15240" dist="50800" dir="2700000">
-              <a:srgbClr val="C7D0DE">
-                <a:alpha val="22000"/>
-              </a:srgbClr>
-            </a:outerShdw>
-          </a:effectLst>
-        </p:spPr>
-      </p:sp>
-      <p:sp>
-        <p:nvSpPr>
-          <p:cNvPr id="3" name="Shape 1"/>
-          <p:cNvSpPr/>
-          <p:nvPr/>
-        </p:nvSpPr>
-        <p:spPr>
-          <a:xfrm>
-            <a:off x="530352" y="5687568"/>
-            <a:ext cx="658368" cy="658368"/>
-          </a:xfrm>
-          <a:prstGeom prst="ellipse">
-            <a:avLst/>
-          </a:prstGeom>
-          <a:solidFill>
-            <a:srgbClr val="E9EEF5"/>
-          </a:solidFill>
-          <a:ln w="12700">
-            <a:solidFill>
-              <a:srgbClr val="FFFFFF">
-                <a:alpha val="42000"/>
-              </a:srgbClr>
-            </a:solidFill>
-            <a:prstDash val="solid"/>
-          </a:ln>
-          <a:effectLst>
-            <a:outerShdw sx="100000" sy="100000" kx="0" ky="0" algn="bl" rotWithShape="0" blurRad="12700" dist="50800" dir="2700000">
-              <a:srgbClr val="B8C3D2">
-                <a:alpha val="18000"/>
-              </a:srgbClr>
-            </a:outerShdw>
-          </a:effectLst>
-        </p:spPr>
-      </p:sp>
-      <p:sp>
-        <p:nvSpPr>
-          <p:cNvPr id="4" name="Shape 2"/>
-          <p:cNvSpPr/>
-          <p:nvPr/>
-        </p:nvSpPr>
-        <p:spPr>
-          <a:xfrm>
-            <a:off x="731520" y="1207008"/>
-            <a:ext cx="1325880" cy="54864"/>
-          </a:xfrm>
-          <a:prstGeom prst="rect">
-            <a:avLst/>
-          </a:prstGeom>
-          <a:solidFill>
-            <a:srgbClr val="4F6F8F"/>
-          </a:solidFill>
-          <a:ln w="12700">
-            <a:solidFill>
-              <a:srgbClr val="4F6F8F">
-                <a:alpha val="0"/>
-              </a:srgbClr>
-            </a:solidFill>
-            <a:prstDash val="solid"/>
-          </a:ln>
-        </p:spPr>
-      </p:sp>
-      <p:sp>
-        <p:nvSpPr>
-          <p:cNvPr id="5" name="Shape 3"/>
-          <p:cNvSpPr/>
-          <p:nvPr/>
-        </p:nvSpPr>
-        <p:spPr>
-          <a:xfrm>
-            <a:off x="822960" y="1188720"/>
-            <a:ext cx="10515600" cy="45720"/>
-          </a:xfrm>
-          <a:prstGeom prst="rect">
-            <a:avLst/>
-          </a:prstGeom>
-          <a:solidFill>
-            <a:srgbClr val="4F6F8F"/>
-          </a:solidFill>
-          <a:ln w="12700">
-            <a:solidFill>
-              <a:srgbClr val="4F6F8F">
-                <a:alpha val="0"/>
-              </a:srgbClr>
-            </a:solidFill>
-            <a:prstDash val="solid"/>
-          </a:ln>
-        </p:spPr>
-      </p:sp>
-      <p:sp>
-        <p:nvSpPr>
-          <p:cNvPr id="6" name="Shape 4"/>
-          <p:cNvSpPr/>
-          <p:nvPr/>
-        </p:nvSpPr>
-        <p:spPr>
-          <a:xfrm>
-            <a:off x="822960" y="6199632"/>
-            <a:ext cx="2011680" cy="45720"/>
-          </a:xfrm>
-          <a:prstGeom prst="rect">
-            <a:avLst/>
-          </a:prstGeom>
-          <a:solidFill>
-            <a:srgbClr val="CBD5E1"/>
-          </a:solidFill>
-          <a:ln w="12700">
-            <a:solidFill>
-              <a:srgbClr val="CBD5E1">
-                <a:alpha val="0"/>
-              </a:srgbClr>
-            </a:solidFill>
-            <a:prstDash val="solid"/>
-          </a:ln>
-        </p:spPr>
-      </p:sp>
-      <p:sp>
-        <p:nvSpPr>
-          <p:cNvPr id="7" name="Shape 5"/>
-          <p:cNvSpPr/>
-          <p:nvPr/>
-        </p:nvSpPr>
-        <p:spPr>
-          <a:xfrm>
-            <a:off x="6080760" y="1389888"/>
-            <a:ext cx="22860" cy="4663440"/>
-          </a:xfrm>
-          <a:prstGeom prst="rect">
-            <a:avLst/>
-          </a:prstGeom>
-          <a:solidFill>
-            <a:srgbClr val="D5DCE7">
-              <a:alpha val="90000"/>
-            </a:srgbClr>
-          </a:solidFill>
-          <a:ln w="12700">
-            <a:solidFill>
-              <a:srgbClr val="D5DCE7">
-                <a:alpha val="0"/>
-              </a:srgbClr>
-            </a:solidFill>
-            <a:prstDash val="solid"/>
-          </a:ln>
-        </p:spPr>
-      </p:sp>
-      <p:sp>
-        <p:nvSpPr>
-          <p:cNvPr id="8" name="Shape 6"/>
-          <p:cNvSpPr/>
-          <p:nvPr/>
-        </p:nvSpPr>
-        <p:spPr>
-          <a:xfrm>
-            <a:off x="822960" y="1389888"/>
-            <a:ext cx="73152" cy="658368"/>
-          </a:xfrm>
-          <a:prstGeom prst="rect">
-            <a:avLst/>
-          </a:prstGeom>
-          <a:solidFill>
-            <a:srgbClr val="4F6F8F"/>
-          </a:solidFill>
-          <a:ln w="12700">
-            <a:solidFill>
-              <a:srgbClr val="4F6F8F">
-                <a:alpha val="0"/>
-              </a:srgbClr>
-            </a:solidFill>
-            <a:prstDash val="solid"/>
-          </a:ln>
-        </p:spPr>
-      </p:sp>
-      <p:sp>
-        <p:nvSpPr>
-          <p:cNvPr id="9" name="Shape 7"/>
-          <p:cNvSpPr/>
-          <p:nvPr/>
-        </p:nvSpPr>
-        <p:spPr>
-          <a:xfrm>
-            <a:off x="822960" y="2194560"/>
-            <a:ext cx="73152" cy="658368"/>
-          </a:xfrm>
-          <a:prstGeom prst="rect">
-            <a:avLst/>
-          </a:prstGeom>
-          <a:solidFill>
-            <a:srgbClr val="CBD5E1"/>
-          </a:solidFill>
-          <a:ln w="12700">
-            <a:solidFill>
-              <a:srgbClr val="CBD5E1">
-                <a:alpha val="0"/>
-              </a:srgbClr>
-            </a:solidFill>
-            <a:prstDash val="solid"/>
-          </a:ln>
-        </p:spPr>
-      </p:sp>
-      <p:sp>
-        <p:nvSpPr>
-          <p:cNvPr id="10" name="Shape 8"/>
-          <p:cNvSpPr/>
-          <p:nvPr/>
-        </p:nvSpPr>
-        <p:spPr>
-          <a:xfrm>
-            <a:off x="822960" y="2990088"/>
-            <a:ext cx="73152" cy="658368"/>
-          </a:xfrm>
-          <a:prstGeom prst="rect">
-            <a:avLst/>
-          </a:prstGeom>
-          <a:solidFill>
-            <a:srgbClr val="4F6F8F"/>
-          </a:solidFill>
-          <a:ln w="12700">
-            <a:solidFill>
-              <a:srgbClr val="4F6F8F">
-                <a:alpha val="0"/>
-              </a:srgbClr>
-            </a:solidFill>
-            <a:prstDash val="solid"/>
-          </a:ln>
-        </p:spPr>
-      </p:sp>
-      <p:sp>
-        <p:nvSpPr>
-          <p:cNvPr id="11" name="Shape 9"/>
-          <p:cNvSpPr/>
-          <p:nvPr/>
-        </p:nvSpPr>
-        <p:spPr>
-          <a:xfrm>
-            <a:off x="822960" y="3794760"/>
-            <a:ext cx="73152" cy="658368"/>
-          </a:xfrm>
-          <a:prstGeom prst="rect">
-            <a:avLst/>
-          </a:prstGeom>
-          <a:solidFill>
-            <a:srgbClr val="CBD5E1"/>
-          </a:solidFill>
-          <a:ln w="12700">
-            <a:solidFill>
-              <a:srgbClr val="CBD5E1">
-                <a:alpha val="0"/>
-              </a:srgbClr>
-            </a:solidFill>
-            <a:prstDash val="solid"/>
-          </a:ln>
-        </p:spPr>
-      </p:sp>
-      <p:sp>
-        <p:nvSpPr>
-          <p:cNvPr id="12" name="Shape 10"/>
-          <p:cNvSpPr/>
-          <p:nvPr/>
-        </p:nvSpPr>
-        <p:spPr>
-          <a:xfrm>
-            <a:off x="822960" y="4599432"/>
-            <a:ext cx="73152" cy="658368"/>
-          </a:xfrm>
-          <a:prstGeom prst="rect">
-            <a:avLst/>
-          </a:prstGeom>
-          <a:solidFill>
-            <a:srgbClr val="4F6F8F"/>
-          </a:solidFill>
-          <a:ln w="12700">
-            <a:solidFill>
-              <a:srgbClr val="4F6F8F">
-                <a:alpha val="0"/>
-              </a:srgbClr>
-            </a:solidFill>
-            <a:prstDash val="solid"/>
-          </a:ln>
-        </p:spPr>
-      </p:sp>
-      <p:sp>
-        <p:nvSpPr>
-          <p:cNvPr id="13" name="Shape 11"/>
-          <p:cNvSpPr/>
-          <p:nvPr/>
-        </p:nvSpPr>
-        <p:spPr>
-          <a:xfrm>
-            <a:off x="822960" y="5394960"/>
-            <a:ext cx="73152" cy="658368"/>
-          </a:xfrm>
-          <a:prstGeom prst="rect">
-            <a:avLst/>
-          </a:prstGeom>
-          <a:solidFill>
-            <a:srgbClr val="CBD5E1"/>
-          </a:solidFill>
-          <a:ln w="12700">
-            <a:solidFill>
-              <a:srgbClr val="CBD5E1">
-                <a:alpha val="0"/>
-              </a:srgbClr>
-            </a:solidFill>
-            <a:prstDash val="solid"/>
-          </a:ln>
-        </p:spPr>
-      </p:sp>
-      <p:sp>
-        <p:nvSpPr>
-          <p:cNvPr id="14" name="Shape 12"/>
-          <p:cNvSpPr/>
-          <p:nvPr/>
-        </p:nvSpPr>
-        <p:spPr>
-          <a:xfrm>
-            <a:off x="6272784" y="1389888"/>
-            <a:ext cx="73152" cy="658368"/>
-          </a:xfrm>
-          <a:prstGeom prst="rect">
-            <a:avLst/>
-          </a:prstGeom>
-          <a:solidFill>
-            <a:srgbClr val="4F6F8F"/>
-          </a:solidFill>
-          <a:ln w="12700">
-            <a:solidFill>
-              <a:srgbClr val="4F6F8F">
-                <a:alpha val="0"/>
-              </a:srgbClr>
-            </a:solidFill>
-            <a:prstDash val="solid"/>
-          </a:ln>
-        </p:spPr>
-      </p:sp>
-      <p:sp>
-        <p:nvSpPr>
-          <p:cNvPr id="15" name="Shape 13"/>
-          <p:cNvSpPr/>
-          <p:nvPr/>
-        </p:nvSpPr>
-        <p:spPr>
-          <a:xfrm>
-            <a:off x="6272784" y="2194560"/>
-            <a:ext cx="73152" cy="658368"/>
-          </a:xfrm>
-          <a:prstGeom prst="rect">
-            <a:avLst/>
-          </a:prstGeom>
-          <a:solidFill>
-            <a:srgbClr val="CBD5E1"/>
-          </a:solidFill>
-          <a:ln w="12700">
-            <a:solidFill>
-              <a:srgbClr val="CBD5E1">
-                <a:alpha val="0"/>
-              </a:srgbClr>
-            </a:solidFill>
-            <a:prstDash val="solid"/>
-          </a:ln>
-        </p:spPr>
-      </p:sp>
-      <p:sp>
-        <p:nvSpPr>
-          <p:cNvPr id="16" name="Shape 14"/>
-          <p:cNvSpPr/>
-          <p:nvPr/>
-        </p:nvSpPr>
-        <p:spPr>
-          <a:xfrm>
-            <a:off x="6272784" y="2990088"/>
-            <a:ext cx="73152" cy="658368"/>
-          </a:xfrm>
-          <a:prstGeom prst="rect">
-            <a:avLst/>
-          </a:prstGeom>
-          <a:solidFill>
-            <a:srgbClr val="4F6F8F"/>
-          </a:solidFill>
-          <a:ln w="12700">
-            <a:solidFill>
-              <a:srgbClr val="4F6F8F">
-                <a:alpha val="0"/>
-              </a:srgbClr>
-            </a:solidFill>
-            <a:prstDash val="solid"/>
-          </a:ln>
-        </p:spPr>
-      </p:sp>
-      <p:sp>
-        <p:nvSpPr>
-          <p:cNvPr id="17" name="Shape 15"/>
-          <p:cNvSpPr/>
-          <p:nvPr/>
-        </p:nvSpPr>
-        <p:spPr>
-          <a:xfrm>
-            <a:off x="6272784" y="3794760"/>
-            <a:ext cx="73152" cy="658368"/>
-          </a:xfrm>
-          <a:prstGeom prst="rect">
-            <a:avLst/>
-          </a:prstGeom>
-          <a:solidFill>
-            <a:srgbClr val="CBD5E1"/>
-          </a:solidFill>
-          <a:ln w="12700">
-            <a:solidFill>
-              <a:srgbClr val="CBD5E1">
-                <a:alpha val="0"/>
-              </a:srgbClr>
-            </a:solidFill>
-            <a:prstDash val="solid"/>
-          </a:ln>
-        </p:spPr>
-      </p:sp>
-      <p:sp>
-        <p:nvSpPr>
-          <p:cNvPr id="18" name="Shape 16"/>
-          <p:cNvSpPr/>
-          <p:nvPr/>
-        </p:nvSpPr>
-        <p:spPr>
-          <a:xfrm>
-            <a:off x="6272784" y="4599432"/>
-            <a:ext cx="73152" cy="658368"/>
-          </a:xfrm>
-          <a:prstGeom prst="rect">
-            <a:avLst/>
-          </a:prstGeom>
-          <a:solidFill>
-            <a:srgbClr val="4F6F8F"/>
-          </a:solidFill>
-          <a:ln w="12700">
-            <a:solidFill>
-              <a:srgbClr val="4F6F8F">
-                <a:alpha val="0"/>
-              </a:srgbClr>
-            </a:solidFill>
-            <a:prstDash val="solid"/>
-          </a:ln>
-        </p:spPr>
-      </p:sp>
-      <p:sp>
-        <p:nvSpPr>
-          <p:cNvPr id="19" name="Shape 17"/>
-          <p:cNvSpPr/>
-          <p:nvPr/>
-        </p:nvSpPr>
-        <p:spPr>
-          <a:xfrm>
-            <a:off x="6272784" y="5394960"/>
-            <a:ext cx="73152" cy="658368"/>
-          </a:xfrm>
-          <a:prstGeom prst="rect">
-            <a:avLst/>
-          </a:prstGeom>
-          <a:solidFill>
-            <a:srgbClr val="CBD5E1"/>
-          </a:solidFill>
-          <a:ln w="12700">
-            <a:solidFill>
-              <a:srgbClr val="CBD5E1">
-                <a:alpha val="0"/>
-              </a:srgbClr>
-            </a:solidFill>
-            <a:prstDash val="solid"/>
-          </a:ln>
-        </p:spPr>
-      </p:sp>
-      <p:sp>
-        <p:nvSpPr>
-          <p:cNvPr id="20" name="Text 18"/>
-          <p:cNvSpPr txBox="1"/>
-          <p:nvPr/>
-        </p:nvSpPr>
-        <p:spPr>
-          <a:xfrm>
-            <a:off x="731520" y="384048"/>
-            <a:ext cx="10698480" cy="822960"/>
-          </a:xfrm>
-          <a:prstGeom prst="rect">
-            <a:avLst/>
-          </a:prstGeom>
-          <a:noFill/>
-          <a:ln/>
-        </p:spPr>
-        <p:txBody>
-          <a:bodyPr wrap="square" lIns="0" tIns="0" rIns="0" bIns="0" rtlCol="0" anchor="ctr"/>
-          <a:lstStyle/>
-          <a:p>
-            <a:pPr algn="ctr" indent="0" marL="0">
-              <a:lnSpc>
-                <a:spcPct val="120000"/>
-              </a:lnSpc>
-              <a:buNone/>
-            </a:pPr>
-            <a:r>
-              <a:rPr lang="en-US" sz="3800" b="1" dirty="0">
-                <a:solidFill>
-                  <a:srgbClr val="243041"/>
-                </a:solidFill>
-                <a:latin typeface="Pretendard" pitchFamily="34" charset="0"/>
-                <a:ea typeface="Pretendard" pitchFamily="34" charset="-122"/>
-                <a:cs typeface="Pretendard" pitchFamily="34" charset="-120"/>
-              </a:rPr>
-              <a:t>Agenda</a:t>
-            </a:r>
-            <a:endParaRPr lang="en-US" sz="3800" dirty="0"/>
-          </a:p>
-        </p:txBody>
-      </p:sp>
-      <p:sp>
-        <p:nvSpPr>
-          <p:cNvPr id="21" name="Text 19"/>
-          <p:cNvSpPr txBox="1"/>
-          <p:nvPr/>
-        </p:nvSpPr>
-        <p:spPr>
-          <a:xfrm>
-            <a:off x="1042416" y="1481328"/>
-            <a:ext cx="4645152" cy="475488"/>
-          </a:xfrm>
-          <a:prstGeom prst="rect">
-            <a:avLst/>
-          </a:prstGeom>
-          <a:noFill/>
-          <a:ln/>
-        </p:spPr>
-        <p:txBody>
-          <a:bodyPr wrap="square" lIns="0" tIns="25400" rIns="25400" bIns="0" rtlCol="0" anchor="ctr"/>
-          <a:lstStyle/>
-          <a:p>
-            <a:pPr algn="ctr" indent="0" marL="0">
-              <a:lnSpc>
-                <a:spcPct val="120000"/>
-              </a:lnSpc>
-              <a:buNone/>
-            </a:pPr>
-            <a:r>
-              <a:rPr lang="en-US" sz="1800" dirty="0">
-                <a:solidFill>
-                  <a:srgbClr val="243041"/>
-                </a:solidFill>
-                <a:latin typeface="Pretendard" pitchFamily="34" charset="0"/>
-                <a:ea typeface="Pretendard" pitchFamily="34" charset="-122"/>
-                <a:cs typeface="Pretendard" pitchFamily="34" charset="-120"/>
-              </a:rPr>
-              <a:t>01  Preview Purpose</a:t>
-            </a:r>
-            <a:endParaRPr lang="en-US" sz="1800" dirty="0"/>
-          </a:p>
-        </p:txBody>
-      </p:sp>
-      <p:sp>
-        <p:nvSpPr>
-          <p:cNvPr id="22" name="Text 20"/>
-          <p:cNvSpPr txBox="1"/>
-          <p:nvPr/>
-        </p:nvSpPr>
-        <p:spPr>
-          <a:xfrm>
-            <a:off x="1042416" y="2286000"/>
-            <a:ext cx="4645152" cy="475488"/>
-          </a:xfrm>
-          <a:prstGeom prst="rect">
-            <a:avLst/>
-          </a:prstGeom>
-          <a:noFill/>
-          <a:ln/>
-        </p:spPr>
-        <p:txBody>
-          <a:bodyPr wrap="square" lIns="0" tIns="25400" rIns="25400" bIns="0" rtlCol="0" anchor="ctr"/>
-          <a:lstStyle/>
-          <a:p>
-            <a:pPr algn="ctr" indent="0" marL="0">
-              <a:lnSpc>
-                <a:spcPct val="120000"/>
-              </a:lnSpc>
-              <a:buNone/>
-            </a:pPr>
-            <a:r>
-              <a:rPr lang="en-US" sz="1800" dirty="0">
-                <a:solidFill>
-                  <a:srgbClr val="243041"/>
-                </a:solidFill>
-                <a:latin typeface="Pretendard" pitchFamily="34" charset="0"/>
-                <a:ea typeface="Pretendard" pitchFamily="34" charset="-122"/>
-                <a:cs typeface="Pretendard" pitchFamily="34" charset="-120"/>
-              </a:rPr>
-              <a:t>02  Composition Contract</a:t>
-            </a:r>
-            <a:endParaRPr lang="en-US" sz="1800" dirty="0"/>
-          </a:p>
-        </p:txBody>
-      </p:sp>
-      <p:sp>
-        <p:nvSpPr>
-          <p:cNvPr id="23" name="Text 21"/>
-          <p:cNvSpPr txBox="1"/>
-          <p:nvPr/>
-        </p:nvSpPr>
-        <p:spPr>
-          <a:xfrm>
-            <a:off x="1042416" y="3081528"/>
-            <a:ext cx="4645152" cy="475488"/>
-          </a:xfrm>
-          <a:prstGeom prst="rect">
-            <a:avLst/>
-          </a:prstGeom>
-          <a:noFill/>
-          <a:ln/>
-        </p:spPr>
-        <p:txBody>
-          <a:bodyPr wrap="square" lIns="0" tIns="25400" rIns="25400" bIns="0" rtlCol="0" anchor="ctr"/>
-          <a:lstStyle/>
-          <a:p>
-            <a:pPr algn="ctr" indent="0" marL="0">
-              <a:lnSpc>
-                <a:spcPct val="120000"/>
-              </a:lnSpc>
-              <a:buNone/>
-            </a:pPr>
-            <a:r>
-              <a:rPr lang="en-US" sz="1800" dirty="0">
-                <a:solidFill>
-                  <a:srgbClr val="243041"/>
-                </a:solidFill>
-                <a:latin typeface="Pretendard" pitchFamily="34" charset="0"/>
-                <a:ea typeface="Pretendard" pitchFamily="34" charset="-122"/>
-                <a:cs typeface="Pretendard" pitchFamily="34" charset="-120"/>
-              </a:rPr>
-              <a:t>03  Style Families</a:t>
-            </a:r>
-            <a:endParaRPr lang="en-US" sz="1800" dirty="0"/>
-          </a:p>
-        </p:txBody>
-      </p:sp>
-      <p:sp>
-        <p:nvSpPr>
-          <p:cNvPr id="24" name="Text 22"/>
-          <p:cNvSpPr txBox="1"/>
-          <p:nvPr/>
-        </p:nvSpPr>
-        <p:spPr>
-          <a:xfrm>
-            <a:off x="1042416" y="3886200"/>
-            <a:ext cx="4645152" cy="475488"/>
-          </a:xfrm>
-          <a:prstGeom prst="rect">
-            <a:avLst/>
-          </a:prstGeom>
-          <a:noFill/>
-          <a:ln/>
-        </p:spPr>
-        <p:txBody>
-          <a:bodyPr wrap="square" lIns="0" tIns="25400" rIns="25400" bIns="0" rtlCol="0" anchor="ctr"/>
-          <a:lstStyle/>
-          <a:p>
-            <a:pPr algn="ctr" indent="0" marL="0">
-              <a:lnSpc>
-                <a:spcPct val="120000"/>
-              </a:lnSpc>
-              <a:buNone/>
-            </a:pPr>
-            <a:r>
-              <a:rPr lang="en-US" sz="1800" dirty="0">
-                <a:solidFill>
-                  <a:srgbClr val="243041"/>
-                </a:solidFill>
-                <a:latin typeface="Pretendard" pitchFamily="34" charset="0"/>
-                <a:ea typeface="Pretendard" pitchFamily="34" charset="-122"/>
-                <a:cs typeface="Pretendard" pitchFamily="34" charset="-120"/>
-              </a:rPr>
-              <a:t>04  Semantic Blocks</a:t>
-            </a:r>
-            <a:endParaRPr lang="en-US" sz="1800" dirty="0"/>
-          </a:p>
-        </p:txBody>
-      </p:sp>
-      <p:sp>
-        <p:nvSpPr>
-          <p:cNvPr id="25" name="Text 23"/>
-          <p:cNvSpPr txBox="1"/>
-          <p:nvPr/>
-        </p:nvSpPr>
-        <p:spPr>
-          <a:xfrm>
-            <a:off x="1042416" y="4690872"/>
-            <a:ext cx="4645152" cy="475488"/>
-          </a:xfrm>
-          <a:prstGeom prst="rect">
-            <a:avLst/>
-          </a:prstGeom>
-          <a:noFill/>
-          <a:ln/>
-        </p:spPr>
-        <p:txBody>
-          <a:bodyPr wrap="square" lIns="0" tIns="25400" rIns="25400" bIns="0" rtlCol="0" anchor="ctr"/>
-          <a:lstStyle/>
-          <a:p>
-            <a:pPr algn="ctr" indent="0" marL="0">
-              <a:lnSpc>
-                <a:spcPct val="120000"/>
-              </a:lnSpc>
-              <a:buNone/>
-            </a:pPr>
-            <a:r>
-              <a:rPr lang="en-US" sz="1800" dirty="0">
-                <a:solidFill>
-                  <a:srgbClr val="243041"/>
-                </a:solidFill>
-                <a:latin typeface="Pretendard" pitchFamily="34" charset="0"/>
-                <a:ea typeface="Pretendard" pitchFamily="34" charset="-122"/>
-                <a:cs typeface="Pretendard" pitchFamily="34" charset="-120"/>
-              </a:rPr>
-              <a:t>05  Pipeline Diagram</a:t>
-            </a:r>
-            <a:endParaRPr lang="en-US" sz="1800" dirty="0"/>
-          </a:p>
-        </p:txBody>
-      </p:sp>
-      <p:sp>
-        <p:nvSpPr>
-          <p:cNvPr id="26" name="Text 24"/>
-          <p:cNvSpPr txBox="1"/>
-          <p:nvPr/>
-        </p:nvSpPr>
-        <p:spPr>
-          <a:xfrm>
-            <a:off x="1042416" y="5486400"/>
-            <a:ext cx="4645152" cy="475488"/>
-          </a:xfrm>
-          <a:prstGeom prst="rect">
-            <a:avLst/>
-          </a:prstGeom>
-          <a:noFill/>
-          <a:ln/>
-        </p:spPr>
-        <p:txBody>
-          <a:bodyPr wrap="square" lIns="0" tIns="25400" rIns="25400" bIns="0" rtlCol="0" anchor="ctr"/>
-          <a:lstStyle/>
-          <a:p>
-            <a:pPr algn="ctr" indent="0" marL="0">
-              <a:lnSpc>
-                <a:spcPct val="120000"/>
-              </a:lnSpc>
-              <a:buNone/>
-            </a:pPr>
-            <a:r>
-              <a:rPr lang="en-US" sz="1800" dirty="0">
-                <a:solidFill>
-                  <a:srgbClr val="243041"/>
-                </a:solidFill>
-                <a:latin typeface="Pretendard" pitchFamily="34" charset="0"/>
-                <a:ea typeface="Pretendard" pitchFamily="34" charset="-122"/>
-                <a:cs typeface="Pretendard" pitchFamily="34" charset="-120"/>
-              </a:rPr>
-              <a:t>06  Table Coherence</a:t>
-            </a:r>
-            <a:endParaRPr lang="en-US" sz="1800" dirty="0"/>
-          </a:p>
-        </p:txBody>
-      </p:sp>
-      <p:sp>
-        <p:nvSpPr>
-          <p:cNvPr id="27" name="Text 25"/>
-          <p:cNvSpPr txBox="1"/>
-          <p:nvPr/>
-        </p:nvSpPr>
-        <p:spPr>
-          <a:xfrm>
-            <a:off x="6492240" y="1481328"/>
-            <a:ext cx="4645152" cy="475488"/>
-          </a:xfrm>
-          <a:prstGeom prst="rect">
-            <a:avLst/>
-          </a:prstGeom>
-          <a:noFill/>
-          <a:ln/>
-        </p:spPr>
-        <p:txBody>
-          <a:bodyPr wrap="square" lIns="0" tIns="25400" rIns="25400" bIns="0" rtlCol="0" anchor="ctr"/>
-          <a:lstStyle/>
-          <a:p>
-            <a:pPr algn="ctr" indent="0" marL="0">
-              <a:lnSpc>
-                <a:spcPct val="120000"/>
-              </a:lnSpc>
-              <a:buNone/>
-            </a:pPr>
-            <a:r>
-              <a:rPr lang="en-US" sz="1800" dirty="0">
-                <a:solidFill>
-                  <a:srgbClr val="243041"/>
-                </a:solidFill>
-                <a:latin typeface="Pretendard" pitchFamily="34" charset="0"/>
-                <a:ea typeface="Pretendard" pitchFamily="34" charset="-122"/>
-                <a:cs typeface="Pretendard" pitchFamily="34" charset="-120"/>
-              </a:rPr>
-              <a:t>07  Chart and Table Pair</a:t>
-            </a:r>
-            <a:endParaRPr lang="en-US" sz="1800" dirty="0"/>
-          </a:p>
-        </p:txBody>
-      </p:sp>
-      <p:sp>
-        <p:nvSpPr>
-          <p:cNvPr id="28" name="Text 26"/>
-          <p:cNvSpPr txBox="1"/>
-          <p:nvPr/>
-        </p:nvSpPr>
-        <p:spPr>
-          <a:xfrm>
-            <a:off x="6492240" y="2286000"/>
-            <a:ext cx="4645152" cy="475488"/>
-          </a:xfrm>
-          <a:prstGeom prst="rect">
-            <a:avLst/>
-          </a:prstGeom>
-          <a:noFill/>
-          <a:ln/>
-        </p:spPr>
-        <p:txBody>
-          <a:bodyPr wrap="square" lIns="0" tIns="25400" rIns="25400" bIns="0" rtlCol="0" anchor="ctr"/>
-          <a:lstStyle/>
-          <a:p>
-            <a:pPr algn="ctr" indent="0" marL="0">
-              <a:lnSpc>
-                <a:spcPct val="120000"/>
-              </a:lnSpc>
-              <a:buNone/>
-            </a:pPr>
-            <a:r>
-              <a:rPr lang="en-US" sz="1800" dirty="0">
-                <a:solidFill>
-                  <a:srgbClr val="243041"/>
-                </a:solidFill>
-                <a:latin typeface="Pretendard" pitchFamily="34" charset="0"/>
-                <a:ea typeface="Pretendard" pitchFamily="34" charset="-122"/>
-                <a:cs typeface="Pretendard" pitchFamily="34" charset="-120"/>
-              </a:rPr>
-              <a:t>08  Editable Proof Objects</a:t>
-            </a:r>
-            <a:endParaRPr lang="en-US" sz="1800" dirty="0"/>
-          </a:p>
-        </p:txBody>
-      </p:sp>
-      <p:sp>
-        <p:nvSpPr>
-          <p:cNvPr id="29" name="Text 27"/>
-          <p:cNvSpPr txBox="1"/>
-          <p:nvPr/>
-        </p:nvSpPr>
-        <p:spPr>
-          <a:xfrm>
-            <a:off x="6492240" y="3081528"/>
-            <a:ext cx="4645152" cy="475488"/>
-          </a:xfrm>
-          <a:prstGeom prst="rect">
-            <a:avLst/>
-          </a:prstGeom>
-          <a:noFill/>
-          <a:ln/>
-        </p:spPr>
-        <p:txBody>
-          <a:bodyPr wrap="square" lIns="0" tIns="25400" rIns="25400" bIns="0" rtlCol="0" anchor="ctr"/>
-          <a:lstStyle/>
-          <a:p>
-            <a:pPr algn="ctr" indent="0" marL="0">
-              <a:lnSpc>
-                <a:spcPct val="120000"/>
-              </a:lnSpc>
-              <a:buNone/>
-            </a:pPr>
-            <a:r>
-              <a:rPr lang="en-US" sz="1800" dirty="0">
-                <a:solidFill>
-                  <a:srgbClr val="243041"/>
-                </a:solidFill>
-                <a:latin typeface="Pretendard" pitchFamily="34" charset="0"/>
-                <a:ea typeface="Pretendard" pitchFamily="34" charset="-122"/>
-                <a:cs typeface="Pretendard" pitchFamily="34" charset="-120"/>
-              </a:rPr>
-              <a:t>09  Object Shape Grammar</a:t>
-            </a:r>
-            <a:endParaRPr lang="en-US" sz="1800" dirty="0"/>
-          </a:p>
-        </p:txBody>
-      </p:sp>
-      <p:sp>
-        <p:nvSpPr>
-          <p:cNvPr id="30" name="Text 28"/>
-          <p:cNvSpPr txBox="1"/>
-          <p:nvPr/>
-        </p:nvSpPr>
-        <p:spPr>
-          <a:xfrm>
-            <a:off x="6492240" y="3886200"/>
-            <a:ext cx="4645152" cy="475488"/>
-          </a:xfrm>
-          <a:prstGeom prst="rect">
-            <a:avLst/>
-          </a:prstGeom>
-          <a:noFill/>
-          <a:ln/>
-        </p:spPr>
-        <p:txBody>
-          <a:bodyPr wrap="square" lIns="0" tIns="25400" rIns="25400" bIns="0" rtlCol="0" anchor="ctr"/>
-          <a:lstStyle/>
-          <a:p>
-            <a:pPr algn="ctr" indent="0" marL="0">
-              <a:lnSpc>
-                <a:spcPct val="120000"/>
-              </a:lnSpc>
-              <a:buNone/>
-            </a:pPr>
-            <a:r>
-              <a:rPr lang="en-US" sz="1800" dirty="0">
-                <a:solidFill>
-                  <a:srgbClr val="243041"/>
-                </a:solidFill>
-                <a:latin typeface="Pretendard" pitchFamily="34" charset="0"/>
-                <a:ea typeface="Pretendard" pitchFamily="34" charset="-122"/>
-                <a:cs typeface="Pretendard" pitchFamily="34" charset="-120"/>
-              </a:rPr>
-              <a:t>10  Icon and Text Aside</a:t>
-            </a:r>
-            <a:endParaRPr lang="en-US" sz="1800" dirty="0"/>
-          </a:p>
-        </p:txBody>
-      </p:sp>
-      <p:sp>
-        <p:nvSpPr>
-          <p:cNvPr id="31" name="Text 29"/>
-          <p:cNvSpPr txBox="1"/>
-          <p:nvPr/>
-        </p:nvSpPr>
-        <p:spPr>
-          <a:xfrm>
-            <a:off x="6492240" y="4690872"/>
-            <a:ext cx="4645152" cy="475488"/>
-          </a:xfrm>
-          <a:prstGeom prst="rect">
-            <a:avLst/>
-          </a:prstGeom>
-          <a:noFill/>
-          <a:ln/>
-        </p:spPr>
-        <p:txBody>
-          <a:bodyPr wrap="square" lIns="0" tIns="25400" rIns="25400" bIns="0" rtlCol="0" anchor="ctr"/>
-          <a:lstStyle/>
-          <a:p>
-            <a:pPr algn="ctr" indent="0" marL="0">
-              <a:lnSpc>
-                <a:spcPct val="120000"/>
-              </a:lnSpc>
-              <a:buNone/>
-            </a:pPr>
-            <a:r>
-              <a:rPr lang="en-US" sz="1800" dirty="0">
-                <a:solidFill>
-                  <a:srgbClr val="243041"/>
-                </a:solidFill>
-                <a:latin typeface="Pretendard" pitchFamily="34" charset="0"/>
-                <a:ea typeface="Pretendard" pitchFamily="34" charset="-122"/>
-                <a:cs typeface="Pretendard" pitchFamily="34" charset="-120"/>
-              </a:rPr>
-              <a:t>11  Overflow Guard</a:t>
-            </a:r>
-            <a:endParaRPr lang="en-US" sz="1800" dirty="0"/>
-          </a:p>
-        </p:txBody>
-      </p:sp>
-      <p:sp>
-        <p:nvSpPr>
-          <p:cNvPr id="32" name="Text 30"/>
-          <p:cNvSpPr txBox="1"/>
-          <p:nvPr/>
-        </p:nvSpPr>
-        <p:spPr>
-          <a:xfrm>
-            <a:off x="6492240" y="5486400"/>
-            <a:ext cx="4645152" cy="475488"/>
-          </a:xfrm>
-          <a:prstGeom prst="rect">
-            <a:avLst/>
-          </a:prstGeom>
-          <a:noFill/>
-          <a:ln/>
-        </p:spPr>
-        <p:txBody>
-          <a:bodyPr wrap="square" lIns="0" tIns="25400" rIns="25400" bIns="0" rtlCol="0" anchor="ctr"/>
-          <a:lstStyle/>
-          <a:p>
-            <a:pPr algn="ctr" indent="0" marL="0">
-              <a:lnSpc>
-                <a:spcPct val="120000"/>
-              </a:lnSpc>
-              <a:buNone/>
-            </a:pPr>
-            <a:r>
-              <a:rPr lang="en-US" sz="1800" dirty="0">
-                <a:solidFill>
-                  <a:srgbClr val="243041"/>
-                </a:solidFill>
-                <a:latin typeface="Pretendard" pitchFamily="34" charset="0"/>
-                <a:ea typeface="Pretendard" pitchFamily="34" charset="-122"/>
-                <a:cs typeface="Pretendard" pitchFamily="34" charset="-120"/>
-              </a:rPr>
-              <a:t>12  Actions Output Review</a:t>
-            </a:r>
-            <a:endParaRPr lang="en-US" sz="1800" dirty="0"/>
-          </a:p>
-        </p:txBody>
-      </p:sp>
-    </p:spTree>
-  </p:cSld>
-  <p:clrMapOvr>
-    <a:masterClrMapping/>
-  </p:clrMapOvr>
-</p:sld>
-</file>
-
 <file path=ppt/slides/slide3.xml><?xml version="1.0" encoding="utf-8"?>
 <p:sld xmlns:a="http://schemas.openxmlformats.org/drawingml/2006/main" xmlns:r="http://schemas.openxmlformats.org/officeDocument/2006/relationships" xmlns:p="http://schemas.openxmlformats.org/presentationml/2006/main">
   <p:cSld name="Slide 3">
@@ -13443,8 +18033,8 @@
         </p:nvSpPr>
         <p:spPr>
           <a:xfrm>
-            <a:off x="914400" y="3063240"/>
-            <a:ext cx="10241280" cy="73152"/>
+            <a:off x="822960" y="3099816"/>
+            <a:ext cx="10515600" cy="45720"/>
           </a:xfrm>
           <a:prstGeom prst="rect">
             <a:avLst/>
@@ -13470,34 +18060,23 @@
         </p:nvSpPr>
         <p:spPr>
           <a:xfrm>
-            <a:off x="955548" y="1467612"/>
-            <a:ext cx="10241280" cy="1325880"/>
-          </a:xfrm>
-          <a:prstGeom prst="roundRect">
-            <a:avLst>
-              <a:gd name="adj" fmla="val 4138"/>
-            </a:avLst>
-          </a:prstGeom>
-          <a:solidFill>
-            <a:srgbClr val="B8C3D2">
-              <a:alpha val="26000"/>
-            </a:srgbClr>
-          </a:solidFill>
-          <a:ln w="12700">
-            <a:solidFill>
-              <a:srgbClr val="D5DCE7">
+            <a:off x="822960" y="4288536"/>
+            <a:ext cx="2011680" cy="45720"/>
+          </a:xfrm>
+          <a:prstGeom prst="rect">
+            <a:avLst/>
+          </a:prstGeom>
+          <a:solidFill>
+            <a:srgbClr val="CBD5E1"/>
+          </a:solidFill>
+          <a:ln w="12700">
+            <a:solidFill>
+              <a:srgbClr val="CBD5E1">
                 <a:alpha val="0"/>
               </a:srgbClr>
             </a:solidFill>
             <a:prstDash val="solid"/>
           </a:ln>
-          <a:effectLst>
-            <a:outerShdw sx="100000" sy="100000" kx="0" ky="0" algn="bl" rotWithShape="0" blurRad="13970" dist="50800" dir="2700000">
-              <a:srgbClr val="AAB5C4">
-                <a:alpha val="20000"/>
-              </a:srgbClr>
-            </a:outerShdw>
-          </a:effectLst>
         </p:spPr>
       </p:sp>
       <p:sp>
@@ -13508,112 +18087,11 @@
         </p:nvSpPr>
         <p:spPr>
           <a:xfrm>
-            <a:off x="882396" y="1385316"/>
-            <a:ext cx="10241280" cy="1325880"/>
-          </a:xfrm>
-          <a:prstGeom prst="roundRect">
-            <a:avLst>
-              <a:gd name="adj" fmla="val 4138"/>
-            </a:avLst>
-          </a:prstGeom>
-          <a:solidFill>
-            <a:srgbClr val="FFFFFF">
-              <a:alpha val="42000"/>
-            </a:srgbClr>
-          </a:solidFill>
-          <a:ln w="12700">
-            <a:solidFill>
-              <a:srgbClr val="FFFFFF">
-                <a:alpha val="0"/>
-              </a:srgbClr>
-            </a:solidFill>
-            <a:prstDash val="solid"/>
-          </a:ln>
-          <a:effectLst>
-            <a:outerShdw sx="100000" sy="100000" kx="0" ky="0" algn="bl" rotWithShape="0" blurRad="10160" dist="50800" dir="13500000">
-              <a:srgbClr val="FFFFFF">
-                <a:alpha val="36000"/>
-              </a:srgbClr>
-            </a:outerShdw>
-          </a:effectLst>
-        </p:spPr>
-      </p:sp>
-      <p:sp>
-        <p:nvSpPr>
-          <p:cNvPr id="8" name="Shape 6"/>
-          <p:cNvSpPr/>
-          <p:nvPr/>
-        </p:nvSpPr>
-        <p:spPr>
-          <a:xfrm>
-            <a:off x="914400" y="1417320"/>
-            <a:ext cx="10241280" cy="1325880"/>
-          </a:xfrm>
-          <a:prstGeom prst="roundRect">
-            <a:avLst>
-              <a:gd name="adj" fmla="val 4138"/>
-            </a:avLst>
-          </a:prstGeom>
-          <a:solidFill>
-            <a:srgbClr val="E9EEF5">
-              <a:alpha val="6000"/>
-            </a:srgbClr>
-          </a:solidFill>
-          <a:ln w="12700">
-            <a:solidFill>
-              <a:srgbClr val="FFFFFF">
-                <a:alpha val="28000"/>
-              </a:srgbClr>
-            </a:solidFill>
-            <a:prstDash val="solid"/>
-          </a:ln>
-        </p:spPr>
-      </p:sp>
-      <p:pic>
-        <p:nvPicPr>
-          <p:cNvPr id="9" name="Image 0" descr="preencoded.png">    </p:cNvPr>
-          <p:cNvPicPr>
-            <a:picLocks noChangeAspect="1"/>
-          </p:cNvPicPr>
-          <p:nvPr/>
-        </p:nvPicPr>
-        <p:blipFill>
-          <a:blip r:embed="rId1">
-            <a:extLst>
-              <a:ext uri="{96DAC541-7B7A-43D3-8B79-37D633B846F1}">
-                <asvg:svgBlip xmlns:asvg="http://schemas.microsoft.com/office/drawing/2016/SVG/main" r:embed="rId2"/>
-              </a:ext>
-            </a:extLst>
-          </a:blip>
-          <a:stretch>
-            <a:fillRect/>
-          </a:stretch>
-        </p:blipFill>
-        <p:spPr>
-          <a:xfrm>
-            <a:off x="914400" y="1417320"/>
-            <a:ext cx="10241280" cy="1325880"/>
-          </a:xfrm>
-          <a:prstGeom prst="rect">
-            <a:avLst/>
-          </a:prstGeom>
-        </p:spPr>
-      </p:pic>
-      <p:sp>
-        <p:nvSpPr>
-          <p:cNvPr id="10" name="Shape 7"/>
-          <p:cNvSpPr/>
-          <p:nvPr/>
-        </p:nvSpPr>
-        <p:spPr>
-          <a:xfrm>
-            <a:off x="1046988" y="1549908"/>
-            <a:ext cx="73152" cy="1060704"/>
-          </a:xfrm>
-          <a:prstGeom prst="roundRect">
-            <a:avLst>
-              <a:gd name="adj" fmla="val 25000"/>
-            </a:avLst>
+            <a:off x="822960" y="3300984"/>
+            <a:ext cx="73152" cy="841248"/>
+          </a:xfrm>
+          <a:prstGeom prst="rect">
+            <a:avLst/>
           </a:prstGeom>
           <a:solidFill>
             <a:srgbClr val="4F6F8F"/>
@@ -13630,14 +18108,14 @@
       </p:sp>
       <p:sp>
         <p:nvSpPr>
-          <p:cNvPr id="11" name="Text 8"/>
+          <p:cNvPr id="8" name="Text 6"/>
           <p:cNvSpPr txBox="1"/>
           <p:nvPr/>
         </p:nvSpPr>
         <p:spPr>
           <a:xfrm>
-            <a:off x="731520" y="457200"/>
-            <a:ext cx="10698480" cy="731520"/>
+            <a:off x="731520" y="384048"/>
+            <a:ext cx="10698480" cy="822960"/>
           </a:xfrm>
           <a:prstGeom prst="rect">
             <a:avLst/>
@@ -13656,7 +18134,7 @@
               <a:buNone/>
             </a:pPr>
             <a:r>
-              <a:rPr lang="en-US" sz="3400" b="1" dirty="0">
+              <a:rPr lang="en-US" sz="3800" b="1" dirty="0">
                 <a:solidFill>
                   <a:srgbClr val="243041"/>
                 </a:solidFill>
@@ -13664,22 +18142,22 @@
                 <a:ea typeface="Pretendard" pitchFamily="34" charset="-122"/>
                 <a:cs typeface="Pretendard" pitchFamily="34" charset="-120"/>
               </a:rPr>
-              <a:t>Preview Purpose</a:t>
+              <a:t>Agenda (Cont. 2/2)</a:t>
             </a:r>
-            <a:endParaRPr lang="en-US" sz="3400" dirty="0"/>
+            <a:endParaRPr lang="en-US" sz="3800" dirty="0"/>
           </a:p>
         </p:txBody>
       </p:sp>
       <p:sp>
         <p:nvSpPr>
-          <p:cNvPr id="12" name="Text 9"/>
+          <p:cNvPr id="9" name="Text 7"/>
           <p:cNvSpPr txBox="1"/>
           <p:nvPr/>
         </p:nvSpPr>
         <p:spPr>
           <a:xfrm>
-            <a:off x="1298448" y="1545336"/>
-            <a:ext cx="9637776" cy="1069848"/>
+            <a:off x="1042416" y="3392424"/>
+            <a:ext cx="10094976" cy="658368"/>
           </a:xfrm>
           <a:prstGeom prst="rect">
             <a:avLst/>
@@ -13688,69 +18166,10 @@
           <a:ln/>
         </p:spPr>
         <p:txBody>
-          <a:bodyPr wrap="square" lIns="0" tIns="0" rIns="0" bIns="0" rtlCol="0" anchor="ctr"/>
+          <a:bodyPr wrap="square" lIns="0" tIns="25400" rIns="25400" bIns="0" rtlCol="0" anchor="ctr"/>
           <a:lstStyle/>
           <a:p>
-            <a:pPr algn="l" indent="0" marL="0">
-              <a:lnSpc>
-                <a:spcPct val="120000"/>
-              </a:lnSpc>
-              <a:buNone/>
-            </a:pPr>
-            <a:r>
-              <a:rPr lang="en-US" sz="2200" b="1" dirty="0">
-                <a:solidFill>
-                  <a:srgbClr val="243041"/>
-                </a:solidFill>
-                <a:latin typeface="Pretendard" pitchFamily="34" charset="0"/>
-                <a:ea typeface="Pretendard" pitchFamily="34" charset="-122"/>
-                <a:cs typeface="Pretendard" pitchFamily="34" charset="-120"/>
-              </a:rPr>
-              <a:t>Generated decks must prove hierarchy, evidence, and object grammar before decoration.</a:t>
-            </a:r>
-            <a:endParaRPr lang="en-US" sz="2200" dirty="0"/>
-          </a:p>
-        </p:txBody>
-      </p:sp>
-      <p:sp>
-        <p:nvSpPr>
-          <p:cNvPr id="13" name="Text 10"/>
-          <p:cNvSpPr txBox="1"/>
-          <p:nvPr/>
-        </p:nvSpPr>
-        <p:spPr>
-          <a:xfrm>
-            <a:off x="987552" y="3172968"/>
-            <a:ext cx="10094976" cy="2478024"/>
-          </a:xfrm>
-          <a:prstGeom prst="rect">
-            <a:avLst/>
-          </a:prstGeom>
-          <a:noFill/>
-          <a:ln/>
-        </p:spPr>
-        <p:txBody>
-          <a:bodyPr wrap="square" lIns="0" tIns="25400" rIns="25400" bIns="0" rtlCol="0" anchor="t"/>
-          <a:lstStyle/>
-          <a:p>
-            <a:pPr algn="l" indent="0" marL="0">
-              <a:lnSpc>
-                <a:spcPct val="120000"/>
-              </a:lnSpc>
-              <a:buNone/>
-            </a:pPr>
-            <a:r>
-              <a:rPr lang="en-US" sz="2200" b="1" dirty="0">
-                <a:solidFill>
-                  <a:srgbClr val="4F6F8F"/>
-                </a:solidFill>
-                <a:latin typeface="Pretendard" pitchFamily="34" charset="0"/>
-                <a:ea typeface="Pretendard" pitchFamily="34" charset="-122"/>
-                <a:cs typeface="Pretendard" pitchFamily="34" charset="-120"/>
-              </a:rPr>
-              <a:t>- Fixture type</a:t>
-            </a:r>
-            <a:pPr algn="l" indent="0" marL="0">
+            <a:pPr algn="ctr" indent="0" marL="0">
               <a:lnSpc>
                 <a:spcPct val="120000"/>
               </a:lnSpc>
@@ -13765,87 +18184,7 @@
                 <a:ea typeface="Pretendard" pitchFamily="34" charset="-122"/>
                 <a:cs typeface="Pretendard" pitchFamily="34" charset="-120"/>
               </a:rPr>
-              <a:t>  Actions theme preview source.</a:t>
-            </a:r>
-            <a:endParaRPr lang="en-US" sz="2200" dirty="0"/>
-          </a:p>
-          <a:p>
-            <a:pPr algn="l" indent="0" marL="0">
-              <a:lnSpc>
-                <a:spcPct val="120000"/>
-              </a:lnSpc>
-              <a:buNone/>
-            </a:pPr>
-            <a:r>
-              <a:rPr lang="en-US" sz="2200" b="1" dirty="0">
-                <a:solidFill>
-                  <a:srgbClr val="4F6F8F"/>
-                </a:solidFill>
-                <a:latin typeface="Pretendard" pitchFamily="34" charset="0"/>
-                <a:ea typeface="Pretendard" pitchFamily="34" charset="-122"/>
-                <a:cs typeface="Pretendard" pitchFamily="34" charset="-120"/>
-              </a:rPr>
-              <a:t>- Source shape</a:t>
-            </a:r>
-            <a:endParaRPr lang="en-US" sz="2200" dirty="0"/>
-          </a:p>
-          <a:p>
-            <a:pPr algn="l" indent="0" marL="0">
-              <a:lnSpc>
-                <a:spcPct val="120000"/>
-              </a:lnSpc>
-              <a:buNone/>
-            </a:pPr>
-            <a:r>
-              <a:rPr lang="en-US" sz="2200" dirty="0">
-                <a:solidFill>
-                  <a:srgbClr val="243041"/>
-                </a:solidFill>
-                <a:latin typeface="Pretendard" pitchFamily="34" charset="0"/>
-                <a:ea typeface="Pretendard" pitchFamily="34" charset="-122"/>
-                <a:cs typeface="Pretendard" pitchFamily="34" charset="-120"/>
-              </a:rPr>
-              <a:t>  short bullets, bounded tables, and one-slide diagrams.</a:t>
-            </a:r>
-            <a:endParaRPr lang="en-US" sz="2200" dirty="0"/>
-          </a:p>
-          <a:p>
-            <a:pPr algn="l" indent="0" marL="0">
-              <a:lnSpc>
-                <a:spcPct val="120000"/>
-              </a:lnSpc>
-              <a:buNone/>
-            </a:pPr>
-            <a:r>
-              <a:rPr lang="en-US" sz="2200" b="1" dirty="0">
-                <a:solidFill>
-                  <a:srgbClr val="4F6F8F"/>
-                </a:solidFill>
-                <a:latin typeface="Pretendard" pitchFamily="34" charset="0"/>
-                <a:ea typeface="Pretendard" pitchFamily="34" charset="-122"/>
-                <a:cs typeface="Pretendard" pitchFamily="34" charset="-120"/>
-              </a:rPr>
-              <a:t>- Review target</a:t>
-            </a:r>
-            <a:endParaRPr lang="en-US" sz="2200" dirty="0"/>
-          </a:p>
-          <a:p>
-            <a:pPr algn="l" indent="0" marL="0">
-              <a:lnSpc>
-                <a:spcPct val="120000"/>
-              </a:lnSpc>
-              <a:buNone/>
-            </a:pPr>
-            <a:r>
-              <a:rPr lang="en-US" sz="2200" dirty="0">
-                <a:solidFill>
-                  <a:srgbClr val="243041"/>
-                </a:solidFill>
-                <a:latin typeface="Pretendard" pitchFamily="34" charset="0"/>
-                <a:ea typeface="Pretendard" pitchFamily="34" charset="-122"/>
-                <a:cs typeface="Pretendard" pitchFamily="34" charset="-120"/>
-              </a:rPr>
-              <a:t>  readable, coherent, composition-aware output.</a:t>
+              <a:t>01  Actions Output Review</a:t>
             </a:r>
             <a:endParaRPr lang="en-US" sz="2200" dirty="0"/>
           </a:p>
@@ -13988,6 +18327,591 @@
         </p:nvSpPr>
         <p:spPr>
           <a:xfrm>
+            <a:off x="914400" y="3063240"/>
+            <a:ext cx="10241280" cy="73152"/>
+          </a:xfrm>
+          <a:prstGeom prst="rect">
+            <a:avLst/>
+          </a:prstGeom>
+          <a:solidFill>
+            <a:srgbClr val="4F6F8F"/>
+          </a:solidFill>
+          <a:ln w="12700">
+            <a:solidFill>
+              <a:srgbClr val="4F6F8F">
+                <a:alpha val="0"/>
+              </a:srgbClr>
+            </a:solidFill>
+            <a:prstDash val="solid"/>
+          </a:ln>
+        </p:spPr>
+      </p:sp>
+      <p:sp>
+        <p:nvSpPr>
+          <p:cNvPr id="6" name="Shape 4"/>
+          <p:cNvSpPr/>
+          <p:nvPr/>
+        </p:nvSpPr>
+        <p:spPr>
+          <a:xfrm>
+            <a:off x="955548" y="1467612"/>
+            <a:ext cx="10241280" cy="1325880"/>
+          </a:xfrm>
+          <a:prstGeom prst="roundRect">
+            <a:avLst>
+              <a:gd name="adj" fmla="val 4138"/>
+            </a:avLst>
+          </a:prstGeom>
+          <a:solidFill>
+            <a:srgbClr val="B8C3D2">
+              <a:alpha val="26000"/>
+            </a:srgbClr>
+          </a:solidFill>
+          <a:ln w="12700">
+            <a:solidFill>
+              <a:srgbClr val="D5DCE7">
+                <a:alpha val="0"/>
+              </a:srgbClr>
+            </a:solidFill>
+            <a:prstDash val="solid"/>
+          </a:ln>
+          <a:effectLst>
+            <a:outerShdw sx="100000" sy="100000" kx="0" ky="0" algn="bl" rotWithShape="0" blurRad="13970" dist="50800" dir="2700000">
+              <a:srgbClr val="AAB5C4">
+                <a:alpha val="20000"/>
+              </a:srgbClr>
+            </a:outerShdw>
+          </a:effectLst>
+        </p:spPr>
+      </p:sp>
+      <p:sp>
+        <p:nvSpPr>
+          <p:cNvPr id="7" name="Shape 5"/>
+          <p:cNvSpPr/>
+          <p:nvPr/>
+        </p:nvSpPr>
+        <p:spPr>
+          <a:xfrm>
+            <a:off x="882396" y="1385316"/>
+            <a:ext cx="10241280" cy="1325880"/>
+          </a:xfrm>
+          <a:prstGeom prst="roundRect">
+            <a:avLst>
+              <a:gd name="adj" fmla="val 4138"/>
+            </a:avLst>
+          </a:prstGeom>
+          <a:solidFill>
+            <a:srgbClr val="FFFFFF">
+              <a:alpha val="42000"/>
+            </a:srgbClr>
+          </a:solidFill>
+          <a:ln w="12700">
+            <a:solidFill>
+              <a:srgbClr val="FFFFFF">
+                <a:alpha val="0"/>
+              </a:srgbClr>
+            </a:solidFill>
+            <a:prstDash val="solid"/>
+          </a:ln>
+          <a:effectLst>
+            <a:outerShdw sx="100000" sy="100000" kx="0" ky="0" algn="bl" rotWithShape="0" blurRad="10160" dist="50800" dir="13500000">
+              <a:srgbClr val="FFFFFF">
+                <a:alpha val="36000"/>
+              </a:srgbClr>
+            </a:outerShdw>
+          </a:effectLst>
+        </p:spPr>
+      </p:sp>
+      <p:sp>
+        <p:nvSpPr>
+          <p:cNvPr id="8" name="Shape 6"/>
+          <p:cNvSpPr/>
+          <p:nvPr/>
+        </p:nvSpPr>
+        <p:spPr>
+          <a:xfrm>
+            <a:off x="914400" y="1417320"/>
+            <a:ext cx="10241280" cy="1325880"/>
+          </a:xfrm>
+          <a:prstGeom prst="roundRect">
+            <a:avLst>
+              <a:gd name="adj" fmla="val 4138"/>
+            </a:avLst>
+          </a:prstGeom>
+          <a:solidFill>
+            <a:srgbClr val="E9EEF5">
+              <a:alpha val="6000"/>
+            </a:srgbClr>
+          </a:solidFill>
+          <a:ln w="12700">
+            <a:solidFill>
+              <a:srgbClr val="FFFFFF">
+                <a:alpha val="28000"/>
+              </a:srgbClr>
+            </a:solidFill>
+            <a:prstDash val="solid"/>
+          </a:ln>
+        </p:spPr>
+      </p:sp>
+      <p:pic>
+        <p:nvPicPr>
+          <p:cNvPr id="9" name="Image 0" descr="preencoded.png">    </p:cNvPr>
+          <p:cNvPicPr>
+            <a:picLocks noChangeAspect="1"/>
+          </p:cNvPicPr>
+          <p:nvPr/>
+        </p:nvPicPr>
+        <p:blipFill>
+          <a:blip r:embed="rId1">
+            <a:extLst>
+              <a:ext uri="{96DAC541-7B7A-43D3-8B79-37D633B846F1}">
+                <asvg:svgBlip xmlns:asvg="http://schemas.microsoft.com/office/drawing/2016/SVG/main" r:embed="rId2"/>
+              </a:ext>
+            </a:extLst>
+          </a:blip>
+          <a:stretch>
+            <a:fillRect/>
+          </a:stretch>
+        </p:blipFill>
+        <p:spPr>
+          <a:xfrm>
+            <a:off x="914400" y="1417320"/>
+            <a:ext cx="10241280" cy="1325880"/>
+          </a:xfrm>
+          <a:prstGeom prst="rect">
+            <a:avLst/>
+          </a:prstGeom>
+        </p:spPr>
+      </p:pic>
+      <p:sp>
+        <p:nvSpPr>
+          <p:cNvPr id="10" name="Shape 7"/>
+          <p:cNvSpPr/>
+          <p:nvPr/>
+        </p:nvSpPr>
+        <p:spPr>
+          <a:xfrm>
+            <a:off x="1046988" y="1549908"/>
+            <a:ext cx="73152" cy="1060704"/>
+          </a:xfrm>
+          <a:prstGeom prst="roundRect">
+            <a:avLst>
+              <a:gd name="adj" fmla="val 25000"/>
+            </a:avLst>
+          </a:prstGeom>
+          <a:solidFill>
+            <a:srgbClr val="4F6F8F"/>
+          </a:solidFill>
+          <a:ln w="12700">
+            <a:solidFill>
+              <a:srgbClr val="4F6F8F">
+                <a:alpha val="0"/>
+              </a:srgbClr>
+            </a:solidFill>
+            <a:prstDash val="solid"/>
+          </a:ln>
+        </p:spPr>
+      </p:sp>
+      <p:sp>
+        <p:nvSpPr>
+          <p:cNvPr id="11" name="Text 8"/>
+          <p:cNvSpPr txBox="1"/>
+          <p:nvPr/>
+        </p:nvSpPr>
+        <p:spPr>
+          <a:xfrm>
+            <a:off x="731520" y="457200"/>
+            <a:ext cx="10698480" cy="731520"/>
+          </a:xfrm>
+          <a:prstGeom prst="rect">
+            <a:avLst/>
+          </a:prstGeom>
+          <a:noFill/>
+          <a:ln/>
+        </p:spPr>
+        <p:txBody>
+          <a:bodyPr wrap="square" lIns="0" tIns="0" rIns="0" bIns="0" rtlCol="0" anchor="ctr"/>
+          <a:lstStyle/>
+          <a:p>
+            <a:pPr algn="ctr" indent="0" marL="0">
+              <a:lnSpc>
+                <a:spcPct val="120000"/>
+              </a:lnSpc>
+              <a:buNone/>
+            </a:pPr>
+            <a:r>
+              <a:rPr lang="en-US" sz="3400" b="1" dirty="0">
+                <a:solidFill>
+                  <a:srgbClr val="243041"/>
+                </a:solidFill>
+                <a:latin typeface="Pretendard" pitchFamily="34" charset="0"/>
+                <a:ea typeface="Pretendard" pitchFamily="34" charset="-122"/>
+                <a:cs typeface="Pretendard" pitchFamily="34" charset="-120"/>
+              </a:rPr>
+              <a:t>Teaser Summary</a:t>
+            </a:r>
+            <a:endParaRPr lang="en-US" sz="3400" dirty="0"/>
+          </a:p>
+        </p:txBody>
+      </p:sp>
+      <p:sp>
+        <p:nvSpPr>
+          <p:cNvPr id="12" name="Text 9"/>
+          <p:cNvSpPr txBox="1"/>
+          <p:nvPr/>
+        </p:nvSpPr>
+        <p:spPr>
+          <a:xfrm>
+            <a:off x="1298448" y="1545336"/>
+            <a:ext cx="9637776" cy="1069848"/>
+          </a:xfrm>
+          <a:prstGeom prst="rect">
+            <a:avLst/>
+          </a:prstGeom>
+          <a:noFill/>
+          <a:ln/>
+        </p:spPr>
+        <p:txBody>
+          <a:bodyPr wrap="square" lIns="0" tIns="0" rIns="0" bIns="0" rtlCol="0" anchor="ctr"/>
+          <a:lstStyle/>
+          <a:p>
+            <a:pPr algn="l" indent="0" marL="0">
+              <a:lnSpc>
+                <a:spcPct val="120000"/>
+              </a:lnSpc>
+              <a:buNone/>
+            </a:pPr>
+            <a:r>
+              <a:rPr lang="en-US" sz="2200" b="1" dirty="0">
+                <a:solidFill>
+                  <a:srgbClr val="243041"/>
+                </a:solidFill>
+                <a:latin typeface="Pretendard" pitchFamily="34" charset="0"/>
+                <a:ea typeface="Pretendard" pitchFamily="34" charset="-122"/>
+                <a:cs typeface="Pretendard" pitchFamily="34" charset="-120"/>
+              </a:rPr>
+              <a:t>Generated PPTX slides should show design range without sacrificing coherence.</a:t>
+            </a:r>
+            <a:endParaRPr lang="en-US" sz="2200" dirty="0"/>
+          </a:p>
+        </p:txBody>
+      </p:sp>
+      <p:sp>
+        <p:nvSpPr>
+          <p:cNvPr id="13" name="Text 10"/>
+          <p:cNvSpPr txBox="1"/>
+          <p:nvPr/>
+        </p:nvSpPr>
+        <p:spPr>
+          <a:xfrm>
+            <a:off x="987552" y="3172968"/>
+            <a:ext cx="10094976" cy="2478024"/>
+          </a:xfrm>
+          <a:prstGeom prst="rect">
+            <a:avLst/>
+          </a:prstGeom>
+          <a:noFill/>
+          <a:ln/>
+        </p:spPr>
+        <p:txBody>
+          <a:bodyPr wrap="square" lIns="0" tIns="25400" rIns="25400" bIns="0" rtlCol="0" anchor="t"/>
+          <a:lstStyle/>
+          <a:p>
+            <a:pPr algn="l" indent="0" marL="0">
+              <a:lnSpc>
+                <a:spcPct val="120000"/>
+              </a:lnSpc>
+              <a:buNone/>
+            </a:pPr>
+            <a:r>
+              <a:rPr lang="en-US" sz="2200" b="1" dirty="0">
+                <a:solidFill>
+                  <a:srgbClr val="4F6F8F"/>
+                </a:solidFill>
+                <a:latin typeface="Pretendard" pitchFamily="34" charset="0"/>
+                <a:ea typeface="Pretendard" pitchFamily="34" charset="-122"/>
+                <a:cs typeface="Pretendard" pitchFamily="34" charset="-120"/>
+              </a:rPr>
+              <a:t>- Preview styles</a:t>
+            </a:r>
+            <a:pPr algn="l" indent="0" marL="0">
+              <a:lnSpc>
+                <a:spcPct val="120000"/>
+              </a:lnSpc>
+              <a:buNone/>
+            </a:pPr>
+            <a:r>
+              <a:rPr lang="en-US" sz="2200" dirty="0">
+                <a:solidFill>
+                  <a:srgbClr val="243041"/>
+                </a:solidFill>
+                <a:latin typeface="Pretendard" pitchFamily="34" charset="0"/>
+                <a:ea typeface="Pretendard" pitchFamily="34" charset="-122"/>
+                <a:cs typeface="Pretendard" pitchFamily="34" charset="-120"/>
+              </a:rPr>
+              <a:t>  8 pruned decoration grammars, not palette-only swaps.</a:t>
+            </a:r>
+            <a:endParaRPr lang="en-US" sz="2200" dirty="0"/>
+          </a:p>
+          <a:p>
+            <a:pPr algn="l" indent="0" marL="0">
+              <a:lnSpc>
+                <a:spcPct val="120000"/>
+              </a:lnSpc>
+              <a:buNone/>
+            </a:pPr>
+            <a:r>
+              <a:rPr lang="en-US" sz="2200" b="1" dirty="0">
+                <a:solidFill>
+                  <a:srgbClr val="4F6F8F"/>
+                </a:solidFill>
+                <a:latin typeface="Pretendard" pitchFamily="34" charset="0"/>
+                <a:ea typeface="Pretendard" pitchFamily="34" charset="-122"/>
+                <a:cs typeface="Pretendard" pitchFamily="34" charset="-120"/>
+              </a:rPr>
+              <a:t>- Pattern range</a:t>
+            </a:r>
+            <a:endParaRPr lang="en-US" sz="2200" dirty="0"/>
+          </a:p>
+          <a:p>
+            <a:pPr algn="l" indent="0" marL="0">
+              <a:lnSpc>
+                <a:spcPct val="120000"/>
+              </a:lnSpc>
+              <a:buNone/>
+            </a:pPr>
+            <a:r>
+              <a:rPr lang="en-US" sz="2200" dirty="0">
+                <a:solidFill>
+                  <a:srgbClr val="243041"/>
+                </a:solidFill>
+                <a:latin typeface="Pretendard" pitchFamily="34" charset="0"/>
+                <a:ea typeface="Pretendard" pitchFamily="34" charset="-122"/>
+                <a:cs typeface="Pretendard" pitchFamily="34" charset="-120"/>
+              </a:rPr>
+              <a:t>  36+ decoration and layout patterns selected by content role.</a:t>
+            </a:r>
+            <a:endParaRPr lang="en-US" sz="2200" dirty="0"/>
+          </a:p>
+          <a:p>
+            <a:pPr algn="l" indent="0" marL="0">
+              <a:lnSpc>
+                <a:spcPct val="120000"/>
+              </a:lnSpc>
+              <a:buNone/>
+            </a:pPr>
+            <a:r>
+              <a:rPr lang="en-US" sz="2200" b="1" dirty="0">
+                <a:solidFill>
+                  <a:srgbClr val="4F6F8F"/>
+                </a:solidFill>
+                <a:latin typeface="Pretendard" pitchFamily="34" charset="0"/>
+                <a:ea typeface="Pretendard" pitchFamily="34" charset="-122"/>
+                <a:cs typeface="Pretendard" pitchFamily="34" charset="-120"/>
+              </a:rPr>
+              <a:t>- Object support</a:t>
+            </a:r>
+            <a:endParaRPr lang="en-US" sz="2200" dirty="0"/>
+          </a:p>
+          <a:p>
+            <a:pPr algn="l" indent="0" marL="0">
+              <a:lnSpc>
+                <a:spcPct val="120000"/>
+              </a:lnSpc>
+              <a:buNone/>
+            </a:pPr>
+            <a:r>
+              <a:rPr lang="en-US" sz="2200" dirty="0">
+                <a:solidFill>
+                  <a:srgbClr val="243041"/>
+                </a:solidFill>
+                <a:latin typeface="Pretendard" pitchFamily="34" charset="0"/>
+                <a:ea typeface="Pretendard" pitchFamily="34" charset="-122"/>
+                <a:cs typeface="Pretendard" pitchFamily="34" charset="-120"/>
+              </a:rPr>
+              <a:t>  native tables, charts, proof objects, diagrams, images, and icon slots.</a:t>
+            </a:r>
+            <a:endParaRPr lang="en-US" sz="2200" dirty="0"/>
+          </a:p>
+          <a:p>
+            <a:pPr algn="l" indent="0" marL="0">
+              <a:lnSpc>
+                <a:spcPct val="120000"/>
+              </a:lnSpc>
+              <a:buNone/>
+            </a:pPr>
+            <a:r>
+              <a:rPr lang="en-US" sz="2200" b="1" dirty="0">
+                <a:solidFill>
+                  <a:srgbClr val="4F6F8F"/>
+                </a:solidFill>
+                <a:latin typeface="Pretendard" pitchFamily="34" charset="0"/>
+                <a:ea typeface="Pretendard" pitchFamily="34" charset="-122"/>
+                <a:cs typeface="Pretendard" pitchFamily="34" charset="-120"/>
+              </a:rPr>
+              <a:t>- QA contract</a:t>
+            </a:r>
+            <a:endParaRPr lang="en-US" sz="2200" dirty="0"/>
+          </a:p>
+          <a:p>
+            <a:pPr algn="l" indent="0" marL="0">
+              <a:lnSpc>
+                <a:spcPct val="120000"/>
+              </a:lnSpc>
+              <a:buNone/>
+            </a:pPr>
+            <a:r>
+              <a:rPr lang="en-US" sz="2200" dirty="0">
+                <a:solidFill>
+                  <a:srgbClr val="243041"/>
+                </a:solidFill>
+                <a:latin typeface="Pretendard" pitchFamily="34" charset="0"/>
+                <a:ea typeface="Pretendard" pitchFamily="34" charset="-122"/>
+                <a:cs typeface="Pretendard" pitchFamily="34" charset="-120"/>
+              </a:rPr>
+              <a:t>  readable text, bounded objects, aligned connectors, and editable PPTX output.</a:t>
+            </a:r>
+            <a:endParaRPr lang="en-US" sz="2200" dirty="0"/>
+          </a:p>
+        </p:txBody>
+      </p:sp>
+    </p:spTree>
+  </p:cSld>
+  <p:clrMapOvr>
+    <a:masterClrMapping/>
+  </p:clrMapOvr>
+</p:sld>
+</file>
+
+<file path=ppt/slides/slide5.xml><?xml version="1.0" encoding="utf-8"?>
+<p:sld xmlns:a="http://schemas.openxmlformats.org/drawingml/2006/main" xmlns:r="http://schemas.openxmlformats.org/officeDocument/2006/relationships" xmlns:p="http://schemas.openxmlformats.org/presentationml/2006/main">
+  <p:cSld name="Slide 5">
+    <p:bg>
+      <p:bgPr>
+        <a:solidFill>
+          <a:srgbClr val="E9EEF5"/>
+        </a:solidFill>
+      </p:bgPr>
+    </p:bg>
+    <p:spTree>
+      <p:nvGrpSpPr>
+        <p:cNvPr id="1" name=""/>
+        <p:cNvGrpSpPr/>
+        <p:nvPr/>
+      </p:nvGrpSpPr>
+      <p:grpSpPr>
+        <a:xfrm>
+          <a:off x="0" y="0"/>
+          <a:ext cx="0" cy="0"/>
+          <a:chOff x="0" y="0"/>
+          <a:chExt cx="0" cy="0"/>
+        </a:xfrm>
+      </p:grpSpPr>
+      <p:sp>
+        <p:nvSpPr>
+          <p:cNvPr id="2" name="Shape 0"/>
+          <p:cNvSpPr/>
+          <p:nvPr/>
+        </p:nvSpPr>
+        <p:spPr>
+          <a:xfrm>
+            <a:off x="10362895" y="502920"/>
+            <a:ext cx="822960" cy="822960"/>
+          </a:xfrm>
+          <a:prstGeom prst="ellipse">
+            <a:avLst/>
+          </a:prstGeom>
+          <a:solidFill>
+            <a:srgbClr val="F7FAFC">
+              <a:alpha val="92000"/>
+            </a:srgbClr>
+          </a:solidFill>
+          <a:ln w="12700">
+            <a:solidFill>
+              <a:srgbClr val="FFFFFF">
+                <a:alpha val="0"/>
+              </a:srgbClr>
+            </a:solidFill>
+            <a:prstDash val="solid"/>
+          </a:ln>
+          <a:effectLst>
+            <a:outerShdw sx="100000" sy="100000" kx="0" ky="0" algn="bl" rotWithShape="0" blurRad="15240" dist="50800" dir="2700000">
+              <a:srgbClr val="C7D0DE">
+                <a:alpha val="22000"/>
+              </a:srgbClr>
+            </a:outerShdw>
+          </a:effectLst>
+        </p:spPr>
+      </p:sp>
+      <p:sp>
+        <p:nvSpPr>
+          <p:cNvPr id="3" name="Shape 1"/>
+          <p:cNvSpPr/>
+          <p:nvPr/>
+        </p:nvSpPr>
+        <p:spPr>
+          <a:xfrm>
+            <a:off x="530352" y="5687568"/>
+            <a:ext cx="658368" cy="658368"/>
+          </a:xfrm>
+          <a:prstGeom prst="ellipse">
+            <a:avLst/>
+          </a:prstGeom>
+          <a:solidFill>
+            <a:srgbClr val="E9EEF5"/>
+          </a:solidFill>
+          <a:ln w="12700">
+            <a:solidFill>
+              <a:srgbClr val="FFFFFF">
+                <a:alpha val="42000"/>
+              </a:srgbClr>
+            </a:solidFill>
+            <a:prstDash val="solid"/>
+          </a:ln>
+          <a:effectLst>
+            <a:outerShdw sx="100000" sy="100000" kx="0" ky="0" algn="bl" rotWithShape="0" blurRad="12700" dist="50800" dir="2700000">
+              <a:srgbClr val="B8C3D2">
+                <a:alpha val="18000"/>
+              </a:srgbClr>
+            </a:outerShdw>
+          </a:effectLst>
+        </p:spPr>
+      </p:sp>
+      <p:sp>
+        <p:nvSpPr>
+          <p:cNvPr id="4" name="Shape 2"/>
+          <p:cNvSpPr/>
+          <p:nvPr/>
+        </p:nvSpPr>
+        <p:spPr>
+          <a:xfrm>
+            <a:off x="731520" y="1207008"/>
+            <a:ext cx="1325880" cy="54864"/>
+          </a:xfrm>
+          <a:prstGeom prst="rect">
+            <a:avLst/>
+          </a:prstGeom>
+          <a:solidFill>
+            <a:srgbClr val="4F6F8F"/>
+          </a:solidFill>
+          <a:ln w="12700">
+            <a:solidFill>
+              <a:srgbClr val="4F6F8F">
+                <a:alpha val="0"/>
+              </a:srgbClr>
+            </a:solidFill>
+            <a:prstDash val="solid"/>
+          </a:ln>
+        </p:spPr>
+      </p:sp>
+      <p:sp>
+        <p:nvSpPr>
+          <p:cNvPr id="5" name="Shape 3"/>
+          <p:cNvSpPr/>
+          <p:nvPr/>
+        </p:nvSpPr>
+        <p:spPr>
+          <a:xfrm>
             <a:off x="786384" y="1956816"/>
             <a:ext cx="32004" cy="3483864"/>
           </a:xfrm>
@@ -14608,8 +19532,8 @@
         </p:nvSpPr>
         <p:spPr>
           <a:xfrm>
-            <a:off x="1699321" y="1957548"/>
-            <a:ext cx="9255191" cy="839785"/>
+            <a:off x="1699321" y="1987296"/>
+            <a:ext cx="9255191" cy="780288"/>
           </a:xfrm>
           <a:prstGeom prst="rect">
             <a:avLst/>
@@ -14724,8 +19648,8 @@
         </p:nvSpPr>
         <p:spPr>
           <a:xfrm>
-            <a:off x="1699321" y="3283428"/>
-            <a:ext cx="9255191" cy="839785"/>
+            <a:off x="1699321" y="3313176"/>
+            <a:ext cx="9255191" cy="780288"/>
           </a:xfrm>
           <a:prstGeom prst="rect">
             <a:avLst/>
@@ -14840,8 +19764,8 @@
         </p:nvSpPr>
         <p:spPr>
           <a:xfrm>
-            <a:off x="1699321" y="4600164"/>
-            <a:ext cx="9255191" cy="839785"/>
+            <a:off x="1699321" y="4629912"/>
+            <a:ext cx="9255191" cy="780288"/>
           </a:xfrm>
           <a:prstGeom prst="rect">
             <a:avLst/>
@@ -14899,9 +19823,9 @@
 </p:sld>
 </file>
 
-<file path=ppt/slides/slide5.xml><?xml version="1.0" encoding="utf-8"?>
+<file path=ppt/slides/slide6.xml><?xml version="1.0" encoding="utf-8"?>
 <p:sld xmlns:a="http://schemas.openxmlformats.org/drawingml/2006/main" xmlns:r="http://schemas.openxmlformats.org/officeDocument/2006/relationships" xmlns:p="http://schemas.openxmlformats.org/presentationml/2006/main">
-  <p:cSld name="Slide 5">
+  <p:cSld name="Slide 6">
     <p:bg>
       <p:bgPr>
         <a:solidFill>
@@ -15242,9 +20166,9 @@
 </p:sld>
 </file>
 
-<file path=ppt/slides/slide6.xml><?xml version="1.0" encoding="utf-8"?>
+<file path=ppt/slides/slide7.xml><?xml version="1.0" encoding="utf-8"?>
 <p:sld xmlns:a="http://schemas.openxmlformats.org/drawingml/2006/main" xmlns:r="http://schemas.openxmlformats.org/officeDocument/2006/relationships" xmlns:p="http://schemas.openxmlformats.org/presentationml/2006/main">
-  <p:cSld name="Slide 6">
+  <p:cSld name="Slide 7">
     <p:bg>
       <p:bgPr>
         <a:solidFill>
@@ -15920,7 +20844,7 @@
                 <a:ea typeface="Pretendard" pitchFamily="34" charset="-122"/>
                 <a:cs typeface="Pretendard" pitchFamily="34" charset="-120"/>
               </a:rPr>
-              <a:t>Style Families</a:t>
+              <a:t>Pruned Style Families</a:t>
             </a:r>
             <a:endParaRPr lang="en-US" sz="3400" dirty="0"/>
           </a:p>
@@ -15991,8 +20915,8 @@
         </p:nvSpPr>
         <p:spPr>
           <a:xfrm>
-            <a:off x="1699321" y="1957548"/>
-            <a:ext cx="9255191" cy="839785"/>
+            <a:off x="1699321" y="1987296"/>
+            <a:ext cx="9255191" cy="780288"/>
           </a:xfrm>
           <a:prstGeom prst="rect">
             <a:avLst/>
@@ -16019,7 +20943,7 @@
                 <a:ea typeface="Pretendard" pitchFamily="34" charset="-122"/>
                 <a:cs typeface="Pretendard" pitchFamily="34" charset="-120"/>
               </a:rPr>
-              <a:t>Clean / minimalism</a:t>
+              <a:t>Clean</a:t>
             </a:r>
             <a:pPr algn="l" indent="0" marL="0">
               <a:lnSpc>
@@ -16036,7 +20960,7 @@
                 <a:ea typeface="Pretendard" pitchFamily="34" charset="-122"/>
                 <a:cs typeface="Pretendard" pitchFamily="34" charset="-120"/>
               </a:rPr>
-              <a:t>  restrained structural baselines.</a:t>
+              <a:t>  restrained default structure.</a:t>
             </a:r>
             <a:endParaRPr lang="en-US" sz="2200" dirty="0"/>
           </a:p>
@@ -16071,7 +20995,7 @@
       </p:sp>
       <p:pic>
         <p:nvPicPr>
-          <p:cNvPr id="26" name="Image 4" descr="article icon from tabler-icons (MIT)">    </p:cNvPr>
+          <p:cNvPr id="26" name="Image 4" descr="chart icon from tabler-icons (MIT)">    </p:cNvPr>
           <p:cNvPicPr>
             <a:picLocks noChangeAspect="1"/>
           </p:cNvPicPr>
@@ -16107,124 +21031,8 @@
         </p:nvSpPr>
         <p:spPr>
           <a:xfrm>
-            <a:off x="1699321" y="3283428"/>
-            <a:ext cx="9255191" cy="839785"/>
-          </a:xfrm>
-          <a:prstGeom prst="rect">
-            <a:avLst/>
-          </a:prstGeom>
-          <a:noFill/>
-          <a:ln/>
-        </p:spPr>
-        <p:txBody>
-          <a:bodyPr wrap="square" lIns="0" tIns="25400" rIns="25400" bIns="0" rtlCol="0" anchor="ctr"/>
-          <a:lstStyle/>
-          <a:p>
-            <a:pPr algn="l" indent="0" marL="0">
-              <a:lnSpc>
-                <a:spcPct val="120000"/>
-              </a:lnSpc>
-              <a:buNone/>
-            </a:pPr>
-            <a:r>
-              <a:rPr lang="en-US" sz="2200" b="1" dirty="0">
-                <a:solidFill>
-                  <a:srgbClr val="4F6F8F"/>
-                </a:solidFill>
-                <a:latin typeface="Pretendard" pitchFamily="34" charset="0"/>
-                <a:ea typeface="Pretendard" pitchFamily="34" charset="-122"/>
-                <a:cs typeface="Pretendard" pitchFamily="34" charset="-120"/>
-              </a:rPr>
-              <a:t>Executive / technical</a:t>
-            </a:r>
-            <a:pPr algn="l" indent="0" marL="0">
-              <a:lnSpc>
-                <a:spcPct val="120000"/>
-              </a:lnSpc>
-              <a:buNone/>
-            </a:pPr>
-            <a:r>
-              <a:rPr lang="en-US" sz="2200" dirty="0">
-                <a:solidFill>
-                  <a:srgbClr val="243041"/>
-                </a:solidFill>
-                <a:latin typeface="Pretendard" pitchFamily="34" charset="0"/>
-                <a:ea typeface="Pretendard" pitchFamily="34" charset="-122"/>
-                <a:cs typeface="Pretendard" pitchFamily="34" charset="-120"/>
-              </a:rPr>
-              <a:t>  structured operational hierarchy.</a:t>
-            </a:r>
-            <a:endParaRPr lang="en-US" sz="2200" dirty="0"/>
-          </a:p>
-        </p:txBody>
-      </p:sp>
-      <p:sp>
-        <p:nvSpPr>
-          <p:cNvPr id="28" name="Shape 21"/>
-          <p:cNvSpPr/>
-          <p:nvPr/>
-        </p:nvSpPr>
-        <p:spPr>
-          <a:xfrm>
-            <a:off x="1097280" y="4783044"/>
-            <a:ext cx="474025" cy="474025"/>
-          </a:xfrm>
-          <a:prstGeom prst="roundRect">
-            <a:avLst>
-              <a:gd name="adj" fmla="val 7716"/>
-            </a:avLst>
-          </a:prstGeom>
-          <a:solidFill>
-            <a:srgbClr val="E9EEF5"/>
-          </a:solidFill>
-          <a:ln w="12700">
-            <a:solidFill>
-              <a:srgbClr val="D5DCE7"/>
-            </a:solidFill>
-            <a:prstDash val="solid"/>
-          </a:ln>
-        </p:spPr>
-      </p:sp>
-      <p:pic>
-        <p:nvPicPr>
-          <p:cNvPr id="29" name="Image 5" descr="article icon from tabler-icons (MIT)">    </p:cNvPr>
-          <p:cNvPicPr>
-            <a:picLocks noChangeAspect="1"/>
-          </p:cNvPicPr>
-          <p:nvPr/>
-        </p:nvPicPr>
-        <p:blipFill>
-          <a:blip r:embed="rId11">
-            <a:extLst>
-              <a:ext uri="{96DAC541-7B7A-43D3-8B79-37D633B846F1}">
-                <asvg:svgBlip xmlns:asvg="http://schemas.microsoft.com/office/drawing/2016/SVG/main" r:embed="rId12"/>
-              </a:ext>
-            </a:extLst>
-          </a:blip>
-          <a:stretch>
-            <a:fillRect/>
-          </a:stretch>
-        </p:blipFill>
-        <p:spPr>
-          <a:xfrm>
-            <a:off x="1170432" y="4856196"/>
-            <a:ext cx="327721" cy="327721"/>
-          </a:xfrm>
-          <a:prstGeom prst="rect">
-            <a:avLst/>
-          </a:prstGeom>
-        </p:spPr>
-      </p:pic>
-      <p:sp>
-        <p:nvSpPr>
-          <p:cNvPr id="30" name="Text 22"/>
-          <p:cNvSpPr txBox="1"/>
-          <p:nvPr/>
-        </p:nvSpPr>
-        <p:spPr>
-          <a:xfrm>
-            <a:off x="1699321" y="4600164"/>
-            <a:ext cx="9255191" cy="839785"/>
+            <a:off x="1699321" y="3313176"/>
+            <a:ext cx="9255191" cy="780288"/>
           </a:xfrm>
           <a:prstGeom prst="rect">
             <a:avLst/>
@@ -16268,7 +21076,123 @@
                 <a:ea typeface="Pretendard" pitchFamily="34" charset="-122"/>
                 <a:cs typeface="Pretendard" pitchFamily="34" charset="-120"/>
               </a:rPr>
-              <a:t>  warmer page rhythm.</a:t>
+              <a:t>  asymmetric rhythm and publication-like accents.</a:t>
+            </a:r>
+            <a:endParaRPr lang="en-US" sz="2200" dirty="0"/>
+          </a:p>
+        </p:txBody>
+      </p:sp>
+      <p:sp>
+        <p:nvSpPr>
+          <p:cNvPr id="28" name="Shape 21"/>
+          <p:cNvSpPr/>
+          <p:nvPr/>
+        </p:nvSpPr>
+        <p:spPr>
+          <a:xfrm>
+            <a:off x="1097280" y="4783044"/>
+            <a:ext cx="474025" cy="474025"/>
+          </a:xfrm>
+          <a:prstGeom prst="roundRect">
+            <a:avLst>
+              <a:gd name="adj" fmla="val 7716"/>
+            </a:avLst>
+          </a:prstGeom>
+          <a:solidFill>
+            <a:srgbClr val="E9EEF5"/>
+          </a:solidFill>
+          <a:ln w="12700">
+            <a:solidFill>
+              <a:srgbClr val="D5DCE7"/>
+            </a:solidFill>
+            <a:prstDash val="solid"/>
+          </a:ln>
+        </p:spPr>
+      </p:sp>
+      <p:pic>
+        <p:nvPicPr>
+          <p:cNvPr id="29" name="Image 5" descr="article icon from tabler-icons (MIT)">    </p:cNvPr>
+          <p:cNvPicPr>
+            <a:picLocks noChangeAspect="1"/>
+          </p:cNvPicPr>
+          <p:nvPr/>
+        </p:nvPicPr>
+        <p:blipFill>
+          <a:blip r:embed="rId11">
+            <a:extLst>
+              <a:ext uri="{96DAC541-7B7A-43D3-8B79-37D633B846F1}">
+                <asvg:svgBlip xmlns:asvg="http://schemas.microsoft.com/office/drawing/2016/SVG/main" r:embed="rId12"/>
+              </a:ext>
+            </a:extLst>
+          </a:blip>
+          <a:stretch>
+            <a:fillRect/>
+          </a:stretch>
+        </p:blipFill>
+        <p:spPr>
+          <a:xfrm>
+            <a:off x="1170432" y="4856196"/>
+            <a:ext cx="327721" cy="327721"/>
+          </a:xfrm>
+          <a:prstGeom prst="rect">
+            <a:avLst/>
+          </a:prstGeom>
+        </p:spPr>
+      </p:pic>
+      <p:sp>
+        <p:nvSpPr>
+          <p:cNvPr id="30" name="Text 22"/>
+          <p:cNvSpPr txBox="1"/>
+          <p:nvPr/>
+        </p:nvSpPr>
+        <p:spPr>
+          <a:xfrm>
+            <a:off x="1699321" y="4629912"/>
+            <a:ext cx="9255191" cy="780288"/>
+          </a:xfrm>
+          <a:prstGeom prst="rect">
+            <a:avLst/>
+          </a:prstGeom>
+          <a:noFill/>
+          <a:ln/>
+        </p:spPr>
+        <p:txBody>
+          <a:bodyPr wrap="square" lIns="0" tIns="25400" rIns="25400" bIns="0" rtlCol="0" anchor="ctr"/>
+          <a:lstStyle/>
+          <a:p>
+            <a:pPr algn="l" indent="0" marL="0">
+              <a:lnSpc>
+                <a:spcPct val="120000"/>
+              </a:lnSpc>
+              <a:buNone/>
+            </a:pPr>
+            <a:r>
+              <a:rPr lang="en-US" sz="2200" b="1" dirty="0">
+                <a:solidFill>
+                  <a:srgbClr val="4F6F8F"/>
+                </a:solidFill>
+                <a:latin typeface="Pretendard" pitchFamily="34" charset="0"/>
+                <a:ea typeface="Pretendard" pitchFamily="34" charset="-122"/>
+                <a:cs typeface="Pretendard" pitchFamily="34" charset="-120"/>
+              </a:rPr>
+              <a:t>Minimalism / newmorphism</a:t>
+            </a:r>
+            <a:pPr algn="l" indent="0" marL="0">
+              <a:lnSpc>
+                <a:spcPct val="120000"/>
+              </a:lnSpc>
+              <a:buNone/>
+            </a:pPr>
+            <a:r>
+              <a:rPr lang="en-US" sz="2200" dirty="0">
+                <a:solidFill>
+                  <a:srgbClr val="243041"/>
+                </a:solidFill>
+                <a:latin typeface="Pretendard" pitchFamily="34" charset="0"/>
+                <a:ea typeface="Pretendard" pitchFamily="34" charset="-122"/>
+                <a:cs typeface="Pretendard" pitchFamily="34" charset="-120"/>
+              </a:rPr>
+              <a:t>  sparse rules or soft raised surfaces.</a:t>
             </a:r>
             <a:endParaRPr lang="en-US" sz="2200" dirty="0"/>
           </a:p>
@@ -16282,9 +21206,9 @@
 </p:sld>
 </file>
 
-<file path=ppt/slides/slide7.xml><?xml version="1.0" encoding="utf-8"?>
+<file path=ppt/slides/slide8.xml><?xml version="1.0" encoding="utf-8"?>
 <p:sld xmlns:a="http://schemas.openxmlformats.org/drawingml/2006/main" xmlns:r="http://schemas.openxmlformats.org/officeDocument/2006/relationships" xmlns:p="http://schemas.openxmlformats.org/presentationml/2006/main">
-  <p:cSld name="Slide 7">
+  <p:cSld name="Slide 8">
     <p:bg>
       <p:bgPr>
         <a:solidFill>
@@ -16493,7 +21417,7 @@
                 <a:ea typeface="Pretendard" pitchFamily="34" charset="-122"/>
                 <a:cs typeface="Pretendard" pitchFamily="34" charset="-120"/>
               </a:rPr>
-              <a:t>Style Families (Cont. 2/2)</a:t>
+              <a:t>Pruned Style Families (Cont. 2/2)</a:t>
             </a:r>
             <a:endParaRPr lang="en-US" sz="3400" dirty="0"/>
           </a:p>
@@ -16508,65 +21432,6 @@
         <p:spPr>
           <a:xfrm>
             <a:off x="896112" y="1664208"/>
-            <a:ext cx="4791456" cy="4169664"/>
-          </a:xfrm>
-          <a:prstGeom prst="rect">
-            <a:avLst/>
-          </a:prstGeom>
-          <a:noFill/>
-          <a:ln/>
-        </p:spPr>
-        <p:txBody>
-          <a:bodyPr wrap="square" lIns="0" tIns="25400" rIns="25400" bIns="0" rtlCol="0" anchor="t"/>
-          <a:lstStyle/>
-          <a:p>
-            <a:pPr algn="l" indent="0" marL="0">
-              <a:lnSpc>
-                <a:spcPct val="120000"/>
-              </a:lnSpc>
-              <a:buNone/>
-            </a:pPr>
-            <a:r>
-              <a:rPr lang="en-US" sz="2200" b="1" dirty="0">
-                <a:solidFill>
-                  <a:srgbClr val="4F6F8F"/>
-                </a:solidFill>
-                <a:latin typeface="Pretendard" pitchFamily="34" charset="0"/>
-                <a:ea typeface="Pretendard" pitchFamily="34" charset="-122"/>
-                <a:cs typeface="Pretendard" pitchFamily="34" charset="-120"/>
-              </a:rPr>
-              <a:t>- Minimalism / newmorphism</a:t>
-            </a:r>
-            <a:pPr algn="l" indent="0" marL="0">
-              <a:lnSpc>
-                <a:spcPct val="120000"/>
-              </a:lnSpc>
-              <a:buNone/>
-            </a:pPr>
-            <a:r>
-              <a:rPr lang="en-US" sz="2200" dirty="0">
-                <a:solidFill>
-                  <a:srgbClr val="243041"/>
-                </a:solidFill>
-                <a:latin typeface="Pretendard" pitchFamily="34" charset="0"/>
-                <a:ea typeface="Pretendard" pitchFamily="34" charset="-122"/>
-                <a:cs typeface="Pretendard" pitchFamily="34" charset="-120"/>
-              </a:rPr>
-              <a:t>  sparse or softly raised surfaces.</a:t>
-            </a:r>
-            <a:endParaRPr lang="en-US" sz="2200" dirty="0"/>
-          </a:p>
-        </p:txBody>
-      </p:sp>
-      <p:sp>
-        <p:nvSpPr>
-          <p:cNvPr id="9" name="Text 7"/>
-          <p:cNvSpPr txBox="1"/>
-          <p:nvPr/>
-        </p:nvSpPr>
-        <p:spPr>
-          <a:xfrm>
-            <a:off x="6473952" y="1664208"/>
             <a:ext cx="4791456" cy="4169664"/>
           </a:xfrm>
           <a:prstGeom prst="rect">
@@ -16611,7 +21476,66 @@
                 <a:ea typeface="Pretendard" pitchFamily="34" charset="-122"/>
                 <a:cs typeface="Pretendard" pitchFamily="34" charset="-120"/>
               </a:rPr>
-              <a:t>  distinct surface and background grammar.</a:t>
+              <a:t>  translucent surfaces, construction lines, or metric rails.</a:t>
+            </a:r>
+            <a:endParaRPr lang="en-US" sz="2200" dirty="0"/>
+          </a:p>
+        </p:txBody>
+      </p:sp>
+      <p:sp>
+        <p:nvSpPr>
+          <p:cNvPr id="9" name="Text 7"/>
+          <p:cNvSpPr txBox="1"/>
+          <p:nvPr/>
+        </p:nvSpPr>
+        <p:spPr>
+          <a:xfrm>
+            <a:off x="6473952" y="1664208"/>
+            <a:ext cx="4791456" cy="4169664"/>
+          </a:xfrm>
+          <a:prstGeom prst="rect">
+            <a:avLst/>
+          </a:prstGeom>
+          <a:noFill/>
+          <a:ln/>
+        </p:spPr>
+        <p:txBody>
+          <a:bodyPr wrap="square" lIns="0" tIns="25400" rIns="25400" bIns="0" rtlCol="0" anchor="t"/>
+          <a:lstStyle/>
+          <a:p>
+            <a:pPr algn="l" indent="0" marL="0">
+              <a:lnSpc>
+                <a:spcPct val="120000"/>
+              </a:lnSpc>
+              <a:buNone/>
+            </a:pPr>
+            <a:r>
+              <a:rPr lang="en-US" sz="2200" b="1" dirty="0">
+                <a:solidFill>
+                  <a:srgbClr val="4F6F8F"/>
+                </a:solidFill>
+                <a:latin typeface="Pretendard" pitchFamily="34" charset="0"/>
+                <a:ea typeface="Pretendard" pitchFamily="34" charset="-122"/>
+                <a:cs typeface="Pretendard" pitchFamily="34" charset="-120"/>
+              </a:rPr>
+              <a:t>- Pruning rule</a:t>
+            </a:r>
+            <a:pPr algn="l" indent="0" marL="0">
+              <a:lnSpc>
+                <a:spcPct val="120000"/>
+              </a:lnSpc>
+              <a:buNone/>
+            </a:pPr>
+            <a:r>
+              <a:rPr lang="en-US" sz="2200" dirty="0">
+                <a:solidFill>
+                  <a:srgbClr val="243041"/>
+                </a:solidFill>
+                <a:latin typeface="Pretendard" pitchFamily="34" charset="0"/>
+                <a:ea typeface="Pretendard" pitchFamily="34" charset="-122"/>
+                <a:cs typeface="Pretendard" pitchFamily="34" charset="-120"/>
+              </a:rPr>
+              <a:t>  preview excludes styles that only change palette or background.</a:t>
             </a:r>
             <a:endParaRPr lang="en-US" sz="2200" dirty="0"/>
           </a:p>
@@ -16625,9 +21549,9 @@
 </p:sld>
 </file>
 
-<file path=ppt/slides/slide8.xml><?xml version="1.0" encoding="utf-8"?>
+<file path=ppt/slides/slide9.xml><?xml version="1.0" encoding="utf-8"?>
 <p:sld xmlns:a="http://schemas.openxmlformats.org/drawingml/2006/main" xmlns:r="http://schemas.openxmlformats.org/officeDocument/2006/relationships" xmlns:p="http://schemas.openxmlformats.org/presentationml/2006/main">
-  <p:cSld name="Slide 8">
+  <p:cSld name="Slide 9">
     <p:bg>
       <p:bgPr>
         <a:solidFill>
@@ -17509,8 +22433,8 @@
         </p:nvSpPr>
         <p:spPr>
           <a:xfrm>
-            <a:off x="1689354" y="1627632"/>
-            <a:ext cx="3961638" cy="1591056"/>
+            <a:off x="1689354" y="2033016"/>
+            <a:ext cx="3961638" cy="780288"/>
           </a:xfrm>
           <a:prstGeom prst="rect">
             <a:avLst/>
@@ -17625,8 +22549,8 @@
         </p:nvSpPr>
         <p:spPr>
           <a:xfrm>
-            <a:off x="7175754" y="1627632"/>
-            <a:ext cx="3961638" cy="1591056"/>
+            <a:off x="7175754" y="1865376"/>
+            <a:ext cx="3961638" cy="1115568"/>
           </a:xfrm>
           <a:prstGeom prst="rect">
             <a:avLst/>
@@ -17741,8 +22665,8 @@
         </p:nvSpPr>
         <p:spPr>
           <a:xfrm>
-            <a:off x="1689354" y="3913632"/>
-            <a:ext cx="3961638" cy="1591056"/>
+            <a:off x="1689354" y="4151376"/>
+            <a:ext cx="3961638" cy="1115568"/>
           </a:xfrm>
           <a:prstGeom prst="rect">
             <a:avLst/>
@@ -17857,8 +22781,8 @@
         </p:nvSpPr>
         <p:spPr>
           <a:xfrm>
-            <a:off x="7175754" y="3913632"/>
-            <a:ext cx="3961638" cy="1591056"/>
+            <a:off x="7175754" y="4151376"/>
+            <a:ext cx="3961638" cy="1115568"/>
           </a:xfrm>
           <a:prstGeom prst="rect">
             <a:avLst/>
@@ -17905,1353 +22829,6 @@
               <a:t>  bold and italic remain editable.</a:t>
             </a:r>
             <a:endParaRPr lang="en-US" sz="2200" dirty="0"/>
-          </a:p>
-        </p:txBody>
-      </p:sp>
-    </p:spTree>
-  </p:cSld>
-  <p:clrMapOvr>
-    <a:masterClrMapping/>
-  </p:clrMapOvr>
-</p:sld>
-</file>
-
-<file path=ppt/slides/slide9.xml><?xml version="1.0" encoding="utf-8"?>
-<p:sld xmlns:a="http://schemas.openxmlformats.org/drawingml/2006/main" xmlns:r="http://schemas.openxmlformats.org/officeDocument/2006/relationships" xmlns:p="http://schemas.openxmlformats.org/presentationml/2006/main">
-  <p:cSld name="Slide 9">
-    <p:bg>
-      <p:bgPr>
-        <a:solidFill>
-          <a:srgbClr val="E9EEF5"/>
-        </a:solidFill>
-      </p:bgPr>
-    </p:bg>
-    <p:spTree>
-      <p:nvGrpSpPr>
-        <p:cNvPr id="1" name=""/>
-        <p:cNvGrpSpPr/>
-        <p:nvPr/>
-      </p:nvGrpSpPr>
-      <p:grpSpPr>
-        <a:xfrm>
-          <a:off x="0" y="0"/>
-          <a:ext cx="0" cy="0"/>
-          <a:chOff x="0" y="0"/>
-          <a:chExt cx="0" cy="0"/>
-        </a:xfrm>
-      </p:grpSpPr>
-      <p:sp>
-        <p:nvSpPr>
-          <p:cNvPr id="2" name="Shape 0"/>
-          <p:cNvSpPr/>
-          <p:nvPr/>
-        </p:nvSpPr>
-        <p:spPr>
-          <a:xfrm>
-            <a:off x="10362895" y="502920"/>
-            <a:ext cx="822960" cy="822960"/>
-          </a:xfrm>
-          <a:prstGeom prst="ellipse">
-            <a:avLst/>
-          </a:prstGeom>
-          <a:solidFill>
-            <a:srgbClr val="F7FAFC">
-              <a:alpha val="92000"/>
-            </a:srgbClr>
-          </a:solidFill>
-          <a:ln w="12700">
-            <a:solidFill>
-              <a:srgbClr val="FFFFFF">
-                <a:alpha val="0"/>
-              </a:srgbClr>
-            </a:solidFill>
-            <a:prstDash val="solid"/>
-          </a:ln>
-          <a:effectLst>
-            <a:outerShdw sx="100000" sy="100000" kx="0" ky="0" algn="bl" rotWithShape="0" blurRad="15240" dist="50800" dir="2700000">
-              <a:srgbClr val="C7D0DE">
-                <a:alpha val="22000"/>
-              </a:srgbClr>
-            </a:outerShdw>
-          </a:effectLst>
-        </p:spPr>
-      </p:sp>
-      <p:sp>
-        <p:nvSpPr>
-          <p:cNvPr id="3" name="Shape 1"/>
-          <p:cNvSpPr/>
-          <p:nvPr/>
-        </p:nvSpPr>
-        <p:spPr>
-          <a:xfrm>
-            <a:off x="530352" y="5687568"/>
-            <a:ext cx="658368" cy="658368"/>
-          </a:xfrm>
-          <a:prstGeom prst="ellipse">
-            <a:avLst/>
-          </a:prstGeom>
-          <a:solidFill>
-            <a:srgbClr val="E9EEF5"/>
-          </a:solidFill>
-          <a:ln w="12700">
-            <a:solidFill>
-              <a:srgbClr val="FFFFFF">
-                <a:alpha val="42000"/>
-              </a:srgbClr>
-            </a:solidFill>
-            <a:prstDash val="solid"/>
-          </a:ln>
-          <a:effectLst>
-            <a:outerShdw sx="100000" sy="100000" kx="0" ky="0" algn="bl" rotWithShape="0" blurRad="12700" dist="50800" dir="2700000">
-              <a:srgbClr val="B8C3D2">
-                <a:alpha val="18000"/>
-              </a:srgbClr>
-            </a:outerShdw>
-          </a:effectLst>
-        </p:spPr>
-      </p:sp>
-      <p:sp>
-        <p:nvSpPr>
-          <p:cNvPr id="4" name="Shape 2"/>
-          <p:cNvSpPr/>
-          <p:nvPr/>
-        </p:nvSpPr>
-        <p:spPr>
-          <a:xfrm>
-            <a:off x="731520" y="1207008"/>
-            <a:ext cx="1325880" cy="54864"/>
-          </a:xfrm>
-          <a:prstGeom prst="rect">
-            <a:avLst/>
-          </a:prstGeom>
-          <a:solidFill>
-            <a:srgbClr val="4F6F8F"/>
-          </a:solidFill>
-          <a:ln w="12700">
-            <a:solidFill>
-              <a:srgbClr val="4F6F8F">
-                <a:alpha val="0"/>
-              </a:srgbClr>
-            </a:solidFill>
-            <a:prstDash val="solid"/>
-          </a:ln>
-        </p:spPr>
-      </p:sp>
-      <p:sp>
-        <p:nvSpPr>
-          <p:cNvPr id="5" name="Text 3"/>
-          <p:cNvSpPr txBox="1"/>
-          <p:nvPr/>
-        </p:nvSpPr>
-        <p:spPr>
-          <a:xfrm>
-            <a:off x="731520" y="457200"/>
-            <a:ext cx="10698480" cy="731520"/>
-          </a:xfrm>
-          <a:prstGeom prst="rect">
-            <a:avLst/>
-          </a:prstGeom>
-          <a:noFill/>
-          <a:ln/>
-        </p:spPr>
-        <p:txBody>
-          <a:bodyPr wrap="square" lIns="0" tIns="0" rIns="0" bIns="0" rtlCol="0" anchor="ctr"/>
-          <a:lstStyle/>
-          <a:p>
-            <a:pPr algn="ctr" indent="0" marL="0">
-              <a:lnSpc>
-                <a:spcPct val="120000"/>
-              </a:lnSpc>
-              <a:buNone/>
-            </a:pPr>
-            <a:r>
-              <a:rPr lang="en-US" sz="3400" b="1" dirty="0">
-                <a:solidFill>
-                  <a:srgbClr val="243041"/>
-                </a:solidFill>
-                <a:latin typeface="Pretendard" pitchFamily="34" charset="0"/>
-                <a:ea typeface="Pretendard" pitchFamily="34" charset="-122"/>
-                <a:cs typeface="Pretendard" pitchFamily="34" charset="-120"/>
-              </a:rPr>
-              <a:t>Pipeline Diagram</a:t>
-            </a:r>
-            <a:endParaRPr lang="en-US" sz="3400" dirty="0"/>
-          </a:p>
-        </p:txBody>
-      </p:sp>
-      <p:sp>
-        <p:nvSpPr>
-          <p:cNvPr id="6" name="Shape 4"/>
-          <p:cNvSpPr/>
-          <p:nvPr/>
-        </p:nvSpPr>
-        <p:spPr>
-          <a:xfrm>
-            <a:off x="4002024" y="3095244"/>
-            <a:ext cx="457200" cy="0"/>
-          </a:xfrm>
-          <a:prstGeom prst="line">
-            <a:avLst/>
-          </a:prstGeom>
-          <a:noFill/>
-          <a:ln w="12700">
-            <a:solidFill>
-              <a:srgbClr val="4F6F8F"/>
-            </a:solidFill>
-            <a:prstDash val="solid"/>
-            <a:tailEnd type="triangle"/>
-          </a:ln>
-        </p:spPr>
-      </p:sp>
-      <p:sp>
-        <p:nvSpPr>
-          <p:cNvPr id="7" name="Shape 5"/>
-          <p:cNvSpPr/>
-          <p:nvPr/>
-        </p:nvSpPr>
-        <p:spPr>
-          <a:xfrm>
-            <a:off x="7748016" y="3095244"/>
-            <a:ext cx="457200" cy="0"/>
-          </a:xfrm>
-          <a:prstGeom prst="line">
-            <a:avLst/>
-          </a:prstGeom>
-          <a:noFill/>
-          <a:ln w="12700">
-            <a:solidFill>
-              <a:srgbClr val="4F6F8F"/>
-            </a:solidFill>
-            <a:prstDash val="solid"/>
-            <a:tailEnd type="triangle"/>
-          </a:ln>
-        </p:spPr>
-      </p:sp>
-      <p:sp>
-        <p:nvSpPr>
-          <p:cNvPr id="8" name="Shape 6"/>
-          <p:cNvSpPr/>
-          <p:nvPr/>
-        </p:nvSpPr>
-        <p:spPr>
-          <a:xfrm>
-            <a:off x="9849612" y="3627791"/>
-            <a:ext cx="0" cy="416235"/>
-          </a:xfrm>
-          <a:prstGeom prst="line">
-            <a:avLst/>
-          </a:prstGeom>
-          <a:noFill/>
-          <a:ln w="12700">
-            <a:solidFill>
-              <a:srgbClr val="4F6F8F"/>
-            </a:solidFill>
-            <a:prstDash val="solid"/>
-            <a:tailEnd type="triangle"/>
-          </a:ln>
-        </p:spPr>
-      </p:sp>
-      <p:sp>
-        <p:nvSpPr>
-          <p:cNvPr id="9" name="Shape 7"/>
-          <p:cNvSpPr/>
-          <p:nvPr/>
-        </p:nvSpPr>
-        <p:spPr>
-          <a:xfrm>
-            <a:off x="7748016" y="4576572"/>
-            <a:ext cx="457200" cy="0"/>
-          </a:xfrm>
-          <a:prstGeom prst="line">
-            <a:avLst/>
-          </a:prstGeom>
-          <a:noFill/>
-          <a:ln w="12700">
-            <a:solidFill>
-              <a:srgbClr val="4F6F8F"/>
-            </a:solidFill>
-            <a:prstDash val="solid"/>
-            <a:headEnd type="triangle"/>
-          </a:ln>
-        </p:spPr>
-      </p:sp>
-      <p:sp>
-        <p:nvSpPr>
-          <p:cNvPr id="10" name="Shape 8"/>
-          <p:cNvSpPr/>
-          <p:nvPr/>
-        </p:nvSpPr>
-        <p:spPr>
-          <a:xfrm>
-            <a:off x="4002024" y="4576572"/>
-            <a:ext cx="457200" cy="0"/>
-          </a:xfrm>
-          <a:prstGeom prst="line">
-            <a:avLst/>
-          </a:prstGeom>
-          <a:noFill/>
-          <a:ln w="12700">
-            <a:solidFill>
-              <a:srgbClr val="4F6F8F"/>
-            </a:solidFill>
-            <a:prstDash val="solid"/>
-            <a:headEnd type="triangle"/>
-          </a:ln>
-        </p:spPr>
-      </p:sp>
-      <p:sp>
-        <p:nvSpPr>
-          <p:cNvPr id="11" name="Shape 9"/>
-          <p:cNvSpPr/>
-          <p:nvPr/>
-        </p:nvSpPr>
-        <p:spPr>
-          <a:xfrm>
-            <a:off x="640080" y="2510028"/>
-            <a:ext cx="3435096" cy="1170432"/>
-          </a:xfrm>
-          <a:prstGeom prst="roundRect">
-            <a:avLst>
-              <a:gd name="adj" fmla="val 4688"/>
-            </a:avLst>
-          </a:prstGeom>
-          <a:solidFill>
-            <a:srgbClr val="E9EEF5"/>
-          </a:solidFill>
-          <a:ln w="12700">
-            <a:solidFill>
-              <a:srgbClr val="4F6F8F"/>
-            </a:solidFill>
-            <a:prstDash val="solid"/>
-          </a:ln>
-          <a:effectLst>
-            <a:outerShdw sx="100000" sy="100000" kx="0" ky="0" algn="bl" rotWithShape="0" blurRad="12700" dist="50800" dir="2700000">
-              <a:srgbClr val="000000">
-                <a:alpha val="12000"/>
-              </a:srgbClr>
-            </a:outerShdw>
-          </a:effectLst>
-        </p:spPr>
-      </p:sp>
-      <p:sp>
-        <p:nvSpPr>
-          <p:cNvPr id="12" name="Shape 10"/>
-          <p:cNvSpPr/>
-          <p:nvPr/>
-        </p:nvSpPr>
-        <p:spPr>
-          <a:xfrm>
-            <a:off x="640080" y="2510028"/>
-            <a:ext cx="3435096" cy="109728"/>
-          </a:xfrm>
-          <a:prstGeom prst="rect">
-            <a:avLst/>
-          </a:prstGeom>
-          <a:solidFill>
-            <a:srgbClr val="4F6F8F"/>
-          </a:solidFill>
-          <a:ln w="12700">
-            <a:solidFill>
-              <a:srgbClr val="4F6F8F">
-                <a:alpha val="0"/>
-              </a:srgbClr>
-            </a:solidFill>
-            <a:prstDash val="solid"/>
-          </a:ln>
-        </p:spPr>
-      </p:sp>
-      <p:sp>
-        <p:nvSpPr>
-          <p:cNvPr id="13" name="Shape 11"/>
-          <p:cNvSpPr/>
-          <p:nvPr/>
-        </p:nvSpPr>
-        <p:spPr>
-          <a:xfrm>
-            <a:off x="804672" y="2907975"/>
-            <a:ext cx="374538" cy="374538"/>
-          </a:xfrm>
-          <a:prstGeom prst="ellipse">
-            <a:avLst/>
-          </a:prstGeom>
-          <a:solidFill>
-            <a:srgbClr val="4F6F8F"/>
-          </a:solidFill>
-          <a:ln w="12700">
-            <a:solidFill>
-              <a:srgbClr val="4F6F8F">
-                <a:alpha val="0"/>
-              </a:srgbClr>
-            </a:solidFill>
-            <a:prstDash val="solid"/>
-          </a:ln>
-        </p:spPr>
-      </p:sp>
-      <p:sp>
-        <p:nvSpPr>
-          <p:cNvPr id="14" name="Text 12"/>
-          <p:cNvSpPr txBox="1"/>
-          <p:nvPr/>
-        </p:nvSpPr>
-        <p:spPr>
-          <a:xfrm>
-            <a:off x="804672" y="2907975"/>
-            <a:ext cx="374538" cy="374538"/>
-          </a:xfrm>
-          <a:prstGeom prst="rect">
-            <a:avLst/>
-          </a:prstGeom>
-          <a:noFill/>
-          <a:ln/>
-        </p:spPr>
-        <p:txBody>
-          <a:bodyPr wrap="square" lIns="0" tIns="0" rIns="0" bIns="0" rtlCol="0" anchor="ctr">
-            <a:normAutofit/>
-          </a:bodyPr>
-          <a:lstStyle/>
-          <a:p>
-            <a:pPr algn="ctr" indent="0" marL="0">
-              <a:lnSpc>
-                <a:spcPct val="120000"/>
-              </a:lnSpc>
-              <a:buNone/>
-            </a:pPr>
-            <a:r>
-              <a:rPr lang="en-US" sz="1500" b="1" dirty="0">
-                <a:solidFill>
-                  <a:srgbClr val="E9EEF5"/>
-                </a:solidFill>
-                <a:latin typeface="Pretendard" pitchFamily="34" charset="0"/>
-                <a:ea typeface="Pretendard" pitchFamily="34" charset="-122"/>
-                <a:cs typeface="Pretendard" pitchFamily="34" charset="-120"/>
-              </a:rPr>
-              <a:t>1</a:t>
-            </a:r>
-            <a:endParaRPr lang="en-US" sz="1500" dirty="0"/>
-          </a:p>
-        </p:txBody>
-      </p:sp>
-      <p:sp>
-        <p:nvSpPr>
-          <p:cNvPr id="15" name="Text 13"/>
-          <p:cNvSpPr txBox="1"/>
-          <p:nvPr/>
-        </p:nvSpPr>
-        <p:spPr>
-          <a:xfrm>
-            <a:off x="1325514" y="2638044"/>
-            <a:ext cx="2585070" cy="914400"/>
-          </a:xfrm>
-          <a:prstGeom prst="rect">
-            <a:avLst/>
-          </a:prstGeom>
-          <a:noFill/>
-          <a:ln/>
-        </p:spPr>
-        <p:txBody>
-          <a:bodyPr wrap="square" lIns="0" tIns="25400" rIns="25400" bIns="0" rtlCol="0" anchor="ctr">
-            <a:normAutofit/>
-          </a:bodyPr>
-          <a:lstStyle/>
-          <a:p>
-            <a:pPr algn="l" indent="0" marL="0">
-              <a:lnSpc>
-                <a:spcPct val="92000"/>
-              </a:lnSpc>
-              <a:buNone/>
-            </a:pPr>
-            <a:r>
-              <a:rPr lang="en-US" sz="1600" dirty="0">
-                <a:solidFill>
-                  <a:srgbClr val="243041"/>
-                </a:solidFill>
-                <a:latin typeface="Pretendard" pitchFamily="34" charset="0"/>
-                <a:ea typeface="Pretendard" pitchFamily="34" charset="-122"/>
-                <a:cs typeface="Pretendard" pitchFamily="34" charset="-120"/>
-              </a:rPr>
-              <a:t>Markdown source</a:t>
-            </a:r>
-            <a:endParaRPr lang="en-US" sz="1600" dirty="0"/>
-          </a:p>
-        </p:txBody>
-      </p:sp>
-      <p:sp>
-        <p:nvSpPr>
-          <p:cNvPr id="16" name="Shape 14"/>
-          <p:cNvSpPr/>
-          <p:nvPr/>
-        </p:nvSpPr>
-        <p:spPr>
-          <a:xfrm>
-            <a:off x="4386072" y="2510028"/>
-            <a:ext cx="3435096" cy="1170432"/>
-          </a:xfrm>
-          <a:prstGeom prst="roundRect">
-            <a:avLst>
-              <a:gd name="adj" fmla="val 4688"/>
-            </a:avLst>
-          </a:prstGeom>
-          <a:solidFill>
-            <a:srgbClr val="E9EEF5"/>
-          </a:solidFill>
-          <a:ln w="12700">
-            <a:solidFill>
-              <a:srgbClr val="4F6F8F"/>
-            </a:solidFill>
-            <a:prstDash val="solid"/>
-          </a:ln>
-          <a:effectLst>
-            <a:outerShdw sx="100000" sy="100000" kx="0" ky="0" algn="bl" rotWithShape="0" blurRad="12700" dist="50800" dir="2700000">
-              <a:srgbClr val="000000">
-                <a:alpha val="12000"/>
-              </a:srgbClr>
-            </a:outerShdw>
-          </a:effectLst>
-        </p:spPr>
-      </p:sp>
-      <p:sp>
-        <p:nvSpPr>
-          <p:cNvPr id="17" name="Shape 15"/>
-          <p:cNvSpPr/>
-          <p:nvPr/>
-        </p:nvSpPr>
-        <p:spPr>
-          <a:xfrm>
-            <a:off x="4386072" y="2510028"/>
-            <a:ext cx="3435096" cy="109728"/>
-          </a:xfrm>
-          <a:prstGeom prst="rect">
-            <a:avLst/>
-          </a:prstGeom>
-          <a:solidFill>
-            <a:srgbClr val="4F6F8F"/>
-          </a:solidFill>
-          <a:ln w="12700">
-            <a:solidFill>
-              <a:srgbClr val="4F6F8F">
-                <a:alpha val="0"/>
-              </a:srgbClr>
-            </a:solidFill>
-            <a:prstDash val="solid"/>
-          </a:ln>
-        </p:spPr>
-      </p:sp>
-      <p:sp>
-        <p:nvSpPr>
-          <p:cNvPr id="18" name="Shape 16"/>
-          <p:cNvSpPr/>
-          <p:nvPr/>
-        </p:nvSpPr>
-        <p:spPr>
-          <a:xfrm>
-            <a:off x="4550664" y="2907975"/>
-            <a:ext cx="374538" cy="374538"/>
-          </a:xfrm>
-          <a:prstGeom prst="ellipse">
-            <a:avLst/>
-          </a:prstGeom>
-          <a:solidFill>
-            <a:srgbClr val="4F6F8F"/>
-          </a:solidFill>
-          <a:ln w="12700">
-            <a:solidFill>
-              <a:srgbClr val="4F6F8F">
-                <a:alpha val="0"/>
-              </a:srgbClr>
-            </a:solidFill>
-            <a:prstDash val="solid"/>
-          </a:ln>
-        </p:spPr>
-      </p:sp>
-      <p:sp>
-        <p:nvSpPr>
-          <p:cNvPr id="19" name="Text 17"/>
-          <p:cNvSpPr txBox="1"/>
-          <p:nvPr/>
-        </p:nvSpPr>
-        <p:spPr>
-          <a:xfrm>
-            <a:off x="4550664" y="2907975"/>
-            <a:ext cx="374538" cy="374538"/>
-          </a:xfrm>
-          <a:prstGeom prst="rect">
-            <a:avLst/>
-          </a:prstGeom>
-          <a:noFill/>
-          <a:ln/>
-        </p:spPr>
-        <p:txBody>
-          <a:bodyPr wrap="square" lIns="0" tIns="0" rIns="0" bIns="0" rtlCol="0" anchor="ctr">
-            <a:normAutofit/>
-          </a:bodyPr>
-          <a:lstStyle/>
-          <a:p>
-            <a:pPr algn="ctr" indent="0" marL="0">
-              <a:lnSpc>
-                <a:spcPct val="120000"/>
-              </a:lnSpc>
-              <a:buNone/>
-            </a:pPr>
-            <a:r>
-              <a:rPr lang="en-US" sz="1500" b="1" dirty="0">
-                <a:solidFill>
-                  <a:srgbClr val="E9EEF5"/>
-                </a:solidFill>
-                <a:latin typeface="Pretendard" pitchFamily="34" charset="0"/>
-                <a:ea typeface="Pretendard" pitchFamily="34" charset="-122"/>
-                <a:cs typeface="Pretendard" pitchFamily="34" charset="-120"/>
-              </a:rPr>
-              <a:t>2</a:t>
-            </a:r>
-            <a:endParaRPr lang="en-US" sz="1500" dirty="0"/>
-          </a:p>
-        </p:txBody>
-      </p:sp>
-      <p:sp>
-        <p:nvSpPr>
-          <p:cNvPr id="20" name="Text 18"/>
-          <p:cNvSpPr txBox="1"/>
-          <p:nvPr/>
-        </p:nvSpPr>
-        <p:spPr>
-          <a:xfrm>
-            <a:off x="5071506" y="2638044"/>
-            <a:ext cx="2585070" cy="914400"/>
-          </a:xfrm>
-          <a:prstGeom prst="rect">
-            <a:avLst/>
-          </a:prstGeom>
-          <a:noFill/>
-          <a:ln/>
-        </p:spPr>
-        <p:txBody>
-          <a:bodyPr wrap="square" lIns="0" tIns="25400" rIns="25400" bIns="0" rtlCol="0" anchor="ctr">
-            <a:normAutofit/>
-          </a:bodyPr>
-          <a:lstStyle/>
-          <a:p>
-            <a:pPr algn="l" indent="0" marL="0">
-              <a:lnSpc>
-                <a:spcPct val="92000"/>
-              </a:lnSpc>
-              <a:buNone/>
-            </a:pPr>
-            <a:r>
-              <a:rPr lang="en-US" sz="1600" dirty="0">
-                <a:solidFill>
-                  <a:srgbClr val="243041"/>
-                </a:solidFill>
-                <a:latin typeface="Pretendard" pitchFamily="34" charset="0"/>
-                <a:ea typeface="Pretendard" pitchFamily="34" charset="-122"/>
-                <a:cs typeface="Pretendard" pitchFamily="34" charset="-120"/>
-              </a:rPr>
-              <a:t>Parse blocks</a:t>
-            </a:r>
-            <a:endParaRPr lang="en-US" sz="1600" dirty="0"/>
-          </a:p>
-        </p:txBody>
-      </p:sp>
-      <p:sp>
-        <p:nvSpPr>
-          <p:cNvPr id="21" name="Shape 19"/>
-          <p:cNvSpPr/>
-          <p:nvPr/>
-        </p:nvSpPr>
-        <p:spPr>
-          <a:xfrm>
-            <a:off x="8132064" y="2510028"/>
-            <a:ext cx="3435096" cy="1170432"/>
-          </a:xfrm>
-          <a:prstGeom prst="roundRect">
-            <a:avLst>
-              <a:gd name="adj" fmla="val 4688"/>
-            </a:avLst>
-          </a:prstGeom>
-          <a:solidFill>
-            <a:srgbClr val="E9EEF5"/>
-          </a:solidFill>
-          <a:ln w="12700">
-            <a:solidFill>
-              <a:srgbClr val="4F6F8F"/>
-            </a:solidFill>
-            <a:prstDash val="solid"/>
-          </a:ln>
-          <a:effectLst>
-            <a:outerShdw sx="100000" sy="100000" kx="0" ky="0" algn="bl" rotWithShape="0" blurRad="12700" dist="50800" dir="2700000">
-              <a:srgbClr val="000000">
-                <a:alpha val="12000"/>
-              </a:srgbClr>
-            </a:outerShdw>
-          </a:effectLst>
-        </p:spPr>
-      </p:sp>
-      <p:sp>
-        <p:nvSpPr>
-          <p:cNvPr id="22" name="Shape 20"/>
-          <p:cNvSpPr/>
-          <p:nvPr/>
-        </p:nvSpPr>
-        <p:spPr>
-          <a:xfrm>
-            <a:off x="8132064" y="2510028"/>
-            <a:ext cx="3435096" cy="109728"/>
-          </a:xfrm>
-          <a:prstGeom prst="rect">
-            <a:avLst/>
-          </a:prstGeom>
-          <a:solidFill>
-            <a:srgbClr val="4F6F8F"/>
-          </a:solidFill>
-          <a:ln w="12700">
-            <a:solidFill>
-              <a:srgbClr val="4F6F8F">
-                <a:alpha val="0"/>
-              </a:srgbClr>
-            </a:solidFill>
-            <a:prstDash val="solid"/>
-          </a:ln>
-        </p:spPr>
-      </p:sp>
-      <p:sp>
-        <p:nvSpPr>
-          <p:cNvPr id="23" name="Shape 21"/>
-          <p:cNvSpPr/>
-          <p:nvPr/>
-        </p:nvSpPr>
-        <p:spPr>
-          <a:xfrm>
-            <a:off x="8296656" y="2907975"/>
-            <a:ext cx="374538" cy="374538"/>
-          </a:xfrm>
-          <a:prstGeom prst="ellipse">
-            <a:avLst/>
-          </a:prstGeom>
-          <a:solidFill>
-            <a:srgbClr val="4F6F8F"/>
-          </a:solidFill>
-          <a:ln w="12700">
-            <a:solidFill>
-              <a:srgbClr val="4F6F8F">
-                <a:alpha val="0"/>
-              </a:srgbClr>
-            </a:solidFill>
-            <a:prstDash val="solid"/>
-          </a:ln>
-        </p:spPr>
-      </p:sp>
-      <p:sp>
-        <p:nvSpPr>
-          <p:cNvPr id="24" name="Text 22"/>
-          <p:cNvSpPr txBox="1"/>
-          <p:nvPr/>
-        </p:nvSpPr>
-        <p:spPr>
-          <a:xfrm>
-            <a:off x="8296656" y="2907975"/>
-            <a:ext cx="374538" cy="374538"/>
-          </a:xfrm>
-          <a:prstGeom prst="rect">
-            <a:avLst/>
-          </a:prstGeom>
-          <a:noFill/>
-          <a:ln/>
-        </p:spPr>
-        <p:txBody>
-          <a:bodyPr wrap="square" lIns="0" tIns="0" rIns="0" bIns="0" rtlCol="0" anchor="ctr">
-            <a:normAutofit/>
-          </a:bodyPr>
-          <a:lstStyle/>
-          <a:p>
-            <a:pPr algn="ctr" indent="0" marL="0">
-              <a:lnSpc>
-                <a:spcPct val="120000"/>
-              </a:lnSpc>
-              <a:buNone/>
-            </a:pPr>
-            <a:r>
-              <a:rPr lang="en-US" sz="1500" b="1" dirty="0">
-                <a:solidFill>
-                  <a:srgbClr val="E9EEF5"/>
-                </a:solidFill>
-                <a:latin typeface="Pretendard" pitchFamily="34" charset="0"/>
-                <a:ea typeface="Pretendard" pitchFamily="34" charset="-122"/>
-                <a:cs typeface="Pretendard" pitchFamily="34" charset="-120"/>
-              </a:rPr>
-              <a:t>3</a:t>
-            </a:r>
-            <a:endParaRPr lang="en-US" sz="1500" dirty="0"/>
-          </a:p>
-        </p:txBody>
-      </p:sp>
-      <p:sp>
-        <p:nvSpPr>
-          <p:cNvPr id="25" name="Text 23"/>
-          <p:cNvSpPr txBox="1"/>
-          <p:nvPr/>
-        </p:nvSpPr>
-        <p:spPr>
-          <a:xfrm>
-            <a:off x="8817498" y="2638044"/>
-            <a:ext cx="2585070" cy="914400"/>
-          </a:xfrm>
-          <a:prstGeom prst="rect">
-            <a:avLst/>
-          </a:prstGeom>
-          <a:noFill/>
-          <a:ln/>
-        </p:spPr>
-        <p:txBody>
-          <a:bodyPr wrap="square" lIns="0" tIns="25400" rIns="25400" bIns="0" rtlCol="0" anchor="ctr">
-            <a:normAutofit/>
-          </a:bodyPr>
-          <a:lstStyle/>
-          <a:p>
-            <a:pPr algn="l" indent="0" marL="0">
-              <a:lnSpc>
-                <a:spcPct val="92000"/>
-              </a:lnSpc>
-              <a:buNone/>
-            </a:pPr>
-            <a:r>
-              <a:rPr lang="en-US" sz="1600" dirty="0">
-                <a:solidFill>
-                  <a:srgbClr val="243041"/>
-                </a:solidFill>
-                <a:latin typeface="Pretendard" pitchFamily="34" charset="0"/>
-                <a:ea typeface="Pretendard" pitchFamily="34" charset="-122"/>
-                <a:cs typeface="Pretendard" pitchFamily="34" charset="-120"/>
-              </a:rPr>
-              <a:t>Split slides</a:t>
-            </a:r>
-            <a:endParaRPr lang="en-US" sz="1600" dirty="0"/>
-          </a:p>
-        </p:txBody>
-      </p:sp>
-      <p:sp>
-        <p:nvSpPr>
-          <p:cNvPr id="26" name="Shape 24"/>
-          <p:cNvSpPr/>
-          <p:nvPr/>
-        </p:nvSpPr>
-        <p:spPr>
-          <a:xfrm>
-            <a:off x="8132064" y="3991356"/>
-            <a:ext cx="3435096" cy="1170432"/>
-          </a:xfrm>
-          <a:prstGeom prst="roundRect">
-            <a:avLst>
-              <a:gd name="adj" fmla="val 4688"/>
-            </a:avLst>
-          </a:prstGeom>
-          <a:solidFill>
-            <a:srgbClr val="E9EEF5"/>
-          </a:solidFill>
-          <a:ln w="12700">
-            <a:solidFill>
-              <a:srgbClr val="4F6F8F"/>
-            </a:solidFill>
-            <a:prstDash val="solid"/>
-          </a:ln>
-          <a:effectLst>
-            <a:outerShdw sx="100000" sy="100000" kx="0" ky="0" algn="bl" rotWithShape="0" blurRad="12700" dist="50800" dir="2700000">
-              <a:srgbClr val="000000">
-                <a:alpha val="12000"/>
-              </a:srgbClr>
-            </a:outerShdw>
-          </a:effectLst>
-        </p:spPr>
-      </p:sp>
-      <p:sp>
-        <p:nvSpPr>
-          <p:cNvPr id="27" name="Shape 25"/>
-          <p:cNvSpPr/>
-          <p:nvPr/>
-        </p:nvSpPr>
-        <p:spPr>
-          <a:xfrm>
-            <a:off x="8132064" y="3991356"/>
-            <a:ext cx="3435096" cy="109728"/>
-          </a:xfrm>
-          <a:prstGeom prst="rect">
-            <a:avLst/>
-          </a:prstGeom>
-          <a:solidFill>
-            <a:srgbClr val="4F6F8F"/>
-          </a:solidFill>
-          <a:ln w="12700">
-            <a:solidFill>
-              <a:srgbClr val="4F6F8F">
-                <a:alpha val="0"/>
-              </a:srgbClr>
-            </a:solidFill>
-            <a:prstDash val="solid"/>
-          </a:ln>
-        </p:spPr>
-      </p:sp>
-      <p:sp>
-        <p:nvSpPr>
-          <p:cNvPr id="28" name="Shape 26"/>
-          <p:cNvSpPr/>
-          <p:nvPr/>
-        </p:nvSpPr>
-        <p:spPr>
-          <a:xfrm>
-            <a:off x="8296656" y="4389303"/>
-            <a:ext cx="374538" cy="374538"/>
-          </a:xfrm>
-          <a:prstGeom prst="ellipse">
-            <a:avLst/>
-          </a:prstGeom>
-          <a:solidFill>
-            <a:srgbClr val="4F6F8F"/>
-          </a:solidFill>
-          <a:ln w="12700">
-            <a:solidFill>
-              <a:srgbClr val="4F6F8F">
-                <a:alpha val="0"/>
-              </a:srgbClr>
-            </a:solidFill>
-            <a:prstDash val="solid"/>
-          </a:ln>
-        </p:spPr>
-      </p:sp>
-      <p:sp>
-        <p:nvSpPr>
-          <p:cNvPr id="29" name="Text 27"/>
-          <p:cNvSpPr txBox="1"/>
-          <p:nvPr/>
-        </p:nvSpPr>
-        <p:spPr>
-          <a:xfrm>
-            <a:off x="8296656" y="4389303"/>
-            <a:ext cx="374538" cy="374538"/>
-          </a:xfrm>
-          <a:prstGeom prst="rect">
-            <a:avLst/>
-          </a:prstGeom>
-          <a:noFill/>
-          <a:ln/>
-        </p:spPr>
-        <p:txBody>
-          <a:bodyPr wrap="square" lIns="0" tIns="0" rIns="0" bIns="0" rtlCol="0" anchor="ctr">
-            <a:normAutofit/>
-          </a:bodyPr>
-          <a:lstStyle/>
-          <a:p>
-            <a:pPr algn="ctr" indent="0" marL="0">
-              <a:lnSpc>
-                <a:spcPct val="120000"/>
-              </a:lnSpc>
-              <a:buNone/>
-            </a:pPr>
-            <a:r>
-              <a:rPr lang="en-US" sz="1500" b="1" dirty="0">
-                <a:solidFill>
-                  <a:srgbClr val="E9EEF5"/>
-                </a:solidFill>
-                <a:latin typeface="Pretendard" pitchFamily="34" charset="0"/>
-                <a:ea typeface="Pretendard" pitchFamily="34" charset="-122"/>
-                <a:cs typeface="Pretendard" pitchFamily="34" charset="-120"/>
-              </a:rPr>
-              <a:t>4</a:t>
-            </a:r>
-            <a:endParaRPr lang="en-US" sz="1500" dirty="0"/>
-          </a:p>
-        </p:txBody>
-      </p:sp>
-      <p:sp>
-        <p:nvSpPr>
-          <p:cNvPr id="30" name="Text 28"/>
-          <p:cNvSpPr txBox="1"/>
-          <p:nvPr/>
-        </p:nvSpPr>
-        <p:spPr>
-          <a:xfrm>
-            <a:off x="8817498" y="4119372"/>
-            <a:ext cx="2585070" cy="914400"/>
-          </a:xfrm>
-          <a:prstGeom prst="rect">
-            <a:avLst/>
-          </a:prstGeom>
-          <a:noFill/>
-          <a:ln/>
-        </p:spPr>
-        <p:txBody>
-          <a:bodyPr wrap="square" lIns="0" tIns="25400" rIns="25400" bIns="0" rtlCol="0" anchor="ctr">
-            <a:normAutofit/>
-          </a:bodyPr>
-          <a:lstStyle/>
-          <a:p>
-            <a:pPr algn="l" indent="0" marL="0">
-              <a:lnSpc>
-                <a:spcPct val="92000"/>
-              </a:lnSpc>
-              <a:buNone/>
-            </a:pPr>
-            <a:r>
-              <a:rPr lang="en-US" sz="1600" dirty="0">
-                <a:solidFill>
-                  <a:srgbClr val="243041"/>
-                </a:solidFill>
-                <a:latin typeface="Pretendard" pitchFamily="34" charset="0"/>
-                <a:ea typeface="Pretendard" pitchFamily="34" charset="-122"/>
-                <a:cs typeface="Pretendard" pitchFamily="34" charset="-120"/>
-              </a:rPr>
-              <a:t>Layout objects</a:t>
-            </a:r>
-            <a:endParaRPr lang="en-US" sz="1600" dirty="0"/>
-          </a:p>
-        </p:txBody>
-      </p:sp>
-      <p:sp>
-        <p:nvSpPr>
-          <p:cNvPr id="31" name="Shape 29"/>
-          <p:cNvSpPr/>
-          <p:nvPr/>
-        </p:nvSpPr>
-        <p:spPr>
-          <a:xfrm>
-            <a:off x="4386072" y="3991356"/>
-            <a:ext cx="3435096" cy="1170432"/>
-          </a:xfrm>
-          <a:prstGeom prst="roundRect">
-            <a:avLst>
-              <a:gd name="adj" fmla="val 4688"/>
-            </a:avLst>
-          </a:prstGeom>
-          <a:solidFill>
-            <a:srgbClr val="E9EEF5"/>
-          </a:solidFill>
-          <a:ln w="12700">
-            <a:solidFill>
-              <a:srgbClr val="4F6F8F"/>
-            </a:solidFill>
-            <a:prstDash val="solid"/>
-          </a:ln>
-          <a:effectLst>
-            <a:outerShdw sx="100000" sy="100000" kx="0" ky="0" algn="bl" rotWithShape="0" blurRad="12700" dist="50800" dir="2700000">
-              <a:srgbClr val="000000">
-                <a:alpha val="12000"/>
-              </a:srgbClr>
-            </a:outerShdw>
-          </a:effectLst>
-        </p:spPr>
-      </p:sp>
-      <p:sp>
-        <p:nvSpPr>
-          <p:cNvPr id="32" name="Shape 30"/>
-          <p:cNvSpPr/>
-          <p:nvPr/>
-        </p:nvSpPr>
-        <p:spPr>
-          <a:xfrm>
-            <a:off x="4386072" y="3991356"/>
-            <a:ext cx="3435096" cy="109728"/>
-          </a:xfrm>
-          <a:prstGeom prst="rect">
-            <a:avLst/>
-          </a:prstGeom>
-          <a:solidFill>
-            <a:srgbClr val="4F6F8F"/>
-          </a:solidFill>
-          <a:ln w="12700">
-            <a:solidFill>
-              <a:srgbClr val="4F6F8F">
-                <a:alpha val="0"/>
-              </a:srgbClr>
-            </a:solidFill>
-            <a:prstDash val="solid"/>
-          </a:ln>
-        </p:spPr>
-      </p:sp>
-      <p:sp>
-        <p:nvSpPr>
-          <p:cNvPr id="33" name="Shape 31"/>
-          <p:cNvSpPr/>
-          <p:nvPr/>
-        </p:nvSpPr>
-        <p:spPr>
-          <a:xfrm>
-            <a:off x="4550664" y="4389303"/>
-            <a:ext cx="374538" cy="374538"/>
-          </a:xfrm>
-          <a:prstGeom prst="ellipse">
-            <a:avLst/>
-          </a:prstGeom>
-          <a:solidFill>
-            <a:srgbClr val="4F6F8F"/>
-          </a:solidFill>
-          <a:ln w="12700">
-            <a:solidFill>
-              <a:srgbClr val="4F6F8F">
-                <a:alpha val="0"/>
-              </a:srgbClr>
-            </a:solidFill>
-            <a:prstDash val="solid"/>
-          </a:ln>
-        </p:spPr>
-      </p:sp>
-      <p:sp>
-        <p:nvSpPr>
-          <p:cNvPr id="34" name="Text 32"/>
-          <p:cNvSpPr txBox="1"/>
-          <p:nvPr/>
-        </p:nvSpPr>
-        <p:spPr>
-          <a:xfrm>
-            <a:off x="4550664" y="4389303"/>
-            <a:ext cx="374538" cy="374538"/>
-          </a:xfrm>
-          <a:prstGeom prst="rect">
-            <a:avLst/>
-          </a:prstGeom>
-          <a:noFill/>
-          <a:ln/>
-        </p:spPr>
-        <p:txBody>
-          <a:bodyPr wrap="square" lIns="0" tIns="0" rIns="0" bIns="0" rtlCol="0" anchor="ctr">
-            <a:normAutofit/>
-          </a:bodyPr>
-          <a:lstStyle/>
-          <a:p>
-            <a:pPr algn="ctr" indent="0" marL="0">
-              <a:lnSpc>
-                <a:spcPct val="120000"/>
-              </a:lnSpc>
-              <a:buNone/>
-            </a:pPr>
-            <a:r>
-              <a:rPr lang="en-US" sz="1500" b="1" dirty="0">
-                <a:solidFill>
-                  <a:srgbClr val="E9EEF5"/>
-                </a:solidFill>
-                <a:latin typeface="Pretendard" pitchFamily="34" charset="0"/>
-                <a:ea typeface="Pretendard" pitchFamily="34" charset="-122"/>
-                <a:cs typeface="Pretendard" pitchFamily="34" charset="-120"/>
-              </a:rPr>
-              <a:t>5</a:t>
-            </a:r>
-            <a:endParaRPr lang="en-US" sz="1500" dirty="0"/>
-          </a:p>
-        </p:txBody>
-      </p:sp>
-      <p:sp>
-        <p:nvSpPr>
-          <p:cNvPr id="35" name="Text 33"/>
-          <p:cNvSpPr txBox="1"/>
-          <p:nvPr/>
-        </p:nvSpPr>
-        <p:spPr>
-          <a:xfrm>
-            <a:off x="5071506" y="4119372"/>
-            <a:ext cx="2585070" cy="914400"/>
-          </a:xfrm>
-          <a:prstGeom prst="rect">
-            <a:avLst/>
-          </a:prstGeom>
-          <a:noFill/>
-          <a:ln/>
-        </p:spPr>
-        <p:txBody>
-          <a:bodyPr wrap="square" lIns="0" tIns="25400" rIns="25400" bIns="0" rtlCol="0" anchor="ctr">
-            <a:normAutofit/>
-          </a:bodyPr>
-          <a:lstStyle/>
-          <a:p>
-            <a:pPr algn="l" indent="0" marL="0">
-              <a:lnSpc>
-                <a:spcPct val="92000"/>
-              </a:lnSpc>
-              <a:buNone/>
-            </a:pPr>
-            <a:r>
-              <a:rPr lang="en-US" sz="1600" dirty="0">
-                <a:solidFill>
-                  <a:srgbClr val="243041"/>
-                </a:solidFill>
-                <a:latin typeface="Pretendard" pitchFamily="34" charset="0"/>
-                <a:ea typeface="Pretendard" pitchFamily="34" charset="-122"/>
-                <a:cs typeface="Pretendard" pitchFamily="34" charset="-120"/>
-              </a:rPr>
-              <a:t>Validate overflow</a:t>
-            </a:r>
-            <a:endParaRPr lang="en-US" sz="1600" dirty="0"/>
-          </a:p>
-        </p:txBody>
-      </p:sp>
-      <p:sp>
-        <p:nvSpPr>
-          <p:cNvPr id="36" name="Shape 34"/>
-          <p:cNvSpPr/>
-          <p:nvPr/>
-        </p:nvSpPr>
-        <p:spPr>
-          <a:xfrm>
-            <a:off x="640080" y="3991356"/>
-            <a:ext cx="3435096" cy="1170432"/>
-          </a:xfrm>
-          <a:prstGeom prst="roundRect">
-            <a:avLst>
-              <a:gd name="adj" fmla="val 4688"/>
-            </a:avLst>
-          </a:prstGeom>
-          <a:solidFill>
-            <a:srgbClr val="E9EEF5"/>
-          </a:solidFill>
-          <a:ln w="12700">
-            <a:solidFill>
-              <a:srgbClr val="4F6F8F"/>
-            </a:solidFill>
-            <a:prstDash val="solid"/>
-          </a:ln>
-          <a:effectLst>
-            <a:outerShdw sx="100000" sy="100000" kx="0" ky="0" algn="bl" rotWithShape="0" blurRad="12700" dist="50800" dir="2700000">
-              <a:srgbClr val="000000">
-                <a:alpha val="12000"/>
-              </a:srgbClr>
-            </a:outerShdw>
-          </a:effectLst>
-        </p:spPr>
-      </p:sp>
-      <p:sp>
-        <p:nvSpPr>
-          <p:cNvPr id="37" name="Shape 35"/>
-          <p:cNvSpPr/>
-          <p:nvPr/>
-        </p:nvSpPr>
-        <p:spPr>
-          <a:xfrm>
-            <a:off x="640080" y="3991356"/>
-            <a:ext cx="3435096" cy="109728"/>
-          </a:xfrm>
-          <a:prstGeom prst="rect">
-            <a:avLst/>
-          </a:prstGeom>
-          <a:solidFill>
-            <a:srgbClr val="4F6F8F"/>
-          </a:solidFill>
-          <a:ln w="12700">
-            <a:solidFill>
-              <a:srgbClr val="4F6F8F">
-                <a:alpha val="0"/>
-              </a:srgbClr>
-            </a:solidFill>
-            <a:prstDash val="solid"/>
-          </a:ln>
-        </p:spPr>
-      </p:sp>
-      <p:sp>
-        <p:nvSpPr>
-          <p:cNvPr id="38" name="Shape 36"/>
-          <p:cNvSpPr/>
-          <p:nvPr/>
-        </p:nvSpPr>
-        <p:spPr>
-          <a:xfrm>
-            <a:off x="804672" y="4389303"/>
-            <a:ext cx="374538" cy="374538"/>
-          </a:xfrm>
-          <a:prstGeom prst="ellipse">
-            <a:avLst/>
-          </a:prstGeom>
-          <a:solidFill>
-            <a:srgbClr val="4F6F8F"/>
-          </a:solidFill>
-          <a:ln w="12700">
-            <a:solidFill>
-              <a:srgbClr val="4F6F8F">
-                <a:alpha val="0"/>
-              </a:srgbClr>
-            </a:solidFill>
-            <a:prstDash val="solid"/>
-          </a:ln>
-        </p:spPr>
-      </p:sp>
-      <p:sp>
-        <p:nvSpPr>
-          <p:cNvPr id="39" name="Text 37"/>
-          <p:cNvSpPr txBox="1"/>
-          <p:nvPr/>
-        </p:nvSpPr>
-        <p:spPr>
-          <a:xfrm>
-            <a:off x="804672" y="4389303"/>
-            <a:ext cx="374538" cy="374538"/>
-          </a:xfrm>
-          <a:prstGeom prst="rect">
-            <a:avLst/>
-          </a:prstGeom>
-          <a:noFill/>
-          <a:ln/>
-        </p:spPr>
-        <p:txBody>
-          <a:bodyPr wrap="square" lIns="0" tIns="0" rIns="0" bIns="0" rtlCol="0" anchor="ctr">
-            <a:normAutofit/>
-          </a:bodyPr>
-          <a:lstStyle/>
-          <a:p>
-            <a:pPr algn="ctr" indent="0" marL="0">
-              <a:lnSpc>
-                <a:spcPct val="120000"/>
-              </a:lnSpc>
-              <a:buNone/>
-            </a:pPr>
-            <a:r>
-              <a:rPr lang="en-US" sz="1500" b="1" dirty="0">
-                <a:solidFill>
-                  <a:srgbClr val="E9EEF5"/>
-                </a:solidFill>
-                <a:latin typeface="Pretendard" pitchFamily="34" charset="0"/>
-                <a:ea typeface="Pretendard" pitchFamily="34" charset="-122"/>
-                <a:cs typeface="Pretendard" pitchFamily="34" charset="-120"/>
-              </a:rPr>
-              <a:t>6</a:t>
-            </a:r>
-            <a:endParaRPr lang="en-US" sz="1500" dirty="0"/>
-          </a:p>
-        </p:txBody>
-      </p:sp>
-      <p:sp>
-        <p:nvSpPr>
-          <p:cNvPr id="40" name="Text 38"/>
-          <p:cNvSpPr txBox="1"/>
-          <p:nvPr/>
-        </p:nvSpPr>
-        <p:spPr>
-          <a:xfrm>
-            <a:off x="1325514" y="4119372"/>
-            <a:ext cx="2585070" cy="914400"/>
-          </a:xfrm>
-          <a:prstGeom prst="rect">
-            <a:avLst/>
-          </a:prstGeom>
-          <a:noFill/>
-          <a:ln/>
-        </p:spPr>
-        <p:txBody>
-          <a:bodyPr wrap="square" lIns="0" tIns="25400" rIns="25400" bIns="0" rtlCol="0" anchor="ctr">
-            <a:normAutofit/>
-          </a:bodyPr>
-          <a:lstStyle/>
-          <a:p>
-            <a:pPr algn="l" indent="0" marL="0">
-              <a:lnSpc>
-                <a:spcPct val="92000"/>
-              </a:lnSpc>
-              <a:buNone/>
-            </a:pPr>
-            <a:r>
-              <a:rPr lang="en-US" sz="1600" dirty="0">
-                <a:solidFill>
-                  <a:srgbClr val="243041"/>
-                </a:solidFill>
-                <a:latin typeface="Pretendard" pitchFamily="34" charset="0"/>
-                <a:ea typeface="Pretendard" pitchFamily="34" charset="-122"/>
-                <a:cs typeface="Pretendard" pitchFamily="34" charset="-120"/>
-              </a:rPr>
-              <a:t>Render PPTX HTML PDF</a:t>
-            </a:r>
-            <a:endParaRPr lang="en-US" sz="1600" dirty="0"/>
           </a:p>
         </p:txBody>
       </p:sp>

--- a/docs/theme-preview/pptx/newmorphism.pptx
+++ b/docs/theme-preview/pptx/newmorphism.pptx
@@ -131,7 +131,7 @@
 </p:presentation>
 </file>
 
-<file path=ppt/charts/chart5.xml><?xml version="1.0" encoding="utf-8"?>
+<file path=ppt/charts/chart11.xml><?xml version="1.0" encoding="utf-8"?>
 <c:chartSpace xmlns:c="http://schemas.openxmlformats.org/drawingml/2006/chart" xmlns:a="http://schemas.openxmlformats.org/drawingml/2006/main" xmlns:r="http://schemas.openxmlformats.org/officeDocument/2006/relationships">
   <c:date1904 val="0"/>
   <c:roundedCorners val="1"/>
@@ -474,7 +474,7 @@
 </c:chartSpace>
 </file>
 
-<file path=ppt/charts/chart6.xml><?xml version="1.0" encoding="utf-8"?>
+<file path=ppt/charts/chart12.xml><?xml version="1.0" encoding="utf-8"?>
 <c:chartSpace xmlns:c="http://schemas.openxmlformats.org/drawingml/2006/chart" xmlns:a="http://schemas.openxmlformats.org/drawingml/2006/main" xmlns:r="http://schemas.openxmlformats.org/officeDocument/2006/relationships">
   <c:date1904 val="0"/>
   <c:roundedCorners val="1"/>
@@ -3693,7 +3693,7 @@
       </p:sp>
       <p:sp>
         <p:nvSpPr>
-          <p:cNvPr id="5" name="Text 3"/>
+          <p:cNvPr id="5" name="mdpr:mdpr-design-grammar-b3a462:title:__title:mdpr-design-grammar-b3a462"/>
           <p:cNvSpPr txBox="1"/>
           <p:nvPr/>
         </p:nvSpPr>
@@ -3918,7 +3918,7 @@
       </p:sp>
       <p:sp>
         <p:nvSpPr>
-          <p:cNvPr id="7" name="Text 5"/>
+          <p:cNvPr id="7" name="mdpr:2-2-a9df10:title:__title:2-2-a9df10"/>
           <p:cNvSpPr txBox="1"/>
           <p:nvPr/>
         </p:nvSpPr>
@@ -3960,7 +3960,7 @@
       </p:sp>
       <p:sp>
         <p:nvSpPr>
-          <p:cNvPr id="8" name="Text 6"/>
+          <p:cNvPr id="8" name="mdpr:2-2-a9df10:left:block-10-chunk-2"/>
           <p:cNvSpPr txBox="1"/>
           <p:nvPr/>
         </p:nvSpPr>
@@ -4019,7 +4019,7 @@
       </p:sp>
       <p:sp>
         <p:nvSpPr>
-          <p:cNvPr id="9" name="Text 7"/>
+          <p:cNvPr id="9" name="mdpr:2-2-a9df10:right:block-10-chunk-2"/>
           <p:cNvSpPr txBox="1"/>
           <p:nvPr/>
         </p:nvSpPr>
@@ -4207,7 +4207,7 @@
       </p:sp>
       <p:sp>
         <p:nvSpPr>
-          <p:cNvPr id="5" name="Text 3"/>
+          <p:cNvPr id="5" name="mdpr:pipeline-diagram-51792c:title:__title:pipeline-diagram-51792c"/>
           <p:cNvSpPr txBox="1"/>
           <p:nvPr/>
         </p:nvSpPr>
@@ -5560,114 +5560,6 @@
         </p:nvSpPr>
         <p:spPr>
           <a:xfrm>
-            <a:off x="822960" y="1463040"/>
-            <a:ext cx="73152" cy="1920240"/>
-          </a:xfrm>
-          <a:prstGeom prst="rect">
-            <a:avLst/>
-          </a:prstGeom>
-          <a:solidFill>
-            <a:srgbClr val="4F6F8F"/>
-          </a:solidFill>
-          <a:ln w="12700">
-            <a:solidFill>
-              <a:srgbClr val="4F6F8F">
-                <a:alpha val="0"/>
-              </a:srgbClr>
-            </a:solidFill>
-            <a:prstDash val="solid"/>
-          </a:ln>
-        </p:spPr>
-      </p:sp>
-      <p:sp>
-        <p:nvSpPr>
-          <p:cNvPr id="6" name="Shape 4"/>
-          <p:cNvSpPr/>
-          <p:nvPr/>
-        </p:nvSpPr>
-        <p:spPr>
-          <a:xfrm>
-            <a:off x="6309360" y="1463040"/>
-            <a:ext cx="73152" cy="1920240"/>
-          </a:xfrm>
-          <a:prstGeom prst="rect">
-            <a:avLst/>
-          </a:prstGeom>
-          <a:solidFill>
-            <a:srgbClr val="CBD5E1"/>
-          </a:solidFill>
-          <a:ln w="12700">
-            <a:solidFill>
-              <a:srgbClr val="CBD5E1">
-                <a:alpha val="0"/>
-              </a:srgbClr>
-            </a:solidFill>
-            <a:prstDash val="solid"/>
-          </a:ln>
-        </p:spPr>
-      </p:sp>
-      <p:sp>
-        <p:nvSpPr>
-          <p:cNvPr id="7" name="Shape 5"/>
-          <p:cNvSpPr/>
-          <p:nvPr/>
-        </p:nvSpPr>
-        <p:spPr>
-          <a:xfrm>
-            <a:off x="822960" y="3749040"/>
-            <a:ext cx="73152" cy="1920240"/>
-          </a:xfrm>
-          <a:prstGeom prst="rect">
-            <a:avLst/>
-          </a:prstGeom>
-          <a:solidFill>
-            <a:srgbClr val="4F6F8F"/>
-          </a:solidFill>
-          <a:ln w="12700">
-            <a:solidFill>
-              <a:srgbClr val="4F6F8F">
-                <a:alpha val="0"/>
-              </a:srgbClr>
-            </a:solidFill>
-            <a:prstDash val="solid"/>
-          </a:ln>
-        </p:spPr>
-      </p:sp>
-      <p:sp>
-        <p:nvSpPr>
-          <p:cNvPr id="8" name="Shape 6"/>
-          <p:cNvSpPr/>
-          <p:nvPr/>
-        </p:nvSpPr>
-        <p:spPr>
-          <a:xfrm>
-            <a:off x="6309360" y="3749040"/>
-            <a:ext cx="73152" cy="1920240"/>
-          </a:xfrm>
-          <a:prstGeom prst="rect">
-            <a:avLst/>
-          </a:prstGeom>
-          <a:solidFill>
-            <a:srgbClr val="CBD5E1"/>
-          </a:solidFill>
-          <a:ln w="12700">
-            <a:solidFill>
-              <a:srgbClr val="CBD5E1">
-                <a:alpha val="0"/>
-              </a:srgbClr>
-            </a:solidFill>
-            <a:prstDash val="solid"/>
-          </a:ln>
-        </p:spPr>
-      </p:sp>
-      <p:sp>
-        <p:nvSpPr>
-          <p:cNvPr id="9" name="Shape 7"/>
-          <p:cNvSpPr/>
-          <p:nvPr/>
-        </p:nvSpPr>
-        <p:spPr>
-          <a:xfrm>
             <a:off x="864108" y="1513332"/>
             <a:ext cx="5029200" cy="1920240"/>
           </a:xfrm>
@@ -5700,7 +5592,7 @@
       </p:sp>
       <p:sp>
         <p:nvSpPr>
-          <p:cNvPr id="10" name="Shape 8"/>
+          <p:cNvPr id="6" name="Shape 4"/>
           <p:cNvSpPr/>
           <p:nvPr/>
         </p:nvSpPr>
@@ -5738,7 +5630,7 @@
       </p:sp>
       <p:sp>
         <p:nvSpPr>
-          <p:cNvPr id="11" name="Shape 9"/>
+          <p:cNvPr id="7" name="Shape 5"/>
           <p:cNvSpPr/>
           <p:nvPr/>
         </p:nvSpPr>
@@ -5769,7 +5661,7 @@
       </p:sp>
       <p:pic>
         <p:nvPicPr>
-          <p:cNvPr id="12" name="Image 0" descr="preencoded.png">    </p:cNvPr>
+          <p:cNvPr id="8" name="Image 0" descr="preencoded.png">    </p:cNvPr>
           <p:cNvPicPr>
             <a:picLocks noChangeAspect="1"/>
           </p:cNvPicPr>
@@ -5799,7 +5691,7 @@
       </p:pic>
       <p:sp>
         <p:nvSpPr>
-          <p:cNvPr id="13" name="Shape 10"/>
+          <p:cNvPr id="9" name="Shape 6"/>
           <p:cNvSpPr/>
           <p:nvPr/>
         </p:nvSpPr>
@@ -5837,7 +5729,7 @@
       </p:sp>
       <p:sp>
         <p:nvSpPr>
-          <p:cNvPr id="14" name="Shape 11"/>
+          <p:cNvPr id="10" name="Shape 7"/>
           <p:cNvSpPr/>
           <p:nvPr/>
         </p:nvSpPr>
@@ -5875,7 +5767,7 @@
       </p:sp>
       <p:sp>
         <p:nvSpPr>
-          <p:cNvPr id="15" name="Shape 12"/>
+          <p:cNvPr id="11" name="Shape 8"/>
           <p:cNvSpPr/>
           <p:nvPr/>
         </p:nvSpPr>
@@ -5906,7 +5798,7 @@
       </p:sp>
       <p:pic>
         <p:nvPicPr>
-          <p:cNvPr id="16" name="Image 1" descr="preencoded.png">    </p:cNvPr>
+          <p:cNvPr id="12" name="Image 1" descr="preencoded.png">    </p:cNvPr>
           <p:cNvPicPr>
             <a:picLocks noChangeAspect="1"/>
           </p:cNvPicPr>
@@ -5936,7 +5828,7 @@
       </p:pic>
       <p:sp>
         <p:nvSpPr>
-          <p:cNvPr id="17" name="Shape 13"/>
+          <p:cNvPr id="13" name="Shape 9"/>
           <p:cNvSpPr/>
           <p:nvPr/>
         </p:nvSpPr>
@@ -5974,7 +5866,7 @@
       </p:sp>
       <p:sp>
         <p:nvSpPr>
-          <p:cNvPr id="18" name="Shape 14"/>
+          <p:cNvPr id="14" name="Shape 10"/>
           <p:cNvSpPr/>
           <p:nvPr/>
         </p:nvSpPr>
@@ -6012,7 +5904,7 @@
       </p:sp>
       <p:sp>
         <p:nvSpPr>
-          <p:cNvPr id="19" name="Shape 15"/>
+          <p:cNvPr id="15" name="Shape 11"/>
           <p:cNvSpPr/>
           <p:nvPr/>
         </p:nvSpPr>
@@ -6043,7 +5935,7 @@
       </p:sp>
       <p:pic>
         <p:nvPicPr>
-          <p:cNvPr id="20" name="Image 2" descr="preencoded.png">    </p:cNvPr>
+          <p:cNvPr id="16" name="Image 2" descr="preencoded.png">    </p:cNvPr>
           <p:cNvPicPr>
             <a:picLocks noChangeAspect="1"/>
           </p:cNvPicPr>
@@ -6073,7 +5965,7 @@
       </p:pic>
       <p:sp>
         <p:nvSpPr>
-          <p:cNvPr id="21" name="Shape 16"/>
+          <p:cNvPr id="17" name="Shape 12"/>
           <p:cNvSpPr/>
           <p:nvPr/>
         </p:nvSpPr>
@@ -6111,7 +6003,7 @@
       </p:sp>
       <p:sp>
         <p:nvSpPr>
-          <p:cNvPr id="22" name="Shape 17"/>
+          <p:cNvPr id="18" name="Shape 13"/>
           <p:cNvSpPr/>
           <p:nvPr/>
         </p:nvSpPr>
@@ -6149,7 +6041,7 @@
       </p:sp>
       <p:sp>
         <p:nvSpPr>
-          <p:cNvPr id="23" name="Shape 18"/>
+          <p:cNvPr id="19" name="Shape 14"/>
           <p:cNvSpPr/>
           <p:nvPr/>
         </p:nvSpPr>
@@ -6180,7 +6072,7 @@
       </p:sp>
       <p:pic>
         <p:nvPicPr>
-          <p:cNvPr id="24" name="Image 3" descr="preencoded.png">    </p:cNvPr>
+          <p:cNvPr id="20" name="Image 3" descr="preencoded.png">    </p:cNvPr>
           <p:cNvPicPr>
             <a:picLocks noChangeAspect="1"/>
           </p:cNvPicPr>
@@ -6210,7 +6102,115 @@
       </p:pic>
       <p:sp>
         <p:nvSpPr>
-          <p:cNvPr id="25" name="Text 19"/>
+          <p:cNvPr id="21" name="Shape 15"/>
+          <p:cNvSpPr/>
+          <p:nvPr/>
+        </p:nvSpPr>
+        <p:spPr>
+          <a:xfrm>
+            <a:off x="822960" y="1463040"/>
+            <a:ext cx="73152" cy="1920240"/>
+          </a:xfrm>
+          <a:prstGeom prst="rect">
+            <a:avLst/>
+          </a:prstGeom>
+          <a:solidFill>
+            <a:srgbClr val="4F6F8F"/>
+          </a:solidFill>
+          <a:ln w="12700">
+            <a:solidFill>
+              <a:srgbClr val="4F6F8F">
+                <a:alpha val="0"/>
+              </a:srgbClr>
+            </a:solidFill>
+            <a:prstDash val="solid"/>
+          </a:ln>
+        </p:spPr>
+      </p:sp>
+      <p:sp>
+        <p:nvSpPr>
+          <p:cNvPr id="22" name="Shape 16"/>
+          <p:cNvSpPr/>
+          <p:nvPr/>
+        </p:nvSpPr>
+        <p:spPr>
+          <a:xfrm>
+            <a:off x="6309360" y="1463040"/>
+            <a:ext cx="73152" cy="1920240"/>
+          </a:xfrm>
+          <a:prstGeom prst="rect">
+            <a:avLst/>
+          </a:prstGeom>
+          <a:solidFill>
+            <a:srgbClr val="CBD5E1"/>
+          </a:solidFill>
+          <a:ln w="12700">
+            <a:solidFill>
+              <a:srgbClr val="CBD5E1">
+                <a:alpha val="0"/>
+              </a:srgbClr>
+            </a:solidFill>
+            <a:prstDash val="solid"/>
+          </a:ln>
+        </p:spPr>
+      </p:sp>
+      <p:sp>
+        <p:nvSpPr>
+          <p:cNvPr id="23" name="Shape 17"/>
+          <p:cNvSpPr/>
+          <p:nvPr/>
+        </p:nvSpPr>
+        <p:spPr>
+          <a:xfrm>
+            <a:off x="822960" y="3749040"/>
+            <a:ext cx="73152" cy="1920240"/>
+          </a:xfrm>
+          <a:prstGeom prst="rect">
+            <a:avLst/>
+          </a:prstGeom>
+          <a:solidFill>
+            <a:srgbClr val="4F6F8F"/>
+          </a:solidFill>
+          <a:ln w="12700">
+            <a:solidFill>
+              <a:srgbClr val="4F6F8F">
+                <a:alpha val="0"/>
+              </a:srgbClr>
+            </a:solidFill>
+            <a:prstDash val="solid"/>
+          </a:ln>
+        </p:spPr>
+      </p:sp>
+      <p:sp>
+        <p:nvSpPr>
+          <p:cNvPr id="24" name="Shape 18"/>
+          <p:cNvSpPr/>
+          <p:nvPr/>
+        </p:nvSpPr>
+        <p:spPr>
+          <a:xfrm>
+            <a:off x="6309360" y="3749040"/>
+            <a:ext cx="73152" cy="1920240"/>
+          </a:xfrm>
+          <a:prstGeom prst="rect">
+            <a:avLst/>
+          </a:prstGeom>
+          <a:solidFill>
+            <a:srgbClr val="CBD5E1"/>
+          </a:solidFill>
+          <a:ln w="12700">
+            <a:solidFill>
+              <a:srgbClr val="CBD5E1">
+                <a:alpha val="0"/>
+              </a:srgbClr>
+            </a:solidFill>
+            <a:prstDash val="solid"/>
+          </a:ln>
+        </p:spPr>
+      </p:sp>
+      <p:sp>
+        <p:nvSpPr>
+          <p:cNvPr id="25" name="mdpr:1-2-e3669a:title:__title:1-2-e3669a"/>
           <p:cNvSpPr txBox="1"/>
           <p:nvPr/>
         </p:nvSpPr>
@@ -6309,7 +6309,7 @@
       </p:pic>
       <p:sp>
         <p:nvSpPr>
-          <p:cNvPr id="28" name="Text 21"/>
+          <p:cNvPr id="28" name="mdpr:1-2-e3669a:item-1:block-15-chunk-1"/>
           <p:cNvSpPr txBox="1"/>
           <p:nvPr/>
         </p:nvSpPr>
@@ -6425,7 +6425,7 @@
       </p:pic>
       <p:sp>
         <p:nvSpPr>
-          <p:cNvPr id="31" name="Text 23"/>
+          <p:cNvPr id="31" name="mdpr:1-2-e3669a:item-2:block-15-chunk-1"/>
           <p:cNvSpPr txBox="1"/>
           <p:nvPr/>
         </p:nvSpPr>
@@ -6541,7 +6541,7 @@
       </p:pic>
       <p:sp>
         <p:nvSpPr>
-          <p:cNvPr id="34" name="Text 25"/>
+          <p:cNvPr id="34" name="mdpr:1-2-e3669a:item-3:block-15-chunk-1"/>
           <p:cNvSpPr txBox="1"/>
           <p:nvPr/>
         </p:nvSpPr>
@@ -6657,7 +6657,7 @@
       </p:pic>
       <p:sp>
         <p:nvSpPr>
-          <p:cNvPr id="37" name="Text 27"/>
+          <p:cNvPr id="37" name="mdpr:1-2-e3669a:item-4:block-15-chunk-1"/>
           <p:cNvSpPr txBox="1"/>
           <p:nvPr/>
         </p:nvSpPr>
@@ -6899,7 +6899,7 @@
       </p:sp>
       <p:sp>
         <p:nvSpPr>
-          <p:cNvPr id="7" name="Text 5"/>
+          <p:cNvPr id="7" name="mdpr:2-2-c23e9b:title:__title:2-2-c23e9b"/>
           <p:cNvSpPr txBox="1"/>
           <p:nvPr/>
         </p:nvSpPr>
@@ -6941,7 +6941,7 @@
       </p:sp>
       <p:sp>
         <p:nvSpPr>
-          <p:cNvPr id="8" name="Text 6"/>
+          <p:cNvPr id="8" name="mdpr:2-2-c23e9b:left:block-15-chunk-2"/>
           <p:cNvSpPr txBox="1"/>
           <p:nvPr/>
         </p:nvSpPr>
@@ -7000,7 +7000,7 @@
       </p:sp>
       <p:sp>
         <p:nvSpPr>
-          <p:cNvPr id="9" name="Text 7"/>
+          <p:cNvPr id="9" name="mdpr:2-2-c23e9b:right:block-15-chunk-2"/>
           <p:cNvSpPr txBox="1"/>
           <p:nvPr/>
         </p:nvSpPr>
@@ -7051,7 +7051,7 @@
                 <a:ea typeface="Pretendard" pitchFamily="34" charset="-122"/>
                 <a:cs typeface="Pretendard" pitchFamily="34" charset="-120"/>
               </a:rPr>
-              <a:t>  clean-card, glass-surface, newmorphic-panel, data-rail, minimal-rule.</a:t>
+              <a:t>  skeuomorphic-bevel, glassmorphism-surface, newmorphic-panel, clay-blob, bento-tile, liquid-lens.</a:t>
             </a:r>
             <a:endParaRPr lang="en-US" sz="2200" dirty="0"/>
           </a:p>
@@ -7325,7 +7325,7 @@
       </p:pic>
       <p:sp>
         <p:nvSpPr>
-          <p:cNvPr id="9" name="Text 6"/>
+          <p:cNvPr id="9" name="mdpr:table-coherence-2f9a7b:title:__title:table-coherence-2f9a7b"/>
           <p:cNvSpPr txBox="1"/>
           <p:nvPr/>
         </p:nvSpPr>
@@ -7367,7 +7367,7 @@
       </p:sp>
       <p:graphicFrame>
         <p:nvGraphicFramePr>
-          <p:cNvPr id="15" name="Table 0"/>
+          <p:cNvPr id="15" name="mdpr:table-coherence-2f9a7b:table:block-17"/>
           <p:cNvGraphicFramePr>
             <a:graphicFrameLocks noGrp="1"/>
           </p:cNvGraphicFramePr>
@@ -7546,7 +7546,7 @@
                           <a:ea typeface="Pretendard" pitchFamily="34" charset="-122"/>
                           <a:cs typeface="Pretendard" pitchFamily="34" charset="-120"/>
                         </a:rPr>
-                        <a:t>QA signal</a:t>
+                        <a:t>Validation signal</a:t>
                       </a:r>
                       <a:endParaRPr lang="en-US" sz="1800" dirty="0">
                         <a:latin typeface="Pretendard" charset="0"/>
@@ -8557,33 +8557,6 @@
         </p:nvSpPr>
         <p:spPr>
           <a:xfrm>
-            <a:off x="841248" y="1517904"/>
-            <a:ext cx="3822192" cy="73152"/>
-          </a:xfrm>
-          <a:prstGeom prst="rect">
-            <a:avLst/>
-          </a:prstGeom>
-          <a:solidFill>
-            <a:srgbClr val="4F6F8F"/>
-          </a:solidFill>
-          <a:ln w="12700">
-            <a:solidFill>
-              <a:srgbClr val="4F6F8F">
-                <a:alpha val="0"/>
-              </a:srgbClr>
-            </a:solidFill>
-            <a:prstDash val="solid"/>
-          </a:ln>
-        </p:spPr>
-      </p:sp>
-      <p:sp>
-        <p:nvSpPr>
-          <p:cNvPr id="6" name="Shape 4"/>
-          <p:cNvSpPr/>
-          <p:nvPr/>
-        </p:nvSpPr>
-        <p:spPr>
-          <a:xfrm>
             <a:off x="4997196" y="1476756"/>
             <a:ext cx="6199632" cy="4407408"/>
           </a:xfrm>
@@ -8616,7 +8589,7 @@
       </p:sp>
       <p:sp>
         <p:nvSpPr>
-          <p:cNvPr id="7" name="Shape 5"/>
+          <p:cNvPr id="6" name="Shape 4"/>
           <p:cNvSpPr/>
           <p:nvPr/>
         </p:nvSpPr>
@@ -8654,7 +8627,7 @@
       </p:sp>
       <p:sp>
         <p:nvSpPr>
-          <p:cNvPr id="8" name="Shape 6"/>
+          <p:cNvPr id="7" name="Shape 5"/>
           <p:cNvSpPr/>
           <p:nvPr/>
         </p:nvSpPr>
@@ -8685,7 +8658,7 @@
       </p:sp>
       <p:pic>
         <p:nvPicPr>
-          <p:cNvPr id="9" name="Image 0" descr="preencoded.png">    </p:cNvPr>
+          <p:cNvPr id="8" name="Image 0" descr="preencoded.png">    </p:cNvPr>
           <p:cNvPicPr>
             <a:picLocks noChangeAspect="1"/>
           </p:cNvPicPr>
@@ -8715,7 +8688,34 @@
       </p:pic>
       <p:sp>
         <p:nvSpPr>
-          <p:cNvPr id="10" name="Text 7"/>
+          <p:cNvPr id="9" name="Shape 6"/>
+          <p:cNvSpPr/>
+          <p:nvPr/>
+        </p:nvSpPr>
+        <p:spPr>
+          <a:xfrm>
+            <a:off x="841248" y="1517904"/>
+            <a:ext cx="3822192" cy="73152"/>
+          </a:xfrm>
+          <a:prstGeom prst="rect">
+            <a:avLst/>
+          </a:prstGeom>
+          <a:solidFill>
+            <a:srgbClr val="4F6F8F"/>
+          </a:solidFill>
+          <a:ln w="12700">
+            <a:solidFill>
+              <a:srgbClr val="4F6F8F">
+                <a:alpha val="0"/>
+              </a:srgbClr>
+            </a:solidFill>
+            <a:prstDash val="solid"/>
+          </a:ln>
+        </p:spPr>
+      </p:sp>
+      <p:sp>
+        <p:nvSpPr>
+          <p:cNvPr id="10" name="mdpr:1-2-2ff3f0:title:__title:1-2-2ff3f0"/>
           <p:cNvSpPr txBox="1"/>
           <p:nvPr/>
         </p:nvSpPr>
@@ -8757,7 +8757,7 @@
       </p:sp>
       <p:sp>
         <p:nvSpPr>
-          <p:cNvPr id="11" name="Text 8"/>
+          <p:cNvPr id="11" name="mdpr:1-2-2ff3f0:body:block-19"/>
           <p:cNvSpPr txBox="1"/>
           <p:nvPr/>
         </p:nvSpPr>
@@ -9178,7 +9178,7 @@
       </p:pic>
       <p:sp>
         <p:nvSpPr>
-          <p:cNvPr id="9" name="Text 6"/>
+          <p:cNvPr id="9" name="mdpr:2-2-542095:title:__title:2-2-542095"/>
           <p:cNvSpPr txBox="1"/>
           <p:nvPr/>
         </p:nvSpPr>
@@ -9220,7 +9220,7 @@
       </p:sp>
       <p:graphicFrame>
         <p:nvGraphicFramePr>
-          <p:cNvPr id="17" name="Table 0"/>
+          <p:cNvPr id="17" name="mdpr:2-2-542095:table:block-21"/>
           <p:cNvGraphicFramePr>
             <a:graphicFrameLocks noGrp="1"/>
           </p:cNvGraphicFramePr>
@@ -10329,7 +10329,7 @@
       </p:pic>
       <p:sp>
         <p:nvSpPr>
-          <p:cNvPr id="9" name="Text 6"/>
+          <p:cNvPr id="9" name="mdpr:1-2-b8955f:title:__title:1-2-b8955f"/>
           <p:cNvSpPr txBox="1"/>
           <p:nvPr/>
         </p:nvSpPr>
@@ -11340,7 +11340,7 @@
       </p:pic>
       <p:sp>
         <p:nvSpPr>
-          <p:cNvPr id="9" name="Text 6"/>
+          <p:cNvPr id="9" name="mdpr:2-2-4dc4c1:title:__title:2-2-4dc4c1"/>
           <p:cNvSpPr txBox="1"/>
           <p:nvPr/>
         </p:nvSpPr>
@@ -12157,116 +12157,6 @@
         </p:nvSpPr>
         <p:spPr>
           <a:xfrm>
-            <a:off x="786384" y="1956816"/>
-            <a:ext cx="32004" cy="3483864"/>
-          </a:xfrm>
-          <a:prstGeom prst="rect">
-            <a:avLst/>
-          </a:prstGeom>
-          <a:solidFill>
-            <a:srgbClr val="CBD5E1">
-              <a:alpha val="80000"/>
-            </a:srgbClr>
-          </a:solidFill>
-          <a:ln w="12700">
-            <a:solidFill>
-              <a:srgbClr val="CBD5E1">
-                <a:alpha val="0"/>
-              </a:srgbClr>
-            </a:solidFill>
-            <a:prstDash val="solid"/>
-          </a:ln>
-        </p:spPr>
-      </p:sp>
-      <p:sp>
-        <p:nvSpPr>
-          <p:cNvPr id="6" name="Shape 4"/>
-          <p:cNvSpPr/>
-          <p:nvPr/>
-        </p:nvSpPr>
-        <p:spPr>
-          <a:xfrm>
-            <a:off x="914400" y="1865376"/>
-            <a:ext cx="73152" cy="1024128"/>
-          </a:xfrm>
-          <a:prstGeom prst="rect">
-            <a:avLst/>
-          </a:prstGeom>
-          <a:solidFill>
-            <a:srgbClr val="4F6F8F"/>
-          </a:solidFill>
-          <a:ln w="12700">
-            <a:solidFill>
-              <a:srgbClr val="4F6F8F">
-                <a:alpha val="0"/>
-              </a:srgbClr>
-            </a:solidFill>
-            <a:prstDash val="solid"/>
-          </a:ln>
-        </p:spPr>
-      </p:sp>
-      <p:sp>
-        <p:nvSpPr>
-          <p:cNvPr id="7" name="Shape 5"/>
-          <p:cNvSpPr/>
-          <p:nvPr/>
-        </p:nvSpPr>
-        <p:spPr>
-          <a:xfrm>
-            <a:off x="914400" y="3191256"/>
-            <a:ext cx="73152" cy="1024128"/>
-          </a:xfrm>
-          <a:prstGeom prst="rect">
-            <a:avLst/>
-          </a:prstGeom>
-          <a:solidFill>
-            <a:srgbClr val="CBD5E1"/>
-          </a:solidFill>
-          <a:ln w="12700">
-            <a:solidFill>
-              <a:srgbClr val="CBD5E1">
-                <a:alpha val="0"/>
-              </a:srgbClr>
-            </a:solidFill>
-            <a:prstDash val="solid"/>
-          </a:ln>
-        </p:spPr>
-      </p:sp>
-      <p:sp>
-        <p:nvSpPr>
-          <p:cNvPr id="8" name="Shape 6"/>
-          <p:cNvSpPr/>
-          <p:nvPr/>
-        </p:nvSpPr>
-        <p:spPr>
-          <a:xfrm>
-            <a:off x="914400" y="4507992"/>
-            <a:ext cx="73152" cy="1024128"/>
-          </a:xfrm>
-          <a:prstGeom prst="rect">
-            <a:avLst/>
-          </a:prstGeom>
-          <a:solidFill>
-            <a:srgbClr val="4F6F8F"/>
-          </a:solidFill>
-          <a:ln w="12700">
-            <a:solidFill>
-              <a:srgbClr val="4F6F8F">
-                <a:alpha val="0"/>
-              </a:srgbClr>
-            </a:solidFill>
-            <a:prstDash val="solid"/>
-          </a:ln>
-        </p:spPr>
-      </p:sp>
-      <p:sp>
-        <p:nvSpPr>
-          <p:cNvPr id="9" name="Shape 7"/>
-          <p:cNvSpPr/>
-          <p:nvPr/>
-        </p:nvSpPr>
-        <p:spPr>
-          <a:xfrm>
             <a:off x="955548" y="1915668"/>
             <a:ext cx="10241280" cy="1024128"/>
           </a:xfrm>
@@ -12299,7 +12189,7 @@
       </p:sp>
       <p:sp>
         <p:nvSpPr>
-          <p:cNvPr id="10" name="Shape 8"/>
+          <p:cNvPr id="6" name="Shape 4"/>
           <p:cNvSpPr/>
           <p:nvPr/>
         </p:nvSpPr>
@@ -12337,7 +12227,7 @@
       </p:sp>
       <p:sp>
         <p:nvSpPr>
-          <p:cNvPr id="11" name="Shape 9"/>
+          <p:cNvPr id="7" name="Shape 5"/>
           <p:cNvSpPr/>
           <p:nvPr/>
         </p:nvSpPr>
@@ -12368,7 +12258,7 @@
       </p:sp>
       <p:pic>
         <p:nvPicPr>
-          <p:cNvPr id="12" name="Image 0" descr="preencoded.png">    </p:cNvPr>
+          <p:cNvPr id="8" name="Image 0" descr="preencoded.png">    </p:cNvPr>
           <p:cNvPicPr>
             <a:picLocks noChangeAspect="1"/>
           </p:cNvPicPr>
@@ -12398,7 +12288,7 @@
       </p:pic>
       <p:sp>
         <p:nvSpPr>
-          <p:cNvPr id="13" name="Shape 10"/>
+          <p:cNvPr id="9" name="Shape 6"/>
           <p:cNvSpPr/>
           <p:nvPr/>
         </p:nvSpPr>
@@ -12436,7 +12326,7 @@
       </p:sp>
       <p:sp>
         <p:nvSpPr>
-          <p:cNvPr id="14" name="Shape 11"/>
+          <p:cNvPr id="10" name="Shape 7"/>
           <p:cNvSpPr/>
           <p:nvPr/>
         </p:nvSpPr>
@@ -12474,7 +12364,7 @@
       </p:sp>
       <p:sp>
         <p:nvSpPr>
-          <p:cNvPr id="15" name="Shape 12"/>
+          <p:cNvPr id="11" name="Shape 8"/>
           <p:cNvSpPr/>
           <p:nvPr/>
         </p:nvSpPr>
@@ -12505,7 +12395,7 @@
       </p:sp>
       <p:pic>
         <p:nvPicPr>
-          <p:cNvPr id="16" name="Image 1" descr="preencoded.png">    </p:cNvPr>
+          <p:cNvPr id="12" name="Image 1" descr="preencoded.png">    </p:cNvPr>
           <p:cNvPicPr>
             <a:picLocks noChangeAspect="1"/>
           </p:cNvPicPr>
@@ -12535,7 +12425,7 @@
       </p:pic>
       <p:sp>
         <p:nvSpPr>
-          <p:cNvPr id="17" name="Shape 13"/>
+          <p:cNvPr id="13" name="Shape 9"/>
           <p:cNvSpPr/>
           <p:nvPr/>
         </p:nvSpPr>
@@ -12573,7 +12463,7 @@
       </p:sp>
       <p:sp>
         <p:nvSpPr>
-          <p:cNvPr id="18" name="Shape 14"/>
+          <p:cNvPr id="14" name="Shape 10"/>
           <p:cNvSpPr/>
           <p:nvPr/>
         </p:nvSpPr>
@@ -12611,7 +12501,7 @@
       </p:sp>
       <p:sp>
         <p:nvSpPr>
-          <p:cNvPr id="19" name="Shape 15"/>
+          <p:cNvPr id="15" name="Shape 11"/>
           <p:cNvSpPr/>
           <p:nvPr/>
         </p:nvSpPr>
@@ -12642,7 +12532,7 @@
       </p:sp>
       <p:pic>
         <p:nvPicPr>
-          <p:cNvPr id="20" name="Image 2" descr="preencoded.png">    </p:cNvPr>
+          <p:cNvPr id="16" name="Image 2" descr="preencoded.png">    </p:cNvPr>
           <p:cNvPicPr>
             <a:picLocks noChangeAspect="1"/>
           </p:cNvPicPr>
@@ -12672,7 +12562,117 @@
       </p:pic>
       <p:sp>
         <p:nvSpPr>
-          <p:cNvPr id="21" name="Text 16"/>
+          <p:cNvPr id="17" name="Shape 12"/>
+          <p:cNvSpPr/>
+          <p:nvPr/>
+        </p:nvSpPr>
+        <p:spPr>
+          <a:xfrm>
+            <a:off x="786384" y="1956816"/>
+            <a:ext cx="32004" cy="3483864"/>
+          </a:xfrm>
+          <a:prstGeom prst="rect">
+            <a:avLst/>
+          </a:prstGeom>
+          <a:solidFill>
+            <a:srgbClr val="CBD5E1">
+              <a:alpha val="80000"/>
+            </a:srgbClr>
+          </a:solidFill>
+          <a:ln w="12700">
+            <a:solidFill>
+              <a:srgbClr val="CBD5E1">
+                <a:alpha val="0"/>
+              </a:srgbClr>
+            </a:solidFill>
+            <a:prstDash val="solid"/>
+          </a:ln>
+        </p:spPr>
+      </p:sp>
+      <p:sp>
+        <p:nvSpPr>
+          <p:cNvPr id="18" name="Shape 13"/>
+          <p:cNvSpPr/>
+          <p:nvPr/>
+        </p:nvSpPr>
+        <p:spPr>
+          <a:xfrm>
+            <a:off x="914400" y="1865376"/>
+            <a:ext cx="73152" cy="1024128"/>
+          </a:xfrm>
+          <a:prstGeom prst="rect">
+            <a:avLst/>
+          </a:prstGeom>
+          <a:solidFill>
+            <a:srgbClr val="4F6F8F"/>
+          </a:solidFill>
+          <a:ln w="12700">
+            <a:solidFill>
+              <a:srgbClr val="4F6F8F">
+                <a:alpha val="0"/>
+              </a:srgbClr>
+            </a:solidFill>
+            <a:prstDash val="solid"/>
+          </a:ln>
+        </p:spPr>
+      </p:sp>
+      <p:sp>
+        <p:nvSpPr>
+          <p:cNvPr id="19" name="Shape 14"/>
+          <p:cNvSpPr/>
+          <p:nvPr/>
+        </p:nvSpPr>
+        <p:spPr>
+          <a:xfrm>
+            <a:off x="914400" y="3191256"/>
+            <a:ext cx="73152" cy="1024128"/>
+          </a:xfrm>
+          <a:prstGeom prst="rect">
+            <a:avLst/>
+          </a:prstGeom>
+          <a:solidFill>
+            <a:srgbClr val="CBD5E1"/>
+          </a:solidFill>
+          <a:ln w="12700">
+            <a:solidFill>
+              <a:srgbClr val="CBD5E1">
+                <a:alpha val="0"/>
+              </a:srgbClr>
+            </a:solidFill>
+            <a:prstDash val="solid"/>
+          </a:ln>
+        </p:spPr>
+      </p:sp>
+      <p:sp>
+        <p:nvSpPr>
+          <p:cNvPr id="20" name="Shape 15"/>
+          <p:cNvSpPr/>
+          <p:nvPr/>
+        </p:nvSpPr>
+        <p:spPr>
+          <a:xfrm>
+            <a:off x="914400" y="4507992"/>
+            <a:ext cx="73152" cy="1024128"/>
+          </a:xfrm>
+          <a:prstGeom prst="rect">
+            <a:avLst/>
+          </a:prstGeom>
+          <a:solidFill>
+            <a:srgbClr val="4F6F8F"/>
+          </a:solidFill>
+          <a:ln w="12700">
+            <a:solidFill>
+              <a:srgbClr val="4F6F8F">
+                <a:alpha val="0"/>
+              </a:srgbClr>
+            </a:solidFill>
+            <a:prstDash val="solid"/>
+          </a:ln>
+        </p:spPr>
+      </p:sp>
+      <p:sp>
+        <p:nvSpPr>
+          <p:cNvPr id="21" name="mdpr:1-2-ea42c8:title:__title:1-2-ea42c8"/>
           <p:cNvSpPr txBox="1"/>
           <p:nvPr/>
         </p:nvSpPr>
@@ -12771,7 +12771,7 @@
       </p:pic>
       <p:sp>
         <p:nvSpPr>
-          <p:cNvPr id="24" name="Text 18"/>
+          <p:cNvPr id="24" name="mdpr:1-2-ea42c8:item-1:block-27-chunk-1"/>
           <p:cNvSpPr txBox="1"/>
           <p:nvPr/>
         </p:nvSpPr>
@@ -12887,7 +12887,7 @@
       </p:pic>
       <p:sp>
         <p:nvSpPr>
-          <p:cNvPr id="27" name="Text 20"/>
+          <p:cNvPr id="27" name="mdpr:1-2-ea42c8:item-2:block-27-chunk-1"/>
           <p:cNvSpPr txBox="1"/>
           <p:nvPr/>
         </p:nvSpPr>
@@ -13003,7 +13003,7 @@
       </p:pic>
       <p:sp>
         <p:nvSpPr>
-          <p:cNvPr id="30" name="Text 22"/>
+          <p:cNvPr id="30" name="mdpr:1-2-ea42c8:item-3:block-27-chunk-1"/>
           <p:cNvSpPr txBox="1"/>
           <p:nvPr/>
         </p:nvSpPr>
@@ -13652,7 +13652,7 @@
       </p:sp>
       <p:sp>
         <p:nvSpPr>
-          <p:cNvPr id="22" name="Text 20"/>
+          <p:cNvPr id="22" name="mdpr:1-2-0772f8:title:__title:1-2-0772f8"/>
           <p:cNvSpPr txBox="1"/>
           <p:nvPr/>
         </p:nvSpPr>
@@ -13694,7 +13694,7 @@
       </p:sp>
       <p:sp>
         <p:nvSpPr>
-          <p:cNvPr id="23" name="Text 21"/>
+          <p:cNvPr id="23" name="mdpr:1-2-0772f8:toc-item-1:toc-item-1"/>
           <p:cNvSpPr txBox="1"/>
           <p:nvPr/>
         </p:nvSpPr>
@@ -13736,7 +13736,7 @@
       </p:sp>
       <p:sp>
         <p:nvSpPr>
-          <p:cNvPr id="24" name="Text 22"/>
+          <p:cNvPr id="24" name="mdpr:1-2-0772f8:toc-item-2:toc-item-2"/>
           <p:cNvSpPr txBox="1"/>
           <p:nvPr/>
         </p:nvSpPr>
@@ -13778,7 +13778,7 @@
       </p:sp>
       <p:sp>
         <p:nvSpPr>
-          <p:cNvPr id="25" name="Text 23"/>
+          <p:cNvPr id="25" name="mdpr:1-2-0772f8:toc-item-3:toc-item-3"/>
           <p:cNvSpPr txBox="1"/>
           <p:nvPr/>
         </p:nvSpPr>
@@ -13820,7 +13820,7 @@
       </p:sp>
       <p:sp>
         <p:nvSpPr>
-          <p:cNvPr id="26" name="Text 24"/>
+          <p:cNvPr id="26" name="mdpr:1-2-0772f8:toc-item-4:toc-item-4"/>
           <p:cNvSpPr txBox="1"/>
           <p:nvPr/>
         </p:nvSpPr>
@@ -13862,7 +13862,7 @@
       </p:sp>
       <p:sp>
         <p:nvSpPr>
-          <p:cNvPr id="27" name="Text 25"/>
+          <p:cNvPr id="27" name="mdpr:1-2-0772f8:toc-item-5:toc-item-5"/>
           <p:cNvSpPr txBox="1"/>
           <p:nvPr/>
         </p:nvSpPr>
@@ -13904,7 +13904,7 @@
       </p:sp>
       <p:sp>
         <p:nvSpPr>
-          <p:cNvPr id="28" name="Text 26"/>
+          <p:cNvPr id="28" name="mdpr:1-2-0772f8:toc-item-6:toc-item-6"/>
           <p:cNvSpPr txBox="1"/>
           <p:nvPr/>
         </p:nvSpPr>
@@ -13946,7 +13946,7 @@
       </p:sp>
       <p:sp>
         <p:nvSpPr>
-          <p:cNvPr id="29" name="Text 27"/>
+          <p:cNvPr id="29" name="mdpr:1-2-0772f8:toc-item-7:toc-item-7"/>
           <p:cNvSpPr txBox="1"/>
           <p:nvPr/>
         </p:nvSpPr>
@@ -13988,7 +13988,7 @@
       </p:sp>
       <p:sp>
         <p:nvSpPr>
-          <p:cNvPr id="30" name="Text 28"/>
+          <p:cNvPr id="30" name="mdpr:1-2-0772f8:toc-item-8:toc-item-8"/>
           <p:cNvSpPr txBox="1"/>
           <p:nvPr/>
         </p:nvSpPr>
@@ -14030,7 +14030,7 @@
       </p:sp>
       <p:sp>
         <p:nvSpPr>
-          <p:cNvPr id="31" name="Text 29"/>
+          <p:cNvPr id="31" name="mdpr:1-2-0772f8:toc-item-9:toc-item-9"/>
           <p:cNvSpPr txBox="1"/>
           <p:nvPr/>
         </p:nvSpPr>
@@ -14072,7 +14072,7 @@
       </p:sp>
       <p:sp>
         <p:nvSpPr>
-          <p:cNvPr id="32" name="Text 30"/>
+          <p:cNvPr id="32" name="mdpr:1-2-0772f8:toc-item-10:toc-item-10"/>
           <p:cNvSpPr txBox="1"/>
           <p:nvPr/>
         </p:nvSpPr>
@@ -14114,7 +14114,7 @@
       </p:sp>
       <p:sp>
         <p:nvSpPr>
-          <p:cNvPr id="33" name="Text 31"/>
+          <p:cNvPr id="33" name="mdpr:1-2-0772f8:toc-item-11:toc-item-11"/>
           <p:cNvSpPr txBox="1"/>
           <p:nvPr/>
         </p:nvSpPr>
@@ -14156,7 +14156,7 @@
       </p:sp>
       <p:sp>
         <p:nvSpPr>
-          <p:cNvPr id="34" name="Text 32"/>
+          <p:cNvPr id="34" name="mdpr:1-2-0772f8:toc-item-12:toc-item-12"/>
           <p:cNvSpPr txBox="1"/>
           <p:nvPr/>
         </p:nvSpPr>
@@ -14198,7 +14198,7 @@
       </p:sp>
       <p:sp>
         <p:nvSpPr>
-          <p:cNvPr id="35" name="Text 33"/>
+          <p:cNvPr id="35" name="mdpr:1-2-0772f8:toc-item-13:toc-item-13"/>
           <p:cNvSpPr txBox="1"/>
           <p:nvPr/>
         </p:nvSpPr>
@@ -14240,7 +14240,7 @@
       </p:sp>
       <p:sp>
         <p:nvSpPr>
-          <p:cNvPr id="36" name="Text 34"/>
+          <p:cNvPr id="36" name="mdpr:1-2-0772f8:toc-item-14:toc-item-14"/>
           <p:cNvSpPr txBox="1"/>
           <p:nvPr/>
         </p:nvSpPr>
@@ -14465,7 +14465,7 @@
       </p:sp>
       <p:sp>
         <p:nvSpPr>
-          <p:cNvPr id="7" name="Text 5"/>
+          <p:cNvPr id="7" name="mdpr:2-2-4f71ba:title:__title:2-2-4f71ba"/>
           <p:cNvSpPr txBox="1"/>
           <p:nvPr/>
         </p:nvSpPr>
@@ -14507,7 +14507,7 @@
       </p:sp>
       <p:sp>
         <p:nvSpPr>
-          <p:cNvPr id="8" name="Text 6"/>
+          <p:cNvPr id="8" name="mdpr:2-2-4f71ba:left:block-27-chunk-2"/>
           <p:cNvSpPr txBox="1"/>
           <p:nvPr/>
         </p:nvSpPr>
@@ -14566,7 +14566,7 @@
       </p:sp>
       <p:sp>
         <p:nvSpPr>
-          <p:cNvPr id="9" name="Text 7"/>
+          <p:cNvPr id="9" name="mdpr:2-2-4f71ba:right:block-27-chunk-2"/>
           <p:cNvSpPr txBox="1"/>
           <p:nvPr/>
         </p:nvSpPr>
@@ -14760,114 +14760,6 @@
         </p:nvSpPr>
         <p:spPr>
           <a:xfrm>
-            <a:off x="822960" y="1463040"/>
-            <a:ext cx="73152" cy="1920240"/>
-          </a:xfrm>
-          <a:prstGeom prst="rect">
-            <a:avLst/>
-          </a:prstGeom>
-          <a:solidFill>
-            <a:srgbClr val="4F6F8F"/>
-          </a:solidFill>
-          <a:ln w="12700">
-            <a:solidFill>
-              <a:srgbClr val="4F6F8F">
-                <a:alpha val="0"/>
-              </a:srgbClr>
-            </a:solidFill>
-            <a:prstDash val="solid"/>
-          </a:ln>
-        </p:spPr>
-      </p:sp>
-      <p:sp>
-        <p:nvSpPr>
-          <p:cNvPr id="6" name="Shape 4"/>
-          <p:cNvSpPr/>
-          <p:nvPr/>
-        </p:nvSpPr>
-        <p:spPr>
-          <a:xfrm>
-            <a:off x="6309360" y="1463040"/>
-            <a:ext cx="73152" cy="1920240"/>
-          </a:xfrm>
-          <a:prstGeom prst="rect">
-            <a:avLst/>
-          </a:prstGeom>
-          <a:solidFill>
-            <a:srgbClr val="CBD5E1"/>
-          </a:solidFill>
-          <a:ln w="12700">
-            <a:solidFill>
-              <a:srgbClr val="CBD5E1">
-                <a:alpha val="0"/>
-              </a:srgbClr>
-            </a:solidFill>
-            <a:prstDash val="solid"/>
-          </a:ln>
-        </p:spPr>
-      </p:sp>
-      <p:sp>
-        <p:nvSpPr>
-          <p:cNvPr id="7" name="Shape 5"/>
-          <p:cNvSpPr/>
-          <p:nvPr/>
-        </p:nvSpPr>
-        <p:spPr>
-          <a:xfrm>
-            <a:off x="822960" y="3749040"/>
-            <a:ext cx="73152" cy="1920240"/>
-          </a:xfrm>
-          <a:prstGeom prst="rect">
-            <a:avLst/>
-          </a:prstGeom>
-          <a:solidFill>
-            <a:srgbClr val="4F6F8F"/>
-          </a:solidFill>
-          <a:ln w="12700">
-            <a:solidFill>
-              <a:srgbClr val="4F6F8F">
-                <a:alpha val="0"/>
-              </a:srgbClr>
-            </a:solidFill>
-            <a:prstDash val="solid"/>
-          </a:ln>
-        </p:spPr>
-      </p:sp>
-      <p:sp>
-        <p:nvSpPr>
-          <p:cNvPr id="8" name="Shape 6"/>
-          <p:cNvSpPr/>
-          <p:nvPr/>
-        </p:nvSpPr>
-        <p:spPr>
-          <a:xfrm>
-            <a:off x="6309360" y="3749040"/>
-            <a:ext cx="73152" cy="1920240"/>
-          </a:xfrm>
-          <a:prstGeom prst="rect">
-            <a:avLst/>
-          </a:prstGeom>
-          <a:solidFill>
-            <a:srgbClr val="CBD5E1"/>
-          </a:solidFill>
-          <a:ln w="12700">
-            <a:solidFill>
-              <a:srgbClr val="CBD5E1">
-                <a:alpha val="0"/>
-              </a:srgbClr>
-            </a:solidFill>
-            <a:prstDash val="solid"/>
-          </a:ln>
-        </p:spPr>
-      </p:sp>
-      <p:sp>
-        <p:nvSpPr>
-          <p:cNvPr id="9" name="Shape 7"/>
-          <p:cNvSpPr/>
-          <p:nvPr/>
-        </p:nvSpPr>
-        <p:spPr>
-          <a:xfrm>
             <a:off x="864108" y="1513332"/>
             <a:ext cx="5029200" cy="1920240"/>
           </a:xfrm>
@@ -14900,7 +14792,7 @@
       </p:sp>
       <p:sp>
         <p:nvSpPr>
-          <p:cNvPr id="10" name="Shape 8"/>
+          <p:cNvPr id="6" name="Shape 4"/>
           <p:cNvSpPr/>
           <p:nvPr/>
         </p:nvSpPr>
@@ -14938,7 +14830,7 @@
       </p:sp>
       <p:sp>
         <p:nvSpPr>
-          <p:cNvPr id="11" name="Shape 9"/>
+          <p:cNvPr id="7" name="Shape 5"/>
           <p:cNvSpPr/>
           <p:nvPr/>
         </p:nvSpPr>
@@ -14969,7 +14861,7 @@
       </p:sp>
       <p:pic>
         <p:nvPicPr>
-          <p:cNvPr id="12" name="Image 0" descr="preencoded.png">    </p:cNvPr>
+          <p:cNvPr id="8" name="Image 0" descr="preencoded.png">    </p:cNvPr>
           <p:cNvPicPr>
             <a:picLocks noChangeAspect="1"/>
           </p:cNvPicPr>
@@ -14999,7 +14891,7 @@
       </p:pic>
       <p:sp>
         <p:nvSpPr>
-          <p:cNvPr id="13" name="Shape 10"/>
+          <p:cNvPr id="9" name="Shape 6"/>
           <p:cNvSpPr/>
           <p:nvPr/>
         </p:nvSpPr>
@@ -15037,7 +14929,7 @@
       </p:sp>
       <p:sp>
         <p:nvSpPr>
-          <p:cNvPr id="14" name="Shape 11"/>
+          <p:cNvPr id="10" name="Shape 7"/>
           <p:cNvSpPr/>
           <p:nvPr/>
         </p:nvSpPr>
@@ -15075,7 +14967,7 @@
       </p:sp>
       <p:sp>
         <p:nvSpPr>
-          <p:cNvPr id="15" name="Shape 12"/>
+          <p:cNvPr id="11" name="Shape 8"/>
           <p:cNvSpPr/>
           <p:nvPr/>
         </p:nvSpPr>
@@ -15106,7 +14998,7 @@
       </p:sp>
       <p:pic>
         <p:nvPicPr>
-          <p:cNvPr id="16" name="Image 1" descr="preencoded.png">    </p:cNvPr>
+          <p:cNvPr id="12" name="Image 1" descr="preencoded.png">    </p:cNvPr>
           <p:cNvPicPr>
             <a:picLocks noChangeAspect="1"/>
           </p:cNvPicPr>
@@ -15136,7 +15028,7 @@
       </p:pic>
       <p:sp>
         <p:nvSpPr>
-          <p:cNvPr id="17" name="Shape 13"/>
+          <p:cNvPr id="13" name="Shape 9"/>
           <p:cNvSpPr/>
           <p:nvPr/>
         </p:nvSpPr>
@@ -15174,7 +15066,7 @@
       </p:sp>
       <p:sp>
         <p:nvSpPr>
-          <p:cNvPr id="18" name="Shape 14"/>
+          <p:cNvPr id="14" name="Shape 10"/>
           <p:cNvSpPr/>
           <p:nvPr/>
         </p:nvSpPr>
@@ -15212,7 +15104,7 @@
       </p:sp>
       <p:sp>
         <p:nvSpPr>
-          <p:cNvPr id="19" name="Shape 15"/>
+          <p:cNvPr id="15" name="Shape 11"/>
           <p:cNvSpPr/>
           <p:nvPr/>
         </p:nvSpPr>
@@ -15243,7 +15135,7 @@
       </p:sp>
       <p:pic>
         <p:nvPicPr>
-          <p:cNvPr id="20" name="Image 2" descr="preencoded.png">    </p:cNvPr>
+          <p:cNvPr id="16" name="Image 2" descr="preencoded.png">    </p:cNvPr>
           <p:cNvPicPr>
             <a:picLocks noChangeAspect="1"/>
           </p:cNvPicPr>
@@ -15273,7 +15165,7 @@
       </p:pic>
       <p:sp>
         <p:nvSpPr>
-          <p:cNvPr id="21" name="Shape 16"/>
+          <p:cNvPr id="17" name="Shape 12"/>
           <p:cNvSpPr/>
           <p:nvPr/>
         </p:nvSpPr>
@@ -15311,7 +15203,7 @@
       </p:sp>
       <p:sp>
         <p:nvSpPr>
-          <p:cNvPr id="22" name="Shape 17"/>
+          <p:cNvPr id="18" name="Shape 13"/>
           <p:cNvSpPr/>
           <p:nvPr/>
         </p:nvSpPr>
@@ -15349,7 +15241,7 @@
       </p:sp>
       <p:sp>
         <p:nvSpPr>
-          <p:cNvPr id="23" name="Shape 18"/>
+          <p:cNvPr id="19" name="Shape 14"/>
           <p:cNvSpPr/>
           <p:nvPr/>
         </p:nvSpPr>
@@ -15380,7 +15272,7 @@
       </p:sp>
       <p:pic>
         <p:nvPicPr>
-          <p:cNvPr id="24" name="Image 3" descr="preencoded.png">    </p:cNvPr>
+          <p:cNvPr id="20" name="Image 3" descr="preencoded.png">    </p:cNvPr>
           <p:cNvPicPr>
             <a:picLocks noChangeAspect="1"/>
           </p:cNvPicPr>
@@ -15410,7 +15302,115 @@
       </p:pic>
       <p:sp>
         <p:nvSpPr>
-          <p:cNvPr id="25" name="Text 19"/>
+          <p:cNvPr id="21" name="Shape 15"/>
+          <p:cNvSpPr/>
+          <p:nvPr/>
+        </p:nvSpPr>
+        <p:spPr>
+          <a:xfrm>
+            <a:off x="822960" y="1463040"/>
+            <a:ext cx="73152" cy="1920240"/>
+          </a:xfrm>
+          <a:prstGeom prst="rect">
+            <a:avLst/>
+          </a:prstGeom>
+          <a:solidFill>
+            <a:srgbClr val="4F6F8F"/>
+          </a:solidFill>
+          <a:ln w="12700">
+            <a:solidFill>
+              <a:srgbClr val="4F6F8F">
+                <a:alpha val="0"/>
+              </a:srgbClr>
+            </a:solidFill>
+            <a:prstDash val="solid"/>
+          </a:ln>
+        </p:spPr>
+      </p:sp>
+      <p:sp>
+        <p:nvSpPr>
+          <p:cNvPr id="22" name="Shape 16"/>
+          <p:cNvSpPr/>
+          <p:nvPr/>
+        </p:nvSpPr>
+        <p:spPr>
+          <a:xfrm>
+            <a:off x="6309360" y="1463040"/>
+            <a:ext cx="73152" cy="1920240"/>
+          </a:xfrm>
+          <a:prstGeom prst="rect">
+            <a:avLst/>
+          </a:prstGeom>
+          <a:solidFill>
+            <a:srgbClr val="CBD5E1"/>
+          </a:solidFill>
+          <a:ln w="12700">
+            <a:solidFill>
+              <a:srgbClr val="CBD5E1">
+                <a:alpha val="0"/>
+              </a:srgbClr>
+            </a:solidFill>
+            <a:prstDash val="solid"/>
+          </a:ln>
+        </p:spPr>
+      </p:sp>
+      <p:sp>
+        <p:nvSpPr>
+          <p:cNvPr id="23" name="Shape 17"/>
+          <p:cNvSpPr/>
+          <p:nvPr/>
+        </p:nvSpPr>
+        <p:spPr>
+          <a:xfrm>
+            <a:off x="822960" y="3749040"/>
+            <a:ext cx="73152" cy="1920240"/>
+          </a:xfrm>
+          <a:prstGeom prst="rect">
+            <a:avLst/>
+          </a:prstGeom>
+          <a:solidFill>
+            <a:srgbClr val="4F6F8F"/>
+          </a:solidFill>
+          <a:ln w="12700">
+            <a:solidFill>
+              <a:srgbClr val="4F6F8F">
+                <a:alpha val="0"/>
+              </a:srgbClr>
+            </a:solidFill>
+            <a:prstDash val="solid"/>
+          </a:ln>
+        </p:spPr>
+      </p:sp>
+      <p:sp>
+        <p:nvSpPr>
+          <p:cNvPr id="24" name="Shape 18"/>
+          <p:cNvSpPr/>
+          <p:nvPr/>
+        </p:nvSpPr>
+        <p:spPr>
+          <a:xfrm>
+            <a:off x="6309360" y="3749040"/>
+            <a:ext cx="73152" cy="1920240"/>
+          </a:xfrm>
+          <a:prstGeom prst="rect">
+            <a:avLst/>
+          </a:prstGeom>
+          <a:solidFill>
+            <a:srgbClr val="CBD5E1"/>
+          </a:solidFill>
+          <a:ln w="12700">
+            <a:solidFill>
+              <a:srgbClr val="CBD5E1">
+                <a:alpha val="0"/>
+              </a:srgbClr>
+            </a:solidFill>
+            <a:prstDash val="solid"/>
+          </a:ln>
+        </p:spPr>
+      </p:sp>
+      <p:sp>
+        <p:nvSpPr>
+          <p:cNvPr id="25" name="mdpr:icon-and-text-aside-8429fc:title:__title:icon-and-text-aside-8429fc"/>
           <p:cNvSpPr txBox="1"/>
           <p:nvPr/>
         </p:nvSpPr>
@@ -15509,7 +15509,7 @@
       </p:pic>
       <p:sp>
         <p:nvSpPr>
-          <p:cNvPr id="28" name="Text 21"/>
+          <p:cNvPr id="28" name="mdpr:icon-and-text-aside-8429fc:item-1:block-29"/>
           <p:cNvSpPr txBox="1"/>
           <p:nvPr/>
         </p:nvSpPr>
@@ -15625,7 +15625,7 @@
       </p:pic>
       <p:sp>
         <p:nvSpPr>
-          <p:cNvPr id="31" name="Text 23"/>
+          <p:cNvPr id="31" name="mdpr:icon-and-text-aside-8429fc:item-2:block-29"/>
           <p:cNvSpPr txBox="1"/>
           <p:nvPr/>
         </p:nvSpPr>
@@ -15741,7 +15741,7 @@
       </p:pic>
       <p:sp>
         <p:nvSpPr>
-          <p:cNvPr id="34" name="Text 25"/>
+          <p:cNvPr id="34" name="mdpr:icon-and-text-aside-8429fc:item-3:block-29"/>
           <p:cNvSpPr txBox="1"/>
           <p:nvPr/>
         </p:nvSpPr>
@@ -15857,7 +15857,7 @@
       </p:pic>
       <p:sp>
         <p:nvSpPr>
-          <p:cNvPr id="37" name="Text 27"/>
+          <p:cNvPr id="37" name="mdpr:icon-and-text-aside-8429fc:item-4:block-29"/>
           <p:cNvSpPr txBox="1"/>
           <p:nvPr/>
         </p:nvSpPr>
@@ -16051,114 +16051,6 @@
         </p:nvSpPr>
         <p:spPr>
           <a:xfrm>
-            <a:off x="822960" y="1463040"/>
-            <a:ext cx="73152" cy="1920240"/>
-          </a:xfrm>
-          <a:prstGeom prst="rect">
-            <a:avLst/>
-          </a:prstGeom>
-          <a:solidFill>
-            <a:srgbClr val="4F6F8F"/>
-          </a:solidFill>
-          <a:ln w="12700">
-            <a:solidFill>
-              <a:srgbClr val="4F6F8F">
-                <a:alpha val="0"/>
-              </a:srgbClr>
-            </a:solidFill>
-            <a:prstDash val="solid"/>
-          </a:ln>
-        </p:spPr>
-      </p:sp>
-      <p:sp>
-        <p:nvSpPr>
-          <p:cNvPr id="6" name="Shape 4"/>
-          <p:cNvSpPr/>
-          <p:nvPr/>
-        </p:nvSpPr>
-        <p:spPr>
-          <a:xfrm>
-            <a:off x="6309360" y="1463040"/>
-            <a:ext cx="73152" cy="1920240"/>
-          </a:xfrm>
-          <a:prstGeom prst="rect">
-            <a:avLst/>
-          </a:prstGeom>
-          <a:solidFill>
-            <a:srgbClr val="CBD5E1"/>
-          </a:solidFill>
-          <a:ln w="12700">
-            <a:solidFill>
-              <a:srgbClr val="CBD5E1">
-                <a:alpha val="0"/>
-              </a:srgbClr>
-            </a:solidFill>
-            <a:prstDash val="solid"/>
-          </a:ln>
-        </p:spPr>
-      </p:sp>
-      <p:sp>
-        <p:nvSpPr>
-          <p:cNvPr id="7" name="Shape 5"/>
-          <p:cNvSpPr/>
-          <p:nvPr/>
-        </p:nvSpPr>
-        <p:spPr>
-          <a:xfrm>
-            <a:off x="822960" y="3749040"/>
-            <a:ext cx="73152" cy="1920240"/>
-          </a:xfrm>
-          <a:prstGeom prst="rect">
-            <a:avLst/>
-          </a:prstGeom>
-          <a:solidFill>
-            <a:srgbClr val="4F6F8F"/>
-          </a:solidFill>
-          <a:ln w="12700">
-            <a:solidFill>
-              <a:srgbClr val="4F6F8F">
-                <a:alpha val="0"/>
-              </a:srgbClr>
-            </a:solidFill>
-            <a:prstDash val="solid"/>
-          </a:ln>
-        </p:spPr>
-      </p:sp>
-      <p:sp>
-        <p:nvSpPr>
-          <p:cNvPr id="8" name="Shape 6"/>
-          <p:cNvSpPr/>
-          <p:nvPr/>
-        </p:nvSpPr>
-        <p:spPr>
-          <a:xfrm>
-            <a:off x="6309360" y="3749040"/>
-            <a:ext cx="73152" cy="1920240"/>
-          </a:xfrm>
-          <a:prstGeom prst="rect">
-            <a:avLst/>
-          </a:prstGeom>
-          <a:solidFill>
-            <a:srgbClr val="CBD5E1"/>
-          </a:solidFill>
-          <a:ln w="12700">
-            <a:solidFill>
-              <a:srgbClr val="CBD5E1">
-                <a:alpha val="0"/>
-              </a:srgbClr>
-            </a:solidFill>
-            <a:prstDash val="solid"/>
-          </a:ln>
-        </p:spPr>
-      </p:sp>
-      <p:sp>
-        <p:nvSpPr>
-          <p:cNvPr id="9" name="Shape 7"/>
-          <p:cNvSpPr/>
-          <p:nvPr/>
-        </p:nvSpPr>
-        <p:spPr>
-          <a:xfrm>
             <a:off x="864108" y="1513332"/>
             <a:ext cx="5029200" cy="1920240"/>
           </a:xfrm>
@@ -16191,7 +16083,7 @@
       </p:sp>
       <p:sp>
         <p:nvSpPr>
-          <p:cNvPr id="10" name="Shape 8"/>
+          <p:cNvPr id="6" name="Shape 4"/>
           <p:cNvSpPr/>
           <p:nvPr/>
         </p:nvSpPr>
@@ -16229,7 +16121,7 @@
       </p:sp>
       <p:sp>
         <p:nvSpPr>
-          <p:cNvPr id="11" name="Shape 9"/>
+          <p:cNvPr id="7" name="Shape 5"/>
           <p:cNvSpPr/>
           <p:nvPr/>
         </p:nvSpPr>
@@ -16260,7 +16152,7 @@
       </p:sp>
       <p:pic>
         <p:nvPicPr>
-          <p:cNvPr id="12" name="Image 0" descr="preencoded.png">    </p:cNvPr>
+          <p:cNvPr id="8" name="Image 0" descr="preencoded.png">    </p:cNvPr>
           <p:cNvPicPr>
             <a:picLocks noChangeAspect="1"/>
           </p:cNvPicPr>
@@ -16290,7 +16182,7 @@
       </p:pic>
       <p:sp>
         <p:nvSpPr>
-          <p:cNvPr id="13" name="Shape 10"/>
+          <p:cNvPr id="9" name="Shape 6"/>
           <p:cNvSpPr/>
           <p:nvPr/>
         </p:nvSpPr>
@@ -16328,7 +16220,7 @@
       </p:sp>
       <p:sp>
         <p:nvSpPr>
-          <p:cNvPr id="14" name="Shape 11"/>
+          <p:cNvPr id="10" name="Shape 7"/>
           <p:cNvSpPr/>
           <p:nvPr/>
         </p:nvSpPr>
@@ -16366,7 +16258,7 @@
       </p:sp>
       <p:sp>
         <p:nvSpPr>
-          <p:cNvPr id="15" name="Shape 12"/>
+          <p:cNvPr id="11" name="Shape 8"/>
           <p:cNvSpPr/>
           <p:nvPr/>
         </p:nvSpPr>
@@ -16397,7 +16289,7 @@
       </p:sp>
       <p:pic>
         <p:nvPicPr>
-          <p:cNvPr id="16" name="Image 1" descr="preencoded.png">    </p:cNvPr>
+          <p:cNvPr id="12" name="Image 1" descr="preencoded.png">    </p:cNvPr>
           <p:cNvPicPr>
             <a:picLocks noChangeAspect="1"/>
           </p:cNvPicPr>
@@ -16427,7 +16319,7 @@
       </p:pic>
       <p:sp>
         <p:nvSpPr>
-          <p:cNvPr id="17" name="Shape 13"/>
+          <p:cNvPr id="13" name="Shape 9"/>
           <p:cNvSpPr/>
           <p:nvPr/>
         </p:nvSpPr>
@@ -16465,7 +16357,7 @@
       </p:sp>
       <p:sp>
         <p:nvSpPr>
-          <p:cNvPr id="18" name="Shape 14"/>
+          <p:cNvPr id="14" name="Shape 10"/>
           <p:cNvSpPr/>
           <p:nvPr/>
         </p:nvSpPr>
@@ -16503,7 +16395,7 @@
       </p:sp>
       <p:sp>
         <p:nvSpPr>
-          <p:cNvPr id="19" name="Shape 15"/>
+          <p:cNvPr id="15" name="Shape 11"/>
           <p:cNvSpPr/>
           <p:nvPr/>
         </p:nvSpPr>
@@ -16534,7 +16426,7 @@
       </p:sp>
       <p:pic>
         <p:nvPicPr>
-          <p:cNvPr id="20" name="Image 2" descr="preencoded.png">    </p:cNvPr>
+          <p:cNvPr id="16" name="Image 2" descr="preencoded.png">    </p:cNvPr>
           <p:cNvPicPr>
             <a:picLocks noChangeAspect="1"/>
           </p:cNvPicPr>
@@ -16564,7 +16456,7 @@
       </p:pic>
       <p:sp>
         <p:nvSpPr>
-          <p:cNvPr id="21" name="Shape 16"/>
+          <p:cNvPr id="17" name="Shape 12"/>
           <p:cNvSpPr/>
           <p:nvPr/>
         </p:nvSpPr>
@@ -16602,7 +16494,7 @@
       </p:sp>
       <p:sp>
         <p:nvSpPr>
-          <p:cNvPr id="22" name="Shape 17"/>
+          <p:cNvPr id="18" name="Shape 13"/>
           <p:cNvSpPr/>
           <p:nvPr/>
         </p:nvSpPr>
@@ -16640,7 +16532,7 @@
       </p:sp>
       <p:sp>
         <p:nvSpPr>
-          <p:cNvPr id="23" name="Shape 18"/>
+          <p:cNvPr id="19" name="Shape 14"/>
           <p:cNvSpPr/>
           <p:nvPr/>
         </p:nvSpPr>
@@ -16671,7 +16563,7 @@
       </p:sp>
       <p:pic>
         <p:nvPicPr>
-          <p:cNvPr id="24" name="Image 3" descr="preencoded.png">    </p:cNvPr>
+          <p:cNvPr id="20" name="Image 3" descr="preencoded.png">    </p:cNvPr>
           <p:cNvPicPr>
             <a:picLocks noChangeAspect="1"/>
           </p:cNvPicPr>
@@ -16701,7 +16593,115 @@
       </p:pic>
       <p:sp>
         <p:nvSpPr>
-          <p:cNvPr id="25" name="Text 19"/>
+          <p:cNvPr id="21" name="Shape 15"/>
+          <p:cNvSpPr/>
+          <p:nvPr/>
+        </p:nvSpPr>
+        <p:spPr>
+          <a:xfrm>
+            <a:off x="822960" y="1463040"/>
+            <a:ext cx="73152" cy="1920240"/>
+          </a:xfrm>
+          <a:prstGeom prst="rect">
+            <a:avLst/>
+          </a:prstGeom>
+          <a:solidFill>
+            <a:srgbClr val="4F6F8F"/>
+          </a:solidFill>
+          <a:ln w="12700">
+            <a:solidFill>
+              <a:srgbClr val="4F6F8F">
+                <a:alpha val="0"/>
+              </a:srgbClr>
+            </a:solidFill>
+            <a:prstDash val="solid"/>
+          </a:ln>
+        </p:spPr>
+      </p:sp>
+      <p:sp>
+        <p:nvSpPr>
+          <p:cNvPr id="22" name="Shape 16"/>
+          <p:cNvSpPr/>
+          <p:nvPr/>
+        </p:nvSpPr>
+        <p:spPr>
+          <a:xfrm>
+            <a:off x="6309360" y="1463040"/>
+            <a:ext cx="73152" cy="1920240"/>
+          </a:xfrm>
+          <a:prstGeom prst="rect">
+            <a:avLst/>
+          </a:prstGeom>
+          <a:solidFill>
+            <a:srgbClr val="CBD5E1"/>
+          </a:solidFill>
+          <a:ln w="12700">
+            <a:solidFill>
+              <a:srgbClr val="CBD5E1">
+                <a:alpha val="0"/>
+              </a:srgbClr>
+            </a:solidFill>
+            <a:prstDash val="solid"/>
+          </a:ln>
+        </p:spPr>
+      </p:sp>
+      <p:sp>
+        <p:nvSpPr>
+          <p:cNvPr id="23" name="Shape 17"/>
+          <p:cNvSpPr/>
+          <p:nvPr/>
+        </p:nvSpPr>
+        <p:spPr>
+          <a:xfrm>
+            <a:off x="822960" y="3749040"/>
+            <a:ext cx="73152" cy="1920240"/>
+          </a:xfrm>
+          <a:prstGeom prst="rect">
+            <a:avLst/>
+          </a:prstGeom>
+          <a:solidFill>
+            <a:srgbClr val="4F6F8F"/>
+          </a:solidFill>
+          <a:ln w="12700">
+            <a:solidFill>
+              <a:srgbClr val="4F6F8F">
+                <a:alpha val="0"/>
+              </a:srgbClr>
+            </a:solidFill>
+            <a:prstDash val="solid"/>
+          </a:ln>
+        </p:spPr>
+      </p:sp>
+      <p:sp>
+        <p:nvSpPr>
+          <p:cNvPr id="24" name="Shape 18"/>
+          <p:cNvSpPr/>
+          <p:nvPr/>
+        </p:nvSpPr>
+        <p:spPr>
+          <a:xfrm>
+            <a:off x="6309360" y="3749040"/>
+            <a:ext cx="73152" cy="1920240"/>
+          </a:xfrm>
+          <a:prstGeom prst="rect">
+            <a:avLst/>
+          </a:prstGeom>
+          <a:solidFill>
+            <a:srgbClr val="CBD5E1"/>
+          </a:solidFill>
+          <a:ln w="12700">
+            <a:solidFill>
+              <a:srgbClr val="CBD5E1">
+                <a:alpha val="0"/>
+              </a:srgbClr>
+            </a:solidFill>
+            <a:prstDash val="solid"/>
+          </a:ln>
+        </p:spPr>
+      </p:sp>
+      <p:sp>
+        <p:nvSpPr>
+          <p:cNvPr id="25" name="mdpr:overflow-guard-f8d03e:title:__title:overflow-guard-f8d03e"/>
           <p:cNvSpPr txBox="1"/>
           <p:nvPr/>
         </p:nvSpPr>
@@ -16800,7 +16800,7 @@
       </p:pic>
       <p:sp>
         <p:nvSpPr>
-          <p:cNvPr id="28" name="Text 21"/>
+          <p:cNvPr id="28" name="mdpr:overflow-guard-f8d03e:item-1:block-31"/>
           <p:cNvSpPr txBox="1"/>
           <p:nvPr/>
         </p:nvSpPr>
@@ -16916,7 +16916,7 @@
       </p:pic>
       <p:sp>
         <p:nvSpPr>
-          <p:cNvPr id="31" name="Text 23"/>
+          <p:cNvPr id="31" name="mdpr:overflow-guard-f8d03e:item-2:block-31"/>
           <p:cNvSpPr txBox="1"/>
           <p:nvPr/>
         </p:nvSpPr>
@@ -17032,7 +17032,7 @@
       </p:pic>
       <p:sp>
         <p:nvSpPr>
-          <p:cNvPr id="34" name="Text 25"/>
+          <p:cNvPr id="34" name="mdpr:overflow-guard-f8d03e:item-3:block-31"/>
           <p:cNvSpPr txBox="1"/>
           <p:nvPr/>
         </p:nvSpPr>
@@ -17148,7 +17148,7 @@
       </p:pic>
       <p:sp>
         <p:nvSpPr>
-          <p:cNvPr id="37" name="Text 27"/>
+          <p:cNvPr id="37" name="mdpr:overflow-guard-f8d03e:item-4:block-31"/>
           <p:cNvSpPr txBox="1"/>
           <p:nvPr/>
         </p:nvSpPr>
@@ -17342,33 +17342,6 @@
         </p:nvSpPr>
         <p:spPr>
           <a:xfrm>
-            <a:off x="822960" y="1463040"/>
-            <a:ext cx="5623560" cy="73152"/>
-          </a:xfrm>
-          <a:prstGeom prst="rect">
-            <a:avLst/>
-          </a:prstGeom>
-          <a:solidFill>
-            <a:srgbClr val="4F6F8F"/>
-          </a:solidFill>
-          <a:ln w="12700">
-            <a:solidFill>
-              <a:srgbClr val="4F6F8F">
-                <a:alpha val="0"/>
-              </a:srgbClr>
-            </a:solidFill>
-            <a:prstDash val="solid"/>
-          </a:ln>
-        </p:spPr>
-      </p:sp>
-      <p:sp>
-        <p:nvSpPr>
-          <p:cNvPr id="6" name="Shape 4"/>
-          <p:cNvSpPr/>
-          <p:nvPr/>
-        </p:nvSpPr>
-        <p:spPr>
-          <a:xfrm>
             <a:off x="6853428" y="1513332"/>
             <a:ext cx="4434840" cy="4526280"/>
           </a:xfrm>
@@ -17401,7 +17374,7 @@
       </p:sp>
       <p:sp>
         <p:nvSpPr>
-          <p:cNvPr id="7" name="Shape 5"/>
+          <p:cNvPr id="6" name="Shape 4"/>
           <p:cNvSpPr/>
           <p:nvPr/>
         </p:nvSpPr>
@@ -17439,7 +17412,7 @@
       </p:sp>
       <p:sp>
         <p:nvSpPr>
-          <p:cNvPr id="8" name="Shape 6"/>
+          <p:cNvPr id="7" name="Shape 5"/>
           <p:cNvSpPr/>
           <p:nvPr/>
         </p:nvSpPr>
@@ -17470,7 +17443,7 @@
       </p:sp>
       <p:pic>
         <p:nvPicPr>
-          <p:cNvPr id="9" name="Image 0" descr="preencoded.png">    </p:cNvPr>
+          <p:cNvPr id="8" name="Image 0" descr="preencoded.png">    </p:cNvPr>
           <p:cNvPicPr>
             <a:picLocks noChangeAspect="1"/>
           </p:cNvPicPr>
@@ -17500,7 +17473,34 @@
       </p:pic>
       <p:sp>
         <p:nvSpPr>
-          <p:cNvPr id="10" name="Text 7"/>
+          <p:cNvPr id="9" name="Shape 6"/>
+          <p:cNvSpPr/>
+          <p:nvPr/>
+        </p:nvSpPr>
+        <p:spPr>
+          <a:xfrm>
+            <a:off x="822960" y="1463040"/>
+            <a:ext cx="5623560" cy="73152"/>
+          </a:xfrm>
+          <a:prstGeom prst="rect">
+            <a:avLst/>
+          </a:prstGeom>
+          <a:solidFill>
+            <a:srgbClr val="4F6F8F"/>
+          </a:solidFill>
+          <a:ln w="12700">
+            <a:solidFill>
+              <a:srgbClr val="4F6F8F">
+                <a:alpha val="0"/>
+              </a:srgbClr>
+            </a:solidFill>
+            <a:prstDash val="solid"/>
+          </a:ln>
+        </p:spPr>
+      </p:sp>
+      <p:sp>
+        <p:nvSpPr>
+          <p:cNvPr id="10" name="mdpr:image-safe-frame-d4d6a4:title:__title:image-safe-frame-d4d6a4"/>
           <p:cNvSpPr txBox="1"/>
           <p:nvPr/>
         </p:nvSpPr>
@@ -17542,7 +17542,7 @@
       </p:sp>
       <p:sp>
         <p:nvSpPr>
-          <p:cNvPr id="11" name="Text 8"/>
+          <p:cNvPr id="11" name="mdpr:image-safe-frame-d4d6a4:body:block-33-block-33-block-33"/>
           <p:cNvSpPr txBox="1"/>
           <p:nvPr/>
         </p:nvSpPr>
@@ -17681,7 +17681,7 @@
       </p:sp>
       <p:pic>
         <p:nvPicPr>
-          <p:cNvPr id="12" name="Image 1" descr="Safe frame diagram">    </p:cNvPr>
+          <p:cNvPr id="12" name="mdpr:image-safe-frame-d4d6a4:image-1:block-34" descr="{&quot;mdpr&quot;:{&quot;slideId&quot;:&quot;image-safe-frame-d4d6a4&quot;,&quot;layoutSlideId&quot;:&quot;layout-image-safe-frame-d4d6a4&quot;,&quot;regionId&quot;:&quot;image-1&quot;,&quot;blockIds&quot;:[&quot;block-34&quot;],&quot;objectKind&quot;:&quot;native-image&quot;,&quot;role&quot;:&quot;image&quot;,&quot;editable&quot;:false}}">    </p:cNvPr>
           <p:cNvPicPr>
             <a:picLocks noChangeAspect="1"/>
           </p:cNvPicPr>
@@ -17846,33 +17846,6 @@
         </p:nvSpPr>
         <p:spPr>
           <a:xfrm>
-            <a:off x="841248" y="4041648"/>
-            <a:ext cx="4572000" cy="73152"/>
-          </a:xfrm>
-          <a:prstGeom prst="rect">
-            <a:avLst/>
-          </a:prstGeom>
-          <a:solidFill>
-            <a:srgbClr val="4F6F8F"/>
-          </a:solidFill>
-          <a:ln w="12700">
-            <a:solidFill>
-              <a:srgbClr val="4F6F8F">
-                <a:alpha val="0"/>
-              </a:srgbClr>
-            </a:solidFill>
-            <a:prstDash val="solid"/>
-          </a:ln>
-        </p:spPr>
-      </p:sp>
-      <p:sp>
-        <p:nvSpPr>
-          <p:cNvPr id="6" name="Shape 4"/>
-          <p:cNvSpPr/>
-          <p:nvPr/>
-        </p:nvSpPr>
-        <p:spPr>
-          <a:xfrm>
             <a:off x="790956" y="1495044"/>
             <a:ext cx="4617720" cy="2359152"/>
           </a:xfrm>
@@ -17905,7 +17878,7 @@
       </p:sp>
       <p:sp>
         <p:nvSpPr>
-          <p:cNvPr id="7" name="Shape 5"/>
+          <p:cNvPr id="6" name="Shape 4"/>
           <p:cNvSpPr/>
           <p:nvPr/>
         </p:nvSpPr>
@@ -17943,7 +17916,7 @@
       </p:sp>
       <p:sp>
         <p:nvSpPr>
-          <p:cNvPr id="8" name="Shape 6"/>
+          <p:cNvPr id="7" name="Shape 5"/>
           <p:cNvSpPr/>
           <p:nvPr/>
         </p:nvSpPr>
@@ -17974,7 +17947,7 @@
       </p:sp>
       <p:pic>
         <p:nvPicPr>
-          <p:cNvPr id="9" name="Image 0" descr="preencoded.png">    </p:cNvPr>
+          <p:cNvPr id="8" name="Image 0" descr="preencoded.png">    </p:cNvPr>
           <p:cNvPicPr>
             <a:picLocks noChangeAspect="1"/>
           </p:cNvPicPr>
@@ -18004,7 +17977,7 @@
       </p:pic>
       <p:sp>
         <p:nvSpPr>
-          <p:cNvPr id="10" name="Shape 7"/>
+          <p:cNvPr id="9" name="Shape 6"/>
           <p:cNvSpPr/>
           <p:nvPr/>
         </p:nvSpPr>
@@ -18042,7 +18015,7 @@
       </p:sp>
       <p:sp>
         <p:nvSpPr>
-          <p:cNvPr id="11" name="Shape 8"/>
+          <p:cNvPr id="10" name="Shape 7"/>
           <p:cNvSpPr/>
           <p:nvPr/>
         </p:nvSpPr>
@@ -18080,7 +18053,7 @@
       </p:sp>
       <p:sp>
         <p:nvSpPr>
-          <p:cNvPr id="12" name="Shape 9"/>
+          <p:cNvPr id="11" name="Shape 8"/>
           <p:cNvSpPr/>
           <p:nvPr/>
         </p:nvSpPr>
@@ -18111,7 +18084,7 @@
       </p:sp>
       <p:pic>
         <p:nvPicPr>
-          <p:cNvPr id="13" name="Image 1" descr="preencoded.png">    </p:cNvPr>
+          <p:cNvPr id="12" name="Image 1" descr="preencoded.png">    </p:cNvPr>
           <p:cNvPicPr>
             <a:picLocks noChangeAspect="1"/>
           </p:cNvPicPr>
@@ -18141,7 +18114,7 @@
       </p:pic>
       <p:sp>
         <p:nvSpPr>
-          <p:cNvPr id="14" name="Shape 10"/>
+          <p:cNvPr id="13" name="Shape 9"/>
           <p:cNvSpPr/>
           <p:nvPr/>
         </p:nvSpPr>
@@ -18179,7 +18152,7 @@
       </p:sp>
       <p:sp>
         <p:nvSpPr>
-          <p:cNvPr id="15" name="Shape 11"/>
+          <p:cNvPr id="14" name="Shape 10"/>
           <p:cNvSpPr/>
           <p:nvPr/>
         </p:nvSpPr>
@@ -18217,7 +18190,7 @@
       </p:sp>
       <p:sp>
         <p:nvSpPr>
-          <p:cNvPr id="16" name="Shape 12"/>
+          <p:cNvPr id="15" name="Shape 11"/>
           <p:cNvSpPr/>
           <p:nvPr/>
         </p:nvSpPr>
@@ -18248,7 +18221,7 @@
       </p:sp>
       <p:pic>
         <p:nvPicPr>
-          <p:cNvPr id="17" name="Image 2" descr="preencoded.png">    </p:cNvPr>
+          <p:cNvPr id="16" name="Image 2" descr="preencoded.png">    </p:cNvPr>
           <p:cNvPicPr>
             <a:picLocks noChangeAspect="1"/>
           </p:cNvPicPr>
@@ -18278,7 +18251,34 @@
       </p:pic>
       <p:sp>
         <p:nvSpPr>
-          <p:cNvPr id="18" name="Text 13"/>
+          <p:cNvPr id="17" name="Shape 12"/>
+          <p:cNvSpPr/>
+          <p:nvPr/>
+        </p:nvSpPr>
+        <p:spPr>
+          <a:xfrm>
+            <a:off x="841248" y="4041648"/>
+            <a:ext cx="4572000" cy="73152"/>
+          </a:xfrm>
+          <a:prstGeom prst="rect">
+            <a:avLst/>
+          </a:prstGeom>
+          <a:solidFill>
+            <a:srgbClr val="4F6F8F"/>
+          </a:solidFill>
+          <a:ln w="12700">
+            <a:solidFill>
+              <a:srgbClr val="4F6F8F">
+                <a:alpha val="0"/>
+              </a:srgbClr>
+            </a:solidFill>
+            <a:prstDash val="solid"/>
+          </a:ln>
+        </p:spPr>
+      </p:sp>
+      <p:sp>
+        <p:nvSpPr>
+          <p:cNvPr id="18" name="mdpr:mixed-object-packing-438299:title:__title:mixed-object-packing-438299"/>
           <p:cNvSpPr txBox="1"/>
           <p:nvPr/>
         </p:nvSpPr>
@@ -18336,7 +18336,7 @@
       </p:graphicFrame>
       <p:graphicFrame>
         <p:nvGraphicFramePr>
-          <p:cNvPr id="25" name="Table 0"/>
+          <p:cNvPr id="25" name="mdpr:mixed-object-packing-438299:table:block-38"/>
           <p:cNvGraphicFramePr>
             <a:graphicFrameLocks noGrp="1"/>
           </p:cNvGraphicFramePr>
@@ -18778,7 +18778,7 @@
       </p:graphicFrame>
       <p:sp>
         <p:nvSpPr>
-          <p:cNvPr id="21" name="Text 14"/>
+          <p:cNvPr id="21" name="mdpr:mixed-object-packing-438299:body:block-36"/>
           <p:cNvSpPr txBox="1"/>
           <p:nvPr/>
         </p:nvSpPr>
@@ -18877,7 +18877,7 @@
       </p:sp>
       <p:pic>
         <p:nvPicPr>
-          <p:cNvPr id="22" name="Image 3" descr="Safe frame diagram">    </p:cNvPr>
+          <p:cNvPr id="22" name="mdpr:mixed-object-packing-438299:image-1:block-39" descr="{&quot;mdpr&quot;:{&quot;slideId&quot;:&quot;mixed-object-packing-438299&quot;,&quot;layoutSlideId&quot;:&quot;layout-mixed-object-packing-438299&quot;,&quot;regionId&quot;:&quot;image-1&quot;,&quot;blockIds&quot;:[&quot;block-39&quot;],&quot;objectKind&quot;:&quot;native-image&quot;,&quot;role&quot;:&quot;image&quot;,&quot;editable&quot;:false}}">    </p:cNvPr>
           <p:cNvPicPr>
             <a:picLocks noChangeAspect="1"/>
           </p:cNvPicPr>
@@ -19042,116 +19042,6 @@
         </p:nvSpPr>
         <p:spPr>
           <a:xfrm>
-            <a:off x="786384" y="1956816"/>
-            <a:ext cx="32004" cy="3483864"/>
-          </a:xfrm>
-          <a:prstGeom prst="rect">
-            <a:avLst/>
-          </a:prstGeom>
-          <a:solidFill>
-            <a:srgbClr val="CBD5E1">
-              <a:alpha val="80000"/>
-            </a:srgbClr>
-          </a:solidFill>
-          <a:ln w="12700">
-            <a:solidFill>
-              <a:srgbClr val="CBD5E1">
-                <a:alpha val="0"/>
-              </a:srgbClr>
-            </a:solidFill>
-            <a:prstDash val="solid"/>
-          </a:ln>
-        </p:spPr>
-      </p:sp>
-      <p:sp>
-        <p:nvSpPr>
-          <p:cNvPr id="6" name="Shape 4"/>
-          <p:cNvSpPr/>
-          <p:nvPr/>
-        </p:nvSpPr>
-        <p:spPr>
-          <a:xfrm>
-            <a:off x="914400" y="1865376"/>
-            <a:ext cx="73152" cy="1024128"/>
-          </a:xfrm>
-          <a:prstGeom prst="rect">
-            <a:avLst/>
-          </a:prstGeom>
-          <a:solidFill>
-            <a:srgbClr val="4F6F8F"/>
-          </a:solidFill>
-          <a:ln w="12700">
-            <a:solidFill>
-              <a:srgbClr val="4F6F8F">
-                <a:alpha val="0"/>
-              </a:srgbClr>
-            </a:solidFill>
-            <a:prstDash val="solid"/>
-          </a:ln>
-        </p:spPr>
-      </p:sp>
-      <p:sp>
-        <p:nvSpPr>
-          <p:cNvPr id="7" name="Shape 5"/>
-          <p:cNvSpPr/>
-          <p:nvPr/>
-        </p:nvSpPr>
-        <p:spPr>
-          <a:xfrm>
-            <a:off x="914400" y="3191256"/>
-            <a:ext cx="73152" cy="1024128"/>
-          </a:xfrm>
-          <a:prstGeom prst="rect">
-            <a:avLst/>
-          </a:prstGeom>
-          <a:solidFill>
-            <a:srgbClr val="CBD5E1"/>
-          </a:solidFill>
-          <a:ln w="12700">
-            <a:solidFill>
-              <a:srgbClr val="CBD5E1">
-                <a:alpha val="0"/>
-              </a:srgbClr>
-            </a:solidFill>
-            <a:prstDash val="solid"/>
-          </a:ln>
-        </p:spPr>
-      </p:sp>
-      <p:sp>
-        <p:nvSpPr>
-          <p:cNvPr id="8" name="Shape 6"/>
-          <p:cNvSpPr/>
-          <p:nvPr/>
-        </p:nvSpPr>
-        <p:spPr>
-          <a:xfrm>
-            <a:off x="914400" y="4507992"/>
-            <a:ext cx="73152" cy="1024128"/>
-          </a:xfrm>
-          <a:prstGeom prst="rect">
-            <a:avLst/>
-          </a:prstGeom>
-          <a:solidFill>
-            <a:srgbClr val="4F6F8F"/>
-          </a:solidFill>
-          <a:ln w="12700">
-            <a:solidFill>
-              <a:srgbClr val="4F6F8F">
-                <a:alpha val="0"/>
-              </a:srgbClr>
-            </a:solidFill>
-            <a:prstDash val="solid"/>
-          </a:ln>
-        </p:spPr>
-      </p:sp>
-      <p:sp>
-        <p:nvSpPr>
-          <p:cNvPr id="9" name="Shape 7"/>
-          <p:cNvSpPr/>
-          <p:nvPr/>
-        </p:nvSpPr>
-        <p:spPr>
-          <a:xfrm>
             <a:off x="955548" y="1915668"/>
             <a:ext cx="10241280" cy="1024128"/>
           </a:xfrm>
@@ -19184,7 +19074,7 @@
       </p:sp>
       <p:sp>
         <p:nvSpPr>
-          <p:cNvPr id="10" name="Shape 8"/>
+          <p:cNvPr id="6" name="Shape 4"/>
           <p:cNvSpPr/>
           <p:nvPr/>
         </p:nvSpPr>
@@ -19222,7 +19112,7 @@
       </p:sp>
       <p:sp>
         <p:nvSpPr>
-          <p:cNvPr id="11" name="Shape 9"/>
+          <p:cNvPr id="7" name="Shape 5"/>
           <p:cNvSpPr/>
           <p:nvPr/>
         </p:nvSpPr>
@@ -19253,7 +19143,7 @@
       </p:sp>
       <p:pic>
         <p:nvPicPr>
-          <p:cNvPr id="12" name="Image 0" descr="preencoded.png">    </p:cNvPr>
+          <p:cNvPr id="8" name="Image 0" descr="preencoded.png">    </p:cNvPr>
           <p:cNvPicPr>
             <a:picLocks noChangeAspect="1"/>
           </p:cNvPicPr>
@@ -19283,7 +19173,7 @@
       </p:pic>
       <p:sp>
         <p:nvSpPr>
-          <p:cNvPr id="13" name="Shape 10"/>
+          <p:cNvPr id="9" name="Shape 6"/>
           <p:cNvSpPr/>
           <p:nvPr/>
         </p:nvSpPr>
@@ -19321,7 +19211,7 @@
       </p:sp>
       <p:sp>
         <p:nvSpPr>
-          <p:cNvPr id="14" name="Shape 11"/>
+          <p:cNvPr id="10" name="Shape 7"/>
           <p:cNvSpPr/>
           <p:nvPr/>
         </p:nvSpPr>
@@ -19359,7 +19249,7 @@
       </p:sp>
       <p:sp>
         <p:nvSpPr>
-          <p:cNvPr id="15" name="Shape 12"/>
+          <p:cNvPr id="11" name="Shape 8"/>
           <p:cNvSpPr/>
           <p:nvPr/>
         </p:nvSpPr>
@@ -19390,7 +19280,7 @@
       </p:sp>
       <p:pic>
         <p:nvPicPr>
-          <p:cNvPr id="16" name="Image 1" descr="preencoded.png">    </p:cNvPr>
+          <p:cNvPr id="12" name="Image 1" descr="preencoded.png">    </p:cNvPr>
           <p:cNvPicPr>
             <a:picLocks noChangeAspect="1"/>
           </p:cNvPicPr>
@@ -19420,7 +19310,7 @@
       </p:pic>
       <p:sp>
         <p:nvSpPr>
-          <p:cNvPr id="17" name="Shape 13"/>
+          <p:cNvPr id="13" name="Shape 9"/>
           <p:cNvSpPr/>
           <p:nvPr/>
         </p:nvSpPr>
@@ -19458,7 +19348,7 @@
       </p:sp>
       <p:sp>
         <p:nvSpPr>
-          <p:cNvPr id="18" name="Shape 14"/>
+          <p:cNvPr id="14" name="Shape 10"/>
           <p:cNvSpPr/>
           <p:nvPr/>
         </p:nvSpPr>
@@ -19496,7 +19386,7 @@
       </p:sp>
       <p:sp>
         <p:nvSpPr>
-          <p:cNvPr id="19" name="Shape 15"/>
+          <p:cNvPr id="15" name="Shape 11"/>
           <p:cNvSpPr/>
           <p:nvPr/>
         </p:nvSpPr>
@@ -19527,7 +19417,7 @@
       </p:sp>
       <p:pic>
         <p:nvPicPr>
-          <p:cNvPr id="20" name="Image 2" descr="preencoded.png">    </p:cNvPr>
+          <p:cNvPr id="16" name="Image 2" descr="preencoded.png">    </p:cNvPr>
           <p:cNvPicPr>
             <a:picLocks noChangeAspect="1"/>
           </p:cNvPicPr>
@@ -19557,7 +19447,117 @@
       </p:pic>
       <p:sp>
         <p:nvSpPr>
-          <p:cNvPr id="21" name="Text 16"/>
+          <p:cNvPr id="17" name="Shape 12"/>
+          <p:cNvSpPr/>
+          <p:nvPr/>
+        </p:nvSpPr>
+        <p:spPr>
+          <a:xfrm>
+            <a:off x="786384" y="1956816"/>
+            <a:ext cx="32004" cy="3483864"/>
+          </a:xfrm>
+          <a:prstGeom prst="rect">
+            <a:avLst/>
+          </a:prstGeom>
+          <a:solidFill>
+            <a:srgbClr val="CBD5E1">
+              <a:alpha val="80000"/>
+            </a:srgbClr>
+          </a:solidFill>
+          <a:ln w="12700">
+            <a:solidFill>
+              <a:srgbClr val="CBD5E1">
+                <a:alpha val="0"/>
+              </a:srgbClr>
+            </a:solidFill>
+            <a:prstDash val="solid"/>
+          </a:ln>
+        </p:spPr>
+      </p:sp>
+      <p:sp>
+        <p:nvSpPr>
+          <p:cNvPr id="18" name="Shape 13"/>
+          <p:cNvSpPr/>
+          <p:nvPr/>
+        </p:nvSpPr>
+        <p:spPr>
+          <a:xfrm>
+            <a:off x="914400" y="1865376"/>
+            <a:ext cx="73152" cy="1024128"/>
+          </a:xfrm>
+          <a:prstGeom prst="rect">
+            <a:avLst/>
+          </a:prstGeom>
+          <a:solidFill>
+            <a:srgbClr val="4F6F8F"/>
+          </a:solidFill>
+          <a:ln w="12700">
+            <a:solidFill>
+              <a:srgbClr val="4F6F8F">
+                <a:alpha val="0"/>
+              </a:srgbClr>
+            </a:solidFill>
+            <a:prstDash val="solid"/>
+          </a:ln>
+        </p:spPr>
+      </p:sp>
+      <p:sp>
+        <p:nvSpPr>
+          <p:cNvPr id="19" name="Shape 14"/>
+          <p:cNvSpPr/>
+          <p:nvPr/>
+        </p:nvSpPr>
+        <p:spPr>
+          <a:xfrm>
+            <a:off x="914400" y="3191256"/>
+            <a:ext cx="73152" cy="1024128"/>
+          </a:xfrm>
+          <a:prstGeom prst="rect">
+            <a:avLst/>
+          </a:prstGeom>
+          <a:solidFill>
+            <a:srgbClr val="CBD5E1"/>
+          </a:solidFill>
+          <a:ln w="12700">
+            <a:solidFill>
+              <a:srgbClr val="CBD5E1">
+                <a:alpha val="0"/>
+              </a:srgbClr>
+            </a:solidFill>
+            <a:prstDash val="solid"/>
+          </a:ln>
+        </p:spPr>
+      </p:sp>
+      <p:sp>
+        <p:nvSpPr>
+          <p:cNvPr id="20" name="Shape 15"/>
+          <p:cNvSpPr/>
+          <p:nvPr/>
+        </p:nvSpPr>
+        <p:spPr>
+          <a:xfrm>
+            <a:off x="914400" y="4507992"/>
+            <a:ext cx="73152" cy="1024128"/>
+          </a:xfrm>
+          <a:prstGeom prst="rect">
+            <a:avLst/>
+          </a:prstGeom>
+          <a:solidFill>
+            <a:srgbClr val="4F6F8F"/>
+          </a:solidFill>
+          <a:ln w="12700">
+            <a:solidFill>
+              <a:srgbClr val="4F6F8F">
+                <a:alpha val="0"/>
+              </a:srgbClr>
+            </a:solidFill>
+            <a:prstDash val="solid"/>
+          </a:ln>
+        </p:spPr>
+      </p:sp>
+      <p:sp>
+        <p:nvSpPr>
+          <p:cNvPr id="21" name="mdpr:actions-output-review-326e07:title:__title:actions-output-review-326e07"/>
           <p:cNvSpPr txBox="1"/>
           <p:nvPr/>
         </p:nvSpPr>
@@ -19656,7 +19656,7 @@
       </p:pic>
       <p:sp>
         <p:nvSpPr>
-          <p:cNvPr id="24" name="Text 18"/>
+          <p:cNvPr id="24" name="mdpr:actions-output-review-326e07:item-1:block-41"/>
           <p:cNvSpPr txBox="1"/>
           <p:nvPr/>
         </p:nvSpPr>
@@ -19772,7 +19772,7 @@
       </p:pic>
       <p:sp>
         <p:nvSpPr>
-          <p:cNvPr id="27" name="Text 20"/>
+          <p:cNvPr id="27" name="mdpr:actions-output-review-326e07:item-2:block-41"/>
           <p:cNvSpPr txBox="1"/>
           <p:nvPr/>
         </p:nvSpPr>
@@ -19888,7 +19888,7 @@
       </p:pic>
       <p:sp>
         <p:nvSpPr>
-          <p:cNvPr id="30" name="Text 22"/>
+          <p:cNvPr id="30" name="mdpr:actions-output-review-326e07:item-3:block-41"/>
           <p:cNvSpPr txBox="1"/>
           <p:nvPr/>
         </p:nvSpPr>
@@ -20157,7 +20157,7 @@
       </p:sp>
       <p:sp>
         <p:nvSpPr>
-          <p:cNvPr id="8" name="Text 6"/>
+          <p:cNvPr id="8" name="mdpr:2-2-7bfb60:title:__title:2-2-7bfb60"/>
           <p:cNvSpPr txBox="1"/>
           <p:nvPr/>
         </p:nvSpPr>
@@ -20199,7 +20199,7 @@
       </p:sp>
       <p:sp>
         <p:nvSpPr>
-          <p:cNvPr id="9" name="Text 7"/>
+          <p:cNvPr id="9" name="mdpr:2-2-7bfb60:toc-item-1:toc-item-15"/>
           <p:cNvSpPr txBox="1"/>
           <p:nvPr/>
         </p:nvSpPr>
@@ -20376,33 +20376,6 @@
         </p:nvSpPr>
         <p:spPr>
           <a:xfrm>
-            <a:off x="914400" y="3063240"/>
-            <a:ext cx="10241280" cy="73152"/>
-          </a:xfrm>
-          <a:prstGeom prst="rect">
-            <a:avLst/>
-          </a:prstGeom>
-          <a:solidFill>
-            <a:srgbClr val="4F6F8F"/>
-          </a:solidFill>
-          <a:ln w="12700">
-            <a:solidFill>
-              <a:srgbClr val="4F6F8F">
-                <a:alpha val="0"/>
-              </a:srgbClr>
-            </a:solidFill>
-            <a:prstDash val="solid"/>
-          </a:ln>
-        </p:spPr>
-      </p:sp>
-      <p:sp>
-        <p:nvSpPr>
-          <p:cNvPr id="6" name="Shape 4"/>
-          <p:cNvSpPr/>
-          <p:nvPr/>
-        </p:nvSpPr>
-        <p:spPr>
-          <a:xfrm>
             <a:off x="955548" y="1467612"/>
             <a:ext cx="10241280" cy="1325880"/>
           </a:xfrm>
@@ -20435,7 +20408,7 @@
       </p:sp>
       <p:sp>
         <p:nvSpPr>
-          <p:cNvPr id="7" name="Shape 5"/>
+          <p:cNvPr id="6" name="Shape 4"/>
           <p:cNvSpPr/>
           <p:nvPr/>
         </p:nvSpPr>
@@ -20473,7 +20446,7 @@
       </p:sp>
       <p:sp>
         <p:nvSpPr>
-          <p:cNvPr id="8" name="Shape 6"/>
+          <p:cNvPr id="7" name="Shape 5"/>
           <p:cNvSpPr/>
           <p:nvPr/>
         </p:nvSpPr>
@@ -20504,7 +20477,7 @@
       </p:sp>
       <p:pic>
         <p:nvPicPr>
-          <p:cNvPr id="9" name="Image 0" descr="preencoded.png">    </p:cNvPr>
+          <p:cNvPr id="8" name="Image 0" descr="preencoded.png">    </p:cNvPr>
           <p:cNvPicPr>
             <a:picLocks noChangeAspect="1"/>
           </p:cNvPicPr>
@@ -20534,7 +20507,7 @@
       </p:pic>
       <p:sp>
         <p:nvSpPr>
-          <p:cNvPr id="10" name="Shape 7"/>
+          <p:cNvPr id="9" name="Shape 6"/>
           <p:cNvSpPr/>
           <p:nvPr/>
         </p:nvSpPr>
@@ -20563,7 +20536,34 @@
       </p:sp>
       <p:sp>
         <p:nvSpPr>
-          <p:cNvPr id="11" name="Text 8"/>
+          <p:cNvPr id="10" name="Shape 7"/>
+          <p:cNvSpPr/>
+          <p:nvPr/>
+        </p:nvSpPr>
+        <p:spPr>
+          <a:xfrm>
+            <a:off x="914400" y="3063240"/>
+            <a:ext cx="10241280" cy="73152"/>
+          </a:xfrm>
+          <a:prstGeom prst="rect">
+            <a:avLst/>
+          </a:prstGeom>
+          <a:solidFill>
+            <a:srgbClr val="4F6F8F"/>
+          </a:solidFill>
+          <a:ln w="12700">
+            <a:solidFill>
+              <a:srgbClr val="4F6F8F">
+                <a:alpha val="0"/>
+              </a:srgbClr>
+            </a:solidFill>
+            <a:prstDash val="solid"/>
+          </a:ln>
+        </p:spPr>
+      </p:sp>
+      <p:sp>
+        <p:nvSpPr>
+          <p:cNvPr id="11" name="mdpr:teaser-summary-7731dc:title:__title:teaser-summary-7731dc"/>
           <p:cNvSpPr txBox="1"/>
           <p:nvPr/>
         </p:nvSpPr>
@@ -20605,7 +20605,7 @@
       </p:sp>
       <p:sp>
         <p:nvSpPr>
-          <p:cNvPr id="12" name="Text 9"/>
+          <p:cNvPr id="12" name="mdpr:teaser-summary-7731dc:key-message:block-3"/>
           <p:cNvSpPr txBox="1"/>
           <p:nvPr/>
         </p:nvSpPr>
@@ -20647,7 +20647,7 @@
       </p:sp>
       <p:sp>
         <p:nvSpPr>
-          <p:cNvPr id="13" name="Text 10"/>
+          <p:cNvPr id="13" name="mdpr:teaser-summary-7731dc:body:block-4"/>
           <p:cNvSpPr txBox="1"/>
           <p:nvPr/>
         </p:nvSpPr>
@@ -20698,7 +20698,7 @@
                 <a:ea typeface="Pretendard" pitchFamily="34" charset="-122"/>
                 <a:cs typeface="Pretendard" pitchFamily="34" charset="-120"/>
               </a:rPr>
-              <a:t>  5 pruned decoration grammars, not palette-only swaps.</a:t>
+              <a:t>  9 distinct decoration grammars, not palette-only swaps.</a:t>
             </a:r>
             <a:endParaRPr lang="en-US" sz="2200" dirty="0"/>
           </a:p>
@@ -20798,7 +20798,7 @@
                 <a:ea typeface="Pretendard" pitchFamily="34" charset="-122"/>
                 <a:cs typeface="Pretendard" pitchFamily="34" charset="-120"/>
               </a:rPr>
-              <a:t>- QA contract</a:t>
+              <a:t>- Validation contract</a:t>
             </a:r>
             <a:endParaRPr lang="en-US" sz="2200" dirty="0"/>
           </a:p>
@@ -20961,116 +20961,6 @@
         </p:nvSpPr>
         <p:spPr>
           <a:xfrm>
-            <a:off x="786384" y="1956816"/>
-            <a:ext cx="32004" cy="3483864"/>
-          </a:xfrm>
-          <a:prstGeom prst="rect">
-            <a:avLst/>
-          </a:prstGeom>
-          <a:solidFill>
-            <a:srgbClr val="CBD5E1">
-              <a:alpha val="80000"/>
-            </a:srgbClr>
-          </a:solidFill>
-          <a:ln w="12700">
-            <a:solidFill>
-              <a:srgbClr val="CBD5E1">
-                <a:alpha val="0"/>
-              </a:srgbClr>
-            </a:solidFill>
-            <a:prstDash val="solid"/>
-          </a:ln>
-        </p:spPr>
-      </p:sp>
-      <p:sp>
-        <p:nvSpPr>
-          <p:cNvPr id="6" name="Shape 4"/>
-          <p:cNvSpPr/>
-          <p:nvPr/>
-        </p:nvSpPr>
-        <p:spPr>
-          <a:xfrm>
-            <a:off x="914400" y="1865376"/>
-            <a:ext cx="73152" cy="1024128"/>
-          </a:xfrm>
-          <a:prstGeom prst="rect">
-            <a:avLst/>
-          </a:prstGeom>
-          <a:solidFill>
-            <a:srgbClr val="4F6F8F"/>
-          </a:solidFill>
-          <a:ln w="12700">
-            <a:solidFill>
-              <a:srgbClr val="4F6F8F">
-                <a:alpha val="0"/>
-              </a:srgbClr>
-            </a:solidFill>
-            <a:prstDash val="solid"/>
-          </a:ln>
-        </p:spPr>
-      </p:sp>
-      <p:sp>
-        <p:nvSpPr>
-          <p:cNvPr id="7" name="Shape 5"/>
-          <p:cNvSpPr/>
-          <p:nvPr/>
-        </p:nvSpPr>
-        <p:spPr>
-          <a:xfrm>
-            <a:off x="914400" y="3191256"/>
-            <a:ext cx="73152" cy="1024128"/>
-          </a:xfrm>
-          <a:prstGeom prst="rect">
-            <a:avLst/>
-          </a:prstGeom>
-          <a:solidFill>
-            <a:srgbClr val="CBD5E1"/>
-          </a:solidFill>
-          <a:ln w="12700">
-            <a:solidFill>
-              <a:srgbClr val="CBD5E1">
-                <a:alpha val="0"/>
-              </a:srgbClr>
-            </a:solidFill>
-            <a:prstDash val="solid"/>
-          </a:ln>
-        </p:spPr>
-      </p:sp>
-      <p:sp>
-        <p:nvSpPr>
-          <p:cNvPr id="8" name="Shape 6"/>
-          <p:cNvSpPr/>
-          <p:nvPr/>
-        </p:nvSpPr>
-        <p:spPr>
-          <a:xfrm>
-            <a:off x="914400" y="4507992"/>
-            <a:ext cx="73152" cy="1024128"/>
-          </a:xfrm>
-          <a:prstGeom prst="rect">
-            <a:avLst/>
-          </a:prstGeom>
-          <a:solidFill>
-            <a:srgbClr val="4F6F8F"/>
-          </a:solidFill>
-          <a:ln w="12700">
-            <a:solidFill>
-              <a:srgbClr val="4F6F8F">
-                <a:alpha val="0"/>
-              </a:srgbClr>
-            </a:solidFill>
-            <a:prstDash val="solid"/>
-          </a:ln>
-        </p:spPr>
-      </p:sp>
-      <p:sp>
-        <p:nvSpPr>
-          <p:cNvPr id="9" name="Shape 7"/>
-          <p:cNvSpPr/>
-          <p:nvPr/>
-        </p:nvSpPr>
-        <p:spPr>
-          <a:xfrm>
             <a:off x="955548" y="1915668"/>
             <a:ext cx="10241280" cy="1024128"/>
           </a:xfrm>
@@ -21103,7 +20993,7 @@
       </p:sp>
       <p:sp>
         <p:nvSpPr>
-          <p:cNvPr id="10" name="Shape 8"/>
+          <p:cNvPr id="6" name="Shape 4"/>
           <p:cNvSpPr/>
           <p:nvPr/>
         </p:nvSpPr>
@@ -21141,7 +21031,7 @@
       </p:sp>
       <p:sp>
         <p:nvSpPr>
-          <p:cNvPr id="11" name="Shape 9"/>
+          <p:cNvPr id="7" name="Shape 5"/>
           <p:cNvSpPr/>
           <p:nvPr/>
         </p:nvSpPr>
@@ -21172,7 +21062,7 @@
       </p:sp>
       <p:pic>
         <p:nvPicPr>
-          <p:cNvPr id="12" name="Image 0" descr="preencoded.png">    </p:cNvPr>
+          <p:cNvPr id="8" name="Image 0" descr="preencoded.png">    </p:cNvPr>
           <p:cNvPicPr>
             <a:picLocks noChangeAspect="1"/>
           </p:cNvPicPr>
@@ -21202,7 +21092,7 @@
       </p:pic>
       <p:sp>
         <p:nvSpPr>
-          <p:cNvPr id="13" name="Shape 10"/>
+          <p:cNvPr id="9" name="Shape 6"/>
           <p:cNvSpPr/>
           <p:nvPr/>
         </p:nvSpPr>
@@ -21240,7 +21130,7 @@
       </p:sp>
       <p:sp>
         <p:nvSpPr>
-          <p:cNvPr id="14" name="Shape 11"/>
+          <p:cNvPr id="10" name="Shape 7"/>
           <p:cNvSpPr/>
           <p:nvPr/>
         </p:nvSpPr>
@@ -21278,7 +21168,7 @@
       </p:sp>
       <p:sp>
         <p:nvSpPr>
-          <p:cNvPr id="15" name="Shape 12"/>
+          <p:cNvPr id="11" name="Shape 8"/>
           <p:cNvSpPr/>
           <p:nvPr/>
         </p:nvSpPr>
@@ -21309,7 +21199,7 @@
       </p:sp>
       <p:pic>
         <p:nvPicPr>
-          <p:cNvPr id="16" name="Image 1" descr="preencoded.png">    </p:cNvPr>
+          <p:cNvPr id="12" name="Image 1" descr="preencoded.png">    </p:cNvPr>
           <p:cNvPicPr>
             <a:picLocks noChangeAspect="1"/>
           </p:cNvPicPr>
@@ -21339,7 +21229,7 @@
       </p:pic>
       <p:sp>
         <p:nvSpPr>
-          <p:cNvPr id="17" name="Shape 13"/>
+          <p:cNvPr id="13" name="Shape 9"/>
           <p:cNvSpPr/>
           <p:nvPr/>
         </p:nvSpPr>
@@ -21377,7 +21267,7 @@
       </p:sp>
       <p:sp>
         <p:nvSpPr>
-          <p:cNvPr id="18" name="Shape 14"/>
+          <p:cNvPr id="14" name="Shape 10"/>
           <p:cNvSpPr/>
           <p:nvPr/>
         </p:nvSpPr>
@@ -21415,7 +21305,7 @@
       </p:sp>
       <p:sp>
         <p:nvSpPr>
-          <p:cNvPr id="19" name="Shape 15"/>
+          <p:cNvPr id="15" name="Shape 11"/>
           <p:cNvSpPr/>
           <p:nvPr/>
         </p:nvSpPr>
@@ -21446,7 +21336,7 @@
       </p:sp>
       <p:pic>
         <p:nvPicPr>
-          <p:cNvPr id="20" name="Image 2" descr="preencoded.png">    </p:cNvPr>
+          <p:cNvPr id="16" name="Image 2" descr="preencoded.png">    </p:cNvPr>
           <p:cNvPicPr>
             <a:picLocks noChangeAspect="1"/>
           </p:cNvPicPr>
@@ -21476,7 +21366,117 @@
       </p:pic>
       <p:sp>
         <p:nvSpPr>
-          <p:cNvPr id="21" name="Text 16"/>
+          <p:cNvPr id="17" name="Shape 12"/>
+          <p:cNvSpPr/>
+          <p:nvPr/>
+        </p:nvSpPr>
+        <p:spPr>
+          <a:xfrm>
+            <a:off x="786384" y="1956816"/>
+            <a:ext cx="32004" cy="3483864"/>
+          </a:xfrm>
+          <a:prstGeom prst="rect">
+            <a:avLst/>
+          </a:prstGeom>
+          <a:solidFill>
+            <a:srgbClr val="CBD5E1">
+              <a:alpha val="80000"/>
+            </a:srgbClr>
+          </a:solidFill>
+          <a:ln w="12700">
+            <a:solidFill>
+              <a:srgbClr val="CBD5E1">
+                <a:alpha val="0"/>
+              </a:srgbClr>
+            </a:solidFill>
+            <a:prstDash val="solid"/>
+          </a:ln>
+        </p:spPr>
+      </p:sp>
+      <p:sp>
+        <p:nvSpPr>
+          <p:cNvPr id="18" name="Shape 13"/>
+          <p:cNvSpPr/>
+          <p:nvPr/>
+        </p:nvSpPr>
+        <p:spPr>
+          <a:xfrm>
+            <a:off x="914400" y="1865376"/>
+            <a:ext cx="73152" cy="1024128"/>
+          </a:xfrm>
+          <a:prstGeom prst="rect">
+            <a:avLst/>
+          </a:prstGeom>
+          <a:solidFill>
+            <a:srgbClr val="4F6F8F"/>
+          </a:solidFill>
+          <a:ln w="12700">
+            <a:solidFill>
+              <a:srgbClr val="4F6F8F">
+                <a:alpha val="0"/>
+              </a:srgbClr>
+            </a:solidFill>
+            <a:prstDash val="solid"/>
+          </a:ln>
+        </p:spPr>
+      </p:sp>
+      <p:sp>
+        <p:nvSpPr>
+          <p:cNvPr id="19" name="Shape 14"/>
+          <p:cNvSpPr/>
+          <p:nvPr/>
+        </p:nvSpPr>
+        <p:spPr>
+          <a:xfrm>
+            <a:off x="914400" y="3191256"/>
+            <a:ext cx="73152" cy="1024128"/>
+          </a:xfrm>
+          <a:prstGeom prst="rect">
+            <a:avLst/>
+          </a:prstGeom>
+          <a:solidFill>
+            <a:srgbClr val="CBD5E1"/>
+          </a:solidFill>
+          <a:ln w="12700">
+            <a:solidFill>
+              <a:srgbClr val="CBD5E1">
+                <a:alpha val="0"/>
+              </a:srgbClr>
+            </a:solidFill>
+            <a:prstDash val="solid"/>
+          </a:ln>
+        </p:spPr>
+      </p:sp>
+      <p:sp>
+        <p:nvSpPr>
+          <p:cNvPr id="20" name="Shape 15"/>
+          <p:cNvSpPr/>
+          <p:nvPr/>
+        </p:nvSpPr>
+        <p:spPr>
+          <a:xfrm>
+            <a:off x="914400" y="4507992"/>
+            <a:ext cx="73152" cy="1024128"/>
+          </a:xfrm>
+          <a:prstGeom prst="rect">
+            <a:avLst/>
+          </a:prstGeom>
+          <a:solidFill>
+            <a:srgbClr val="4F6F8F"/>
+          </a:solidFill>
+          <a:ln w="12700">
+            <a:solidFill>
+              <a:srgbClr val="4F6F8F">
+                <a:alpha val="0"/>
+              </a:srgbClr>
+            </a:solidFill>
+            <a:prstDash val="solid"/>
+          </a:ln>
+        </p:spPr>
+      </p:sp>
+      <p:sp>
+        <p:nvSpPr>
+          <p:cNvPr id="21" name="mdpr:1-2-32ac08:title:__title:1-2-32ac08"/>
           <p:cNvSpPr txBox="1"/>
           <p:nvPr/>
         </p:nvSpPr>
@@ -21575,7 +21575,7 @@
       </p:pic>
       <p:sp>
         <p:nvSpPr>
-          <p:cNvPr id="24" name="Text 18"/>
+          <p:cNvPr id="24" name="mdpr:1-2-32ac08:item-1:block-6-chunk-1"/>
           <p:cNvSpPr txBox="1"/>
           <p:nvPr/>
         </p:nvSpPr>
@@ -21691,7 +21691,7 @@
       </p:pic>
       <p:sp>
         <p:nvSpPr>
-          <p:cNvPr id="27" name="Text 20"/>
+          <p:cNvPr id="27" name="mdpr:1-2-32ac08:item-2:block-6-chunk-1"/>
           <p:cNvSpPr txBox="1"/>
           <p:nvPr/>
         </p:nvSpPr>
@@ -21807,7 +21807,7 @@
       </p:pic>
       <p:sp>
         <p:nvSpPr>
-          <p:cNvPr id="30" name="Text 22"/>
+          <p:cNvPr id="30" name="mdpr:1-2-32ac08:item-3:block-6-chunk-1"/>
           <p:cNvSpPr txBox="1"/>
           <p:nvPr/>
         </p:nvSpPr>
@@ -22049,7 +22049,7 @@
       </p:sp>
       <p:sp>
         <p:nvSpPr>
-          <p:cNvPr id="7" name="Text 5"/>
+          <p:cNvPr id="7" name="mdpr:2-2-14f8eb:title:__title:2-2-14f8eb"/>
           <p:cNvSpPr txBox="1"/>
           <p:nvPr/>
         </p:nvSpPr>
@@ -22091,7 +22091,7 @@
       </p:sp>
       <p:sp>
         <p:nvSpPr>
-          <p:cNvPr id="8" name="Text 6"/>
+          <p:cNvPr id="8" name="mdpr:2-2-14f8eb:left:block-6-chunk-2"/>
           <p:cNvSpPr txBox="1"/>
           <p:nvPr/>
         </p:nvSpPr>
@@ -22150,7 +22150,7 @@
       </p:sp>
       <p:sp>
         <p:nvSpPr>
-          <p:cNvPr id="9" name="Text 7"/>
+          <p:cNvPr id="9" name="mdpr:2-2-14f8eb:right:block-6-chunk-2"/>
           <p:cNvSpPr txBox="1"/>
           <p:nvPr/>
         </p:nvSpPr>
@@ -22344,116 +22344,6 @@
         </p:nvSpPr>
         <p:spPr>
           <a:xfrm>
-            <a:off x="786384" y="1956816"/>
-            <a:ext cx="32004" cy="3483864"/>
-          </a:xfrm>
-          <a:prstGeom prst="rect">
-            <a:avLst/>
-          </a:prstGeom>
-          <a:solidFill>
-            <a:srgbClr val="CBD5E1">
-              <a:alpha val="80000"/>
-            </a:srgbClr>
-          </a:solidFill>
-          <a:ln w="12700">
-            <a:solidFill>
-              <a:srgbClr val="CBD5E1">
-                <a:alpha val="0"/>
-              </a:srgbClr>
-            </a:solidFill>
-            <a:prstDash val="solid"/>
-          </a:ln>
-        </p:spPr>
-      </p:sp>
-      <p:sp>
-        <p:nvSpPr>
-          <p:cNvPr id="6" name="Shape 4"/>
-          <p:cNvSpPr/>
-          <p:nvPr/>
-        </p:nvSpPr>
-        <p:spPr>
-          <a:xfrm>
-            <a:off x="914400" y="1865376"/>
-            <a:ext cx="73152" cy="1024128"/>
-          </a:xfrm>
-          <a:prstGeom prst="rect">
-            <a:avLst/>
-          </a:prstGeom>
-          <a:solidFill>
-            <a:srgbClr val="4F6F8F"/>
-          </a:solidFill>
-          <a:ln w="12700">
-            <a:solidFill>
-              <a:srgbClr val="4F6F8F">
-                <a:alpha val="0"/>
-              </a:srgbClr>
-            </a:solidFill>
-            <a:prstDash val="solid"/>
-          </a:ln>
-        </p:spPr>
-      </p:sp>
-      <p:sp>
-        <p:nvSpPr>
-          <p:cNvPr id="7" name="Shape 5"/>
-          <p:cNvSpPr/>
-          <p:nvPr/>
-        </p:nvSpPr>
-        <p:spPr>
-          <a:xfrm>
-            <a:off x="914400" y="3191256"/>
-            <a:ext cx="73152" cy="1024128"/>
-          </a:xfrm>
-          <a:prstGeom prst="rect">
-            <a:avLst/>
-          </a:prstGeom>
-          <a:solidFill>
-            <a:srgbClr val="CBD5E1"/>
-          </a:solidFill>
-          <a:ln w="12700">
-            <a:solidFill>
-              <a:srgbClr val="CBD5E1">
-                <a:alpha val="0"/>
-              </a:srgbClr>
-            </a:solidFill>
-            <a:prstDash val="solid"/>
-          </a:ln>
-        </p:spPr>
-      </p:sp>
-      <p:sp>
-        <p:nvSpPr>
-          <p:cNvPr id="8" name="Shape 6"/>
-          <p:cNvSpPr/>
-          <p:nvPr/>
-        </p:nvSpPr>
-        <p:spPr>
-          <a:xfrm>
-            <a:off x="914400" y="4507992"/>
-            <a:ext cx="73152" cy="1024128"/>
-          </a:xfrm>
-          <a:prstGeom prst="rect">
-            <a:avLst/>
-          </a:prstGeom>
-          <a:solidFill>
-            <a:srgbClr val="4F6F8F"/>
-          </a:solidFill>
-          <a:ln w="12700">
-            <a:solidFill>
-              <a:srgbClr val="4F6F8F">
-                <a:alpha val="0"/>
-              </a:srgbClr>
-            </a:solidFill>
-            <a:prstDash val="solid"/>
-          </a:ln>
-        </p:spPr>
-      </p:sp>
-      <p:sp>
-        <p:nvSpPr>
-          <p:cNvPr id="9" name="Shape 7"/>
-          <p:cNvSpPr/>
-          <p:nvPr/>
-        </p:nvSpPr>
-        <p:spPr>
-          <a:xfrm>
             <a:off x="955548" y="1915668"/>
             <a:ext cx="10241280" cy="1024128"/>
           </a:xfrm>
@@ -22486,7 +22376,7 @@
       </p:sp>
       <p:sp>
         <p:nvSpPr>
-          <p:cNvPr id="10" name="Shape 8"/>
+          <p:cNvPr id="6" name="Shape 4"/>
           <p:cNvSpPr/>
           <p:nvPr/>
         </p:nvSpPr>
@@ -22524,7 +22414,7 @@
       </p:sp>
       <p:sp>
         <p:nvSpPr>
-          <p:cNvPr id="11" name="Shape 9"/>
+          <p:cNvPr id="7" name="Shape 5"/>
           <p:cNvSpPr/>
           <p:nvPr/>
         </p:nvSpPr>
@@ -22555,7 +22445,7 @@
       </p:sp>
       <p:pic>
         <p:nvPicPr>
-          <p:cNvPr id="12" name="Image 0" descr="preencoded.png">    </p:cNvPr>
+          <p:cNvPr id="8" name="Image 0" descr="preencoded.png">    </p:cNvPr>
           <p:cNvPicPr>
             <a:picLocks noChangeAspect="1"/>
           </p:cNvPicPr>
@@ -22585,7 +22475,7 @@
       </p:pic>
       <p:sp>
         <p:nvSpPr>
-          <p:cNvPr id="13" name="Shape 10"/>
+          <p:cNvPr id="9" name="Shape 6"/>
           <p:cNvSpPr/>
           <p:nvPr/>
         </p:nvSpPr>
@@ -22623,7 +22513,7 @@
       </p:sp>
       <p:sp>
         <p:nvSpPr>
-          <p:cNvPr id="14" name="Shape 11"/>
+          <p:cNvPr id="10" name="Shape 7"/>
           <p:cNvSpPr/>
           <p:nvPr/>
         </p:nvSpPr>
@@ -22661,7 +22551,7 @@
       </p:sp>
       <p:sp>
         <p:nvSpPr>
-          <p:cNvPr id="15" name="Shape 12"/>
+          <p:cNvPr id="11" name="Shape 8"/>
           <p:cNvSpPr/>
           <p:nvPr/>
         </p:nvSpPr>
@@ -22692,7 +22582,7 @@
       </p:sp>
       <p:pic>
         <p:nvPicPr>
-          <p:cNvPr id="16" name="Image 1" descr="preencoded.png">    </p:cNvPr>
+          <p:cNvPr id="12" name="Image 1" descr="preencoded.png">    </p:cNvPr>
           <p:cNvPicPr>
             <a:picLocks noChangeAspect="1"/>
           </p:cNvPicPr>
@@ -22722,7 +22612,7 @@
       </p:pic>
       <p:sp>
         <p:nvSpPr>
-          <p:cNvPr id="17" name="Shape 13"/>
+          <p:cNvPr id="13" name="Shape 9"/>
           <p:cNvSpPr/>
           <p:nvPr/>
         </p:nvSpPr>
@@ -22760,7 +22650,7 @@
       </p:sp>
       <p:sp>
         <p:nvSpPr>
-          <p:cNvPr id="18" name="Shape 14"/>
+          <p:cNvPr id="14" name="Shape 10"/>
           <p:cNvSpPr/>
           <p:nvPr/>
         </p:nvSpPr>
@@ -22798,7 +22688,7 @@
       </p:sp>
       <p:sp>
         <p:nvSpPr>
-          <p:cNvPr id="19" name="Shape 15"/>
+          <p:cNvPr id="15" name="Shape 11"/>
           <p:cNvSpPr/>
           <p:nvPr/>
         </p:nvSpPr>
@@ -22829,7 +22719,7 @@
       </p:sp>
       <p:pic>
         <p:nvPicPr>
-          <p:cNvPr id="20" name="Image 2" descr="preencoded.png">    </p:cNvPr>
+          <p:cNvPr id="16" name="Image 2" descr="preencoded.png">    </p:cNvPr>
           <p:cNvPicPr>
             <a:picLocks noChangeAspect="1"/>
           </p:cNvPicPr>
@@ -22859,7 +22749,117 @@
       </p:pic>
       <p:sp>
         <p:nvSpPr>
-          <p:cNvPr id="21" name="Text 16"/>
+          <p:cNvPr id="17" name="Shape 12"/>
+          <p:cNvSpPr/>
+          <p:nvPr/>
+        </p:nvSpPr>
+        <p:spPr>
+          <a:xfrm>
+            <a:off x="786384" y="1956816"/>
+            <a:ext cx="32004" cy="3483864"/>
+          </a:xfrm>
+          <a:prstGeom prst="rect">
+            <a:avLst/>
+          </a:prstGeom>
+          <a:solidFill>
+            <a:srgbClr val="CBD5E1">
+              <a:alpha val="80000"/>
+            </a:srgbClr>
+          </a:solidFill>
+          <a:ln w="12700">
+            <a:solidFill>
+              <a:srgbClr val="CBD5E1">
+                <a:alpha val="0"/>
+              </a:srgbClr>
+            </a:solidFill>
+            <a:prstDash val="solid"/>
+          </a:ln>
+        </p:spPr>
+      </p:sp>
+      <p:sp>
+        <p:nvSpPr>
+          <p:cNvPr id="18" name="Shape 13"/>
+          <p:cNvSpPr/>
+          <p:nvPr/>
+        </p:nvSpPr>
+        <p:spPr>
+          <a:xfrm>
+            <a:off x="914400" y="1865376"/>
+            <a:ext cx="73152" cy="1024128"/>
+          </a:xfrm>
+          <a:prstGeom prst="rect">
+            <a:avLst/>
+          </a:prstGeom>
+          <a:solidFill>
+            <a:srgbClr val="4F6F8F"/>
+          </a:solidFill>
+          <a:ln w="12700">
+            <a:solidFill>
+              <a:srgbClr val="4F6F8F">
+                <a:alpha val="0"/>
+              </a:srgbClr>
+            </a:solidFill>
+            <a:prstDash val="solid"/>
+          </a:ln>
+        </p:spPr>
+      </p:sp>
+      <p:sp>
+        <p:nvSpPr>
+          <p:cNvPr id="19" name="Shape 14"/>
+          <p:cNvSpPr/>
+          <p:nvPr/>
+        </p:nvSpPr>
+        <p:spPr>
+          <a:xfrm>
+            <a:off x="914400" y="3191256"/>
+            <a:ext cx="73152" cy="1024128"/>
+          </a:xfrm>
+          <a:prstGeom prst="rect">
+            <a:avLst/>
+          </a:prstGeom>
+          <a:solidFill>
+            <a:srgbClr val="CBD5E1"/>
+          </a:solidFill>
+          <a:ln w="12700">
+            <a:solidFill>
+              <a:srgbClr val="CBD5E1">
+                <a:alpha val="0"/>
+              </a:srgbClr>
+            </a:solidFill>
+            <a:prstDash val="solid"/>
+          </a:ln>
+        </p:spPr>
+      </p:sp>
+      <p:sp>
+        <p:nvSpPr>
+          <p:cNvPr id="20" name="Shape 15"/>
+          <p:cNvSpPr/>
+          <p:nvPr/>
+        </p:nvSpPr>
+        <p:spPr>
+          <a:xfrm>
+            <a:off x="914400" y="4507992"/>
+            <a:ext cx="73152" cy="1024128"/>
+          </a:xfrm>
+          <a:prstGeom prst="rect">
+            <a:avLst/>
+          </a:prstGeom>
+          <a:solidFill>
+            <a:srgbClr val="4F6F8F"/>
+          </a:solidFill>
+          <a:ln w="12700">
+            <a:solidFill>
+              <a:srgbClr val="4F6F8F">
+                <a:alpha val="0"/>
+              </a:srgbClr>
+            </a:solidFill>
+            <a:prstDash val="solid"/>
+          </a:ln>
+        </p:spPr>
+      </p:sp>
+      <p:sp>
+        <p:nvSpPr>
+          <p:cNvPr id="21" name="mdpr:1-2-dfa474:title:__title:1-2-dfa474"/>
           <p:cNvSpPr txBox="1"/>
           <p:nvPr/>
         </p:nvSpPr>
@@ -22958,7 +22958,7 @@
       </p:pic>
       <p:sp>
         <p:nvSpPr>
-          <p:cNvPr id="24" name="Text 18"/>
+          <p:cNvPr id="24" name="mdpr:1-2-dfa474:item-1:block-8-chunk-1"/>
           <p:cNvSpPr txBox="1"/>
           <p:nvPr/>
         </p:nvSpPr>
@@ -22992,7 +22992,7 @@
                 <a:ea typeface="Pretendard" pitchFamily="34" charset="-122"/>
                 <a:cs typeface="Pretendard" pitchFamily="34" charset="-120"/>
               </a:rPr>
-              <a:t>Clean</a:t>
+              <a:t>Skeuomorphism / claymorphism</a:t>
             </a:r>
             <a:pPr algn="l" indent="0" marL="0">
               <a:lnSpc>
@@ -23009,7 +23009,7 @@
                 <a:ea typeface="Pretendard" pitchFamily="34" charset="-122"/>
                 <a:cs typeface="Pretendard" pitchFamily="34" charset="-120"/>
               </a:rPr>
-              <a:t>  restrained default structure.</a:t>
+              <a:t>  tactile depth, bevels, or puffy surfaces.</a:t>
             </a:r>
             <a:endParaRPr lang="en-US" sz="2200" dirty="0"/>
           </a:p>
@@ -23074,7 +23074,7 @@
       </p:pic>
       <p:sp>
         <p:nvSpPr>
-          <p:cNvPr id="27" name="Text 20"/>
+          <p:cNvPr id="27" name="mdpr:1-2-dfa474:item-2:block-8-chunk-1"/>
           <p:cNvSpPr txBox="1"/>
           <p:nvPr/>
         </p:nvSpPr>
@@ -23108,7 +23108,7 @@
                 <a:ea typeface="Pretendard" pitchFamily="34" charset="-122"/>
                 <a:cs typeface="Pretendard" pitchFamily="34" charset="-120"/>
               </a:rPr>
-              <a:t>Minimalism / newmorphism</a:t>
+              <a:t>Neomorphism / newmorphism</a:t>
             </a:r>
             <a:pPr algn="l" indent="0" marL="0">
               <a:lnSpc>
@@ -23125,7 +23125,7 @@
                 <a:ea typeface="Pretendard" pitchFamily="34" charset="-122"/>
                 <a:cs typeface="Pretendard" pitchFamily="34" charset="-120"/>
               </a:rPr>
-              <a:t>  sparse rules or soft raised surfaces.</a:t>
+              <a:t>  soft raised surfaces.</a:t>
             </a:r>
             <a:endParaRPr lang="en-US" sz="2200" dirty="0"/>
           </a:p>
@@ -23160,7 +23160,7 @@
       </p:sp>
       <p:pic>
         <p:nvPicPr>
-          <p:cNvPr id="29" name="Image 5" descr="chart icon from tabler-icons (MIT)">    </p:cNvPr>
+          <p:cNvPr id="29" name="Image 5" descr="article icon from tabler-icons (MIT)">    </p:cNvPr>
           <p:cNvPicPr>
             <a:picLocks noChangeAspect="1"/>
           </p:cNvPicPr>
@@ -23190,7 +23190,7 @@
       </p:pic>
       <p:sp>
         <p:nvSpPr>
-          <p:cNvPr id="30" name="Text 22"/>
+          <p:cNvPr id="30" name="mdpr:1-2-dfa474:item-3:block-8-chunk-1"/>
           <p:cNvSpPr txBox="1"/>
           <p:nvPr/>
         </p:nvSpPr>
@@ -23224,7 +23224,7 @@
                 <a:ea typeface="Pretendard" pitchFamily="34" charset="-122"/>
                 <a:cs typeface="Pretendard" pitchFamily="34" charset="-120"/>
               </a:rPr>
-              <a:t>Glass / data</a:t>
+              <a:t>Glassmorphism / liquid-glass</a:t>
             </a:r>
             <a:pPr algn="l" indent="0" marL="0">
               <a:lnSpc>
@@ -23241,7 +23241,7 @@
                 <a:ea typeface="Pretendard" pitchFamily="34" charset="-122"/>
                 <a:cs typeface="Pretendard" pitchFamily="34" charset="-120"/>
               </a:rPr>
-              <a:t>  translucent surfaces or metric rails.</a:t>
+              <a:t>  translucent panels and refractive highlights.</a:t>
             </a:r>
             <a:endParaRPr lang="en-US" sz="2200" dirty="0"/>
           </a:p>
@@ -23432,7 +23432,7 @@
       </p:sp>
       <p:sp>
         <p:nvSpPr>
-          <p:cNvPr id="7" name="Text 5"/>
+          <p:cNvPr id="7" name="mdpr:2-2-149bde:title:__title:2-2-149bde"/>
           <p:cNvSpPr txBox="1"/>
           <p:nvPr/>
         </p:nvSpPr>
@@ -23474,7 +23474,7 @@
       </p:sp>
       <p:sp>
         <p:nvSpPr>
-          <p:cNvPr id="8" name="Text 6"/>
+          <p:cNvPr id="8" name="mdpr:2-2-149bde:left:block-8-chunk-2"/>
           <p:cNvSpPr txBox="1"/>
           <p:nvPr/>
         </p:nvSpPr>
@@ -23508,7 +23508,7 @@
                 <a:ea typeface="Pretendard" pitchFamily="34" charset="-122"/>
                 <a:cs typeface="Pretendard" pitchFamily="34" charset="-120"/>
               </a:rPr>
-              <a:t>- Clean</a:t>
+              <a:t>- Minimalism / brutalism / bentogrid</a:t>
             </a:r>
             <a:pPr algn="l" indent="0" marL="0">
               <a:lnSpc>
@@ -23525,7 +23525,7 @@
                 <a:ea typeface="Pretendard" pitchFamily="34" charset="-122"/>
                 <a:cs typeface="Pretendard" pitchFamily="34" charset="-120"/>
               </a:rPr>
-              <a:t>  restrained default structure for ordinary decks.</a:t>
+              <a:t>  sparse rules, hard contrast, or tiled information rhythm.</a:t>
             </a:r>
             <a:endParaRPr lang="en-US" sz="2200" dirty="0"/>
           </a:p>
@@ -23533,7 +23533,7 @@
       </p:sp>
       <p:sp>
         <p:nvSpPr>
-          <p:cNvPr id="9" name="Text 7"/>
+          <p:cNvPr id="9" name="mdpr:2-2-149bde:right:block-8-chunk-2"/>
           <p:cNvSpPr txBox="1"/>
           <p:nvPr/>
         </p:nvSpPr>
@@ -23775,7 +23775,7 @@
       </p:sp>
       <p:sp>
         <p:nvSpPr>
-          <p:cNvPr id="7" name="Text 5"/>
+          <p:cNvPr id="7" name="mdpr:1-2-5a84f1:title:__title:1-2-5a84f1"/>
           <p:cNvSpPr txBox="1"/>
           <p:nvPr/>
         </p:nvSpPr>
@@ -23817,7 +23817,7 @@
       </p:sp>
       <p:sp>
         <p:nvSpPr>
-          <p:cNvPr id="8" name="Text 6"/>
+          <p:cNvPr id="8" name="mdpr:1-2-5a84f1:left:block-10-chunk-1"/>
           <p:cNvSpPr txBox="1"/>
           <p:nvPr/>
         </p:nvSpPr>
@@ -23876,7 +23876,7 @@
       </p:sp>
       <p:sp>
         <p:nvSpPr>
-          <p:cNvPr id="9" name="Text 7"/>
+          <p:cNvPr id="9" name="mdpr:1-2-5a84f1:right:block-10-chunk-1"/>
           <p:cNvSpPr txBox="1"/>
           <p:nvPr/>
         </p:nvSpPr>

--- a/docs/theme-preview/pptx/newmorphism.pptx
+++ b/docs/theme-preview/pptx/newmorphism.pptx
@@ -366,7 +366,7 @@
             <a:pPr>
               <a:defRPr sz="1100" b="0" i="0" u="none" strike="noStrike">
                 <a:solidFill>
-                  <a:srgbClr val="243041"/>
+                  <a:srgbClr val="111111"/>
                 </a:solidFill>
                 <a:latin typeface="Pretendard"/>
               </a:defRPr>
@@ -418,7 +418,7 @@
             <a:pPr>
               <a:defRPr sz="1100" b="0" i="0" u="none" strike="noStrike">
                 <a:solidFill>
-                  <a:srgbClr val="536579"/>
+                  <a:srgbClr val="898989"/>
                 </a:solidFill>
                 <a:latin typeface="Pretendard"/>
               </a:defRPr>
@@ -448,7 +448,7 @@
           <a:pPr>
             <a:defRPr sz="1100">
               <a:solidFill>
-                <a:srgbClr val="536579"/>
+                <a:srgbClr val="898989"/>
               </a:solidFill>
               <a:latin typeface="Pretendard"/>
               <a:cs typeface="Pretendard"/>
@@ -626,7 +626,7 @@
             <a:pPr>
               <a:defRPr sz="1100" b="0" i="0" u="none" strike="noStrike">
                 <a:solidFill>
-                  <a:srgbClr val="243041"/>
+                  <a:srgbClr val="111111"/>
                 </a:solidFill>
                 <a:latin typeface="Pretendard"/>
               </a:defRPr>
@@ -678,7 +678,7 @@
             <a:pPr>
               <a:defRPr sz="1100" b="0" i="0" u="none" strike="noStrike">
                 <a:solidFill>
-                  <a:srgbClr val="536579"/>
+                  <a:srgbClr val="898989"/>
                 </a:solidFill>
                 <a:latin typeface="Pretendard"/>
               </a:defRPr>
@@ -3721,7 +3721,7 @@
             <a:r>
               <a:rPr lang="en-US" sz="4800" b="1" dirty="0">
                 <a:solidFill>
-                  <a:srgbClr val="243041"/>
+                  <a:srgbClr val="111111"/>
                 </a:solidFill>
                 <a:latin typeface="Pretendard" pitchFamily="34" charset="0"/>
                 <a:ea typeface="Pretendard" pitchFamily="34" charset="-122"/>
@@ -3946,7 +3946,7 @@
             <a:r>
               <a:rPr lang="en-US" sz="3400" b="1" dirty="0">
                 <a:solidFill>
-                  <a:srgbClr val="243041"/>
+                  <a:srgbClr val="111111"/>
                 </a:solidFill>
                 <a:latin typeface="Pretendard" pitchFamily="34" charset="0"/>
                 <a:ea typeface="Pretendard" pitchFamily="34" charset="-122"/>
@@ -4005,7 +4005,7 @@
             <a:r>
               <a:rPr lang="en-US" sz="2200" dirty="0">
                 <a:solidFill>
-                  <a:srgbClr val="243041"/>
+                  <a:srgbClr val="111111"/>
                 </a:solidFill>
                 <a:latin typeface="Pretendard" pitchFamily="34" charset="0"/>
                 <a:ea typeface="Pretendard" pitchFamily="34" charset="-122"/>
@@ -4064,7 +4064,7 @@
             <a:r>
               <a:rPr lang="en-US" sz="2200" dirty="0">
                 <a:solidFill>
-                  <a:srgbClr val="243041"/>
+                  <a:srgbClr val="111111"/>
                 </a:solidFill>
                 <a:latin typeface="Pretendard" pitchFamily="34" charset="0"/>
                 <a:ea typeface="Pretendard" pitchFamily="34" charset="-122"/>
@@ -4235,7 +4235,7 @@
             <a:r>
               <a:rPr lang="en-US" sz="3400" b="1" dirty="0">
                 <a:solidFill>
-                  <a:srgbClr val="243041"/>
+                  <a:srgbClr val="111111"/>
                 </a:solidFill>
                 <a:latin typeface="Pretendard" pitchFamily="34" charset="0"/>
                 <a:ea typeface="Pretendard" pitchFamily="34" charset="-122"/>
@@ -4531,7 +4531,7 @@
             <a:r>
               <a:rPr lang="en-US" sz="1600" dirty="0">
                 <a:solidFill>
-                  <a:srgbClr val="243041"/>
+                  <a:srgbClr val="111111"/>
                 </a:solidFill>
                 <a:latin typeface="Pretendard" pitchFamily="34" charset="0"/>
                 <a:ea typeface="Pretendard" pitchFamily="34" charset="-122"/>
@@ -4707,7 +4707,7 @@
             <a:r>
               <a:rPr lang="en-US" sz="1600" dirty="0">
                 <a:solidFill>
-                  <a:srgbClr val="243041"/>
+                  <a:srgbClr val="111111"/>
                 </a:solidFill>
                 <a:latin typeface="Pretendard" pitchFamily="34" charset="0"/>
                 <a:ea typeface="Pretendard" pitchFamily="34" charset="-122"/>
@@ -4883,7 +4883,7 @@
             <a:r>
               <a:rPr lang="en-US" sz="1600" dirty="0">
                 <a:solidFill>
-                  <a:srgbClr val="243041"/>
+                  <a:srgbClr val="111111"/>
                 </a:solidFill>
                 <a:latin typeface="Pretendard" pitchFamily="34" charset="0"/>
                 <a:ea typeface="Pretendard" pitchFamily="34" charset="-122"/>
@@ -5059,7 +5059,7 @@
             <a:r>
               <a:rPr lang="en-US" sz="1600" dirty="0">
                 <a:solidFill>
-                  <a:srgbClr val="243041"/>
+                  <a:srgbClr val="111111"/>
                 </a:solidFill>
                 <a:latin typeface="Pretendard" pitchFamily="34" charset="0"/>
                 <a:ea typeface="Pretendard" pitchFamily="34" charset="-122"/>
@@ -5235,7 +5235,7 @@
             <a:r>
               <a:rPr lang="en-US" sz="1600" dirty="0">
                 <a:solidFill>
-                  <a:srgbClr val="243041"/>
+                  <a:srgbClr val="111111"/>
                 </a:solidFill>
                 <a:latin typeface="Pretendard" pitchFamily="34" charset="0"/>
                 <a:ea typeface="Pretendard" pitchFamily="34" charset="-122"/>
@@ -5411,7 +5411,7 @@
             <a:r>
               <a:rPr lang="en-US" sz="1600" dirty="0">
                 <a:solidFill>
-                  <a:srgbClr val="243041"/>
+                  <a:srgbClr val="111111"/>
                 </a:solidFill>
                 <a:latin typeface="Pretendard" pitchFamily="34" charset="0"/>
                 <a:ea typeface="Pretendard" pitchFamily="34" charset="-122"/>
@@ -6238,7 +6238,7 @@
             <a:r>
               <a:rPr lang="en-US" sz="3400" b="1" dirty="0">
                 <a:solidFill>
-                  <a:srgbClr val="243041"/>
+                  <a:srgbClr val="111111"/>
                 </a:solidFill>
                 <a:latin typeface="Pretendard" pitchFamily="34" charset="0"/>
                 <a:ea typeface="Pretendard" pitchFamily="34" charset="-122"/>
@@ -6354,7 +6354,7 @@
             <a:r>
               <a:rPr lang="en-US" sz="2200" dirty="0">
                 <a:solidFill>
-                  <a:srgbClr val="243041"/>
+                  <a:srgbClr val="111111"/>
                 </a:solidFill>
                 <a:latin typeface="Pretendard" pitchFamily="34" charset="0"/>
                 <a:ea typeface="Pretendard" pitchFamily="34" charset="-122"/>
@@ -6470,7 +6470,7 @@
             <a:r>
               <a:rPr lang="en-US" sz="2200" dirty="0">
                 <a:solidFill>
-                  <a:srgbClr val="243041"/>
+                  <a:srgbClr val="111111"/>
                 </a:solidFill>
                 <a:latin typeface="Pretendard" pitchFamily="34" charset="0"/>
                 <a:ea typeface="Pretendard" pitchFamily="34" charset="-122"/>
@@ -6586,7 +6586,7 @@
             <a:r>
               <a:rPr lang="en-US" sz="2200" dirty="0">
                 <a:solidFill>
-                  <a:srgbClr val="243041"/>
+                  <a:srgbClr val="111111"/>
                 </a:solidFill>
                 <a:latin typeface="Pretendard" pitchFamily="34" charset="0"/>
                 <a:ea typeface="Pretendard" pitchFamily="34" charset="-122"/>
@@ -6702,7 +6702,7 @@
             <a:r>
               <a:rPr lang="en-US" sz="2200" dirty="0">
                 <a:solidFill>
-                  <a:srgbClr val="243041"/>
+                  <a:srgbClr val="111111"/>
                 </a:solidFill>
                 <a:latin typeface="Pretendard" pitchFamily="34" charset="0"/>
                 <a:ea typeface="Pretendard" pitchFamily="34" charset="-122"/>
@@ -6927,7 +6927,7 @@
             <a:r>
               <a:rPr lang="en-US" sz="3400" b="1" dirty="0">
                 <a:solidFill>
-                  <a:srgbClr val="243041"/>
+                  <a:srgbClr val="111111"/>
                 </a:solidFill>
                 <a:latin typeface="Pretendard" pitchFamily="34" charset="0"/>
                 <a:ea typeface="Pretendard" pitchFamily="34" charset="-122"/>
@@ -6986,7 +6986,7 @@
             <a:r>
               <a:rPr lang="en-US" sz="2200" dirty="0">
                 <a:solidFill>
-                  <a:srgbClr val="243041"/>
+                  <a:srgbClr val="111111"/>
                 </a:solidFill>
                 <a:latin typeface="Pretendard" pitchFamily="34" charset="0"/>
                 <a:ea typeface="Pretendard" pitchFamily="34" charset="-122"/>
@@ -7045,7 +7045,7 @@
             <a:r>
               <a:rPr lang="en-US" sz="2200" dirty="0">
                 <a:solidFill>
-                  <a:srgbClr val="243041"/>
+                  <a:srgbClr val="111111"/>
                 </a:solidFill>
                 <a:latin typeface="Pretendard" pitchFamily="34" charset="0"/>
                 <a:ea typeface="Pretendard" pitchFamily="34" charset="-122"/>
@@ -7353,7 +7353,7 @@
             <a:r>
               <a:rPr lang="en-US" sz="3400" b="1" dirty="0">
                 <a:solidFill>
-                  <a:srgbClr val="243041"/>
+                  <a:srgbClr val="111111"/>
                 </a:solidFill>
                 <a:latin typeface="Pretendard" pitchFamily="34" charset="0"/>
                 <a:ea typeface="Pretendard" pitchFamily="34" charset="-122"/>
@@ -7610,7 +7610,7 @@
                       <a:r>
                         <a:rPr lang="en-US" sz="1800" b="1" dirty="0">
                           <a:solidFill>
-                            <a:srgbClr val="243041"/>
+                            <a:srgbClr val="111111"/>
                           </a:solidFill>
                           <a:latin typeface="Pretendard" pitchFamily="34" charset="0"/>
                           <a:ea typeface="Pretendard" pitchFamily="34" charset="-122"/>
@@ -7675,7 +7675,7 @@
                       <a:r>
                         <a:rPr lang="en-US" sz="1800" dirty="0">
                           <a:solidFill>
-                            <a:srgbClr val="243041"/>
+                            <a:srgbClr val="111111"/>
                           </a:solidFill>
                           <a:latin typeface="Pretendard" pitchFamily="34" charset="0"/>
                           <a:ea typeface="Pretendard" pitchFamily="34" charset="-122"/>
@@ -7740,7 +7740,7 @@
                       <a:r>
                         <a:rPr lang="en-US" sz="1800" dirty="0">
                           <a:solidFill>
-                            <a:srgbClr val="243041"/>
+                            <a:srgbClr val="111111"/>
                           </a:solidFill>
                           <a:latin typeface="Pretendard" pitchFamily="34" charset="0"/>
                           <a:ea typeface="Pretendard" pitchFamily="34" charset="-122"/>
@@ -7807,7 +7807,7 @@
                       <a:r>
                         <a:rPr lang="en-US" sz="1800" b="1" dirty="0">
                           <a:solidFill>
-                            <a:srgbClr val="243041"/>
+                            <a:srgbClr val="111111"/>
                           </a:solidFill>
                           <a:latin typeface="Pretendard" pitchFamily="34" charset="0"/>
                           <a:ea typeface="Pretendard" pitchFamily="34" charset="-122"/>
@@ -7877,7 +7877,7 @@
                       <a:r>
                         <a:rPr lang="en-US" sz="1800" dirty="0">
                           <a:solidFill>
-                            <a:srgbClr val="243041"/>
+                            <a:srgbClr val="111111"/>
                           </a:solidFill>
                           <a:latin typeface="Pretendard" pitchFamily="34" charset="0"/>
                           <a:ea typeface="Pretendard" pitchFamily="34" charset="-122"/>
@@ -7947,7 +7947,7 @@
                       <a:r>
                         <a:rPr lang="en-US" sz="1800" dirty="0">
                           <a:solidFill>
-                            <a:srgbClr val="243041"/>
+                            <a:srgbClr val="111111"/>
                           </a:solidFill>
                           <a:latin typeface="Pretendard" pitchFamily="34" charset="0"/>
                           <a:ea typeface="Pretendard" pitchFamily="34" charset="-122"/>
@@ -8019,7 +8019,7 @@
                       <a:r>
                         <a:rPr lang="en-US" sz="1800" b="1" dirty="0">
                           <a:solidFill>
-                            <a:srgbClr val="243041"/>
+                            <a:srgbClr val="111111"/>
                           </a:solidFill>
                           <a:latin typeface="Pretendard" pitchFamily="34" charset="0"/>
                           <a:ea typeface="Pretendard" pitchFamily="34" charset="-122"/>
@@ -8084,7 +8084,7 @@
                       <a:r>
                         <a:rPr lang="en-US" sz="1800" dirty="0">
                           <a:solidFill>
-                            <a:srgbClr val="243041"/>
+                            <a:srgbClr val="111111"/>
                           </a:solidFill>
                           <a:latin typeface="Pretendard" pitchFamily="34" charset="0"/>
                           <a:ea typeface="Pretendard" pitchFamily="34" charset="-122"/>
@@ -8149,7 +8149,7 @@
                       <a:r>
                         <a:rPr lang="en-US" sz="1800" dirty="0">
                           <a:solidFill>
-                            <a:srgbClr val="243041"/>
+                            <a:srgbClr val="111111"/>
                           </a:solidFill>
                           <a:latin typeface="Pretendard" pitchFamily="34" charset="0"/>
                           <a:ea typeface="Pretendard" pitchFamily="34" charset="-122"/>
@@ -8216,7 +8216,7 @@
                       <a:r>
                         <a:rPr lang="en-US" sz="1800" b="1" dirty="0">
                           <a:solidFill>
-                            <a:srgbClr val="243041"/>
+                            <a:srgbClr val="111111"/>
                           </a:solidFill>
                           <a:latin typeface="Pretendard" pitchFamily="34" charset="0"/>
                           <a:ea typeface="Pretendard" pitchFamily="34" charset="-122"/>
@@ -8286,7 +8286,7 @@
                       <a:r>
                         <a:rPr lang="en-US" sz="1800" dirty="0">
                           <a:solidFill>
-                            <a:srgbClr val="243041"/>
+                            <a:srgbClr val="111111"/>
                           </a:solidFill>
                           <a:latin typeface="Pretendard" pitchFamily="34" charset="0"/>
                           <a:ea typeface="Pretendard" pitchFamily="34" charset="-122"/>
@@ -8356,7 +8356,7 @@
                       <a:r>
                         <a:rPr lang="en-US" sz="1800" dirty="0">
                           <a:solidFill>
-                            <a:srgbClr val="243041"/>
+                            <a:srgbClr val="111111"/>
                           </a:solidFill>
                           <a:latin typeface="Pretendard" pitchFamily="34" charset="0"/>
                           <a:ea typeface="Pretendard" pitchFamily="34" charset="-122"/>
@@ -8743,7 +8743,7 @@
             <a:r>
               <a:rPr lang="en-US" sz="3400" b="1" dirty="0">
                 <a:solidFill>
-                  <a:srgbClr val="243041"/>
+                  <a:srgbClr val="111111"/>
                 </a:solidFill>
                 <a:latin typeface="Pretendard" pitchFamily="34" charset="0"/>
                 <a:ea typeface="Pretendard" pitchFamily="34" charset="-122"/>
@@ -8802,7 +8802,7 @@
             <a:r>
               <a:rPr lang="en-US" sz="2200" dirty="0">
                 <a:solidFill>
-                  <a:srgbClr val="243041"/>
+                  <a:srgbClr val="111111"/>
                 </a:solidFill>
                 <a:latin typeface="Pretendard" pitchFamily="34" charset="0"/>
                 <a:ea typeface="Pretendard" pitchFamily="34" charset="-122"/>
@@ -8842,7 +8842,7 @@
             <a:r>
               <a:rPr lang="en-US" sz="2200" dirty="0">
                 <a:solidFill>
-                  <a:srgbClr val="243041"/>
+                  <a:srgbClr val="111111"/>
                 </a:solidFill>
                 <a:latin typeface="Pretendard" pitchFamily="34" charset="0"/>
                 <a:ea typeface="Pretendard" pitchFamily="34" charset="-122"/>
@@ -8882,7 +8882,7 @@
             <a:r>
               <a:rPr lang="en-US" sz="2200" dirty="0">
                 <a:solidFill>
-                  <a:srgbClr val="243041"/>
+                  <a:srgbClr val="111111"/>
                 </a:solidFill>
                 <a:latin typeface="Pretendard" pitchFamily="34" charset="0"/>
                 <a:ea typeface="Pretendard" pitchFamily="34" charset="-122"/>
@@ -9206,7 +9206,7 @@
             <a:r>
               <a:rPr lang="en-US" sz="3400" b="1" dirty="0">
                 <a:solidFill>
-                  <a:srgbClr val="243041"/>
+                  <a:srgbClr val="111111"/>
                 </a:solidFill>
                 <a:latin typeface="Pretendard" pitchFamily="34" charset="0"/>
                 <a:ea typeface="Pretendard" pitchFamily="34" charset="-122"/>
@@ -9463,7 +9463,7 @@
                       <a:r>
                         <a:rPr lang="en-US" sz="1800" b="1" dirty="0">
                           <a:solidFill>
-                            <a:srgbClr val="243041"/>
+                            <a:srgbClr val="111111"/>
                           </a:solidFill>
                           <a:latin typeface="Pretendard" pitchFamily="34" charset="0"/>
                           <a:ea typeface="Pretendard" pitchFamily="34" charset="-122"/>
@@ -9528,7 +9528,7 @@
                       <a:r>
                         <a:rPr lang="en-US" sz="1800" dirty="0">
                           <a:solidFill>
-                            <a:srgbClr val="243041"/>
+                            <a:srgbClr val="111111"/>
                           </a:solidFill>
                           <a:latin typeface="Pretendard" pitchFamily="34" charset="0"/>
                           <a:ea typeface="Pretendard" pitchFamily="34" charset="-122"/>
@@ -9593,7 +9593,7 @@
                       <a:r>
                         <a:rPr lang="en-US" sz="1800" dirty="0">
                           <a:solidFill>
-                            <a:srgbClr val="243041"/>
+                            <a:srgbClr val="111111"/>
                           </a:solidFill>
                           <a:latin typeface="Pretendard" pitchFamily="34" charset="0"/>
                           <a:ea typeface="Pretendard" pitchFamily="34" charset="-122"/>
@@ -9660,7 +9660,7 @@
                       <a:r>
                         <a:rPr lang="en-US" sz="1800" b="1" dirty="0">
                           <a:solidFill>
-                            <a:srgbClr val="243041"/>
+                            <a:srgbClr val="111111"/>
                           </a:solidFill>
                           <a:latin typeface="Pretendard" pitchFamily="34" charset="0"/>
                           <a:ea typeface="Pretendard" pitchFamily="34" charset="-122"/>
@@ -9730,7 +9730,7 @@
                       <a:r>
                         <a:rPr lang="en-US" sz="1800" dirty="0">
                           <a:solidFill>
-                            <a:srgbClr val="243041"/>
+                            <a:srgbClr val="111111"/>
                           </a:solidFill>
                           <a:latin typeface="Pretendard" pitchFamily="34" charset="0"/>
                           <a:ea typeface="Pretendard" pitchFamily="34" charset="-122"/>
@@ -9800,7 +9800,7 @@
                       <a:r>
                         <a:rPr lang="en-US" sz="1800" dirty="0">
                           <a:solidFill>
-                            <a:srgbClr val="243041"/>
+                            <a:srgbClr val="111111"/>
                           </a:solidFill>
                           <a:latin typeface="Pretendard" pitchFamily="34" charset="0"/>
                           <a:ea typeface="Pretendard" pitchFamily="34" charset="-122"/>
@@ -9872,7 +9872,7 @@
                       <a:r>
                         <a:rPr lang="en-US" sz="1800" b="1" dirty="0">
                           <a:solidFill>
-                            <a:srgbClr val="243041"/>
+                            <a:srgbClr val="111111"/>
                           </a:solidFill>
                           <a:latin typeface="Pretendard" pitchFamily="34" charset="0"/>
                           <a:ea typeface="Pretendard" pitchFamily="34" charset="-122"/>
@@ -9937,7 +9937,7 @@
                       <a:r>
                         <a:rPr lang="en-US" sz="1800" dirty="0">
                           <a:solidFill>
-                            <a:srgbClr val="243041"/>
+                            <a:srgbClr val="111111"/>
                           </a:solidFill>
                           <a:latin typeface="Pretendard" pitchFamily="34" charset="0"/>
                           <a:ea typeface="Pretendard" pitchFamily="34" charset="-122"/>
@@ -10002,7 +10002,7 @@
                       <a:r>
                         <a:rPr lang="en-US" sz="1800" dirty="0">
                           <a:solidFill>
-                            <a:srgbClr val="243041"/>
+                            <a:srgbClr val="111111"/>
                           </a:solidFill>
                           <a:latin typeface="Pretendard" pitchFamily="34" charset="0"/>
                           <a:ea typeface="Pretendard" pitchFamily="34" charset="-122"/>
@@ -10357,7 +10357,7 @@
             <a:r>
               <a:rPr lang="en-US" sz="3400" b="1" dirty="0">
                 <a:solidFill>
-                  <a:srgbClr val="243041"/>
+                  <a:srgbClr val="111111"/>
                 </a:solidFill>
                 <a:latin typeface="Pretendard" pitchFamily="34" charset="0"/>
                 <a:ea typeface="Pretendard" pitchFamily="34" charset="-122"/>
@@ -10548,7 +10548,7 @@
             <a:r>
               <a:rPr lang="en-US" sz="3000" b="1" dirty="0">
                 <a:solidFill>
-                  <a:srgbClr val="243041"/>
+                  <a:srgbClr val="111111"/>
                 </a:solidFill>
                 <a:latin typeface="Pretendard" pitchFamily="34" charset="0"/>
                 <a:ea typeface="Pretendard" pitchFamily="34" charset="-122"/>
@@ -10590,7 +10590,7 @@
             <a:r>
               <a:rPr lang="en-US" sz="1600" dirty="0">
                 <a:solidFill>
-                  <a:srgbClr val="536579"/>
+                  <a:srgbClr val="898989"/>
                 </a:solidFill>
                 <a:latin typeface="Pretendard" pitchFamily="34" charset="0"/>
                 <a:ea typeface="Pretendard" pitchFamily="34" charset="-122"/>
@@ -10661,7 +10661,7 @@
             <a:r>
               <a:rPr lang="en-US" sz="1600" b="1" dirty="0">
                 <a:solidFill>
-                  <a:srgbClr val="243041"/>
+                  <a:srgbClr val="111111"/>
                 </a:solidFill>
                 <a:latin typeface="Pretendard" pitchFamily="34" charset="0"/>
                 <a:ea typeface="Pretendard" pitchFamily="34" charset="-122"/>
@@ -10732,7 +10732,7 @@
             <a:r>
               <a:rPr lang="en-US" sz="1600" dirty="0">
                 <a:solidFill>
-                  <a:srgbClr val="536579"/>
+                  <a:srgbClr val="898989"/>
                 </a:solidFill>
                 <a:latin typeface="Pretendard" pitchFamily="34" charset="0"/>
                 <a:ea typeface="Pretendard" pitchFamily="34" charset="-122"/>
@@ -10821,7 +10821,7 @@
           <a:noFill/>
           <a:ln w="12700">
             <a:solidFill>
-              <a:srgbClr val="243041"/>
+              <a:srgbClr val="111111"/>
             </a:solidFill>
             <a:prstDash val="solid"/>
           </a:ln>
@@ -10934,7 +10934,7 @@
             <a:r>
               <a:rPr lang="en-US" sz="3200" b="1" dirty="0">
                 <a:solidFill>
-                  <a:srgbClr val="243041"/>
+                  <a:srgbClr val="111111"/>
                 </a:solidFill>
                 <a:latin typeface="Pretendard" pitchFamily="34" charset="0"/>
                 <a:ea typeface="Pretendard" pitchFamily="34" charset="-122"/>
@@ -10976,7 +10976,7 @@
             <a:r>
               <a:rPr lang="en-US" sz="1700" dirty="0">
                 <a:solidFill>
-                  <a:srgbClr val="536579"/>
+                  <a:srgbClr val="898989"/>
                 </a:solidFill>
                 <a:latin typeface="Pretendard" pitchFamily="34" charset="0"/>
                 <a:ea typeface="Pretendard" pitchFamily="34" charset="-122"/>
@@ -11018,7 +11018,7 @@
             <a:r>
               <a:rPr lang="en-US" sz="1400" dirty="0">
                 <a:solidFill>
-                  <a:srgbClr val="536579"/>
+                  <a:srgbClr val="898989"/>
                 </a:solidFill>
                 <a:latin typeface="Pretendard" pitchFamily="34" charset="0"/>
                 <a:ea typeface="Pretendard" pitchFamily="34" charset="-122"/>
@@ -11060,7 +11060,7 @@
             <a:r>
               <a:rPr lang="en-US" sz="1400" dirty="0">
                 <a:solidFill>
-                  <a:srgbClr val="536579"/>
+                  <a:srgbClr val="898989"/>
                 </a:solidFill>
                 <a:latin typeface="Pretendard" pitchFamily="34" charset="0"/>
                 <a:ea typeface="Pretendard" pitchFamily="34" charset="-122"/>
@@ -11368,7 +11368,7 @@
             <a:r>
               <a:rPr lang="en-US" sz="3400" b="1" dirty="0">
                 <a:solidFill>
-                  <a:srgbClr val="243041"/>
+                  <a:srgbClr val="111111"/>
                 </a:solidFill>
                 <a:latin typeface="Pretendard" pitchFamily="34" charset="0"/>
                 <a:ea typeface="Pretendard" pitchFamily="34" charset="-122"/>
@@ -11466,7 +11466,7 @@
             <a:r>
               <a:rPr lang="en-US" sz="1800" b="1" dirty="0">
                 <a:solidFill>
-                  <a:srgbClr val="243041"/>
+                  <a:srgbClr val="111111"/>
                 </a:solidFill>
                 <a:latin typeface="Pretendard" pitchFamily="34" charset="0"/>
                 <a:ea typeface="Pretendard" pitchFamily="34" charset="-122"/>
@@ -11608,7 +11608,7 @@
             <a:r>
               <a:rPr lang="en-US" sz="1800" b="1" dirty="0">
                 <a:solidFill>
-                  <a:srgbClr val="243041"/>
+                  <a:srgbClr val="111111"/>
                 </a:solidFill>
                 <a:latin typeface="Pretendard" pitchFamily="34" charset="0"/>
                 <a:ea typeface="Pretendard" pitchFamily="34" charset="-122"/>
@@ -11750,7 +11750,7 @@
             <a:r>
               <a:rPr lang="en-US" sz="1800" b="1" dirty="0">
                 <a:solidFill>
-                  <a:srgbClr val="243041"/>
+                  <a:srgbClr val="111111"/>
                 </a:solidFill>
                 <a:latin typeface="Pretendard" pitchFamily="34" charset="0"/>
                 <a:ea typeface="Pretendard" pitchFamily="34" charset="-122"/>
@@ -11892,7 +11892,7 @@
             <a:r>
               <a:rPr lang="en-US" sz="1800" b="1" dirty="0">
                 <a:solidFill>
-                  <a:srgbClr val="243041"/>
+                  <a:srgbClr val="111111"/>
                 </a:solidFill>
                 <a:latin typeface="Pretendard" pitchFamily="34" charset="0"/>
                 <a:ea typeface="Pretendard" pitchFamily="34" charset="-122"/>
@@ -12700,7 +12700,7 @@
             <a:r>
               <a:rPr lang="en-US" sz="3400" b="1" dirty="0">
                 <a:solidFill>
-                  <a:srgbClr val="243041"/>
+                  <a:srgbClr val="111111"/>
                 </a:solidFill>
                 <a:latin typeface="Pretendard" pitchFamily="34" charset="0"/>
                 <a:ea typeface="Pretendard" pitchFamily="34" charset="-122"/>
@@ -12816,7 +12816,7 @@
             <a:r>
               <a:rPr lang="en-US" sz="2200" dirty="0">
                 <a:solidFill>
-                  <a:srgbClr val="243041"/>
+                  <a:srgbClr val="111111"/>
                 </a:solidFill>
                 <a:latin typeface="Pretendard" pitchFamily="34" charset="0"/>
                 <a:ea typeface="Pretendard" pitchFamily="34" charset="-122"/>
@@ -12932,7 +12932,7 @@
             <a:r>
               <a:rPr lang="en-US" sz="2200" dirty="0">
                 <a:solidFill>
-                  <a:srgbClr val="243041"/>
+                  <a:srgbClr val="111111"/>
                 </a:solidFill>
                 <a:latin typeface="Pretendard" pitchFamily="34" charset="0"/>
                 <a:ea typeface="Pretendard" pitchFamily="34" charset="-122"/>
@@ -13048,7 +13048,7 @@
             <a:r>
               <a:rPr lang="en-US" sz="2200" dirty="0">
                 <a:solidFill>
-                  <a:srgbClr val="243041"/>
+                  <a:srgbClr val="111111"/>
                 </a:solidFill>
                 <a:latin typeface="Pretendard" pitchFamily="34" charset="0"/>
                 <a:ea typeface="Pretendard" pitchFamily="34" charset="-122"/>
@@ -13680,7 +13680,7 @@
             <a:r>
               <a:rPr lang="en-US" sz="3800" b="1" dirty="0">
                 <a:solidFill>
-                  <a:srgbClr val="243041"/>
+                  <a:srgbClr val="111111"/>
                 </a:solidFill>
                 <a:latin typeface="Pretendard" pitchFamily="34" charset="0"/>
                 <a:ea typeface="Pretendard" pitchFamily="34" charset="-122"/>
@@ -13722,7 +13722,7 @@
             <a:r>
               <a:rPr lang="en-US" sz="1800" dirty="0">
                 <a:solidFill>
-                  <a:srgbClr val="243041"/>
+                  <a:srgbClr val="111111"/>
                 </a:solidFill>
                 <a:latin typeface="Pretendard" pitchFamily="34" charset="0"/>
                 <a:ea typeface="Pretendard" pitchFamily="34" charset="-122"/>
@@ -13764,7 +13764,7 @@
             <a:r>
               <a:rPr lang="en-US" sz="1800" dirty="0">
                 <a:solidFill>
-                  <a:srgbClr val="243041"/>
+                  <a:srgbClr val="111111"/>
                 </a:solidFill>
                 <a:latin typeface="Pretendard" pitchFamily="34" charset="0"/>
                 <a:ea typeface="Pretendard" pitchFamily="34" charset="-122"/>
@@ -13806,7 +13806,7 @@
             <a:r>
               <a:rPr lang="en-US" sz="1800" dirty="0">
                 <a:solidFill>
-                  <a:srgbClr val="243041"/>
+                  <a:srgbClr val="111111"/>
                 </a:solidFill>
                 <a:latin typeface="Pretendard" pitchFamily="34" charset="0"/>
                 <a:ea typeface="Pretendard" pitchFamily="34" charset="-122"/>
@@ -13848,7 +13848,7 @@
             <a:r>
               <a:rPr lang="en-US" sz="1800" dirty="0">
                 <a:solidFill>
-                  <a:srgbClr val="243041"/>
+                  <a:srgbClr val="111111"/>
                 </a:solidFill>
                 <a:latin typeface="Pretendard" pitchFamily="34" charset="0"/>
                 <a:ea typeface="Pretendard" pitchFamily="34" charset="-122"/>
@@ -13890,7 +13890,7 @@
             <a:r>
               <a:rPr lang="en-US" sz="1800" dirty="0">
                 <a:solidFill>
-                  <a:srgbClr val="243041"/>
+                  <a:srgbClr val="111111"/>
                 </a:solidFill>
                 <a:latin typeface="Pretendard" pitchFamily="34" charset="0"/>
                 <a:ea typeface="Pretendard" pitchFamily="34" charset="-122"/>
@@ -13932,7 +13932,7 @@
             <a:r>
               <a:rPr lang="en-US" sz="1800" dirty="0">
                 <a:solidFill>
-                  <a:srgbClr val="243041"/>
+                  <a:srgbClr val="111111"/>
                 </a:solidFill>
                 <a:latin typeface="Pretendard" pitchFamily="34" charset="0"/>
                 <a:ea typeface="Pretendard" pitchFamily="34" charset="-122"/>
@@ -13974,7 +13974,7 @@
             <a:r>
               <a:rPr lang="en-US" sz="1800" dirty="0">
                 <a:solidFill>
-                  <a:srgbClr val="243041"/>
+                  <a:srgbClr val="111111"/>
                 </a:solidFill>
                 <a:latin typeface="Pretendard" pitchFamily="34" charset="0"/>
                 <a:ea typeface="Pretendard" pitchFamily="34" charset="-122"/>
@@ -14016,7 +14016,7 @@
             <a:r>
               <a:rPr lang="en-US" sz="1800" dirty="0">
                 <a:solidFill>
-                  <a:srgbClr val="243041"/>
+                  <a:srgbClr val="111111"/>
                 </a:solidFill>
                 <a:latin typeface="Pretendard" pitchFamily="34" charset="0"/>
                 <a:ea typeface="Pretendard" pitchFamily="34" charset="-122"/>
@@ -14058,7 +14058,7 @@
             <a:r>
               <a:rPr lang="en-US" sz="1800" dirty="0">
                 <a:solidFill>
-                  <a:srgbClr val="243041"/>
+                  <a:srgbClr val="111111"/>
                 </a:solidFill>
                 <a:latin typeface="Pretendard" pitchFamily="34" charset="0"/>
                 <a:ea typeface="Pretendard" pitchFamily="34" charset="-122"/>
@@ -14100,7 +14100,7 @@
             <a:r>
               <a:rPr lang="en-US" sz="1800" dirty="0">
                 <a:solidFill>
-                  <a:srgbClr val="243041"/>
+                  <a:srgbClr val="111111"/>
                 </a:solidFill>
                 <a:latin typeface="Pretendard" pitchFamily="34" charset="0"/>
                 <a:ea typeface="Pretendard" pitchFamily="34" charset="-122"/>
@@ -14142,7 +14142,7 @@
             <a:r>
               <a:rPr lang="en-US" sz="1800" dirty="0">
                 <a:solidFill>
-                  <a:srgbClr val="243041"/>
+                  <a:srgbClr val="111111"/>
                 </a:solidFill>
                 <a:latin typeface="Pretendard" pitchFamily="34" charset="0"/>
                 <a:ea typeface="Pretendard" pitchFamily="34" charset="-122"/>
@@ -14184,7 +14184,7 @@
             <a:r>
               <a:rPr lang="en-US" sz="1800" dirty="0">
                 <a:solidFill>
-                  <a:srgbClr val="243041"/>
+                  <a:srgbClr val="111111"/>
                 </a:solidFill>
                 <a:latin typeface="Pretendard" pitchFamily="34" charset="0"/>
                 <a:ea typeface="Pretendard" pitchFamily="34" charset="-122"/>
@@ -14226,7 +14226,7 @@
             <a:r>
               <a:rPr lang="en-US" sz="1800" dirty="0">
                 <a:solidFill>
-                  <a:srgbClr val="243041"/>
+                  <a:srgbClr val="111111"/>
                 </a:solidFill>
                 <a:latin typeface="Pretendard" pitchFamily="34" charset="0"/>
                 <a:ea typeface="Pretendard" pitchFamily="34" charset="-122"/>
@@ -14268,7 +14268,7 @@
             <a:r>
               <a:rPr lang="en-US" sz="1800" dirty="0">
                 <a:solidFill>
-                  <a:srgbClr val="243041"/>
+                  <a:srgbClr val="111111"/>
                 </a:solidFill>
                 <a:latin typeface="Pretendard" pitchFamily="34" charset="0"/>
                 <a:ea typeface="Pretendard" pitchFamily="34" charset="-122"/>
@@ -14493,7 +14493,7 @@
             <a:r>
               <a:rPr lang="en-US" sz="3400" b="1" dirty="0">
                 <a:solidFill>
-                  <a:srgbClr val="243041"/>
+                  <a:srgbClr val="111111"/>
                 </a:solidFill>
                 <a:latin typeface="Pretendard" pitchFamily="34" charset="0"/>
                 <a:ea typeface="Pretendard" pitchFamily="34" charset="-122"/>
@@ -14552,7 +14552,7 @@
             <a:r>
               <a:rPr lang="en-US" sz="2200" dirty="0">
                 <a:solidFill>
-                  <a:srgbClr val="243041"/>
+                  <a:srgbClr val="111111"/>
                 </a:solidFill>
                 <a:latin typeface="Pretendard" pitchFamily="34" charset="0"/>
                 <a:ea typeface="Pretendard" pitchFamily="34" charset="-122"/>
@@ -14611,7 +14611,7 @@
             <a:r>
               <a:rPr lang="en-US" sz="2200" dirty="0">
                 <a:solidFill>
-                  <a:srgbClr val="243041"/>
+                  <a:srgbClr val="111111"/>
                 </a:solidFill>
                 <a:latin typeface="Pretendard" pitchFamily="34" charset="0"/>
                 <a:ea typeface="Pretendard" pitchFamily="34" charset="-122"/>
@@ -15438,7 +15438,7 @@
             <a:r>
               <a:rPr lang="en-US" sz="3400" b="1" dirty="0">
                 <a:solidFill>
-                  <a:srgbClr val="243041"/>
+                  <a:srgbClr val="111111"/>
                 </a:solidFill>
                 <a:latin typeface="Pretendard" pitchFamily="34" charset="0"/>
                 <a:ea typeface="Pretendard" pitchFamily="34" charset="-122"/>
@@ -15554,7 +15554,7 @@
             <a:r>
               <a:rPr lang="en-US" sz="2200" dirty="0">
                 <a:solidFill>
-                  <a:srgbClr val="243041"/>
+                  <a:srgbClr val="111111"/>
                 </a:solidFill>
                 <a:latin typeface="Pretendard" pitchFamily="34" charset="0"/>
                 <a:ea typeface="Pretendard" pitchFamily="34" charset="-122"/>
@@ -15670,7 +15670,7 @@
             <a:r>
               <a:rPr lang="en-US" sz="2200" dirty="0">
                 <a:solidFill>
-                  <a:srgbClr val="243041"/>
+                  <a:srgbClr val="111111"/>
                 </a:solidFill>
                 <a:latin typeface="Pretendard" pitchFamily="34" charset="0"/>
                 <a:ea typeface="Pretendard" pitchFamily="34" charset="-122"/>
@@ -15786,7 +15786,7 @@
             <a:r>
               <a:rPr lang="en-US" sz="2200" dirty="0">
                 <a:solidFill>
-                  <a:srgbClr val="243041"/>
+                  <a:srgbClr val="111111"/>
                 </a:solidFill>
                 <a:latin typeface="Pretendard" pitchFamily="34" charset="0"/>
                 <a:ea typeface="Pretendard" pitchFamily="34" charset="-122"/>
@@ -15902,7 +15902,7 @@
             <a:r>
               <a:rPr lang="en-US" sz="2200" dirty="0">
                 <a:solidFill>
-                  <a:srgbClr val="243041"/>
+                  <a:srgbClr val="111111"/>
                 </a:solidFill>
                 <a:latin typeface="Pretendard" pitchFamily="34" charset="0"/>
                 <a:ea typeface="Pretendard" pitchFamily="34" charset="-122"/>
@@ -16729,7 +16729,7 @@
             <a:r>
               <a:rPr lang="en-US" sz="3400" b="1" dirty="0">
                 <a:solidFill>
-                  <a:srgbClr val="243041"/>
+                  <a:srgbClr val="111111"/>
                 </a:solidFill>
                 <a:latin typeface="Pretendard" pitchFamily="34" charset="0"/>
                 <a:ea typeface="Pretendard" pitchFamily="34" charset="-122"/>
@@ -16845,7 +16845,7 @@
             <a:r>
               <a:rPr lang="en-US" sz="2200" dirty="0">
                 <a:solidFill>
-                  <a:srgbClr val="243041"/>
+                  <a:srgbClr val="111111"/>
                 </a:solidFill>
                 <a:latin typeface="Pretendard" pitchFamily="34" charset="0"/>
                 <a:ea typeface="Pretendard" pitchFamily="34" charset="-122"/>
@@ -16961,7 +16961,7 @@
             <a:r>
               <a:rPr lang="en-US" sz="2200" dirty="0">
                 <a:solidFill>
-                  <a:srgbClr val="243041"/>
+                  <a:srgbClr val="111111"/>
                 </a:solidFill>
                 <a:latin typeface="Pretendard" pitchFamily="34" charset="0"/>
                 <a:ea typeface="Pretendard" pitchFamily="34" charset="-122"/>
@@ -17077,7 +17077,7 @@
             <a:r>
               <a:rPr lang="en-US" sz="2200" dirty="0">
                 <a:solidFill>
-                  <a:srgbClr val="243041"/>
+                  <a:srgbClr val="111111"/>
                 </a:solidFill>
                 <a:latin typeface="Pretendard" pitchFamily="34" charset="0"/>
                 <a:ea typeface="Pretendard" pitchFamily="34" charset="-122"/>
@@ -17193,7 +17193,7 @@
             <a:r>
               <a:rPr lang="en-US" sz="2200" dirty="0">
                 <a:solidFill>
-                  <a:srgbClr val="243041"/>
+                  <a:srgbClr val="111111"/>
                 </a:solidFill>
                 <a:latin typeface="Pretendard" pitchFamily="34" charset="0"/>
                 <a:ea typeface="Pretendard" pitchFamily="34" charset="-122"/>
@@ -17528,7 +17528,7 @@
             <a:r>
               <a:rPr lang="en-US" sz="3400" b="1" dirty="0">
                 <a:solidFill>
-                  <a:srgbClr val="243041"/>
+                  <a:srgbClr val="111111"/>
                 </a:solidFill>
                 <a:latin typeface="Pretendard" pitchFamily="34" charset="0"/>
                 <a:ea typeface="Pretendard" pitchFamily="34" charset="-122"/>
@@ -17587,7 +17587,7 @@
             <a:r>
               <a:rPr lang="en-US" sz="2200" dirty="0">
                 <a:solidFill>
-                  <a:srgbClr val="243041"/>
+                  <a:srgbClr val="111111"/>
                 </a:solidFill>
                 <a:latin typeface="Pretendard" pitchFamily="34" charset="0"/>
                 <a:ea typeface="Pretendard" pitchFamily="34" charset="-122"/>
@@ -17627,7 +17627,7 @@
             <a:r>
               <a:rPr lang="en-US" sz="2200" dirty="0">
                 <a:solidFill>
-                  <a:srgbClr val="243041"/>
+                  <a:srgbClr val="111111"/>
                 </a:solidFill>
                 <a:latin typeface="Pretendard" pitchFamily="34" charset="0"/>
                 <a:ea typeface="Pretendard" pitchFamily="34" charset="-122"/>
@@ -17667,7 +17667,7 @@
             <a:r>
               <a:rPr lang="en-US" sz="2200" dirty="0">
                 <a:solidFill>
-                  <a:srgbClr val="243041"/>
+                  <a:srgbClr val="111111"/>
                 </a:solidFill>
                 <a:latin typeface="Pretendard" pitchFamily="34" charset="0"/>
                 <a:ea typeface="Pretendard" pitchFamily="34" charset="-122"/>
@@ -18306,7 +18306,7 @@
             <a:r>
               <a:rPr lang="en-US" sz="3400" b="1" dirty="0">
                 <a:solidFill>
-                  <a:srgbClr val="243041"/>
+                  <a:srgbClr val="111111"/>
                 </a:solidFill>
                 <a:latin typeface="Pretendard" pitchFamily="34" charset="0"/>
                 <a:ea typeface="Pretendard" pitchFamily="34" charset="-122"/>
@@ -18510,7 +18510,7 @@
                       <a:r>
                         <a:rPr lang="en-US" sz="1800" b="1" dirty="0">
                           <a:solidFill>
-                            <a:srgbClr val="243041"/>
+                            <a:srgbClr val="111111"/>
                           </a:solidFill>
                           <a:latin typeface="Pretendard" pitchFamily="34" charset="0"/>
                           <a:ea typeface="Pretendard" pitchFamily="34" charset="-122"/>
@@ -18575,7 +18575,7 @@
                       <a:r>
                         <a:rPr lang="en-US" sz="1800" dirty="0">
                           <a:solidFill>
-                            <a:srgbClr val="243041"/>
+                            <a:srgbClr val="111111"/>
                           </a:solidFill>
                           <a:latin typeface="Pretendard" pitchFamily="34" charset="0"/>
                           <a:ea typeface="Pretendard" pitchFamily="34" charset="-122"/>
@@ -18642,7 +18642,7 @@
                       <a:r>
                         <a:rPr lang="en-US" sz="1800" b="1" dirty="0">
                           <a:solidFill>
-                            <a:srgbClr val="243041"/>
+                            <a:srgbClr val="111111"/>
                           </a:solidFill>
                           <a:latin typeface="Pretendard" pitchFamily="34" charset="0"/>
                           <a:ea typeface="Pretendard" pitchFamily="34" charset="-122"/>
@@ -18712,7 +18712,7 @@
                       <a:r>
                         <a:rPr lang="en-US" sz="1800" dirty="0">
                           <a:solidFill>
-                            <a:srgbClr val="243041"/>
+                            <a:srgbClr val="111111"/>
                           </a:solidFill>
                           <a:latin typeface="Pretendard" pitchFamily="34" charset="0"/>
                           <a:ea typeface="Pretendard" pitchFamily="34" charset="-122"/>
@@ -18823,7 +18823,7 @@
             <a:r>
               <a:rPr lang="en-US" sz="1800" dirty="0">
                 <a:solidFill>
-                  <a:srgbClr val="243041"/>
+                  <a:srgbClr val="111111"/>
                 </a:solidFill>
                 <a:latin typeface="Pretendard" pitchFamily="34" charset="0"/>
                 <a:ea typeface="Pretendard" pitchFamily="34" charset="-122"/>
@@ -18863,7 +18863,7 @@
             <a:r>
               <a:rPr lang="en-US" sz="1800" dirty="0">
                 <a:solidFill>
-                  <a:srgbClr val="243041"/>
+                  <a:srgbClr val="111111"/>
                 </a:solidFill>
                 <a:latin typeface="Pretendard" pitchFamily="34" charset="0"/>
                 <a:ea typeface="Pretendard" pitchFamily="34" charset="-122"/>
@@ -19585,7 +19585,7 @@
             <a:r>
               <a:rPr lang="en-US" sz="3400" b="1" dirty="0">
                 <a:solidFill>
-                  <a:srgbClr val="243041"/>
+                  <a:srgbClr val="111111"/>
                 </a:solidFill>
                 <a:latin typeface="Pretendard" pitchFamily="34" charset="0"/>
                 <a:ea typeface="Pretendard" pitchFamily="34" charset="-122"/>
@@ -19701,7 +19701,7 @@
             <a:r>
               <a:rPr lang="en-US" sz="2200" dirty="0">
                 <a:solidFill>
-                  <a:srgbClr val="243041"/>
+                  <a:srgbClr val="111111"/>
                 </a:solidFill>
                 <a:latin typeface="Pretendard" pitchFamily="34" charset="0"/>
                 <a:ea typeface="Pretendard" pitchFamily="34" charset="-122"/>
@@ -19817,7 +19817,7 @@
             <a:r>
               <a:rPr lang="en-US" sz="2200" dirty="0">
                 <a:solidFill>
-                  <a:srgbClr val="243041"/>
+                  <a:srgbClr val="111111"/>
                 </a:solidFill>
                 <a:latin typeface="Pretendard" pitchFamily="34" charset="0"/>
                 <a:ea typeface="Pretendard" pitchFamily="34" charset="-122"/>
@@ -19933,7 +19933,7 @@
             <a:r>
               <a:rPr lang="en-US" sz="2200" dirty="0">
                 <a:solidFill>
-                  <a:srgbClr val="243041"/>
+                  <a:srgbClr val="111111"/>
                 </a:solidFill>
                 <a:latin typeface="Pretendard" pitchFamily="34" charset="0"/>
                 <a:ea typeface="Pretendard" pitchFamily="34" charset="-122"/>
@@ -20185,7 +20185,7 @@
             <a:r>
               <a:rPr lang="en-US" sz="3800" b="1" dirty="0">
                 <a:solidFill>
-                  <a:srgbClr val="243041"/>
+                  <a:srgbClr val="111111"/>
                 </a:solidFill>
                 <a:latin typeface="Pretendard" pitchFamily="34" charset="0"/>
                 <a:ea typeface="Pretendard" pitchFamily="34" charset="-122"/>
@@ -20227,7 +20227,7 @@
             <a:r>
               <a:rPr lang="en-US" sz="2200" dirty="0">
                 <a:solidFill>
-                  <a:srgbClr val="243041"/>
+                  <a:srgbClr val="111111"/>
                 </a:solidFill>
                 <a:latin typeface="Pretendard" pitchFamily="34" charset="0"/>
                 <a:ea typeface="Pretendard" pitchFamily="34" charset="-122"/>
@@ -20591,7 +20591,7 @@
             <a:r>
               <a:rPr lang="en-US" sz="3400" b="1" dirty="0">
                 <a:solidFill>
-                  <a:srgbClr val="243041"/>
+                  <a:srgbClr val="111111"/>
                 </a:solidFill>
                 <a:latin typeface="Pretendard" pitchFamily="34" charset="0"/>
                 <a:ea typeface="Pretendard" pitchFamily="34" charset="-122"/>
@@ -20633,7 +20633,7 @@
             <a:r>
               <a:rPr lang="en-US" sz="2200" b="1" dirty="0">
                 <a:solidFill>
-                  <a:srgbClr val="243041"/>
+                  <a:srgbClr val="111111"/>
                 </a:solidFill>
                 <a:latin typeface="Pretendard" pitchFamily="34" charset="0"/>
                 <a:ea typeface="Pretendard" pitchFamily="34" charset="-122"/>
@@ -20692,7 +20692,7 @@
             <a:r>
               <a:rPr lang="en-US" sz="2200" dirty="0">
                 <a:solidFill>
-                  <a:srgbClr val="243041"/>
+                  <a:srgbClr val="111111"/>
                 </a:solidFill>
                 <a:latin typeface="Pretendard" pitchFamily="34" charset="0"/>
                 <a:ea typeface="Pretendard" pitchFamily="34" charset="-122"/>
@@ -20732,7 +20732,7 @@
             <a:r>
               <a:rPr lang="en-US" sz="2200" dirty="0">
                 <a:solidFill>
-                  <a:srgbClr val="243041"/>
+                  <a:srgbClr val="111111"/>
                 </a:solidFill>
                 <a:latin typeface="Pretendard" pitchFamily="34" charset="0"/>
                 <a:ea typeface="Pretendard" pitchFamily="34" charset="-122"/>
@@ -20772,7 +20772,7 @@
             <a:r>
               <a:rPr lang="en-US" sz="2200" dirty="0">
                 <a:solidFill>
-                  <a:srgbClr val="243041"/>
+                  <a:srgbClr val="111111"/>
                 </a:solidFill>
                 <a:latin typeface="Pretendard" pitchFamily="34" charset="0"/>
                 <a:ea typeface="Pretendard" pitchFamily="34" charset="-122"/>
@@ -20812,7 +20812,7 @@
             <a:r>
               <a:rPr lang="en-US" sz="2200" dirty="0">
                 <a:solidFill>
-                  <a:srgbClr val="243041"/>
+                  <a:srgbClr val="111111"/>
                 </a:solidFill>
                 <a:latin typeface="Pretendard" pitchFamily="34" charset="0"/>
                 <a:ea typeface="Pretendard" pitchFamily="34" charset="-122"/>
@@ -21504,7 +21504,7 @@
             <a:r>
               <a:rPr lang="en-US" sz="3400" b="1" dirty="0">
                 <a:solidFill>
-                  <a:srgbClr val="243041"/>
+                  <a:srgbClr val="111111"/>
                 </a:solidFill>
                 <a:latin typeface="Pretendard" pitchFamily="34" charset="0"/>
                 <a:ea typeface="Pretendard" pitchFamily="34" charset="-122"/>
@@ -21620,7 +21620,7 @@
             <a:r>
               <a:rPr lang="en-US" sz="2200" dirty="0">
                 <a:solidFill>
-                  <a:srgbClr val="243041"/>
+                  <a:srgbClr val="111111"/>
                 </a:solidFill>
                 <a:latin typeface="Pretendard" pitchFamily="34" charset="0"/>
                 <a:ea typeface="Pretendard" pitchFamily="34" charset="-122"/>
@@ -21736,7 +21736,7 @@
             <a:r>
               <a:rPr lang="en-US" sz="2200" dirty="0">
                 <a:solidFill>
-                  <a:srgbClr val="243041"/>
+                  <a:srgbClr val="111111"/>
                 </a:solidFill>
                 <a:latin typeface="Pretendard" pitchFamily="34" charset="0"/>
                 <a:ea typeface="Pretendard" pitchFamily="34" charset="-122"/>
@@ -21852,7 +21852,7 @@
             <a:r>
               <a:rPr lang="en-US" sz="2200" dirty="0">
                 <a:solidFill>
-                  <a:srgbClr val="243041"/>
+                  <a:srgbClr val="111111"/>
                 </a:solidFill>
                 <a:latin typeface="Pretendard" pitchFamily="34" charset="0"/>
                 <a:ea typeface="Pretendard" pitchFamily="34" charset="-122"/>
@@ -22077,7 +22077,7 @@
             <a:r>
               <a:rPr lang="en-US" sz="3400" b="1" dirty="0">
                 <a:solidFill>
-                  <a:srgbClr val="243041"/>
+                  <a:srgbClr val="111111"/>
                 </a:solidFill>
                 <a:latin typeface="Pretendard" pitchFamily="34" charset="0"/>
                 <a:ea typeface="Pretendard" pitchFamily="34" charset="-122"/>
@@ -22136,7 +22136,7 @@
             <a:r>
               <a:rPr lang="en-US" sz="2200" dirty="0">
                 <a:solidFill>
-                  <a:srgbClr val="243041"/>
+                  <a:srgbClr val="111111"/>
                 </a:solidFill>
                 <a:latin typeface="Pretendard" pitchFamily="34" charset="0"/>
                 <a:ea typeface="Pretendard" pitchFamily="34" charset="-122"/>
@@ -22195,7 +22195,7 @@
             <a:r>
               <a:rPr lang="en-US" sz="2200" dirty="0">
                 <a:solidFill>
-                  <a:srgbClr val="243041"/>
+                  <a:srgbClr val="111111"/>
                 </a:solidFill>
                 <a:latin typeface="Pretendard" pitchFamily="34" charset="0"/>
                 <a:ea typeface="Pretendard" pitchFamily="34" charset="-122"/>
@@ -22887,7 +22887,7 @@
             <a:r>
               <a:rPr lang="en-US" sz="3400" b="1" dirty="0">
                 <a:solidFill>
-                  <a:srgbClr val="243041"/>
+                  <a:srgbClr val="111111"/>
                 </a:solidFill>
                 <a:latin typeface="Pretendard" pitchFamily="34" charset="0"/>
                 <a:ea typeface="Pretendard" pitchFamily="34" charset="-122"/>
@@ -23003,7 +23003,7 @@
             <a:r>
               <a:rPr lang="en-US" sz="2200" dirty="0">
                 <a:solidFill>
-                  <a:srgbClr val="243041"/>
+                  <a:srgbClr val="111111"/>
                 </a:solidFill>
                 <a:latin typeface="Pretendard" pitchFamily="34" charset="0"/>
                 <a:ea typeface="Pretendard" pitchFamily="34" charset="-122"/>
@@ -23119,7 +23119,7 @@
             <a:r>
               <a:rPr lang="en-US" sz="2200" dirty="0">
                 <a:solidFill>
-                  <a:srgbClr val="243041"/>
+                  <a:srgbClr val="111111"/>
                 </a:solidFill>
                 <a:latin typeface="Pretendard" pitchFamily="34" charset="0"/>
                 <a:ea typeface="Pretendard" pitchFamily="34" charset="-122"/>
@@ -23235,7 +23235,7 @@
             <a:r>
               <a:rPr lang="en-US" sz="2200" dirty="0">
                 <a:solidFill>
-                  <a:srgbClr val="243041"/>
+                  <a:srgbClr val="111111"/>
                 </a:solidFill>
                 <a:latin typeface="Pretendard" pitchFamily="34" charset="0"/>
                 <a:ea typeface="Pretendard" pitchFamily="34" charset="-122"/>
@@ -23460,7 +23460,7 @@
             <a:r>
               <a:rPr lang="en-US" sz="3400" b="1" dirty="0">
                 <a:solidFill>
-                  <a:srgbClr val="243041"/>
+                  <a:srgbClr val="111111"/>
                 </a:solidFill>
                 <a:latin typeface="Pretendard" pitchFamily="34" charset="0"/>
                 <a:ea typeface="Pretendard" pitchFamily="34" charset="-122"/>
@@ -23519,7 +23519,7 @@
             <a:r>
               <a:rPr lang="en-US" sz="2200" dirty="0">
                 <a:solidFill>
-                  <a:srgbClr val="243041"/>
+                  <a:srgbClr val="111111"/>
                 </a:solidFill>
                 <a:latin typeface="Pretendard" pitchFamily="34" charset="0"/>
                 <a:ea typeface="Pretendard" pitchFamily="34" charset="-122"/>
@@ -23578,7 +23578,7 @@
             <a:r>
               <a:rPr lang="en-US" sz="2200" dirty="0">
                 <a:solidFill>
-                  <a:srgbClr val="243041"/>
+                  <a:srgbClr val="111111"/>
                 </a:solidFill>
                 <a:latin typeface="Pretendard" pitchFamily="34" charset="0"/>
                 <a:ea typeface="Pretendard" pitchFamily="34" charset="-122"/>
@@ -23803,7 +23803,7 @@
             <a:r>
               <a:rPr lang="en-US" sz="3400" b="1" dirty="0">
                 <a:solidFill>
-                  <a:srgbClr val="243041"/>
+                  <a:srgbClr val="111111"/>
                 </a:solidFill>
                 <a:latin typeface="Pretendard" pitchFamily="34" charset="0"/>
                 <a:ea typeface="Pretendard" pitchFamily="34" charset="-122"/>
@@ -23862,7 +23862,7 @@
             <a:r>
               <a:rPr lang="en-US" sz="2200" dirty="0">
                 <a:solidFill>
-                  <a:srgbClr val="243041"/>
+                  <a:srgbClr val="111111"/>
                 </a:solidFill>
                 <a:latin typeface="Pretendard" pitchFamily="34" charset="0"/>
                 <a:ea typeface="Pretendard" pitchFamily="34" charset="-122"/>
@@ -23921,7 +23921,7 @@
             <a:r>
               <a:rPr lang="en-US" sz="2200" dirty="0">
                 <a:solidFill>
-                  <a:srgbClr val="243041"/>
+                  <a:srgbClr val="111111"/>
                 </a:solidFill>
                 <a:latin typeface="Pretendard" pitchFamily="34" charset="0"/>
                 <a:ea typeface="Pretendard" pitchFamily="34" charset="-122"/>
@@ -23946,13 +23946,13 @@
   <a:themeElements>
     <a:clrScheme name="Office">
       <a:dk1>
-        <a:srgbClr val="243041"/>
+        <a:srgbClr val="111111"/>
       </a:dk1>
       <a:lt1>
         <a:srgbClr val="E9EEF5"/>
       </a:lt1>
       <a:dk2>
-        <a:srgbClr val="536579"/>
+        <a:srgbClr val="898989"/>
       </a:dk2>
       <a:lt2>
         <a:srgbClr val="E9EEF5"/>
@@ -23967,13 +23967,13 @@
         <a:srgbClr val="4F6F8F"/>
       </a:accent3>
       <a:accent4>
-        <a:srgbClr val="536579"/>
+        <a:srgbClr val="898989"/>
       </a:accent4>
       <a:accent5>
         <a:srgbClr val="D5DCE7"/>
       </a:accent5>
       <a:accent6>
-        <a:srgbClr val="243041"/>
+        <a:srgbClr val="111111"/>
       </a:accent6>
       <a:hlink>
         <a:srgbClr val="4F6F8F"/>

--- a/docs/theme-preview/pptx/newmorphism.pptx
+++ b/docs/theme-preview/pptx/newmorphism.pptx
@@ -3602,6 +3602,44 @@
         </p:nvSpPr>
         <p:spPr>
           <a:xfrm>
+            <a:off x="9375343" y="384048"/>
+            <a:ext cx="1737360" cy="310896"/>
+          </a:xfrm>
+          <a:prstGeom prst="roundRect">
+            <a:avLst>
+              <a:gd name="adj" fmla="val 14706"/>
+            </a:avLst>
+          </a:prstGeom>
+          <a:solidFill>
+            <a:srgbClr val="F8FAFC">
+              <a:alpha val="72000"/>
+            </a:srgbClr>
+          </a:solidFill>
+          <a:ln w="12700">
+            <a:solidFill>
+              <a:srgbClr val="FFFFFF">
+                <a:alpha val="28000"/>
+              </a:srgbClr>
+            </a:solidFill>
+            <a:prstDash val="solid"/>
+          </a:ln>
+          <a:effectLst>
+            <a:outerShdw sx="100000" sy="100000" kx="0" ky="0" algn="bl" rotWithShape="0" blurRad="15240" dist="50800" dir="2700000">
+              <a:srgbClr val="B8C3D2">
+                <a:alpha val="16000"/>
+              </a:srgbClr>
+            </a:outerShdw>
+          </a:effectLst>
+        </p:spPr>
+      </p:sp>
+      <p:sp>
+        <p:nvSpPr>
+          <p:cNvPr id="3" name="Shape 1"/>
+          <p:cNvSpPr/>
+          <p:nvPr/>
+        </p:nvSpPr>
+        <p:spPr>
+          <a:xfrm>
             <a:off x="10362895" y="502920"/>
             <a:ext cx="822960" cy="822960"/>
           </a:xfrm>
@@ -3632,7 +3670,7 @@
       </p:sp>
       <p:sp>
         <p:nvSpPr>
-          <p:cNvPr id="3" name="Shape 1"/>
+          <p:cNvPr id="4" name="Shape 2"/>
           <p:cNvSpPr/>
           <p:nvPr/>
         </p:nvSpPr>
@@ -3666,7 +3704,57 @@
       </p:sp>
       <p:sp>
         <p:nvSpPr>
-          <p:cNvPr id="4" name="Shape 2"/>
+          <p:cNvPr id="5" name="Shape 3"/>
+          <p:cNvSpPr/>
+          <p:nvPr/>
+        </p:nvSpPr>
+        <p:spPr>
+          <a:xfrm>
+            <a:off x="9265615" y="6437376"/>
+            <a:ext cx="1993392" cy="0"/>
+          </a:xfrm>
+          <a:prstGeom prst="line">
+            <a:avLst/>
+          </a:prstGeom>
+          <a:noFill/>
+          <a:ln w="12700">
+            <a:solidFill>
+              <a:srgbClr val="FFFFFF">
+                <a:alpha val="88000"/>
+              </a:srgbClr>
+            </a:solidFill>
+            <a:prstDash val="solid"/>
+          </a:ln>
+        </p:spPr>
+      </p:sp>
+      <p:sp>
+        <p:nvSpPr>
+          <p:cNvPr id="6" name="Shape 4"/>
+          <p:cNvSpPr/>
+          <p:nvPr/>
+        </p:nvSpPr>
+        <p:spPr>
+          <a:xfrm>
+            <a:off x="9338767" y="6501384"/>
+            <a:ext cx="1920240" cy="0"/>
+          </a:xfrm>
+          <a:prstGeom prst="line">
+            <a:avLst/>
+          </a:prstGeom>
+          <a:noFill/>
+          <a:ln w="12700">
+            <a:solidFill>
+              <a:srgbClr val="B8C3D2">
+                <a:alpha val="64000"/>
+              </a:srgbClr>
+            </a:solidFill>
+            <a:prstDash val="solid"/>
+          </a:ln>
+        </p:spPr>
+      </p:sp>
+      <p:sp>
+        <p:nvSpPr>
+          <p:cNvPr id="7" name="Shape 5"/>
           <p:cNvSpPr/>
           <p:nvPr/>
         </p:nvSpPr>
@@ -3693,7 +3781,7 @@
       </p:sp>
       <p:sp>
         <p:nvSpPr>
-          <p:cNvPr id="5" name="mdpr:mdpr-design-grammar-b3a462:title:__title:mdpr-design-grammar-b3a462"/>
+          <p:cNvPr id="8" name="mdpr:mdpr-design-grammar-b3a462:title:__title:mdpr-design-grammar-b3a462"/>
           <p:cNvSpPr txBox="1"/>
           <p:nvPr/>
         </p:nvSpPr>
@@ -3773,6 +3861,44 @@
         </p:nvSpPr>
         <p:spPr>
           <a:xfrm>
+            <a:off x="9375343" y="384048"/>
+            <a:ext cx="1737360" cy="310896"/>
+          </a:xfrm>
+          <a:prstGeom prst="roundRect">
+            <a:avLst>
+              <a:gd name="adj" fmla="val 14706"/>
+            </a:avLst>
+          </a:prstGeom>
+          <a:solidFill>
+            <a:srgbClr val="F8FAFC">
+              <a:alpha val="72000"/>
+            </a:srgbClr>
+          </a:solidFill>
+          <a:ln w="12700">
+            <a:solidFill>
+              <a:srgbClr val="FFFFFF">
+                <a:alpha val="28000"/>
+              </a:srgbClr>
+            </a:solidFill>
+            <a:prstDash val="solid"/>
+          </a:ln>
+          <a:effectLst>
+            <a:outerShdw sx="100000" sy="100000" kx="0" ky="0" algn="bl" rotWithShape="0" blurRad="15240" dist="50800" dir="2700000">
+              <a:srgbClr val="B8C3D2">
+                <a:alpha val="16000"/>
+              </a:srgbClr>
+            </a:outerShdw>
+          </a:effectLst>
+        </p:spPr>
+      </p:sp>
+      <p:sp>
+        <p:nvSpPr>
+          <p:cNvPr id="3" name="Shape 1"/>
+          <p:cNvSpPr/>
+          <p:nvPr/>
+        </p:nvSpPr>
+        <p:spPr>
+          <a:xfrm>
             <a:off x="10362895" y="502920"/>
             <a:ext cx="822960" cy="822960"/>
           </a:xfrm>
@@ -3803,7 +3929,7 @@
       </p:sp>
       <p:sp>
         <p:nvSpPr>
-          <p:cNvPr id="3" name="Shape 1"/>
+          <p:cNvPr id="4" name="Shape 2"/>
           <p:cNvSpPr/>
           <p:nvPr/>
         </p:nvSpPr>
@@ -3837,7 +3963,57 @@
       </p:sp>
       <p:sp>
         <p:nvSpPr>
-          <p:cNvPr id="4" name="Shape 2"/>
+          <p:cNvPr id="5" name="Shape 3"/>
+          <p:cNvSpPr/>
+          <p:nvPr/>
+        </p:nvSpPr>
+        <p:spPr>
+          <a:xfrm>
+            <a:off x="9265615" y="6437376"/>
+            <a:ext cx="1993392" cy="0"/>
+          </a:xfrm>
+          <a:prstGeom prst="line">
+            <a:avLst/>
+          </a:prstGeom>
+          <a:noFill/>
+          <a:ln w="12700">
+            <a:solidFill>
+              <a:srgbClr val="FFFFFF">
+                <a:alpha val="88000"/>
+              </a:srgbClr>
+            </a:solidFill>
+            <a:prstDash val="solid"/>
+          </a:ln>
+        </p:spPr>
+      </p:sp>
+      <p:sp>
+        <p:nvSpPr>
+          <p:cNvPr id="6" name="Shape 4"/>
+          <p:cNvSpPr/>
+          <p:nvPr/>
+        </p:nvSpPr>
+        <p:spPr>
+          <a:xfrm>
+            <a:off x="9338767" y="6501384"/>
+            <a:ext cx="1920240" cy="0"/>
+          </a:xfrm>
+          <a:prstGeom prst="line">
+            <a:avLst/>
+          </a:prstGeom>
+          <a:noFill/>
+          <a:ln w="12700">
+            <a:solidFill>
+              <a:srgbClr val="B8C3D2">
+                <a:alpha val="64000"/>
+              </a:srgbClr>
+            </a:solidFill>
+            <a:prstDash val="solid"/>
+          </a:ln>
+        </p:spPr>
+      </p:sp>
+      <p:sp>
+        <p:nvSpPr>
+          <p:cNvPr id="7" name="Shape 5"/>
           <p:cNvSpPr/>
           <p:nvPr/>
         </p:nvSpPr>
@@ -3864,7 +4040,7 @@
       </p:sp>
       <p:sp>
         <p:nvSpPr>
-          <p:cNvPr id="5" name="Shape 3"/>
+          <p:cNvPr id="8" name="Shape 6"/>
           <p:cNvSpPr/>
           <p:nvPr/>
         </p:nvSpPr>
@@ -3891,7 +4067,7 @@
       </p:sp>
       <p:sp>
         <p:nvSpPr>
-          <p:cNvPr id="6" name="Shape 4"/>
+          <p:cNvPr id="9" name="Shape 7"/>
           <p:cNvSpPr/>
           <p:nvPr/>
         </p:nvSpPr>
@@ -3918,7 +4094,7 @@
       </p:sp>
       <p:sp>
         <p:nvSpPr>
-          <p:cNvPr id="7" name="mdpr:2-2-a9df10:title:__title:2-2-a9df10"/>
+          <p:cNvPr id="10" name="mdpr:2-2-a9df10:title:__title:2-2-a9df10"/>
           <p:cNvSpPr txBox="1"/>
           <p:nvPr/>
         </p:nvSpPr>
@@ -3960,7 +4136,7 @@
       </p:sp>
       <p:sp>
         <p:nvSpPr>
-          <p:cNvPr id="8" name="mdpr:2-2-a9df10:left:block-10-chunk-2"/>
+          <p:cNvPr id="11" name="mdpr:2-2-a9df10:left:block-10-chunk-2"/>
           <p:cNvSpPr txBox="1"/>
           <p:nvPr/>
         </p:nvSpPr>
@@ -4019,7 +4195,7 @@
       </p:sp>
       <p:sp>
         <p:nvSpPr>
-          <p:cNvPr id="9" name="mdpr:2-2-a9df10:right:block-10-chunk-2"/>
+          <p:cNvPr id="12" name="mdpr:2-2-a9df10:right:block-10-chunk-2"/>
           <p:cNvSpPr txBox="1"/>
           <p:nvPr/>
         </p:nvSpPr>
@@ -4116,6 +4292,44 @@
         </p:nvSpPr>
         <p:spPr>
           <a:xfrm>
+            <a:off x="9375343" y="384048"/>
+            <a:ext cx="1737360" cy="310896"/>
+          </a:xfrm>
+          <a:prstGeom prst="roundRect">
+            <a:avLst>
+              <a:gd name="adj" fmla="val 14706"/>
+            </a:avLst>
+          </a:prstGeom>
+          <a:solidFill>
+            <a:srgbClr val="F8FAFC">
+              <a:alpha val="72000"/>
+            </a:srgbClr>
+          </a:solidFill>
+          <a:ln w="12700">
+            <a:solidFill>
+              <a:srgbClr val="FFFFFF">
+                <a:alpha val="28000"/>
+              </a:srgbClr>
+            </a:solidFill>
+            <a:prstDash val="solid"/>
+          </a:ln>
+          <a:effectLst>
+            <a:outerShdw sx="100000" sy="100000" kx="0" ky="0" algn="bl" rotWithShape="0" blurRad="15240" dist="50800" dir="2700000">
+              <a:srgbClr val="B8C3D2">
+                <a:alpha val="16000"/>
+              </a:srgbClr>
+            </a:outerShdw>
+          </a:effectLst>
+        </p:spPr>
+      </p:sp>
+      <p:sp>
+        <p:nvSpPr>
+          <p:cNvPr id="3" name="Shape 1"/>
+          <p:cNvSpPr/>
+          <p:nvPr/>
+        </p:nvSpPr>
+        <p:spPr>
+          <a:xfrm>
             <a:off x="10362895" y="502920"/>
             <a:ext cx="822960" cy="822960"/>
           </a:xfrm>
@@ -4146,7 +4360,7 @@
       </p:sp>
       <p:sp>
         <p:nvSpPr>
-          <p:cNvPr id="3" name="Shape 1"/>
+          <p:cNvPr id="4" name="Shape 2"/>
           <p:cNvSpPr/>
           <p:nvPr/>
         </p:nvSpPr>
@@ -4180,7 +4394,57 @@
       </p:sp>
       <p:sp>
         <p:nvSpPr>
-          <p:cNvPr id="4" name="Shape 2"/>
+          <p:cNvPr id="5" name="Shape 3"/>
+          <p:cNvSpPr/>
+          <p:nvPr/>
+        </p:nvSpPr>
+        <p:spPr>
+          <a:xfrm>
+            <a:off x="9265615" y="6437376"/>
+            <a:ext cx="1993392" cy="0"/>
+          </a:xfrm>
+          <a:prstGeom prst="line">
+            <a:avLst/>
+          </a:prstGeom>
+          <a:noFill/>
+          <a:ln w="12700">
+            <a:solidFill>
+              <a:srgbClr val="FFFFFF">
+                <a:alpha val="88000"/>
+              </a:srgbClr>
+            </a:solidFill>
+            <a:prstDash val="solid"/>
+          </a:ln>
+        </p:spPr>
+      </p:sp>
+      <p:sp>
+        <p:nvSpPr>
+          <p:cNvPr id="6" name="Shape 4"/>
+          <p:cNvSpPr/>
+          <p:nvPr/>
+        </p:nvSpPr>
+        <p:spPr>
+          <a:xfrm>
+            <a:off x="9338767" y="6501384"/>
+            <a:ext cx="1920240" cy="0"/>
+          </a:xfrm>
+          <a:prstGeom prst="line">
+            <a:avLst/>
+          </a:prstGeom>
+          <a:noFill/>
+          <a:ln w="12700">
+            <a:solidFill>
+              <a:srgbClr val="B8C3D2">
+                <a:alpha val="64000"/>
+              </a:srgbClr>
+            </a:solidFill>
+            <a:prstDash val="solid"/>
+          </a:ln>
+        </p:spPr>
+      </p:sp>
+      <p:sp>
+        <p:nvSpPr>
+          <p:cNvPr id="7" name="Shape 5"/>
           <p:cNvSpPr/>
           <p:nvPr/>
         </p:nvSpPr>
@@ -4207,7 +4471,7 @@
       </p:sp>
       <p:sp>
         <p:nvSpPr>
-          <p:cNvPr id="5" name="mdpr:pipeline-diagram-51792c:title:__title:pipeline-diagram-51792c"/>
+          <p:cNvPr id="8" name="mdpr:pipeline-diagram-51792c:title:__title:pipeline-diagram-51792c"/>
           <p:cNvSpPr txBox="1"/>
           <p:nvPr/>
         </p:nvSpPr>
@@ -4249,7 +4513,7 @@
       </p:sp>
       <p:sp>
         <p:nvSpPr>
-          <p:cNvPr id="6" name="Shape 4"/>
+          <p:cNvPr id="9" name="Shape 7"/>
           <p:cNvSpPr/>
           <p:nvPr/>
         </p:nvSpPr>
@@ -4273,7 +4537,7 @@
       </p:sp>
       <p:sp>
         <p:nvSpPr>
-          <p:cNvPr id="7" name="Shape 5"/>
+          <p:cNvPr id="10" name="Shape 8"/>
           <p:cNvSpPr/>
           <p:nvPr/>
         </p:nvSpPr>
@@ -4297,7 +4561,7 @@
       </p:sp>
       <p:sp>
         <p:nvSpPr>
-          <p:cNvPr id="8" name="Shape 6"/>
+          <p:cNvPr id="11" name="Shape 9"/>
           <p:cNvSpPr/>
           <p:nvPr/>
         </p:nvSpPr>
@@ -4321,7 +4585,7 @@
       </p:sp>
       <p:sp>
         <p:nvSpPr>
-          <p:cNvPr id="9" name="Shape 7"/>
+          <p:cNvPr id="12" name="Shape 10"/>
           <p:cNvSpPr/>
           <p:nvPr/>
         </p:nvSpPr>
@@ -4345,7 +4609,7 @@
       </p:sp>
       <p:sp>
         <p:nvSpPr>
-          <p:cNvPr id="10" name="Shape 8"/>
+          <p:cNvPr id="13" name="Shape 11"/>
           <p:cNvSpPr/>
           <p:nvPr/>
         </p:nvSpPr>
@@ -4369,7 +4633,7 @@
       </p:sp>
       <p:sp>
         <p:nvSpPr>
-          <p:cNvPr id="11" name="Shape 9"/>
+          <p:cNvPr id="14" name="Shape 12"/>
           <p:cNvSpPr/>
           <p:nvPr/>
         </p:nvSpPr>
@@ -4403,7 +4667,7 @@
       </p:sp>
       <p:sp>
         <p:nvSpPr>
-          <p:cNvPr id="12" name="Shape 10"/>
+          <p:cNvPr id="15" name="Shape 13"/>
           <p:cNvSpPr/>
           <p:nvPr/>
         </p:nvSpPr>
@@ -4430,7 +4694,7 @@
       </p:sp>
       <p:sp>
         <p:nvSpPr>
-          <p:cNvPr id="13" name="Shape 11"/>
+          <p:cNvPr id="16" name="Shape 14"/>
           <p:cNvSpPr/>
           <p:nvPr/>
         </p:nvSpPr>
@@ -4457,7 +4721,7 @@
       </p:sp>
       <p:sp>
         <p:nvSpPr>
-          <p:cNvPr id="14" name="Text 12"/>
+          <p:cNvPr id="17" name="Text 15"/>
           <p:cNvSpPr txBox="1"/>
           <p:nvPr/>
         </p:nvSpPr>
@@ -4501,7 +4765,7 @@
       </p:sp>
       <p:sp>
         <p:nvSpPr>
-          <p:cNvPr id="15" name="Text 13"/>
+          <p:cNvPr id="18" name="Text 16"/>
           <p:cNvSpPr txBox="1"/>
           <p:nvPr/>
         </p:nvSpPr>
@@ -4545,7 +4809,7 @@
       </p:sp>
       <p:sp>
         <p:nvSpPr>
-          <p:cNvPr id="16" name="Shape 14"/>
+          <p:cNvPr id="19" name="Shape 17"/>
           <p:cNvSpPr/>
           <p:nvPr/>
         </p:nvSpPr>
@@ -4579,7 +4843,7 @@
       </p:sp>
       <p:sp>
         <p:nvSpPr>
-          <p:cNvPr id="17" name="Shape 15"/>
+          <p:cNvPr id="20" name="Shape 18"/>
           <p:cNvSpPr/>
           <p:nvPr/>
         </p:nvSpPr>
@@ -4606,7 +4870,7 @@
       </p:sp>
       <p:sp>
         <p:nvSpPr>
-          <p:cNvPr id="18" name="Shape 16"/>
+          <p:cNvPr id="21" name="Shape 19"/>
           <p:cNvSpPr/>
           <p:nvPr/>
         </p:nvSpPr>
@@ -4633,7 +4897,7 @@
       </p:sp>
       <p:sp>
         <p:nvSpPr>
-          <p:cNvPr id="19" name="Text 17"/>
+          <p:cNvPr id="22" name="Text 20"/>
           <p:cNvSpPr txBox="1"/>
           <p:nvPr/>
         </p:nvSpPr>
@@ -4677,7 +4941,7 @@
       </p:sp>
       <p:sp>
         <p:nvSpPr>
-          <p:cNvPr id="20" name="Text 18"/>
+          <p:cNvPr id="23" name="Text 21"/>
           <p:cNvSpPr txBox="1"/>
           <p:nvPr/>
         </p:nvSpPr>
@@ -4721,7 +4985,7 @@
       </p:sp>
       <p:sp>
         <p:nvSpPr>
-          <p:cNvPr id="21" name="Shape 19"/>
+          <p:cNvPr id="24" name="Shape 22"/>
           <p:cNvSpPr/>
           <p:nvPr/>
         </p:nvSpPr>
@@ -4755,7 +5019,7 @@
       </p:sp>
       <p:sp>
         <p:nvSpPr>
-          <p:cNvPr id="22" name="Shape 20"/>
+          <p:cNvPr id="25" name="Shape 23"/>
           <p:cNvSpPr/>
           <p:nvPr/>
         </p:nvSpPr>
@@ -4782,7 +5046,7 @@
       </p:sp>
       <p:sp>
         <p:nvSpPr>
-          <p:cNvPr id="23" name="Shape 21"/>
+          <p:cNvPr id="26" name="Shape 24"/>
           <p:cNvSpPr/>
           <p:nvPr/>
         </p:nvSpPr>
@@ -4809,7 +5073,7 @@
       </p:sp>
       <p:sp>
         <p:nvSpPr>
-          <p:cNvPr id="24" name="Text 22"/>
+          <p:cNvPr id="27" name="Text 25"/>
           <p:cNvSpPr txBox="1"/>
           <p:nvPr/>
         </p:nvSpPr>
@@ -4853,7 +5117,7 @@
       </p:sp>
       <p:sp>
         <p:nvSpPr>
-          <p:cNvPr id="25" name="Text 23"/>
+          <p:cNvPr id="28" name="Text 26"/>
           <p:cNvSpPr txBox="1"/>
           <p:nvPr/>
         </p:nvSpPr>
@@ -4897,7 +5161,7 @@
       </p:sp>
       <p:sp>
         <p:nvSpPr>
-          <p:cNvPr id="26" name="Shape 24"/>
+          <p:cNvPr id="29" name="Shape 27"/>
           <p:cNvSpPr/>
           <p:nvPr/>
         </p:nvSpPr>
@@ -4931,7 +5195,7 @@
       </p:sp>
       <p:sp>
         <p:nvSpPr>
-          <p:cNvPr id="27" name="Shape 25"/>
+          <p:cNvPr id="30" name="Shape 28"/>
           <p:cNvSpPr/>
           <p:nvPr/>
         </p:nvSpPr>
@@ -4958,7 +5222,7 @@
       </p:sp>
       <p:sp>
         <p:nvSpPr>
-          <p:cNvPr id="28" name="Shape 26"/>
+          <p:cNvPr id="31" name="Shape 29"/>
           <p:cNvSpPr/>
           <p:nvPr/>
         </p:nvSpPr>
@@ -4985,7 +5249,7 @@
       </p:sp>
       <p:sp>
         <p:nvSpPr>
-          <p:cNvPr id="29" name="Text 27"/>
+          <p:cNvPr id="32" name="Text 30"/>
           <p:cNvSpPr txBox="1"/>
           <p:nvPr/>
         </p:nvSpPr>
@@ -5029,7 +5293,7 @@
       </p:sp>
       <p:sp>
         <p:nvSpPr>
-          <p:cNvPr id="30" name="Text 28"/>
+          <p:cNvPr id="33" name="Text 31"/>
           <p:cNvSpPr txBox="1"/>
           <p:nvPr/>
         </p:nvSpPr>
@@ -5073,7 +5337,7 @@
       </p:sp>
       <p:sp>
         <p:nvSpPr>
-          <p:cNvPr id="31" name="Shape 29"/>
+          <p:cNvPr id="34" name="Shape 32"/>
           <p:cNvSpPr/>
           <p:nvPr/>
         </p:nvSpPr>
@@ -5107,7 +5371,7 @@
       </p:sp>
       <p:sp>
         <p:nvSpPr>
-          <p:cNvPr id="32" name="Shape 30"/>
+          <p:cNvPr id="35" name="Shape 33"/>
           <p:cNvSpPr/>
           <p:nvPr/>
         </p:nvSpPr>
@@ -5134,7 +5398,7 @@
       </p:sp>
       <p:sp>
         <p:nvSpPr>
-          <p:cNvPr id="33" name="Shape 31"/>
+          <p:cNvPr id="36" name="Shape 34"/>
           <p:cNvSpPr/>
           <p:nvPr/>
         </p:nvSpPr>
@@ -5161,7 +5425,7 @@
       </p:sp>
       <p:sp>
         <p:nvSpPr>
-          <p:cNvPr id="34" name="Text 32"/>
+          <p:cNvPr id="37" name="Text 35"/>
           <p:cNvSpPr txBox="1"/>
           <p:nvPr/>
         </p:nvSpPr>
@@ -5205,7 +5469,7 @@
       </p:sp>
       <p:sp>
         <p:nvSpPr>
-          <p:cNvPr id="35" name="Text 33"/>
+          <p:cNvPr id="38" name="Text 36"/>
           <p:cNvSpPr txBox="1"/>
           <p:nvPr/>
         </p:nvSpPr>
@@ -5249,7 +5513,7 @@
       </p:sp>
       <p:sp>
         <p:nvSpPr>
-          <p:cNvPr id="36" name="Shape 34"/>
+          <p:cNvPr id="39" name="Shape 37"/>
           <p:cNvSpPr/>
           <p:nvPr/>
         </p:nvSpPr>
@@ -5283,7 +5547,7 @@
       </p:sp>
       <p:sp>
         <p:nvSpPr>
-          <p:cNvPr id="37" name="Shape 35"/>
+          <p:cNvPr id="40" name="Shape 38"/>
           <p:cNvSpPr/>
           <p:nvPr/>
         </p:nvSpPr>
@@ -5310,7 +5574,7 @@
       </p:sp>
       <p:sp>
         <p:nvSpPr>
-          <p:cNvPr id="38" name="Shape 36"/>
+          <p:cNvPr id="41" name="Shape 39"/>
           <p:cNvSpPr/>
           <p:nvPr/>
         </p:nvSpPr>
@@ -5337,7 +5601,7 @@
       </p:sp>
       <p:sp>
         <p:nvSpPr>
-          <p:cNvPr id="39" name="Text 37"/>
+          <p:cNvPr id="42" name="Text 40"/>
           <p:cNvSpPr txBox="1"/>
           <p:nvPr/>
         </p:nvSpPr>
@@ -5381,7 +5645,7 @@
       </p:sp>
       <p:sp>
         <p:nvSpPr>
-          <p:cNvPr id="40" name="Text 38"/>
+          <p:cNvPr id="43" name="Text 41"/>
           <p:cNvSpPr txBox="1"/>
           <p:nvPr/>
         </p:nvSpPr>
@@ -5463,6 +5727,44 @@
         </p:nvSpPr>
         <p:spPr>
           <a:xfrm>
+            <a:off x="9375343" y="384048"/>
+            <a:ext cx="1737360" cy="310896"/>
+          </a:xfrm>
+          <a:prstGeom prst="roundRect">
+            <a:avLst>
+              <a:gd name="adj" fmla="val 14706"/>
+            </a:avLst>
+          </a:prstGeom>
+          <a:solidFill>
+            <a:srgbClr val="F8FAFC">
+              <a:alpha val="72000"/>
+            </a:srgbClr>
+          </a:solidFill>
+          <a:ln w="12700">
+            <a:solidFill>
+              <a:srgbClr val="FFFFFF">
+                <a:alpha val="28000"/>
+              </a:srgbClr>
+            </a:solidFill>
+            <a:prstDash val="solid"/>
+          </a:ln>
+          <a:effectLst>
+            <a:outerShdw sx="100000" sy="100000" kx="0" ky="0" algn="bl" rotWithShape="0" blurRad="15240" dist="50800" dir="2700000">
+              <a:srgbClr val="B8C3D2">
+                <a:alpha val="16000"/>
+              </a:srgbClr>
+            </a:outerShdw>
+          </a:effectLst>
+        </p:spPr>
+      </p:sp>
+      <p:sp>
+        <p:nvSpPr>
+          <p:cNvPr id="3" name="Shape 1"/>
+          <p:cNvSpPr/>
+          <p:nvPr/>
+        </p:nvSpPr>
+        <p:spPr>
+          <a:xfrm>
             <a:off x="10362895" y="502920"/>
             <a:ext cx="822960" cy="822960"/>
           </a:xfrm>
@@ -5493,7 +5795,7 @@
       </p:sp>
       <p:sp>
         <p:nvSpPr>
-          <p:cNvPr id="3" name="Shape 1"/>
+          <p:cNvPr id="4" name="Shape 2"/>
           <p:cNvSpPr/>
           <p:nvPr/>
         </p:nvSpPr>
@@ -5527,7 +5829,57 @@
       </p:sp>
       <p:sp>
         <p:nvSpPr>
-          <p:cNvPr id="4" name="Shape 2"/>
+          <p:cNvPr id="5" name="Shape 3"/>
+          <p:cNvSpPr/>
+          <p:nvPr/>
+        </p:nvSpPr>
+        <p:spPr>
+          <a:xfrm>
+            <a:off x="9265615" y="6437376"/>
+            <a:ext cx="1993392" cy="0"/>
+          </a:xfrm>
+          <a:prstGeom prst="line">
+            <a:avLst/>
+          </a:prstGeom>
+          <a:noFill/>
+          <a:ln w="12700">
+            <a:solidFill>
+              <a:srgbClr val="FFFFFF">
+                <a:alpha val="88000"/>
+              </a:srgbClr>
+            </a:solidFill>
+            <a:prstDash val="solid"/>
+          </a:ln>
+        </p:spPr>
+      </p:sp>
+      <p:sp>
+        <p:nvSpPr>
+          <p:cNvPr id="6" name="Shape 4"/>
+          <p:cNvSpPr/>
+          <p:nvPr/>
+        </p:nvSpPr>
+        <p:spPr>
+          <a:xfrm>
+            <a:off x="9338767" y="6501384"/>
+            <a:ext cx="1920240" cy="0"/>
+          </a:xfrm>
+          <a:prstGeom prst="line">
+            <a:avLst/>
+          </a:prstGeom>
+          <a:noFill/>
+          <a:ln w="12700">
+            <a:solidFill>
+              <a:srgbClr val="B8C3D2">
+                <a:alpha val="64000"/>
+              </a:srgbClr>
+            </a:solidFill>
+            <a:prstDash val="solid"/>
+          </a:ln>
+        </p:spPr>
+      </p:sp>
+      <p:sp>
+        <p:nvSpPr>
+          <p:cNvPr id="7" name="Shape 5"/>
           <p:cNvSpPr/>
           <p:nvPr/>
         </p:nvSpPr>
@@ -5554,7 +5906,7 @@
       </p:sp>
       <p:sp>
         <p:nvSpPr>
-          <p:cNvPr id="5" name="Shape 3"/>
+          <p:cNvPr id="8" name="Shape 6"/>
           <p:cNvSpPr/>
           <p:nvPr/>
         </p:nvSpPr>
@@ -5592,7 +5944,7 @@
       </p:sp>
       <p:sp>
         <p:nvSpPr>
-          <p:cNvPr id="6" name="Shape 4"/>
+          <p:cNvPr id="9" name="Shape 7"/>
           <p:cNvSpPr/>
           <p:nvPr/>
         </p:nvSpPr>
@@ -5630,7 +5982,7 @@
       </p:sp>
       <p:sp>
         <p:nvSpPr>
-          <p:cNvPr id="7" name="Shape 5"/>
+          <p:cNvPr id="10" name="Shape 8"/>
           <p:cNvSpPr/>
           <p:nvPr/>
         </p:nvSpPr>
@@ -5661,7 +6013,7 @@
       </p:sp>
       <p:pic>
         <p:nvPicPr>
-          <p:cNvPr id="8" name="Image 0" descr="preencoded.png">    </p:cNvPr>
+          <p:cNvPr id="11" name="Image 0" descr="preencoded.png">    </p:cNvPr>
           <p:cNvPicPr>
             <a:picLocks noChangeAspect="1"/>
           </p:cNvPicPr>
@@ -5691,7 +6043,7 @@
       </p:pic>
       <p:sp>
         <p:nvSpPr>
-          <p:cNvPr id="9" name="Shape 6"/>
+          <p:cNvPr id="12" name="Shape 9"/>
           <p:cNvSpPr/>
           <p:nvPr/>
         </p:nvSpPr>
@@ -5729,7 +6081,7 @@
       </p:sp>
       <p:sp>
         <p:nvSpPr>
-          <p:cNvPr id="10" name="Shape 7"/>
+          <p:cNvPr id="13" name="Shape 10"/>
           <p:cNvSpPr/>
           <p:nvPr/>
         </p:nvSpPr>
@@ -5767,7 +6119,7 @@
       </p:sp>
       <p:sp>
         <p:nvSpPr>
-          <p:cNvPr id="11" name="Shape 8"/>
+          <p:cNvPr id="14" name="Shape 11"/>
           <p:cNvSpPr/>
           <p:nvPr/>
         </p:nvSpPr>
@@ -5798,7 +6150,7 @@
       </p:sp>
       <p:pic>
         <p:nvPicPr>
-          <p:cNvPr id="12" name="Image 1" descr="preencoded.png">    </p:cNvPr>
+          <p:cNvPr id="15" name="Image 1" descr="preencoded.png">    </p:cNvPr>
           <p:cNvPicPr>
             <a:picLocks noChangeAspect="1"/>
           </p:cNvPicPr>
@@ -5828,7 +6180,7 @@
       </p:pic>
       <p:sp>
         <p:nvSpPr>
-          <p:cNvPr id="13" name="Shape 9"/>
+          <p:cNvPr id="16" name="Shape 12"/>
           <p:cNvSpPr/>
           <p:nvPr/>
         </p:nvSpPr>
@@ -5866,7 +6218,7 @@
       </p:sp>
       <p:sp>
         <p:nvSpPr>
-          <p:cNvPr id="14" name="Shape 10"/>
+          <p:cNvPr id="17" name="Shape 13"/>
           <p:cNvSpPr/>
           <p:nvPr/>
         </p:nvSpPr>
@@ -5904,7 +6256,7 @@
       </p:sp>
       <p:sp>
         <p:nvSpPr>
-          <p:cNvPr id="15" name="Shape 11"/>
+          <p:cNvPr id="18" name="Shape 14"/>
           <p:cNvSpPr/>
           <p:nvPr/>
         </p:nvSpPr>
@@ -5935,7 +6287,7 @@
       </p:sp>
       <p:pic>
         <p:nvPicPr>
-          <p:cNvPr id="16" name="Image 2" descr="preencoded.png">    </p:cNvPr>
+          <p:cNvPr id="19" name="Image 2" descr="preencoded.png">    </p:cNvPr>
           <p:cNvPicPr>
             <a:picLocks noChangeAspect="1"/>
           </p:cNvPicPr>
@@ -5965,7 +6317,7 @@
       </p:pic>
       <p:sp>
         <p:nvSpPr>
-          <p:cNvPr id="17" name="Shape 12"/>
+          <p:cNvPr id="20" name="Shape 15"/>
           <p:cNvSpPr/>
           <p:nvPr/>
         </p:nvSpPr>
@@ -6003,7 +6355,7 @@
       </p:sp>
       <p:sp>
         <p:nvSpPr>
-          <p:cNvPr id="18" name="Shape 13"/>
+          <p:cNvPr id="21" name="Shape 16"/>
           <p:cNvSpPr/>
           <p:nvPr/>
         </p:nvSpPr>
@@ -6041,7 +6393,7 @@
       </p:sp>
       <p:sp>
         <p:nvSpPr>
-          <p:cNvPr id="19" name="Shape 14"/>
+          <p:cNvPr id="22" name="Shape 17"/>
           <p:cNvSpPr/>
           <p:nvPr/>
         </p:nvSpPr>
@@ -6072,7 +6424,7 @@
       </p:sp>
       <p:pic>
         <p:nvPicPr>
-          <p:cNvPr id="20" name="Image 3" descr="preencoded.png">    </p:cNvPr>
+          <p:cNvPr id="23" name="Image 3" descr="preencoded.png">    </p:cNvPr>
           <p:cNvPicPr>
             <a:picLocks noChangeAspect="1"/>
           </p:cNvPicPr>
@@ -6102,7 +6454,7 @@
       </p:pic>
       <p:sp>
         <p:nvSpPr>
-          <p:cNvPr id="21" name="Shape 15"/>
+          <p:cNvPr id="24" name="Shape 18"/>
           <p:cNvSpPr/>
           <p:nvPr/>
         </p:nvSpPr>
@@ -6129,7 +6481,7 @@
       </p:sp>
       <p:sp>
         <p:nvSpPr>
-          <p:cNvPr id="22" name="Shape 16"/>
+          <p:cNvPr id="25" name="Shape 19"/>
           <p:cNvSpPr/>
           <p:nvPr/>
         </p:nvSpPr>
@@ -6156,7 +6508,7 @@
       </p:sp>
       <p:sp>
         <p:nvSpPr>
-          <p:cNvPr id="23" name="Shape 17"/>
+          <p:cNvPr id="26" name="Shape 20"/>
           <p:cNvSpPr/>
           <p:nvPr/>
         </p:nvSpPr>
@@ -6183,7 +6535,7 @@
       </p:sp>
       <p:sp>
         <p:nvSpPr>
-          <p:cNvPr id="24" name="Shape 18"/>
+          <p:cNvPr id="27" name="Shape 21"/>
           <p:cNvSpPr/>
           <p:nvPr/>
         </p:nvSpPr>
@@ -6210,7 +6562,7 @@
       </p:sp>
       <p:sp>
         <p:nvSpPr>
-          <p:cNvPr id="25" name="mdpr:1-2-e3669a:title:__title:1-2-e3669a"/>
+          <p:cNvPr id="28" name="mdpr:1-2-e3669a:title:__title:1-2-e3669a"/>
           <p:cNvSpPr txBox="1"/>
           <p:nvPr/>
         </p:nvSpPr>
@@ -6252,7 +6604,7 @@
       </p:sp>
       <p:sp>
         <p:nvSpPr>
-          <p:cNvPr id="26" name="Shape 20"/>
+          <p:cNvPr id="29" name="Shape 23"/>
           <p:cNvSpPr/>
           <p:nvPr/>
         </p:nvSpPr>
@@ -6279,7 +6631,7 @@
       </p:sp>
       <p:pic>
         <p:nvPicPr>
-          <p:cNvPr id="27" name="Image 4" descr="article icon from tabler-icons (MIT)">    </p:cNvPr>
+          <p:cNvPr id="30" name="Image 4" descr="article icon from tabler-icons (MIT)">    </p:cNvPr>
           <p:cNvPicPr>
             <a:picLocks noChangeAspect="1"/>
           </p:cNvPicPr>
@@ -6309,7 +6661,7 @@
       </p:pic>
       <p:sp>
         <p:nvSpPr>
-          <p:cNvPr id="28" name="mdpr:1-2-e3669a:item-1:block-15-chunk-1"/>
+          <p:cNvPr id="31" name="mdpr:1-2-e3669a:item-1:block-15-chunk-1"/>
           <p:cNvSpPr txBox="1"/>
           <p:nvPr/>
         </p:nvSpPr>
@@ -6368,7 +6720,7 @@
       </p:sp>
       <p:sp>
         <p:nvSpPr>
-          <p:cNvPr id="29" name="Shape 22"/>
+          <p:cNvPr id="32" name="Shape 25"/>
           <p:cNvSpPr/>
           <p:nvPr/>
         </p:nvSpPr>
@@ -6395,7 +6747,7 @@
       </p:sp>
       <p:pic>
         <p:nvPicPr>
-          <p:cNvPr id="30" name="Image 5" descr="table icon from tabler-icons (MIT)">    </p:cNvPr>
+          <p:cNvPr id="33" name="Image 5" descr="table icon from tabler-icons (MIT)">    </p:cNvPr>
           <p:cNvPicPr>
             <a:picLocks noChangeAspect="1"/>
           </p:cNvPicPr>
@@ -6425,7 +6777,7 @@
       </p:pic>
       <p:sp>
         <p:nvSpPr>
-          <p:cNvPr id="31" name="mdpr:1-2-e3669a:item-2:block-15-chunk-1"/>
+          <p:cNvPr id="34" name="mdpr:1-2-e3669a:item-2:block-15-chunk-1"/>
           <p:cNvSpPr txBox="1"/>
           <p:nvPr/>
         </p:nvSpPr>
@@ -6484,7 +6836,7 @@
       </p:sp>
       <p:sp>
         <p:nvSpPr>
-          <p:cNvPr id="32" name="Shape 24"/>
+          <p:cNvPr id="35" name="Shape 27"/>
           <p:cNvSpPr/>
           <p:nvPr/>
         </p:nvSpPr>
@@ -6511,7 +6863,7 @@
       </p:sp>
       <p:pic>
         <p:nvPicPr>
-          <p:cNvPr id="33" name="Image 6" descr="chart icon from tabler-icons (MIT)">    </p:cNvPr>
+          <p:cNvPr id="36" name="Image 6" descr="chart icon from tabler-icons (MIT)">    </p:cNvPr>
           <p:cNvPicPr>
             <a:picLocks noChangeAspect="1"/>
           </p:cNvPicPr>
@@ -6541,7 +6893,7 @@
       </p:pic>
       <p:sp>
         <p:nvSpPr>
-          <p:cNvPr id="34" name="mdpr:1-2-e3669a:item-3:block-15-chunk-1"/>
+          <p:cNvPr id="37" name="mdpr:1-2-e3669a:item-3:block-15-chunk-1"/>
           <p:cNvSpPr txBox="1"/>
           <p:nvPr/>
         </p:nvSpPr>
@@ -6600,7 +6952,7 @@
       </p:sp>
       <p:sp>
         <p:nvSpPr>
-          <p:cNvPr id="35" name="Shape 26"/>
+          <p:cNvPr id="38" name="Shape 29"/>
           <p:cNvSpPr/>
           <p:nvPr/>
         </p:nvSpPr>
@@ -6627,7 +6979,7 @@
       </p:sp>
       <p:pic>
         <p:nvPicPr>
-          <p:cNvPr id="36" name="Image 7" descr="flow icon from tabler-icons (MIT)">    </p:cNvPr>
+          <p:cNvPr id="39" name="Image 7" descr="flow icon from tabler-icons (MIT)">    </p:cNvPr>
           <p:cNvPicPr>
             <a:picLocks noChangeAspect="1"/>
           </p:cNvPicPr>
@@ -6657,7 +7009,7 @@
       </p:pic>
       <p:sp>
         <p:nvSpPr>
-          <p:cNvPr id="37" name="mdpr:1-2-e3669a:item-4:block-15-chunk-1"/>
+          <p:cNvPr id="40" name="mdpr:1-2-e3669a:item-4:block-15-chunk-1"/>
           <p:cNvSpPr txBox="1"/>
           <p:nvPr/>
         </p:nvSpPr>
@@ -6754,6 +7106,44 @@
         </p:nvSpPr>
         <p:spPr>
           <a:xfrm>
+            <a:off x="9375343" y="384048"/>
+            <a:ext cx="1737360" cy="310896"/>
+          </a:xfrm>
+          <a:prstGeom prst="roundRect">
+            <a:avLst>
+              <a:gd name="adj" fmla="val 14706"/>
+            </a:avLst>
+          </a:prstGeom>
+          <a:solidFill>
+            <a:srgbClr val="F8FAFC">
+              <a:alpha val="72000"/>
+            </a:srgbClr>
+          </a:solidFill>
+          <a:ln w="12700">
+            <a:solidFill>
+              <a:srgbClr val="FFFFFF">
+                <a:alpha val="28000"/>
+              </a:srgbClr>
+            </a:solidFill>
+            <a:prstDash val="solid"/>
+          </a:ln>
+          <a:effectLst>
+            <a:outerShdw sx="100000" sy="100000" kx="0" ky="0" algn="bl" rotWithShape="0" blurRad="15240" dist="50800" dir="2700000">
+              <a:srgbClr val="B8C3D2">
+                <a:alpha val="16000"/>
+              </a:srgbClr>
+            </a:outerShdw>
+          </a:effectLst>
+        </p:spPr>
+      </p:sp>
+      <p:sp>
+        <p:nvSpPr>
+          <p:cNvPr id="3" name="Shape 1"/>
+          <p:cNvSpPr/>
+          <p:nvPr/>
+        </p:nvSpPr>
+        <p:spPr>
+          <a:xfrm>
             <a:off x="10362895" y="502920"/>
             <a:ext cx="822960" cy="822960"/>
           </a:xfrm>
@@ -6784,7 +7174,7 @@
       </p:sp>
       <p:sp>
         <p:nvSpPr>
-          <p:cNvPr id="3" name="Shape 1"/>
+          <p:cNvPr id="4" name="Shape 2"/>
           <p:cNvSpPr/>
           <p:nvPr/>
         </p:nvSpPr>
@@ -6818,7 +7208,57 @@
       </p:sp>
       <p:sp>
         <p:nvSpPr>
-          <p:cNvPr id="4" name="Shape 2"/>
+          <p:cNvPr id="5" name="Shape 3"/>
+          <p:cNvSpPr/>
+          <p:nvPr/>
+        </p:nvSpPr>
+        <p:spPr>
+          <a:xfrm>
+            <a:off x="9265615" y="6437376"/>
+            <a:ext cx="1993392" cy="0"/>
+          </a:xfrm>
+          <a:prstGeom prst="line">
+            <a:avLst/>
+          </a:prstGeom>
+          <a:noFill/>
+          <a:ln w="12700">
+            <a:solidFill>
+              <a:srgbClr val="FFFFFF">
+                <a:alpha val="88000"/>
+              </a:srgbClr>
+            </a:solidFill>
+            <a:prstDash val="solid"/>
+          </a:ln>
+        </p:spPr>
+      </p:sp>
+      <p:sp>
+        <p:nvSpPr>
+          <p:cNvPr id="6" name="Shape 4"/>
+          <p:cNvSpPr/>
+          <p:nvPr/>
+        </p:nvSpPr>
+        <p:spPr>
+          <a:xfrm>
+            <a:off x="9338767" y="6501384"/>
+            <a:ext cx="1920240" cy="0"/>
+          </a:xfrm>
+          <a:prstGeom prst="line">
+            <a:avLst/>
+          </a:prstGeom>
+          <a:noFill/>
+          <a:ln w="12700">
+            <a:solidFill>
+              <a:srgbClr val="B8C3D2">
+                <a:alpha val="64000"/>
+              </a:srgbClr>
+            </a:solidFill>
+            <a:prstDash val="solid"/>
+          </a:ln>
+        </p:spPr>
+      </p:sp>
+      <p:sp>
+        <p:nvSpPr>
+          <p:cNvPr id="7" name="Shape 5"/>
           <p:cNvSpPr/>
           <p:nvPr/>
         </p:nvSpPr>
@@ -6845,7 +7285,7 @@
       </p:sp>
       <p:sp>
         <p:nvSpPr>
-          <p:cNvPr id="5" name="Shape 3"/>
+          <p:cNvPr id="8" name="Shape 6"/>
           <p:cNvSpPr/>
           <p:nvPr/>
         </p:nvSpPr>
@@ -6872,7 +7312,7 @@
       </p:sp>
       <p:sp>
         <p:nvSpPr>
-          <p:cNvPr id="6" name="Shape 4"/>
+          <p:cNvPr id="9" name="Shape 7"/>
           <p:cNvSpPr/>
           <p:nvPr/>
         </p:nvSpPr>
@@ -6899,7 +7339,7 @@
       </p:sp>
       <p:sp>
         <p:nvSpPr>
-          <p:cNvPr id="7" name="mdpr:2-2-c23e9b:title:__title:2-2-c23e9b"/>
+          <p:cNvPr id="10" name="mdpr:2-2-c23e9b:title:__title:2-2-c23e9b"/>
           <p:cNvSpPr txBox="1"/>
           <p:nvPr/>
         </p:nvSpPr>
@@ -6941,7 +7381,7 @@
       </p:sp>
       <p:sp>
         <p:nvSpPr>
-          <p:cNvPr id="8" name="mdpr:2-2-c23e9b:left:block-15-chunk-2"/>
+          <p:cNvPr id="11" name="mdpr:2-2-c23e9b:left:block-15-chunk-2"/>
           <p:cNvSpPr txBox="1"/>
           <p:nvPr/>
         </p:nvSpPr>
@@ -7000,7 +7440,7 @@
       </p:sp>
       <p:sp>
         <p:nvSpPr>
-          <p:cNvPr id="9" name="mdpr:2-2-c23e9b:right:block-15-chunk-2"/>
+          <p:cNvPr id="12" name="mdpr:2-2-c23e9b:right:block-15-chunk-2"/>
           <p:cNvSpPr txBox="1"/>
           <p:nvPr/>
         </p:nvSpPr>
@@ -7097,6 +7537,44 @@
         </p:nvSpPr>
         <p:spPr>
           <a:xfrm>
+            <a:off x="9375343" y="384048"/>
+            <a:ext cx="1737360" cy="310896"/>
+          </a:xfrm>
+          <a:prstGeom prst="roundRect">
+            <a:avLst>
+              <a:gd name="adj" fmla="val 14706"/>
+            </a:avLst>
+          </a:prstGeom>
+          <a:solidFill>
+            <a:srgbClr val="F8FAFC">
+              <a:alpha val="72000"/>
+            </a:srgbClr>
+          </a:solidFill>
+          <a:ln w="12700">
+            <a:solidFill>
+              <a:srgbClr val="FFFFFF">
+                <a:alpha val="28000"/>
+              </a:srgbClr>
+            </a:solidFill>
+            <a:prstDash val="solid"/>
+          </a:ln>
+          <a:effectLst>
+            <a:outerShdw sx="100000" sy="100000" kx="0" ky="0" algn="bl" rotWithShape="0" blurRad="15240" dist="50800" dir="2700000">
+              <a:srgbClr val="B8C3D2">
+                <a:alpha val="16000"/>
+              </a:srgbClr>
+            </a:outerShdw>
+          </a:effectLst>
+        </p:spPr>
+      </p:sp>
+      <p:sp>
+        <p:nvSpPr>
+          <p:cNvPr id="3" name="Shape 1"/>
+          <p:cNvSpPr/>
+          <p:nvPr/>
+        </p:nvSpPr>
+        <p:spPr>
+          <a:xfrm>
             <a:off x="10362895" y="502920"/>
             <a:ext cx="822960" cy="822960"/>
           </a:xfrm>
@@ -7127,7 +7605,7 @@
       </p:sp>
       <p:sp>
         <p:nvSpPr>
-          <p:cNvPr id="3" name="Shape 1"/>
+          <p:cNvPr id="4" name="Shape 2"/>
           <p:cNvSpPr/>
           <p:nvPr/>
         </p:nvSpPr>
@@ -7161,7 +7639,57 @@
       </p:sp>
       <p:sp>
         <p:nvSpPr>
-          <p:cNvPr id="4" name="Shape 2"/>
+          <p:cNvPr id="5" name="Shape 3"/>
+          <p:cNvSpPr/>
+          <p:nvPr/>
+        </p:nvSpPr>
+        <p:spPr>
+          <a:xfrm>
+            <a:off x="9265615" y="6437376"/>
+            <a:ext cx="1993392" cy="0"/>
+          </a:xfrm>
+          <a:prstGeom prst="line">
+            <a:avLst/>
+          </a:prstGeom>
+          <a:noFill/>
+          <a:ln w="12700">
+            <a:solidFill>
+              <a:srgbClr val="FFFFFF">
+                <a:alpha val="88000"/>
+              </a:srgbClr>
+            </a:solidFill>
+            <a:prstDash val="solid"/>
+          </a:ln>
+        </p:spPr>
+      </p:sp>
+      <p:sp>
+        <p:nvSpPr>
+          <p:cNvPr id="6" name="Shape 4"/>
+          <p:cNvSpPr/>
+          <p:nvPr/>
+        </p:nvSpPr>
+        <p:spPr>
+          <a:xfrm>
+            <a:off x="9338767" y="6501384"/>
+            <a:ext cx="1920240" cy="0"/>
+          </a:xfrm>
+          <a:prstGeom prst="line">
+            <a:avLst/>
+          </a:prstGeom>
+          <a:noFill/>
+          <a:ln w="12700">
+            <a:solidFill>
+              <a:srgbClr val="B8C3D2">
+                <a:alpha val="64000"/>
+              </a:srgbClr>
+            </a:solidFill>
+            <a:prstDash val="solid"/>
+          </a:ln>
+        </p:spPr>
+      </p:sp>
+      <p:sp>
+        <p:nvSpPr>
+          <p:cNvPr id="7" name="Shape 5"/>
           <p:cNvSpPr/>
           <p:nvPr/>
         </p:nvSpPr>
@@ -7188,7 +7716,7 @@
       </p:sp>
       <p:sp>
         <p:nvSpPr>
-          <p:cNvPr id="5" name="Shape 3"/>
+          <p:cNvPr id="8" name="Shape 6"/>
           <p:cNvSpPr/>
           <p:nvPr/>
         </p:nvSpPr>
@@ -7226,7 +7754,7 @@
       </p:sp>
       <p:sp>
         <p:nvSpPr>
-          <p:cNvPr id="6" name="Shape 4"/>
+          <p:cNvPr id="9" name="Shape 7"/>
           <p:cNvSpPr/>
           <p:nvPr/>
         </p:nvSpPr>
@@ -7264,7 +7792,7 @@
       </p:sp>
       <p:sp>
         <p:nvSpPr>
-          <p:cNvPr id="7" name="Shape 5"/>
+          <p:cNvPr id="10" name="Shape 8"/>
           <p:cNvSpPr/>
           <p:nvPr/>
         </p:nvSpPr>
@@ -7295,7 +7823,7 @@
       </p:sp>
       <p:pic>
         <p:nvPicPr>
-          <p:cNvPr id="8" name="Image 0" descr="preencoded.png">    </p:cNvPr>
+          <p:cNvPr id="11" name="Image 0" descr="preencoded.png">    </p:cNvPr>
           <p:cNvPicPr>
             <a:picLocks noChangeAspect="1"/>
           </p:cNvPicPr>
@@ -7325,7 +7853,7 @@
       </p:pic>
       <p:sp>
         <p:nvSpPr>
-          <p:cNvPr id="9" name="mdpr:table-coherence-2f9a7b:title:__title:table-coherence-2f9a7b"/>
+          <p:cNvPr id="12" name="mdpr:table-coherence-2f9a7b:title:__title:table-coherence-2f9a7b"/>
           <p:cNvSpPr txBox="1"/>
           <p:nvPr/>
         </p:nvSpPr>
@@ -8460,6 +8988,44 @@
         </p:nvSpPr>
         <p:spPr>
           <a:xfrm>
+            <a:off x="9375343" y="384048"/>
+            <a:ext cx="1737360" cy="310896"/>
+          </a:xfrm>
+          <a:prstGeom prst="roundRect">
+            <a:avLst>
+              <a:gd name="adj" fmla="val 14706"/>
+            </a:avLst>
+          </a:prstGeom>
+          <a:solidFill>
+            <a:srgbClr val="F8FAFC">
+              <a:alpha val="72000"/>
+            </a:srgbClr>
+          </a:solidFill>
+          <a:ln w="12700">
+            <a:solidFill>
+              <a:srgbClr val="FFFFFF">
+                <a:alpha val="28000"/>
+              </a:srgbClr>
+            </a:solidFill>
+            <a:prstDash val="solid"/>
+          </a:ln>
+          <a:effectLst>
+            <a:outerShdw sx="100000" sy="100000" kx="0" ky="0" algn="bl" rotWithShape="0" blurRad="15240" dist="50800" dir="2700000">
+              <a:srgbClr val="B8C3D2">
+                <a:alpha val="16000"/>
+              </a:srgbClr>
+            </a:outerShdw>
+          </a:effectLst>
+        </p:spPr>
+      </p:sp>
+      <p:sp>
+        <p:nvSpPr>
+          <p:cNvPr id="3" name="Shape 1"/>
+          <p:cNvSpPr/>
+          <p:nvPr/>
+        </p:nvSpPr>
+        <p:spPr>
+          <a:xfrm>
             <a:off x="10362895" y="502920"/>
             <a:ext cx="822960" cy="822960"/>
           </a:xfrm>
@@ -8490,7 +9056,7 @@
       </p:sp>
       <p:sp>
         <p:nvSpPr>
-          <p:cNvPr id="3" name="Shape 1"/>
+          <p:cNvPr id="4" name="Shape 2"/>
           <p:cNvSpPr/>
           <p:nvPr/>
         </p:nvSpPr>
@@ -8524,7 +9090,57 @@
       </p:sp>
       <p:sp>
         <p:nvSpPr>
-          <p:cNvPr id="4" name="Shape 2"/>
+          <p:cNvPr id="5" name="Shape 3"/>
+          <p:cNvSpPr/>
+          <p:nvPr/>
+        </p:nvSpPr>
+        <p:spPr>
+          <a:xfrm>
+            <a:off x="9265615" y="6437376"/>
+            <a:ext cx="1993392" cy="0"/>
+          </a:xfrm>
+          <a:prstGeom prst="line">
+            <a:avLst/>
+          </a:prstGeom>
+          <a:noFill/>
+          <a:ln w="12700">
+            <a:solidFill>
+              <a:srgbClr val="FFFFFF">
+                <a:alpha val="88000"/>
+              </a:srgbClr>
+            </a:solidFill>
+            <a:prstDash val="solid"/>
+          </a:ln>
+        </p:spPr>
+      </p:sp>
+      <p:sp>
+        <p:nvSpPr>
+          <p:cNvPr id="6" name="Shape 4"/>
+          <p:cNvSpPr/>
+          <p:nvPr/>
+        </p:nvSpPr>
+        <p:spPr>
+          <a:xfrm>
+            <a:off x="9338767" y="6501384"/>
+            <a:ext cx="1920240" cy="0"/>
+          </a:xfrm>
+          <a:prstGeom prst="line">
+            <a:avLst/>
+          </a:prstGeom>
+          <a:noFill/>
+          <a:ln w="12700">
+            <a:solidFill>
+              <a:srgbClr val="B8C3D2">
+                <a:alpha val="64000"/>
+              </a:srgbClr>
+            </a:solidFill>
+            <a:prstDash val="solid"/>
+          </a:ln>
+        </p:spPr>
+      </p:sp>
+      <p:sp>
+        <p:nvSpPr>
+          <p:cNvPr id="7" name="Shape 5"/>
           <p:cNvSpPr/>
           <p:nvPr/>
         </p:nvSpPr>
@@ -8551,7 +9167,7 @@
       </p:sp>
       <p:sp>
         <p:nvSpPr>
-          <p:cNvPr id="5" name="Shape 3"/>
+          <p:cNvPr id="8" name="Shape 6"/>
           <p:cNvSpPr/>
           <p:nvPr/>
         </p:nvSpPr>
@@ -8589,7 +9205,7 @@
       </p:sp>
       <p:sp>
         <p:nvSpPr>
-          <p:cNvPr id="6" name="Shape 4"/>
+          <p:cNvPr id="9" name="Shape 7"/>
           <p:cNvSpPr/>
           <p:nvPr/>
         </p:nvSpPr>
@@ -8627,7 +9243,7 @@
       </p:sp>
       <p:sp>
         <p:nvSpPr>
-          <p:cNvPr id="7" name="Shape 5"/>
+          <p:cNvPr id="10" name="Shape 8"/>
           <p:cNvSpPr/>
           <p:nvPr/>
         </p:nvSpPr>
@@ -8658,7 +9274,7 @@
       </p:sp>
       <p:pic>
         <p:nvPicPr>
-          <p:cNvPr id="8" name="Image 0" descr="preencoded.png">    </p:cNvPr>
+          <p:cNvPr id="11" name="Image 0" descr="preencoded.png">    </p:cNvPr>
           <p:cNvPicPr>
             <a:picLocks noChangeAspect="1"/>
           </p:cNvPicPr>
@@ -8688,7 +9304,7 @@
       </p:pic>
       <p:sp>
         <p:nvSpPr>
-          <p:cNvPr id="9" name="Shape 6"/>
+          <p:cNvPr id="12" name="Shape 9"/>
           <p:cNvSpPr/>
           <p:nvPr/>
         </p:nvSpPr>
@@ -8715,7 +9331,7 @@
       </p:sp>
       <p:sp>
         <p:nvSpPr>
-          <p:cNvPr id="10" name="mdpr:1-2-2ff3f0:title:__title:1-2-2ff3f0"/>
+          <p:cNvPr id="13" name="mdpr:1-2-2ff3f0:title:__title:1-2-2ff3f0"/>
           <p:cNvSpPr txBox="1"/>
           <p:nvPr/>
         </p:nvSpPr>
@@ -8757,7 +9373,7 @@
       </p:sp>
       <p:sp>
         <p:nvSpPr>
-          <p:cNvPr id="11" name="mdpr:1-2-2ff3f0:body:block-19"/>
+          <p:cNvPr id="14" name="mdpr:1-2-2ff3f0:body:block-19"/>
           <p:cNvSpPr txBox="1"/>
           <p:nvPr/>
         </p:nvSpPr>
@@ -8896,7 +9512,7 @@
       </p:sp>
       <p:graphicFrame>
         <p:nvGraphicFramePr>
-          <p:cNvPr id="12" name="Chart 0" descr=""/>
+          <p:cNvPr id="15" name="Chart 0" descr=""/>
           <p:cNvGraphicFramePr/>
           <p:nvPr/>
         </p:nvGraphicFramePr>
@@ -8950,6 +9566,44 @@
         </p:nvSpPr>
         <p:spPr>
           <a:xfrm>
+            <a:off x="9375343" y="384048"/>
+            <a:ext cx="1737360" cy="310896"/>
+          </a:xfrm>
+          <a:prstGeom prst="roundRect">
+            <a:avLst>
+              <a:gd name="adj" fmla="val 14706"/>
+            </a:avLst>
+          </a:prstGeom>
+          <a:solidFill>
+            <a:srgbClr val="F8FAFC">
+              <a:alpha val="72000"/>
+            </a:srgbClr>
+          </a:solidFill>
+          <a:ln w="12700">
+            <a:solidFill>
+              <a:srgbClr val="FFFFFF">
+                <a:alpha val="28000"/>
+              </a:srgbClr>
+            </a:solidFill>
+            <a:prstDash val="solid"/>
+          </a:ln>
+          <a:effectLst>
+            <a:outerShdw sx="100000" sy="100000" kx="0" ky="0" algn="bl" rotWithShape="0" blurRad="15240" dist="50800" dir="2700000">
+              <a:srgbClr val="B8C3D2">
+                <a:alpha val="16000"/>
+              </a:srgbClr>
+            </a:outerShdw>
+          </a:effectLst>
+        </p:spPr>
+      </p:sp>
+      <p:sp>
+        <p:nvSpPr>
+          <p:cNvPr id="3" name="Shape 1"/>
+          <p:cNvSpPr/>
+          <p:nvPr/>
+        </p:nvSpPr>
+        <p:spPr>
+          <a:xfrm>
             <a:off x="10362895" y="502920"/>
             <a:ext cx="822960" cy="822960"/>
           </a:xfrm>
@@ -8980,7 +9634,7 @@
       </p:sp>
       <p:sp>
         <p:nvSpPr>
-          <p:cNvPr id="3" name="Shape 1"/>
+          <p:cNvPr id="4" name="Shape 2"/>
           <p:cNvSpPr/>
           <p:nvPr/>
         </p:nvSpPr>
@@ -9014,7 +9668,57 @@
       </p:sp>
       <p:sp>
         <p:nvSpPr>
-          <p:cNvPr id="4" name="Shape 2"/>
+          <p:cNvPr id="5" name="Shape 3"/>
+          <p:cNvSpPr/>
+          <p:nvPr/>
+        </p:nvSpPr>
+        <p:spPr>
+          <a:xfrm>
+            <a:off x="9265615" y="6437376"/>
+            <a:ext cx="1993392" cy="0"/>
+          </a:xfrm>
+          <a:prstGeom prst="line">
+            <a:avLst/>
+          </a:prstGeom>
+          <a:noFill/>
+          <a:ln w="12700">
+            <a:solidFill>
+              <a:srgbClr val="FFFFFF">
+                <a:alpha val="88000"/>
+              </a:srgbClr>
+            </a:solidFill>
+            <a:prstDash val="solid"/>
+          </a:ln>
+        </p:spPr>
+      </p:sp>
+      <p:sp>
+        <p:nvSpPr>
+          <p:cNvPr id="6" name="Shape 4"/>
+          <p:cNvSpPr/>
+          <p:nvPr/>
+        </p:nvSpPr>
+        <p:spPr>
+          <a:xfrm>
+            <a:off x="9338767" y="6501384"/>
+            <a:ext cx="1920240" cy="0"/>
+          </a:xfrm>
+          <a:prstGeom prst="line">
+            <a:avLst/>
+          </a:prstGeom>
+          <a:noFill/>
+          <a:ln w="12700">
+            <a:solidFill>
+              <a:srgbClr val="B8C3D2">
+                <a:alpha val="64000"/>
+              </a:srgbClr>
+            </a:solidFill>
+            <a:prstDash val="solid"/>
+          </a:ln>
+        </p:spPr>
+      </p:sp>
+      <p:sp>
+        <p:nvSpPr>
+          <p:cNvPr id="7" name="Shape 5"/>
           <p:cNvSpPr/>
           <p:nvPr/>
         </p:nvSpPr>
@@ -9041,7 +9745,7 @@
       </p:sp>
       <p:sp>
         <p:nvSpPr>
-          <p:cNvPr id="5" name="Shape 3"/>
+          <p:cNvPr id="8" name="Shape 6"/>
           <p:cNvSpPr/>
           <p:nvPr/>
         </p:nvSpPr>
@@ -9079,7 +9783,7 @@
       </p:sp>
       <p:sp>
         <p:nvSpPr>
-          <p:cNvPr id="6" name="Shape 4"/>
+          <p:cNvPr id="9" name="Shape 7"/>
           <p:cNvSpPr/>
           <p:nvPr/>
         </p:nvSpPr>
@@ -9117,7 +9821,7 @@
       </p:sp>
       <p:sp>
         <p:nvSpPr>
-          <p:cNvPr id="7" name="Shape 5"/>
+          <p:cNvPr id="10" name="Shape 8"/>
           <p:cNvSpPr/>
           <p:nvPr/>
         </p:nvSpPr>
@@ -9148,7 +9852,7 @@
       </p:sp>
       <p:pic>
         <p:nvPicPr>
-          <p:cNvPr id="8" name="Image 0" descr="preencoded.png">    </p:cNvPr>
+          <p:cNvPr id="11" name="Image 0" descr="preencoded.png">    </p:cNvPr>
           <p:cNvPicPr>
             <a:picLocks noChangeAspect="1"/>
           </p:cNvPicPr>
@@ -9178,7 +9882,7 @@
       </p:pic>
       <p:sp>
         <p:nvSpPr>
-          <p:cNvPr id="9" name="mdpr:2-2-542095:title:__title:2-2-542095"/>
+          <p:cNvPr id="12" name="mdpr:2-2-542095:title:__title:2-2-542095"/>
           <p:cNvSpPr txBox="1"/>
           <p:nvPr/>
         </p:nvSpPr>
@@ -10101,6 +10805,44 @@
         </p:nvSpPr>
         <p:spPr>
           <a:xfrm>
+            <a:off x="9375343" y="384048"/>
+            <a:ext cx="1737360" cy="310896"/>
+          </a:xfrm>
+          <a:prstGeom prst="roundRect">
+            <a:avLst>
+              <a:gd name="adj" fmla="val 14706"/>
+            </a:avLst>
+          </a:prstGeom>
+          <a:solidFill>
+            <a:srgbClr val="F8FAFC">
+              <a:alpha val="72000"/>
+            </a:srgbClr>
+          </a:solidFill>
+          <a:ln w="12700">
+            <a:solidFill>
+              <a:srgbClr val="FFFFFF">
+                <a:alpha val="28000"/>
+              </a:srgbClr>
+            </a:solidFill>
+            <a:prstDash val="solid"/>
+          </a:ln>
+          <a:effectLst>
+            <a:outerShdw sx="100000" sy="100000" kx="0" ky="0" algn="bl" rotWithShape="0" blurRad="15240" dist="50800" dir="2700000">
+              <a:srgbClr val="B8C3D2">
+                <a:alpha val="16000"/>
+              </a:srgbClr>
+            </a:outerShdw>
+          </a:effectLst>
+        </p:spPr>
+      </p:sp>
+      <p:sp>
+        <p:nvSpPr>
+          <p:cNvPr id="3" name="Shape 1"/>
+          <p:cNvSpPr/>
+          <p:nvPr/>
+        </p:nvSpPr>
+        <p:spPr>
+          <a:xfrm>
             <a:off x="10362895" y="502920"/>
             <a:ext cx="822960" cy="822960"/>
           </a:xfrm>
@@ -10131,7 +10873,7 @@
       </p:sp>
       <p:sp>
         <p:nvSpPr>
-          <p:cNvPr id="3" name="Shape 1"/>
+          <p:cNvPr id="4" name="Shape 2"/>
           <p:cNvSpPr/>
           <p:nvPr/>
         </p:nvSpPr>
@@ -10165,7 +10907,57 @@
       </p:sp>
       <p:sp>
         <p:nvSpPr>
-          <p:cNvPr id="4" name="Shape 2"/>
+          <p:cNvPr id="5" name="Shape 3"/>
+          <p:cNvSpPr/>
+          <p:nvPr/>
+        </p:nvSpPr>
+        <p:spPr>
+          <a:xfrm>
+            <a:off x="9265615" y="6437376"/>
+            <a:ext cx="1993392" cy="0"/>
+          </a:xfrm>
+          <a:prstGeom prst="line">
+            <a:avLst/>
+          </a:prstGeom>
+          <a:noFill/>
+          <a:ln w="12700">
+            <a:solidFill>
+              <a:srgbClr val="FFFFFF">
+                <a:alpha val="88000"/>
+              </a:srgbClr>
+            </a:solidFill>
+            <a:prstDash val="solid"/>
+          </a:ln>
+        </p:spPr>
+      </p:sp>
+      <p:sp>
+        <p:nvSpPr>
+          <p:cNvPr id="6" name="Shape 4"/>
+          <p:cNvSpPr/>
+          <p:nvPr/>
+        </p:nvSpPr>
+        <p:spPr>
+          <a:xfrm>
+            <a:off x="9338767" y="6501384"/>
+            <a:ext cx="1920240" cy="0"/>
+          </a:xfrm>
+          <a:prstGeom prst="line">
+            <a:avLst/>
+          </a:prstGeom>
+          <a:noFill/>
+          <a:ln w="12700">
+            <a:solidFill>
+              <a:srgbClr val="B8C3D2">
+                <a:alpha val="64000"/>
+              </a:srgbClr>
+            </a:solidFill>
+            <a:prstDash val="solid"/>
+          </a:ln>
+        </p:spPr>
+      </p:sp>
+      <p:sp>
+        <p:nvSpPr>
+          <p:cNvPr id="7" name="Shape 5"/>
           <p:cNvSpPr/>
           <p:nvPr/>
         </p:nvSpPr>
@@ -10192,7 +10984,7 @@
       </p:sp>
       <p:sp>
         <p:nvSpPr>
-          <p:cNvPr id="5" name="Shape 3"/>
+          <p:cNvPr id="8" name="Shape 6"/>
           <p:cNvSpPr/>
           <p:nvPr/>
         </p:nvSpPr>
@@ -10230,7 +11022,7 @@
       </p:sp>
       <p:sp>
         <p:nvSpPr>
-          <p:cNvPr id="6" name="Shape 4"/>
+          <p:cNvPr id="9" name="Shape 7"/>
           <p:cNvSpPr/>
           <p:nvPr/>
         </p:nvSpPr>
@@ -10268,7 +11060,7 @@
       </p:sp>
       <p:sp>
         <p:nvSpPr>
-          <p:cNvPr id="7" name="Shape 5"/>
+          <p:cNvPr id="10" name="Shape 8"/>
           <p:cNvSpPr/>
           <p:nvPr/>
         </p:nvSpPr>
@@ -10299,7 +11091,7 @@
       </p:sp>
       <p:pic>
         <p:nvPicPr>
-          <p:cNvPr id="8" name="Image 0" descr="preencoded.png">    </p:cNvPr>
+          <p:cNvPr id="11" name="Image 0" descr="preencoded.png">    </p:cNvPr>
           <p:cNvPicPr>
             <a:picLocks noChangeAspect="1"/>
           </p:cNvPicPr>
@@ -10329,7 +11121,7 @@
       </p:pic>
       <p:sp>
         <p:nvSpPr>
-          <p:cNvPr id="9" name="mdpr:1-2-b8955f:title:__title:1-2-b8955f"/>
+          <p:cNvPr id="12" name="mdpr:1-2-b8955f:title:__title:1-2-b8955f"/>
           <p:cNvSpPr txBox="1"/>
           <p:nvPr/>
         </p:nvSpPr>
@@ -10371,7 +11163,7 @@
       </p:sp>
       <p:sp>
         <p:nvSpPr>
-          <p:cNvPr id="10" name="Shape 7"/>
+          <p:cNvPr id="13" name="Shape 10"/>
           <p:cNvSpPr/>
           <p:nvPr/>
         </p:nvSpPr>
@@ -10404,7 +11196,7 @@
       </p:sp>
       <p:sp>
         <p:nvSpPr>
-          <p:cNvPr id="11" name="Shape 8"/>
+          <p:cNvPr id="14" name="Shape 11"/>
           <p:cNvSpPr/>
           <p:nvPr/>
         </p:nvSpPr>
@@ -10435,7 +11227,7 @@
       </p:sp>
       <p:sp>
         <p:nvSpPr>
-          <p:cNvPr id="12" name="Shape 9"/>
+          <p:cNvPr id="15" name="Shape 12"/>
           <p:cNvSpPr/>
           <p:nvPr/>
         </p:nvSpPr>
@@ -10466,7 +11258,7 @@
       </p:sp>
       <p:sp>
         <p:nvSpPr>
-          <p:cNvPr id="13" name="Shape 10"/>
+          <p:cNvPr id="16" name="Shape 13"/>
           <p:cNvSpPr/>
           <p:nvPr/>
         </p:nvSpPr>
@@ -10491,7 +11283,7 @@
       </p:sp>
       <p:sp>
         <p:nvSpPr>
-          <p:cNvPr id="14" name="Shape 11"/>
+          <p:cNvPr id="17" name="Shape 14"/>
           <p:cNvSpPr/>
           <p:nvPr/>
         </p:nvSpPr>
@@ -10518,7 +11310,7 @@
       </p:sp>
       <p:sp>
         <p:nvSpPr>
-          <p:cNvPr id="15" name="Text 12"/>
+          <p:cNvPr id="18" name="Text 15"/>
           <p:cNvSpPr txBox="1"/>
           <p:nvPr/>
         </p:nvSpPr>
@@ -10562,7 +11354,7 @@
       </p:sp>
       <p:sp>
         <p:nvSpPr>
-          <p:cNvPr id="16" name="Text 13"/>
+          <p:cNvPr id="19" name="Text 16"/>
           <p:cNvSpPr txBox="1"/>
           <p:nvPr/>
         </p:nvSpPr>
@@ -10604,7 +11396,7 @@
       </p:sp>
       <p:sp>
         <p:nvSpPr>
-          <p:cNvPr id="17" name="Shape 14"/>
+          <p:cNvPr id="20" name="Shape 17"/>
           <p:cNvSpPr/>
           <p:nvPr/>
         </p:nvSpPr>
@@ -10631,7 +11423,7 @@
       </p:sp>
       <p:sp>
         <p:nvSpPr>
-          <p:cNvPr id="18" name="Text 15"/>
+          <p:cNvPr id="21" name="Text 18"/>
           <p:cNvSpPr txBox="1"/>
           <p:nvPr/>
         </p:nvSpPr>
@@ -10675,7 +11467,7 @@
       </p:sp>
       <p:sp>
         <p:nvSpPr>
-          <p:cNvPr id="19" name="Shape 16"/>
+          <p:cNvPr id="22" name="Shape 19"/>
           <p:cNvSpPr/>
           <p:nvPr/>
         </p:nvSpPr>
@@ -10702,7 +11494,7 @@
       </p:sp>
       <p:sp>
         <p:nvSpPr>
-          <p:cNvPr id="20" name="Text 17"/>
+          <p:cNvPr id="23" name="Text 20"/>
           <p:cNvSpPr txBox="1"/>
           <p:nvPr/>
         </p:nvSpPr>
@@ -10746,7 +11538,7 @@
       </p:sp>
       <p:sp>
         <p:nvSpPr>
-          <p:cNvPr id="21" name="Shape 18"/>
+          <p:cNvPr id="24" name="Shape 21"/>
           <p:cNvSpPr/>
           <p:nvPr/>
         </p:nvSpPr>
@@ -10777,7 +11569,7 @@
       </p:sp>
       <p:sp>
         <p:nvSpPr>
-          <p:cNvPr id="22" name="Shape 19"/>
+          <p:cNvPr id="25" name="Shape 22"/>
           <p:cNvSpPr/>
           <p:nvPr/>
         </p:nvSpPr>
@@ -10806,7 +11598,7 @@
       </p:sp>
       <p:sp>
         <p:nvSpPr>
-          <p:cNvPr id="23" name="Shape 20"/>
+          <p:cNvPr id="26" name="Shape 23"/>
           <p:cNvSpPr/>
           <p:nvPr/>
         </p:nvSpPr>
@@ -10829,7 +11621,7 @@
       </p:sp>
       <p:sp>
         <p:nvSpPr>
-          <p:cNvPr id="24" name="Shape 21"/>
+          <p:cNvPr id="27" name="Shape 24"/>
           <p:cNvSpPr/>
           <p:nvPr/>
         </p:nvSpPr>
@@ -10854,7 +11646,7 @@
       </p:sp>
       <p:sp>
         <p:nvSpPr>
-          <p:cNvPr id="25" name="Shape 22"/>
+          <p:cNvPr id="28" name="Shape 25"/>
           <p:cNvSpPr/>
           <p:nvPr/>
         </p:nvSpPr>
@@ -10879,7 +11671,7 @@
       </p:sp>
       <p:sp>
         <p:nvSpPr>
-          <p:cNvPr id="26" name="Shape 23"/>
+          <p:cNvPr id="29" name="Shape 26"/>
           <p:cNvSpPr/>
           <p:nvPr/>
         </p:nvSpPr>
@@ -10904,7 +11696,7 @@
       </p:sp>
       <p:sp>
         <p:nvSpPr>
-          <p:cNvPr id="27" name="Text 24"/>
+          <p:cNvPr id="30" name="Text 27"/>
           <p:cNvSpPr txBox="1"/>
           <p:nvPr/>
         </p:nvSpPr>
@@ -10948,7 +11740,7 @@
       </p:sp>
       <p:sp>
         <p:nvSpPr>
-          <p:cNvPr id="28" name="Text 25"/>
+          <p:cNvPr id="31" name="Text 28"/>
           <p:cNvSpPr txBox="1"/>
           <p:nvPr/>
         </p:nvSpPr>
@@ -10990,7 +11782,7 @@
       </p:sp>
       <p:sp>
         <p:nvSpPr>
-          <p:cNvPr id="29" name="Text 26"/>
+          <p:cNvPr id="32" name="Text 29"/>
           <p:cNvSpPr txBox="1"/>
           <p:nvPr/>
         </p:nvSpPr>
@@ -11032,7 +11824,7 @@
       </p:sp>
       <p:sp>
         <p:nvSpPr>
-          <p:cNvPr id="30" name="Text 27"/>
+          <p:cNvPr id="33" name="Text 30"/>
           <p:cNvSpPr txBox="1"/>
           <p:nvPr/>
         </p:nvSpPr>
@@ -11112,6 +11904,44 @@
         </p:nvSpPr>
         <p:spPr>
           <a:xfrm>
+            <a:off x="9375343" y="384048"/>
+            <a:ext cx="1737360" cy="310896"/>
+          </a:xfrm>
+          <a:prstGeom prst="roundRect">
+            <a:avLst>
+              <a:gd name="adj" fmla="val 14706"/>
+            </a:avLst>
+          </a:prstGeom>
+          <a:solidFill>
+            <a:srgbClr val="F8FAFC">
+              <a:alpha val="72000"/>
+            </a:srgbClr>
+          </a:solidFill>
+          <a:ln w="12700">
+            <a:solidFill>
+              <a:srgbClr val="FFFFFF">
+                <a:alpha val="28000"/>
+              </a:srgbClr>
+            </a:solidFill>
+            <a:prstDash val="solid"/>
+          </a:ln>
+          <a:effectLst>
+            <a:outerShdw sx="100000" sy="100000" kx="0" ky="0" algn="bl" rotWithShape="0" blurRad="15240" dist="50800" dir="2700000">
+              <a:srgbClr val="B8C3D2">
+                <a:alpha val="16000"/>
+              </a:srgbClr>
+            </a:outerShdw>
+          </a:effectLst>
+        </p:spPr>
+      </p:sp>
+      <p:sp>
+        <p:nvSpPr>
+          <p:cNvPr id="3" name="Shape 1"/>
+          <p:cNvSpPr/>
+          <p:nvPr/>
+        </p:nvSpPr>
+        <p:spPr>
+          <a:xfrm>
             <a:off x="10362895" y="502920"/>
             <a:ext cx="822960" cy="822960"/>
           </a:xfrm>
@@ -11142,7 +11972,7 @@
       </p:sp>
       <p:sp>
         <p:nvSpPr>
-          <p:cNvPr id="3" name="Shape 1"/>
+          <p:cNvPr id="4" name="Shape 2"/>
           <p:cNvSpPr/>
           <p:nvPr/>
         </p:nvSpPr>
@@ -11176,7 +12006,57 @@
       </p:sp>
       <p:sp>
         <p:nvSpPr>
-          <p:cNvPr id="4" name="Shape 2"/>
+          <p:cNvPr id="5" name="Shape 3"/>
+          <p:cNvSpPr/>
+          <p:nvPr/>
+        </p:nvSpPr>
+        <p:spPr>
+          <a:xfrm>
+            <a:off x="9265615" y="6437376"/>
+            <a:ext cx="1993392" cy="0"/>
+          </a:xfrm>
+          <a:prstGeom prst="line">
+            <a:avLst/>
+          </a:prstGeom>
+          <a:noFill/>
+          <a:ln w="12700">
+            <a:solidFill>
+              <a:srgbClr val="FFFFFF">
+                <a:alpha val="88000"/>
+              </a:srgbClr>
+            </a:solidFill>
+            <a:prstDash val="solid"/>
+          </a:ln>
+        </p:spPr>
+      </p:sp>
+      <p:sp>
+        <p:nvSpPr>
+          <p:cNvPr id="6" name="Shape 4"/>
+          <p:cNvSpPr/>
+          <p:nvPr/>
+        </p:nvSpPr>
+        <p:spPr>
+          <a:xfrm>
+            <a:off x="9338767" y="6501384"/>
+            <a:ext cx="1920240" cy="0"/>
+          </a:xfrm>
+          <a:prstGeom prst="line">
+            <a:avLst/>
+          </a:prstGeom>
+          <a:noFill/>
+          <a:ln w="12700">
+            <a:solidFill>
+              <a:srgbClr val="B8C3D2">
+                <a:alpha val="64000"/>
+              </a:srgbClr>
+            </a:solidFill>
+            <a:prstDash val="solid"/>
+          </a:ln>
+        </p:spPr>
+      </p:sp>
+      <p:sp>
+        <p:nvSpPr>
+          <p:cNvPr id="7" name="Shape 5"/>
           <p:cNvSpPr/>
           <p:nvPr/>
         </p:nvSpPr>
@@ -11203,7 +12083,7 @@
       </p:sp>
       <p:sp>
         <p:nvSpPr>
-          <p:cNvPr id="5" name="Shape 3"/>
+          <p:cNvPr id="8" name="Shape 6"/>
           <p:cNvSpPr/>
           <p:nvPr/>
         </p:nvSpPr>
@@ -11241,7 +12121,7 @@
       </p:sp>
       <p:sp>
         <p:nvSpPr>
-          <p:cNvPr id="6" name="Shape 4"/>
+          <p:cNvPr id="9" name="Shape 7"/>
           <p:cNvSpPr/>
           <p:nvPr/>
         </p:nvSpPr>
@@ -11279,7 +12159,7 @@
       </p:sp>
       <p:sp>
         <p:nvSpPr>
-          <p:cNvPr id="7" name="Shape 5"/>
+          <p:cNvPr id="10" name="Shape 8"/>
           <p:cNvSpPr/>
           <p:nvPr/>
         </p:nvSpPr>
@@ -11310,7 +12190,7 @@
       </p:sp>
       <p:pic>
         <p:nvPicPr>
-          <p:cNvPr id="8" name="Image 0" descr="preencoded.png">    </p:cNvPr>
+          <p:cNvPr id="11" name="Image 0" descr="preencoded.png">    </p:cNvPr>
           <p:cNvPicPr>
             <a:picLocks noChangeAspect="1"/>
           </p:cNvPicPr>
@@ -11340,7 +12220,7 @@
       </p:pic>
       <p:sp>
         <p:nvSpPr>
-          <p:cNvPr id="9" name="mdpr:2-2-4dc4c1:title:__title:2-2-4dc4c1"/>
+          <p:cNvPr id="12" name="mdpr:2-2-4dc4c1:title:__title:2-2-4dc4c1"/>
           <p:cNvSpPr txBox="1"/>
           <p:nvPr/>
         </p:nvSpPr>
@@ -11382,7 +12262,7 @@
       </p:sp>
       <p:sp>
         <p:nvSpPr>
-          <p:cNvPr id="10" name="Shape 7"/>
+          <p:cNvPr id="13" name="Shape 10"/>
           <p:cNvSpPr/>
           <p:nvPr/>
         </p:nvSpPr>
@@ -11409,7 +12289,7 @@
       </p:sp>
       <p:sp>
         <p:nvSpPr>
-          <p:cNvPr id="11" name="Shape 8"/>
+          <p:cNvPr id="14" name="Shape 11"/>
           <p:cNvSpPr/>
           <p:nvPr/>
         </p:nvSpPr>
@@ -11436,7 +12316,7 @@
       </p:sp>
       <p:sp>
         <p:nvSpPr>
-          <p:cNvPr id="12" name="Text 9"/>
+          <p:cNvPr id="15" name="Text 12"/>
           <p:cNvSpPr txBox="1"/>
           <p:nvPr/>
         </p:nvSpPr>
@@ -11480,7 +12360,7 @@
       </p:sp>
       <p:sp>
         <p:nvSpPr>
-          <p:cNvPr id="13" name="Text 10"/>
+          <p:cNvPr id="16" name="Text 13"/>
           <p:cNvSpPr txBox="1"/>
           <p:nvPr/>
         </p:nvSpPr>
@@ -11524,7 +12404,7 @@
       </p:sp>
       <p:sp>
         <p:nvSpPr>
-          <p:cNvPr id="14" name="Shape 11"/>
+          <p:cNvPr id="17" name="Shape 14"/>
           <p:cNvSpPr/>
           <p:nvPr/>
         </p:nvSpPr>
@@ -11551,7 +12431,7 @@
       </p:sp>
       <p:sp>
         <p:nvSpPr>
-          <p:cNvPr id="15" name="Shape 12"/>
+          <p:cNvPr id="18" name="Shape 15"/>
           <p:cNvSpPr/>
           <p:nvPr/>
         </p:nvSpPr>
@@ -11578,7 +12458,7 @@
       </p:sp>
       <p:sp>
         <p:nvSpPr>
-          <p:cNvPr id="16" name="Text 13"/>
+          <p:cNvPr id="19" name="Text 16"/>
           <p:cNvSpPr txBox="1"/>
           <p:nvPr/>
         </p:nvSpPr>
@@ -11622,7 +12502,7 @@
       </p:sp>
       <p:sp>
         <p:nvSpPr>
-          <p:cNvPr id="17" name="Text 14"/>
+          <p:cNvPr id="20" name="Text 17"/>
           <p:cNvSpPr txBox="1"/>
           <p:nvPr/>
         </p:nvSpPr>
@@ -11666,7 +12546,7 @@
       </p:sp>
       <p:sp>
         <p:nvSpPr>
-          <p:cNvPr id="18" name="Shape 15"/>
+          <p:cNvPr id="21" name="Shape 18"/>
           <p:cNvSpPr/>
           <p:nvPr/>
         </p:nvSpPr>
@@ -11693,7 +12573,7 @@
       </p:sp>
       <p:sp>
         <p:nvSpPr>
-          <p:cNvPr id="19" name="Shape 16"/>
+          <p:cNvPr id="22" name="Shape 19"/>
           <p:cNvSpPr/>
           <p:nvPr/>
         </p:nvSpPr>
@@ -11720,7 +12600,7 @@
       </p:sp>
       <p:sp>
         <p:nvSpPr>
-          <p:cNvPr id="20" name="Text 17"/>
+          <p:cNvPr id="23" name="Text 20"/>
           <p:cNvSpPr txBox="1"/>
           <p:nvPr/>
         </p:nvSpPr>
@@ -11764,7 +12644,7 @@
       </p:sp>
       <p:sp>
         <p:nvSpPr>
-          <p:cNvPr id="21" name="Text 18"/>
+          <p:cNvPr id="24" name="Text 21"/>
           <p:cNvSpPr txBox="1"/>
           <p:nvPr/>
         </p:nvSpPr>
@@ -11808,7 +12688,7 @@
       </p:sp>
       <p:sp>
         <p:nvSpPr>
-          <p:cNvPr id="22" name="Shape 19"/>
+          <p:cNvPr id="25" name="Shape 22"/>
           <p:cNvSpPr/>
           <p:nvPr/>
         </p:nvSpPr>
@@ -11835,7 +12715,7 @@
       </p:sp>
       <p:sp>
         <p:nvSpPr>
-          <p:cNvPr id="23" name="Shape 20"/>
+          <p:cNvPr id="26" name="Shape 23"/>
           <p:cNvSpPr/>
           <p:nvPr/>
         </p:nvSpPr>
@@ -11862,7 +12742,7 @@
       </p:sp>
       <p:sp>
         <p:nvSpPr>
-          <p:cNvPr id="24" name="Text 21"/>
+          <p:cNvPr id="27" name="Text 24"/>
           <p:cNvSpPr txBox="1"/>
           <p:nvPr/>
         </p:nvSpPr>
@@ -11906,7 +12786,7 @@
       </p:sp>
       <p:sp>
         <p:nvSpPr>
-          <p:cNvPr id="25" name="Text 22"/>
+          <p:cNvPr id="28" name="Text 25"/>
           <p:cNvSpPr txBox="1"/>
           <p:nvPr/>
         </p:nvSpPr>
@@ -11950,7 +12830,7 @@
       </p:sp>
       <p:sp>
         <p:nvSpPr>
-          <p:cNvPr id="26" name="Shape 23"/>
+          <p:cNvPr id="29" name="Shape 26"/>
           <p:cNvSpPr/>
           <p:nvPr/>
         </p:nvSpPr>
@@ -11974,7 +12854,7 @@
       </p:sp>
       <p:sp>
         <p:nvSpPr>
-          <p:cNvPr id="27" name="Shape 24"/>
+          <p:cNvPr id="30" name="Shape 27"/>
           <p:cNvSpPr/>
           <p:nvPr/>
         </p:nvSpPr>
@@ -11998,7 +12878,7 @@
       </p:sp>
       <p:sp>
         <p:nvSpPr>
-          <p:cNvPr id="28" name="Shape 25"/>
+          <p:cNvPr id="31" name="Shape 28"/>
           <p:cNvSpPr/>
           <p:nvPr/>
         </p:nvSpPr>
@@ -12060,6 +12940,44 @@
         </p:nvSpPr>
         <p:spPr>
           <a:xfrm>
+            <a:off x="9375343" y="384048"/>
+            <a:ext cx="1737360" cy="310896"/>
+          </a:xfrm>
+          <a:prstGeom prst="roundRect">
+            <a:avLst>
+              <a:gd name="adj" fmla="val 14706"/>
+            </a:avLst>
+          </a:prstGeom>
+          <a:solidFill>
+            <a:srgbClr val="F8FAFC">
+              <a:alpha val="72000"/>
+            </a:srgbClr>
+          </a:solidFill>
+          <a:ln w="12700">
+            <a:solidFill>
+              <a:srgbClr val="FFFFFF">
+                <a:alpha val="28000"/>
+              </a:srgbClr>
+            </a:solidFill>
+            <a:prstDash val="solid"/>
+          </a:ln>
+          <a:effectLst>
+            <a:outerShdw sx="100000" sy="100000" kx="0" ky="0" algn="bl" rotWithShape="0" blurRad="15240" dist="50800" dir="2700000">
+              <a:srgbClr val="B8C3D2">
+                <a:alpha val="16000"/>
+              </a:srgbClr>
+            </a:outerShdw>
+          </a:effectLst>
+        </p:spPr>
+      </p:sp>
+      <p:sp>
+        <p:nvSpPr>
+          <p:cNvPr id="3" name="Shape 1"/>
+          <p:cNvSpPr/>
+          <p:nvPr/>
+        </p:nvSpPr>
+        <p:spPr>
+          <a:xfrm>
             <a:off x="10362895" y="502920"/>
             <a:ext cx="822960" cy="822960"/>
           </a:xfrm>
@@ -12090,7 +13008,7 @@
       </p:sp>
       <p:sp>
         <p:nvSpPr>
-          <p:cNvPr id="3" name="Shape 1"/>
+          <p:cNvPr id="4" name="Shape 2"/>
           <p:cNvSpPr/>
           <p:nvPr/>
         </p:nvSpPr>
@@ -12124,7 +13042,57 @@
       </p:sp>
       <p:sp>
         <p:nvSpPr>
-          <p:cNvPr id="4" name="Shape 2"/>
+          <p:cNvPr id="5" name="Shape 3"/>
+          <p:cNvSpPr/>
+          <p:nvPr/>
+        </p:nvSpPr>
+        <p:spPr>
+          <a:xfrm>
+            <a:off x="9265615" y="6437376"/>
+            <a:ext cx="1993392" cy="0"/>
+          </a:xfrm>
+          <a:prstGeom prst="line">
+            <a:avLst/>
+          </a:prstGeom>
+          <a:noFill/>
+          <a:ln w="12700">
+            <a:solidFill>
+              <a:srgbClr val="FFFFFF">
+                <a:alpha val="88000"/>
+              </a:srgbClr>
+            </a:solidFill>
+            <a:prstDash val="solid"/>
+          </a:ln>
+        </p:spPr>
+      </p:sp>
+      <p:sp>
+        <p:nvSpPr>
+          <p:cNvPr id="6" name="Shape 4"/>
+          <p:cNvSpPr/>
+          <p:nvPr/>
+        </p:nvSpPr>
+        <p:spPr>
+          <a:xfrm>
+            <a:off x="9338767" y="6501384"/>
+            <a:ext cx="1920240" cy="0"/>
+          </a:xfrm>
+          <a:prstGeom prst="line">
+            <a:avLst/>
+          </a:prstGeom>
+          <a:noFill/>
+          <a:ln w="12700">
+            <a:solidFill>
+              <a:srgbClr val="B8C3D2">
+                <a:alpha val="64000"/>
+              </a:srgbClr>
+            </a:solidFill>
+            <a:prstDash val="solid"/>
+          </a:ln>
+        </p:spPr>
+      </p:sp>
+      <p:sp>
+        <p:nvSpPr>
+          <p:cNvPr id="7" name="Shape 5"/>
           <p:cNvSpPr/>
           <p:nvPr/>
         </p:nvSpPr>
@@ -12151,7 +13119,7 @@
       </p:sp>
       <p:sp>
         <p:nvSpPr>
-          <p:cNvPr id="5" name="Shape 3"/>
+          <p:cNvPr id="8" name="Shape 6"/>
           <p:cNvSpPr/>
           <p:nvPr/>
         </p:nvSpPr>
@@ -12189,7 +13157,7 @@
       </p:sp>
       <p:sp>
         <p:nvSpPr>
-          <p:cNvPr id="6" name="Shape 4"/>
+          <p:cNvPr id="9" name="Shape 7"/>
           <p:cNvSpPr/>
           <p:nvPr/>
         </p:nvSpPr>
@@ -12227,7 +13195,7 @@
       </p:sp>
       <p:sp>
         <p:nvSpPr>
-          <p:cNvPr id="7" name="Shape 5"/>
+          <p:cNvPr id="10" name="Shape 8"/>
           <p:cNvSpPr/>
           <p:nvPr/>
         </p:nvSpPr>
@@ -12258,7 +13226,7 @@
       </p:sp>
       <p:pic>
         <p:nvPicPr>
-          <p:cNvPr id="8" name="Image 0" descr="preencoded.png">    </p:cNvPr>
+          <p:cNvPr id="11" name="Image 0" descr="preencoded.png">    </p:cNvPr>
           <p:cNvPicPr>
             <a:picLocks noChangeAspect="1"/>
           </p:cNvPicPr>
@@ -12288,7 +13256,7 @@
       </p:pic>
       <p:sp>
         <p:nvSpPr>
-          <p:cNvPr id="9" name="Shape 6"/>
+          <p:cNvPr id="12" name="Shape 9"/>
           <p:cNvSpPr/>
           <p:nvPr/>
         </p:nvSpPr>
@@ -12326,7 +13294,7 @@
       </p:sp>
       <p:sp>
         <p:nvSpPr>
-          <p:cNvPr id="10" name="Shape 7"/>
+          <p:cNvPr id="13" name="Shape 10"/>
           <p:cNvSpPr/>
           <p:nvPr/>
         </p:nvSpPr>
@@ -12364,7 +13332,7 @@
       </p:sp>
       <p:sp>
         <p:nvSpPr>
-          <p:cNvPr id="11" name="Shape 8"/>
+          <p:cNvPr id="14" name="Shape 11"/>
           <p:cNvSpPr/>
           <p:nvPr/>
         </p:nvSpPr>
@@ -12395,7 +13363,7 @@
       </p:sp>
       <p:pic>
         <p:nvPicPr>
-          <p:cNvPr id="12" name="Image 1" descr="preencoded.png">    </p:cNvPr>
+          <p:cNvPr id="15" name="Image 1" descr="preencoded.png">    </p:cNvPr>
           <p:cNvPicPr>
             <a:picLocks noChangeAspect="1"/>
           </p:cNvPicPr>
@@ -12425,7 +13393,7 @@
       </p:pic>
       <p:sp>
         <p:nvSpPr>
-          <p:cNvPr id="13" name="Shape 9"/>
+          <p:cNvPr id="16" name="Shape 12"/>
           <p:cNvSpPr/>
           <p:nvPr/>
         </p:nvSpPr>
@@ -12463,7 +13431,7 @@
       </p:sp>
       <p:sp>
         <p:nvSpPr>
-          <p:cNvPr id="14" name="Shape 10"/>
+          <p:cNvPr id="17" name="Shape 13"/>
           <p:cNvSpPr/>
           <p:nvPr/>
         </p:nvSpPr>
@@ -12501,7 +13469,7 @@
       </p:sp>
       <p:sp>
         <p:nvSpPr>
-          <p:cNvPr id="15" name="Shape 11"/>
+          <p:cNvPr id="18" name="Shape 14"/>
           <p:cNvSpPr/>
           <p:nvPr/>
         </p:nvSpPr>
@@ -12532,7 +13500,7 @@
       </p:sp>
       <p:pic>
         <p:nvPicPr>
-          <p:cNvPr id="16" name="Image 2" descr="preencoded.png">    </p:cNvPr>
+          <p:cNvPr id="19" name="Image 2" descr="preencoded.png">    </p:cNvPr>
           <p:cNvPicPr>
             <a:picLocks noChangeAspect="1"/>
           </p:cNvPicPr>
@@ -12562,7 +13530,7 @@
       </p:pic>
       <p:sp>
         <p:nvSpPr>
-          <p:cNvPr id="17" name="Shape 12"/>
+          <p:cNvPr id="20" name="Shape 15"/>
           <p:cNvSpPr/>
           <p:nvPr/>
         </p:nvSpPr>
@@ -12591,7 +13559,7 @@
       </p:sp>
       <p:sp>
         <p:nvSpPr>
-          <p:cNvPr id="18" name="Shape 13"/>
+          <p:cNvPr id="21" name="Shape 16"/>
           <p:cNvSpPr/>
           <p:nvPr/>
         </p:nvSpPr>
@@ -12618,7 +13586,7 @@
       </p:sp>
       <p:sp>
         <p:nvSpPr>
-          <p:cNvPr id="19" name="Shape 14"/>
+          <p:cNvPr id="22" name="Shape 17"/>
           <p:cNvSpPr/>
           <p:nvPr/>
         </p:nvSpPr>
@@ -12645,7 +13613,7 @@
       </p:sp>
       <p:sp>
         <p:nvSpPr>
-          <p:cNvPr id="20" name="Shape 15"/>
+          <p:cNvPr id="23" name="Shape 18"/>
           <p:cNvSpPr/>
           <p:nvPr/>
         </p:nvSpPr>
@@ -12672,7 +13640,7 @@
       </p:sp>
       <p:sp>
         <p:nvSpPr>
-          <p:cNvPr id="21" name="mdpr:1-2-ea42c8:title:__title:1-2-ea42c8"/>
+          <p:cNvPr id="24" name="mdpr:1-2-ea42c8:title:__title:1-2-ea42c8"/>
           <p:cNvSpPr txBox="1"/>
           <p:nvPr/>
         </p:nvSpPr>
@@ -12714,7 +13682,7 @@
       </p:sp>
       <p:sp>
         <p:nvSpPr>
-          <p:cNvPr id="22" name="Shape 17"/>
+          <p:cNvPr id="25" name="Shape 20"/>
           <p:cNvSpPr/>
           <p:nvPr/>
         </p:nvSpPr>
@@ -12741,7 +13709,7 @@
       </p:sp>
       <p:pic>
         <p:nvPicPr>
-          <p:cNvPr id="23" name="Image 3" descr="article icon from tabler-icons (MIT)">    </p:cNvPr>
+          <p:cNvPr id="26" name="Image 3" descr="article icon from tabler-icons (MIT)">    </p:cNvPr>
           <p:cNvPicPr>
             <a:picLocks noChangeAspect="1"/>
           </p:cNvPicPr>
@@ -12771,7 +13739,7 @@
       </p:pic>
       <p:sp>
         <p:nvSpPr>
-          <p:cNvPr id="24" name="mdpr:1-2-ea42c8:item-1:block-27-chunk-1"/>
+          <p:cNvPr id="27" name="mdpr:1-2-ea42c8:item-1:block-27-chunk-1"/>
           <p:cNvSpPr txBox="1"/>
           <p:nvPr/>
         </p:nvSpPr>
@@ -12830,7 +13798,7 @@
       </p:sp>
       <p:sp>
         <p:nvSpPr>
-          <p:cNvPr id="25" name="Shape 19"/>
+          <p:cNvPr id="28" name="Shape 22"/>
           <p:cNvSpPr/>
           <p:nvPr/>
         </p:nvSpPr>
@@ -12857,7 +13825,7 @@
       </p:sp>
       <p:pic>
         <p:nvPicPr>
-          <p:cNvPr id="26" name="Image 4" descr="article icon from tabler-icons (MIT)">    </p:cNvPr>
+          <p:cNvPr id="29" name="Image 4" descr="article icon from tabler-icons (MIT)">    </p:cNvPr>
           <p:cNvPicPr>
             <a:picLocks noChangeAspect="1"/>
           </p:cNvPicPr>
@@ -12887,7 +13855,7 @@
       </p:pic>
       <p:sp>
         <p:nvSpPr>
-          <p:cNvPr id="27" name="mdpr:1-2-ea42c8:item-2:block-27-chunk-1"/>
+          <p:cNvPr id="30" name="mdpr:1-2-ea42c8:item-2:block-27-chunk-1"/>
           <p:cNvSpPr txBox="1"/>
           <p:nvPr/>
         </p:nvSpPr>
@@ -12946,7 +13914,7 @@
       </p:sp>
       <p:sp>
         <p:nvSpPr>
-          <p:cNvPr id="28" name="Shape 21"/>
+          <p:cNvPr id="31" name="Shape 24"/>
           <p:cNvSpPr/>
           <p:nvPr/>
         </p:nvSpPr>
@@ -12973,7 +13941,7 @@
       </p:sp>
       <p:pic>
         <p:nvPicPr>
-          <p:cNvPr id="29" name="Image 5" descr="article icon from tabler-icons (MIT)">    </p:cNvPr>
+          <p:cNvPr id="32" name="Image 5" descr="article icon from tabler-icons (MIT)">    </p:cNvPr>
           <p:cNvPicPr>
             <a:picLocks noChangeAspect="1"/>
           </p:cNvPicPr>
@@ -13003,7 +13971,7 @@
       </p:pic>
       <p:sp>
         <p:nvSpPr>
-          <p:cNvPr id="30" name="mdpr:1-2-ea42c8:item-3:block-27-chunk-1"/>
+          <p:cNvPr id="33" name="mdpr:1-2-ea42c8:item-3:block-27-chunk-1"/>
           <p:cNvSpPr txBox="1"/>
           <p:nvPr/>
         </p:nvSpPr>
@@ -13100,6 +14068,44 @@
         </p:nvSpPr>
         <p:spPr>
           <a:xfrm>
+            <a:off x="9375343" y="384048"/>
+            <a:ext cx="1737360" cy="310896"/>
+          </a:xfrm>
+          <a:prstGeom prst="roundRect">
+            <a:avLst>
+              <a:gd name="adj" fmla="val 14706"/>
+            </a:avLst>
+          </a:prstGeom>
+          <a:solidFill>
+            <a:srgbClr val="F8FAFC">
+              <a:alpha val="72000"/>
+            </a:srgbClr>
+          </a:solidFill>
+          <a:ln w="12700">
+            <a:solidFill>
+              <a:srgbClr val="FFFFFF">
+                <a:alpha val="28000"/>
+              </a:srgbClr>
+            </a:solidFill>
+            <a:prstDash val="solid"/>
+          </a:ln>
+          <a:effectLst>
+            <a:outerShdw sx="100000" sy="100000" kx="0" ky="0" algn="bl" rotWithShape="0" blurRad="15240" dist="50800" dir="2700000">
+              <a:srgbClr val="B8C3D2">
+                <a:alpha val="16000"/>
+              </a:srgbClr>
+            </a:outerShdw>
+          </a:effectLst>
+        </p:spPr>
+      </p:sp>
+      <p:sp>
+        <p:nvSpPr>
+          <p:cNvPr id="3" name="Shape 1"/>
+          <p:cNvSpPr/>
+          <p:nvPr/>
+        </p:nvSpPr>
+        <p:spPr>
+          <a:xfrm>
             <a:off x="10362895" y="502920"/>
             <a:ext cx="822960" cy="822960"/>
           </a:xfrm>
@@ -13130,7 +14136,7 @@
       </p:sp>
       <p:sp>
         <p:nvSpPr>
-          <p:cNvPr id="3" name="Shape 1"/>
+          <p:cNvPr id="4" name="Shape 2"/>
           <p:cNvSpPr/>
           <p:nvPr/>
         </p:nvSpPr>
@@ -13164,7 +14170,57 @@
       </p:sp>
       <p:sp>
         <p:nvSpPr>
-          <p:cNvPr id="4" name="Shape 2"/>
+          <p:cNvPr id="5" name="Shape 3"/>
+          <p:cNvSpPr/>
+          <p:nvPr/>
+        </p:nvSpPr>
+        <p:spPr>
+          <a:xfrm>
+            <a:off x="9265615" y="6437376"/>
+            <a:ext cx="1993392" cy="0"/>
+          </a:xfrm>
+          <a:prstGeom prst="line">
+            <a:avLst/>
+          </a:prstGeom>
+          <a:noFill/>
+          <a:ln w="12700">
+            <a:solidFill>
+              <a:srgbClr val="FFFFFF">
+                <a:alpha val="88000"/>
+              </a:srgbClr>
+            </a:solidFill>
+            <a:prstDash val="solid"/>
+          </a:ln>
+        </p:spPr>
+      </p:sp>
+      <p:sp>
+        <p:nvSpPr>
+          <p:cNvPr id="6" name="Shape 4"/>
+          <p:cNvSpPr/>
+          <p:nvPr/>
+        </p:nvSpPr>
+        <p:spPr>
+          <a:xfrm>
+            <a:off x="9338767" y="6501384"/>
+            <a:ext cx="1920240" cy="0"/>
+          </a:xfrm>
+          <a:prstGeom prst="line">
+            <a:avLst/>
+          </a:prstGeom>
+          <a:noFill/>
+          <a:ln w="12700">
+            <a:solidFill>
+              <a:srgbClr val="B8C3D2">
+                <a:alpha val="64000"/>
+              </a:srgbClr>
+            </a:solidFill>
+            <a:prstDash val="solid"/>
+          </a:ln>
+        </p:spPr>
+      </p:sp>
+      <p:sp>
+        <p:nvSpPr>
+          <p:cNvPr id="7" name="Shape 5"/>
           <p:cNvSpPr/>
           <p:nvPr/>
         </p:nvSpPr>
@@ -13191,7 +14247,7 @@
       </p:sp>
       <p:sp>
         <p:nvSpPr>
-          <p:cNvPr id="5" name="Shape 3"/>
+          <p:cNvPr id="8" name="Shape 6"/>
           <p:cNvSpPr/>
           <p:nvPr/>
         </p:nvSpPr>
@@ -13218,7 +14274,7 @@
       </p:sp>
       <p:sp>
         <p:nvSpPr>
-          <p:cNvPr id="6" name="Shape 4"/>
+          <p:cNvPr id="9" name="Shape 7"/>
           <p:cNvSpPr/>
           <p:nvPr/>
         </p:nvSpPr>
@@ -13245,7 +14301,7 @@
       </p:sp>
       <p:sp>
         <p:nvSpPr>
-          <p:cNvPr id="7" name="Shape 5"/>
+          <p:cNvPr id="10" name="Shape 8"/>
           <p:cNvSpPr/>
           <p:nvPr/>
         </p:nvSpPr>
@@ -13274,7 +14330,7 @@
       </p:sp>
       <p:sp>
         <p:nvSpPr>
-          <p:cNvPr id="8" name="Shape 6"/>
+          <p:cNvPr id="11" name="Shape 9"/>
           <p:cNvSpPr/>
           <p:nvPr/>
         </p:nvSpPr>
@@ -13301,7 +14357,7 @@
       </p:sp>
       <p:sp>
         <p:nvSpPr>
-          <p:cNvPr id="9" name="Shape 7"/>
+          <p:cNvPr id="12" name="Shape 10"/>
           <p:cNvSpPr/>
           <p:nvPr/>
         </p:nvSpPr>
@@ -13328,7 +14384,7 @@
       </p:sp>
       <p:sp>
         <p:nvSpPr>
-          <p:cNvPr id="10" name="Shape 8"/>
+          <p:cNvPr id="13" name="Shape 11"/>
           <p:cNvSpPr/>
           <p:nvPr/>
         </p:nvSpPr>
@@ -13355,7 +14411,7 @@
       </p:sp>
       <p:sp>
         <p:nvSpPr>
-          <p:cNvPr id="11" name="Shape 9"/>
+          <p:cNvPr id="14" name="Shape 12"/>
           <p:cNvSpPr/>
           <p:nvPr/>
         </p:nvSpPr>
@@ -13382,7 +14438,7 @@
       </p:sp>
       <p:sp>
         <p:nvSpPr>
-          <p:cNvPr id="12" name="Shape 10"/>
+          <p:cNvPr id="15" name="Shape 13"/>
           <p:cNvSpPr/>
           <p:nvPr/>
         </p:nvSpPr>
@@ -13409,7 +14465,7 @@
       </p:sp>
       <p:sp>
         <p:nvSpPr>
-          <p:cNvPr id="13" name="Shape 11"/>
+          <p:cNvPr id="16" name="Shape 14"/>
           <p:cNvSpPr/>
           <p:nvPr/>
         </p:nvSpPr>
@@ -13436,7 +14492,7 @@
       </p:sp>
       <p:sp>
         <p:nvSpPr>
-          <p:cNvPr id="14" name="Shape 12"/>
+          <p:cNvPr id="17" name="Shape 15"/>
           <p:cNvSpPr/>
           <p:nvPr/>
         </p:nvSpPr>
@@ -13463,7 +14519,7 @@
       </p:sp>
       <p:sp>
         <p:nvSpPr>
-          <p:cNvPr id="15" name="Shape 13"/>
+          <p:cNvPr id="18" name="Shape 16"/>
           <p:cNvSpPr/>
           <p:nvPr/>
         </p:nvSpPr>
@@ -13490,7 +14546,7 @@
       </p:sp>
       <p:sp>
         <p:nvSpPr>
-          <p:cNvPr id="16" name="Shape 14"/>
+          <p:cNvPr id="19" name="Shape 17"/>
           <p:cNvSpPr/>
           <p:nvPr/>
         </p:nvSpPr>
@@ -13517,7 +14573,7 @@
       </p:sp>
       <p:sp>
         <p:nvSpPr>
-          <p:cNvPr id="17" name="Shape 15"/>
+          <p:cNvPr id="20" name="Shape 18"/>
           <p:cNvSpPr/>
           <p:nvPr/>
         </p:nvSpPr>
@@ -13544,7 +14600,7 @@
       </p:sp>
       <p:sp>
         <p:nvSpPr>
-          <p:cNvPr id="18" name="Shape 16"/>
+          <p:cNvPr id="21" name="Shape 19"/>
           <p:cNvSpPr/>
           <p:nvPr/>
         </p:nvSpPr>
@@ -13571,7 +14627,7 @@
       </p:sp>
       <p:sp>
         <p:nvSpPr>
-          <p:cNvPr id="19" name="Shape 17"/>
+          <p:cNvPr id="22" name="Shape 20"/>
           <p:cNvSpPr/>
           <p:nvPr/>
         </p:nvSpPr>
@@ -13598,7 +14654,7 @@
       </p:sp>
       <p:sp>
         <p:nvSpPr>
-          <p:cNvPr id="20" name="Shape 18"/>
+          <p:cNvPr id="23" name="Shape 21"/>
           <p:cNvSpPr/>
           <p:nvPr/>
         </p:nvSpPr>
@@ -13625,7 +14681,7 @@
       </p:sp>
       <p:sp>
         <p:nvSpPr>
-          <p:cNvPr id="21" name="Shape 19"/>
+          <p:cNvPr id="24" name="Shape 22"/>
           <p:cNvSpPr/>
           <p:nvPr/>
         </p:nvSpPr>
@@ -13652,7 +14708,7 @@
       </p:sp>
       <p:sp>
         <p:nvSpPr>
-          <p:cNvPr id="22" name="mdpr:1-2-0772f8:title:__title:1-2-0772f8"/>
+          <p:cNvPr id="25" name="mdpr:1-2-0772f8:title:__title:1-2-0772f8"/>
           <p:cNvSpPr txBox="1"/>
           <p:nvPr/>
         </p:nvSpPr>
@@ -13694,7 +14750,7 @@
       </p:sp>
       <p:sp>
         <p:nvSpPr>
-          <p:cNvPr id="23" name="mdpr:1-2-0772f8:toc-item-1:toc-item-1"/>
+          <p:cNvPr id="26" name="mdpr:1-2-0772f8:toc-item-1:toc-item-1"/>
           <p:cNvSpPr txBox="1"/>
           <p:nvPr/>
         </p:nvSpPr>
@@ -13736,7 +14792,7 @@
       </p:sp>
       <p:sp>
         <p:nvSpPr>
-          <p:cNvPr id="24" name="mdpr:1-2-0772f8:toc-item-2:toc-item-2"/>
+          <p:cNvPr id="27" name="mdpr:1-2-0772f8:toc-item-2:toc-item-2"/>
           <p:cNvSpPr txBox="1"/>
           <p:nvPr/>
         </p:nvSpPr>
@@ -13778,7 +14834,7 @@
       </p:sp>
       <p:sp>
         <p:nvSpPr>
-          <p:cNvPr id="25" name="mdpr:1-2-0772f8:toc-item-3:toc-item-3"/>
+          <p:cNvPr id="28" name="mdpr:1-2-0772f8:toc-item-3:toc-item-3"/>
           <p:cNvSpPr txBox="1"/>
           <p:nvPr/>
         </p:nvSpPr>
@@ -13820,7 +14876,7 @@
       </p:sp>
       <p:sp>
         <p:nvSpPr>
-          <p:cNvPr id="26" name="mdpr:1-2-0772f8:toc-item-4:toc-item-4"/>
+          <p:cNvPr id="29" name="mdpr:1-2-0772f8:toc-item-4:toc-item-4"/>
           <p:cNvSpPr txBox="1"/>
           <p:nvPr/>
         </p:nvSpPr>
@@ -13862,7 +14918,7 @@
       </p:sp>
       <p:sp>
         <p:nvSpPr>
-          <p:cNvPr id="27" name="mdpr:1-2-0772f8:toc-item-5:toc-item-5"/>
+          <p:cNvPr id="30" name="mdpr:1-2-0772f8:toc-item-5:toc-item-5"/>
           <p:cNvSpPr txBox="1"/>
           <p:nvPr/>
         </p:nvSpPr>
@@ -13904,7 +14960,7 @@
       </p:sp>
       <p:sp>
         <p:nvSpPr>
-          <p:cNvPr id="28" name="mdpr:1-2-0772f8:toc-item-6:toc-item-6"/>
+          <p:cNvPr id="31" name="mdpr:1-2-0772f8:toc-item-6:toc-item-6"/>
           <p:cNvSpPr txBox="1"/>
           <p:nvPr/>
         </p:nvSpPr>
@@ -13946,7 +15002,7 @@
       </p:sp>
       <p:sp>
         <p:nvSpPr>
-          <p:cNvPr id="29" name="mdpr:1-2-0772f8:toc-item-7:toc-item-7"/>
+          <p:cNvPr id="32" name="mdpr:1-2-0772f8:toc-item-7:toc-item-7"/>
           <p:cNvSpPr txBox="1"/>
           <p:nvPr/>
         </p:nvSpPr>
@@ -13988,7 +15044,7 @@
       </p:sp>
       <p:sp>
         <p:nvSpPr>
-          <p:cNvPr id="30" name="mdpr:1-2-0772f8:toc-item-8:toc-item-8"/>
+          <p:cNvPr id="33" name="mdpr:1-2-0772f8:toc-item-8:toc-item-8"/>
           <p:cNvSpPr txBox="1"/>
           <p:nvPr/>
         </p:nvSpPr>
@@ -14030,7 +15086,7 @@
       </p:sp>
       <p:sp>
         <p:nvSpPr>
-          <p:cNvPr id="31" name="mdpr:1-2-0772f8:toc-item-9:toc-item-9"/>
+          <p:cNvPr id="34" name="mdpr:1-2-0772f8:toc-item-9:toc-item-9"/>
           <p:cNvSpPr txBox="1"/>
           <p:nvPr/>
         </p:nvSpPr>
@@ -14072,7 +15128,7 @@
       </p:sp>
       <p:sp>
         <p:nvSpPr>
-          <p:cNvPr id="32" name="mdpr:1-2-0772f8:toc-item-10:toc-item-10"/>
+          <p:cNvPr id="35" name="mdpr:1-2-0772f8:toc-item-10:toc-item-10"/>
           <p:cNvSpPr txBox="1"/>
           <p:nvPr/>
         </p:nvSpPr>
@@ -14114,7 +15170,7 @@
       </p:sp>
       <p:sp>
         <p:nvSpPr>
-          <p:cNvPr id="33" name="mdpr:1-2-0772f8:toc-item-11:toc-item-11"/>
+          <p:cNvPr id="36" name="mdpr:1-2-0772f8:toc-item-11:toc-item-11"/>
           <p:cNvSpPr txBox="1"/>
           <p:nvPr/>
         </p:nvSpPr>
@@ -14156,7 +15212,7 @@
       </p:sp>
       <p:sp>
         <p:nvSpPr>
-          <p:cNvPr id="34" name="mdpr:1-2-0772f8:toc-item-12:toc-item-12"/>
+          <p:cNvPr id="37" name="mdpr:1-2-0772f8:toc-item-12:toc-item-12"/>
           <p:cNvSpPr txBox="1"/>
           <p:nvPr/>
         </p:nvSpPr>
@@ -14198,7 +15254,7 @@
       </p:sp>
       <p:sp>
         <p:nvSpPr>
-          <p:cNvPr id="35" name="mdpr:1-2-0772f8:toc-item-13:toc-item-13"/>
+          <p:cNvPr id="38" name="mdpr:1-2-0772f8:toc-item-13:toc-item-13"/>
           <p:cNvSpPr txBox="1"/>
           <p:nvPr/>
         </p:nvSpPr>
@@ -14240,7 +15296,7 @@
       </p:sp>
       <p:sp>
         <p:nvSpPr>
-          <p:cNvPr id="36" name="mdpr:1-2-0772f8:toc-item-14:toc-item-14"/>
+          <p:cNvPr id="39" name="mdpr:1-2-0772f8:toc-item-14:toc-item-14"/>
           <p:cNvSpPr txBox="1"/>
           <p:nvPr/>
         </p:nvSpPr>
@@ -14320,6 +15376,44 @@
         </p:nvSpPr>
         <p:spPr>
           <a:xfrm>
+            <a:off x="9375343" y="384048"/>
+            <a:ext cx="1737360" cy="310896"/>
+          </a:xfrm>
+          <a:prstGeom prst="roundRect">
+            <a:avLst>
+              <a:gd name="adj" fmla="val 14706"/>
+            </a:avLst>
+          </a:prstGeom>
+          <a:solidFill>
+            <a:srgbClr val="F8FAFC">
+              <a:alpha val="72000"/>
+            </a:srgbClr>
+          </a:solidFill>
+          <a:ln w="12700">
+            <a:solidFill>
+              <a:srgbClr val="FFFFFF">
+                <a:alpha val="28000"/>
+              </a:srgbClr>
+            </a:solidFill>
+            <a:prstDash val="solid"/>
+          </a:ln>
+          <a:effectLst>
+            <a:outerShdw sx="100000" sy="100000" kx="0" ky="0" algn="bl" rotWithShape="0" blurRad="15240" dist="50800" dir="2700000">
+              <a:srgbClr val="B8C3D2">
+                <a:alpha val="16000"/>
+              </a:srgbClr>
+            </a:outerShdw>
+          </a:effectLst>
+        </p:spPr>
+      </p:sp>
+      <p:sp>
+        <p:nvSpPr>
+          <p:cNvPr id="3" name="Shape 1"/>
+          <p:cNvSpPr/>
+          <p:nvPr/>
+        </p:nvSpPr>
+        <p:spPr>
+          <a:xfrm>
             <a:off x="10362895" y="502920"/>
             <a:ext cx="822960" cy="822960"/>
           </a:xfrm>
@@ -14350,7 +15444,7 @@
       </p:sp>
       <p:sp>
         <p:nvSpPr>
-          <p:cNvPr id="3" name="Shape 1"/>
+          <p:cNvPr id="4" name="Shape 2"/>
           <p:cNvSpPr/>
           <p:nvPr/>
         </p:nvSpPr>
@@ -14384,7 +15478,57 @@
       </p:sp>
       <p:sp>
         <p:nvSpPr>
-          <p:cNvPr id="4" name="Shape 2"/>
+          <p:cNvPr id="5" name="Shape 3"/>
+          <p:cNvSpPr/>
+          <p:nvPr/>
+        </p:nvSpPr>
+        <p:spPr>
+          <a:xfrm>
+            <a:off x="9265615" y="6437376"/>
+            <a:ext cx="1993392" cy="0"/>
+          </a:xfrm>
+          <a:prstGeom prst="line">
+            <a:avLst/>
+          </a:prstGeom>
+          <a:noFill/>
+          <a:ln w="12700">
+            <a:solidFill>
+              <a:srgbClr val="FFFFFF">
+                <a:alpha val="88000"/>
+              </a:srgbClr>
+            </a:solidFill>
+            <a:prstDash val="solid"/>
+          </a:ln>
+        </p:spPr>
+      </p:sp>
+      <p:sp>
+        <p:nvSpPr>
+          <p:cNvPr id="6" name="Shape 4"/>
+          <p:cNvSpPr/>
+          <p:nvPr/>
+        </p:nvSpPr>
+        <p:spPr>
+          <a:xfrm>
+            <a:off x="9338767" y="6501384"/>
+            <a:ext cx="1920240" cy="0"/>
+          </a:xfrm>
+          <a:prstGeom prst="line">
+            <a:avLst/>
+          </a:prstGeom>
+          <a:noFill/>
+          <a:ln w="12700">
+            <a:solidFill>
+              <a:srgbClr val="B8C3D2">
+                <a:alpha val="64000"/>
+              </a:srgbClr>
+            </a:solidFill>
+            <a:prstDash val="solid"/>
+          </a:ln>
+        </p:spPr>
+      </p:sp>
+      <p:sp>
+        <p:nvSpPr>
+          <p:cNvPr id="7" name="Shape 5"/>
           <p:cNvSpPr/>
           <p:nvPr/>
         </p:nvSpPr>
@@ -14411,7 +15555,7 @@
       </p:sp>
       <p:sp>
         <p:nvSpPr>
-          <p:cNvPr id="5" name="Shape 3"/>
+          <p:cNvPr id="8" name="Shape 6"/>
           <p:cNvSpPr/>
           <p:nvPr/>
         </p:nvSpPr>
@@ -14438,7 +15582,7 @@
       </p:sp>
       <p:sp>
         <p:nvSpPr>
-          <p:cNvPr id="6" name="Shape 4"/>
+          <p:cNvPr id="9" name="Shape 7"/>
           <p:cNvSpPr/>
           <p:nvPr/>
         </p:nvSpPr>
@@ -14465,7 +15609,7 @@
       </p:sp>
       <p:sp>
         <p:nvSpPr>
-          <p:cNvPr id="7" name="mdpr:2-2-4f71ba:title:__title:2-2-4f71ba"/>
+          <p:cNvPr id="10" name="mdpr:2-2-4f71ba:title:__title:2-2-4f71ba"/>
           <p:cNvSpPr txBox="1"/>
           <p:nvPr/>
         </p:nvSpPr>
@@ -14507,7 +15651,7 @@
       </p:sp>
       <p:sp>
         <p:nvSpPr>
-          <p:cNvPr id="8" name="mdpr:2-2-4f71ba:left:block-27-chunk-2"/>
+          <p:cNvPr id="11" name="mdpr:2-2-4f71ba:left:block-27-chunk-2"/>
           <p:cNvSpPr txBox="1"/>
           <p:nvPr/>
         </p:nvSpPr>
@@ -14566,7 +15710,7 @@
       </p:sp>
       <p:sp>
         <p:nvSpPr>
-          <p:cNvPr id="9" name="mdpr:2-2-4f71ba:right:block-27-chunk-2"/>
+          <p:cNvPr id="12" name="mdpr:2-2-4f71ba:right:block-27-chunk-2"/>
           <p:cNvSpPr txBox="1"/>
           <p:nvPr/>
         </p:nvSpPr>
@@ -14663,6 +15807,44 @@
         </p:nvSpPr>
         <p:spPr>
           <a:xfrm>
+            <a:off x="9375343" y="384048"/>
+            <a:ext cx="1737360" cy="310896"/>
+          </a:xfrm>
+          <a:prstGeom prst="roundRect">
+            <a:avLst>
+              <a:gd name="adj" fmla="val 14706"/>
+            </a:avLst>
+          </a:prstGeom>
+          <a:solidFill>
+            <a:srgbClr val="F8FAFC">
+              <a:alpha val="72000"/>
+            </a:srgbClr>
+          </a:solidFill>
+          <a:ln w="12700">
+            <a:solidFill>
+              <a:srgbClr val="FFFFFF">
+                <a:alpha val="28000"/>
+              </a:srgbClr>
+            </a:solidFill>
+            <a:prstDash val="solid"/>
+          </a:ln>
+          <a:effectLst>
+            <a:outerShdw sx="100000" sy="100000" kx="0" ky="0" algn="bl" rotWithShape="0" blurRad="15240" dist="50800" dir="2700000">
+              <a:srgbClr val="B8C3D2">
+                <a:alpha val="16000"/>
+              </a:srgbClr>
+            </a:outerShdw>
+          </a:effectLst>
+        </p:spPr>
+      </p:sp>
+      <p:sp>
+        <p:nvSpPr>
+          <p:cNvPr id="3" name="Shape 1"/>
+          <p:cNvSpPr/>
+          <p:nvPr/>
+        </p:nvSpPr>
+        <p:spPr>
+          <a:xfrm>
             <a:off x="10362895" y="502920"/>
             <a:ext cx="822960" cy="822960"/>
           </a:xfrm>
@@ -14693,7 +15875,7 @@
       </p:sp>
       <p:sp>
         <p:nvSpPr>
-          <p:cNvPr id="3" name="Shape 1"/>
+          <p:cNvPr id="4" name="Shape 2"/>
           <p:cNvSpPr/>
           <p:nvPr/>
         </p:nvSpPr>
@@ -14727,7 +15909,57 @@
       </p:sp>
       <p:sp>
         <p:nvSpPr>
-          <p:cNvPr id="4" name="Shape 2"/>
+          <p:cNvPr id="5" name="Shape 3"/>
+          <p:cNvSpPr/>
+          <p:nvPr/>
+        </p:nvSpPr>
+        <p:spPr>
+          <a:xfrm>
+            <a:off x="9265615" y="6437376"/>
+            <a:ext cx="1993392" cy="0"/>
+          </a:xfrm>
+          <a:prstGeom prst="line">
+            <a:avLst/>
+          </a:prstGeom>
+          <a:noFill/>
+          <a:ln w="12700">
+            <a:solidFill>
+              <a:srgbClr val="FFFFFF">
+                <a:alpha val="88000"/>
+              </a:srgbClr>
+            </a:solidFill>
+            <a:prstDash val="solid"/>
+          </a:ln>
+        </p:spPr>
+      </p:sp>
+      <p:sp>
+        <p:nvSpPr>
+          <p:cNvPr id="6" name="Shape 4"/>
+          <p:cNvSpPr/>
+          <p:nvPr/>
+        </p:nvSpPr>
+        <p:spPr>
+          <a:xfrm>
+            <a:off x="9338767" y="6501384"/>
+            <a:ext cx="1920240" cy="0"/>
+          </a:xfrm>
+          <a:prstGeom prst="line">
+            <a:avLst/>
+          </a:prstGeom>
+          <a:noFill/>
+          <a:ln w="12700">
+            <a:solidFill>
+              <a:srgbClr val="B8C3D2">
+                <a:alpha val="64000"/>
+              </a:srgbClr>
+            </a:solidFill>
+            <a:prstDash val="solid"/>
+          </a:ln>
+        </p:spPr>
+      </p:sp>
+      <p:sp>
+        <p:nvSpPr>
+          <p:cNvPr id="7" name="Shape 5"/>
           <p:cNvSpPr/>
           <p:nvPr/>
         </p:nvSpPr>
@@ -14754,7 +15986,7 @@
       </p:sp>
       <p:sp>
         <p:nvSpPr>
-          <p:cNvPr id="5" name="Shape 3"/>
+          <p:cNvPr id="8" name="Shape 6"/>
           <p:cNvSpPr/>
           <p:nvPr/>
         </p:nvSpPr>
@@ -14792,7 +16024,7 @@
       </p:sp>
       <p:sp>
         <p:nvSpPr>
-          <p:cNvPr id="6" name="Shape 4"/>
+          <p:cNvPr id="9" name="Shape 7"/>
           <p:cNvSpPr/>
           <p:nvPr/>
         </p:nvSpPr>
@@ -14830,7 +16062,7 @@
       </p:sp>
       <p:sp>
         <p:nvSpPr>
-          <p:cNvPr id="7" name="Shape 5"/>
+          <p:cNvPr id="10" name="Shape 8"/>
           <p:cNvSpPr/>
           <p:nvPr/>
         </p:nvSpPr>
@@ -14861,7 +16093,7 @@
       </p:sp>
       <p:pic>
         <p:nvPicPr>
-          <p:cNvPr id="8" name="Image 0" descr="preencoded.png">    </p:cNvPr>
+          <p:cNvPr id="11" name="Image 0" descr="preencoded.png">    </p:cNvPr>
           <p:cNvPicPr>
             <a:picLocks noChangeAspect="1"/>
           </p:cNvPicPr>
@@ -14891,7 +16123,7 @@
       </p:pic>
       <p:sp>
         <p:nvSpPr>
-          <p:cNvPr id="9" name="Shape 6"/>
+          <p:cNvPr id="12" name="Shape 9"/>
           <p:cNvSpPr/>
           <p:nvPr/>
         </p:nvSpPr>
@@ -14929,7 +16161,7 @@
       </p:sp>
       <p:sp>
         <p:nvSpPr>
-          <p:cNvPr id="10" name="Shape 7"/>
+          <p:cNvPr id="13" name="Shape 10"/>
           <p:cNvSpPr/>
           <p:nvPr/>
         </p:nvSpPr>
@@ -14967,7 +16199,7 @@
       </p:sp>
       <p:sp>
         <p:nvSpPr>
-          <p:cNvPr id="11" name="Shape 8"/>
+          <p:cNvPr id="14" name="Shape 11"/>
           <p:cNvSpPr/>
           <p:nvPr/>
         </p:nvSpPr>
@@ -14998,7 +16230,7 @@
       </p:sp>
       <p:pic>
         <p:nvPicPr>
-          <p:cNvPr id="12" name="Image 1" descr="preencoded.png">    </p:cNvPr>
+          <p:cNvPr id="15" name="Image 1" descr="preencoded.png">    </p:cNvPr>
           <p:cNvPicPr>
             <a:picLocks noChangeAspect="1"/>
           </p:cNvPicPr>
@@ -15028,7 +16260,7 @@
       </p:pic>
       <p:sp>
         <p:nvSpPr>
-          <p:cNvPr id="13" name="Shape 9"/>
+          <p:cNvPr id="16" name="Shape 12"/>
           <p:cNvSpPr/>
           <p:nvPr/>
         </p:nvSpPr>
@@ -15066,7 +16298,7 @@
       </p:sp>
       <p:sp>
         <p:nvSpPr>
-          <p:cNvPr id="14" name="Shape 10"/>
+          <p:cNvPr id="17" name="Shape 13"/>
           <p:cNvSpPr/>
           <p:nvPr/>
         </p:nvSpPr>
@@ -15104,7 +16336,7 @@
       </p:sp>
       <p:sp>
         <p:nvSpPr>
-          <p:cNvPr id="15" name="Shape 11"/>
+          <p:cNvPr id="18" name="Shape 14"/>
           <p:cNvSpPr/>
           <p:nvPr/>
         </p:nvSpPr>
@@ -15135,7 +16367,7 @@
       </p:sp>
       <p:pic>
         <p:nvPicPr>
-          <p:cNvPr id="16" name="Image 2" descr="preencoded.png">    </p:cNvPr>
+          <p:cNvPr id="19" name="Image 2" descr="preencoded.png">    </p:cNvPr>
           <p:cNvPicPr>
             <a:picLocks noChangeAspect="1"/>
           </p:cNvPicPr>
@@ -15165,7 +16397,7 @@
       </p:pic>
       <p:sp>
         <p:nvSpPr>
-          <p:cNvPr id="17" name="Shape 12"/>
+          <p:cNvPr id="20" name="Shape 15"/>
           <p:cNvSpPr/>
           <p:nvPr/>
         </p:nvSpPr>
@@ -15203,7 +16435,7 @@
       </p:sp>
       <p:sp>
         <p:nvSpPr>
-          <p:cNvPr id="18" name="Shape 13"/>
+          <p:cNvPr id="21" name="Shape 16"/>
           <p:cNvSpPr/>
           <p:nvPr/>
         </p:nvSpPr>
@@ -15241,7 +16473,7 @@
       </p:sp>
       <p:sp>
         <p:nvSpPr>
-          <p:cNvPr id="19" name="Shape 14"/>
+          <p:cNvPr id="22" name="Shape 17"/>
           <p:cNvSpPr/>
           <p:nvPr/>
         </p:nvSpPr>
@@ -15272,7 +16504,7 @@
       </p:sp>
       <p:pic>
         <p:nvPicPr>
-          <p:cNvPr id="20" name="Image 3" descr="preencoded.png">    </p:cNvPr>
+          <p:cNvPr id="23" name="Image 3" descr="preencoded.png">    </p:cNvPr>
           <p:cNvPicPr>
             <a:picLocks noChangeAspect="1"/>
           </p:cNvPicPr>
@@ -15302,7 +16534,7 @@
       </p:pic>
       <p:sp>
         <p:nvSpPr>
-          <p:cNvPr id="21" name="Shape 15"/>
+          <p:cNvPr id="24" name="Shape 18"/>
           <p:cNvSpPr/>
           <p:nvPr/>
         </p:nvSpPr>
@@ -15329,7 +16561,7 @@
       </p:sp>
       <p:sp>
         <p:nvSpPr>
-          <p:cNvPr id="22" name="Shape 16"/>
+          <p:cNvPr id="25" name="Shape 19"/>
           <p:cNvSpPr/>
           <p:nvPr/>
         </p:nvSpPr>
@@ -15356,7 +16588,7 @@
       </p:sp>
       <p:sp>
         <p:nvSpPr>
-          <p:cNvPr id="23" name="Shape 17"/>
+          <p:cNvPr id="26" name="Shape 20"/>
           <p:cNvSpPr/>
           <p:nvPr/>
         </p:nvSpPr>
@@ -15383,7 +16615,7 @@
       </p:sp>
       <p:sp>
         <p:nvSpPr>
-          <p:cNvPr id="24" name="Shape 18"/>
+          <p:cNvPr id="27" name="Shape 21"/>
           <p:cNvSpPr/>
           <p:nvPr/>
         </p:nvSpPr>
@@ -15410,7 +16642,7 @@
       </p:sp>
       <p:sp>
         <p:nvSpPr>
-          <p:cNvPr id="25" name="mdpr:icon-and-text-aside-8429fc:title:__title:icon-and-text-aside-8429fc"/>
+          <p:cNvPr id="28" name="mdpr:icon-and-text-aside-8429fc:title:__title:icon-and-text-aside-8429fc"/>
           <p:cNvSpPr txBox="1"/>
           <p:nvPr/>
         </p:nvSpPr>
@@ -15452,7 +16684,7 @@
       </p:sp>
       <p:sp>
         <p:nvSpPr>
-          <p:cNvPr id="26" name="Shape 20"/>
+          <p:cNvPr id="29" name="Shape 23"/>
           <p:cNvSpPr/>
           <p:nvPr/>
         </p:nvSpPr>
@@ -15479,7 +16711,7 @@
       </p:sp>
       <p:pic>
         <p:nvPicPr>
-          <p:cNvPr id="27" name="Image 4" descr="article icon from tabler-icons (MIT)">    </p:cNvPr>
+          <p:cNvPr id="30" name="Image 4" descr="article icon from tabler-icons (MIT)">    </p:cNvPr>
           <p:cNvPicPr>
             <a:picLocks noChangeAspect="1"/>
           </p:cNvPicPr>
@@ -15509,7 +16741,7 @@
       </p:pic>
       <p:sp>
         <p:nvSpPr>
-          <p:cNvPr id="28" name="mdpr:icon-and-text-aside-8429fc:item-1:block-29"/>
+          <p:cNvPr id="31" name="mdpr:icon-and-text-aside-8429fc:item-1:block-29"/>
           <p:cNvSpPr txBox="1"/>
           <p:nvPr/>
         </p:nvSpPr>
@@ -15568,7 +16800,7 @@
       </p:sp>
       <p:sp>
         <p:nvSpPr>
-          <p:cNvPr id="29" name="Shape 22"/>
+          <p:cNvPr id="32" name="Shape 25"/>
           <p:cNvSpPr/>
           <p:nvPr/>
         </p:nvSpPr>
@@ -15595,7 +16827,7 @@
       </p:sp>
       <p:pic>
         <p:nvPicPr>
-          <p:cNvPr id="30" name="Image 5" descr="article icon from tabler-icons (MIT)">    </p:cNvPr>
+          <p:cNvPr id="33" name="Image 5" descr="article icon from tabler-icons (MIT)">    </p:cNvPr>
           <p:cNvPicPr>
             <a:picLocks noChangeAspect="1"/>
           </p:cNvPicPr>
@@ -15625,7 +16857,7 @@
       </p:pic>
       <p:sp>
         <p:nvSpPr>
-          <p:cNvPr id="31" name="mdpr:icon-and-text-aside-8429fc:item-2:block-29"/>
+          <p:cNvPr id="34" name="mdpr:icon-and-text-aside-8429fc:item-2:block-29"/>
           <p:cNvSpPr txBox="1"/>
           <p:nvPr/>
         </p:nvSpPr>
@@ -15684,7 +16916,7 @@
       </p:sp>
       <p:sp>
         <p:nvSpPr>
-          <p:cNvPr id="32" name="Shape 24"/>
+          <p:cNvPr id="35" name="Shape 27"/>
           <p:cNvSpPr/>
           <p:nvPr/>
         </p:nvSpPr>
@@ -15711,7 +16943,7 @@
       </p:sp>
       <p:pic>
         <p:nvPicPr>
-          <p:cNvPr id="33" name="Image 6" descr="article icon from tabler-icons (MIT)">    </p:cNvPr>
+          <p:cNvPr id="36" name="Image 6" descr="article icon from tabler-icons (MIT)">    </p:cNvPr>
           <p:cNvPicPr>
             <a:picLocks noChangeAspect="1"/>
           </p:cNvPicPr>
@@ -15741,7 +16973,7 @@
       </p:pic>
       <p:sp>
         <p:nvSpPr>
-          <p:cNvPr id="34" name="mdpr:icon-and-text-aside-8429fc:item-3:block-29"/>
+          <p:cNvPr id="37" name="mdpr:icon-and-text-aside-8429fc:item-3:block-29"/>
           <p:cNvSpPr txBox="1"/>
           <p:nvPr/>
         </p:nvSpPr>
@@ -15800,7 +17032,7 @@
       </p:sp>
       <p:sp>
         <p:nvSpPr>
-          <p:cNvPr id="35" name="Shape 26"/>
+          <p:cNvPr id="38" name="Shape 29"/>
           <p:cNvSpPr/>
           <p:nvPr/>
         </p:nvSpPr>
@@ -15827,7 +17059,7 @@
       </p:sp>
       <p:pic>
         <p:nvPicPr>
-          <p:cNvPr id="36" name="Image 7" descr="table icon from tabler-icons (MIT)">    </p:cNvPr>
+          <p:cNvPr id="39" name="Image 7" descr="table icon from tabler-icons (MIT)">    </p:cNvPr>
           <p:cNvPicPr>
             <a:picLocks noChangeAspect="1"/>
           </p:cNvPicPr>
@@ -15857,7 +17089,7 @@
       </p:pic>
       <p:sp>
         <p:nvSpPr>
-          <p:cNvPr id="37" name="mdpr:icon-and-text-aside-8429fc:item-4:block-29"/>
+          <p:cNvPr id="40" name="mdpr:icon-and-text-aside-8429fc:item-4:block-29"/>
           <p:cNvSpPr txBox="1"/>
           <p:nvPr/>
         </p:nvSpPr>
@@ -15954,6 +17186,44 @@
         </p:nvSpPr>
         <p:spPr>
           <a:xfrm>
+            <a:off x="9375343" y="384048"/>
+            <a:ext cx="1737360" cy="310896"/>
+          </a:xfrm>
+          <a:prstGeom prst="roundRect">
+            <a:avLst>
+              <a:gd name="adj" fmla="val 14706"/>
+            </a:avLst>
+          </a:prstGeom>
+          <a:solidFill>
+            <a:srgbClr val="F8FAFC">
+              <a:alpha val="72000"/>
+            </a:srgbClr>
+          </a:solidFill>
+          <a:ln w="12700">
+            <a:solidFill>
+              <a:srgbClr val="FFFFFF">
+                <a:alpha val="28000"/>
+              </a:srgbClr>
+            </a:solidFill>
+            <a:prstDash val="solid"/>
+          </a:ln>
+          <a:effectLst>
+            <a:outerShdw sx="100000" sy="100000" kx="0" ky="0" algn="bl" rotWithShape="0" blurRad="15240" dist="50800" dir="2700000">
+              <a:srgbClr val="B8C3D2">
+                <a:alpha val="16000"/>
+              </a:srgbClr>
+            </a:outerShdw>
+          </a:effectLst>
+        </p:spPr>
+      </p:sp>
+      <p:sp>
+        <p:nvSpPr>
+          <p:cNvPr id="3" name="Shape 1"/>
+          <p:cNvSpPr/>
+          <p:nvPr/>
+        </p:nvSpPr>
+        <p:spPr>
+          <a:xfrm>
             <a:off x="10362895" y="502920"/>
             <a:ext cx="822960" cy="822960"/>
           </a:xfrm>
@@ -15984,7 +17254,7 @@
       </p:sp>
       <p:sp>
         <p:nvSpPr>
-          <p:cNvPr id="3" name="Shape 1"/>
+          <p:cNvPr id="4" name="Shape 2"/>
           <p:cNvSpPr/>
           <p:nvPr/>
         </p:nvSpPr>
@@ -16018,7 +17288,57 @@
       </p:sp>
       <p:sp>
         <p:nvSpPr>
-          <p:cNvPr id="4" name="Shape 2"/>
+          <p:cNvPr id="5" name="Shape 3"/>
+          <p:cNvSpPr/>
+          <p:nvPr/>
+        </p:nvSpPr>
+        <p:spPr>
+          <a:xfrm>
+            <a:off x="9265615" y="6437376"/>
+            <a:ext cx="1993392" cy="0"/>
+          </a:xfrm>
+          <a:prstGeom prst="line">
+            <a:avLst/>
+          </a:prstGeom>
+          <a:noFill/>
+          <a:ln w="12700">
+            <a:solidFill>
+              <a:srgbClr val="FFFFFF">
+                <a:alpha val="88000"/>
+              </a:srgbClr>
+            </a:solidFill>
+            <a:prstDash val="solid"/>
+          </a:ln>
+        </p:spPr>
+      </p:sp>
+      <p:sp>
+        <p:nvSpPr>
+          <p:cNvPr id="6" name="Shape 4"/>
+          <p:cNvSpPr/>
+          <p:nvPr/>
+        </p:nvSpPr>
+        <p:spPr>
+          <a:xfrm>
+            <a:off x="9338767" y="6501384"/>
+            <a:ext cx="1920240" cy="0"/>
+          </a:xfrm>
+          <a:prstGeom prst="line">
+            <a:avLst/>
+          </a:prstGeom>
+          <a:noFill/>
+          <a:ln w="12700">
+            <a:solidFill>
+              <a:srgbClr val="B8C3D2">
+                <a:alpha val="64000"/>
+              </a:srgbClr>
+            </a:solidFill>
+            <a:prstDash val="solid"/>
+          </a:ln>
+        </p:spPr>
+      </p:sp>
+      <p:sp>
+        <p:nvSpPr>
+          <p:cNvPr id="7" name="Shape 5"/>
           <p:cNvSpPr/>
           <p:nvPr/>
         </p:nvSpPr>
@@ -16045,7 +17365,7 @@
       </p:sp>
       <p:sp>
         <p:nvSpPr>
-          <p:cNvPr id="5" name="Shape 3"/>
+          <p:cNvPr id="8" name="Shape 6"/>
           <p:cNvSpPr/>
           <p:nvPr/>
         </p:nvSpPr>
@@ -16083,7 +17403,7 @@
       </p:sp>
       <p:sp>
         <p:nvSpPr>
-          <p:cNvPr id="6" name="Shape 4"/>
+          <p:cNvPr id="9" name="Shape 7"/>
           <p:cNvSpPr/>
           <p:nvPr/>
         </p:nvSpPr>
@@ -16121,7 +17441,7 @@
       </p:sp>
       <p:sp>
         <p:nvSpPr>
-          <p:cNvPr id="7" name="Shape 5"/>
+          <p:cNvPr id="10" name="Shape 8"/>
           <p:cNvSpPr/>
           <p:nvPr/>
         </p:nvSpPr>
@@ -16152,7 +17472,7 @@
       </p:sp>
       <p:pic>
         <p:nvPicPr>
-          <p:cNvPr id="8" name="Image 0" descr="preencoded.png">    </p:cNvPr>
+          <p:cNvPr id="11" name="Image 0" descr="preencoded.png">    </p:cNvPr>
           <p:cNvPicPr>
             <a:picLocks noChangeAspect="1"/>
           </p:cNvPicPr>
@@ -16182,7 +17502,7 @@
       </p:pic>
       <p:sp>
         <p:nvSpPr>
-          <p:cNvPr id="9" name="Shape 6"/>
+          <p:cNvPr id="12" name="Shape 9"/>
           <p:cNvSpPr/>
           <p:nvPr/>
         </p:nvSpPr>
@@ -16220,7 +17540,7 @@
       </p:sp>
       <p:sp>
         <p:nvSpPr>
-          <p:cNvPr id="10" name="Shape 7"/>
+          <p:cNvPr id="13" name="Shape 10"/>
           <p:cNvSpPr/>
           <p:nvPr/>
         </p:nvSpPr>
@@ -16258,7 +17578,7 @@
       </p:sp>
       <p:sp>
         <p:nvSpPr>
-          <p:cNvPr id="11" name="Shape 8"/>
+          <p:cNvPr id="14" name="Shape 11"/>
           <p:cNvSpPr/>
           <p:nvPr/>
         </p:nvSpPr>
@@ -16289,7 +17609,7 @@
       </p:sp>
       <p:pic>
         <p:nvPicPr>
-          <p:cNvPr id="12" name="Image 1" descr="preencoded.png">    </p:cNvPr>
+          <p:cNvPr id="15" name="Image 1" descr="preencoded.png">    </p:cNvPr>
           <p:cNvPicPr>
             <a:picLocks noChangeAspect="1"/>
           </p:cNvPicPr>
@@ -16319,7 +17639,7 @@
       </p:pic>
       <p:sp>
         <p:nvSpPr>
-          <p:cNvPr id="13" name="Shape 9"/>
+          <p:cNvPr id="16" name="Shape 12"/>
           <p:cNvSpPr/>
           <p:nvPr/>
         </p:nvSpPr>
@@ -16357,7 +17677,7 @@
       </p:sp>
       <p:sp>
         <p:nvSpPr>
-          <p:cNvPr id="14" name="Shape 10"/>
+          <p:cNvPr id="17" name="Shape 13"/>
           <p:cNvSpPr/>
           <p:nvPr/>
         </p:nvSpPr>
@@ -16395,7 +17715,7 @@
       </p:sp>
       <p:sp>
         <p:nvSpPr>
-          <p:cNvPr id="15" name="Shape 11"/>
+          <p:cNvPr id="18" name="Shape 14"/>
           <p:cNvSpPr/>
           <p:nvPr/>
         </p:nvSpPr>
@@ -16426,7 +17746,7 @@
       </p:sp>
       <p:pic>
         <p:nvPicPr>
-          <p:cNvPr id="16" name="Image 2" descr="preencoded.png">    </p:cNvPr>
+          <p:cNvPr id="19" name="Image 2" descr="preencoded.png">    </p:cNvPr>
           <p:cNvPicPr>
             <a:picLocks noChangeAspect="1"/>
           </p:cNvPicPr>
@@ -16456,7 +17776,7 @@
       </p:pic>
       <p:sp>
         <p:nvSpPr>
-          <p:cNvPr id="17" name="Shape 12"/>
+          <p:cNvPr id="20" name="Shape 15"/>
           <p:cNvSpPr/>
           <p:nvPr/>
         </p:nvSpPr>
@@ -16494,7 +17814,7 @@
       </p:sp>
       <p:sp>
         <p:nvSpPr>
-          <p:cNvPr id="18" name="Shape 13"/>
+          <p:cNvPr id="21" name="Shape 16"/>
           <p:cNvSpPr/>
           <p:nvPr/>
         </p:nvSpPr>
@@ -16532,7 +17852,7 @@
       </p:sp>
       <p:sp>
         <p:nvSpPr>
-          <p:cNvPr id="19" name="Shape 14"/>
+          <p:cNvPr id="22" name="Shape 17"/>
           <p:cNvSpPr/>
           <p:nvPr/>
         </p:nvSpPr>
@@ -16563,7 +17883,7 @@
       </p:sp>
       <p:pic>
         <p:nvPicPr>
-          <p:cNvPr id="20" name="Image 3" descr="preencoded.png">    </p:cNvPr>
+          <p:cNvPr id="23" name="Image 3" descr="preencoded.png">    </p:cNvPr>
           <p:cNvPicPr>
             <a:picLocks noChangeAspect="1"/>
           </p:cNvPicPr>
@@ -16593,7 +17913,7 @@
       </p:pic>
       <p:sp>
         <p:nvSpPr>
-          <p:cNvPr id="21" name="Shape 15"/>
+          <p:cNvPr id="24" name="Shape 18"/>
           <p:cNvSpPr/>
           <p:nvPr/>
         </p:nvSpPr>
@@ -16620,7 +17940,7 @@
       </p:sp>
       <p:sp>
         <p:nvSpPr>
-          <p:cNvPr id="22" name="Shape 16"/>
+          <p:cNvPr id="25" name="Shape 19"/>
           <p:cNvSpPr/>
           <p:nvPr/>
         </p:nvSpPr>
@@ -16647,7 +17967,7 @@
       </p:sp>
       <p:sp>
         <p:nvSpPr>
-          <p:cNvPr id="23" name="Shape 17"/>
+          <p:cNvPr id="26" name="Shape 20"/>
           <p:cNvSpPr/>
           <p:nvPr/>
         </p:nvSpPr>
@@ -16674,7 +17994,7 @@
       </p:sp>
       <p:sp>
         <p:nvSpPr>
-          <p:cNvPr id="24" name="Shape 18"/>
+          <p:cNvPr id="27" name="Shape 21"/>
           <p:cNvSpPr/>
           <p:nvPr/>
         </p:nvSpPr>
@@ -16701,7 +18021,7 @@
       </p:sp>
       <p:sp>
         <p:nvSpPr>
-          <p:cNvPr id="25" name="mdpr:overflow-guard-f8d03e:title:__title:overflow-guard-f8d03e"/>
+          <p:cNvPr id="28" name="mdpr:overflow-guard-f8d03e:title:__title:overflow-guard-f8d03e"/>
           <p:cNvSpPr txBox="1"/>
           <p:nvPr/>
         </p:nvSpPr>
@@ -16743,7 +18063,7 @@
       </p:sp>
       <p:sp>
         <p:nvSpPr>
-          <p:cNvPr id="26" name="Shape 20"/>
+          <p:cNvPr id="29" name="Shape 23"/>
           <p:cNvSpPr/>
           <p:nvPr/>
         </p:nvSpPr>
@@ -16770,7 +18090,7 @@
       </p:sp>
       <p:pic>
         <p:nvPicPr>
-          <p:cNvPr id="27" name="Image 4" descr="verified icon from tabler-icons (MIT)">    </p:cNvPr>
+          <p:cNvPr id="30" name="Image 4" descr="verified icon from tabler-icons (MIT)">    </p:cNvPr>
           <p:cNvPicPr>
             <a:picLocks noChangeAspect="1"/>
           </p:cNvPicPr>
@@ -16800,7 +18120,7 @@
       </p:pic>
       <p:sp>
         <p:nvSpPr>
-          <p:cNvPr id="28" name="mdpr:overflow-guard-f8d03e:item-1:block-31"/>
+          <p:cNvPr id="31" name="mdpr:overflow-guard-f8d03e:item-1:block-31"/>
           <p:cNvSpPr txBox="1"/>
           <p:nvPr/>
         </p:nvSpPr>
@@ -16859,7 +18179,7 @@
       </p:sp>
       <p:sp>
         <p:nvSpPr>
-          <p:cNvPr id="29" name="Shape 22"/>
+          <p:cNvPr id="32" name="Shape 25"/>
           <p:cNvSpPr/>
           <p:nvPr/>
         </p:nvSpPr>
@@ -16886,7 +18206,7 @@
       </p:sp>
       <p:pic>
         <p:nvPicPr>
-          <p:cNvPr id="30" name="Image 5" descr="table icon from tabler-icons (MIT)">    </p:cNvPr>
+          <p:cNvPr id="33" name="Image 5" descr="table icon from tabler-icons (MIT)">    </p:cNvPr>
           <p:cNvPicPr>
             <a:picLocks noChangeAspect="1"/>
           </p:cNvPicPr>
@@ -16916,7 +18236,7 @@
       </p:pic>
       <p:sp>
         <p:nvSpPr>
-          <p:cNvPr id="31" name="mdpr:overflow-guard-f8d03e:item-2:block-31"/>
+          <p:cNvPr id="34" name="mdpr:overflow-guard-f8d03e:item-2:block-31"/>
           <p:cNvSpPr txBox="1"/>
           <p:nvPr/>
         </p:nvSpPr>
@@ -16975,7 +18295,7 @@
       </p:sp>
       <p:sp>
         <p:nvSpPr>
-          <p:cNvPr id="32" name="Shape 24"/>
+          <p:cNvPr id="35" name="Shape 27"/>
           <p:cNvSpPr/>
           <p:nvPr/>
         </p:nvSpPr>
@@ -17002,7 +18322,7 @@
       </p:sp>
       <p:pic>
         <p:nvPicPr>
-          <p:cNvPr id="33" name="Image 6" descr="article icon from tabler-icons (MIT)">    </p:cNvPr>
+          <p:cNvPr id="36" name="Image 6" descr="article icon from tabler-icons (MIT)">    </p:cNvPr>
           <p:cNvPicPr>
             <a:picLocks noChangeAspect="1"/>
           </p:cNvPicPr>
@@ -17032,7 +18352,7 @@
       </p:pic>
       <p:sp>
         <p:nvSpPr>
-          <p:cNvPr id="34" name="mdpr:overflow-guard-f8d03e:item-3:block-31"/>
+          <p:cNvPr id="37" name="mdpr:overflow-guard-f8d03e:item-3:block-31"/>
           <p:cNvSpPr txBox="1"/>
           <p:nvPr/>
         </p:nvSpPr>
@@ -17091,7 +18411,7 @@
       </p:sp>
       <p:sp>
         <p:nvSpPr>
-          <p:cNvPr id="35" name="Shape 26"/>
+          <p:cNvPr id="38" name="Shape 29"/>
           <p:cNvSpPr/>
           <p:nvPr/>
         </p:nvSpPr>
@@ -17118,7 +18438,7 @@
       </p:sp>
       <p:pic>
         <p:nvPicPr>
-          <p:cNvPr id="36" name="Image 7" descr="article icon from tabler-icons (MIT)">    </p:cNvPr>
+          <p:cNvPr id="39" name="Image 7" descr="article icon from tabler-icons (MIT)">    </p:cNvPr>
           <p:cNvPicPr>
             <a:picLocks noChangeAspect="1"/>
           </p:cNvPicPr>
@@ -17148,7 +18468,7 @@
       </p:pic>
       <p:sp>
         <p:nvSpPr>
-          <p:cNvPr id="37" name="mdpr:overflow-guard-f8d03e:item-4:block-31"/>
+          <p:cNvPr id="40" name="mdpr:overflow-guard-f8d03e:item-4:block-31"/>
           <p:cNvSpPr txBox="1"/>
           <p:nvPr/>
         </p:nvSpPr>
@@ -17245,6 +18565,44 @@
         </p:nvSpPr>
         <p:spPr>
           <a:xfrm>
+            <a:off x="9375343" y="384048"/>
+            <a:ext cx="1737360" cy="310896"/>
+          </a:xfrm>
+          <a:prstGeom prst="roundRect">
+            <a:avLst>
+              <a:gd name="adj" fmla="val 14706"/>
+            </a:avLst>
+          </a:prstGeom>
+          <a:solidFill>
+            <a:srgbClr val="F8FAFC">
+              <a:alpha val="72000"/>
+            </a:srgbClr>
+          </a:solidFill>
+          <a:ln w="12700">
+            <a:solidFill>
+              <a:srgbClr val="FFFFFF">
+                <a:alpha val="28000"/>
+              </a:srgbClr>
+            </a:solidFill>
+            <a:prstDash val="solid"/>
+          </a:ln>
+          <a:effectLst>
+            <a:outerShdw sx="100000" sy="100000" kx="0" ky="0" algn="bl" rotWithShape="0" blurRad="15240" dist="50800" dir="2700000">
+              <a:srgbClr val="B8C3D2">
+                <a:alpha val="16000"/>
+              </a:srgbClr>
+            </a:outerShdw>
+          </a:effectLst>
+        </p:spPr>
+      </p:sp>
+      <p:sp>
+        <p:nvSpPr>
+          <p:cNvPr id="3" name="Shape 1"/>
+          <p:cNvSpPr/>
+          <p:nvPr/>
+        </p:nvSpPr>
+        <p:spPr>
+          <a:xfrm>
             <a:off x="10362895" y="502920"/>
             <a:ext cx="822960" cy="822960"/>
           </a:xfrm>
@@ -17275,7 +18633,7 @@
       </p:sp>
       <p:sp>
         <p:nvSpPr>
-          <p:cNvPr id="3" name="Shape 1"/>
+          <p:cNvPr id="4" name="Shape 2"/>
           <p:cNvSpPr/>
           <p:nvPr/>
         </p:nvSpPr>
@@ -17309,7 +18667,57 @@
       </p:sp>
       <p:sp>
         <p:nvSpPr>
-          <p:cNvPr id="4" name="Shape 2"/>
+          <p:cNvPr id="5" name="Shape 3"/>
+          <p:cNvSpPr/>
+          <p:nvPr/>
+        </p:nvSpPr>
+        <p:spPr>
+          <a:xfrm>
+            <a:off x="9265615" y="6437376"/>
+            <a:ext cx="1993392" cy="0"/>
+          </a:xfrm>
+          <a:prstGeom prst="line">
+            <a:avLst/>
+          </a:prstGeom>
+          <a:noFill/>
+          <a:ln w="12700">
+            <a:solidFill>
+              <a:srgbClr val="FFFFFF">
+                <a:alpha val="88000"/>
+              </a:srgbClr>
+            </a:solidFill>
+            <a:prstDash val="solid"/>
+          </a:ln>
+        </p:spPr>
+      </p:sp>
+      <p:sp>
+        <p:nvSpPr>
+          <p:cNvPr id="6" name="Shape 4"/>
+          <p:cNvSpPr/>
+          <p:nvPr/>
+        </p:nvSpPr>
+        <p:spPr>
+          <a:xfrm>
+            <a:off x="9338767" y="6501384"/>
+            <a:ext cx="1920240" cy="0"/>
+          </a:xfrm>
+          <a:prstGeom prst="line">
+            <a:avLst/>
+          </a:prstGeom>
+          <a:noFill/>
+          <a:ln w="12700">
+            <a:solidFill>
+              <a:srgbClr val="B8C3D2">
+                <a:alpha val="64000"/>
+              </a:srgbClr>
+            </a:solidFill>
+            <a:prstDash val="solid"/>
+          </a:ln>
+        </p:spPr>
+      </p:sp>
+      <p:sp>
+        <p:nvSpPr>
+          <p:cNvPr id="7" name="Shape 5"/>
           <p:cNvSpPr/>
           <p:nvPr/>
         </p:nvSpPr>
@@ -17336,7 +18744,7 @@
       </p:sp>
       <p:sp>
         <p:nvSpPr>
-          <p:cNvPr id="5" name="Shape 3"/>
+          <p:cNvPr id="8" name="Shape 6"/>
           <p:cNvSpPr/>
           <p:nvPr/>
         </p:nvSpPr>
@@ -17374,7 +18782,7 @@
       </p:sp>
       <p:sp>
         <p:nvSpPr>
-          <p:cNvPr id="6" name="Shape 4"/>
+          <p:cNvPr id="9" name="Shape 7"/>
           <p:cNvSpPr/>
           <p:nvPr/>
         </p:nvSpPr>
@@ -17412,7 +18820,7 @@
       </p:sp>
       <p:sp>
         <p:nvSpPr>
-          <p:cNvPr id="7" name="Shape 5"/>
+          <p:cNvPr id="10" name="Shape 8"/>
           <p:cNvSpPr/>
           <p:nvPr/>
         </p:nvSpPr>
@@ -17443,7 +18851,7 @@
       </p:sp>
       <p:pic>
         <p:nvPicPr>
-          <p:cNvPr id="8" name="Image 0" descr="preencoded.png">    </p:cNvPr>
+          <p:cNvPr id="11" name="Image 0" descr="preencoded.png">    </p:cNvPr>
           <p:cNvPicPr>
             <a:picLocks noChangeAspect="1"/>
           </p:cNvPicPr>
@@ -17473,7 +18881,7 @@
       </p:pic>
       <p:sp>
         <p:nvSpPr>
-          <p:cNvPr id="9" name="Shape 6"/>
+          <p:cNvPr id="12" name="Shape 9"/>
           <p:cNvSpPr/>
           <p:nvPr/>
         </p:nvSpPr>
@@ -17500,7 +18908,7 @@
       </p:sp>
       <p:sp>
         <p:nvSpPr>
-          <p:cNvPr id="10" name="mdpr:image-safe-frame-d4d6a4:title:__title:image-safe-frame-d4d6a4"/>
+          <p:cNvPr id="13" name="mdpr:image-safe-frame-d4d6a4:title:__title:image-safe-frame-d4d6a4"/>
           <p:cNvSpPr txBox="1"/>
           <p:nvPr/>
         </p:nvSpPr>
@@ -17542,7 +18950,7 @@
       </p:sp>
       <p:sp>
         <p:nvSpPr>
-          <p:cNvPr id="11" name="mdpr:image-safe-frame-d4d6a4:body:block-33-block-33-block-33"/>
+          <p:cNvPr id="14" name="mdpr:image-safe-frame-d4d6a4:body:block-33-block-33-block-33"/>
           <p:cNvSpPr txBox="1"/>
           <p:nvPr/>
         </p:nvSpPr>
@@ -17681,7 +19089,7 @@
       </p:sp>
       <p:pic>
         <p:nvPicPr>
-          <p:cNvPr id="12" name="mdpr:image-safe-frame-d4d6a4:image-1:block-34" descr="{&quot;mdpr&quot;:{&quot;slideId&quot;:&quot;image-safe-frame-d4d6a4&quot;,&quot;layoutSlideId&quot;:&quot;layout-image-safe-frame-d4d6a4&quot;,&quot;regionId&quot;:&quot;image-1&quot;,&quot;blockIds&quot;:[&quot;block-34&quot;],&quot;objectKind&quot;:&quot;native-image&quot;,&quot;role&quot;:&quot;image&quot;,&quot;editable&quot;:false}}">    </p:cNvPr>
+          <p:cNvPr id="15" name="mdpr:image-safe-frame-d4d6a4:image-1:block-34" descr="{&quot;mdpr&quot;:{&quot;slideId&quot;:&quot;image-safe-frame-d4d6a4&quot;,&quot;layoutSlideId&quot;:&quot;layout-image-safe-frame-d4d6a4&quot;,&quot;regionId&quot;:&quot;image-1&quot;,&quot;blockIds&quot;:[&quot;block-34&quot;],&quot;objectKind&quot;:&quot;native-image&quot;,&quot;role&quot;:&quot;image&quot;,&quot;editable&quot;:false}}">    </p:cNvPr>
           <p:cNvPicPr>
             <a:picLocks noChangeAspect="1"/>
           </p:cNvPicPr>
@@ -17749,6 +19157,44 @@
         </p:nvSpPr>
         <p:spPr>
           <a:xfrm>
+            <a:off x="9375343" y="384048"/>
+            <a:ext cx="1737360" cy="310896"/>
+          </a:xfrm>
+          <a:prstGeom prst="roundRect">
+            <a:avLst>
+              <a:gd name="adj" fmla="val 14706"/>
+            </a:avLst>
+          </a:prstGeom>
+          <a:solidFill>
+            <a:srgbClr val="F8FAFC">
+              <a:alpha val="72000"/>
+            </a:srgbClr>
+          </a:solidFill>
+          <a:ln w="12700">
+            <a:solidFill>
+              <a:srgbClr val="FFFFFF">
+                <a:alpha val="28000"/>
+              </a:srgbClr>
+            </a:solidFill>
+            <a:prstDash val="solid"/>
+          </a:ln>
+          <a:effectLst>
+            <a:outerShdw sx="100000" sy="100000" kx="0" ky="0" algn="bl" rotWithShape="0" blurRad="15240" dist="50800" dir="2700000">
+              <a:srgbClr val="B8C3D2">
+                <a:alpha val="16000"/>
+              </a:srgbClr>
+            </a:outerShdw>
+          </a:effectLst>
+        </p:spPr>
+      </p:sp>
+      <p:sp>
+        <p:nvSpPr>
+          <p:cNvPr id="3" name="Shape 1"/>
+          <p:cNvSpPr/>
+          <p:nvPr/>
+        </p:nvSpPr>
+        <p:spPr>
+          <a:xfrm>
             <a:off x="10362895" y="502920"/>
             <a:ext cx="822960" cy="822960"/>
           </a:xfrm>
@@ -17779,7 +19225,7 @@
       </p:sp>
       <p:sp>
         <p:nvSpPr>
-          <p:cNvPr id="3" name="Shape 1"/>
+          <p:cNvPr id="4" name="Shape 2"/>
           <p:cNvSpPr/>
           <p:nvPr/>
         </p:nvSpPr>
@@ -17813,7 +19259,57 @@
       </p:sp>
       <p:sp>
         <p:nvSpPr>
-          <p:cNvPr id="4" name="Shape 2"/>
+          <p:cNvPr id="5" name="Shape 3"/>
+          <p:cNvSpPr/>
+          <p:nvPr/>
+        </p:nvSpPr>
+        <p:spPr>
+          <a:xfrm>
+            <a:off x="9265615" y="6437376"/>
+            <a:ext cx="1993392" cy="0"/>
+          </a:xfrm>
+          <a:prstGeom prst="line">
+            <a:avLst/>
+          </a:prstGeom>
+          <a:noFill/>
+          <a:ln w="12700">
+            <a:solidFill>
+              <a:srgbClr val="FFFFFF">
+                <a:alpha val="88000"/>
+              </a:srgbClr>
+            </a:solidFill>
+            <a:prstDash val="solid"/>
+          </a:ln>
+        </p:spPr>
+      </p:sp>
+      <p:sp>
+        <p:nvSpPr>
+          <p:cNvPr id="6" name="Shape 4"/>
+          <p:cNvSpPr/>
+          <p:nvPr/>
+        </p:nvSpPr>
+        <p:spPr>
+          <a:xfrm>
+            <a:off x="9338767" y="6501384"/>
+            <a:ext cx="1920240" cy="0"/>
+          </a:xfrm>
+          <a:prstGeom prst="line">
+            <a:avLst/>
+          </a:prstGeom>
+          <a:noFill/>
+          <a:ln w="12700">
+            <a:solidFill>
+              <a:srgbClr val="B8C3D2">
+                <a:alpha val="64000"/>
+              </a:srgbClr>
+            </a:solidFill>
+            <a:prstDash val="solid"/>
+          </a:ln>
+        </p:spPr>
+      </p:sp>
+      <p:sp>
+        <p:nvSpPr>
+          <p:cNvPr id="7" name="Shape 5"/>
           <p:cNvSpPr/>
           <p:nvPr/>
         </p:nvSpPr>
@@ -17840,7 +19336,7 @@
       </p:sp>
       <p:sp>
         <p:nvSpPr>
-          <p:cNvPr id="5" name="Shape 3"/>
+          <p:cNvPr id="8" name="Shape 6"/>
           <p:cNvSpPr/>
           <p:nvPr/>
         </p:nvSpPr>
@@ -17878,7 +19374,7 @@
       </p:sp>
       <p:sp>
         <p:nvSpPr>
-          <p:cNvPr id="6" name="Shape 4"/>
+          <p:cNvPr id="9" name="Shape 7"/>
           <p:cNvSpPr/>
           <p:nvPr/>
         </p:nvSpPr>
@@ -17916,7 +19412,7 @@
       </p:sp>
       <p:sp>
         <p:nvSpPr>
-          <p:cNvPr id="7" name="Shape 5"/>
+          <p:cNvPr id="10" name="Shape 8"/>
           <p:cNvSpPr/>
           <p:nvPr/>
         </p:nvSpPr>
@@ -17947,7 +19443,7 @@
       </p:sp>
       <p:pic>
         <p:nvPicPr>
-          <p:cNvPr id="8" name="Image 0" descr="preencoded.png">    </p:cNvPr>
+          <p:cNvPr id="11" name="Image 0" descr="preencoded.png">    </p:cNvPr>
           <p:cNvPicPr>
             <a:picLocks noChangeAspect="1"/>
           </p:cNvPicPr>
@@ -17977,7 +19473,7 @@
       </p:pic>
       <p:sp>
         <p:nvSpPr>
-          <p:cNvPr id="9" name="Shape 6"/>
+          <p:cNvPr id="12" name="Shape 9"/>
           <p:cNvSpPr/>
           <p:nvPr/>
         </p:nvSpPr>
@@ -18015,7 +19511,7 @@
       </p:sp>
       <p:sp>
         <p:nvSpPr>
-          <p:cNvPr id="10" name="Shape 7"/>
+          <p:cNvPr id="13" name="Shape 10"/>
           <p:cNvSpPr/>
           <p:nvPr/>
         </p:nvSpPr>
@@ -18053,7 +19549,7 @@
       </p:sp>
       <p:sp>
         <p:nvSpPr>
-          <p:cNvPr id="11" name="Shape 8"/>
+          <p:cNvPr id="14" name="Shape 11"/>
           <p:cNvSpPr/>
           <p:nvPr/>
         </p:nvSpPr>
@@ -18084,7 +19580,7 @@
       </p:sp>
       <p:pic>
         <p:nvPicPr>
-          <p:cNvPr id="12" name="Image 1" descr="preencoded.png">    </p:cNvPr>
+          <p:cNvPr id="15" name="Image 1" descr="preencoded.png">    </p:cNvPr>
           <p:cNvPicPr>
             <a:picLocks noChangeAspect="1"/>
           </p:cNvPicPr>
@@ -18114,7 +19610,7 @@
       </p:pic>
       <p:sp>
         <p:nvSpPr>
-          <p:cNvPr id="13" name="Shape 9"/>
+          <p:cNvPr id="16" name="Shape 12"/>
           <p:cNvSpPr/>
           <p:nvPr/>
         </p:nvSpPr>
@@ -18152,7 +19648,7 @@
       </p:sp>
       <p:sp>
         <p:nvSpPr>
-          <p:cNvPr id="14" name="Shape 10"/>
+          <p:cNvPr id="17" name="Shape 13"/>
           <p:cNvSpPr/>
           <p:nvPr/>
         </p:nvSpPr>
@@ -18190,7 +19686,7 @@
       </p:sp>
       <p:sp>
         <p:nvSpPr>
-          <p:cNvPr id="15" name="Shape 11"/>
+          <p:cNvPr id="18" name="Shape 14"/>
           <p:cNvSpPr/>
           <p:nvPr/>
         </p:nvSpPr>
@@ -18221,7 +19717,7 @@
       </p:sp>
       <p:pic>
         <p:nvPicPr>
-          <p:cNvPr id="16" name="Image 2" descr="preencoded.png">    </p:cNvPr>
+          <p:cNvPr id="19" name="Image 2" descr="preencoded.png">    </p:cNvPr>
           <p:cNvPicPr>
             <a:picLocks noChangeAspect="1"/>
           </p:cNvPicPr>
@@ -18251,7 +19747,7 @@
       </p:pic>
       <p:sp>
         <p:nvSpPr>
-          <p:cNvPr id="17" name="Shape 12"/>
+          <p:cNvPr id="20" name="Shape 15"/>
           <p:cNvSpPr/>
           <p:nvPr/>
         </p:nvSpPr>
@@ -18278,7 +19774,7 @@
       </p:sp>
       <p:sp>
         <p:nvSpPr>
-          <p:cNvPr id="18" name="mdpr:mixed-object-packing-438299:title:__title:mixed-object-packing-438299"/>
+          <p:cNvPr id="21" name="mdpr:mixed-object-packing-438299:title:__title:mixed-object-packing-438299"/>
           <p:cNvSpPr txBox="1"/>
           <p:nvPr/>
         </p:nvSpPr>
@@ -18320,7 +19816,7 @@
       </p:sp>
       <p:graphicFrame>
         <p:nvGraphicFramePr>
-          <p:cNvPr id="19" name="Chart 0" descr=""/>
+          <p:cNvPr id="22" name="Chart 0" descr=""/>
           <p:cNvGraphicFramePr/>
           <p:nvPr/>
         </p:nvGraphicFramePr>
@@ -18778,7 +20274,7 @@
       </p:graphicFrame>
       <p:sp>
         <p:nvSpPr>
-          <p:cNvPr id="21" name="mdpr:mixed-object-packing-438299:body:block-36"/>
+          <p:cNvPr id="24" name="mdpr:mixed-object-packing-438299:body:block-36"/>
           <p:cNvSpPr txBox="1"/>
           <p:nvPr/>
         </p:nvSpPr>
@@ -18877,7 +20373,7 @@
       </p:sp>
       <p:pic>
         <p:nvPicPr>
-          <p:cNvPr id="22" name="mdpr:mixed-object-packing-438299:image-1:block-39" descr="{&quot;mdpr&quot;:{&quot;slideId&quot;:&quot;mixed-object-packing-438299&quot;,&quot;layoutSlideId&quot;:&quot;layout-mixed-object-packing-438299&quot;,&quot;regionId&quot;:&quot;image-1&quot;,&quot;blockIds&quot;:[&quot;block-39&quot;],&quot;objectKind&quot;:&quot;native-image&quot;,&quot;role&quot;:&quot;image&quot;,&quot;editable&quot;:false}}">    </p:cNvPr>
+          <p:cNvPr id="25" name="mdpr:mixed-object-packing-438299:image-1:block-39" descr="{&quot;mdpr&quot;:{&quot;slideId&quot;:&quot;mixed-object-packing-438299&quot;,&quot;layoutSlideId&quot;:&quot;layout-mixed-object-packing-438299&quot;,&quot;regionId&quot;:&quot;image-1&quot;,&quot;blockIds&quot;:[&quot;block-39&quot;],&quot;objectKind&quot;:&quot;native-image&quot;,&quot;role&quot;:&quot;image&quot;,&quot;editable&quot;:false}}">    </p:cNvPr>
           <p:cNvPicPr>
             <a:picLocks noChangeAspect="1"/>
           </p:cNvPicPr>
@@ -18945,6 +20441,44 @@
         </p:nvSpPr>
         <p:spPr>
           <a:xfrm>
+            <a:off x="9375343" y="384048"/>
+            <a:ext cx="1737360" cy="310896"/>
+          </a:xfrm>
+          <a:prstGeom prst="roundRect">
+            <a:avLst>
+              <a:gd name="adj" fmla="val 14706"/>
+            </a:avLst>
+          </a:prstGeom>
+          <a:solidFill>
+            <a:srgbClr val="F8FAFC">
+              <a:alpha val="72000"/>
+            </a:srgbClr>
+          </a:solidFill>
+          <a:ln w="12700">
+            <a:solidFill>
+              <a:srgbClr val="FFFFFF">
+                <a:alpha val="28000"/>
+              </a:srgbClr>
+            </a:solidFill>
+            <a:prstDash val="solid"/>
+          </a:ln>
+          <a:effectLst>
+            <a:outerShdw sx="100000" sy="100000" kx="0" ky="0" algn="bl" rotWithShape="0" blurRad="15240" dist="50800" dir="2700000">
+              <a:srgbClr val="B8C3D2">
+                <a:alpha val="16000"/>
+              </a:srgbClr>
+            </a:outerShdw>
+          </a:effectLst>
+        </p:spPr>
+      </p:sp>
+      <p:sp>
+        <p:nvSpPr>
+          <p:cNvPr id="3" name="Shape 1"/>
+          <p:cNvSpPr/>
+          <p:nvPr/>
+        </p:nvSpPr>
+        <p:spPr>
+          <a:xfrm>
             <a:off x="10362895" y="502920"/>
             <a:ext cx="822960" cy="822960"/>
           </a:xfrm>
@@ -18975,7 +20509,7 @@
       </p:sp>
       <p:sp>
         <p:nvSpPr>
-          <p:cNvPr id="3" name="Shape 1"/>
+          <p:cNvPr id="4" name="Shape 2"/>
           <p:cNvSpPr/>
           <p:nvPr/>
         </p:nvSpPr>
@@ -19009,7 +20543,57 @@
       </p:sp>
       <p:sp>
         <p:nvSpPr>
-          <p:cNvPr id="4" name="Shape 2"/>
+          <p:cNvPr id="5" name="Shape 3"/>
+          <p:cNvSpPr/>
+          <p:nvPr/>
+        </p:nvSpPr>
+        <p:spPr>
+          <a:xfrm>
+            <a:off x="9265615" y="6437376"/>
+            <a:ext cx="1993392" cy="0"/>
+          </a:xfrm>
+          <a:prstGeom prst="line">
+            <a:avLst/>
+          </a:prstGeom>
+          <a:noFill/>
+          <a:ln w="12700">
+            <a:solidFill>
+              <a:srgbClr val="FFFFFF">
+                <a:alpha val="88000"/>
+              </a:srgbClr>
+            </a:solidFill>
+            <a:prstDash val="solid"/>
+          </a:ln>
+        </p:spPr>
+      </p:sp>
+      <p:sp>
+        <p:nvSpPr>
+          <p:cNvPr id="6" name="Shape 4"/>
+          <p:cNvSpPr/>
+          <p:nvPr/>
+        </p:nvSpPr>
+        <p:spPr>
+          <a:xfrm>
+            <a:off x="9338767" y="6501384"/>
+            <a:ext cx="1920240" cy="0"/>
+          </a:xfrm>
+          <a:prstGeom prst="line">
+            <a:avLst/>
+          </a:prstGeom>
+          <a:noFill/>
+          <a:ln w="12700">
+            <a:solidFill>
+              <a:srgbClr val="B8C3D2">
+                <a:alpha val="64000"/>
+              </a:srgbClr>
+            </a:solidFill>
+            <a:prstDash val="solid"/>
+          </a:ln>
+        </p:spPr>
+      </p:sp>
+      <p:sp>
+        <p:nvSpPr>
+          <p:cNvPr id="7" name="Shape 5"/>
           <p:cNvSpPr/>
           <p:nvPr/>
         </p:nvSpPr>
@@ -19036,7 +20620,7 @@
       </p:sp>
       <p:sp>
         <p:nvSpPr>
-          <p:cNvPr id="5" name="Shape 3"/>
+          <p:cNvPr id="8" name="Shape 6"/>
           <p:cNvSpPr/>
           <p:nvPr/>
         </p:nvSpPr>
@@ -19074,7 +20658,7 @@
       </p:sp>
       <p:sp>
         <p:nvSpPr>
-          <p:cNvPr id="6" name="Shape 4"/>
+          <p:cNvPr id="9" name="Shape 7"/>
           <p:cNvSpPr/>
           <p:nvPr/>
         </p:nvSpPr>
@@ -19112,7 +20696,7 @@
       </p:sp>
       <p:sp>
         <p:nvSpPr>
-          <p:cNvPr id="7" name="Shape 5"/>
+          <p:cNvPr id="10" name="Shape 8"/>
           <p:cNvSpPr/>
           <p:nvPr/>
         </p:nvSpPr>
@@ -19143,7 +20727,7 @@
       </p:sp>
       <p:pic>
         <p:nvPicPr>
-          <p:cNvPr id="8" name="Image 0" descr="preencoded.png">    </p:cNvPr>
+          <p:cNvPr id="11" name="Image 0" descr="preencoded.png">    </p:cNvPr>
           <p:cNvPicPr>
             <a:picLocks noChangeAspect="1"/>
           </p:cNvPicPr>
@@ -19173,7 +20757,7 @@
       </p:pic>
       <p:sp>
         <p:nvSpPr>
-          <p:cNvPr id="9" name="Shape 6"/>
+          <p:cNvPr id="12" name="Shape 9"/>
           <p:cNvSpPr/>
           <p:nvPr/>
         </p:nvSpPr>
@@ -19211,7 +20795,7 @@
       </p:sp>
       <p:sp>
         <p:nvSpPr>
-          <p:cNvPr id="10" name="Shape 7"/>
+          <p:cNvPr id="13" name="Shape 10"/>
           <p:cNvSpPr/>
           <p:nvPr/>
         </p:nvSpPr>
@@ -19249,7 +20833,7 @@
       </p:sp>
       <p:sp>
         <p:nvSpPr>
-          <p:cNvPr id="11" name="Shape 8"/>
+          <p:cNvPr id="14" name="Shape 11"/>
           <p:cNvSpPr/>
           <p:nvPr/>
         </p:nvSpPr>
@@ -19280,7 +20864,7 @@
       </p:sp>
       <p:pic>
         <p:nvPicPr>
-          <p:cNvPr id="12" name="Image 1" descr="preencoded.png">    </p:cNvPr>
+          <p:cNvPr id="15" name="Image 1" descr="preencoded.png">    </p:cNvPr>
           <p:cNvPicPr>
             <a:picLocks noChangeAspect="1"/>
           </p:cNvPicPr>
@@ -19310,7 +20894,7 @@
       </p:pic>
       <p:sp>
         <p:nvSpPr>
-          <p:cNvPr id="13" name="Shape 9"/>
+          <p:cNvPr id="16" name="Shape 12"/>
           <p:cNvSpPr/>
           <p:nvPr/>
         </p:nvSpPr>
@@ -19348,7 +20932,7 @@
       </p:sp>
       <p:sp>
         <p:nvSpPr>
-          <p:cNvPr id="14" name="Shape 10"/>
+          <p:cNvPr id="17" name="Shape 13"/>
           <p:cNvSpPr/>
           <p:nvPr/>
         </p:nvSpPr>
@@ -19386,7 +20970,7 @@
       </p:sp>
       <p:sp>
         <p:nvSpPr>
-          <p:cNvPr id="15" name="Shape 11"/>
+          <p:cNvPr id="18" name="Shape 14"/>
           <p:cNvSpPr/>
           <p:nvPr/>
         </p:nvSpPr>
@@ -19417,7 +21001,7 @@
       </p:sp>
       <p:pic>
         <p:nvPicPr>
-          <p:cNvPr id="16" name="Image 2" descr="preencoded.png">    </p:cNvPr>
+          <p:cNvPr id="19" name="Image 2" descr="preencoded.png">    </p:cNvPr>
           <p:cNvPicPr>
             <a:picLocks noChangeAspect="1"/>
           </p:cNvPicPr>
@@ -19447,7 +21031,7 @@
       </p:pic>
       <p:sp>
         <p:nvSpPr>
-          <p:cNvPr id="17" name="Shape 12"/>
+          <p:cNvPr id="20" name="Shape 15"/>
           <p:cNvSpPr/>
           <p:nvPr/>
         </p:nvSpPr>
@@ -19476,7 +21060,7 @@
       </p:sp>
       <p:sp>
         <p:nvSpPr>
-          <p:cNvPr id="18" name="Shape 13"/>
+          <p:cNvPr id="21" name="Shape 16"/>
           <p:cNvSpPr/>
           <p:nvPr/>
         </p:nvSpPr>
@@ -19503,7 +21087,7 @@
       </p:sp>
       <p:sp>
         <p:nvSpPr>
-          <p:cNvPr id="19" name="Shape 14"/>
+          <p:cNvPr id="22" name="Shape 17"/>
           <p:cNvSpPr/>
           <p:nvPr/>
         </p:nvSpPr>
@@ -19530,7 +21114,7 @@
       </p:sp>
       <p:sp>
         <p:nvSpPr>
-          <p:cNvPr id="20" name="Shape 15"/>
+          <p:cNvPr id="23" name="Shape 18"/>
           <p:cNvSpPr/>
           <p:nvPr/>
         </p:nvSpPr>
@@ -19557,7 +21141,7 @@
       </p:sp>
       <p:sp>
         <p:nvSpPr>
-          <p:cNvPr id="21" name="mdpr:actions-output-review-326e07:title:__title:actions-output-review-326e07"/>
+          <p:cNvPr id="24" name="mdpr:actions-output-review-326e07:title:__title:actions-output-review-326e07"/>
           <p:cNvSpPr txBox="1"/>
           <p:nvPr/>
         </p:nvSpPr>
@@ -19599,7 +21183,7 @@
       </p:sp>
       <p:sp>
         <p:nvSpPr>
-          <p:cNvPr id="22" name="Shape 17"/>
+          <p:cNvPr id="25" name="Shape 20"/>
           <p:cNvSpPr/>
           <p:nvPr/>
         </p:nvSpPr>
@@ -19626,7 +21210,7 @@
       </p:sp>
       <p:pic>
         <p:nvPicPr>
-          <p:cNvPr id="23" name="Image 3" descr="flow icon from tabler-icons (MIT)">    </p:cNvPr>
+          <p:cNvPr id="26" name="Image 3" descr="flow icon from tabler-icons (MIT)">    </p:cNvPr>
           <p:cNvPicPr>
             <a:picLocks noChangeAspect="1"/>
           </p:cNvPicPr>
@@ -19656,7 +21240,7 @@
       </p:pic>
       <p:sp>
         <p:nvSpPr>
-          <p:cNvPr id="24" name="mdpr:actions-output-review-326e07:item-1:block-41"/>
+          <p:cNvPr id="27" name="mdpr:actions-output-review-326e07:item-1:block-41"/>
           <p:cNvSpPr txBox="1"/>
           <p:nvPr/>
         </p:nvSpPr>
@@ -19715,7 +21299,7 @@
       </p:sp>
       <p:sp>
         <p:nvSpPr>
-          <p:cNvPr id="25" name="Shape 19"/>
+          <p:cNvPr id="28" name="Shape 22"/>
           <p:cNvSpPr/>
           <p:nvPr/>
         </p:nvSpPr>
@@ -19742,7 +21326,7 @@
       </p:sp>
       <p:pic>
         <p:nvPicPr>
-          <p:cNvPr id="26" name="Image 4" descr="verified icon from tabler-icons (MIT)">    </p:cNvPr>
+          <p:cNvPr id="29" name="Image 4" descr="verified icon from tabler-icons (MIT)">    </p:cNvPr>
           <p:cNvPicPr>
             <a:picLocks noChangeAspect="1"/>
           </p:cNvPicPr>
@@ -19772,7 +21356,7 @@
       </p:pic>
       <p:sp>
         <p:nvSpPr>
-          <p:cNvPr id="27" name="mdpr:actions-output-review-326e07:item-2:block-41"/>
+          <p:cNvPr id="30" name="mdpr:actions-output-review-326e07:item-2:block-41"/>
           <p:cNvSpPr txBox="1"/>
           <p:nvPr/>
         </p:nvSpPr>
@@ -19831,7 +21415,7 @@
       </p:sp>
       <p:sp>
         <p:nvSpPr>
-          <p:cNvPr id="28" name="Shape 21"/>
+          <p:cNvPr id="31" name="Shape 24"/>
           <p:cNvSpPr/>
           <p:nvPr/>
         </p:nvSpPr>
@@ -19858,7 +21442,7 @@
       </p:sp>
       <p:pic>
         <p:nvPicPr>
-          <p:cNvPr id="29" name="Image 5" descr="spark icon from tabler-icons (MIT)">    </p:cNvPr>
+          <p:cNvPr id="32" name="Image 5" descr="spark icon from tabler-icons (MIT)">    </p:cNvPr>
           <p:cNvPicPr>
             <a:picLocks noChangeAspect="1"/>
           </p:cNvPicPr>
@@ -19888,7 +21472,7 @@
       </p:pic>
       <p:sp>
         <p:nvSpPr>
-          <p:cNvPr id="30" name="mdpr:actions-output-review-326e07:item-3:block-41"/>
+          <p:cNvPr id="33" name="mdpr:actions-output-review-326e07:item-3:block-41"/>
           <p:cNvSpPr txBox="1"/>
           <p:nvPr/>
         </p:nvSpPr>
@@ -19985,6 +21569,44 @@
         </p:nvSpPr>
         <p:spPr>
           <a:xfrm>
+            <a:off x="9375343" y="384048"/>
+            <a:ext cx="1737360" cy="310896"/>
+          </a:xfrm>
+          <a:prstGeom prst="roundRect">
+            <a:avLst>
+              <a:gd name="adj" fmla="val 14706"/>
+            </a:avLst>
+          </a:prstGeom>
+          <a:solidFill>
+            <a:srgbClr val="F8FAFC">
+              <a:alpha val="72000"/>
+            </a:srgbClr>
+          </a:solidFill>
+          <a:ln w="12700">
+            <a:solidFill>
+              <a:srgbClr val="FFFFFF">
+                <a:alpha val="28000"/>
+              </a:srgbClr>
+            </a:solidFill>
+            <a:prstDash val="solid"/>
+          </a:ln>
+          <a:effectLst>
+            <a:outerShdw sx="100000" sy="100000" kx="0" ky="0" algn="bl" rotWithShape="0" blurRad="15240" dist="50800" dir="2700000">
+              <a:srgbClr val="B8C3D2">
+                <a:alpha val="16000"/>
+              </a:srgbClr>
+            </a:outerShdw>
+          </a:effectLst>
+        </p:spPr>
+      </p:sp>
+      <p:sp>
+        <p:nvSpPr>
+          <p:cNvPr id="3" name="Shape 1"/>
+          <p:cNvSpPr/>
+          <p:nvPr/>
+        </p:nvSpPr>
+        <p:spPr>
+          <a:xfrm>
             <a:off x="10362895" y="502920"/>
             <a:ext cx="822960" cy="822960"/>
           </a:xfrm>
@@ -20015,7 +21637,7 @@
       </p:sp>
       <p:sp>
         <p:nvSpPr>
-          <p:cNvPr id="3" name="Shape 1"/>
+          <p:cNvPr id="4" name="Shape 2"/>
           <p:cNvSpPr/>
           <p:nvPr/>
         </p:nvSpPr>
@@ -20049,7 +21671,57 @@
       </p:sp>
       <p:sp>
         <p:nvSpPr>
-          <p:cNvPr id="4" name="Shape 2"/>
+          <p:cNvPr id="5" name="Shape 3"/>
+          <p:cNvSpPr/>
+          <p:nvPr/>
+        </p:nvSpPr>
+        <p:spPr>
+          <a:xfrm>
+            <a:off x="9265615" y="6437376"/>
+            <a:ext cx="1993392" cy="0"/>
+          </a:xfrm>
+          <a:prstGeom prst="line">
+            <a:avLst/>
+          </a:prstGeom>
+          <a:noFill/>
+          <a:ln w="12700">
+            <a:solidFill>
+              <a:srgbClr val="FFFFFF">
+                <a:alpha val="88000"/>
+              </a:srgbClr>
+            </a:solidFill>
+            <a:prstDash val="solid"/>
+          </a:ln>
+        </p:spPr>
+      </p:sp>
+      <p:sp>
+        <p:nvSpPr>
+          <p:cNvPr id="6" name="Shape 4"/>
+          <p:cNvSpPr/>
+          <p:nvPr/>
+        </p:nvSpPr>
+        <p:spPr>
+          <a:xfrm>
+            <a:off x="9338767" y="6501384"/>
+            <a:ext cx="1920240" cy="0"/>
+          </a:xfrm>
+          <a:prstGeom prst="line">
+            <a:avLst/>
+          </a:prstGeom>
+          <a:noFill/>
+          <a:ln w="12700">
+            <a:solidFill>
+              <a:srgbClr val="B8C3D2">
+                <a:alpha val="64000"/>
+              </a:srgbClr>
+            </a:solidFill>
+            <a:prstDash val="solid"/>
+          </a:ln>
+        </p:spPr>
+      </p:sp>
+      <p:sp>
+        <p:nvSpPr>
+          <p:cNvPr id="7" name="Shape 5"/>
           <p:cNvSpPr/>
           <p:nvPr/>
         </p:nvSpPr>
@@ -20076,7 +21748,7 @@
       </p:sp>
       <p:sp>
         <p:nvSpPr>
-          <p:cNvPr id="5" name="Shape 3"/>
+          <p:cNvPr id="8" name="Shape 6"/>
           <p:cNvSpPr/>
           <p:nvPr/>
         </p:nvSpPr>
@@ -20103,7 +21775,7 @@
       </p:sp>
       <p:sp>
         <p:nvSpPr>
-          <p:cNvPr id="6" name="Shape 4"/>
+          <p:cNvPr id="9" name="Shape 7"/>
           <p:cNvSpPr/>
           <p:nvPr/>
         </p:nvSpPr>
@@ -20130,7 +21802,7 @@
       </p:sp>
       <p:sp>
         <p:nvSpPr>
-          <p:cNvPr id="7" name="Shape 5"/>
+          <p:cNvPr id="10" name="Shape 8"/>
           <p:cNvSpPr/>
           <p:nvPr/>
         </p:nvSpPr>
@@ -20157,7 +21829,7 @@
       </p:sp>
       <p:sp>
         <p:nvSpPr>
-          <p:cNvPr id="8" name="mdpr:2-2-7bfb60:title:__title:2-2-7bfb60"/>
+          <p:cNvPr id="11" name="mdpr:2-2-7bfb60:title:__title:2-2-7bfb60"/>
           <p:cNvSpPr txBox="1"/>
           <p:nvPr/>
         </p:nvSpPr>
@@ -20199,7 +21871,7 @@
       </p:sp>
       <p:sp>
         <p:nvSpPr>
-          <p:cNvPr id="9" name="mdpr:2-2-7bfb60:toc-item-1:toc-item-15"/>
+          <p:cNvPr id="12" name="mdpr:2-2-7bfb60:toc-item-1:toc-item-15"/>
           <p:cNvSpPr txBox="1"/>
           <p:nvPr/>
         </p:nvSpPr>
@@ -20279,6 +21951,44 @@
         </p:nvSpPr>
         <p:spPr>
           <a:xfrm>
+            <a:off x="9375343" y="384048"/>
+            <a:ext cx="1737360" cy="310896"/>
+          </a:xfrm>
+          <a:prstGeom prst="roundRect">
+            <a:avLst>
+              <a:gd name="adj" fmla="val 14706"/>
+            </a:avLst>
+          </a:prstGeom>
+          <a:solidFill>
+            <a:srgbClr val="F8FAFC">
+              <a:alpha val="72000"/>
+            </a:srgbClr>
+          </a:solidFill>
+          <a:ln w="12700">
+            <a:solidFill>
+              <a:srgbClr val="FFFFFF">
+                <a:alpha val="28000"/>
+              </a:srgbClr>
+            </a:solidFill>
+            <a:prstDash val="solid"/>
+          </a:ln>
+          <a:effectLst>
+            <a:outerShdw sx="100000" sy="100000" kx="0" ky="0" algn="bl" rotWithShape="0" blurRad="15240" dist="50800" dir="2700000">
+              <a:srgbClr val="B8C3D2">
+                <a:alpha val="16000"/>
+              </a:srgbClr>
+            </a:outerShdw>
+          </a:effectLst>
+        </p:spPr>
+      </p:sp>
+      <p:sp>
+        <p:nvSpPr>
+          <p:cNvPr id="3" name="Shape 1"/>
+          <p:cNvSpPr/>
+          <p:nvPr/>
+        </p:nvSpPr>
+        <p:spPr>
+          <a:xfrm>
             <a:off x="10362895" y="502920"/>
             <a:ext cx="822960" cy="822960"/>
           </a:xfrm>
@@ -20309,7 +22019,7 @@
       </p:sp>
       <p:sp>
         <p:nvSpPr>
-          <p:cNvPr id="3" name="Shape 1"/>
+          <p:cNvPr id="4" name="Shape 2"/>
           <p:cNvSpPr/>
           <p:nvPr/>
         </p:nvSpPr>
@@ -20343,7 +22053,57 @@
       </p:sp>
       <p:sp>
         <p:nvSpPr>
-          <p:cNvPr id="4" name="Shape 2"/>
+          <p:cNvPr id="5" name="Shape 3"/>
+          <p:cNvSpPr/>
+          <p:nvPr/>
+        </p:nvSpPr>
+        <p:spPr>
+          <a:xfrm>
+            <a:off x="9265615" y="6437376"/>
+            <a:ext cx="1993392" cy="0"/>
+          </a:xfrm>
+          <a:prstGeom prst="line">
+            <a:avLst/>
+          </a:prstGeom>
+          <a:noFill/>
+          <a:ln w="12700">
+            <a:solidFill>
+              <a:srgbClr val="FFFFFF">
+                <a:alpha val="88000"/>
+              </a:srgbClr>
+            </a:solidFill>
+            <a:prstDash val="solid"/>
+          </a:ln>
+        </p:spPr>
+      </p:sp>
+      <p:sp>
+        <p:nvSpPr>
+          <p:cNvPr id="6" name="Shape 4"/>
+          <p:cNvSpPr/>
+          <p:nvPr/>
+        </p:nvSpPr>
+        <p:spPr>
+          <a:xfrm>
+            <a:off x="9338767" y="6501384"/>
+            <a:ext cx="1920240" cy="0"/>
+          </a:xfrm>
+          <a:prstGeom prst="line">
+            <a:avLst/>
+          </a:prstGeom>
+          <a:noFill/>
+          <a:ln w="12700">
+            <a:solidFill>
+              <a:srgbClr val="B8C3D2">
+                <a:alpha val="64000"/>
+              </a:srgbClr>
+            </a:solidFill>
+            <a:prstDash val="solid"/>
+          </a:ln>
+        </p:spPr>
+      </p:sp>
+      <p:sp>
+        <p:nvSpPr>
+          <p:cNvPr id="7" name="Shape 5"/>
           <p:cNvSpPr/>
           <p:nvPr/>
         </p:nvSpPr>
@@ -20370,7 +22130,7 @@
       </p:sp>
       <p:sp>
         <p:nvSpPr>
-          <p:cNvPr id="5" name="Shape 3"/>
+          <p:cNvPr id="8" name="Shape 6"/>
           <p:cNvSpPr/>
           <p:nvPr/>
         </p:nvSpPr>
@@ -20408,7 +22168,7 @@
       </p:sp>
       <p:sp>
         <p:nvSpPr>
-          <p:cNvPr id="6" name="Shape 4"/>
+          <p:cNvPr id="9" name="Shape 7"/>
           <p:cNvSpPr/>
           <p:nvPr/>
         </p:nvSpPr>
@@ -20446,7 +22206,7 @@
       </p:sp>
       <p:sp>
         <p:nvSpPr>
-          <p:cNvPr id="7" name="Shape 5"/>
+          <p:cNvPr id="10" name="Shape 8"/>
           <p:cNvSpPr/>
           <p:nvPr/>
         </p:nvSpPr>
@@ -20477,7 +22237,7 @@
       </p:sp>
       <p:pic>
         <p:nvPicPr>
-          <p:cNvPr id="8" name="Image 0" descr="preencoded.png">    </p:cNvPr>
+          <p:cNvPr id="11" name="Image 0" descr="preencoded.png">    </p:cNvPr>
           <p:cNvPicPr>
             <a:picLocks noChangeAspect="1"/>
           </p:cNvPicPr>
@@ -20507,7 +22267,7 @@
       </p:pic>
       <p:sp>
         <p:nvSpPr>
-          <p:cNvPr id="9" name="Shape 6"/>
+          <p:cNvPr id="12" name="Shape 9"/>
           <p:cNvSpPr/>
           <p:nvPr/>
         </p:nvSpPr>
@@ -20536,7 +22296,7 @@
       </p:sp>
       <p:sp>
         <p:nvSpPr>
-          <p:cNvPr id="10" name="Shape 7"/>
+          <p:cNvPr id="13" name="Shape 10"/>
           <p:cNvSpPr/>
           <p:nvPr/>
         </p:nvSpPr>
@@ -20563,7 +22323,7 @@
       </p:sp>
       <p:sp>
         <p:nvSpPr>
-          <p:cNvPr id="11" name="mdpr:teaser-summary-7731dc:title:__title:teaser-summary-7731dc"/>
+          <p:cNvPr id="14" name="mdpr:teaser-summary-7731dc:title:__title:teaser-summary-7731dc"/>
           <p:cNvSpPr txBox="1"/>
           <p:nvPr/>
         </p:nvSpPr>
@@ -20605,7 +22365,7 @@
       </p:sp>
       <p:sp>
         <p:nvSpPr>
-          <p:cNvPr id="12" name="mdpr:teaser-summary-7731dc:key-message:block-3"/>
+          <p:cNvPr id="15" name="mdpr:teaser-summary-7731dc:key-message:block-3"/>
           <p:cNvSpPr txBox="1"/>
           <p:nvPr/>
         </p:nvSpPr>
@@ -20647,7 +22407,7 @@
       </p:sp>
       <p:sp>
         <p:nvSpPr>
-          <p:cNvPr id="13" name="mdpr:teaser-summary-7731dc:body:block-4"/>
+          <p:cNvPr id="16" name="mdpr:teaser-summary-7731dc:body:block-4"/>
           <p:cNvSpPr txBox="1"/>
           <p:nvPr/>
         </p:nvSpPr>
@@ -20864,6 +22624,44 @@
         </p:nvSpPr>
         <p:spPr>
           <a:xfrm>
+            <a:off x="9375343" y="384048"/>
+            <a:ext cx="1737360" cy="310896"/>
+          </a:xfrm>
+          <a:prstGeom prst="roundRect">
+            <a:avLst>
+              <a:gd name="adj" fmla="val 14706"/>
+            </a:avLst>
+          </a:prstGeom>
+          <a:solidFill>
+            <a:srgbClr val="F8FAFC">
+              <a:alpha val="72000"/>
+            </a:srgbClr>
+          </a:solidFill>
+          <a:ln w="12700">
+            <a:solidFill>
+              <a:srgbClr val="FFFFFF">
+                <a:alpha val="28000"/>
+              </a:srgbClr>
+            </a:solidFill>
+            <a:prstDash val="solid"/>
+          </a:ln>
+          <a:effectLst>
+            <a:outerShdw sx="100000" sy="100000" kx="0" ky="0" algn="bl" rotWithShape="0" blurRad="15240" dist="50800" dir="2700000">
+              <a:srgbClr val="B8C3D2">
+                <a:alpha val="16000"/>
+              </a:srgbClr>
+            </a:outerShdw>
+          </a:effectLst>
+        </p:spPr>
+      </p:sp>
+      <p:sp>
+        <p:nvSpPr>
+          <p:cNvPr id="3" name="Shape 1"/>
+          <p:cNvSpPr/>
+          <p:nvPr/>
+        </p:nvSpPr>
+        <p:spPr>
+          <a:xfrm>
             <a:off x="10362895" y="502920"/>
             <a:ext cx="822960" cy="822960"/>
           </a:xfrm>
@@ -20894,7 +22692,7 @@
       </p:sp>
       <p:sp>
         <p:nvSpPr>
-          <p:cNvPr id="3" name="Shape 1"/>
+          <p:cNvPr id="4" name="Shape 2"/>
           <p:cNvSpPr/>
           <p:nvPr/>
         </p:nvSpPr>
@@ -20928,7 +22726,57 @@
       </p:sp>
       <p:sp>
         <p:nvSpPr>
-          <p:cNvPr id="4" name="Shape 2"/>
+          <p:cNvPr id="5" name="Shape 3"/>
+          <p:cNvSpPr/>
+          <p:nvPr/>
+        </p:nvSpPr>
+        <p:spPr>
+          <a:xfrm>
+            <a:off x="9265615" y="6437376"/>
+            <a:ext cx="1993392" cy="0"/>
+          </a:xfrm>
+          <a:prstGeom prst="line">
+            <a:avLst/>
+          </a:prstGeom>
+          <a:noFill/>
+          <a:ln w="12700">
+            <a:solidFill>
+              <a:srgbClr val="FFFFFF">
+                <a:alpha val="88000"/>
+              </a:srgbClr>
+            </a:solidFill>
+            <a:prstDash val="solid"/>
+          </a:ln>
+        </p:spPr>
+      </p:sp>
+      <p:sp>
+        <p:nvSpPr>
+          <p:cNvPr id="6" name="Shape 4"/>
+          <p:cNvSpPr/>
+          <p:nvPr/>
+        </p:nvSpPr>
+        <p:spPr>
+          <a:xfrm>
+            <a:off x="9338767" y="6501384"/>
+            <a:ext cx="1920240" cy="0"/>
+          </a:xfrm>
+          <a:prstGeom prst="line">
+            <a:avLst/>
+          </a:prstGeom>
+          <a:noFill/>
+          <a:ln w="12700">
+            <a:solidFill>
+              <a:srgbClr val="B8C3D2">
+                <a:alpha val="64000"/>
+              </a:srgbClr>
+            </a:solidFill>
+            <a:prstDash val="solid"/>
+          </a:ln>
+        </p:spPr>
+      </p:sp>
+      <p:sp>
+        <p:nvSpPr>
+          <p:cNvPr id="7" name="Shape 5"/>
           <p:cNvSpPr/>
           <p:nvPr/>
         </p:nvSpPr>
@@ -20955,7 +22803,7 @@
       </p:sp>
       <p:sp>
         <p:nvSpPr>
-          <p:cNvPr id="5" name="Shape 3"/>
+          <p:cNvPr id="8" name="Shape 6"/>
           <p:cNvSpPr/>
           <p:nvPr/>
         </p:nvSpPr>
@@ -20993,7 +22841,7 @@
       </p:sp>
       <p:sp>
         <p:nvSpPr>
-          <p:cNvPr id="6" name="Shape 4"/>
+          <p:cNvPr id="9" name="Shape 7"/>
           <p:cNvSpPr/>
           <p:nvPr/>
         </p:nvSpPr>
@@ -21031,7 +22879,7 @@
       </p:sp>
       <p:sp>
         <p:nvSpPr>
-          <p:cNvPr id="7" name="Shape 5"/>
+          <p:cNvPr id="10" name="Shape 8"/>
           <p:cNvSpPr/>
           <p:nvPr/>
         </p:nvSpPr>
@@ -21062,7 +22910,7 @@
       </p:sp>
       <p:pic>
         <p:nvPicPr>
-          <p:cNvPr id="8" name="Image 0" descr="preencoded.png">    </p:cNvPr>
+          <p:cNvPr id="11" name="Image 0" descr="preencoded.png">    </p:cNvPr>
           <p:cNvPicPr>
             <a:picLocks noChangeAspect="1"/>
           </p:cNvPicPr>
@@ -21092,7 +22940,7 @@
       </p:pic>
       <p:sp>
         <p:nvSpPr>
-          <p:cNvPr id="9" name="Shape 6"/>
+          <p:cNvPr id="12" name="Shape 9"/>
           <p:cNvSpPr/>
           <p:nvPr/>
         </p:nvSpPr>
@@ -21130,7 +22978,7 @@
       </p:sp>
       <p:sp>
         <p:nvSpPr>
-          <p:cNvPr id="10" name="Shape 7"/>
+          <p:cNvPr id="13" name="Shape 10"/>
           <p:cNvSpPr/>
           <p:nvPr/>
         </p:nvSpPr>
@@ -21168,7 +23016,7 @@
       </p:sp>
       <p:sp>
         <p:nvSpPr>
-          <p:cNvPr id="11" name="Shape 8"/>
+          <p:cNvPr id="14" name="Shape 11"/>
           <p:cNvSpPr/>
           <p:nvPr/>
         </p:nvSpPr>
@@ -21199,7 +23047,7 @@
       </p:sp>
       <p:pic>
         <p:nvPicPr>
-          <p:cNvPr id="12" name="Image 1" descr="preencoded.png">    </p:cNvPr>
+          <p:cNvPr id="15" name="Image 1" descr="preencoded.png">    </p:cNvPr>
           <p:cNvPicPr>
             <a:picLocks noChangeAspect="1"/>
           </p:cNvPicPr>
@@ -21229,7 +23077,7 @@
       </p:pic>
       <p:sp>
         <p:nvSpPr>
-          <p:cNvPr id="13" name="Shape 9"/>
+          <p:cNvPr id="16" name="Shape 12"/>
           <p:cNvSpPr/>
           <p:nvPr/>
         </p:nvSpPr>
@@ -21267,7 +23115,7 @@
       </p:sp>
       <p:sp>
         <p:nvSpPr>
-          <p:cNvPr id="14" name="Shape 10"/>
+          <p:cNvPr id="17" name="Shape 13"/>
           <p:cNvSpPr/>
           <p:nvPr/>
         </p:nvSpPr>
@@ -21305,7 +23153,7 @@
       </p:sp>
       <p:sp>
         <p:nvSpPr>
-          <p:cNvPr id="15" name="Shape 11"/>
+          <p:cNvPr id="18" name="Shape 14"/>
           <p:cNvSpPr/>
           <p:nvPr/>
         </p:nvSpPr>
@@ -21336,7 +23184,7 @@
       </p:sp>
       <p:pic>
         <p:nvPicPr>
-          <p:cNvPr id="16" name="Image 2" descr="preencoded.png">    </p:cNvPr>
+          <p:cNvPr id="19" name="Image 2" descr="preencoded.png">    </p:cNvPr>
           <p:cNvPicPr>
             <a:picLocks noChangeAspect="1"/>
           </p:cNvPicPr>
@@ -21366,7 +23214,7 @@
       </p:pic>
       <p:sp>
         <p:nvSpPr>
-          <p:cNvPr id="17" name="Shape 12"/>
+          <p:cNvPr id="20" name="Shape 15"/>
           <p:cNvSpPr/>
           <p:nvPr/>
         </p:nvSpPr>
@@ -21395,7 +23243,7 @@
       </p:sp>
       <p:sp>
         <p:nvSpPr>
-          <p:cNvPr id="18" name="Shape 13"/>
+          <p:cNvPr id="21" name="Shape 16"/>
           <p:cNvSpPr/>
           <p:nvPr/>
         </p:nvSpPr>
@@ -21422,7 +23270,7 @@
       </p:sp>
       <p:sp>
         <p:nvSpPr>
-          <p:cNvPr id="19" name="Shape 14"/>
+          <p:cNvPr id="22" name="Shape 17"/>
           <p:cNvSpPr/>
           <p:nvPr/>
         </p:nvSpPr>
@@ -21449,7 +23297,7 @@
       </p:sp>
       <p:sp>
         <p:nvSpPr>
-          <p:cNvPr id="20" name="Shape 15"/>
+          <p:cNvPr id="23" name="Shape 18"/>
           <p:cNvSpPr/>
           <p:nvPr/>
         </p:nvSpPr>
@@ -21476,7 +23324,7 @@
       </p:sp>
       <p:sp>
         <p:nvSpPr>
-          <p:cNvPr id="21" name="mdpr:1-2-32ac08:title:__title:1-2-32ac08"/>
+          <p:cNvPr id="24" name="mdpr:1-2-32ac08:title:__title:1-2-32ac08"/>
           <p:cNvSpPr txBox="1"/>
           <p:nvPr/>
         </p:nvSpPr>
@@ -21518,7 +23366,7 @@
       </p:sp>
       <p:sp>
         <p:nvSpPr>
-          <p:cNvPr id="22" name="Shape 17"/>
+          <p:cNvPr id="25" name="Shape 20"/>
           <p:cNvSpPr/>
           <p:nvPr/>
         </p:nvSpPr>
@@ -21545,7 +23393,7 @@
       </p:sp>
       <p:pic>
         <p:nvPicPr>
-          <p:cNvPr id="23" name="Image 3" descr="article icon from tabler-icons (MIT)">    </p:cNvPr>
+          <p:cNvPr id="26" name="Image 3" descr="article icon from tabler-icons (MIT)">    </p:cNvPr>
           <p:cNvPicPr>
             <a:picLocks noChangeAspect="1"/>
           </p:cNvPicPr>
@@ -21575,7 +23423,7 @@
       </p:pic>
       <p:sp>
         <p:nvSpPr>
-          <p:cNvPr id="24" name="mdpr:1-2-32ac08:item-1:block-6-chunk-1"/>
+          <p:cNvPr id="27" name="mdpr:1-2-32ac08:item-1:block-6-chunk-1"/>
           <p:cNvSpPr txBox="1"/>
           <p:nvPr/>
         </p:nvSpPr>
@@ -21634,7 +23482,7 @@
       </p:sp>
       <p:sp>
         <p:nvSpPr>
-          <p:cNvPr id="25" name="Shape 19"/>
+          <p:cNvPr id="28" name="Shape 22"/>
           <p:cNvSpPr/>
           <p:nvPr/>
         </p:nvSpPr>
@@ -21661,7 +23509,7 @@
       </p:sp>
       <p:pic>
         <p:nvPicPr>
-          <p:cNvPr id="26" name="Image 4" descr="chart icon from tabler-icons (MIT)">    </p:cNvPr>
+          <p:cNvPr id="29" name="Image 4" descr="chart icon from tabler-icons (MIT)">    </p:cNvPr>
           <p:cNvPicPr>
             <a:picLocks noChangeAspect="1"/>
           </p:cNvPicPr>
@@ -21691,7 +23539,7 @@
       </p:pic>
       <p:sp>
         <p:nvSpPr>
-          <p:cNvPr id="27" name="mdpr:1-2-32ac08:item-2:block-6-chunk-1"/>
+          <p:cNvPr id="30" name="mdpr:1-2-32ac08:item-2:block-6-chunk-1"/>
           <p:cNvSpPr txBox="1"/>
           <p:nvPr/>
         </p:nvSpPr>
@@ -21750,7 +23598,7 @@
       </p:sp>
       <p:sp>
         <p:nvSpPr>
-          <p:cNvPr id="28" name="Shape 21"/>
+          <p:cNvPr id="31" name="Shape 24"/>
           <p:cNvSpPr/>
           <p:nvPr/>
         </p:nvSpPr>
@@ -21777,7 +23625,7 @@
       </p:sp>
       <p:pic>
         <p:nvPicPr>
-          <p:cNvPr id="29" name="Image 5" descr="article icon from tabler-icons (MIT)">    </p:cNvPr>
+          <p:cNvPr id="32" name="Image 5" descr="article icon from tabler-icons (MIT)">    </p:cNvPr>
           <p:cNvPicPr>
             <a:picLocks noChangeAspect="1"/>
           </p:cNvPicPr>
@@ -21807,7 +23655,7 @@
       </p:pic>
       <p:sp>
         <p:nvSpPr>
-          <p:cNvPr id="30" name="mdpr:1-2-32ac08:item-3:block-6-chunk-1"/>
+          <p:cNvPr id="33" name="mdpr:1-2-32ac08:item-3:block-6-chunk-1"/>
           <p:cNvSpPr txBox="1"/>
           <p:nvPr/>
         </p:nvSpPr>
@@ -21904,6 +23752,44 @@
         </p:nvSpPr>
         <p:spPr>
           <a:xfrm>
+            <a:off x="9375343" y="384048"/>
+            <a:ext cx="1737360" cy="310896"/>
+          </a:xfrm>
+          <a:prstGeom prst="roundRect">
+            <a:avLst>
+              <a:gd name="adj" fmla="val 14706"/>
+            </a:avLst>
+          </a:prstGeom>
+          <a:solidFill>
+            <a:srgbClr val="F8FAFC">
+              <a:alpha val="72000"/>
+            </a:srgbClr>
+          </a:solidFill>
+          <a:ln w="12700">
+            <a:solidFill>
+              <a:srgbClr val="FFFFFF">
+                <a:alpha val="28000"/>
+              </a:srgbClr>
+            </a:solidFill>
+            <a:prstDash val="solid"/>
+          </a:ln>
+          <a:effectLst>
+            <a:outerShdw sx="100000" sy="100000" kx="0" ky="0" algn="bl" rotWithShape="0" blurRad="15240" dist="50800" dir="2700000">
+              <a:srgbClr val="B8C3D2">
+                <a:alpha val="16000"/>
+              </a:srgbClr>
+            </a:outerShdw>
+          </a:effectLst>
+        </p:spPr>
+      </p:sp>
+      <p:sp>
+        <p:nvSpPr>
+          <p:cNvPr id="3" name="Shape 1"/>
+          <p:cNvSpPr/>
+          <p:nvPr/>
+        </p:nvSpPr>
+        <p:spPr>
+          <a:xfrm>
             <a:off x="10362895" y="502920"/>
             <a:ext cx="822960" cy="822960"/>
           </a:xfrm>
@@ -21934,7 +23820,7 @@
       </p:sp>
       <p:sp>
         <p:nvSpPr>
-          <p:cNvPr id="3" name="Shape 1"/>
+          <p:cNvPr id="4" name="Shape 2"/>
           <p:cNvSpPr/>
           <p:nvPr/>
         </p:nvSpPr>
@@ -21968,7 +23854,57 @@
       </p:sp>
       <p:sp>
         <p:nvSpPr>
-          <p:cNvPr id="4" name="Shape 2"/>
+          <p:cNvPr id="5" name="Shape 3"/>
+          <p:cNvSpPr/>
+          <p:nvPr/>
+        </p:nvSpPr>
+        <p:spPr>
+          <a:xfrm>
+            <a:off x="9265615" y="6437376"/>
+            <a:ext cx="1993392" cy="0"/>
+          </a:xfrm>
+          <a:prstGeom prst="line">
+            <a:avLst/>
+          </a:prstGeom>
+          <a:noFill/>
+          <a:ln w="12700">
+            <a:solidFill>
+              <a:srgbClr val="FFFFFF">
+                <a:alpha val="88000"/>
+              </a:srgbClr>
+            </a:solidFill>
+            <a:prstDash val="solid"/>
+          </a:ln>
+        </p:spPr>
+      </p:sp>
+      <p:sp>
+        <p:nvSpPr>
+          <p:cNvPr id="6" name="Shape 4"/>
+          <p:cNvSpPr/>
+          <p:nvPr/>
+        </p:nvSpPr>
+        <p:spPr>
+          <a:xfrm>
+            <a:off x="9338767" y="6501384"/>
+            <a:ext cx="1920240" cy="0"/>
+          </a:xfrm>
+          <a:prstGeom prst="line">
+            <a:avLst/>
+          </a:prstGeom>
+          <a:noFill/>
+          <a:ln w="12700">
+            <a:solidFill>
+              <a:srgbClr val="B8C3D2">
+                <a:alpha val="64000"/>
+              </a:srgbClr>
+            </a:solidFill>
+            <a:prstDash val="solid"/>
+          </a:ln>
+        </p:spPr>
+      </p:sp>
+      <p:sp>
+        <p:nvSpPr>
+          <p:cNvPr id="7" name="Shape 5"/>
           <p:cNvSpPr/>
           <p:nvPr/>
         </p:nvSpPr>
@@ -21995,7 +23931,7 @@
       </p:sp>
       <p:sp>
         <p:nvSpPr>
-          <p:cNvPr id="5" name="Shape 3"/>
+          <p:cNvPr id="8" name="Shape 6"/>
           <p:cNvSpPr/>
           <p:nvPr/>
         </p:nvSpPr>
@@ -22022,7 +23958,7 @@
       </p:sp>
       <p:sp>
         <p:nvSpPr>
-          <p:cNvPr id="6" name="Shape 4"/>
+          <p:cNvPr id="9" name="Shape 7"/>
           <p:cNvSpPr/>
           <p:nvPr/>
         </p:nvSpPr>
@@ -22049,7 +23985,7 @@
       </p:sp>
       <p:sp>
         <p:nvSpPr>
-          <p:cNvPr id="7" name="mdpr:2-2-14f8eb:title:__title:2-2-14f8eb"/>
+          <p:cNvPr id="10" name="mdpr:2-2-14f8eb:title:__title:2-2-14f8eb"/>
           <p:cNvSpPr txBox="1"/>
           <p:nvPr/>
         </p:nvSpPr>
@@ -22091,7 +24027,7 @@
       </p:sp>
       <p:sp>
         <p:nvSpPr>
-          <p:cNvPr id="8" name="mdpr:2-2-14f8eb:left:block-6-chunk-2"/>
+          <p:cNvPr id="11" name="mdpr:2-2-14f8eb:left:block-6-chunk-2"/>
           <p:cNvSpPr txBox="1"/>
           <p:nvPr/>
         </p:nvSpPr>
@@ -22150,7 +24086,7 @@
       </p:sp>
       <p:sp>
         <p:nvSpPr>
-          <p:cNvPr id="9" name="mdpr:2-2-14f8eb:right:block-6-chunk-2"/>
+          <p:cNvPr id="12" name="mdpr:2-2-14f8eb:right:block-6-chunk-2"/>
           <p:cNvSpPr txBox="1"/>
           <p:nvPr/>
         </p:nvSpPr>
@@ -22247,6 +24183,44 @@
         </p:nvSpPr>
         <p:spPr>
           <a:xfrm>
+            <a:off x="9375343" y="384048"/>
+            <a:ext cx="1737360" cy="310896"/>
+          </a:xfrm>
+          <a:prstGeom prst="roundRect">
+            <a:avLst>
+              <a:gd name="adj" fmla="val 14706"/>
+            </a:avLst>
+          </a:prstGeom>
+          <a:solidFill>
+            <a:srgbClr val="F8FAFC">
+              <a:alpha val="72000"/>
+            </a:srgbClr>
+          </a:solidFill>
+          <a:ln w="12700">
+            <a:solidFill>
+              <a:srgbClr val="FFFFFF">
+                <a:alpha val="28000"/>
+              </a:srgbClr>
+            </a:solidFill>
+            <a:prstDash val="solid"/>
+          </a:ln>
+          <a:effectLst>
+            <a:outerShdw sx="100000" sy="100000" kx="0" ky="0" algn="bl" rotWithShape="0" blurRad="15240" dist="50800" dir="2700000">
+              <a:srgbClr val="B8C3D2">
+                <a:alpha val="16000"/>
+              </a:srgbClr>
+            </a:outerShdw>
+          </a:effectLst>
+        </p:spPr>
+      </p:sp>
+      <p:sp>
+        <p:nvSpPr>
+          <p:cNvPr id="3" name="Shape 1"/>
+          <p:cNvSpPr/>
+          <p:nvPr/>
+        </p:nvSpPr>
+        <p:spPr>
+          <a:xfrm>
             <a:off x="10362895" y="502920"/>
             <a:ext cx="822960" cy="822960"/>
           </a:xfrm>
@@ -22277,7 +24251,7 @@
       </p:sp>
       <p:sp>
         <p:nvSpPr>
-          <p:cNvPr id="3" name="Shape 1"/>
+          <p:cNvPr id="4" name="Shape 2"/>
           <p:cNvSpPr/>
           <p:nvPr/>
         </p:nvSpPr>
@@ -22311,7 +24285,57 @@
       </p:sp>
       <p:sp>
         <p:nvSpPr>
-          <p:cNvPr id="4" name="Shape 2"/>
+          <p:cNvPr id="5" name="Shape 3"/>
+          <p:cNvSpPr/>
+          <p:nvPr/>
+        </p:nvSpPr>
+        <p:spPr>
+          <a:xfrm>
+            <a:off x="9265615" y="6437376"/>
+            <a:ext cx="1993392" cy="0"/>
+          </a:xfrm>
+          <a:prstGeom prst="line">
+            <a:avLst/>
+          </a:prstGeom>
+          <a:noFill/>
+          <a:ln w="12700">
+            <a:solidFill>
+              <a:srgbClr val="FFFFFF">
+                <a:alpha val="88000"/>
+              </a:srgbClr>
+            </a:solidFill>
+            <a:prstDash val="solid"/>
+          </a:ln>
+        </p:spPr>
+      </p:sp>
+      <p:sp>
+        <p:nvSpPr>
+          <p:cNvPr id="6" name="Shape 4"/>
+          <p:cNvSpPr/>
+          <p:nvPr/>
+        </p:nvSpPr>
+        <p:spPr>
+          <a:xfrm>
+            <a:off x="9338767" y="6501384"/>
+            <a:ext cx="1920240" cy="0"/>
+          </a:xfrm>
+          <a:prstGeom prst="line">
+            <a:avLst/>
+          </a:prstGeom>
+          <a:noFill/>
+          <a:ln w="12700">
+            <a:solidFill>
+              <a:srgbClr val="B8C3D2">
+                <a:alpha val="64000"/>
+              </a:srgbClr>
+            </a:solidFill>
+            <a:prstDash val="solid"/>
+          </a:ln>
+        </p:spPr>
+      </p:sp>
+      <p:sp>
+        <p:nvSpPr>
+          <p:cNvPr id="7" name="Shape 5"/>
           <p:cNvSpPr/>
           <p:nvPr/>
         </p:nvSpPr>
@@ -22338,7 +24362,7 @@
       </p:sp>
       <p:sp>
         <p:nvSpPr>
-          <p:cNvPr id="5" name="Shape 3"/>
+          <p:cNvPr id="8" name="Shape 6"/>
           <p:cNvSpPr/>
           <p:nvPr/>
         </p:nvSpPr>
@@ -22376,7 +24400,7 @@
       </p:sp>
       <p:sp>
         <p:nvSpPr>
-          <p:cNvPr id="6" name="Shape 4"/>
+          <p:cNvPr id="9" name="Shape 7"/>
           <p:cNvSpPr/>
           <p:nvPr/>
         </p:nvSpPr>
@@ -22414,7 +24438,7 @@
       </p:sp>
       <p:sp>
         <p:nvSpPr>
-          <p:cNvPr id="7" name="Shape 5"/>
+          <p:cNvPr id="10" name="Shape 8"/>
           <p:cNvSpPr/>
           <p:nvPr/>
         </p:nvSpPr>
@@ -22445,7 +24469,7 @@
       </p:sp>
       <p:pic>
         <p:nvPicPr>
-          <p:cNvPr id="8" name="Image 0" descr="preencoded.png">    </p:cNvPr>
+          <p:cNvPr id="11" name="Image 0" descr="preencoded.png">    </p:cNvPr>
           <p:cNvPicPr>
             <a:picLocks noChangeAspect="1"/>
           </p:cNvPicPr>
@@ -22475,7 +24499,7 @@
       </p:pic>
       <p:sp>
         <p:nvSpPr>
-          <p:cNvPr id="9" name="Shape 6"/>
+          <p:cNvPr id="12" name="Shape 9"/>
           <p:cNvSpPr/>
           <p:nvPr/>
         </p:nvSpPr>
@@ -22513,7 +24537,7 @@
       </p:sp>
       <p:sp>
         <p:nvSpPr>
-          <p:cNvPr id="10" name="Shape 7"/>
+          <p:cNvPr id="13" name="Shape 10"/>
           <p:cNvSpPr/>
           <p:nvPr/>
         </p:nvSpPr>
@@ -22551,7 +24575,7 @@
       </p:sp>
       <p:sp>
         <p:nvSpPr>
-          <p:cNvPr id="11" name="Shape 8"/>
+          <p:cNvPr id="14" name="Shape 11"/>
           <p:cNvSpPr/>
           <p:nvPr/>
         </p:nvSpPr>
@@ -22582,7 +24606,7 @@
       </p:sp>
       <p:pic>
         <p:nvPicPr>
-          <p:cNvPr id="12" name="Image 1" descr="preencoded.png">    </p:cNvPr>
+          <p:cNvPr id="15" name="Image 1" descr="preencoded.png">    </p:cNvPr>
           <p:cNvPicPr>
             <a:picLocks noChangeAspect="1"/>
           </p:cNvPicPr>
@@ -22612,7 +24636,7 @@
       </p:pic>
       <p:sp>
         <p:nvSpPr>
-          <p:cNvPr id="13" name="Shape 9"/>
+          <p:cNvPr id="16" name="Shape 12"/>
           <p:cNvSpPr/>
           <p:nvPr/>
         </p:nvSpPr>
@@ -22650,7 +24674,7 @@
       </p:sp>
       <p:sp>
         <p:nvSpPr>
-          <p:cNvPr id="14" name="Shape 10"/>
+          <p:cNvPr id="17" name="Shape 13"/>
           <p:cNvSpPr/>
           <p:nvPr/>
         </p:nvSpPr>
@@ -22688,7 +24712,7 @@
       </p:sp>
       <p:sp>
         <p:nvSpPr>
-          <p:cNvPr id="15" name="Shape 11"/>
+          <p:cNvPr id="18" name="Shape 14"/>
           <p:cNvSpPr/>
           <p:nvPr/>
         </p:nvSpPr>
@@ -22719,7 +24743,7 @@
       </p:sp>
       <p:pic>
         <p:nvPicPr>
-          <p:cNvPr id="16" name="Image 2" descr="preencoded.png">    </p:cNvPr>
+          <p:cNvPr id="19" name="Image 2" descr="preencoded.png">    </p:cNvPr>
           <p:cNvPicPr>
             <a:picLocks noChangeAspect="1"/>
           </p:cNvPicPr>
@@ -22749,7 +24773,7 @@
       </p:pic>
       <p:sp>
         <p:nvSpPr>
-          <p:cNvPr id="17" name="Shape 12"/>
+          <p:cNvPr id="20" name="Shape 15"/>
           <p:cNvSpPr/>
           <p:nvPr/>
         </p:nvSpPr>
@@ -22778,7 +24802,7 @@
       </p:sp>
       <p:sp>
         <p:nvSpPr>
-          <p:cNvPr id="18" name="Shape 13"/>
+          <p:cNvPr id="21" name="Shape 16"/>
           <p:cNvSpPr/>
           <p:nvPr/>
         </p:nvSpPr>
@@ -22805,7 +24829,7 @@
       </p:sp>
       <p:sp>
         <p:nvSpPr>
-          <p:cNvPr id="19" name="Shape 14"/>
+          <p:cNvPr id="22" name="Shape 17"/>
           <p:cNvSpPr/>
           <p:nvPr/>
         </p:nvSpPr>
@@ -22832,7 +24856,7 @@
       </p:sp>
       <p:sp>
         <p:nvSpPr>
-          <p:cNvPr id="20" name="Shape 15"/>
+          <p:cNvPr id="23" name="Shape 18"/>
           <p:cNvSpPr/>
           <p:nvPr/>
         </p:nvSpPr>
@@ -22859,7 +24883,7 @@
       </p:sp>
       <p:sp>
         <p:nvSpPr>
-          <p:cNvPr id="21" name="mdpr:1-2-dfa474:title:__title:1-2-dfa474"/>
+          <p:cNvPr id="24" name="mdpr:1-2-dfa474:title:__title:1-2-dfa474"/>
           <p:cNvSpPr txBox="1"/>
           <p:nvPr/>
         </p:nvSpPr>
@@ -22901,7 +24925,7 @@
       </p:sp>
       <p:sp>
         <p:nvSpPr>
-          <p:cNvPr id="22" name="Shape 17"/>
+          <p:cNvPr id="25" name="Shape 20"/>
           <p:cNvSpPr/>
           <p:nvPr/>
         </p:nvSpPr>
@@ -22928,7 +24952,7 @@
       </p:sp>
       <p:pic>
         <p:nvPicPr>
-          <p:cNvPr id="23" name="Image 3" descr="article icon from tabler-icons (MIT)">    </p:cNvPr>
+          <p:cNvPr id="26" name="Image 3" descr="article icon from tabler-icons (MIT)">    </p:cNvPr>
           <p:cNvPicPr>
             <a:picLocks noChangeAspect="1"/>
           </p:cNvPicPr>
@@ -22958,7 +24982,7 @@
       </p:pic>
       <p:sp>
         <p:nvSpPr>
-          <p:cNvPr id="24" name="mdpr:1-2-dfa474:item-1:block-8-chunk-1"/>
+          <p:cNvPr id="27" name="mdpr:1-2-dfa474:item-1:block-8-chunk-1"/>
           <p:cNvSpPr txBox="1"/>
           <p:nvPr/>
         </p:nvSpPr>
@@ -23017,7 +25041,7 @@
       </p:sp>
       <p:sp>
         <p:nvSpPr>
-          <p:cNvPr id="25" name="Shape 19"/>
+          <p:cNvPr id="28" name="Shape 22"/>
           <p:cNvSpPr/>
           <p:nvPr/>
         </p:nvSpPr>
@@ -23044,7 +25068,7 @@
       </p:sp>
       <p:pic>
         <p:nvPicPr>
-          <p:cNvPr id="26" name="Image 4" descr="article icon from tabler-icons (MIT)">    </p:cNvPr>
+          <p:cNvPr id="29" name="Image 4" descr="article icon from tabler-icons (MIT)">    </p:cNvPr>
           <p:cNvPicPr>
             <a:picLocks noChangeAspect="1"/>
           </p:cNvPicPr>
@@ -23074,7 +25098,7 @@
       </p:pic>
       <p:sp>
         <p:nvSpPr>
-          <p:cNvPr id="27" name="mdpr:1-2-dfa474:item-2:block-8-chunk-1"/>
+          <p:cNvPr id="30" name="mdpr:1-2-dfa474:item-2:block-8-chunk-1"/>
           <p:cNvSpPr txBox="1"/>
           <p:nvPr/>
         </p:nvSpPr>
@@ -23133,7 +25157,7 @@
       </p:sp>
       <p:sp>
         <p:nvSpPr>
-          <p:cNvPr id="28" name="Shape 21"/>
+          <p:cNvPr id="31" name="Shape 24"/>
           <p:cNvSpPr/>
           <p:nvPr/>
         </p:nvSpPr>
@@ -23160,7 +25184,7 @@
       </p:sp>
       <p:pic>
         <p:nvPicPr>
-          <p:cNvPr id="29" name="Image 5" descr="article icon from tabler-icons (MIT)">    </p:cNvPr>
+          <p:cNvPr id="32" name="Image 5" descr="article icon from tabler-icons (MIT)">    </p:cNvPr>
           <p:cNvPicPr>
             <a:picLocks noChangeAspect="1"/>
           </p:cNvPicPr>
@@ -23190,7 +25214,7 @@
       </p:pic>
       <p:sp>
         <p:nvSpPr>
-          <p:cNvPr id="30" name="mdpr:1-2-dfa474:item-3:block-8-chunk-1"/>
+          <p:cNvPr id="33" name="mdpr:1-2-dfa474:item-3:block-8-chunk-1"/>
           <p:cNvSpPr txBox="1"/>
           <p:nvPr/>
         </p:nvSpPr>
@@ -23287,6 +25311,44 @@
         </p:nvSpPr>
         <p:spPr>
           <a:xfrm>
+            <a:off x="9375343" y="384048"/>
+            <a:ext cx="1737360" cy="310896"/>
+          </a:xfrm>
+          <a:prstGeom prst="roundRect">
+            <a:avLst>
+              <a:gd name="adj" fmla="val 14706"/>
+            </a:avLst>
+          </a:prstGeom>
+          <a:solidFill>
+            <a:srgbClr val="F8FAFC">
+              <a:alpha val="72000"/>
+            </a:srgbClr>
+          </a:solidFill>
+          <a:ln w="12700">
+            <a:solidFill>
+              <a:srgbClr val="FFFFFF">
+                <a:alpha val="28000"/>
+              </a:srgbClr>
+            </a:solidFill>
+            <a:prstDash val="solid"/>
+          </a:ln>
+          <a:effectLst>
+            <a:outerShdw sx="100000" sy="100000" kx="0" ky="0" algn="bl" rotWithShape="0" blurRad="15240" dist="50800" dir="2700000">
+              <a:srgbClr val="B8C3D2">
+                <a:alpha val="16000"/>
+              </a:srgbClr>
+            </a:outerShdw>
+          </a:effectLst>
+        </p:spPr>
+      </p:sp>
+      <p:sp>
+        <p:nvSpPr>
+          <p:cNvPr id="3" name="Shape 1"/>
+          <p:cNvSpPr/>
+          <p:nvPr/>
+        </p:nvSpPr>
+        <p:spPr>
+          <a:xfrm>
             <a:off x="10362895" y="502920"/>
             <a:ext cx="822960" cy="822960"/>
           </a:xfrm>
@@ -23317,7 +25379,7 @@
       </p:sp>
       <p:sp>
         <p:nvSpPr>
-          <p:cNvPr id="3" name="Shape 1"/>
+          <p:cNvPr id="4" name="Shape 2"/>
           <p:cNvSpPr/>
           <p:nvPr/>
         </p:nvSpPr>
@@ -23351,7 +25413,57 @@
       </p:sp>
       <p:sp>
         <p:nvSpPr>
-          <p:cNvPr id="4" name="Shape 2"/>
+          <p:cNvPr id="5" name="Shape 3"/>
+          <p:cNvSpPr/>
+          <p:nvPr/>
+        </p:nvSpPr>
+        <p:spPr>
+          <a:xfrm>
+            <a:off x="9265615" y="6437376"/>
+            <a:ext cx="1993392" cy="0"/>
+          </a:xfrm>
+          <a:prstGeom prst="line">
+            <a:avLst/>
+          </a:prstGeom>
+          <a:noFill/>
+          <a:ln w="12700">
+            <a:solidFill>
+              <a:srgbClr val="FFFFFF">
+                <a:alpha val="88000"/>
+              </a:srgbClr>
+            </a:solidFill>
+            <a:prstDash val="solid"/>
+          </a:ln>
+        </p:spPr>
+      </p:sp>
+      <p:sp>
+        <p:nvSpPr>
+          <p:cNvPr id="6" name="Shape 4"/>
+          <p:cNvSpPr/>
+          <p:nvPr/>
+        </p:nvSpPr>
+        <p:spPr>
+          <a:xfrm>
+            <a:off x="9338767" y="6501384"/>
+            <a:ext cx="1920240" cy="0"/>
+          </a:xfrm>
+          <a:prstGeom prst="line">
+            <a:avLst/>
+          </a:prstGeom>
+          <a:noFill/>
+          <a:ln w="12700">
+            <a:solidFill>
+              <a:srgbClr val="B8C3D2">
+                <a:alpha val="64000"/>
+              </a:srgbClr>
+            </a:solidFill>
+            <a:prstDash val="solid"/>
+          </a:ln>
+        </p:spPr>
+      </p:sp>
+      <p:sp>
+        <p:nvSpPr>
+          <p:cNvPr id="7" name="Shape 5"/>
           <p:cNvSpPr/>
           <p:nvPr/>
         </p:nvSpPr>
@@ -23378,7 +25490,7 @@
       </p:sp>
       <p:sp>
         <p:nvSpPr>
-          <p:cNvPr id="5" name="Shape 3"/>
+          <p:cNvPr id="8" name="Shape 6"/>
           <p:cNvSpPr/>
           <p:nvPr/>
         </p:nvSpPr>
@@ -23405,7 +25517,7 @@
       </p:sp>
       <p:sp>
         <p:nvSpPr>
-          <p:cNvPr id="6" name="Shape 4"/>
+          <p:cNvPr id="9" name="Shape 7"/>
           <p:cNvSpPr/>
           <p:nvPr/>
         </p:nvSpPr>
@@ -23432,7 +25544,7 @@
       </p:sp>
       <p:sp>
         <p:nvSpPr>
-          <p:cNvPr id="7" name="mdpr:2-2-149bde:title:__title:2-2-149bde"/>
+          <p:cNvPr id="10" name="mdpr:2-2-149bde:title:__title:2-2-149bde"/>
           <p:cNvSpPr txBox="1"/>
           <p:nvPr/>
         </p:nvSpPr>
@@ -23474,7 +25586,7 @@
       </p:sp>
       <p:sp>
         <p:nvSpPr>
-          <p:cNvPr id="8" name="mdpr:2-2-149bde:left:block-8-chunk-2"/>
+          <p:cNvPr id="11" name="mdpr:2-2-149bde:left:block-8-chunk-2"/>
           <p:cNvSpPr txBox="1"/>
           <p:nvPr/>
         </p:nvSpPr>
@@ -23533,7 +25645,7 @@
       </p:sp>
       <p:sp>
         <p:nvSpPr>
-          <p:cNvPr id="9" name="mdpr:2-2-149bde:right:block-8-chunk-2"/>
+          <p:cNvPr id="12" name="mdpr:2-2-149bde:right:block-8-chunk-2"/>
           <p:cNvSpPr txBox="1"/>
           <p:nvPr/>
         </p:nvSpPr>
@@ -23630,6 +25742,44 @@
         </p:nvSpPr>
         <p:spPr>
           <a:xfrm>
+            <a:off x="9375343" y="384048"/>
+            <a:ext cx="1737360" cy="310896"/>
+          </a:xfrm>
+          <a:prstGeom prst="roundRect">
+            <a:avLst>
+              <a:gd name="adj" fmla="val 14706"/>
+            </a:avLst>
+          </a:prstGeom>
+          <a:solidFill>
+            <a:srgbClr val="F8FAFC">
+              <a:alpha val="72000"/>
+            </a:srgbClr>
+          </a:solidFill>
+          <a:ln w="12700">
+            <a:solidFill>
+              <a:srgbClr val="FFFFFF">
+                <a:alpha val="28000"/>
+              </a:srgbClr>
+            </a:solidFill>
+            <a:prstDash val="solid"/>
+          </a:ln>
+          <a:effectLst>
+            <a:outerShdw sx="100000" sy="100000" kx="0" ky="0" algn="bl" rotWithShape="0" blurRad="15240" dist="50800" dir="2700000">
+              <a:srgbClr val="B8C3D2">
+                <a:alpha val="16000"/>
+              </a:srgbClr>
+            </a:outerShdw>
+          </a:effectLst>
+        </p:spPr>
+      </p:sp>
+      <p:sp>
+        <p:nvSpPr>
+          <p:cNvPr id="3" name="Shape 1"/>
+          <p:cNvSpPr/>
+          <p:nvPr/>
+        </p:nvSpPr>
+        <p:spPr>
+          <a:xfrm>
             <a:off x="10362895" y="502920"/>
             <a:ext cx="822960" cy="822960"/>
           </a:xfrm>
@@ -23660,7 +25810,7 @@
       </p:sp>
       <p:sp>
         <p:nvSpPr>
-          <p:cNvPr id="3" name="Shape 1"/>
+          <p:cNvPr id="4" name="Shape 2"/>
           <p:cNvSpPr/>
           <p:nvPr/>
         </p:nvSpPr>
@@ -23694,7 +25844,57 @@
       </p:sp>
       <p:sp>
         <p:nvSpPr>
-          <p:cNvPr id="4" name="Shape 2"/>
+          <p:cNvPr id="5" name="Shape 3"/>
+          <p:cNvSpPr/>
+          <p:nvPr/>
+        </p:nvSpPr>
+        <p:spPr>
+          <a:xfrm>
+            <a:off x="9265615" y="6437376"/>
+            <a:ext cx="1993392" cy="0"/>
+          </a:xfrm>
+          <a:prstGeom prst="line">
+            <a:avLst/>
+          </a:prstGeom>
+          <a:noFill/>
+          <a:ln w="12700">
+            <a:solidFill>
+              <a:srgbClr val="FFFFFF">
+                <a:alpha val="88000"/>
+              </a:srgbClr>
+            </a:solidFill>
+            <a:prstDash val="solid"/>
+          </a:ln>
+        </p:spPr>
+      </p:sp>
+      <p:sp>
+        <p:nvSpPr>
+          <p:cNvPr id="6" name="Shape 4"/>
+          <p:cNvSpPr/>
+          <p:nvPr/>
+        </p:nvSpPr>
+        <p:spPr>
+          <a:xfrm>
+            <a:off x="9338767" y="6501384"/>
+            <a:ext cx="1920240" cy="0"/>
+          </a:xfrm>
+          <a:prstGeom prst="line">
+            <a:avLst/>
+          </a:prstGeom>
+          <a:noFill/>
+          <a:ln w="12700">
+            <a:solidFill>
+              <a:srgbClr val="B8C3D2">
+                <a:alpha val="64000"/>
+              </a:srgbClr>
+            </a:solidFill>
+            <a:prstDash val="solid"/>
+          </a:ln>
+        </p:spPr>
+      </p:sp>
+      <p:sp>
+        <p:nvSpPr>
+          <p:cNvPr id="7" name="Shape 5"/>
           <p:cNvSpPr/>
           <p:nvPr/>
         </p:nvSpPr>
@@ -23721,7 +25921,7 @@
       </p:sp>
       <p:sp>
         <p:nvSpPr>
-          <p:cNvPr id="5" name="Shape 3"/>
+          <p:cNvPr id="8" name="Shape 6"/>
           <p:cNvSpPr/>
           <p:nvPr/>
         </p:nvSpPr>
@@ -23748,7 +25948,7 @@
       </p:sp>
       <p:sp>
         <p:nvSpPr>
-          <p:cNvPr id="6" name="Shape 4"/>
+          <p:cNvPr id="9" name="Shape 7"/>
           <p:cNvSpPr/>
           <p:nvPr/>
         </p:nvSpPr>
@@ -23775,7 +25975,7 @@
       </p:sp>
       <p:sp>
         <p:nvSpPr>
-          <p:cNvPr id="7" name="mdpr:1-2-5a84f1:title:__title:1-2-5a84f1"/>
+          <p:cNvPr id="10" name="mdpr:1-2-5a84f1:title:__title:1-2-5a84f1"/>
           <p:cNvSpPr txBox="1"/>
           <p:nvPr/>
         </p:nvSpPr>
@@ -23817,7 +26017,7 @@
       </p:sp>
       <p:sp>
         <p:nvSpPr>
-          <p:cNvPr id="8" name="mdpr:1-2-5a84f1:left:block-10-chunk-1"/>
+          <p:cNvPr id="11" name="mdpr:1-2-5a84f1:left:block-10-chunk-1"/>
           <p:cNvSpPr txBox="1"/>
           <p:nvPr/>
         </p:nvSpPr>
@@ -23876,7 +26076,7 @@
       </p:sp>
       <p:sp>
         <p:nvSpPr>
-          <p:cNvPr id="9" name="mdpr:1-2-5a84f1:right:block-10-chunk-1"/>
+          <p:cNvPr id="12" name="mdpr:1-2-5a84f1:right:block-10-chunk-1"/>
           <p:cNvSpPr txBox="1"/>
           <p:nvPr/>
         </p:nvSpPr>

--- a/docs/theme-preview/pptx/newmorphism.pptx
+++ b/docs/theme-preview/pptx/newmorphism.pptx
@@ -5912,556 +5912,8 @@
         </p:nvSpPr>
         <p:spPr>
           <a:xfrm>
-            <a:off x="864108" y="1513332"/>
-            <a:ext cx="5029200" cy="1920240"/>
-          </a:xfrm>
-          <a:prstGeom prst="roundRect">
-            <a:avLst>
-              <a:gd name="adj" fmla="val 2857"/>
-            </a:avLst>
-          </a:prstGeom>
-          <a:solidFill>
-            <a:srgbClr val="B8C3D2">
-              <a:alpha val="26000"/>
-            </a:srgbClr>
-          </a:solidFill>
-          <a:ln w="12700">
-            <a:solidFill>
-              <a:srgbClr val="D5DCE7">
-                <a:alpha val="0"/>
-              </a:srgbClr>
-            </a:solidFill>
-            <a:prstDash val="solid"/>
-          </a:ln>
-          <a:effectLst>
-            <a:outerShdw sx="100000" sy="100000" kx="0" ky="0" algn="bl" rotWithShape="0" blurRad="13970" dist="50800" dir="2700000">
-              <a:srgbClr val="AAB5C4">
-                <a:alpha val="20000"/>
-              </a:srgbClr>
-            </a:outerShdw>
-          </a:effectLst>
-        </p:spPr>
-      </p:sp>
-      <p:sp>
-        <p:nvSpPr>
-          <p:cNvPr id="9" name="Shape 7"/>
-          <p:cNvSpPr/>
-          <p:nvPr/>
-        </p:nvSpPr>
-        <p:spPr>
-          <a:xfrm>
-            <a:off x="790956" y="1431036"/>
-            <a:ext cx="5029200" cy="1920240"/>
-          </a:xfrm>
-          <a:prstGeom prst="roundRect">
-            <a:avLst>
-              <a:gd name="adj" fmla="val 2857"/>
-            </a:avLst>
-          </a:prstGeom>
-          <a:solidFill>
-            <a:srgbClr val="FFFFFF">
-              <a:alpha val="42000"/>
-            </a:srgbClr>
-          </a:solidFill>
-          <a:ln w="12700">
-            <a:solidFill>
-              <a:srgbClr val="FFFFFF">
-                <a:alpha val="0"/>
-              </a:srgbClr>
-            </a:solidFill>
-            <a:prstDash val="solid"/>
-          </a:ln>
-          <a:effectLst>
-            <a:outerShdw sx="100000" sy="100000" kx="0" ky="0" algn="bl" rotWithShape="0" blurRad="10160" dist="50800" dir="13500000">
-              <a:srgbClr val="FFFFFF">
-                <a:alpha val="36000"/>
-              </a:srgbClr>
-            </a:outerShdw>
-          </a:effectLst>
-        </p:spPr>
-      </p:sp>
-      <p:sp>
-        <p:nvSpPr>
-          <p:cNvPr id="10" name="Shape 8"/>
-          <p:cNvSpPr/>
-          <p:nvPr/>
-        </p:nvSpPr>
-        <p:spPr>
-          <a:xfrm>
-            <a:off x="822960" y="1463040"/>
-            <a:ext cx="5029200" cy="1920240"/>
-          </a:xfrm>
-          <a:prstGeom prst="roundRect">
-            <a:avLst>
-              <a:gd name="adj" fmla="val 2857"/>
-            </a:avLst>
-          </a:prstGeom>
-          <a:solidFill>
-            <a:srgbClr val="E9EEF5">
-              <a:alpha val="6000"/>
-            </a:srgbClr>
-          </a:solidFill>
-          <a:ln w="12700">
-            <a:solidFill>
-              <a:srgbClr val="FFFFFF">
-                <a:alpha val="28000"/>
-              </a:srgbClr>
-            </a:solidFill>
-            <a:prstDash val="solid"/>
-          </a:ln>
-        </p:spPr>
-      </p:sp>
-      <p:pic>
-        <p:nvPicPr>
-          <p:cNvPr id="11" name="Image 0" descr="preencoded.png">    </p:cNvPr>
-          <p:cNvPicPr>
-            <a:picLocks noChangeAspect="1"/>
-          </p:cNvPicPr>
-          <p:nvPr/>
-        </p:nvPicPr>
-        <p:blipFill>
-          <a:blip r:embed="rId1">
-            <a:extLst>
-              <a:ext uri="{96DAC541-7B7A-43D3-8B79-37D633B846F1}">
-                <asvg:svgBlip xmlns:asvg="http://schemas.microsoft.com/office/drawing/2016/SVG/main" r:embed="rId2"/>
-              </a:ext>
-            </a:extLst>
-          </a:blip>
-          <a:stretch>
-            <a:fillRect/>
-          </a:stretch>
-        </p:blipFill>
-        <p:spPr>
-          <a:xfrm>
-            <a:off x="822960" y="1463040"/>
-            <a:ext cx="5029200" cy="1920240"/>
-          </a:xfrm>
-          <a:prstGeom prst="rect">
-            <a:avLst/>
-          </a:prstGeom>
-        </p:spPr>
-      </p:pic>
-      <p:sp>
-        <p:nvSpPr>
-          <p:cNvPr id="12" name="Shape 9"/>
-          <p:cNvSpPr/>
-          <p:nvPr/>
-        </p:nvSpPr>
-        <p:spPr>
-          <a:xfrm>
-            <a:off x="6350508" y="1513332"/>
-            <a:ext cx="5029200" cy="1920240"/>
-          </a:xfrm>
-          <a:prstGeom prst="roundRect">
-            <a:avLst>
-              <a:gd name="adj" fmla="val 2857"/>
-            </a:avLst>
-          </a:prstGeom>
-          <a:solidFill>
-            <a:srgbClr val="B8C3D2">
-              <a:alpha val="26000"/>
-            </a:srgbClr>
-          </a:solidFill>
-          <a:ln w="12700">
-            <a:solidFill>
-              <a:srgbClr val="D5DCE7">
-                <a:alpha val="0"/>
-              </a:srgbClr>
-            </a:solidFill>
-            <a:prstDash val="solid"/>
-          </a:ln>
-          <a:effectLst>
-            <a:outerShdw sx="100000" sy="100000" kx="0" ky="0" algn="bl" rotWithShape="0" blurRad="13970" dist="50800" dir="2700000">
-              <a:srgbClr val="AAB5C4">
-                <a:alpha val="20000"/>
-              </a:srgbClr>
-            </a:outerShdw>
-          </a:effectLst>
-        </p:spPr>
-      </p:sp>
-      <p:sp>
-        <p:nvSpPr>
-          <p:cNvPr id="13" name="Shape 10"/>
-          <p:cNvSpPr/>
-          <p:nvPr/>
-        </p:nvSpPr>
-        <p:spPr>
-          <a:xfrm>
-            <a:off x="6277356" y="1431036"/>
-            <a:ext cx="5029200" cy="1920240"/>
-          </a:xfrm>
-          <a:prstGeom prst="roundRect">
-            <a:avLst>
-              <a:gd name="adj" fmla="val 2857"/>
-            </a:avLst>
-          </a:prstGeom>
-          <a:solidFill>
-            <a:srgbClr val="FFFFFF">
-              <a:alpha val="42000"/>
-            </a:srgbClr>
-          </a:solidFill>
-          <a:ln w="12700">
-            <a:solidFill>
-              <a:srgbClr val="FFFFFF">
-                <a:alpha val="0"/>
-              </a:srgbClr>
-            </a:solidFill>
-            <a:prstDash val="solid"/>
-          </a:ln>
-          <a:effectLst>
-            <a:outerShdw sx="100000" sy="100000" kx="0" ky="0" algn="bl" rotWithShape="0" blurRad="10160" dist="50800" dir="13500000">
-              <a:srgbClr val="FFFFFF">
-                <a:alpha val="36000"/>
-              </a:srgbClr>
-            </a:outerShdw>
-          </a:effectLst>
-        </p:spPr>
-      </p:sp>
-      <p:sp>
-        <p:nvSpPr>
-          <p:cNvPr id="14" name="Shape 11"/>
-          <p:cNvSpPr/>
-          <p:nvPr/>
-        </p:nvSpPr>
-        <p:spPr>
-          <a:xfrm>
-            <a:off x="6309360" y="1463040"/>
-            <a:ext cx="5029200" cy="1920240"/>
-          </a:xfrm>
-          <a:prstGeom prst="roundRect">
-            <a:avLst>
-              <a:gd name="adj" fmla="val 2857"/>
-            </a:avLst>
-          </a:prstGeom>
-          <a:solidFill>
-            <a:srgbClr val="E9EEF5">
-              <a:alpha val="6000"/>
-            </a:srgbClr>
-          </a:solidFill>
-          <a:ln w="12700">
-            <a:solidFill>
-              <a:srgbClr val="FFFFFF">
-                <a:alpha val="28000"/>
-              </a:srgbClr>
-            </a:solidFill>
-            <a:prstDash val="solid"/>
-          </a:ln>
-        </p:spPr>
-      </p:sp>
-      <p:pic>
-        <p:nvPicPr>
-          <p:cNvPr id="15" name="Image 1" descr="preencoded.png">    </p:cNvPr>
-          <p:cNvPicPr>
-            <a:picLocks noChangeAspect="1"/>
-          </p:cNvPicPr>
-          <p:nvPr/>
-        </p:nvPicPr>
-        <p:blipFill>
-          <a:blip r:embed="rId3">
-            <a:extLst>
-              <a:ext uri="{96DAC541-7B7A-43D3-8B79-37D633B846F1}">
-                <asvg:svgBlip xmlns:asvg="http://schemas.microsoft.com/office/drawing/2016/SVG/main" r:embed="rId4"/>
-              </a:ext>
-            </a:extLst>
-          </a:blip>
-          <a:stretch>
-            <a:fillRect/>
-          </a:stretch>
-        </p:blipFill>
-        <p:spPr>
-          <a:xfrm>
-            <a:off x="6309360" y="1463040"/>
-            <a:ext cx="5029200" cy="1920240"/>
-          </a:xfrm>
-          <a:prstGeom prst="rect">
-            <a:avLst/>
-          </a:prstGeom>
-        </p:spPr>
-      </p:pic>
-      <p:sp>
-        <p:nvSpPr>
-          <p:cNvPr id="16" name="Shape 12"/>
-          <p:cNvSpPr/>
-          <p:nvPr/>
-        </p:nvSpPr>
-        <p:spPr>
-          <a:xfrm>
-            <a:off x="864108" y="3799332"/>
-            <a:ext cx="5029200" cy="1920240"/>
-          </a:xfrm>
-          <a:prstGeom prst="roundRect">
-            <a:avLst>
-              <a:gd name="adj" fmla="val 2857"/>
-            </a:avLst>
-          </a:prstGeom>
-          <a:solidFill>
-            <a:srgbClr val="B8C3D2">
-              <a:alpha val="26000"/>
-            </a:srgbClr>
-          </a:solidFill>
-          <a:ln w="12700">
-            <a:solidFill>
-              <a:srgbClr val="D5DCE7">
-                <a:alpha val="0"/>
-              </a:srgbClr>
-            </a:solidFill>
-            <a:prstDash val="solid"/>
-          </a:ln>
-          <a:effectLst>
-            <a:outerShdw sx="100000" sy="100000" kx="0" ky="0" algn="bl" rotWithShape="0" blurRad="13970" dist="50800" dir="2700000">
-              <a:srgbClr val="AAB5C4">
-                <a:alpha val="20000"/>
-              </a:srgbClr>
-            </a:outerShdw>
-          </a:effectLst>
-        </p:spPr>
-      </p:sp>
-      <p:sp>
-        <p:nvSpPr>
-          <p:cNvPr id="17" name="Shape 13"/>
-          <p:cNvSpPr/>
-          <p:nvPr/>
-        </p:nvSpPr>
-        <p:spPr>
-          <a:xfrm>
-            <a:off x="790956" y="3717036"/>
-            <a:ext cx="5029200" cy="1920240"/>
-          </a:xfrm>
-          <a:prstGeom prst="roundRect">
-            <a:avLst>
-              <a:gd name="adj" fmla="val 2857"/>
-            </a:avLst>
-          </a:prstGeom>
-          <a:solidFill>
-            <a:srgbClr val="FFFFFF">
-              <a:alpha val="42000"/>
-            </a:srgbClr>
-          </a:solidFill>
-          <a:ln w="12700">
-            <a:solidFill>
-              <a:srgbClr val="FFFFFF">
-                <a:alpha val="0"/>
-              </a:srgbClr>
-            </a:solidFill>
-            <a:prstDash val="solid"/>
-          </a:ln>
-          <a:effectLst>
-            <a:outerShdw sx="100000" sy="100000" kx="0" ky="0" algn="bl" rotWithShape="0" blurRad="10160" dist="50800" dir="13500000">
-              <a:srgbClr val="FFFFFF">
-                <a:alpha val="36000"/>
-              </a:srgbClr>
-            </a:outerShdw>
-          </a:effectLst>
-        </p:spPr>
-      </p:sp>
-      <p:sp>
-        <p:nvSpPr>
-          <p:cNvPr id="18" name="Shape 14"/>
-          <p:cNvSpPr/>
-          <p:nvPr/>
-        </p:nvSpPr>
-        <p:spPr>
-          <a:xfrm>
-            <a:off x="822960" y="3749040"/>
-            <a:ext cx="5029200" cy="1920240"/>
-          </a:xfrm>
-          <a:prstGeom prst="roundRect">
-            <a:avLst>
-              <a:gd name="adj" fmla="val 2857"/>
-            </a:avLst>
-          </a:prstGeom>
-          <a:solidFill>
-            <a:srgbClr val="E9EEF5">
-              <a:alpha val="6000"/>
-            </a:srgbClr>
-          </a:solidFill>
-          <a:ln w="12700">
-            <a:solidFill>
-              <a:srgbClr val="FFFFFF">
-                <a:alpha val="28000"/>
-              </a:srgbClr>
-            </a:solidFill>
-            <a:prstDash val="solid"/>
-          </a:ln>
-        </p:spPr>
-      </p:sp>
-      <p:pic>
-        <p:nvPicPr>
-          <p:cNvPr id="19" name="Image 2" descr="preencoded.png">    </p:cNvPr>
-          <p:cNvPicPr>
-            <a:picLocks noChangeAspect="1"/>
-          </p:cNvPicPr>
-          <p:nvPr/>
-        </p:nvPicPr>
-        <p:blipFill>
-          <a:blip r:embed="rId5">
-            <a:extLst>
-              <a:ext uri="{96DAC541-7B7A-43D3-8B79-37D633B846F1}">
-                <asvg:svgBlip xmlns:asvg="http://schemas.microsoft.com/office/drawing/2016/SVG/main" r:embed="rId6"/>
-              </a:ext>
-            </a:extLst>
-          </a:blip>
-          <a:stretch>
-            <a:fillRect/>
-          </a:stretch>
-        </p:blipFill>
-        <p:spPr>
-          <a:xfrm>
-            <a:off x="822960" y="3749040"/>
-            <a:ext cx="5029200" cy="1920240"/>
-          </a:xfrm>
-          <a:prstGeom prst="rect">
-            <a:avLst/>
-          </a:prstGeom>
-        </p:spPr>
-      </p:pic>
-      <p:sp>
-        <p:nvSpPr>
-          <p:cNvPr id="20" name="Shape 15"/>
-          <p:cNvSpPr/>
-          <p:nvPr/>
-        </p:nvSpPr>
-        <p:spPr>
-          <a:xfrm>
-            <a:off x="6350508" y="3799332"/>
-            <a:ext cx="5029200" cy="1920240"/>
-          </a:xfrm>
-          <a:prstGeom prst="roundRect">
-            <a:avLst>
-              <a:gd name="adj" fmla="val 2857"/>
-            </a:avLst>
-          </a:prstGeom>
-          <a:solidFill>
-            <a:srgbClr val="B8C3D2">
-              <a:alpha val="26000"/>
-            </a:srgbClr>
-          </a:solidFill>
-          <a:ln w="12700">
-            <a:solidFill>
-              <a:srgbClr val="D5DCE7">
-                <a:alpha val="0"/>
-              </a:srgbClr>
-            </a:solidFill>
-            <a:prstDash val="solid"/>
-          </a:ln>
-          <a:effectLst>
-            <a:outerShdw sx="100000" sy="100000" kx="0" ky="0" algn="bl" rotWithShape="0" blurRad="13970" dist="50800" dir="2700000">
-              <a:srgbClr val="AAB5C4">
-                <a:alpha val="20000"/>
-              </a:srgbClr>
-            </a:outerShdw>
-          </a:effectLst>
-        </p:spPr>
-      </p:sp>
-      <p:sp>
-        <p:nvSpPr>
-          <p:cNvPr id="21" name="Shape 16"/>
-          <p:cNvSpPr/>
-          <p:nvPr/>
-        </p:nvSpPr>
-        <p:spPr>
-          <a:xfrm>
-            <a:off x="6277356" y="3717036"/>
-            <a:ext cx="5029200" cy="1920240"/>
-          </a:xfrm>
-          <a:prstGeom prst="roundRect">
-            <a:avLst>
-              <a:gd name="adj" fmla="val 2857"/>
-            </a:avLst>
-          </a:prstGeom>
-          <a:solidFill>
-            <a:srgbClr val="FFFFFF">
-              <a:alpha val="42000"/>
-            </a:srgbClr>
-          </a:solidFill>
-          <a:ln w="12700">
-            <a:solidFill>
-              <a:srgbClr val="FFFFFF">
-                <a:alpha val="0"/>
-              </a:srgbClr>
-            </a:solidFill>
-            <a:prstDash val="solid"/>
-          </a:ln>
-          <a:effectLst>
-            <a:outerShdw sx="100000" sy="100000" kx="0" ky="0" algn="bl" rotWithShape="0" blurRad="10160" dist="50800" dir="13500000">
-              <a:srgbClr val="FFFFFF">
-                <a:alpha val="36000"/>
-              </a:srgbClr>
-            </a:outerShdw>
-          </a:effectLst>
-        </p:spPr>
-      </p:sp>
-      <p:sp>
-        <p:nvSpPr>
-          <p:cNvPr id="22" name="Shape 17"/>
-          <p:cNvSpPr/>
-          <p:nvPr/>
-        </p:nvSpPr>
-        <p:spPr>
-          <a:xfrm>
-            <a:off x="6309360" y="3749040"/>
-            <a:ext cx="5029200" cy="1920240"/>
-          </a:xfrm>
-          <a:prstGeom prst="roundRect">
-            <a:avLst>
-              <a:gd name="adj" fmla="val 2857"/>
-            </a:avLst>
-          </a:prstGeom>
-          <a:solidFill>
-            <a:srgbClr val="E9EEF5">
-              <a:alpha val="6000"/>
-            </a:srgbClr>
-          </a:solidFill>
-          <a:ln w="12700">
-            <a:solidFill>
-              <a:srgbClr val="FFFFFF">
-                <a:alpha val="28000"/>
-              </a:srgbClr>
-            </a:solidFill>
-            <a:prstDash val="solid"/>
-          </a:ln>
-        </p:spPr>
-      </p:sp>
-      <p:pic>
-        <p:nvPicPr>
-          <p:cNvPr id="23" name="Image 3" descr="preencoded.png">    </p:cNvPr>
-          <p:cNvPicPr>
-            <a:picLocks noChangeAspect="1"/>
-          </p:cNvPicPr>
-          <p:nvPr/>
-        </p:nvPicPr>
-        <p:blipFill>
-          <a:blip r:embed="rId7">
-            <a:extLst>
-              <a:ext uri="{96DAC541-7B7A-43D3-8B79-37D633B846F1}">
-                <asvg:svgBlip xmlns:asvg="http://schemas.microsoft.com/office/drawing/2016/SVG/main" r:embed="rId8"/>
-              </a:ext>
-            </a:extLst>
-          </a:blip>
-          <a:stretch>
-            <a:fillRect/>
-          </a:stretch>
-        </p:blipFill>
-        <p:spPr>
-          <a:xfrm>
-            <a:off x="6309360" y="3749040"/>
-            <a:ext cx="5029200" cy="1920240"/>
-          </a:xfrm>
-          <a:prstGeom prst="rect">
-            <a:avLst/>
-          </a:prstGeom>
-        </p:spPr>
-      </p:pic>
-      <p:sp>
-        <p:nvSpPr>
-          <p:cNvPr id="24" name="Shape 18"/>
-          <p:cNvSpPr/>
-          <p:nvPr/>
-        </p:nvSpPr>
-        <p:spPr>
-          <a:xfrm>
-            <a:off x="822960" y="1463040"/>
-            <a:ext cx="73152" cy="1920240"/>
+            <a:off x="822960" y="1389888"/>
+            <a:ext cx="4937760" cy="73152"/>
           </a:xfrm>
           <a:prstGeom prst="rect">
             <a:avLst/>
@@ -6481,41 +5933,14 @@
       </p:sp>
       <p:sp>
         <p:nvSpPr>
-          <p:cNvPr id="25" name="Shape 19"/>
-          <p:cNvSpPr/>
-          <p:nvPr/>
-        </p:nvSpPr>
-        <p:spPr>
-          <a:xfrm>
-            <a:off x="6309360" y="1463040"/>
-            <a:ext cx="73152" cy="1920240"/>
-          </a:xfrm>
-          <a:prstGeom prst="rect">
-            <a:avLst/>
-          </a:prstGeom>
-          <a:solidFill>
-            <a:srgbClr val="CBD5E1"/>
-          </a:solidFill>
-          <a:ln w="12700">
-            <a:solidFill>
-              <a:srgbClr val="CBD5E1">
-                <a:alpha val="0"/>
-              </a:srgbClr>
-            </a:solidFill>
-            <a:prstDash val="solid"/>
-          </a:ln>
-        </p:spPr>
-      </p:sp>
-      <p:sp>
-        <p:nvSpPr>
-          <p:cNvPr id="26" name="Shape 20"/>
-          <p:cNvSpPr/>
-          <p:nvPr/>
-        </p:nvSpPr>
-        <p:spPr>
-          <a:xfrm>
-            <a:off x="822960" y="3749040"/>
-            <a:ext cx="73152" cy="1920240"/>
+          <p:cNvPr id="9" name="Shape 7"/>
+          <p:cNvSpPr/>
+          <p:nvPr/>
+        </p:nvSpPr>
+        <p:spPr>
+          <a:xfrm>
+            <a:off x="6400800" y="1389888"/>
+            <a:ext cx="4937760" cy="73152"/>
           </a:xfrm>
           <a:prstGeom prst="rect">
             <a:avLst/>
@@ -6535,34 +5960,7 @@
       </p:sp>
       <p:sp>
         <p:nvSpPr>
-          <p:cNvPr id="27" name="Shape 21"/>
-          <p:cNvSpPr/>
-          <p:nvPr/>
-        </p:nvSpPr>
-        <p:spPr>
-          <a:xfrm>
-            <a:off x="6309360" y="3749040"/>
-            <a:ext cx="73152" cy="1920240"/>
-          </a:xfrm>
-          <a:prstGeom prst="rect">
-            <a:avLst/>
-          </a:prstGeom>
-          <a:solidFill>
-            <a:srgbClr val="CBD5E1"/>
-          </a:solidFill>
-          <a:ln w="12700">
-            <a:solidFill>
-              <a:srgbClr val="CBD5E1">
-                <a:alpha val="0"/>
-              </a:srgbClr>
-            </a:solidFill>
-            <a:prstDash val="solid"/>
-          </a:ln>
-        </p:spPr>
-      </p:sp>
-      <p:sp>
-        <p:nvSpPr>
-          <p:cNvPr id="28" name="mdpr:1-2-e3669a:title:__title:1-2-e3669a"/>
+          <p:cNvPr id="10" name="mdpr:1-2-e3669a:title:__title:1-2-e3669a"/>
           <p:cNvSpPr txBox="1"/>
           <p:nvPr/>
         </p:nvSpPr>
@@ -6604,71 +6002,14 @@
       </p:sp>
       <p:sp>
         <p:nvSpPr>
-          <p:cNvPr id="29" name="Shape 23"/>
-          <p:cNvSpPr/>
-          <p:nvPr/>
-        </p:nvSpPr>
-        <p:spPr>
-          <a:xfrm>
-            <a:off x="976122" y="2130552"/>
-            <a:ext cx="585216" cy="585216"/>
-          </a:xfrm>
-          <a:prstGeom prst="roundRect">
-            <a:avLst>
-              <a:gd name="adj" fmla="val 6250"/>
-            </a:avLst>
-          </a:prstGeom>
-          <a:solidFill>
-            <a:srgbClr val="E9EEF5"/>
-          </a:solidFill>
-          <a:ln w="12700">
-            <a:solidFill>
-              <a:srgbClr val="D5DCE7"/>
-            </a:solidFill>
-            <a:prstDash val="solid"/>
-          </a:ln>
-        </p:spPr>
-      </p:sp>
-      <p:pic>
-        <p:nvPicPr>
-          <p:cNvPr id="30" name="Image 4" descr="article icon from tabler-icons (MIT)">    </p:cNvPr>
-          <p:cNvPicPr>
-            <a:picLocks noChangeAspect="1"/>
-          </p:cNvPicPr>
-          <p:nvPr/>
-        </p:nvPicPr>
-        <p:blipFill>
-          <a:blip r:embed="rId9">
-            <a:extLst>
-              <a:ext uri="{96DAC541-7B7A-43D3-8B79-37D633B846F1}">
-                <asvg:svgBlip xmlns:asvg="http://schemas.microsoft.com/office/drawing/2016/SVG/main" r:embed="rId10"/>
-              </a:ext>
-            </a:extLst>
-          </a:blip>
-          <a:stretch>
-            <a:fillRect/>
-          </a:stretch>
-        </p:blipFill>
-        <p:spPr>
-          <a:xfrm>
-            <a:off x="1049274" y="2203704"/>
-            <a:ext cx="438912" cy="438912"/>
-          </a:xfrm>
-          <a:prstGeom prst="rect">
-            <a:avLst/>
-          </a:prstGeom>
-        </p:spPr>
-      </p:pic>
-      <p:sp>
-        <p:nvSpPr>
-          <p:cNvPr id="31" name="mdpr:1-2-e3669a:item-1:block-15-chunk-1"/>
+          <p:cNvPr id="11" name="mdpr:1-2-e3669a:left:block-15-chunk-1-block-15-chunk-1"/>
           <p:cNvSpPr txBox="1"/>
           <p:nvPr/>
         </p:nvSpPr>
         <p:spPr>
           <a:xfrm>
-            <a:off x="1689354" y="1627632"/>
-            <a:ext cx="3961638" cy="1591056"/>
+            <a:off x="896112" y="1499616"/>
+            <a:ext cx="4791456" cy="4398264"/>
           </a:xfrm>
           <a:prstGeom prst="rect">
             <a:avLst/>
@@ -6677,7 +6018,7 @@
           <a:ln/>
         </p:spPr>
         <p:txBody>
-          <a:bodyPr wrap="square" lIns="0" tIns="25400" rIns="25400" bIns="0" rtlCol="0" anchor="ctr"/>
+          <a:bodyPr wrap="square" lIns="0" tIns="25400" rIns="25400" bIns="0" rtlCol="0" anchor="t"/>
           <a:lstStyle/>
           <a:p>
             <a:pPr algn="l" indent="0" marL="0">
@@ -6687,7 +6028,7 @@
               <a:buNone/>
             </a:pPr>
             <a:r>
-              <a:rPr lang="en-US" sz="2200" b="1" dirty="0">
+              <a:rPr lang="en-US" sz="1800" b="1" dirty="0">
                 <a:solidFill>
                   <a:srgbClr val="4F6F8F"/>
                 </a:solidFill>
@@ -6695,7 +6036,7 @@
                 <a:ea typeface="Pretendard" pitchFamily="34" charset="-122"/>
                 <a:cs typeface="Pretendard" pitchFamily="34" charset="-120"/>
               </a:rPr>
-              <a:t>Surfaces</a:t>
+              <a:t>- Surfaces</a:t>
             </a:r>
             <a:pPr algn="l" indent="0" marL="0">
               <a:lnSpc>
@@ -6704,7 +6045,7 @@
               <a:buNone/>
             </a:pPr>
             <a:r>
-              <a:rPr lang="en-US" sz="2200" dirty="0">
+              <a:rPr lang="en-US" sz="1800" dirty="0">
                 <a:solidFill>
                   <a:srgbClr val="111111"/>
                 </a:solidFill>
@@ -6714,77 +6055,60 @@
               </a:rPr>
               <a:t>  rounded-card, two-corner-card, flag-drop, ticket-panel, notched-panel, circle-vine.</a:t>
             </a:r>
-            <a:endParaRPr lang="en-US" sz="2200" dirty="0"/>
+            <a:endParaRPr lang="en-US" sz="1800" dirty="0"/>
+          </a:p>
+          <a:p>
+            <a:pPr algn="l" indent="0" marL="0">
+              <a:lnSpc>
+                <a:spcPct val="120000"/>
+              </a:lnSpc>
+              <a:buNone/>
+            </a:pPr>
+            <a:r>
+              <a:rPr lang="en-US" sz="1800" b="1" dirty="0">
+                <a:solidFill>
+                  <a:srgbClr val="4F6F8F"/>
+                </a:solidFill>
+                <a:latin typeface="Pretendard" pitchFamily="34" charset="0"/>
+                <a:ea typeface="Pretendard" pitchFamily="34" charset="-122"/>
+                <a:cs typeface="Pretendard" pitchFamily="34" charset="-120"/>
+              </a:rPr>
+              <a:t>- Layouts</a:t>
+            </a:r>
+            <a:endParaRPr lang="en-US" sz="1800" dirty="0"/>
+          </a:p>
+          <a:p>
+            <a:pPr algn="l" indent="0" marL="0">
+              <a:lnSpc>
+                <a:spcPct val="120000"/>
+              </a:lnSpc>
+              <a:buNone/>
+            </a:pPr>
+            <a:r>
+              <a:rPr lang="en-US" sz="1800" dirty="0">
+                <a:solidFill>
+                  <a:srgbClr val="111111"/>
+                </a:solidFill>
+                <a:latin typeface="Pretendard" pitchFamily="34" charset="0"/>
+                <a:ea typeface="Pretendard" pitchFamily="34" charset="-122"/>
+                <a:cs typeface="Pretendard" pitchFamily="34" charset="-120"/>
+              </a:rPr>
+              <a:t>  toc-strips, two-column-compare, three-card-grid, six-tile-grid, timeline-rail, pipeline-chain.</a:t>
+            </a:r>
+            <a:endParaRPr lang="en-US" sz="1800" dirty="0"/>
           </a:p>
         </p:txBody>
       </p:sp>
       <p:sp>
         <p:nvSpPr>
-          <p:cNvPr id="32" name="Shape 25"/>
-          <p:cNvSpPr/>
-          <p:nvPr/>
-        </p:nvSpPr>
-        <p:spPr>
-          <a:xfrm>
-            <a:off x="6462522" y="2130552"/>
-            <a:ext cx="585216" cy="585216"/>
-          </a:xfrm>
-          <a:prstGeom prst="roundRect">
-            <a:avLst>
-              <a:gd name="adj" fmla="val 6250"/>
-            </a:avLst>
-          </a:prstGeom>
-          <a:solidFill>
-            <a:srgbClr val="E9EEF5"/>
-          </a:solidFill>
-          <a:ln w="12700">
-            <a:solidFill>
-              <a:srgbClr val="D5DCE7"/>
-            </a:solidFill>
-            <a:prstDash val="solid"/>
-          </a:ln>
-        </p:spPr>
-      </p:sp>
-      <p:pic>
-        <p:nvPicPr>
-          <p:cNvPr id="33" name="Image 5" descr="table icon from tabler-icons (MIT)">    </p:cNvPr>
-          <p:cNvPicPr>
-            <a:picLocks noChangeAspect="1"/>
-          </p:cNvPicPr>
-          <p:nvPr/>
-        </p:nvPicPr>
-        <p:blipFill>
-          <a:blip r:embed="rId11">
-            <a:extLst>
-              <a:ext uri="{96DAC541-7B7A-43D3-8B79-37D633B846F1}">
-                <asvg:svgBlip xmlns:asvg="http://schemas.microsoft.com/office/drawing/2016/SVG/main" r:embed="rId12"/>
-              </a:ext>
-            </a:extLst>
-          </a:blip>
-          <a:stretch>
-            <a:fillRect/>
-          </a:stretch>
-        </p:blipFill>
-        <p:spPr>
-          <a:xfrm>
-            <a:off x="6535674" y="2203704"/>
-            <a:ext cx="438912" cy="438912"/>
-          </a:xfrm>
-          <a:prstGeom prst="rect">
-            <a:avLst/>
-          </a:prstGeom>
-        </p:spPr>
-      </p:pic>
-      <p:sp>
-        <p:nvSpPr>
-          <p:cNvPr id="34" name="mdpr:1-2-e3669a:item-2:block-15-chunk-1"/>
+          <p:cNvPr id="12" name="mdpr:1-2-e3669a:right:block-15-chunk-1-block-15-chunk-1"/>
           <p:cNvSpPr txBox="1"/>
           <p:nvPr/>
         </p:nvSpPr>
         <p:spPr>
           <a:xfrm>
-            <a:off x="7175754" y="1627632"/>
-            <a:ext cx="3961638" cy="1591056"/>
+            <a:off x="6473952" y="1499616"/>
+            <a:ext cx="4791456" cy="4398264"/>
           </a:xfrm>
           <a:prstGeom prst="rect">
             <a:avLst/>
@@ -6793,7 +6117,7 @@
           <a:ln/>
         </p:spPr>
         <p:txBody>
-          <a:bodyPr wrap="square" lIns="0" tIns="25400" rIns="25400" bIns="0" rtlCol="0" anchor="ctr"/>
+          <a:bodyPr wrap="square" lIns="0" tIns="25400" rIns="25400" bIns="0" rtlCol="0" anchor="t"/>
           <a:lstStyle/>
           <a:p>
             <a:pPr algn="l" indent="0" marL="0">
@@ -6803,7 +6127,7 @@
               <a:buNone/>
             </a:pPr>
             <a:r>
-              <a:rPr lang="en-US" sz="2200" b="1" dirty="0">
+              <a:rPr lang="en-US" sz="1800" b="1" dirty="0">
                 <a:solidFill>
                   <a:srgbClr val="4F6F8F"/>
                 </a:solidFill>
@@ -6811,7 +6135,7 @@
                 <a:ea typeface="Pretendard" pitchFamily="34" charset="-122"/>
                 <a:cs typeface="Pretendard" pitchFamily="34" charset="-120"/>
               </a:rPr>
-              <a:t>Layouts</a:t>
+              <a:t>- Evidence</a:t>
             </a:r>
             <a:pPr algn="l" indent="0" marL="0">
               <a:lnSpc>
@@ -6820,123 +6144,7 @@
               <a:buNone/>
             </a:pPr>
             <a:r>
-              <a:rPr lang="en-US" sz="2200" dirty="0">
-                <a:solidFill>
-                  <a:srgbClr val="111111"/>
-                </a:solidFill>
-                <a:latin typeface="Pretendard" pitchFamily="34" charset="0"/>
-                <a:ea typeface="Pretendard" pitchFamily="34" charset="-122"/>
-                <a:cs typeface="Pretendard" pitchFamily="34" charset="-120"/>
-              </a:rPr>
-              <a:t>  toc-strips, two-column-compare, three-card-grid, six-tile-grid, timeline-rail, pipeline-chain.</a:t>
-            </a:r>
-            <a:endParaRPr lang="en-US" sz="2200" dirty="0"/>
-          </a:p>
-        </p:txBody>
-      </p:sp>
-      <p:sp>
-        <p:nvSpPr>
-          <p:cNvPr id="35" name="Shape 27"/>
-          <p:cNvSpPr/>
-          <p:nvPr/>
-        </p:nvSpPr>
-        <p:spPr>
-          <a:xfrm>
-            <a:off x="976122" y="4416552"/>
-            <a:ext cx="585216" cy="585216"/>
-          </a:xfrm>
-          <a:prstGeom prst="roundRect">
-            <a:avLst>
-              <a:gd name="adj" fmla="val 6250"/>
-            </a:avLst>
-          </a:prstGeom>
-          <a:solidFill>
-            <a:srgbClr val="E9EEF5"/>
-          </a:solidFill>
-          <a:ln w="12700">
-            <a:solidFill>
-              <a:srgbClr val="D5DCE7"/>
-            </a:solidFill>
-            <a:prstDash val="solid"/>
-          </a:ln>
-        </p:spPr>
-      </p:sp>
-      <p:pic>
-        <p:nvPicPr>
-          <p:cNvPr id="36" name="Image 6" descr="chart icon from tabler-icons (MIT)">    </p:cNvPr>
-          <p:cNvPicPr>
-            <a:picLocks noChangeAspect="1"/>
-          </p:cNvPicPr>
-          <p:nvPr/>
-        </p:nvPicPr>
-        <p:blipFill>
-          <a:blip r:embed="rId13">
-            <a:extLst>
-              <a:ext uri="{96DAC541-7B7A-43D3-8B79-37D633B846F1}">
-                <asvg:svgBlip xmlns:asvg="http://schemas.microsoft.com/office/drawing/2016/SVG/main" r:embed="rId14"/>
-              </a:ext>
-            </a:extLst>
-          </a:blip>
-          <a:stretch>
-            <a:fillRect/>
-          </a:stretch>
-        </p:blipFill>
-        <p:spPr>
-          <a:xfrm>
-            <a:off x="1049274" y="4489704"/>
-            <a:ext cx="438912" cy="438912"/>
-          </a:xfrm>
-          <a:prstGeom prst="rect">
-            <a:avLst/>
-          </a:prstGeom>
-        </p:spPr>
-      </p:pic>
-      <p:sp>
-        <p:nvSpPr>
-          <p:cNvPr id="37" name="mdpr:1-2-e3669a:item-3:block-15-chunk-1"/>
-          <p:cNvSpPr txBox="1"/>
-          <p:nvPr/>
-        </p:nvSpPr>
-        <p:spPr>
-          <a:xfrm>
-            <a:off x="1689354" y="3913632"/>
-            <a:ext cx="3961638" cy="1591056"/>
-          </a:xfrm>
-          <a:prstGeom prst="rect">
-            <a:avLst/>
-          </a:prstGeom>
-          <a:noFill/>
-          <a:ln/>
-        </p:spPr>
-        <p:txBody>
-          <a:bodyPr wrap="square" lIns="0" tIns="25400" rIns="25400" bIns="0" rtlCol="0" anchor="ctr"/>
-          <a:lstStyle/>
-          <a:p>
-            <a:pPr algn="l" indent="0" marL="0">
-              <a:lnSpc>
-                <a:spcPct val="120000"/>
-              </a:lnSpc>
-              <a:buNone/>
-            </a:pPr>
-            <a:r>
-              <a:rPr lang="en-US" sz="2200" b="1" dirty="0">
-                <a:solidFill>
-                  <a:srgbClr val="4F6F8F"/>
-                </a:solidFill>
-                <a:latin typeface="Pretendard" pitchFamily="34" charset="0"/>
-                <a:ea typeface="Pretendard" pitchFamily="34" charset="-122"/>
-                <a:cs typeface="Pretendard" pitchFamily="34" charset="-120"/>
-              </a:rPr>
-              <a:t>Evidence</a:t>
-            </a:r>
-            <a:pPr algn="l" indent="0" marL="0">
-              <a:lnSpc>
-                <a:spcPct val="120000"/>
-              </a:lnSpc>
-              <a:buNone/>
-            </a:pPr>
-            <a:r>
-              <a:rPr lang="en-US" sz="2200" dirty="0">
+              <a:rPr lang="en-US" sz="1800" dirty="0">
                 <a:solidFill>
                   <a:srgbClr val="111111"/>
                 </a:solidFill>
@@ -6946,87 +6154,8 @@
               </a:rPr>
               <a:t>  chart-table-pair, metric-proof, arc-ring-proof, gauge-proof, connected-strip, mixed-object-pack.</a:t>
             </a:r>
-            <a:endParaRPr lang="en-US" sz="2200" dirty="0"/>
+            <a:endParaRPr lang="en-US" sz="1800" dirty="0"/>
           </a:p>
-        </p:txBody>
-      </p:sp>
-      <p:sp>
-        <p:nvSpPr>
-          <p:cNvPr id="38" name="Shape 29"/>
-          <p:cNvSpPr/>
-          <p:nvPr/>
-        </p:nvSpPr>
-        <p:spPr>
-          <a:xfrm>
-            <a:off x="6462522" y="4416552"/>
-            <a:ext cx="585216" cy="585216"/>
-          </a:xfrm>
-          <a:prstGeom prst="roundRect">
-            <a:avLst>
-              <a:gd name="adj" fmla="val 6250"/>
-            </a:avLst>
-          </a:prstGeom>
-          <a:solidFill>
-            <a:srgbClr val="E9EEF5"/>
-          </a:solidFill>
-          <a:ln w="12700">
-            <a:solidFill>
-              <a:srgbClr val="D5DCE7"/>
-            </a:solidFill>
-            <a:prstDash val="solid"/>
-          </a:ln>
-        </p:spPr>
-      </p:sp>
-      <p:pic>
-        <p:nvPicPr>
-          <p:cNvPr id="39" name="Image 7" descr="flow icon from tabler-icons (MIT)">    </p:cNvPr>
-          <p:cNvPicPr>
-            <a:picLocks noChangeAspect="1"/>
-          </p:cNvPicPr>
-          <p:nvPr/>
-        </p:nvPicPr>
-        <p:blipFill>
-          <a:blip r:embed="rId15">
-            <a:extLst>
-              <a:ext uri="{96DAC541-7B7A-43D3-8B79-37D633B846F1}">
-                <asvg:svgBlip xmlns:asvg="http://schemas.microsoft.com/office/drawing/2016/SVG/main" r:embed="rId16"/>
-              </a:ext>
-            </a:extLst>
-          </a:blip>
-          <a:stretch>
-            <a:fillRect/>
-          </a:stretch>
-        </p:blipFill>
-        <p:spPr>
-          <a:xfrm>
-            <a:off x="6535674" y="4489704"/>
-            <a:ext cx="438912" cy="438912"/>
-          </a:xfrm>
-          <a:prstGeom prst="rect">
-            <a:avLst/>
-          </a:prstGeom>
-        </p:spPr>
-      </p:pic>
-      <p:sp>
-        <p:nvSpPr>
-          <p:cNvPr id="40" name="mdpr:1-2-e3669a:item-4:block-15-chunk-1"/>
-          <p:cNvSpPr txBox="1"/>
-          <p:nvPr/>
-        </p:nvSpPr>
-        <p:spPr>
-          <a:xfrm>
-            <a:off x="7175754" y="3913632"/>
-            <a:ext cx="3961638" cy="1591056"/>
-          </a:xfrm>
-          <a:prstGeom prst="rect">
-            <a:avLst/>
-          </a:prstGeom>
-          <a:noFill/>
-          <a:ln/>
-        </p:spPr>
-        <p:txBody>
-          <a:bodyPr wrap="square" lIns="0" tIns="25400" rIns="25400" bIns="0" rtlCol="0" anchor="ctr"/>
-          <a:lstStyle/>
           <a:p>
             <a:pPr algn="l" indent="0" marL="0">
               <a:lnSpc>
@@ -7035,7 +6164,7 @@
               <a:buNone/>
             </a:pPr>
             <a:r>
-              <a:rPr lang="en-US" sz="2200" b="1" dirty="0">
+              <a:rPr lang="en-US" sz="1800" b="1" dirty="0">
                 <a:solidFill>
                   <a:srgbClr val="4F6F8F"/>
                 </a:solidFill>
@@ -7043,8 +6172,11 @@
                 <a:ea typeface="Pretendard" pitchFamily="34" charset="-122"/>
                 <a:cs typeface="Pretendard" pitchFamily="34" charset="-120"/>
               </a:rPr>
-              <a:t>Connectors</a:t>
+              <a:t>- Connectors</a:t>
             </a:r>
+            <a:endParaRPr lang="en-US" sz="1800" dirty="0"/>
+          </a:p>
+          <a:p>
             <a:pPr algn="l" indent="0" marL="0">
               <a:lnSpc>
                 <a:spcPct val="120000"/>
@@ -7052,7 +6184,7 @@
               <a:buNone/>
             </a:pPr>
             <a:r>
-              <a:rPr lang="en-US" sz="2200" dirty="0">
+              <a:rPr lang="en-US" sz="1800" dirty="0">
                 <a:solidFill>
                   <a:srgbClr val="111111"/>
                 </a:solidFill>
@@ -7062,7 +6194,7 @@
               </a:rPr>
               <a:t>  straight-arrow, elbow-arrow, boundary-attach, overlap-joint, parallel-flow, contrast-flow.</a:t>
             </a:r>
-            <a:endParaRPr lang="en-US" sz="2200" dirty="0"/>
+            <a:endParaRPr lang="en-US" sz="1800" dirty="0"/>
           </a:p>
         </p:txBody>
       </p:sp>
@@ -13682,71 +12814,14 @@
       </p:sp>
       <p:sp>
         <p:nvSpPr>
-          <p:cNvPr id="25" name="Shape 20"/>
-          <p:cNvSpPr/>
-          <p:nvPr/>
-        </p:nvSpPr>
-        <p:spPr>
-          <a:xfrm>
-            <a:off x="1097280" y="2140428"/>
-            <a:ext cx="474025" cy="474025"/>
-          </a:xfrm>
-          <a:prstGeom prst="roundRect">
-            <a:avLst>
-              <a:gd name="adj" fmla="val 7716"/>
-            </a:avLst>
-          </a:prstGeom>
-          <a:solidFill>
-            <a:srgbClr val="E9EEF5"/>
-          </a:solidFill>
-          <a:ln w="12700">
-            <a:solidFill>
-              <a:srgbClr val="D5DCE7"/>
-            </a:solidFill>
-            <a:prstDash val="solid"/>
-          </a:ln>
-        </p:spPr>
-      </p:sp>
-      <p:pic>
-        <p:nvPicPr>
-          <p:cNvPr id="26" name="Image 3" descr="article icon from tabler-icons (MIT)">    </p:cNvPr>
-          <p:cNvPicPr>
-            <a:picLocks noChangeAspect="1"/>
-          </p:cNvPicPr>
-          <p:nvPr/>
-        </p:nvPicPr>
-        <p:blipFill>
-          <a:blip r:embed="rId7">
-            <a:extLst>
-              <a:ext uri="{96DAC541-7B7A-43D3-8B79-37D633B846F1}">
-                <asvg:svgBlip xmlns:asvg="http://schemas.microsoft.com/office/drawing/2016/SVG/main" r:embed="rId8"/>
-              </a:ext>
-            </a:extLst>
-          </a:blip>
-          <a:stretch>
-            <a:fillRect/>
-          </a:stretch>
-        </p:blipFill>
-        <p:spPr>
-          <a:xfrm>
-            <a:off x="1170432" y="2213580"/>
-            <a:ext cx="327721" cy="327721"/>
-          </a:xfrm>
-          <a:prstGeom prst="rect">
-            <a:avLst/>
-          </a:prstGeom>
-        </p:spPr>
-      </p:pic>
-      <p:sp>
-        <p:nvSpPr>
-          <p:cNvPr id="27" name="mdpr:1-2-ea42c8:item-1:block-27-chunk-1"/>
+          <p:cNvPr id="25" name="mdpr:1-2-ea42c8:item-1:block-27-chunk-1"/>
           <p:cNvSpPr txBox="1"/>
           <p:nvPr/>
         </p:nvSpPr>
         <p:spPr>
           <a:xfrm>
-            <a:off x="1699321" y="1987296"/>
-            <a:ext cx="9255191" cy="780288"/>
+            <a:off x="1133856" y="1957548"/>
+            <a:ext cx="9820656" cy="839785"/>
           </a:xfrm>
           <a:prstGeom prst="rect">
             <a:avLst/>
@@ -13798,71 +12873,14 @@
       </p:sp>
       <p:sp>
         <p:nvSpPr>
-          <p:cNvPr id="28" name="Shape 22"/>
-          <p:cNvSpPr/>
-          <p:nvPr/>
-        </p:nvSpPr>
-        <p:spPr>
-          <a:xfrm>
-            <a:off x="1097280" y="3466308"/>
-            <a:ext cx="474025" cy="474025"/>
-          </a:xfrm>
-          <a:prstGeom prst="roundRect">
-            <a:avLst>
-              <a:gd name="adj" fmla="val 7716"/>
-            </a:avLst>
-          </a:prstGeom>
-          <a:solidFill>
-            <a:srgbClr val="E9EEF5"/>
-          </a:solidFill>
-          <a:ln w="12700">
-            <a:solidFill>
-              <a:srgbClr val="D5DCE7"/>
-            </a:solidFill>
-            <a:prstDash val="solid"/>
-          </a:ln>
-        </p:spPr>
-      </p:sp>
-      <p:pic>
-        <p:nvPicPr>
-          <p:cNvPr id="29" name="Image 4" descr="article icon from tabler-icons (MIT)">    </p:cNvPr>
-          <p:cNvPicPr>
-            <a:picLocks noChangeAspect="1"/>
-          </p:cNvPicPr>
-          <p:nvPr/>
-        </p:nvPicPr>
-        <p:blipFill>
-          <a:blip r:embed="rId9">
-            <a:extLst>
-              <a:ext uri="{96DAC541-7B7A-43D3-8B79-37D633B846F1}">
-                <asvg:svgBlip xmlns:asvg="http://schemas.microsoft.com/office/drawing/2016/SVG/main" r:embed="rId10"/>
-              </a:ext>
-            </a:extLst>
-          </a:blip>
-          <a:stretch>
-            <a:fillRect/>
-          </a:stretch>
-        </p:blipFill>
-        <p:spPr>
-          <a:xfrm>
-            <a:off x="1170432" y="3539460"/>
-            <a:ext cx="327721" cy="327721"/>
-          </a:xfrm>
-          <a:prstGeom prst="rect">
-            <a:avLst/>
-          </a:prstGeom>
-        </p:spPr>
-      </p:pic>
-      <p:sp>
-        <p:nvSpPr>
-          <p:cNvPr id="30" name="mdpr:1-2-ea42c8:item-2:block-27-chunk-1"/>
+          <p:cNvPr id="26" name="mdpr:1-2-ea42c8:item-2:block-27-chunk-1"/>
           <p:cNvSpPr txBox="1"/>
           <p:nvPr/>
         </p:nvSpPr>
         <p:spPr>
           <a:xfrm>
-            <a:off x="1699321" y="3313176"/>
-            <a:ext cx="9255191" cy="780288"/>
+            <a:off x="1133856" y="3283428"/>
+            <a:ext cx="9820656" cy="839785"/>
           </a:xfrm>
           <a:prstGeom prst="rect">
             <a:avLst/>
@@ -13914,71 +12932,14 @@
       </p:sp>
       <p:sp>
         <p:nvSpPr>
-          <p:cNvPr id="31" name="Shape 24"/>
-          <p:cNvSpPr/>
-          <p:nvPr/>
-        </p:nvSpPr>
-        <p:spPr>
-          <a:xfrm>
-            <a:off x="1097280" y="4783044"/>
-            <a:ext cx="474025" cy="474025"/>
-          </a:xfrm>
-          <a:prstGeom prst="roundRect">
-            <a:avLst>
-              <a:gd name="adj" fmla="val 7716"/>
-            </a:avLst>
-          </a:prstGeom>
-          <a:solidFill>
-            <a:srgbClr val="E9EEF5"/>
-          </a:solidFill>
-          <a:ln w="12700">
-            <a:solidFill>
-              <a:srgbClr val="D5DCE7"/>
-            </a:solidFill>
-            <a:prstDash val="solid"/>
-          </a:ln>
-        </p:spPr>
-      </p:sp>
-      <p:pic>
-        <p:nvPicPr>
-          <p:cNvPr id="32" name="Image 5" descr="article icon from tabler-icons (MIT)">    </p:cNvPr>
-          <p:cNvPicPr>
-            <a:picLocks noChangeAspect="1"/>
-          </p:cNvPicPr>
-          <p:nvPr/>
-        </p:nvPicPr>
-        <p:blipFill>
-          <a:blip r:embed="rId11">
-            <a:extLst>
-              <a:ext uri="{96DAC541-7B7A-43D3-8B79-37D633B846F1}">
-                <asvg:svgBlip xmlns:asvg="http://schemas.microsoft.com/office/drawing/2016/SVG/main" r:embed="rId12"/>
-              </a:ext>
-            </a:extLst>
-          </a:blip>
-          <a:stretch>
-            <a:fillRect/>
-          </a:stretch>
-        </p:blipFill>
-        <p:spPr>
-          <a:xfrm>
-            <a:off x="1170432" y="4856196"/>
-            <a:ext cx="327721" cy="327721"/>
-          </a:xfrm>
-          <a:prstGeom prst="rect">
-            <a:avLst/>
-          </a:prstGeom>
-        </p:spPr>
-      </p:pic>
-      <p:sp>
-        <p:nvSpPr>
-          <p:cNvPr id="33" name="mdpr:1-2-ea42c8:item-3:block-27-chunk-1"/>
+          <p:cNvPr id="27" name="mdpr:1-2-ea42c8:item-3:block-27-chunk-1"/>
           <p:cNvSpPr txBox="1"/>
           <p:nvPr/>
         </p:nvSpPr>
         <p:spPr>
           <a:xfrm>
-            <a:off x="1699321" y="4629912"/>
-            <a:ext cx="9255191" cy="780288"/>
+            <a:off x="1133856" y="4600164"/>
+            <a:ext cx="9820656" cy="839785"/>
           </a:xfrm>
           <a:prstGeom prst="rect">
             <a:avLst/>
@@ -16684,71 +15645,14 @@
       </p:sp>
       <p:sp>
         <p:nvSpPr>
-          <p:cNvPr id="29" name="Shape 23"/>
-          <p:cNvSpPr/>
-          <p:nvPr/>
-        </p:nvSpPr>
-        <p:spPr>
-          <a:xfrm>
-            <a:off x="976122" y="2130552"/>
-            <a:ext cx="585216" cy="585216"/>
-          </a:xfrm>
-          <a:prstGeom prst="roundRect">
-            <a:avLst>
-              <a:gd name="adj" fmla="val 6250"/>
-            </a:avLst>
-          </a:prstGeom>
-          <a:solidFill>
-            <a:srgbClr val="E9EEF5"/>
-          </a:solidFill>
-          <a:ln w="12700">
-            <a:solidFill>
-              <a:srgbClr val="D5DCE7"/>
-            </a:solidFill>
-            <a:prstDash val="solid"/>
-          </a:ln>
-        </p:spPr>
-      </p:sp>
-      <p:pic>
-        <p:nvPicPr>
-          <p:cNvPr id="30" name="Image 4" descr="article icon from tabler-icons (MIT)">    </p:cNvPr>
-          <p:cNvPicPr>
-            <a:picLocks noChangeAspect="1"/>
-          </p:cNvPicPr>
-          <p:nvPr/>
-        </p:nvPicPr>
-        <p:blipFill>
-          <a:blip r:embed="rId9">
-            <a:extLst>
-              <a:ext uri="{96DAC541-7B7A-43D3-8B79-37D633B846F1}">
-                <asvg:svgBlip xmlns:asvg="http://schemas.microsoft.com/office/drawing/2016/SVG/main" r:embed="rId10"/>
-              </a:ext>
-            </a:extLst>
-          </a:blip>
-          <a:stretch>
-            <a:fillRect/>
-          </a:stretch>
-        </p:blipFill>
-        <p:spPr>
-          <a:xfrm>
-            <a:off x="1049274" y="2203704"/>
-            <a:ext cx="438912" cy="438912"/>
-          </a:xfrm>
-          <a:prstGeom prst="rect">
-            <a:avLst/>
-          </a:prstGeom>
-        </p:spPr>
-      </p:pic>
-      <p:sp>
-        <p:nvSpPr>
-          <p:cNvPr id="31" name="mdpr:icon-and-text-aside-8429fc:item-1:block-29"/>
+          <p:cNvPr id="29" name="mdpr:icon-and-text-aside-8429fc:item-1:block-29"/>
           <p:cNvSpPr txBox="1"/>
           <p:nvPr/>
         </p:nvSpPr>
         <p:spPr>
           <a:xfrm>
-            <a:off x="1689354" y="2033016"/>
-            <a:ext cx="3961638" cy="780288"/>
+            <a:off x="1042416" y="1627632"/>
+            <a:ext cx="4608576" cy="1591056"/>
           </a:xfrm>
           <a:prstGeom prst="rect">
             <a:avLst/>
@@ -16800,71 +15704,14 @@
       </p:sp>
       <p:sp>
         <p:nvSpPr>
-          <p:cNvPr id="32" name="Shape 25"/>
-          <p:cNvSpPr/>
-          <p:nvPr/>
-        </p:nvSpPr>
-        <p:spPr>
-          <a:xfrm>
-            <a:off x="6462522" y="2130552"/>
-            <a:ext cx="585216" cy="585216"/>
-          </a:xfrm>
-          <a:prstGeom prst="roundRect">
-            <a:avLst>
-              <a:gd name="adj" fmla="val 6250"/>
-            </a:avLst>
-          </a:prstGeom>
-          <a:solidFill>
-            <a:srgbClr val="E9EEF5"/>
-          </a:solidFill>
-          <a:ln w="12700">
-            <a:solidFill>
-              <a:srgbClr val="D5DCE7"/>
-            </a:solidFill>
-            <a:prstDash val="solid"/>
-          </a:ln>
-        </p:spPr>
-      </p:sp>
-      <p:pic>
-        <p:nvPicPr>
-          <p:cNvPr id="33" name="Image 5" descr="article icon from tabler-icons (MIT)">    </p:cNvPr>
-          <p:cNvPicPr>
-            <a:picLocks noChangeAspect="1"/>
-          </p:cNvPicPr>
-          <p:nvPr/>
-        </p:nvPicPr>
-        <p:blipFill>
-          <a:blip r:embed="rId11">
-            <a:extLst>
-              <a:ext uri="{96DAC541-7B7A-43D3-8B79-37D633B846F1}">
-                <asvg:svgBlip xmlns:asvg="http://schemas.microsoft.com/office/drawing/2016/SVG/main" r:embed="rId12"/>
-              </a:ext>
-            </a:extLst>
-          </a:blip>
-          <a:stretch>
-            <a:fillRect/>
-          </a:stretch>
-        </p:blipFill>
-        <p:spPr>
-          <a:xfrm>
-            <a:off x="6535674" y="2203704"/>
-            <a:ext cx="438912" cy="438912"/>
-          </a:xfrm>
-          <a:prstGeom prst="rect">
-            <a:avLst/>
-          </a:prstGeom>
-        </p:spPr>
-      </p:pic>
-      <p:sp>
-        <p:nvSpPr>
-          <p:cNvPr id="34" name="mdpr:icon-and-text-aside-8429fc:item-2:block-29"/>
+          <p:cNvPr id="30" name="mdpr:icon-and-text-aside-8429fc:item-2:block-29"/>
           <p:cNvSpPr txBox="1"/>
           <p:nvPr/>
         </p:nvSpPr>
         <p:spPr>
           <a:xfrm>
-            <a:off x="7175754" y="1865376"/>
-            <a:ext cx="3961638" cy="1115568"/>
+            <a:off x="6528816" y="1627632"/>
+            <a:ext cx="4608576" cy="1591056"/>
           </a:xfrm>
           <a:prstGeom prst="rect">
             <a:avLst/>
@@ -16916,71 +15763,14 @@
       </p:sp>
       <p:sp>
         <p:nvSpPr>
-          <p:cNvPr id="35" name="Shape 27"/>
-          <p:cNvSpPr/>
-          <p:nvPr/>
-        </p:nvSpPr>
-        <p:spPr>
-          <a:xfrm>
-            <a:off x="976122" y="4416552"/>
-            <a:ext cx="585216" cy="585216"/>
-          </a:xfrm>
-          <a:prstGeom prst="roundRect">
-            <a:avLst>
-              <a:gd name="adj" fmla="val 6250"/>
-            </a:avLst>
-          </a:prstGeom>
-          <a:solidFill>
-            <a:srgbClr val="E9EEF5"/>
-          </a:solidFill>
-          <a:ln w="12700">
-            <a:solidFill>
-              <a:srgbClr val="D5DCE7"/>
-            </a:solidFill>
-            <a:prstDash val="solid"/>
-          </a:ln>
-        </p:spPr>
-      </p:sp>
-      <p:pic>
-        <p:nvPicPr>
-          <p:cNvPr id="36" name="Image 6" descr="article icon from tabler-icons (MIT)">    </p:cNvPr>
-          <p:cNvPicPr>
-            <a:picLocks noChangeAspect="1"/>
-          </p:cNvPicPr>
-          <p:nvPr/>
-        </p:nvPicPr>
-        <p:blipFill>
-          <a:blip r:embed="rId13">
-            <a:extLst>
-              <a:ext uri="{96DAC541-7B7A-43D3-8B79-37D633B846F1}">
-                <asvg:svgBlip xmlns:asvg="http://schemas.microsoft.com/office/drawing/2016/SVG/main" r:embed="rId14"/>
-              </a:ext>
-            </a:extLst>
-          </a:blip>
-          <a:stretch>
-            <a:fillRect/>
-          </a:stretch>
-        </p:blipFill>
-        <p:spPr>
-          <a:xfrm>
-            <a:off x="1049274" y="4489704"/>
-            <a:ext cx="438912" cy="438912"/>
-          </a:xfrm>
-          <a:prstGeom prst="rect">
-            <a:avLst/>
-          </a:prstGeom>
-        </p:spPr>
-      </p:pic>
-      <p:sp>
-        <p:nvSpPr>
-          <p:cNvPr id="37" name="mdpr:icon-and-text-aside-8429fc:item-3:block-29"/>
+          <p:cNvPr id="31" name="mdpr:icon-and-text-aside-8429fc:item-3:block-29"/>
           <p:cNvSpPr txBox="1"/>
           <p:nvPr/>
         </p:nvSpPr>
         <p:spPr>
           <a:xfrm>
-            <a:off x="1689354" y="4151376"/>
-            <a:ext cx="3961638" cy="1115568"/>
+            <a:off x="1042416" y="3913632"/>
+            <a:ext cx="4608576" cy="1591056"/>
           </a:xfrm>
           <a:prstGeom prst="rect">
             <a:avLst/>
@@ -17032,71 +15822,14 @@
       </p:sp>
       <p:sp>
         <p:nvSpPr>
-          <p:cNvPr id="38" name="Shape 29"/>
-          <p:cNvSpPr/>
-          <p:nvPr/>
-        </p:nvSpPr>
-        <p:spPr>
-          <a:xfrm>
-            <a:off x="6462522" y="4416552"/>
-            <a:ext cx="585216" cy="585216"/>
-          </a:xfrm>
-          <a:prstGeom prst="roundRect">
-            <a:avLst>
-              <a:gd name="adj" fmla="val 6250"/>
-            </a:avLst>
-          </a:prstGeom>
-          <a:solidFill>
-            <a:srgbClr val="E9EEF5"/>
-          </a:solidFill>
-          <a:ln w="12700">
-            <a:solidFill>
-              <a:srgbClr val="D5DCE7"/>
-            </a:solidFill>
-            <a:prstDash val="solid"/>
-          </a:ln>
-        </p:spPr>
-      </p:sp>
-      <p:pic>
-        <p:nvPicPr>
-          <p:cNvPr id="39" name="Image 7" descr="table icon from tabler-icons (MIT)">    </p:cNvPr>
-          <p:cNvPicPr>
-            <a:picLocks noChangeAspect="1"/>
-          </p:cNvPicPr>
-          <p:nvPr/>
-        </p:nvPicPr>
-        <p:blipFill>
-          <a:blip r:embed="rId15">
-            <a:extLst>
-              <a:ext uri="{96DAC541-7B7A-43D3-8B79-37D633B846F1}">
-                <asvg:svgBlip xmlns:asvg="http://schemas.microsoft.com/office/drawing/2016/SVG/main" r:embed="rId16"/>
-              </a:ext>
-            </a:extLst>
-          </a:blip>
-          <a:stretch>
-            <a:fillRect/>
-          </a:stretch>
-        </p:blipFill>
-        <p:spPr>
-          <a:xfrm>
-            <a:off x="6535674" y="4489704"/>
-            <a:ext cx="438912" cy="438912"/>
-          </a:xfrm>
-          <a:prstGeom prst="rect">
-            <a:avLst/>
-          </a:prstGeom>
-        </p:spPr>
-      </p:pic>
-      <p:sp>
-        <p:nvSpPr>
-          <p:cNvPr id="40" name="mdpr:icon-and-text-aside-8429fc:item-4:block-29"/>
+          <p:cNvPr id="32" name="mdpr:icon-and-text-aside-8429fc:item-4:block-29"/>
           <p:cNvSpPr txBox="1"/>
           <p:nvPr/>
         </p:nvSpPr>
         <p:spPr>
           <a:xfrm>
-            <a:off x="7175754" y="4151376"/>
-            <a:ext cx="3961638" cy="1115568"/>
+            <a:off x="6528816" y="3913632"/>
+            <a:ext cx="4608576" cy="1591056"/>
           </a:xfrm>
           <a:prstGeom prst="rect">
             <a:avLst/>
@@ -18063,71 +16796,14 @@
       </p:sp>
       <p:sp>
         <p:nvSpPr>
-          <p:cNvPr id="29" name="Shape 23"/>
-          <p:cNvSpPr/>
-          <p:nvPr/>
-        </p:nvSpPr>
-        <p:spPr>
-          <a:xfrm>
-            <a:off x="976122" y="2130552"/>
-            <a:ext cx="585216" cy="585216"/>
-          </a:xfrm>
-          <a:prstGeom prst="roundRect">
-            <a:avLst>
-              <a:gd name="adj" fmla="val 6250"/>
-            </a:avLst>
-          </a:prstGeom>
-          <a:solidFill>
-            <a:srgbClr val="E9EEF5"/>
-          </a:solidFill>
-          <a:ln w="12700">
-            <a:solidFill>
-              <a:srgbClr val="D5DCE7"/>
-            </a:solidFill>
-            <a:prstDash val="solid"/>
-          </a:ln>
-        </p:spPr>
-      </p:sp>
-      <p:pic>
-        <p:nvPicPr>
-          <p:cNvPr id="30" name="Image 4" descr="verified icon from tabler-icons (MIT)">    </p:cNvPr>
-          <p:cNvPicPr>
-            <a:picLocks noChangeAspect="1"/>
-          </p:cNvPicPr>
-          <p:nvPr/>
-        </p:nvPicPr>
-        <p:blipFill>
-          <a:blip r:embed="rId9">
-            <a:extLst>
-              <a:ext uri="{96DAC541-7B7A-43D3-8B79-37D633B846F1}">
-                <asvg:svgBlip xmlns:asvg="http://schemas.microsoft.com/office/drawing/2016/SVG/main" r:embed="rId10"/>
-              </a:ext>
-            </a:extLst>
-          </a:blip>
-          <a:stretch>
-            <a:fillRect/>
-          </a:stretch>
-        </p:blipFill>
-        <p:spPr>
-          <a:xfrm>
-            <a:off x="1049274" y="2203704"/>
-            <a:ext cx="438912" cy="438912"/>
-          </a:xfrm>
-          <a:prstGeom prst="rect">
-            <a:avLst/>
-          </a:prstGeom>
-        </p:spPr>
-      </p:pic>
-      <p:sp>
-        <p:nvSpPr>
-          <p:cNvPr id="31" name="mdpr:overflow-guard-f8d03e:item-1:block-31"/>
+          <p:cNvPr id="29" name="mdpr:overflow-guard-f8d03e:item-1:block-31"/>
           <p:cNvSpPr txBox="1"/>
           <p:nvPr/>
         </p:nvSpPr>
         <p:spPr>
           <a:xfrm>
-            <a:off x="1689354" y="1865376"/>
-            <a:ext cx="3961638" cy="1115568"/>
+            <a:off x="1042416" y="1627632"/>
+            <a:ext cx="4608576" cy="1591056"/>
           </a:xfrm>
           <a:prstGeom prst="rect">
             <a:avLst/>
@@ -18179,71 +16855,14 @@
       </p:sp>
       <p:sp>
         <p:nvSpPr>
-          <p:cNvPr id="32" name="Shape 25"/>
-          <p:cNvSpPr/>
-          <p:nvPr/>
-        </p:nvSpPr>
-        <p:spPr>
-          <a:xfrm>
-            <a:off x="6462522" y="2130552"/>
-            <a:ext cx="585216" cy="585216"/>
-          </a:xfrm>
-          <a:prstGeom prst="roundRect">
-            <a:avLst>
-              <a:gd name="adj" fmla="val 6250"/>
-            </a:avLst>
-          </a:prstGeom>
-          <a:solidFill>
-            <a:srgbClr val="E9EEF5"/>
-          </a:solidFill>
-          <a:ln w="12700">
-            <a:solidFill>
-              <a:srgbClr val="D5DCE7"/>
-            </a:solidFill>
-            <a:prstDash val="solid"/>
-          </a:ln>
-        </p:spPr>
-      </p:sp>
-      <p:pic>
-        <p:nvPicPr>
-          <p:cNvPr id="33" name="Image 5" descr="table icon from tabler-icons (MIT)">    </p:cNvPr>
-          <p:cNvPicPr>
-            <a:picLocks noChangeAspect="1"/>
-          </p:cNvPicPr>
-          <p:nvPr/>
-        </p:nvPicPr>
-        <p:blipFill>
-          <a:blip r:embed="rId11">
-            <a:extLst>
-              <a:ext uri="{96DAC541-7B7A-43D3-8B79-37D633B846F1}">
-                <asvg:svgBlip xmlns:asvg="http://schemas.microsoft.com/office/drawing/2016/SVG/main" r:embed="rId12"/>
-              </a:ext>
-            </a:extLst>
-          </a:blip>
-          <a:stretch>
-            <a:fillRect/>
-          </a:stretch>
-        </p:blipFill>
-        <p:spPr>
-          <a:xfrm>
-            <a:off x="6535674" y="2203704"/>
-            <a:ext cx="438912" cy="438912"/>
-          </a:xfrm>
-          <a:prstGeom prst="rect">
-            <a:avLst/>
-          </a:prstGeom>
-        </p:spPr>
-      </p:pic>
-      <p:sp>
-        <p:nvSpPr>
-          <p:cNvPr id="34" name="mdpr:overflow-guard-f8d03e:item-2:block-31"/>
+          <p:cNvPr id="30" name="mdpr:overflow-guard-f8d03e:item-2:block-31"/>
           <p:cNvSpPr txBox="1"/>
           <p:nvPr/>
         </p:nvSpPr>
         <p:spPr>
           <a:xfrm>
-            <a:off x="7175754" y="1697736"/>
-            <a:ext cx="3961638" cy="1450848"/>
+            <a:off x="6528816" y="1627632"/>
+            <a:ext cx="4608576" cy="1591056"/>
           </a:xfrm>
           <a:prstGeom prst="rect">
             <a:avLst/>
@@ -18295,71 +16914,14 @@
       </p:sp>
       <p:sp>
         <p:nvSpPr>
-          <p:cNvPr id="35" name="Shape 27"/>
-          <p:cNvSpPr/>
-          <p:nvPr/>
-        </p:nvSpPr>
-        <p:spPr>
-          <a:xfrm>
-            <a:off x="976122" y="4416552"/>
-            <a:ext cx="585216" cy="585216"/>
-          </a:xfrm>
-          <a:prstGeom prst="roundRect">
-            <a:avLst>
-              <a:gd name="adj" fmla="val 6250"/>
-            </a:avLst>
-          </a:prstGeom>
-          <a:solidFill>
-            <a:srgbClr val="E9EEF5"/>
-          </a:solidFill>
-          <a:ln w="12700">
-            <a:solidFill>
-              <a:srgbClr val="D5DCE7"/>
-            </a:solidFill>
-            <a:prstDash val="solid"/>
-          </a:ln>
-        </p:spPr>
-      </p:sp>
-      <p:pic>
-        <p:nvPicPr>
-          <p:cNvPr id="36" name="Image 6" descr="article icon from tabler-icons (MIT)">    </p:cNvPr>
-          <p:cNvPicPr>
-            <a:picLocks noChangeAspect="1"/>
-          </p:cNvPicPr>
-          <p:nvPr/>
-        </p:nvPicPr>
-        <p:blipFill>
-          <a:blip r:embed="rId13">
-            <a:extLst>
-              <a:ext uri="{96DAC541-7B7A-43D3-8B79-37D633B846F1}">
-                <asvg:svgBlip xmlns:asvg="http://schemas.microsoft.com/office/drawing/2016/SVG/main" r:embed="rId14"/>
-              </a:ext>
-            </a:extLst>
-          </a:blip>
-          <a:stretch>
-            <a:fillRect/>
-          </a:stretch>
-        </p:blipFill>
-        <p:spPr>
-          <a:xfrm>
-            <a:off x="1049274" y="4489704"/>
-            <a:ext cx="438912" cy="438912"/>
-          </a:xfrm>
-          <a:prstGeom prst="rect">
-            <a:avLst/>
-          </a:prstGeom>
-        </p:spPr>
-      </p:pic>
-      <p:sp>
-        <p:nvSpPr>
-          <p:cNvPr id="37" name="mdpr:overflow-guard-f8d03e:item-3:block-31"/>
+          <p:cNvPr id="31" name="mdpr:overflow-guard-f8d03e:item-3:block-31"/>
           <p:cNvSpPr txBox="1"/>
           <p:nvPr/>
         </p:nvSpPr>
         <p:spPr>
           <a:xfrm>
-            <a:off x="1689354" y="4151376"/>
-            <a:ext cx="3961638" cy="1115568"/>
+            <a:off x="1042416" y="3913632"/>
+            <a:ext cx="4608576" cy="1591056"/>
           </a:xfrm>
           <a:prstGeom prst="rect">
             <a:avLst/>
@@ -18411,71 +16973,14 @@
       </p:sp>
       <p:sp>
         <p:nvSpPr>
-          <p:cNvPr id="38" name="Shape 29"/>
-          <p:cNvSpPr/>
-          <p:nvPr/>
-        </p:nvSpPr>
-        <p:spPr>
-          <a:xfrm>
-            <a:off x="6462522" y="4416552"/>
-            <a:ext cx="585216" cy="585216"/>
-          </a:xfrm>
-          <a:prstGeom prst="roundRect">
-            <a:avLst>
-              <a:gd name="adj" fmla="val 6250"/>
-            </a:avLst>
-          </a:prstGeom>
-          <a:solidFill>
-            <a:srgbClr val="E9EEF5"/>
-          </a:solidFill>
-          <a:ln w="12700">
-            <a:solidFill>
-              <a:srgbClr val="D5DCE7"/>
-            </a:solidFill>
-            <a:prstDash val="solid"/>
-          </a:ln>
-        </p:spPr>
-      </p:sp>
-      <p:pic>
-        <p:nvPicPr>
-          <p:cNvPr id="39" name="Image 7" descr="article icon from tabler-icons (MIT)">    </p:cNvPr>
-          <p:cNvPicPr>
-            <a:picLocks noChangeAspect="1"/>
-          </p:cNvPicPr>
-          <p:nvPr/>
-        </p:nvPicPr>
-        <p:blipFill>
-          <a:blip r:embed="rId15">
-            <a:extLst>
-              <a:ext uri="{96DAC541-7B7A-43D3-8B79-37D633B846F1}">
-                <asvg:svgBlip xmlns:asvg="http://schemas.microsoft.com/office/drawing/2016/SVG/main" r:embed="rId16"/>
-              </a:ext>
-            </a:extLst>
-          </a:blip>
-          <a:stretch>
-            <a:fillRect/>
-          </a:stretch>
-        </p:blipFill>
-        <p:spPr>
-          <a:xfrm>
-            <a:off x="6535674" y="4489704"/>
-            <a:ext cx="438912" cy="438912"/>
-          </a:xfrm>
-          <a:prstGeom prst="rect">
-            <a:avLst/>
-          </a:prstGeom>
-        </p:spPr>
-      </p:pic>
-      <p:sp>
-        <p:nvSpPr>
-          <p:cNvPr id="40" name="mdpr:overflow-guard-f8d03e:item-4:block-31"/>
+          <p:cNvPr id="32" name="mdpr:overflow-guard-f8d03e:item-4:block-31"/>
           <p:cNvSpPr txBox="1"/>
           <p:nvPr/>
         </p:nvSpPr>
         <p:spPr>
           <a:xfrm>
-            <a:off x="7175754" y="4151376"/>
-            <a:ext cx="3961638" cy="1115568"/>
+            <a:off x="6528816" y="3913632"/>
+            <a:ext cx="4608576" cy="1591056"/>
           </a:xfrm>
           <a:prstGeom prst="rect">
             <a:avLst/>
@@ -21183,71 +19688,14 @@
       </p:sp>
       <p:sp>
         <p:nvSpPr>
-          <p:cNvPr id="25" name="Shape 20"/>
-          <p:cNvSpPr/>
-          <p:nvPr/>
-        </p:nvSpPr>
-        <p:spPr>
-          <a:xfrm>
-            <a:off x="1097280" y="2140428"/>
-            <a:ext cx="474025" cy="474025"/>
-          </a:xfrm>
-          <a:prstGeom prst="roundRect">
-            <a:avLst>
-              <a:gd name="adj" fmla="val 7716"/>
-            </a:avLst>
-          </a:prstGeom>
-          <a:solidFill>
-            <a:srgbClr val="E9EEF5"/>
-          </a:solidFill>
-          <a:ln w="12700">
-            <a:solidFill>
-              <a:srgbClr val="D5DCE7"/>
-            </a:solidFill>
-            <a:prstDash val="solid"/>
-          </a:ln>
-        </p:spPr>
-      </p:sp>
-      <p:pic>
-        <p:nvPicPr>
-          <p:cNvPr id="26" name="Image 3" descr="flow icon from tabler-icons (MIT)">    </p:cNvPr>
-          <p:cNvPicPr>
-            <a:picLocks noChangeAspect="1"/>
-          </p:cNvPicPr>
-          <p:nvPr/>
-        </p:nvPicPr>
-        <p:blipFill>
-          <a:blip r:embed="rId7">
-            <a:extLst>
-              <a:ext uri="{96DAC541-7B7A-43D3-8B79-37D633B846F1}">
-                <asvg:svgBlip xmlns:asvg="http://schemas.microsoft.com/office/drawing/2016/SVG/main" r:embed="rId8"/>
-              </a:ext>
-            </a:extLst>
-          </a:blip>
-          <a:stretch>
-            <a:fillRect/>
-          </a:stretch>
-        </p:blipFill>
-        <p:spPr>
-          <a:xfrm>
-            <a:off x="1170432" y="2213580"/>
-            <a:ext cx="327721" cy="327721"/>
-          </a:xfrm>
-          <a:prstGeom prst="rect">
-            <a:avLst/>
-          </a:prstGeom>
-        </p:spPr>
-      </p:pic>
-      <p:sp>
-        <p:nvSpPr>
-          <p:cNvPr id="27" name="mdpr:actions-output-review-326e07:item-1:block-41"/>
+          <p:cNvPr id="25" name="mdpr:actions-output-review-326e07:item-1:block-41"/>
           <p:cNvSpPr txBox="1"/>
           <p:nvPr/>
         </p:nvSpPr>
         <p:spPr>
           <a:xfrm>
-            <a:off x="1699321" y="1987296"/>
-            <a:ext cx="9255191" cy="780288"/>
+            <a:off x="1133856" y="1957548"/>
+            <a:ext cx="9820656" cy="839785"/>
           </a:xfrm>
           <a:prstGeom prst="rect">
             <a:avLst/>
@@ -21299,71 +19747,14 @@
       </p:sp>
       <p:sp>
         <p:nvSpPr>
-          <p:cNvPr id="28" name="Shape 22"/>
-          <p:cNvSpPr/>
-          <p:nvPr/>
-        </p:nvSpPr>
-        <p:spPr>
-          <a:xfrm>
-            <a:off x="1097280" y="3466308"/>
-            <a:ext cx="474025" cy="474025"/>
-          </a:xfrm>
-          <a:prstGeom prst="roundRect">
-            <a:avLst>
-              <a:gd name="adj" fmla="val 7716"/>
-            </a:avLst>
-          </a:prstGeom>
-          <a:solidFill>
-            <a:srgbClr val="E9EEF5"/>
-          </a:solidFill>
-          <a:ln w="12700">
-            <a:solidFill>
-              <a:srgbClr val="D5DCE7"/>
-            </a:solidFill>
-            <a:prstDash val="solid"/>
-          </a:ln>
-        </p:spPr>
-      </p:sp>
-      <p:pic>
-        <p:nvPicPr>
-          <p:cNvPr id="29" name="Image 4" descr="verified icon from tabler-icons (MIT)">    </p:cNvPr>
-          <p:cNvPicPr>
-            <a:picLocks noChangeAspect="1"/>
-          </p:cNvPicPr>
-          <p:nvPr/>
-        </p:nvPicPr>
-        <p:blipFill>
-          <a:blip r:embed="rId9">
-            <a:extLst>
-              <a:ext uri="{96DAC541-7B7A-43D3-8B79-37D633B846F1}">
-                <asvg:svgBlip xmlns:asvg="http://schemas.microsoft.com/office/drawing/2016/SVG/main" r:embed="rId10"/>
-              </a:ext>
-            </a:extLst>
-          </a:blip>
-          <a:stretch>
-            <a:fillRect/>
-          </a:stretch>
-        </p:blipFill>
-        <p:spPr>
-          <a:xfrm>
-            <a:off x="1170432" y="3539460"/>
-            <a:ext cx="327721" cy="327721"/>
-          </a:xfrm>
-          <a:prstGeom prst="rect">
-            <a:avLst/>
-          </a:prstGeom>
-        </p:spPr>
-      </p:pic>
-      <p:sp>
-        <p:nvSpPr>
-          <p:cNvPr id="30" name="mdpr:actions-output-review-326e07:item-2:block-41"/>
+          <p:cNvPr id="26" name="mdpr:actions-output-review-326e07:item-2:block-41"/>
           <p:cNvSpPr txBox="1"/>
           <p:nvPr/>
         </p:nvSpPr>
         <p:spPr>
           <a:xfrm>
-            <a:off x="1699321" y="3313176"/>
-            <a:ext cx="9255191" cy="780288"/>
+            <a:off x="1133856" y="3283428"/>
+            <a:ext cx="9820656" cy="839785"/>
           </a:xfrm>
           <a:prstGeom prst="rect">
             <a:avLst/>
@@ -21415,71 +19806,14 @@
       </p:sp>
       <p:sp>
         <p:nvSpPr>
-          <p:cNvPr id="31" name="Shape 24"/>
-          <p:cNvSpPr/>
-          <p:nvPr/>
-        </p:nvSpPr>
-        <p:spPr>
-          <a:xfrm>
-            <a:off x="1097280" y="4783044"/>
-            <a:ext cx="474025" cy="474025"/>
-          </a:xfrm>
-          <a:prstGeom prst="roundRect">
-            <a:avLst>
-              <a:gd name="adj" fmla="val 7716"/>
-            </a:avLst>
-          </a:prstGeom>
-          <a:solidFill>
-            <a:srgbClr val="E9EEF5"/>
-          </a:solidFill>
-          <a:ln w="12700">
-            <a:solidFill>
-              <a:srgbClr val="D5DCE7"/>
-            </a:solidFill>
-            <a:prstDash val="solid"/>
-          </a:ln>
-        </p:spPr>
-      </p:sp>
-      <p:pic>
-        <p:nvPicPr>
-          <p:cNvPr id="32" name="Image 5" descr="spark icon from tabler-icons (MIT)">    </p:cNvPr>
-          <p:cNvPicPr>
-            <a:picLocks noChangeAspect="1"/>
-          </p:cNvPicPr>
-          <p:nvPr/>
-        </p:nvPicPr>
-        <p:blipFill>
-          <a:blip r:embed="rId11">
-            <a:extLst>
-              <a:ext uri="{96DAC541-7B7A-43D3-8B79-37D633B846F1}">
-                <asvg:svgBlip xmlns:asvg="http://schemas.microsoft.com/office/drawing/2016/SVG/main" r:embed="rId12"/>
-              </a:ext>
-            </a:extLst>
-          </a:blip>
-          <a:stretch>
-            <a:fillRect/>
-          </a:stretch>
-        </p:blipFill>
-        <p:spPr>
-          <a:xfrm>
-            <a:off x="1170432" y="4856196"/>
-            <a:ext cx="327721" cy="327721"/>
-          </a:xfrm>
-          <a:prstGeom prst="rect">
-            <a:avLst/>
-          </a:prstGeom>
-        </p:spPr>
-      </p:pic>
-      <p:sp>
-        <p:nvSpPr>
-          <p:cNvPr id="33" name="mdpr:actions-output-review-326e07:item-3:block-41"/>
+          <p:cNvPr id="27" name="mdpr:actions-output-review-326e07:item-3:block-41"/>
           <p:cNvSpPr txBox="1"/>
           <p:nvPr/>
         </p:nvSpPr>
         <p:spPr>
           <a:xfrm>
-            <a:off x="1699321" y="4629912"/>
-            <a:ext cx="9255191" cy="780288"/>
+            <a:off x="1133856" y="4600164"/>
+            <a:ext cx="9820656" cy="839785"/>
           </a:xfrm>
           <a:prstGeom prst="rect">
             <a:avLst/>
@@ -23366,71 +21700,14 @@
       </p:sp>
       <p:sp>
         <p:nvSpPr>
-          <p:cNvPr id="25" name="Shape 20"/>
-          <p:cNvSpPr/>
-          <p:nvPr/>
-        </p:nvSpPr>
-        <p:spPr>
-          <a:xfrm>
-            <a:off x="1097280" y="2140428"/>
-            <a:ext cx="474025" cy="474025"/>
-          </a:xfrm>
-          <a:prstGeom prst="roundRect">
-            <a:avLst>
-              <a:gd name="adj" fmla="val 7716"/>
-            </a:avLst>
-          </a:prstGeom>
-          <a:solidFill>
-            <a:srgbClr val="E9EEF5"/>
-          </a:solidFill>
-          <a:ln w="12700">
-            <a:solidFill>
-              <a:srgbClr val="D5DCE7"/>
-            </a:solidFill>
-            <a:prstDash val="solid"/>
-          </a:ln>
-        </p:spPr>
-      </p:sp>
-      <p:pic>
-        <p:nvPicPr>
-          <p:cNvPr id="26" name="Image 3" descr="article icon from tabler-icons (MIT)">    </p:cNvPr>
-          <p:cNvPicPr>
-            <a:picLocks noChangeAspect="1"/>
-          </p:cNvPicPr>
-          <p:nvPr/>
-        </p:nvPicPr>
-        <p:blipFill>
-          <a:blip r:embed="rId7">
-            <a:extLst>
-              <a:ext uri="{96DAC541-7B7A-43D3-8B79-37D633B846F1}">
-                <asvg:svgBlip xmlns:asvg="http://schemas.microsoft.com/office/drawing/2016/SVG/main" r:embed="rId8"/>
-              </a:ext>
-            </a:extLst>
-          </a:blip>
-          <a:stretch>
-            <a:fillRect/>
-          </a:stretch>
-        </p:blipFill>
-        <p:spPr>
-          <a:xfrm>
-            <a:off x="1170432" y="2213580"/>
-            <a:ext cx="327721" cy="327721"/>
-          </a:xfrm>
-          <a:prstGeom prst="rect">
-            <a:avLst/>
-          </a:prstGeom>
-        </p:spPr>
-      </p:pic>
-      <p:sp>
-        <p:nvSpPr>
-          <p:cNvPr id="27" name="mdpr:1-2-32ac08:item-1:block-6-chunk-1"/>
+          <p:cNvPr id="25" name="mdpr:1-2-32ac08:item-1:block-6-chunk-1"/>
           <p:cNvSpPr txBox="1"/>
           <p:nvPr/>
         </p:nvSpPr>
         <p:spPr>
           <a:xfrm>
-            <a:off x="1699321" y="1987296"/>
-            <a:ext cx="9255191" cy="780288"/>
+            <a:off x="1133856" y="1957548"/>
+            <a:ext cx="9820656" cy="839785"/>
           </a:xfrm>
           <a:prstGeom prst="rect">
             <a:avLst/>
@@ -23482,71 +21759,14 @@
       </p:sp>
       <p:sp>
         <p:nvSpPr>
-          <p:cNvPr id="28" name="Shape 22"/>
-          <p:cNvSpPr/>
-          <p:nvPr/>
-        </p:nvSpPr>
-        <p:spPr>
-          <a:xfrm>
-            <a:off x="1097280" y="3466308"/>
-            <a:ext cx="474025" cy="474025"/>
-          </a:xfrm>
-          <a:prstGeom prst="roundRect">
-            <a:avLst>
-              <a:gd name="adj" fmla="val 7716"/>
-            </a:avLst>
-          </a:prstGeom>
-          <a:solidFill>
-            <a:srgbClr val="E9EEF5"/>
-          </a:solidFill>
-          <a:ln w="12700">
-            <a:solidFill>
-              <a:srgbClr val="D5DCE7"/>
-            </a:solidFill>
-            <a:prstDash val="solid"/>
-          </a:ln>
-        </p:spPr>
-      </p:sp>
-      <p:pic>
-        <p:nvPicPr>
-          <p:cNvPr id="29" name="Image 4" descr="chart icon from tabler-icons (MIT)">    </p:cNvPr>
-          <p:cNvPicPr>
-            <a:picLocks noChangeAspect="1"/>
-          </p:cNvPicPr>
-          <p:nvPr/>
-        </p:nvPicPr>
-        <p:blipFill>
-          <a:blip r:embed="rId9">
-            <a:extLst>
-              <a:ext uri="{96DAC541-7B7A-43D3-8B79-37D633B846F1}">
-                <asvg:svgBlip xmlns:asvg="http://schemas.microsoft.com/office/drawing/2016/SVG/main" r:embed="rId10"/>
-              </a:ext>
-            </a:extLst>
-          </a:blip>
-          <a:stretch>
-            <a:fillRect/>
-          </a:stretch>
-        </p:blipFill>
-        <p:spPr>
-          <a:xfrm>
-            <a:off x="1170432" y="3539460"/>
-            <a:ext cx="327721" cy="327721"/>
-          </a:xfrm>
-          <a:prstGeom prst="rect">
-            <a:avLst/>
-          </a:prstGeom>
-        </p:spPr>
-      </p:pic>
-      <p:sp>
-        <p:nvSpPr>
-          <p:cNvPr id="30" name="mdpr:1-2-32ac08:item-2:block-6-chunk-1"/>
+          <p:cNvPr id="26" name="mdpr:1-2-32ac08:item-2:block-6-chunk-1"/>
           <p:cNvSpPr txBox="1"/>
           <p:nvPr/>
         </p:nvSpPr>
         <p:spPr>
           <a:xfrm>
-            <a:off x="1699321" y="3313176"/>
-            <a:ext cx="9255191" cy="780288"/>
+            <a:off x="1133856" y="3283428"/>
+            <a:ext cx="9820656" cy="839785"/>
           </a:xfrm>
           <a:prstGeom prst="rect">
             <a:avLst/>
@@ -23598,71 +21818,14 @@
       </p:sp>
       <p:sp>
         <p:nvSpPr>
-          <p:cNvPr id="31" name="Shape 24"/>
-          <p:cNvSpPr/>
-          <p:nvPr/>
-        </p:nvSpPr>
-        <p:spPr>
-          <a:xfrm>
-            <a:off x="1097280" y="4783044"/>
-            <a:ext cx="474025" cy="474025"/>
-          </a:xfrm>
-          <a:prstGeom prst="roundRect">
-            <a:avLst>
-              <a:gd name="adj" fmla="val 7716"/>
-            </a:avLst>
-          </a:prstGeom>
-          <a:solidFill>
-            <a:srgbClr val="E9EEF5"/>
-          </a:solidFill>
-          <a:ln w="12700">
-            <a:solidFill>
-              <a:srgbClr val="D5DCE7"/>
-            </a:solidFill>
-            <a:prstDash val="solid"/>
-          </a:ln>
-        </p:spPr>
-      </p:sp>
-      <p:pic>
-        <p:nvPicPr>
-          <p:cNvPr id="32" name="Image 5" descr="article icon from tabler-icons (MIT)">    </p:cNvPr>
-          <p:cNvPicPr>
-            <a:picLocks noChangeAspect="1"/>
-          </p:cNvPicPr>
-          <p:nvPr/>
-        </p:nvPicPr>
-        <p:blipFill>
-          <a:blip r:embed="rId11">
-            <a:extLst>
-              <a:ext uri="{96DAC541-7B7A-43D3-8B79-37D633B846F1}">
-                <asvg:svgBlip xmlns:asvg="http://schemas.microsoft.com/office/drawing/2016/SVG/main" r:embed="rId12"/>
-              </a:ext>
-            </a:extLst>
-          </a:blip>
-          <a:stretch>
-            <a:fillRect/>
-          </a:stretch>
-        </p:blipFill>
-        <p:spPr>
-          <a:xfrm>
-            <a:off x="1170432" y="4856196"/>
-            <a:ext cx="327721" cy="327721"/>
-          </a:xfrm>
-          <a:prstGeom prst="rect">
-            <a:avLst/>
-          </a:prstGeom>
-        </p:spPr>
-      </p:pic>
-      <p:sp>
-        <p:nvSpPr>
-          <p:cNvPr id="33" name="mdpr:1-2-32ac08:item-3:block-6-chunk-1"/>
+          <p:cNvPr id="27" name="mdpr:1-2-32ac08:item-3:block-6-chunk-1"/>
           <p:cNvSpPr txBox="1"/>
           <p:nvPr/>
         </p:nvSpPr>
         <p:spPr>
           <a:xfrm>
-            <a:off x="1699321" y="4629912"/>
-            <a:ext cx="9255191" cy="780288"/>
+            <a:off x="1133856" y="4600164"/>
+            <a:ext cx="9820656" cy="839785"/>
           </a:xfrm>
           <a:prstGeom prst="rect">
             <a:avLst/>
@@ -24925,71 +23088,14 @@
       </p:sp>
       <p:sp>
         <p:nvSpPr>
-          <p:cNvPr id="25" name="Shape 20"/>
-          <p:cNvSpPr/>
-          <p:nvPr/>
-        </p:nvSpPr>
-        <p:spPr>
-          <a:xfrm>
-            <a:off x="1097280" y="2140428"/>
-            <a:ext cx="474025" cy="474025"/>
-          </a:xfrm>
-          <a:prstGeom prst="roundRect">
-            <a:avLst>
-              <a:gd name="adj" fmla="val 7716"/>
-            </a:avLst>
-          </a:prstGeom>
-          <a:solidFill>
-            <a:srgbClr val="E9EEF5"/>
-          </a:solidFill>
-          <a:ln w="12700">
-            <a:solidFill>
-              <a:srgbClr val="D5DCE7"/>
-            </a:solidFill>
-            <a:prstDash val="solid"/>
-          </a:ln>
-        </p:spPr>
-      </p:sp>
-      <p:pic>
-        <p:nvPicPr>
-          <p:cNvPr id="26" name="Image 3" descr="article icon from tabler-icons (MIT)">    </p:cNvPr>
-          <p:cNvPicPr>
-            <a:picLocks noChangeAspect="1"/>
-          </p:cNvPicPr>
-          <p:nvPr/>
-        </p:nvPicPr>
-        <p:blipFill>
-          <a:blip r:embed="rId7">
-            <a:extLst>
-              <a:ext uri="{96DAC541-7B7A-43D3-8B79-37D633B846F1}">
-                <asvg:svgBlip xmlns:asvg="http://schemas.microsoft.com/office/drawing/2016/SVG/main" r:embed="rId8"/>
-              </a:ext>
-            </a:extLst>
-          </a:blip>
-          <a:stretch>
-            <a:fillRect/>
-          </a:stretch>
-        </p:blipFill>
-        <p:spPr>
-          <a:xfrm>
-            <a:off x="1170432" y="2213580"/>
-            <a:ext cx="327721" cy="327721"/>
-          </a:xfrm>
-          <a:prstGeom prst="rect">
-            <a:avLst/>
-          </a:prstGeom>
-        </p:spPr>
-      </p:pic>
-      <p:sp>
-        <p:nvSpPr>
-          <p:cNvPr id="27" name="mdpr:1-2-dfa474:item-1:block-8-chunk-1"/>
+          <p:cNvPr id="25" name="mdpr:1-2-dfa474:item-1:block-8-chunk-1"/>
           <p:cNvSpPr txBox="1"/>
           <p:nvPr/>
         </p:nvSpPr>
         <p:spPr>
           <a:xfrm>
-            <a:off x="1699321" y="1987296"/>
-            <a:ext cx="9255191" cy="780288"/>
+            <a:off x="1133856" y="1957548"/>
+            <a:ext cx="9820656" cy="839785"/>
           </a:xfrm>
           <a:prstGeom prst="rect">
             <a:avLst/>
@@ -25041,71 +23147,14 @@
       </p:sp>
       <p:sp>
         <p:nvSpPr>
-          <p:cNvPr id="28" name="Shape 22"/>
-          <p:cNvSpPr/>
-          <p:nvPr/>
-        </p:nvSpPr>
-        <p:spPr>
-          <a:xfrm>
-            <a:off x="1097280" y="3466308"/>
-            <a:ext cx="474025" cy="474025"/>
-          </a:xfrm>
-          <a:prstGeom prst="roundRect">
-            <a:avLst>
-              <a:gd name="adj" fmla="val 7716"/>
-            </a:avLst>
-          </a:prstGeom>
-          <a:solidFill>
-            <a:srgbClr val="E9EEF5"/>
-          </a:solidFill>
-          <a:ln w="12700">
-            <a:solidFill>
-              <a:srgbClr val="D5DCE7"/>
-            </a:solidFill>
-            <a:prstDash val="solid"/>
-          </a:ln>
-        </p:spPr>
-      </p:sp>
-      <p:pic>
-        <p:nvPicPr>
-          <p:cNvPr id="29" name="Image 4" descr="article icon from tabler-icons (MIT)">    </p:cNvPr>
-          <p:cNvPicPr>
-            <a:picLocks noChangeAspect="1"/>
-          </p:cNvPicPr>
-          <p:nvPr/>
-        </p:nvPicPr>
-        <p:blipFill>
-          <a:blip r:embed="rId9">
-            <a:extLst>
-              <a:ext uri="{96DAC541-7B7A-43D3-8B79-37D633B846F1}">
-                <asvg:svgBlip xmlns:asvg="http://schemas.microsoft.com/office/drawing/2016/SVG/main" r:embed="rId10"/>
-              </a:ext>
-            </a:extLst>
-          </a:blip>
-          <a:stretch>
-            <a:fillRect/>
-          </a:stretch>
-        </p:blipFill>
-        <p:spPr>
-          <a:xfrm>
-            <a:off x="1170432" y="3539460"/>
-            <a:ext cx="327721" cy="327721"/>
-          </a:xfrm>
-          <a:prstGeom prst="rect">
-            <a:avLst/>
-          </a:prstGeom>
-        </p:spPr>
-      </p:pic>
-      <p:sp>
-        <p:nvSpPr>
-          <p:cNvPr id="30" name="mdpr:1-2-dfa474:item-2:block-8-chunk-1"/>
+          <p:cNvPr id="26" name="mdpr:1-2-dfa474:item-2:block-8-chunk-1"/>
           <p:cNvSpPr txBox="1"/>
           <p:nvPr/>
         </p:nvSpPr>
         <p:spPr>
           <a:xfrm>
-            <a:off x="1699321" y="3313176"/>
-            <a:ext cx="9255191" cy="780288"/>
+            <a:off x="1133856" y="3283428"/>
+            <a:ext cx="9820656" cy="839785"/>
           </a:xfrm>
           <a:prstGeom prst="rect">
             <a:avLst/>
@@ -25157,71 +23206,14 @@
       </p:sp>
       <p:sp>
         <p:nvSpPr>
-          <p:cNvPr id="31" name="Shape 24"/>
-          <p:cNvSpPr/>
-          <p:nvPr/>
-        </p:nvSpPr>
-        <p:spPr>
-          <a:xfrm>
-            <a:off x="1097280" y="4783044"/>
-            <a:ext cx="474025" cy="474025"/>
-          </a:xfrm>
-          <a:prstGeom prst="roundRect">
-            <a:avLst>
-              <a:gd name="adj" fmla="val 7716"/>
-            </a:avLst>
-          </a:prstGeom>
-          <a:solidFill>
-            <a:srgbClr val="E9EEF5"/>
-          </a:solidFill>
-          <a:ln w="12700">
-            <a:solidFill>
-              <a:srgbClr val="D5DCE7"/>
-            </a:solidFill>
-            <a:prstDash val="solid"/>
-          </a:ln>
-        </p:spPr>
-      </p:sp>
-      <p:pic>
-        <p:nvPicPr>
-          <p:cNvPr id="32" name="Image 5" descr="article icon from tabler-icons (MIT)">    </p:cNvPr>
-          <p:cNvPicPr>
-            <a:picLocks noChangeAspect="1"/>
-          </p:cNvPicPr>
-          <p:nvPr/>
-        </p:nvPicPr>
-        <p:blipFill>
-          <a:blip r:embed="rId11">
-            <a:extLst>
-              <a:ext uri="{96DAC541-7B7A-43D3-8B79-37D633B846F1}">
-                <asvg:svgBlip xmlns:asvg="http://schemas.microsoft.com/office/drawing/2016/SVG/main" r:embed="rId12"/>
-              </a:ext>
-            </a:extLst>
-          </a:blip>
-          <a:stretch>
-            <a:fillRect/>
-          </a:stretch>
-        </p:blipFill>
-        <p:spPr>
-          <a:xfrm>
-            <a:off x="1170432" y="4856196"/>
-            <a:ext cx="327721" cy="327721"/>
-          </a:xfrm>
-          <a:prstGeom prst="rect">
-            <a:avLst/>
-          </a:prstGeom>
-        </p:spPr>
-      </p:pic>
-      <p:sp>
-        <p:nvSpPr>
-          <p:cNvPr id="33" name="mdpr:1-2-dfa474:item-3:block-8-chunk-1"/>
+          <p:cNvPr id="27" name="mdpr:1-2-dfa474:item-3:block-8-chunk-1"/>
           <p:cNvSpPr txBox="1"/>
           <p:nvPr/>
         </p:nvSpPr>
         <p:spPr>
           <a:xfrm>
-            <a:off x="1699321" y="4629912"/>
-            <a:ext cx="9255191" cy="780288"/>
+            <a:off x="1133856" y="4600164"/>
+            <a:ext cx="9820656" cy="839785"/>
           </a:xfrm>
           <a:prstGeom prst="rect">
             <a:avLst/>

--- a/docs/theme-preview/pptx/newmorphism.pptx
+++ b/docs/theme-preview/pptx/newmorphism.pptx
@@ -3754,34 +3754,7 @@
       </p:sp>
       <p:sp>
         <p:nvSpPr>
-          <p:cNvPr id="7" name="Shape 5"/>
-          <p:cNvSpPr/>
-          <p:nvPr/>
-        </p:nvSpPr>
-        <p:spPr>
-          <a:xfrm>
-            <a:off x="731520" y="1207008"/>
-            <a:ext cx="1325880" cy="54864"/>
-          </a:xfrm>
-          <a:prstGeom prst="rect">
-            <a:avLst/>
-          </a:prstGeom>
-          <a:solidFill>
-            <a:srgbClr val="4F6F8F"/>
-          </a:solidFill>
-          <a:ln w="12700">
-            <a:solidFill>
-              <a:srgbClr val="4F6F8F">
-                <a:alpha val="0"/>
-              </a:srgbClr>
-            </a:solidFill>
-            <a:prstDash val="solid"/>
-          </a:ln>
-        </p:spPr>
-      </p:sp>
-      <p:sp>
-        <p:nvSpPr>
-          <p:cNvPr id="8" name="mdpr:mdpr-design-grammar-b3a462:title:__title:mdpr-design-grammar-b3a462"/>
+          <p:cNvPr id="7" name="mdpr:mdpr-design-grammar-b3a462:title:__title:mdpr-design-grammar-b3a462"/>
           <p:cNvSpPr txBox="1"/>
           <p:nvPr/>
         </p:nvSpPr>
@@ -4019,8 +3992,282 @@
         </p:nvSpPr>
         <p:spPr>
           <a:xfrm>
-            <a:off x="731520" y="1207008"/>
-            <a:ext cx="1325880" cy="54864"/>
+            <a:off x="955548" y="2574036"/>
+            <a:ext cx="10241280" cy="1024128"/>
+          </a:xfrm>
+          <a:prstGeom prst="roundRect">
+            <a:avLst>
+              <a:gd name="adj" fmla="val 5357"/>
+            </a:avLst>
+          </a:prstGeom>
+          <a:solidFill>
+            <a:srgbClr val="B8C3D2">
+              <a:alpha val="26000"/>
+            </a:srgbClr>
+          </a:solidFill>
+          <a:ln w="12700">
+            <a:solidFill>
+              <a:srgbClr val="D5DCE7">
+                <a:alpha val="0"/>
+              </a:srgbClr>
+            </a:solidFill>
+            <a:prstDash val="solid"/>
+          </a:ln>
+          <a:effectLst>
+            <a:outerShdw sx="100000" sy="100000" kx="0" ky="0" algn="bl" rotWithShape="0" blurRad="13970" dist="50800" dir="2700000">
+              <a:srgbClr val="AAB5C4">
+                <a:alpha val="20000"/>
+              </a:srgbClr>
+            </a:outerShdw>
+          </a:effectLst>
+        </p:spPr>
+      </p:sp>
+      <p:sp>
+        <p:nvSpPr>
+          <p:cNvPr id="8" name="Shape 6"/>
+          <p:cNvSpPr/>
+          <p:nvPr/>
+        </p:nvSpPr>
+        <p:spPr>
+          <a:xfrm>
+            <a:off x="882396" y="2491740"/>
+            <a:ext cx="10241280" cy="1024128"/>
+          </a:xfrm>
+          <a:prstGeom prst="roundRect">
+            <a:avLst>
+              <a:gd name="adj" fmla="val 5357"/>
+            </a:avLst>
+          </a:prstGeom>
+          <a:solidFill>
+            <a:srgbClr val="FFFFFF">
+              <a:alpha val="42000"/>
+            </a:srgbClr>
+          </a:solidFill>
+          <a:ln w="12700">
+            <a:solidFill>
+              <a:srgbClr val="FFFFFF">
+                <a:alpha val="0"/>
+              </a:srgbClr>
+            </a:solidFill>
+            <a:prstDash val="solid"/>
+          </a:ln>
+          <a:effectLst>
+            <a:outerShdw sx="100000" sy="100000" kx="0" ky="0" algn="bl" rotWithShape="0" blurRad="10160" dist="50800" dir="13500000">
+              <a:srgbClr val="FFFFFF">
+                <a:alpha val="36000"/>
+              </a:srgbClr>
+            </a:outerShdw>
+          </a:effectLst>
+        </p:spPr>
+      </p:sp>
+      <p:sp>
+        <p:nvSpPr>
+          <p:cNvPr id="9" name="Shape 7"/>
+          <p:cNvSpPr/>
+          <p:nvPr/>
+        </p:nvSpPr>
+        <p:spPr>
+          <a:xfrm>
+            <a:off x="914400" y="2523744"/>
+            <a:ext cx="10241280" cy="1024128"/>
+          </a:xfrm>
+          <a:prstGeom prst="roundRect">
+            <a:avLst>
+              <a:gd name="adj" fmla="val 5357"/>
+            </a:avLst>
+          </a:prstGeom>
+          <a:solidFill>
+            <a:srgbClr val="E9EEF5">
+              <a:alpha val="6000"/>
+            </a:srgbClr>
+          </a:solidFill>
+          <a:ln w="12700">
+            <a:solidFill>
+              <a:srgbClr val="FFFFFF">
+                <a:alpha val="28000"/>
+              </a:srgbClr>
+            </a:solidFill>
+            <a:prstDash val="solid"/>
+          </a:ln>
+        </p:spPr>
+      </p:sp>
+      <p:pic>
+        <p:nvPicPr>
+          <p:cNvPr id="10" name="Image 0" descr="preencoded.png">    </p:cNvPr>
+          <p:cNvPicPr>
+            <a:picLocks noChangeAspect="1"/>
+          </p:cNvPicPr>
+          <p:nvPr/>
+        </p:nvPicPr>
+        <p:blipFill>
+          <a:blip r:embed="rId1">
+            <a:extLst>
+              <a:ext uri="{96DAC541-7B7A-43D3-8B79-37D633B846F1}">
+                <asvg:svgBlip xmlns:asvg="http://schemas.microsoft.com/office/drawing/2016/SVG/main" r:embed="rId2"/>
+              </a:ext>
+            </a:extLst>
+          </a:blip>
+          <a:stretch>
+            <a:fillRect/>
+          </a:stretch>
+        </p:blipFill>
+        <p:spPr>
+          <a:xfrm>
+            <a:off x="914400" y="2523744"/>
+            <a:ext cx="10241280" cy="1024128"/>
+          </a:xfrm>
+          <a:prstGeom prst="rect">
+            <a:avLst/>
+          </a:prstGeom>
+        </p:spPr>
+      </p:pic>
+      <p:sp>
+        <p:nvSpPr>
+          <p:cNvPr id="11" name="Shape 8"/>
+          <p:cNvSpPr/>
+          <p:nvPr/>
+        </p:nvSpPr>
+        <p:spPr>
+          <a:xfrm>
+            <a:off x="955548" y="3899916"/>
+            <a:ext cx="10241280" cy="1024128"/>
+          </a:xfrm>
+          <a:prstGeom prst="roundRect">
+            <a:avLst>
+              <a:gd name="adj" fmla="val 5357"/>
+            </a:avLst>
+          </a:prstGeom>
+          <a:solidFill>
+            <a:srgbClr val="B8C3D2">
+              <a:alpha val="26000"/>
+            </a:srgbClr>
+          </a:solidFill>
+          <a:ln w="12700">
+            <a:solidFill>
+              <a:srgbClr val="D5DCE7">
+                <a:alpha val="0"/>
+              </a:srgbClr>
+            </a:solidFill>
+            <a:prstDash val="solid"/>
+          </a:ln>
+          <a:effectLst>
+            <a:outerShdw sx="100000" sy="100000" kx="0" ky="0" algn="bl" rotWithShape="0" blurRad="13970" dist="50800" dir="2700000">
+              <a:srgbClr val="AAB5C4">
+                <a:alpha val="20000"/>
+              </a:srgbClr>
+            </a:outerShdw>
+          </a:effectLst>
+        </p:spPr>
+      </p:sp>
+      <p:sp>
+        <p:nvSpPr>
+          <p:cNvPr id="12" name="Shape 9"/>
+          <p:cNvSpPr/>
+          <p:nvPr/>
+        </p:nvSpPr>
+        <p:spPr>
+          <a:xfrm>
+            <a:off x="882396" y="3817620"/>
+            <a:ext cx="10241280" cy="1024128"/>
+          </a:xfrm>
+          <a:prstGeom prst="roundRect">
+            <a:avLst>
+              <a:gd name="adj" fmla="val 5357"/>
+            </a:avLst>
+          </a:prstGeom>
+          <a:solidFill>
+            <a:srgbClr val="FFFFFF">
+              <a:alpha val="42000"/>
+            </a:srgbClr>
+          </a:solidFill>
+          <a:ln w="12700">
+            <a:solidFill>
+              <a:srgbClr val="FFFFFF">
+                <a:alpha val="0"/>
+              </a:srgbClr>
+            </a:solidFill>
+            <a:prstDash val="solid"/>
+          </a:ln>
+          <a:effectLst>
+            <a:outerShdw sx="100000" sy="100000" kx="0" ky="0" algn="bl" rotWithShape="0" blurRad="10160" dist="50800" dir="13500000">
+              <a:srgbClr val="FFFFFF">
+                <a:alpha val="36000"/>
+              </a:srgbClr>
+            </a:outerShdw>
+          </a:effectLst>
+        </p:spPr>
+      </p:sp>
+      <p:sp>
+        <p:nvSpPr>
+          <p:cNvPr id="13" name="Shape 10"/>
+          <p:cNvSpPr/>
+          <p:nvPr/>
+        </p:nvSpPr>
+        <p:spPr>
+          <a:xfrm>
+            <a:off x="914400" y="3849624"/>
+            <a:ext cx="10241280" cy="1024128"/>
+          </a:xfrm>
+          <a:prstGeom prst="roundRect">
+            <a:avLst>
+              <a:gd name="adj" fmla="val 5357"/>
+            </a:avLst>
+          </a:prstGeom>
+          <a:solidFill>
+            <a:srgbClr val="E9EEF5">
+              <a:alpha val="6000"/>
+            </a:srgbClr>
+          </a:solidFill>
+          <a:ln w="12700">
+            <a:solidFill>
+              <a:srgbClr val="FFFFFF">
+                <a:alpha val="28000"/>
+              </a:srgbClr>
+            </a:solidFill>
+            <a:prstDash val="solid"/>
+          </a:ln>
+        </p:spPr>
+      </p:sp>
+      <p:pic>
+        <p:nvPicPr>
+          <p:cNvPr id="14" name="Image 1" descr="preencoded.png">    </p:cNvPr>
+          <p:cNvPicPr>
+            <a:picLocks noChangeAspect="1"/>
+          </p:cNvPicPr>
+          <p:nvPr/>
+        </p:nvPicPr>
+        <p:blipFill>
+          <a:blip r:embed="rId3">
+            <a:extLst>
+              <a:ext uri="{96DAC541-7B7A-43D3-8B79-37D633B846F1}">
+                <asvg:svgBlip xmlns:asvg="http://schemas.microsoft.com/office/drawing/2016/SVG/main" r:embed="rId4"/>
+              </a:ext>
+            </a:extLst>
+          </a:blip>
+          <a:stretch>
+            <a:fillRect/>
+          </a:stretch>
+        </p:blipFill>
+        <p:spPr>
+          <a:xfrm>
+            <a:off x="914400" y="3849624"/>
+            <a:ext cx="10241280" cy="1024128"/>
+          </a:xfrm>
+          <a:prstGeom prst="rect">
+            <a:avLst/>
+          </a:prstGeom>
+        </p:spPr>
+      </p:pic>
+      <p:sp>
+        <p:nvSpPr>
+          <p:cNvPr id="15" name="Shape 11"/>
+          <p:cNvSpPr/>
+          <p:nvPr/>
+        </p:nvSpPr>
+        <p:spPr>
+          <a:xfrm>
+            <a:off x="914400" y="2523744"/>
+            <a:ext cx="73152" cy="1024128"/>
           </a:xfrm>
           <a:prstGeom prst="rect">
             <a:avLst/>
@@ -4040,24 +4287,24 @@
       </p:sp>
       <p:sp>
         <p:nvSpPr>
-          <p:cNvPr id="8" name="Shape 6"/>
-          <p:cNvSpPr/>
-          <p:nvPr/>
-        </p:nvSpPr>
-        <p:spPr>
-          <a:xfrm>
-            <a:off x="822960" y="1554480"/>
-            <a:ext cx="4937760" cy="73152"/>
+          <p:cNvPr id="16" name="Shape 12"/>
+          <p:cNvSpPr/>
+          <p:nvPr/>
+        </p:nvSpPr>
+        <p:spPr>
+          <a:xfrm>
+            <a:off x="914400" y="3849624"/>
+            <a:ext cx="73152" cy="1024128"/>
           </a:xfrm>
           <a:prstGeom prst="rect">
             <a:avLst/>
           </a:prstGeom>
           <a:solidFill>
-            <a:srgbClr val="4F6F8F"/>
-          </a:solidFill>
-          <a:ln w="12700">
-            <a:solidFill>
-              <a:srgbClr val="4F6F8F">
+            <a:srgbClr val="CBD5E1"/>
+          </a:solidFill>
+          <a:ln w="12700">
+            <a:solidFill>
+              <a:srgbClr val="CBD5E1">
                 <a:alpha val="0"/>
               </a:srgbClr>
             </a:solidFill>
@@ -4067,34 +4314,7 @@
       </p:sp>
       <p:sp>
         <p:nvSpPr>
-          <p:cNvPr id="9" name="Shape 7"/>
-          <p:cNvSpPr/>
-          <p:nvPr/>
-        </p:nvSpPr>
-        <p:spPr>
-          <a:xfrm>
-            <a:off x="6400800" y="1554480"/>
-            <a:ext cx="4937760" cy="73152"/>
-          </a:xfrm>
-          <a:prstGeom prst="rect">
-            <a:avLst/>
-          </a:prstGeom>
-          <a:solidFill>
-            <a:srgbClr val="4F6F8F"/>
-          </a:solidFill>
-          <a:ln w="12700">
-            <a:solidFill>
-              <a:srgbClr val="4F6F8F">
-                <a:alpha val="0"/>
-              </a:srgbClr>
-            </a:solidFill>
-            <a:prstDash val="solid"/>
-          </a:ln>
-        </p:spPr>
-      </p:sp>
-      <p:sp>
-        <p:nvSpPr>
-          <p:cNvPr id="10" name="mdpr:2-2-a9df10:title:__title:2-2-a9df10"/>
+          <p:cNvPr id="17" name="mdpr:2-2-a9df10:title:__title:2-2-a9df10"/>
           <p:cNvSpPr txBox="1"/>
           <p:nvPr/>
         </p:nvSpPr>
@@ -4128,7 +4348,24 @@
                 <a:ea typeface="Pretendard" pitchFamily="34" charset="-122"/>
                 <a:cs typeface="Pretendard" pitchFamily="34" charset="-120"/>
               </a:rPr>
-              <a:t>Semantic Blocks (Cont. 2/2)</a:t>
+              <a:t>Semantic Blocks</a:t>
+            </a:r>
+            <a:pPr algn="ctr" indent="0" marL="0">
+              <a:lnSpc>
+                <a:spcPct val="120000"/>
+              </a:lnSpc>
+              <a:buNone/>
+            </a:pPr>
+            <a:r>
+              <a:rPr lang="en-US" sz="2000" dirty="0">
+                <a:solidFill>
+                  <a:srgbClr val="898989"/>
+                </a:solidFill>
+                <a:latin typeface="Pretendard" pitchFamily="34" charset="0"/>
+                <a:ea typeface="Pretendard" pitchFamily="34" charset="-122"/>
+                <a:cs typeface="Pretendard" pitchFamily="34" charset="-120"/>
+              </a:rPr>
+              <a:t> (Cont. 2/2)</a:t>
             </a:r>
             <a:endParaRPr lang="en-US" sz="3400" dirty="0"/>
           </a:p>
@@ -4136,14 +4373,14 @@
       </p:sp>
       <p:sp>
         <p:nvSpPr>
-          <p:cNvPr id="11" name="mdpr:2-2-a9df10:left:block-10-chunk-2"/>
+          <p:cNvPr id="18" name="mdpr:2-2-a9df10:item-1:block-10-chunk-2"/>
           <p:cNvSpPr txBox="1"/>
           <p:nvPr/>
         </p:nvSpPr>
         <p:spPr>
           <a:xfrm>
-            <a:off x="896112" y="1664208"/>
-            <a:ext cx="4791456" cy="4169664"/>
+            <a:off x="1133856" y="2615916"/>
+            <a:ext cx="9820656" cy="839785"/>
           </a:xfrm>
           <a:prstGeom prst="rect">
             <a:avLst/>
@@ -4152,7 +4389,7 @@
           <a:ln/>
         </p:spPr>
         <p:txBody>
-          <a:bodyPr wrap="square" lIns="0" tIns="25400" rIns="25400" bIns="0" rtlCol="0" anchor="t"/>
+          <a:bodyPr wrap="square" lIns="0" tIns="25400" rIns="25400" bIns="0" rtlCol="0" anchor="ctr"/>
           <a:lstStyle/>
           <a:p>
             <a:pPr algn="l" indent="0" marL="0">
@@ -4170,7 +4407,7 @@
                 <a:ea typeface="Pretendard" pitchFamily="34" charset="-122"/>
                 <a:cs typeface="Pretendard" pitchFamily="34" charset="-120"/>
               </a:rPr>
-              <a:t>- Constraint:</a:t>
+              <a:t>Constraint:</a:t>
             </a:r>
             <a:pPr algn="l" indent="0" marL="0">
               <a:lnSpc>
@@ -4195,14 +4432,14 @@
       </p:sp>
       <p:sp>
         <p:nvSpPr>
-          <p:cNvPr id="12" name="mdpr:2-2-a9df10:right:block-10-chunk-2"/>
+          <p:cNvPr id="19" name="mdpr:2-2-a9df10:item-2:block-10-chunk-2"/>
           <p:cNvSpPr txBox="1"/>
           <p:nvPr/>
         </p:nvSpPr>
         <p:spPr>
           <a:xfrm>
-            <a:off x="6473952" y="1664208"/>
-            <a:ext cx="4791456" cy="4169664"/>
+            <a:off x="1133856" y="3941796"/>
+            <a:ext cx="9820656" cy="839785"/>
           </a:xfrm>
           <a:prstGeom prst="rect">
             <a:avLst/>
@@ -4211,7 +4448,7 @@
           <a:ln/>
         </p:spPr>
         <p:txBody>
-          <a:bodyPr wrap="square" lIns="0" tIns="25400" rIns="25400" bIns="0" rtlCol="0" anchor="t"/>
+          <a:bodyPr wrap="square" lIns="0" tIns="25400" rIns="25400" bIns="0" rtlCol="0" anchor="ctr"/>
           <a:lstStyle/>
           <a:p>
             <a:pPr algn="l" indent="0" marL="0">
@@ -4229,7 +4466,7 @@
                 <a:ea typeface="Pretendard" pitchFamily="34" charset="-122"/>
                 <a:cs typeface="Pretendard" pitchFamily="34" charset="-120"/>
               </a:rPr>
-              <a:t>- Emphasis</a:t>
+              <a:t>Emphasis</a:t>
             </a:r>
             <a:pPr algn="l" indent="0" marL="0">
               <a:lnSpc>
@@ -4444,34 +4681,7 @@
       </p:sp>
       <p:sp>
         <p:nvSpPr>
-          <p:cNvPr id="7" name="Shape 5"/>
-          <p:cNvSpPr/>
-          <p:nvPr/>
-        </p:nvSpPr>
-        <p:spPr>
-          <a:xfrm>
-            <a:off x="731520" y="1207008"/>
-            <a:ext cx="1325880" cy="54864"/>
-          </a:xfrm>
-          <a:prstGeom prst="rect">
-            <a:avLst/>
-          </a:prstGeom>
-          <a:solidFill>
-            <a:srgbClr val="4F6F8F"/>
-          </a:solidFill>
-          <a:ln w="12700">
-            <a:solidFill>
-              <a:srgbClr val="4F6F8F">
-                <a:alpha val="0"/>
-              </a:srgbClr>
-            </a:solidFill>
-            <a:prstDash val="solid"/>
-          </a:ln>
-        </p:spPr>
-      </p:sp>
-      <p:sp>
-        <p:nvSpPr>
-          <p:cNvPr id="8" name="mdpr:pipeline-diagram-51792c:title:__title:pipeline-diagram-51792c"/>
+          <p:cNvPr id="7" name="mdpr:pipeline-diagram-51792c:title:__title:pipeline-diagram-51792c"/>
           <p:cNvSpPr txBox="1"/>
           <p:nvPr/>
         </p:nvSpPr>
@@ -4513,7 +4723,7 @@
       </p:sp>
       <p:sp>
         <p:nvSpPr>
-          <p:cNvPr id="9" name="Shape 7"/>
+          <p:cNvPr id="8" name="Shape 6"/>
           <p:cNvSpPr/>
           <p:nvPr/>
         </p:nvSpPr>
@@ -4537,7 +4747,7 @@
       </p:sp>
       <p:sp>
         <p:nvSpPr>
-          <p:cNvPr id="10" name="Shape 8"/>
+          <p:cNvPr id="9" name="Shape 7"/>
           <p:cNvSpPr/>
           <p:nvPr/>
         </p:nvSpPr>
@@ -4561,7 +4771,7 @@
       </p:sp>
       <p:sp>
         <p:nvSpPr>
-          <p:cNvPr id="11" name="Shape 9"/>
+          <p:cNvPr id="10" name="Shape 8"/>
           <p:cNvSpPr/>
           <p:nvPr/>
         </p:nvSpPr>
@@ -4585,7 +4795,7 @@
       </p:sp>
       <p:sp>
         <p:nvSpPr>
-          <p:cNvPr id="12" name="Shape 10"/>
+          <p:cNvPr id="11" name="Shape 9"/>
           <p:cNvSpPr/>
           <p:nvPr/>
         </p:nvSpPr>
@@ -4609,7 +4819,7 @@
       </p:sp>
       <p:sp>
         <p:nvSpPr>
-          <p:cNvPr id="13" name="Shape 11"/>
+          <p:cNvPr id="12" name="Shape 10"/>
           <p:cNvSpPr/>
           <p:nvPr/>
         </p:nvSpPr>
@@ -4633,7 +4843,7 @@
       </p:sp>
       <p:sp>
         <p:nvSpPr>
-          <p:cNvPr id="14" name="Shape 12"/>
+          <p:cNvPr id="13" name="Shape 11"/>
           <p:cNvSpPr/>
           <p:nvPr/>
         </p:nvSpPr>
@@ -4667,7 +4877,7 @@
       </p:sp>
       <p:sp>
         <p:nvSpPr>
-          <p:cNvPr id="15" name="Shape 13"/>
+          <p:cNvPr id="14" name="Shape 12"/>
           <p:cNvSpPr/>
           <p:nvPr/>
         </p:nvSpPr>
@@ -4694,7 +4904,7 @@
       </p:sp>
       <p:sp>
         <p:nvSpPr>
-          <p:cNvPr id="16" name="Shape 14"/>
+          <p:cNvPr id="15" name="Shape 13"/>
           <p:cNvSpPr/>
           <p:nvPr/>
         </p:nvSpPr>
@@ -4721,7 +4931,7 @@
       </p:sp>
       <p:sp>
         <p:nvSpPr>
-          <p:cNvPr id="17" name="Text 15"/>
+          <p:cNvPr id="16" name="Text 14"/>
           <p:cNvSpPr txBox="1"/>
           <p:nvPr/>
         </p:nvSpPr>
@@ -4749,7 +4959,7 @@
               <a:buNone/>
             </a:pPr>
             <a:r>
-              <a:rPr lang="en-US" sz="1500" b="1" dirty="0">
+              <a:rPr lang="en-US" sz="1600" b="1" dirty="0">
                 <a:solidFill>
                   <a:srgbClr val="E9EEF5"/>
                 </a:solidFill>
@@ -4759,13 +4969,13 @@
               </a:rPr>
               <a:t>1</a:t>
             </a:r>
-            <a:endParaRPr lang="en-US" sz="1500" dirty="0"/>
+            <a:endParaRPr lang="en-US" sz="1600" dirty="0"/>
           </a:p>
         </p:txBody>
       </p:sp>
       <p:sp>
         <p:nvSpPr>
-          <p:cNvPr id="18" name="Text 16"/>
+          <p:cNvPr id="17" name="Text 15"/>
           <p:cNvSpPr txBox="1"/>
           <p:nvPr/>
         </p:nvSpPr>
@@ -4809,7 +5019,7 @@
       </p:sp>
       <p:sp>
         <p:nvSpPr>
-          <p:cNvPr id="19" name="Shape 17"/>
+          <p:cNvPr id="18" name="Shape 16"/>
           <p:cNvSpPr/>
           <p:nvPr/>
         </p:nvSpPr>
@@ -4843,7 +5053,7 @@
       </p:sp>
       <p:sp>
         <p:nvSpPr>
-          <p:cNvPr id="20" name="Shape 18"/>
+          <p:cNvPr id="19" name="Shape 17"/>
           <p:cNvSpPr/>
           <p:nvPr/>
         </p:nvSpPr>
@@ -4870,7 +5080,7 @@
       </p:sp>
       <p:sp>
         <p:nvSpPr>
-          <p:cNvPr id="21" name="Shape 19"/>
+          <p:cNvPr id="20" name="Shape 18"/>
           <p:cNvSpPr/>
           <p:nvPr/>
         </p:nvSpPr>
@@ -4897,7 +5107,7 @@
       </p:sp>
       <p:sp>
         <p:nvSpPr>
-          <p:cNvPr id="22" name="Text 20"/>
+          <p:cNvPr id="21" name="Text 19"/>
           <p:cNvSpPr txBox="1"/>
           <p:nvPr/>
         </p:nvSpPr>
@@ -4925,7 +5135,7 @@
               <a:buNone/>
             </a:pPr>
             <a:r>
-              <a:rPr lang="en-US" sz="1500" b="1" dirty="0">
+              <a:rPr lang="en-US" sz="1600" b="1" dirty="0">
                 <a:solidFill>
                   <a:srgbClr val="E9EEF5"/>
                 </a:solidFill>
@@ -4935,13 +5145,13 @@
               </a:rPr>
               <a:t>2</a:t>
             </a:r>
-            <a:endParaRPr lang="en-US" sz="1500" dirty="0"/>
+            <a:endParaRPr lang="en-US" sz="1600" dirty="0"/>
           </a:p>
         </p:txBody>
       </p:sp>
       <p:sp>
         <p:nvSpPr>
-          <p:cNvPr id="23" name="Text 21"/>
+          <p:cNvPr id="22" name="Text 20"/>
           <p:cNvSpPr txBox="1"/>
           <p:nvPr/>
         </p:nvSpPr>
@@ -4985,7 +5195,7 @@
       </p:sp>
       <p:sp>
         <p:nvSpPr>
-          <p:cNvPr id="24" name="Shape 22"/>
+          <p:cNvPr id="23" name="Shape 21"/>
           <p:cNvSpPr/>
           <p:nvPr/>
         </p:nvSpPr>
@@ -5019,7 +5229,7 @@
       </p:sp>
       <p:sp>
         <p:nvSpPr>
-          <p:cNvPr id="25" name="Shape 23"/>
+          <p:cNvPr id="24" name="Shape 22"/>
           <p:cNvSpPr/>
           <p:nvPr/>
         </p:nvSpPr>
@@ -5046,7 +5256,7 @@
       </p:sp>
       <p:sp>
         <p:nvSpPr>
-          <p:cNvPr id="26" name="Shape 24"/>
+          <p:cNvPr id="25" name="Shape 23"/>
           <p:cNvSpPr/>
           <p:nvPr/>
         </p:nvSpPr>
@@ -5073,7 +5283,7 @@
       </p:sp>
       <p:sp>
         <p:nvSpPr>
-          <p:cNvPr id="27" name="Text 25"/>
+          <p:cNvPr id="26" name="Text 24"/>
           <p:cNvSpPr txBox="1"/>
           <p:nvPr/>
         </p:nvSpPr>
@@ -5101,7 +5311,7 @@
               <a:buNone/>
             </a:pPr>
             <a:r>
-              <a:rPr lang="en-US" sz="1500" b="1" dirty="0">
+              <a:rPr lang="en-US" sz="1600" b="1" dirty="0">
                 <a:solidFill>
                   <a:srgbClr val="E9EEF5"/>
                 </a:solidFill>
@@ -5111,13 +5321,13 @@
               </a:rPr>
               <a:t>3</a:t>
             </a:r>
-            <a:endParaRPr lang="en-US" sz="1500" dirty="0"/>
+            <a:endParaRPr lang="en-US" sz="1600" dirty="0"/>
           </a:p>
         </p:txBody>
       </p:sp>
       <p:sp>
         <p:nvSpPr>
-          <p:cNvPr id="28" name="Text 26"/>
+          <p:cNvPr id="27" name="Text 25"/>
           <p:cNvSpPr txBox="1"/>
           <p:nvPr/>
         </p:nvSpPr>
@@ -5161,7 +5371,7 @@
       </p:sp>
       <p:sp>
         <p:nvSpPr>
-          <p:cNvPr id="29" name="Shape 27"/>
+          <p:cNvPr id="28" name="Shape 26"/>
           <p:cNvSpPr/>
           <p:nvPr/>
         </p:nvSpPr>
@@ -5195,7 +5405,7 @@
       </p:sp>
       <p:sp>
         <p:nvSpPr>
-          <p:cNvPr id="30" name="Shape 28"/>
+          <p:cNvPr id="29" name="Shape 27"/>
           <p:cNvSpPr/>
           <p:nvPr/>
         </p:nvSpPr>
@@ -5222,7 +5432,7 @@
       </p:sp>
       <p:sp>
         <p:nvSpPr>
-          <p:cNvPr id="31" name="Shape 29"/>
+          <p:cNvPr id="30" name="Shape 28"/>
           <p:cNvSpPr/>
           <p:nvPr/>
         </p:nvSpPr>
@@ -5249,7 +5459,7 @@
       </p:sp>
       <p:sp>
         <p:nvSpPr>
-          <p:cNvPr id="32" name="Text 30"/>
+          <p:cNvPr id="31" name="Text 29"/>
           <p:cNvSpPr txBox="1"/>
           <p:nvPr/>
         </p:nvSpPr>
@@ -5277,7 +5487,7 @@
               <a:buNone/>
             </a:pPr>
             <a:r>
-              <a:rPr lang="en-US" sz="1500" b="1" dirty="0">
+              <a:rPr lang="en-US" sz="1600" b="1" dirty="0">
                 <a:solidFill>
                   <a:srgbClr val="E9EEF5"/>
                 </a:solidFill>
@@ -5287,13 +5497,13 @@
               </a:rPr>
               <a:t>4</a:t>
             </a:r>
-            <a:endParaRPr lang="en-US" sz="1500" dirty="0"/>
+            <a:endParaRPr lang="en-US" sz="1600" dirty="0"/>
           </a:p>
         </p:txBody>
       </p:sp>
       <p:sp>
         <p:nvSpPr>
-          <p:cNvPr id="33" name="Text 31"/>
+          <p:cNvPr id="32" name="Text 30"/>
           <p:cNvSpPr txBox="1"/>
           <p:nvPr/>
         </p:nvSpPr>
@@ -5337,7 +5547,7 @@
       </p:sp>
       <p:sp>
         <p:nvSpPr>
-          <p:cNvPr id="34" name="Shape 32"/>
+          <p:cNvPr id="33" name="Shape 31"/>
           <p:cNvSpPr/>
           <p:nvPr/>
         </p:nvSpPr>
@@ -5371,7 +5581,7 @@
       </p:sp>
       <p:sp>
         <p:nvSpPr>
-          <p:cNvPr id="35" name="Shape 33"/>
+          <p:cNvPr id="34" name="Shape 32"/>
           <p:cNvSpPr/>
           <p:nvPr/>
         </p:nvSpPr>
@@ -5398,7 +5608,7 @@
       </p:sp>
       <p:sp>
         <p:nvSpPr>
-          <p:cNvPr id="36" name="Shape 34"/>
+          <p:cNvPr id="35" name="Shape 33"/>
           <p:cNvSpPr/>
           <p:nvPr/>
         </p:nvSpPr>
@@ -5425,7 +5635,7 @@
       </p:sp>
       <p:sp>
         <p:nvSpPr>
-          <p:cNvPr id="37" name="Text 35"/>
+          <p:cNvPr id="36" name="Text 34"/>
           <p:cNvSpPr txBox="1"/>
           <p:nvPr/>
         </p:nvSpPr>
@@ -5453,7 +5663,7 @@
               <a:buNone/>
             </a:pPr>
             <a:r>
-              <a:rPr lang="en-US" sz="1500" b="1" dirty="0">
+              <a:rPr lang="en-US" sz="1600" b="1" dirty="0">
                 <a:solidFill>
                   <a:srgbClr val="E9EEF5"/>
                 </a:solidFill>
@@ -5463,13 +5673,13 @@
               </a:rPr>
               <a:t>5</a:t>
             </a:r>
-            <a:endParaRPr lang="en-US" sz="1500" dirty="0"/>
+            <a:endParaRPr lang="en-US" sz="1600" dirty="0"/>
           </a:p>
         </p:txBody>
       </p:sp>
       <p:sp>
         <p:nvSpPr>
-          <p:cNvPr id="38" name="Text 36"/>
+          <p:cNvPr id="37" name="Text 35"/>
           <p:cNvSpPr txBox="1"/>
           <p:nvPr/>
         </p:nvSpPr>
@@ -5513,7 +5723,7 @@
       </p:sp>
       <p:sp>
         <p:nvSpPr>
-          <p:cNvPr id="39" name="Shape 37"/>
+          <p:cNvPr id="38" name="Shape 36"/>
           <p:cNvSpPr/>
           <p:nvPr/>
         </p:nvSpPr>
@@ -5547,7 +5757,7 @@
       </p:sp>
       <p:sp>
         <p:nvSpPr>
-          <p:cNvPr id="40" name="Shape 38"/>
+          <p:cNvPr id="39" name="Shape 37"/>
           <p:cNvSpPr/>
           <p:nvPr/>
         </p:nvSpPr>
@@ -5574,7 +5784,7 @@
       </p:sp>
       <p:sp>
         <p:nvSpPr>
-          <p:cNvPr id="41" name="Shape 39"/>
+          <p:cNvPr id="40" name="Shape 38"/>
           <p:cNvSpPr/>
           <p:nvPr/>
         </p:nvSpPr>
@@ -5601,7 +5811,7 @@
       </p:sp>
       <p:sp>
         <p:nvSpPr>
-          <p:cNvPr id="42" name="Text 40"/>
+          <p:cNvPr id="41" name="Text 39"/>
           <p:cNvSpPr txBox="1"/>
           <p:nvPr/>
         </p:nvSpPr>
@@ -5629,7 +5839,7 @@
               <a:buNone/>
             </a:pPr>
             <a:r>
-              <a:rPr lang="en-US" sz="1500" b="1" dirty="0">
+              <a:rPr lang="en-US" sz="1600" b="1" dirty="0">
                 <a:solidFill>
                   <a:srgbClr val="E9EEF5"/>
                 </a:solidFill>
@@ -5639,13 +5849,13 @@
               </a:rPr>
               <a:t>6</a:t>
             </a:r>
-            <a:endParaRPr lang="en-US" sz="1500" dirty="0"/>
+            <a:endParaRPr lang="en-US" sz="1600" dirty="0"/>
           </a:p>
         </p:txBody>
       </p:sp>
       <p:sp>
         <p:nvSpPr>
-          <p:cNvPr id="43" name="Text 41"/>
+          <p:cNvPr id="42" name="Text 40"/>
           <p:cNvSpPr txBox="1"/>
           <p:nvPr/>
         </p:nvSpPr>
@@ -5879,88 +6089,7 @@
       </p:sp>
       <p:sp>
         <p:nvSpPr>
-          <p:cNvPr id="7" name="Shape 5"/>
-          <p:cNvSpPr/>
-          <p:nvPr/>
-        </p:nvSpPr>
-        <p:spPr>
-          <a:xfrm>
-            <a:off x="731520" y="1207008"/>
-            <a:ext cx="1325880" cy="54864"/>
-          </a:xfrm>
-          <a:prstGeom prst="rect">
-            <a:avLst/>
-          </a:prstGeom>
-          <a:solidFill>
-            <a:srgbClr val="4F6F8F"/>
-          </a:solidFill>
-          <a:ln w="12700">
-            <a:solidFill>
-              <a:srgbClr val="4F6F8F">
-                <a:alpha val="0"/>
-              </a:srgbClr>
-            </a:solidFill>
-            <a:prstDash val="solid"/>
-          </a:ln>
-        </p:spPr>
-      </p:sp>
-      <p:sp>
-        <p:nvSpPr>
-          <p:cNvPr id="8" name="Shape 6"/>
-          <p:cNvSpPr/>
-          <p:nvPr/>
-        </p:nvSpPr>
-        <p:spPr>
-          <a:xfrm>
-            <a:off x="822960" y="1389888"/>
-            <a:ext cx="4937760" cy="73152"/>
-          </a:xfrm>
-          <a:prstGeom prst="rect">
-            <a:avLst/>
-          </a:prstGeom>
-          <a:solidFill>
-            <a:srgbClr val="4F6F8F"/>
-          </a:solidFill>
-          <a:ln w="12700">
-            <a:solidFill>
-              <a:srgbClr val="4F6F8F">
-                <a:alpha val="0"/>
-              </a:srgbClr>
-            </a:solidFill>
-            <a:prstDash val="solid"/>
-          </a:ln>
-        </p:spPr>
-      </p:sp>
-      <p:sp>
-        <p:nvSpPr>
-          <p:cNvPr id="9" name="Shape 7"/>
-          <p:cNvSpPr/>
-          <p:nvPr/>
-        </p:nvSpPr>
-        <p:spPr>
-          <a:xfrm>
-            <a:off x="6400800" y="1389888"/>
-            <a:ext cx="4937760" cy="73152"/>
-          </a:xfrm>
-          <a:prstGeom prst="rect">
-            <a:avLst/>
-          </a:prstGeom>
-          <a:solidFill>
-            <a:srgbClr val="4F6F8F"/>
-          </a:solidFill>
-          <a:ln w="12700">
-            <a:solidFill>
-              <a:srgbClr val="4F6F8F">
-                <a:alpha val="0"/>
-              </a:srgbClr>
-            </a:solidFill>
-            <a:prstDash val="solid"/>
-          </a:ln>
-        </p:spPr>
-      </p:sp>
-      <p:sp>
-        <p:nvSpPr>
-          <p:cNvPr id="10" name="mdpr:1-2-e3669a:title:__title:1-2-e3669a"/>
+          <p:cNvPr id="7" name="mdpr:1-2-e3669a:title:__title:1-2-e3669a"/>
           <p:cNvSpPr txBox="1"/>
           <p:nvPr/>
         </p:nvSpPr>
@@ -6002,14 +6131,14 @@
       </p:sp>
       <p:sp>
         <p:nvSpPr>
-          <p:cNvPr id="11" name="mdpr:1-2-e3669a:left:block-15-chunk-1-block-15-chunk-1"/>
+          <p:cNvPr id="8" name="mdpr:1-2-e3669a:left:block-15-chunk-1-block-15-chunk-1"/>
           <p:cNvSpPr txBox="1"/>
           <p:nvPr/>
         </p:nvSpPr>
         <p:spPr>
           <a:xfrm>
-            <a:off x="896112" y="1499616"/>
-            <a:ext cx="4791456" cy="4398264"/>
+            <a:off x="896112" y="1463040"/>
+            <a:ext cx="4791456" cy="4261104"/>
           </a:xfrm>
           <a:prstGeom prst="rect">
             <a:avLst/>
@@ -6101,14 +6230,14 @@
       </p:sp>
       <p:sp>
         <p:nvSpPr>
-          <p:cNvPr id="12" name="mdpr:1-2-e3669a:right:block-15-chunk-1-block-15-chunk-1"/>
+          <p:cNvPr id="9" name="mdpr:1-2-e3669a:right:block-15-chunk-1"/>
           <p:cNvSpPr txBox="1"/>
           <p:nvPr/>
         </p:nvSpPr>
         <p:spPr>
           <a:xfrm>
-            <a:off x="6473952" y="1499616"/>
-            <a:ext cx="4791456" cy="4398264"/>
+            <a:off x="6473952" y="1463040"/>
+            <a:ext cx="4791456" cy="4261104"/>
           </a:xfrm>
           <a:prstGeom prst="rect">
             <a:avLst/>
@@ -6156,46 +6285,6 @@
             </a:r>
             <a:endParaRPr lang="en-US" sz="1800" dirty="0"/>
           </a:p>
-          <a:p>
-            <a:pPr algn="l" indent="0" marL="0">
-              <a:lnSpc>
-                <a:spcPct val="120000"/>
-              </a:lnSpc>
-              <a:buNone/>
-            </a:pPr>
-            <a:r>
-              <a:rPr lang="en-US" sz="1800" b="1" dirty="0">
-                <a:solidFill>
-                  <a:srgbClr val="4F6F8F"/>
-                </a:solidFill>
-                <a:latin typeface="Pretendard" pitchFamily="34" charset="0"/>
-                <a:ea typeface="Pretendard" pitchFamily="34" charset="-122"/>
-                <a:cs typeface="Pretendard" pitchFamily="34" charset="-120"/>
-              </a:rPr>
-              <a:t>- Connectors</a:t>
-            </a:r>
-            <a:endParaRPr lang="en-US" sz="1800" dirty="0"/>
-          </a:p>
-          <a:p>
-            <a:pPr algn="l" indent="0" marL="0">
-              <a:lnSpc>
-                <a:spcPct val="120000"/>
-              </a:lnSpc>
-              <a:buNone/>
-            </a:pPr>
-            <a:r>
-              <a:rPr lang="en-US" sz="1800" dirty="0">
-                <a:solidFill>
-                  <a:srgbClr val="111111"/>
-                </a:solidFill>
-                <a:latin typeface="Pretendard" pitchFamily="34" charset="0"/>
-                <a:ea typeface="Pretendard" pitchFamily="34" charset="-122"/>
-                <a:cs typeface="Pretendard" pitchFamily="34" charset="-120"/>
-              </a:rPr>
-              <a:t>  straight-arrow, elbow-arrow, boundary-attach, overlap-joint, parallel-flow, contrast-flow.</a:t>
-            </a:r>
-            <a:endParaRPr lang="en-US" sz="1800" dirty="0"/>
-          </a:p>
         </p:txBody>
       </p:sp>
     </p:spTree>
@@ -6390,88 +6479,7 @@
       </p:sp>
       <p:sp>
         <p:nvSpPr>
-          <p:cNvPr id="7" name="Shape 5"/>
-          <p:cNvSpPr/>
-          <p:nvPr/>
-        </p:nvSpPr>
-        <p:spPr>
-          <a:xfrm>
-            <a:off x="731520" y="1207008"/>
-            <a:ext cx="1325880" cy="54864"/>
-          </a:xfrm>
-          <a:prstGeom prst="rect">
-            <a:avLst/>
-          </a:prstGeom>
-          <a:solidFill>
-            <a:srgbClr val="4F6F8F"/>
-          </a:solidFill>
-          <a:ln w="12700">
-            <a:solidFill>
-              <a:srgbClr val="4F6F8F">
-                <a:alpha val="0"/>
-              </a:srgbClr>
-            </a:solidFill>
-            <a:prstDash val="solid"/>
-          </a:ln>
-        </p:spPr>
-      </p:sp>
-      <p:sp>
-        <p:nvSpPr>
-          <p:cNvPr id="8" name="Shape 6"/>
-          <p:cNvSpPr/>
-          <p:nvPr/>
-        </p:nvSpPr>
-        <p:spPr>
-          <a:xfrm>
-            <a:off x="822960" y="1554480"/>
-            <a:ext cx="4937760" cy="73152"/>
-          </a:xfrm>
-          <a:prstGeom prst="rect">
-            <a:avLst/>
-          </a:prstGeom>
-          <a:solidFill>
-            <a:srgbClr val="4F6F8F"/>
-          </a:solidFill>
-          <a:ln w="12700">
-            <a:solidFill>
-              <a:srgbClr val="4F6F8F">
-                <a:alpha val="0"/>
-              </a:srgbClr>
-            </a:solidFill>
-            <a:prstDash val="solid"/>
-          </a:ln>
-        </p:spPr>
-      </p:sp>
-      <p:sp>
-        <p:nvSpPr>
-          <p:cNvPr id="9" name="Shape 7"/>
-          <p:cNvSpPr/>
-          <p:nvPr/>
-        </p:nvSpPr>
-        <p:spPr>
-          <a:xfrm>
-            <a:off x="6400800" y="1554480"/>
-            <a:ext cx="4937760" cy="73152"/>
-          </a:xfrm>
-          <a:prstGeom prst="rect">
-            <a:avLst/>
-          </a:prstGeom>
-          <a:solidFill>
-            <a:srgbClr val="4F6F8F"/>
-          </a:solidFill>
-          <a:ln w="12700">
-            <a:solidFill>
-              <a:srgbClr val="4F6F8F">
-                <a:alpha val="0"/>
-              </a:srgbClr>
-            </a:solidFill>
-            <a:prstDash val="solid"/>
-          </a:ln>
-        </p:spPr>
-      </p:sp>
-      <p:sp>
-        <p:nvSpPr>
-          <p:cNvPr id="10" name="mdpr:2-2-c23e9b:title:__title:2-2-c23e9b"/>
+          <p:cNvPr id="7" name="mdpr:2-2-c23e9b:title:__title:2-2-c23e9b"/>
           <p:cNvSpPr txBox="1"/>
           <p:nvPr/>
         </p:nvSpPr>
@@ -6505,7 +6513,24 @@
                 <a:ea typeface="Pretendard" pitchFamily="34" charset="-122"/>
                 <a:cs typeface="Pretendard" pitchFamily="34" charset="-120"/>
               </a:rPr>
-              <a:t>Decoration Pattern Catalog (Cont. 2/2)</a:t>
+              <a:t>Decoration Pattern Catalog</a:t>
+            </a:r>
+            <a:pPr algn="ctr" indent="0" marL="0">
+              <a:lnSpc>
+                <a:spcPct val="120000"/>
+              </a:lnSpc>
+              <a:buNone/>
+            </a:pPr>
+            <a:r>
+              <a:rPr lang="en-US" sz="2000" dirty="0">
+                <a:solidFill>
+                  <a:srgbClr val="898989"/>
+                </a:solidFill>
+                <a:latin typeface="Pretendard" pitchFamily="34" charset="0"/>
+                <a:ea typeface="Pretendard" pitchFamily="34" charset="-122"/>
+                <a:cs typeface="Pretendard" pitchFamily="34" charset="-120"/>
+              </a:rPr>
+              <a:t> (Cont. 2/2)</a:t>
             </a:r>
             <a:endParaRPr lang="en-US" sz="3400" dirty="0"/>
           </a:p>
@@ -6513,14 +6538,14 @@
       </p:sp>
       <p:sp>
         <p:nvSpPr>
-          <p:cNvPr id="11" name="mdpr:2-2-c23e9b:left:block-15-chunk-2"/>
+          <p:cNvPr id="8" name="mdpr:2-2-c23e9b:left:block-15-chunk-2-block-15-chunk-2"/>
           <p:cNvSpPr txBox="1"/>
           <p:nvPr/>
         </p:nvSpPr>
         <p:spPr>
           <a:xfrm>
-            <a:off x="896112" y="1664208"/>
-            <a:ext cx="4791456" cy="4169664"/>
+            <a:off x="896112" y="1463040"/>
+            <a:ext cx="4791456" cy="4261104"/>
           </a:xfrm>
           <a:prstGeom prst="rect">
             <a:avLst/>
@@ -6539,7 +6564,44 @@
               <a:buNone/>
             </a:pPr>
             <a:r>
-              <a:rPr lang="en-US" sz="2200" b="1" dirty="0">
+              <a:rPr lang="en-US" sz="1800" b="1" dirty="0">
+                <a:solidFill>
+                  <a:srgbClr val="4F6F8F"/>
+                </a:solidFill>
+                <a:latin typeface="Pretendard" pitchFamily="34" charset="0"/>
+                <a:ea typeface="Pretendard" pitchFamily="34" charset="-122"/>
+                <a:cs typeface="Pretendard" pitchFamily="34" charset="-120"/>
+              </a:rPr>
+              <a:t>- Connectors</a:t>
+            </a:r>
+            <a:pPr algn="l" indent="0" marL="0">
+              <a:lnSpc>
+                <a:spcPct val="120000"/>
+              </a:lnSpc>
+              <a:buNone/>
+            </a:pPr>
+            <a:r>
+              <a:rPr lang="en-US" sz="1800" dirty="0">
+                <a:solidFill>
+                  <a:srgbClr val="111111"/>
+                </a:solidFill>
+                <a:latin typeface="Pretendard" pitchFamily="34" charset="0"/>
+                <a:ea typeface="Pretendard" pitchFamily="34" charset="-122"/>
+                <a:cs typeface="Pretendard" pitchFamily="34" charset="-120"/>
+              </a:rPr>
+              <a:t>  straight-arrow, elbow-arrow, boundary-attach, overlap-joint, parallel-flow, contrast-flow.</a:t>
+            </a:r>
+            <a:endParaRPr lang="en-US" sz="1800" dirty="0"/>
+          </a:p>
+          <a:p>
+            <a:pPr algn="l" indent="0" marL="0">
+              <a:lnSpc>
+                <a:spcPct val="120000"/>
+              </a:lnSpc>
+              <a:buNone/>
+            </a:pPr>
+            <a:r>
+              <a:rPr lang="en-US" sz="1800" b="1" dirty="0">
                 <a:solidFill>
                   <a:srgbClr val="4F6F8F"/>
                 </a:solidFill>
@@ -6549,6 +6611,9 @@
               </a:rPr>
               <a:t>- Icons</a:t>
             </a:r>
+            <a:endParaRPr lang="en-US" sz="1800" dirty="0"/>
+          </a:p>
+          <a:p>
             <a:pPr algn="l" indent="0" marL="0">
               <a:lnSpc>
                 <a:spcPct val="120000"/>
@@ -6556,7 +6621,7 @@
               <a:buNone/>
             </a:pPr>
             <a:r>
-              <a:rPr lang="en-US" sz="2200" dirty="0">
+              <a:rPr lang="en-US" sz="1800" dirty="0">
                 <a:solidFill>
                   <a:srgbClr val="111111"/>
                 </a:solidFill>
@@ -6566,20 +6631,20 @@
               </a:rPr>
               <a:t>  number-badge, mono-icon-slot, letter-disc, quiet-aside, image-safe-frame, brand-glyph.</a:t>
             </a:r>
-            <a:endParaRPr lang="en-US" sz="2200" dirty="0"/>
+            <a:endParaRPr lang="en-US" sz="1800" dirty="0"/>
           </a:p>
         </p:txBody>
       </p:sp>
       <p:sp>
         <p:nvSpPr>
-          <p:cNvPr id="12" name="mdpr:2-2-c23e9b:right:block-15-chunk-2"/>
+          <p:cNvPr id="9" name="mdpr:2-2-c23e9b:right:block-15-chunk-2"/>
           <p:cNvSpPr txBox="1"/>
           <p:nvPr/>
         </p:nvSpPr>
         <p:spPr>
           <a:xfrm>
-            <a:off x="6473952" y="1664208"/>
-            <a:ext cx="4791456" cy="4169664"/>
+            <a:off x="6473952" y="1463040"/>
+            <a:ext cx="4791456" cy="4261104"/>
           </a:xfrm>
           <a:prstGeom prst="rect">
             <a:avLst/>
@@ -6598,7 +6663,7 @@
               <a:buNone/>
             </a:pPr>
             <a:r>
-              <a:rPr lang="en-US" sz="2200" b="1" dirty="0">
+              <a:rPr lang="en-US" sz="1800" b="1" dirty="0">
                 <a:solidFill>
                   <a:srgbClr val="4F6F8F"/>
                 </a:solidFill>
@@ -6615,7 +6680,7 @@
               <a:buNone/>
             </a:pPr>
             <a:r>
-              <a:rPr lang="en-US" sz="2200" dirty="0">
+              <a:rPr lang="en-US" sz="1800" dirty="0">
                 <a:solidFill>
                   <a:srgbClr val="111111"/>
                 </a:solidFill>
@@ -6625,7 +6690,7 @@
               </a:rPr>
               <a:t>  skeuomorphic-bevel, glassmorphism-surface, newmorphic-panel, clay-blob, bento-tile, liquid-lens.</a:t>
             </a:r>
-            <a:endParaRPr lang="en-US" sz="2200" dirty="0"/>
+            <a:endParaRPr lang="en-US" sz="1800" dirty="0"/>
           </a:p>
         </p:txBody>
       </p:sp>
@@ -6827,33 +6892,6 @@
         </p:nvSpPr>
         <p:spPr>
           <a:xfrm>
-            <a:off x="731520" y="1207008"/>
-            <a:ext cx="1325880" cy="54864"/>
-          </a:xfrm>
-          <a:prstGeom prst="rect">
-            <a:avLst/>
-          </a:prstGeom>
-          <a:solidFill>
-            <a:srgbClr val="4F6F8F"/>
-          </a:solidFill>
-          <a:ln w="12700">
-            <a:solidFill>
-              <a:srgbClr val="4F6F8F">
-                <a:alpha val="0"/>
-              </a:srgbClr>
-            </a:solidFill>
-            <a:prstDash val="solid"/>
-          </a:ln>
-        </p:spPr>
-      </p:sp>
-      <p:sp>
-        <p:nvSpPr>
-          <p:cNvPr id="8" name="Shape 6"/>
-          <p:cNvSpPr/>
-          <p:nvPr/>
-        </p:nvSpPr>
-        <p:spPr>
-          <a:xfrm>
             <a:off x="955548" y="1467612"/>
             <a:ext cx="10241280" cy="4526280"/>
           </a:xfrm>
@@ -6886,7 +6924,7 @@
       </p:sp>
       <p:sp>
         <p:nvSpPr>
-          <p:cNvPr id="9" name="Shape 7"/>
+          <p:cNvPr id="8" name="Shape 6"/>
           <p:cNvSpPr/>
           <p:nvPr/>
         </p:nvSpPr>
@@ -6924,7 +6962,7 @@
       </p:sp>
       <p:sp>
         <p:nvSpPr>
-          <p:cNvPr id="10" name="Shape 8"/>
+          <p:cNvPr id="9" name="Shape 7"/>
           <p:cNvSpPr/>
           <p:nvPr/>
         </p:nvSpPr>
@@ -6955,7 +6993,7 @@
       </p:sp>
       <p:pic>
         <p:nvPicPr>
-          <p:cNvPr id="11" name="Image 0" descr="preencoded.png">    </p:cNvPr>
+          <p:cNvPr id="10" name="Image 0" descr="preencoded.png">    </p:cNvPr>
           <p:cNvPicPr>
             <a:picLocks noChangeAspect="1"/>
           </p:cNvPicPr>
@@ -6985,7 +7023,7 @@
       </p:pic>
       <p:sp>
         <p:nvSpPr>
-          <p:cNvPr id="12" name="mdpr:table-coherence-2f9a7b:title:__title:table-coherence-2f9a7b"/>
+          <p:cNvPr id="11" name="mdpr:table-coherence-2f9a7b:title:__title:table-coherence-2f9a7b"/>
           <p:cNvSpPr txBox="1"/>
           <p:nvPr/>
         </p:nvSpPr>
@@ -8278,33 +8316,6 @@
         </p:nvSpPr>
         <p:spPr>
           <a:xfrm>
-            <a:off x="731520" y="1207008"/>
-            <a:ext cx="1325880" cy="54864"/>
-          </a:xfrm>
-          <a:prstGeom prst="rect">
-            <a:avLst/>
-          </a:prstGeom>
-          <a:solidFill>
-            <a:srgbClr val="4F6F8F"/>
-          </a:solidFill>
-          <a:ln w="12700">
-            <a:solidFill>
-              <a:srgbClr val="4F6F8F">
-                <a:alpha val="0"/>
-              </a:srgbClr>
-            </a:solidFill>
-            <a:prstDash val="solid"/>
-          </a:ln>
-        </p:spPr>
-      </p:sp>
-      <p:sp>
-        <p:nvSpPr>
-          <p:cNvPr id="8" name="Shape 6"/>
-          <p:cNvSpPr/>
-          <p:nvPr/>
-        </p:nvSpPr>
-        <p:spPr>
-          <a:xfrm>
             <a:off x="4997196" y="1476756"/>
             <a:ext cx="6199632" cy="4407408"/>
           </a:xfrm>
@@ -8337,7 +8348,7 @@
       </p:sp>
       <p:sp>
         <p:nvSpPr>
-          <p:cNvPr id="9" name="Shape 7"/>
+          <p:cNvPr id="8" name="Shape 6"/>
           <p:cNvSpPr/>
           <p:nvPr/>
         </p:nvSpPr>
@@ -8375,7 +8386,7 @@
       </p:sp>
       <p:sp>
         <p:nvSpPr>
-          <p:cNvPr id="10" name="Shape 8"/>
+          <p:cNvPr id="9" name="Shape 7"/>
           <p:cNvSpPr/>
           <p:nvPr/>
         </p:nvSpPr>
@@ -8406,7 +8417,7 @@
       </p:sp>
       <p:pic>
         <p:nvPicPr>
-          <p:cNvPr id="11" name="Image 0" descr="preencoded.png">    </p:cNvPr>
+          <p:cNvPr id="10" name="Image 0" descr="preencoded.png">    </p:cNvPr>
           <p:cNvPicPr>
             <a:picLocks noChangeAspect="1"/>
           </p:cNvPicPr>
@@ -8436,7 +8447,7 @@
       </p:pic>
       <p:sp>
         <p:nvSpPr>
-          <p:cNvPr id="12" name="Shape 9"/>
+          <p:cNvPr id="11" name="Shape 8"/>
           <p:cNvSpPr/>
           <p:nvPr/>
         </p:nvSpPr>
@@ -8463,7 +8474,7 @@
       </p:sp>
       <p:sp>
         <p:nvSpPr>
-          <p:cNvPr id="13" name="mdpr:1-2-2ff3f0:title:__title:1-2-2ff3f0"/>
+          <p:cNvPr id="12" name="mdpr:1-2-2ff3f0:title:__title:1-2-2ff3f0"/>
           <p:cNvSpPr txBox="1"/>
           <p:nvPr/>
         </p:nvSpPr>
@@ -8505,7 +8516,7 @@
       </p:sp>
       <p:sp>
         <p:nvSpPr>
-          <p:cNvPr id="14" name="mdpr:1-2-2ff3f0:body:block-19"/>
+          <p:cNvPr id="13" name="mdpr:1-2-2ff3f0:body:block-19"/>
           <p:cNvSpPr txBox="1"/>
           <p:nvPr/>
         </p:nvSpPr>
@@ -8644,7 +8655,7 @@
       </p:sp>
       <p:graphicFrame>
         <p:nvGraphicFramePr>
-          <p:cNvPr id="15" name="Chart 0" descr=""/>
+          <p:cNvPr id="14" name="Chart 0" descr=""/>
           <p:cNvGraphicFramePr/>
           <p:nvPr/>
         </p:nvGraphicFramePr>
@@ -8856,33 +8867,6 @@
         </p:nvSpPr>
         <p:spPr>
           <a:xfrm>
-            <a:off x="731520" y="1207008"/>
-            <a:ext cx="1325880" cy="54864"/>
-          </a:xfrm>
-          <a:prstGeom prst="rect">
-            <a:avLst/>
-          </a:prstGeom>
-          <a:solidFill>
-            <a:srgbClr val="4F6F8F"/>
-          </a:solidFill>
-          <a:ln w="12700">
-            <a:solidFill>
-              <a:srgbClr val="4F6F8F">
-                <a:alpha val="0"/>
-              </a:srgbClr>
-            </a:solidFill>
-            <a:prstDash val="solid"/>
-          </a:ln>
-        </p:spPr>
-      </p:sp>
-      <p:sp>
-        <p:nvSpPr>
-          <p:cNvPr id="8" name="Shape 6"/>
-          <p:cNvSpPr/>
-          <p:nvPr/>
-        </p:nvSpPr>
-        <p:spPr>
-          <a:xfrm>
             <a:off x="955548" y="1467612"/>
             <a:ext cx="10241280" cy="4526280"/>
           </a:xfrm>
@@ -8915,7 +8899,7 @@
       </p:sp>
       <p:sp>
         <p:nvSpPr>
-          <p:cNvPr id="9" name="Shape 7"/>
+          <p:cNvPr id="8" name="Shape 6"/>
           <p:cNvSpPr/>
           <p:nvPr/>
         </p:nvSpPr>
@@ -8953,7 +8937,7 @@
       </p:sp>
       <p:sp>
         <p:nvSpPr>
-          <p:cNvPr id="10" name="Shape 8"/>
+          <p:cNvPr id="9" name="Shape 7"/>
           <p:cNvSpPr/>
           <p:nvPr/>
         </p:nvSpPr>
@@ -8984,7 +8968,7 @@
       </p:sp>
       <p:pic>
         <p:nvPicPr>
-          <p:cNvPr id="11" name="Image 0" descr="preencoded.png">    </p:cNvPr>
+          <p:cNvPr id="10" name="Image 0" descr="preencoded.png">    </p:cNvPr>
           <p:cNvPicPr>
             <a:picLocks noChangeAspect="1"/>
           </p:cNvPicPr>
@@ -9014,7 +8998,7 @@
       </p:pic>
       <p:sp>
         <p:nvSpPr>
-          <p:cNvPr id="12" name="mdpr:2-2-542095:title:__title:2-2-542095"/>
+          <p:cNvPr id="11" name="mdpr:2-2-542095:title:__title:2-2-542095"/>
           <p:cNvSpPr txBox="1"/>
           <p:nvPr/>
         </p:nvSpPr>
@@ -9048,7 +9032,24 @@
                 <a:ea typeface="Pretendard" pitchFamily="34" charset="-122"/>
                 <a:cs typeface="Pretendard" pitchFamily="34" charset="-120"/>
               </a:rPr>
-              <a:t>Chart and Table Pair (Cont. 2/2)</a:t>
+              <a:t>Chart and Table Pair</a:t>
+            </a:r>
+            <a:pPr algn="ctr" indent="0" marL="0">
+              <a:lnSpc>
+                <a:spcPct val="120000"/>
+              </a:lnSpc>
+              <a:buNone/>
+            </a:pPr>
+            <a:r>
+              <a:rPr lang="en-US" sz="2000" dirty="0">
+                <a:solidFill>
+                  <a:srgbClr val="898989"/>
+                </a:solidFill>
+                <a:latin typeface="Pretendard" pitchFamily="34" charset="0"/>
+                <a:ea typeface="Pretendard" pitchFamily="34" charset="-122"/>
+                <a:cs typeface="Pretendard" pitchFamily="34" charset="-120"/>
+              </a:rPr>
+              <a:t> (Cont. 2/2)</a:t>
             </a:r>
             <a:endParaRPr lang="en-US" sz="3400" dirty="0"/>
           </a:p>
@@ -10095,33 +10096,6 @@
         </p:nvSpPr>
         <p:spPr>
           <a:xfrm>
-            <a:off x="731520" y="1207008"/>
-            <a:ext cx="1325880" cy="54864"/>
-          </a:xfrm>
-          <a:prstGeom prst="rect">
-            <a:avLst/>
-          </a:prstGeom>
-          <a:solidFill>
-            <a:srgbClr val="4F6F8F"/>
-          </a:solidFill>
-          <a:ln w="12700">
-            <a:solidFill>
-              <a:srgbClr val="4F6F8F">
-                <a:alpha val="0"/>
-              </a:srgbClr>
-            </a:solidFill>
-            <a:prstDash val="solid"/>
-          </a:ln>
-        </p:spPr>
-      </p:sp>
-      <p:sp>
-        <p:nvSpPr>
-          <p:cNvPr id="8" name="Shape 6"/>
-          <p:cNvSpPr/>
-          <p:nvPr/>
-        </p:nvSpPr>
-        <p:spPr>
-          <a:xfrm>
             <a:off x="955548" y="1467612"/>
             <a:ext cx="10241280" cy="4343400"/>
           </a:xfrm>
@@ -10154,7 +10128,7 @@
       </p:sp>
       <p:sp>
         <p:nvSpPr>
-          <p:cNvPr id="9" name="Shape 7"/>
+          <p:cNvPr id="8" name="Shape 6"/>
           <p:cNvSpPr/>
           <p:nvPr/>
         </p:nvSpPr>
@@ -10192,7 +10166,7 @@
       </p:sp>
       <p:sp>
         <p:nvSpPr>
-          <p:cNvPr id="10" name="Shape 8"/>
+          <p:cNvPr id="9" name="Shape 7"/>
           <p:cNvSpPr/>
           <p:nvPr/>
         </p:nvSpPr>
@@ -10223,7 +10197,7 @@
       </p:sp>
       <p:pic>
         <p:nvPicPr>
-          <p:cNvPr id="11" name="Image 0" descr="preencoded.png">    </p:cNvPr>
+          <p:cNvPr id="10" name="Image 0" descr="preencoded.png">    </p:cNvPr>
           <p:cNvPicPr>
             <a:picLocks noChangeAspect="1"/>
           </p:cNvPicPr>
@@ -10253,7 +10227,7 @@
       </p:pic>
       <p:sp>
         <p:nvSpPr>
-          <p:cNvPr id="12" name="mdpr:1-2-b8955f:title:__title:1-2-b8955f"/>
+          <p:cNvPr id="11" name="mdpr:1-2-b8955f:title:__title:1-2-b8955f"/>
           <p:cNvSpPr txBox="1"/>
           <p:nvPr/>
         </p:nvSpPr>
@@ -10295,7 +10269,7 @@
       </p:sp>
       <p:sp>
         <p:nvSpPr>
-          <p:cNvPr id="13" name="Shape 10"/>
+          <p:cNvPr id="12" name="Shape 9"/>
           <p:cNvSpPr/>
           <p:nvPr/>
         </p:nvSpPr>
@@ -10328,7 +10302,7 @@
       </p:sp>
       <p:sp>
         <p:nvSpPr>
-          <p:cNvPr id="14" name="Shape 11"/>
+          <p:cNvPr id="13" name="Shape 10"/>
           <p:cNvSpPr/>
           <p:nvPr/>
         </p:nvSpPr>
@@ -10359,7 +10333,7 @@
       </p:sp>
       <p:sp>
         <p:nvSpPr>
-          <p:cNvPr id="15" name="Shape 12"/>
+          <p:cNvPr id="14" name="Shape 11"/>
           <p:cNvSpPr/>
           <p:nvPr/>
         </p:nvSpPr>
@@ -10390,7 +10364,7 @@
       </p:sp>
       <p:sp>
         <p:nvSpPr>
-          <p:cNvPr id="16" name="Shape 13"/>
+          <p:cNvPr id="15" name="Shape 12"/>
           <p:cNvSpPr/>
           <p:nvPr/>
         </p:nvSpPr>
@@ -10415,7 +10389,7 @@
       </p:sp>
       <p:sp>
         <p:nvSpPr>
-          <p:cNvPr id="17" name="Shape 14"/>
+          <p:cNvPr id="16" name="Shape 13"/>
           <p:cNvSpPr/>
           <p:nvPr/>
         </p:nvSpPr>
@@ -10442,7 +10416,7 @@
       </p:sp>
       <p:sp>
         <p:nvSpPr>
-          <p:cNvPr id="18" name="Text 15"/>
+          <p:cNvPr id="17" name="Text 14"/>
           <p:cNvSpPr txBox="1"/>
           <p:nvPr/>
         </p:nvSpPr>
@@ -10486,7 +10460,7 @@
       </p:sp>
       <p:sp>
         <p:nvSpPr>
-          <p:cNvPr id="19" name="Text 16"/>
+          <p:cNvPr id="18" name="Text 15"/>
           <p:cNvSpPr txBox="1"/>
           <p:nvPr/>
         </p:nvSpPr>
@@ -10528,7 +10502,7 @@
       </p:sp>
       <p:sp>
         <p:nvSpPr>
-          <p:cNvPr id="20" name="Shape 17"/>
+          <p:cNvPr id="19" name="Shape 16"/>
           <p:cNvSpPr/>
           <p:nvPr/>
         </p:nvSpPr>
@@ -10555,7 +10529,7 @@
       </p:sp>
       <p:sp>
         <p:nvSpPr>
-          <p:cNvPr id="21" name="Text 18"/>
+          <p:cNvPr id="20" name="Text 17"/>
           <p:cNvSpPr txBox="1"/>
           <p:nvPr/>
         </p:nvSpPr>
@@ -10599,7 +10573,7 @@
       </p:sp>
       <p:sp>
         <p:nvSpPr>
-          <p:cNvPr id="22" name="Shape 19"/>
+          <p:cNvPr id="21" name="Shape 18"/>
           <p:cNvSpPr/>
           <p:nvPr/>
         </p:nvSpPr>
@@ -10626,7 +10600,7 @@
       </p:sp>
       <p:sp>
         <p:nvSpPr>
-          <p:cNvPr id="23" name="Text 20"/>
+          <p:cNvPr id="22" name="Text 19"/>
           <p:cNvSpPr txBox="1"/>
           <p:nvPr/>
         </p:nvSpPr>
@@ -10670,7 +10644,7 @@
       </p:sp>
       <p:sp>
         <p:nvSpPr>
-          <p:cNvPr id="24" name="Shape 21"/>
+          <p:cNvPr id="23" name="Shape 20"/>
           <p:cNvSpPr/>
           <p:nvPr/>
         </p:nvSpPr>
@@ -10701,7 +10675,7 @@
       </p:sp>
       <p:sp>
         <p:nvSpPr>
-          <p:cNvPr id="25" name="Shape 22"/>
+          <p:cNvPr id="24" name="Shape 21"/>
           <p:cNvSpPr/>
           <p:nvPr/>
         </p:nvSpPr>
@@ -10730,7 +10704,7 @@
       </p:sp>
       <p:sp>
         <p:nvSpPr>
-          <p:cNvPr id="26" name="Shape 23"/>
+          <p:cNvPr id="25" name="Shape 22"/>
           <p:cNvSpPr/>
           <p:nvPr/>
         </p:nvSpPr>
@@ -10753,7 +10727,7 @@
       </p:sp>
       <p:sp>
         <p:nvSpPr>
-          <p:cNvPr id="27" name="Shape 24"/>
+          <p:cNvPr id="26" name="Shape 23"/>
           <p:cNvSpPr/>
           <p:nvPr/>
         </p:nvSpPr>
@@ -10778,7 +10752,7 @@
       </p:sp>
       <p:sp>
         <p:nvSpPr>
-          <p:cNvPr id="28" name="Shape 25"/>
+          <p:cNvPr id="27" name="Shape 24"/>
           <p:cNvSpPr/>
           <p:nvPr/>
         </p:nvSpPr>
@@ -10803,7 +10777,7 @@
       </p:sp>
       <p:sp>
         <p:nvSpPr>
-          <p:cNvPr id="29" name="Shape 26"/>
+          <p:cNvPr id="28" name="Shape 25"/>
           <p:cNvSpPr/>
           <p:nvPr/>
         </p:nvSpPr>
@@ -10828,7 +10802,7 @@
       </p:sp>
       <p:sp>
         <p:nvSpPr>
-          <p:cNvPr id="30" name="Text 27"/>
+          <p:cNvPr id="29" name="Text 26"/>
           <p:cNvSpPr txBox="1"/>
           <p:nvPr/>
         </p:nvSpPr>
@@ -10872,7 +10846,7 @@
       </p:sp>
       <p:sp>
         <p:nvSpPr>
-          <p:cNvPr id="31" name="Text 28"/>
+          <p:cNvPr id="30" name="Text 27"/>
           <p:cNvSpPr txBox="1"/>
           <p:nvPr/>
         </p:nvSpPr>
@@ -10914,7 +10888,7 @@
       </p:sp>
       <p:sp>
         <p:nvSpPr>
-          <p:cNvPr id="32" name="Text 29"/>
+          <p:cNvPr id="31" name="Text 28"/>
           <p:cNvSpPr txBox="1"/>
           <p:nvPr/>
         </p:nvSpPr>
@@ -10956,7 +10930,7 @@
       </p:sp>
       <p:sp>
         <p:nvSpPr>
-          <p:cNvPr id="33" name="Text 30"/>
+          <p:cNvPr id="32" name="Text 29"/>
           <p:cNvSpPr txBox="1"/>
           <p:nvPr/>
         </p:nvSpPr>
@@ -11194,33 +11168,6 @@
         </p:nvSpPr>
         <p:spPr>
           <a:xfrm>
-            <a:off x="731520" y="1207008"/>
-            <a:ext cx="1325880" cy="54864"/>
-          </a:xfrm>
-          <a:prstGeom prst="rect">
-            <a:avLst/>
-          </a:prstGeom>
-          <a:solidFill>
-            <a:srgbClr val="4F6F8F"/>
-          </a:solidFill>
-          <a:ln w="12700">
-            <a:solidFill>
-              <a:srgbClr val="4F6F8F">
-                <a:alpha val="0"/>
-              </a:srgbClr>
-            </a:solidFill>
-            <a:prstDash val="solid"/>
-          </a:ln>
-        </p:spPr>
-      </p:sp>
-      <p:sp>
-        <p:nvSpPr>
-          <p:cNvPr id="8" name="Shape 6"/>
-          <p:cNvSpPr/>
-          <p:nvPr/>
-        </p:nvSpPr>
-        <p:spPr>
-          <a:xfrm>
             <a:off x="955548" y="1467612"/>
             <a:ext cx="10241280" cy="4343400"/>
           </a:xfrm>
@@ -11253,7 +11200,7 @@
       </p:sp>
       <p:sp>
         <p:nvSpPr>
-          <p:cNvPr id="9" name="Shape 7"/>
+          <p:cNvPr id="8" name="Shape 6"/>
           <p:cNvSpPr/>
           <p:nvPr/>
         </p:nvSpPr>
@@ -11291,7 +11238,7 @@
       </p:sp>
       <p:sp>
         <p:nvSpPr>
-          <p:cNvPr id="10" name="Shape 8"/>
+          <p:cNvPr id="9" name="Shape 7"/>
           <p:cNvSpPr/>
           <p:nvPr/>
         </p:nvSpPr>
@@ -11322,7 +11269,7 @@
       </p:sp>
       <p:pic>
         <p:nvPicPr>
-          <p:cNvPr id="11" name="Image 0" descr="preencoded.png">    </p:cNvPr>
+          <p:cNvPr id="10" name="Image 0" descr="preencoded.png">    </p:cNvPr>
           <p:cNvPicPr>
             <a:picLocks noChangeAspect="1"/>
           </p:cNvPicPr>
@@ -11352,7 +11299,7 @@
       </p:pic>
       <p:sp>
         <p:nvSpPr>
-          <p:cNvPr id="12" name="mdpr:2-2-4dc4c1:title:__title:2-2-4dc4c1"/>
+          <p:cNvPr id="11" name="mdpr:2-2-4dc4c1:title:__title:2-2-4dc4c1"/>
           <p:cNvSpPr txBox="1"/>
           <p:nvPr/>
         </p:nvSpPr>
@@ -11386,7 +11333,24 @@
                 <a:ea typeface="Pretendard" pitchFamily="34" charset="-122"/>
                 <a:cs typeface="Pretendard" pitchFamily="34" charset="-120"/>
               </a:rPr>
-              <a:t>Editable Proof Objects (Cont. 2/2)</a:t>
+              <a:t>Editable Proof Objects</a:t>
+            </a:r>
+            <a:pPr algn="ctr" indent="0" marL="0">
+              <a:lnSpc>
+                <a:spcPct val="120000"/>
+              </a:lnSpc>
+              <a:buNone/>
+            </a:pPr>
+            <a:r>
+              <a:rPr lang="en-US" sz="2000" dirty="0">
+                <a:solidFill>
+                  <a:srgbClr val="898989"/>
+                </a:solidFill>
+                <a:latin typeface="Pretendard" pitchFamily="34" charset="0"/>
+                <a:ea typeface="Pretendard" pitchFamily="34" charset="-122"/>
+                <a:cs typeface="Pretendard" pitchFamily="34" charset="-120"/>
+              </a:rPr>
+              <a:t> (Cont. 2/2)</a:t>
             </a:r>
             <a:endParaRPr lang="en-US" sz="3400" dirty="0"/>
           </a:p>
@@ -11394,7 +11358,7 @@
       </p:sp>
       <p:sp>
         <p:nvSpPr>
-          <p:cNvPr id="13" name="Shape 10"/>
+          <p:cNvPr id="12" name="Shape 9"/>
           <p:cNvSpPr/>
           <p:nvPr/>
         </p:nvSpPr>
@@ -11421,7 +11385,7 @@
       </p:sp>
       <p:sp>
         <p:nvSpPr>
-          <p:cNvPr id="14" name="Shape 11"/>
+          <p:cNvPr id="13" name="Shape 10"/>
           <p:cNvSpPr/>
           <p:nvPr/>
         </p:nvSpPr>
@@ -11448,7 +11412,7 @@
       </p:sp>
       <p:sp>
         <p:nvSpPr>
-          <p:cNvPr id="15" name="Text 12"/>
+          <p:cNvPr id="14" name="Text 11"/>
           <p:cNvSpPr txBox="1"/>
           <p:nvPr/>
         </p:nvSpPr>
@@ -11492,7 +11456,7 @@
       </p:sp>
       <p:sp>
         <p:nvSpPr>
-          <p:cNvPr id="16" name="Text 13"/>
+          <p:cNvPr id="15" name="Text 12"/>
           <p:cNvSpPr txBox="1"/>
           <p:nvPr/>
         </p:nvSpPr>
@@ -11536,7 +11500,7 @@
       </p:sp>
       <p:sp>
         <p:nvSpPr>
-          <p:cNvPr id="17" name="Shape 14"/>
+          <p:cNvPr id="16" name="Shape 13"/>
           <p:cNvSpPr/>
           <p:nvPr/>
         </p:nvSpPr>
@@ -11563,7 +11527,7 @@
       </p:sp>
       <p:sp>
         <p:nvSpPr>
-          <p:cNvPr id="18" name="Shape 15"/>
+          <p:cNvPr id="17" name="Shape 14"/>
           <p:cNvSpPr/>
           <p:nvPr/>
         </p:nvSpPr>
@@ -11590,7 +11554,7 @@
       </p:sp>
       <p:sp>
         <p:nvSpPr>
-          <p:cNvPr id="19" name="Text 16"/>
+          <p:cNvPr id="18" name="Text 15"/>
           <p:cNvSpPr txBox="1"/>
           <p:nvPr/>
         </p:nvSpPr>
@@ -11634,7 +11598,7 @@
       </p:sp>
       <p:sp>
         <p:nvSpPr>
-          <p:cNvPr id="20" name="Text 17"/>
+          <p:cNvPr id="19" name="Text 16"/>
           <p:cNvSpPr txBox="1"/>
           <p:nvPr/>
         </p:nvSpPr>
@@ -11678,7 +11642,7 @@
       </p:sp>
       <p:sp>
         <p:nvSpPr>
-          <p:cNvPr id="21" name="Shape 18"/>
+          <p:cNvPr id="20" name="Shape 17"/>
           <p:cNvSpPr/>
           <p:nvPr/>
         </p:nvSpPr>
@@ -11705,7 +11669,7 @@
       </p:sp>
       <p:sp>
         <p:nvSpPr>
-          <p:cNvPr id="22" name="Shape 19"/>
+          <p:cNvPr id="21" name="Shape 18"/>
           <p:cNvSpPr/>
           <p:nvPr/>
         </p:nvSpPr>
@@ -11732,7 +11696,7 @@
       </p:sp>
       <p:sp>
         <p:nvSpPr>
-          <p:cNvPr id="23" name="Text 20"/>
+          <p:cNvPr id="22" name="Text 19"/>
           <p:cNvSpPr txBox="1"/>
           <p:nvPr/>
         </p:nvSpPr>
@@ -11776,7 +11740,7 @@
       </p:sp>
       <p:sp>
         <p:nvSpPr>
-          <p:cNvPr id="24" name="Text 21"/>
+          <p:cNvPr id="23" name="Text 20"/>
           <p:cNvSpPr txBox="1"/>
           <p:nvPr/>
         </p:nvSpPr>
@@ -11820,7 +11784,7 @@
       </p:sp>
       <p:sp>
         <p:nvSpPr>
-          <p:cNvPr id="25" name="Shape 22"/>
+          <p:cNvPr id="24" name="Shape 21"/>
           <p:cNvSpPr/>
           <p:nvPr/>
         </p:nvSpPr>
@@ -11847,7 +11811,7 @@
       </p:sp>
       <p:sp>
         <p:nvSpPr>
-          <p:cNvPr id="26" name="Shape 23"/>
+          <p:cNvPr id="25" name="Shape 22"/>
           <p:cNvSpPr/>
           <p:nvPr/>
         </p:nvSpPr>
@@ -11874,7 +11838,7 @@
       </p:sp>
       <p:sp>
         <p:nvSpPr>
-          <p:cNvPr id="27" name="Text 24"/>
+          <p:cNvPr id="26" name="Text 23"/>
           <p:cNvSpPr txBox="1"/>
           <p:nvPr/>
         </p:nvSpPr>
@@ -11918,7 +11882,7 @@
       </p:sp>
       <p:sp>
         <p:nvSpPr>
-          <p:cNvPr id="28" name="Text 25"/>
+          <p:cNvPr id="27" name="Text 24"/>
           <p:cNvSpPr txBox="1"/>
           <p:nvPr/>
         </p:nvSpPr>
@@ -11962,7 +11926,7 @@
       </p:sp>
       <p:sp>
         <p:nvSpPr>
-          <p:cNvPr id="29" name="Shape 26"/>
+          <p:cNvPr id="28" name="Shape 25"/>
           <p:cNvSpPr/>
           <p:nvPr/>
         </p:nvSpPr>
@@ -11986,7 +11950,7 @@
       </p:sp>
       <p:sp>
         <p:nvSpPr>
-          <p:cNvPr id="30" name="Shape 27"/>
+          <p:cNvPr id="29" name="Shape 26"/>
           <p:cNvSpPr/>
           <p:nvPr/>
         </p:nvSpPr>
@@ -12010,7 +11974,7 @@
       </p:sp>
       <p:sp>
         <p:nvSpPr>
-          <p:cNvPr id="31" name="Shape 28"/>
+          <p:cNvPr id="30" name="Shape 27"/>
           <p:cNvSpPr/>
           <p:nvPr/>
         </p:nvSpPr>
@@ -12230,8 +12194,8 @@
         </p:nvSpPr>
         <p:spPr>
           <a:xfrm>
-            <a:off x="731520" y="1207008"/>
-            <a:ext cx="1325880" cy="54864"/>
+            <a:off x="822960" y="1938528"/>
+            <a:ext cx="73152" cy="2514600"/>
           </a:xfrm>
           <a:prstGeom prst="rect">
             <a:avLst/>
@@ -12257,427 +12221,14 @@
         </p:nvSpPr>
         <p:spPr>
           <a:xfrm>
-            <a:off x="955548" y="1915668"/>
-            <a:ext cx="10241280" cy="1024128"/>
-          </a:xfrm>
-          <a:prstGeom prst="roundRect">
-            <a:avLst>
-              <a:gd name="adj" fmla="val 5357"/>
-            </a:avLst>
-          </a:prstGeom>
-          <a:solidFill>
-            <a:srgbClr val="B8C3D2">
-              <a:alpha val="26000"/>
-            </a:srgbClr>
-          </a:solidFill>
-          <a:ln w="12700">
-            <a:solidFill>
-              <a:srgbClr val="D5DCE7">
-                <a:alpha val="0"/>
-              </a:srgbClr>
-            </a:solidFill>
-            <a:prstDash val="solid"/>
-          </a:ln>
-          <a:effectLst>
-            <a:outerShdw sx="100000" sy="100000" kx="0" ky="0" algn="bl" rotWithShape="0" blurRad="13970" dist="50800" dir="2700000">
-              <a:srgbClr val="AAB5C4">
-                <a:alpha val="20000"/>
-              </a:srgbClr>
-            </a:outerShdw>
-          </a:effectLst>
-        </p:spPr>
-      </p:sp>
-      <p:sp>
-        <p:nvSpPr>
-          <p:cNvPr id="9" name="Shape 7"/>
-          <p:cNvSpPr/>
-          <p:nvPr/>
-        </p:nvSpPr>
-        <p:spPr>
-          <a:xfrm>
-            <a:off x="882396" y="1833372"/>
-            <a:ext cx="10241280" cy="1024128"/>
-          </a:xfrm>
-          <a:prstGeom prst="roundRect">
-            <a:avLst>
-              <a:gd name="adj" fmla="val 5357"/>
-            </a:avLst>
-          </a:prstGeom>
-          <a:solidFill>
-            <a:srgbClr val="FFFFFF">
-              <a:alpha val="42000"/>
-            </a:srgbClr>
-          </a:solidFill>
-          <a:ln w="12700">
-            <a:solidFill>
-              <a:srgbClr val="FFFFFF">
-                <a:alpha val="0"/>
-              </a:srgbClr>
-            </a:solidFill>
-            <a:prstDash val="solid"/>
-          </a:ln>
-          <a:effectLst>
-            <a:outerShdw sx="100000" sy="100000" kx="0" ky="0" algn="bl" rotWithShape="0" blurRad="10160" dist="50800" dir="13500000">
-              <a:srgbClr val="FFFFFF">
-                <a:alpha val="36000"/>
-              </a:srgbClr>
-            </a:outerShdw>
-          </a:effectLst>
-        </p:spPr>
-      </p:sp>
-      <p:sp>
-        <p:nvSpPr>
-          <p:cNvPr id="10" name="Shape 8"/>
-          <p:cNvSpPr/>
-          <p:nvPr/>
-        </p:nvSpPr>
-        <p:spPr>
-          <a:xfrm>
-            <a:off x="914400" y="1865376"/>
-            <a:ext cx="10241280" cy="1024128"/>
-          </a:xfrm>
-          <a:prstGeom prst="roundRect">
-            <a:avLst>
-              <a:gd name="adj" fmla="val 5357"/>
-            </a:avLst>
-          </a:prstGeom>
-          <a:solidFill>
-            <a:srgbClr val="E9EEF5">
-              <a:alpha val="6000"/>
-            </a:srgbClr>
-          </a:solidFill>
-          <a:ln w="12700">
-            <a:solidFill>
-              <a:srgbClr val="FFFFFF">
-                <a:alpha val="28000"/>
-              </a:srgbClr>
-            </a:solidFill>
-            <a:prstDash val="solid"/>
-          </a:ln>
-        </p:spPr>
-      </p:sp>
-      <p:pic>
-        <p:nvPicPr>
-          <p:cNvPr id="11" name="Image 0" descr="preencoded.png">    </p:cNvPr>
-          <p:cNvPicPr>
-            <a:picLocks noChangeAspect="1"/>
-          </p:cNvPicPr>
-          <p:nvPr/>
-        </p:nvPicPr>
-        <p:blipFill>
-          <a:blip r:embed="rId1">
-            <a:extLst>
-              <a:ext uri="{96DAC541-7B7A-43D3-8B79-37D633B846F1}">
-                <asvg:svgBlip xmlns:asvg="http://schemas.microsoft.com/office/drawing/2016/SVG/main" r:embed="rId2"/>
-              </a:ext>
-            </a:extLst>
-          </a:blip>
-          <a:stretch>
-            <a:fillRect/>
-          </a:stretch>
-        </p:blipFill>
-        <p:spPr>
-          <a:xfrm>
-            <a:off x="914400" y="1865376"/>
-            <a:ext cx="10241280" cy="1024128"/>
+            <a:off x="4343400" y="1938528"/>
+            <a:ext cx="73152" cy="2514600"/>
           </a:xfrm>
           <a:prstGeom prst="rect">
             <a:avLst/>
           </a:prstGeom>
-        </p:spPr>
-      </p:pic>
-      <p:sp>
-        <p:nvSpPr>
-          <p:cNvPr id="12" name="Shape 9"/>
-          <p:cNvSpPr/>
-          <p:nvPr/>
-        </p:nvSpPr>
-        <p:spPr>
-          <a:xfrm>
-            <a:off x="955548" y="3241548"/>
-            <a:ext cx="10241280" cy="1024128"/>
-          </a:xfrm>
-          <a:prstGeom prst="roundRect">
-            <a:avLst>
-              <a:gd name="adj" fmla="val 5357"/>
-            </a:avLst>
-          </a:prstGeom>
-          <a:solidFill>
-            <a:srgbClr val="B8C3D2">
-              <a:alpha val="26000"/>
-            </a:srgbClr>
-          </a:solidFill>
-          <a:ln w="12700">
-            <a:solidFill>
-              <a:srgbClr val="D5DCE7">
-                <a:alpha val="0"/>
-              </a:srgbClr>
-            </a:solidFill>
-            <a:prstDash val="solid"/>
-          </a:ln>
-          <a:effectLst>
-            <a:outerShdw sx="100000" sy="100000" kx="0" ky="0" algn="bl" rotWithShape="0" blurRad="13970" dist="50800" dir="2700000">
-              <a:srgbClr val="AAB5C4">
-                <a:alpha val="20000"/>
-              </a:srgbClr>
-            </a:outerShdw>
-          </a:effectLst>
-        </p:spPr>
-      </p:sp>
-      <p:sp>
-        <p:nvSpPr>
-          <p:cNvPr id="13" name="Shape 10"/>
-          <p:cNvSpPr/>
-          <p:nvPr/>
-        </p:nvSpPr>
-        <p:spPr>
-          <a:xfrm>
-            <a:off x="882396" y="3159252"/>
-            <a:ext cx="10241280" cy="1024128"/>
-          </a:xfrm>
-          <a:prstGeom prst="roundRect">
-            <a:avLst>
-              <a:gd name="adj" fmla="val 5357"/>
-            </a:avLst>
-          </a:prstGeom>
-          <a:solidFill>
-            <a:srgbClr val="FFFFFF">
-              <a:alpha val="42000"/>
-            </a:srgbClr>
-          </a:solidFill>
-          <a:ln w="12700">
-            <a:solidFill>
-              <a:srgbClr val="FFFFFF">
-                <a:alpha val="0"/>
-              </a:srgbClr>
-            </a:solidFill>
-            <a:prstDash val="solid"/>
-          </a:ln>
-          <a:effectLst>
-            <a:outerShdw sx="100000" sy="100000" kx="0" ky="0" algn="bl" rotWithShape="0" blurRad="10160" dist="50800" dir="13500000">
-              <a:srgbClr val="FFFFFF">
-                <a:alpha val="36000"/>
-              </a:srgbClr>
-            </a:outerShdw>
-          </a:effectLst>
-        </p:spPr>
-      </p:sp>
-      <p:sp>
-        <p:nvSpPr>
-          <p:cNvPr id="14" name="Shape 11"/>
-          <p:cNvSpPr/>
-          <p:nvPr/>
-        </p:nvSpPr>
-        <p:spPr>
-          <a:xfrm>
-            <a:off x="914400" y="3191256"/>
-            <a:ext cx="10241280" cy="1024128"/>
-          </a:xfrm>
-          <a:prstGeom prst="roundRect">
-            <a:avLst>
-              <a:gd name="adj" fmla="val 5357"/>
-            </a:avLst>
-          </a:prstGeom>
-          <a:solidFill>
-            <a:srgbClr val="E9EEF5">
-              <a:alpha val="6000"/>
-            </a:srgbClr>
-          </a:solidFill>
-          <a:ln w="12700">
-            <a:solidFill>
-              <a:srgbClr val="FFFFFF">
-                <a:alpha val="28000"/>
-              </a:srgbClr>
-            </a:solidFill>
-            <a:prstDash val="solid"/>
-          </a:ln>
-        </p:spPr>
-      </p:sp>
-      <p:pic>
-        <p:nvPicPr>
-          <p:cNvPr id="15" name="Image 1" descr="preencoded.png">    </p:cNvPr>
-          <p:cNvPicPr>
-            <a:picLocks noChangeAspect="1"/>
-          </p:cNvPicPr>
-          <p:nvPr/>
-        </p:nvPicPr>
-        <p:blipFill>
-          <a:blip r:embed="rId3">
-            <a:extLst>
-              <a:ext uri="{96DAC541-7B7A-43D3-8B79-37D633B846F1}">
-                <asvg:svgBlip xmlns:asvg="http://schemas.microsoft.com/office/drawing/2016/SVG/main" r:embed="rId4"/>
-              </a:ext>
-            </a:extLst>
-          </a:blip>
-          <a:stretch>
-            <a:fillRect/>
-          </a:stretch>
-        </p:blipFill>
-        <p:spPr>
-          <a:xfrm>
-            <a:off x="914400" y="3191256"/>
-            <a:ext cx="10241280" cy="1024128"/>
-          </a:xfrm>
-          <a:prstGeom prst="rect">
-            <a:avLst/>
-          </a:prstGeom>
-        </p:spPr>
-      </p:pic>
-      <p:sp>
-        <p:nvSpPr>
-          <p:cNvPr id="16" name="Shape 12"/>
-          <p:cNvSpPr/>
-          <p:nvPr/>
-        </p:nvSpPr>
-        <p:spPr>
-          <a:xfrm>
-            <a:off x="955548" y="4558284"/>
-            <a:ext cx="10241280" cy="1024128"/>
-          </a:xfrm>
-          <a:prstGeom prst="roundRect">
-            <a:avLst>
-              <a:gd name="adj" fmla="val 5357"/>
-            </a:avLst>
-          </a:prstGeom>
-          <a:solidFill>
-            <a:srgbClr val="B8C3D2">
-              <a:alpha val="26000"/>
-            </a:srgbClr>
-          </a:solidFill>
-          <a:ln w="12700">
-            <a:solidFill>
-              <a:srgbClr val="D5DCE7">
-                <a:alpha val="0"/>
-              </a:srgbClr>
-            </a:solidFill>
-            <a:prstDash val="solid"/>
-          </a:ln>
-          <a:effectLst>
-            <a:outerShdw sx="100000" sy="100000" kx="0" ky="0" algn="bl" rotWithShape="0" blurRad="13970" dist="50800" dir="2700000">
-              <a:srgbClr val="AAB5C4">
-                <a:alpha val="20000"/>
-              </a:srgbClr>
-            </a:outerShdw>
-          </a:effectLst>
-        </p:spPr>
-      </p:sp>
-      <p:sp>
-        <p:nvSpPr>
-          <p:cNvPr id="17" name="Shape 13"/>
-          <p:cNvSpPr/>
-          <p:nvPr/>
-        </p:nvSpPr>
-        <p:spPr>
-          <a:xfrm>
-            <a:off x="882396" y="4475988"/>
-            <a:ext cx="10241280" cy="1024128"/>
-          </a:xfrm>
-          <a:prstGeom prst="roundRect">
-            <a:avLst>
-              <a:gd name="adj" fmla="val 5357"/>
-            </a:avLst>
-          </a:prstGeom>
-          <a:solidFill>
-            <a:srgbClr val="FFFFFF">
-              <a:alpha val="42000"/>
-            </a:srgbClr>
-          </a:solidFill>
-          <a:ln w="12700">
-            <a:solidFill>
-              <a:srgbClr val="FFFFFF">
-                <a:alpha val="0"/>
-              </a:srgbClr>
-            </a:solidFill>
-            <a:prstDash val="solid"/>
-          </a:ln>
-          <a:effectLst>
-            <a:outerShdw sx="100000" sy="100000" kx="0" ky="0" algn="bl" rotWithShape="0" blurRad="10160" dist="50800" dir="13500000">
-              <a:srgbClr val="FFFFFF">
-                <a:alpha val="36000"/>
-              </a:srgbClr>
-            </a:outerShdw>
-          </a:effectLst>
-        </p:spPr>
-      </p:sp>
-      <p:sp>
-        <p:nvSpPr>
-          <p:cNvPr id="18" name="Shape 14"/>
-          <p:cNvSpPr/>
-          <p:nvPr/>
-        </p:nvSpPr>
-        <p:spPr>
-          <a:xfrm>
-            <a:off x="914400" y="4507992"/>
-            <a:ext cx="10241280" cy="1024128"/>
-          </a:xfrm>
-          <a:prstGeom prst="roundRect">
-            <a:avLst>
-              <a:gd name="adj" fmla="val 5357"/>
-            </a:avLst>
-          </a:prstGeom>
-          <a:solidFill>
-            <a:srgbClr val="E9EEF5">
-              <a:alpha val="6000"/>
-            </a:srgbClr>
-          </a:solidFill>
-          <a:ln w="12700">
-            <a:solidFill>
-              <a:srgbClr val="FFFFFF">
-                <a:alpha val="28000"/>
-              </a:srgbClr>
-            </a:solidFill>
-            <a:prstDash val="solid"/>
-          </a:ln>
-        </p:spPr>
-      </p:sp>
-      <p:pic>
-        <p:nvPicPr>
-          <p:cNvPr id="19" name="Image 2" descr="preencoded.png">    </p:cNvPr>
-          <p:cNvPicPr>
-            <a:picLocks noChangeAspect="1"/>
-          </p:cNvPicPr>
-          <p:nvPr/>
-        </p:nvPicPr>
-        <p:blipFill>
-          <a:blip r:embed="rId5">
-            <a:extLst>
-              <a:ext uri="{96DAC541-7B7A-43D3-8B79-37D633B846F1}">
-                <asvg:svgBlip xmlns:asvg="http://schemas.microsoft.com/office/drawing/2016/SVG/main" r:embed="rId6"/>
-              </a:ext>
-            </a:extLst>
-          </a:blip>
-          <a:stretch>
-            <a:fillRect/>
-          </a:stretch>
-        </p:blipFill>
-        <p:spPr>
-          <a:xfrm>
-            <a:off x="914400" y="4507992"/>
-            <a:ext cx="10241280" cy="1024128"/>
-          </a:xfrm>
-          <a:prstGeom prst="rect">
-            <a:avLst/>
-          </a:prstGeom>
-        </p:spPr>
-      </p:pic>
-      <p:sp>
-        <p:nvSpPr>
-          <p:cNvPr id="20" name="Shape 15"/>
-          <p:cNvSpPr/>
-          <p:nvPr/>
-        </p:nvSpPr>
-        <p:spPr>
-          <a:xfrm>
-            <a:off x="786384" y="1956816"/>
-            <a:ext cx="32004" cy="3483864"/>
-          </a:xfrm>
-          <a:prstGeom prst="rect">
-            <a:avLst/>
-          </a:prstGeom>
-          <a:solidFill>
-            <a:srgbClr val="CBD5E1">
-              <a:alpha val="80000"/>
-            </a:srgbClr>
+          <a:solidFill>
+            <a:srgbClr val="CBD5E1"/>
           </a:solidFill>
           <a:ln w="12700">
             <a:solidFill>
@@ -12691,14 +12242,14 @@
       </p:sp>
       <p:sp>
         <p:nvSpPr>
-          <p:cNvPr id="21" name="Shape 16"/>
-          <p:cNvSpPr/>
-          <p:nvPr/>
-        </p:nvSpPr>
-        <p:spPr>
-          <a:xfrm>
-            <a:off x="914400" y="1865376"/>
-            <a:ext cx="73152" cy="1024128"/>
+          <p:cNvPr id="9" name="Shape 7"/>
+          <p:cNvSpPr/>
+          <p:nvPr/>
+        </p:nvSpPr>
+        <p:spPr>
+          <a:xfrm>
+            <a:off x="7863840" y="1938528"/>
+            <a:ext cx="73152" cy="2514600"/>
           </a:xfrm>
           <a:prstGeom prst="rect">
             <a:avLst/>
@@ -12718,61 +12269,7 @@
       </p:sp>
       <p:sp>
         <p:nvSpPr>
-          <p:cNvPr id="22" name="Shape 17"/>
-          <p:cNvSpPr/>
-          <p:nvPr/>
-        </p:nvSpPr>
-        <p:spPr>
-          <a:xfrm>
-            <a:off x="914400" y="3191256"/>
-            <a:ext cx="73152" cy="1024128"/>
-          </a:xfrm>
-          <a:prstGeom prst="rect">
-            <a:avLst/>
-          </a:prstGeom>
-          <a:solidFill>
-            <a:srgbClr val="CBD5E1"/>
-          </a:solidFill>
-          <a:ln w="12700">
-            <a:solidFill>
-              <a:srgbClr val="CBD5E1">
-                <a:alpha val="0"/>
-              </a:srgbClr>
-            </a:solidFill>
-            <a:prstDash val="solid"/>
-          </a:ln>
-        </p:spPr>
-      </p:sp>
-      <p:sp>
-        <p:nvSpPr>
-          <p:cNvPr id="23" name="Shape 18"/>
-          <p:cNvSpPr/>
-          <p:nvPr/>
-        </p:nvSpPr>
-        <p:spPr>
-          <a:xfrm>
-            <a:off x="914400" y="4507992"/>
-            <a:ext cx="73152" cy="1024128"/>
-          </a:xfrm>
-          <a:prstGeom prst="rect">
-            <a:avLst/>
-          </a:prstGeom>
-          <a:solidFill>
-            <a:srgbClr val="4F6F8F"/>
-          </a:solidFill>
-          <a:ln w="12700">
-            <a:solidFill>
-              <a:srgbClr val="4F6F8F">
-                <a:alpha val="0"/>
-              </a:srgbClr>
-            </a:solidFill>
-            <a:prstDash val="solid"/>
-          </a:ln>
-        </p:spPr>
-      </p:sp>
-      <p:sp>
-        <p:nvSpPr>
-          <p:cNvPr id="24" name="mdpr:1-2-ea42c8:title:__title:1-2-ea42c8"/>
+          <p:cNvPr id="10" name="mdpr:1-2-ea42c8:title:__title:1-2-ea42c8"/>
           <p:cNvSpPr txBox="1"/>
           <p:nvPr/>
         </p:nvSpPr>
@@ -12814,14 +12311,14 @@
       </p:sp>
       <p:sp>
         <p:nvSpPr>
-          <p:cNvPr id="25" name="mdpr:1-2-ea42c8:item-1:block-27-chunk-1"/>
+          <p:cNvPr id="11" name="mdpr:1-2-ea42c8:item-1:block-27-chunk-1"/>
           <p:cNvSpPr txBox="1"/>
           <p:nvPr/>
         </p:nvSpPr>
         <p:spPr>
           <a:xfrm>
-            <a:off x="1133856" y="1957548"/>
-            <a:ext cx="9820656" cy="839785"/>
+            <a:off x="1042416" y="2103120"/>
+            <a:ext cx="2825496" cy="2185416"/>
           </a:xfrm>
           <a:prstGeom prst="rect">
             <a:avLst/>
@@ -12873,14 +12370,14 @@
       </p:sp>
       <p:sp>
         <p:nvSpPr>
-          <p:cNvPr id="26" name="mdpr:1-2-ea42c8:item-2:block-27-chunk-1"/>
+          <p:cNvPr id="12" name="mdpr:1-2-ea42c8:item-2:block-27-chunk-1"/>
           <p:cNvSpPr txBox="1"/>
           <p:nvPr/>
         </p:nvSpPr>
         <p:spPr>
           <a:xfrm>
-            <a:off x="1133856" y="3283428"/>
-            <a:ext cx="9820656" cy="839785"/>
+            <a:off x="4562856" y="2103120"/>
+            <a:ext cx="2825496" cy="2185416"/>
           </a:xfrm>
           <a:prstGeom prst="rect">
             <a:avLst/>
@@ -12932,14 +12429,14 @@
       </p:sp>
       <p:sp>
         <p:nvSpPr>
-          <p:cNvPr id="27" name="mdpr:1-2-ea42c8:item-3:block-27-chunk-1"/>
+          <p:cNvPr id="13" name="mdpr:1-2-ea42c8:item-3:block-27-chunk-1"/>
           <p:cNvSpPr txBox="1"/>
           <p:nvPr/>
         </p:nvSpPr>
         <p:spPr>
           <a:xfrm>
-            <a:off x="1133856" y="4600164"/>
-            <a:ext cx="9820656" cy="839785"/>
+            <a:off x="8083296" y="2103120"/>
+            <a:ext cx="2825496" cy="2185416"/>
           </a:xfrm>
           <a:prstGeom prst="rect">
             <a:avLst/>
@@ -13187,8 +12684,8 @@
         </p:nvSpPr>
         <p:spPr>
           <a:xfrm>
-            <a:off x="731520" y="1207008"/>
-            <a:ext cx="1325880" cy="54864"/>
+            <a:off x="822960" y="1737360"/>
+            <a:ext cx="73152" cy="841248"/>
           </a:xfrm>
           <a:prstGeom prst="rect">
             <a:avLst/>
@@ -13214,8 +12711,35 @@
         </p:nvSpPr>
         <p:spPr>
           <a:xfrm>
-            <a:off x="822960" y="1188720"/>
-            <a:ext cx="10515600" cy="45720"/>
+            <a:off x="822960" y="2779776"/>
+            <a:ext cx="73152" cy="841248"/>
+          </a:xfrm>
+          <a:prstGeom prst="rect">
+            <a:avLst/>
+          </a:prstGeom>
+          <a:solidFill>
+            <a:srgbClr val="CBD5E1"/>
+          </a:solidFill>
+          <a:ln w="12700">
+            <a:solidFill>
+              <a:srgbClr val="CBD5E1">
+                <a:alpha val="0"/>
+              </a:srgbClr>
+            </a:solidFill>
+            <a:prstDash val="solid"/>
+          </a:ln>
+        </p:spPr>
+      </p:sp>
+      <p:sp>
+        <p:nvSpPr>
+          <p:cNvPr id="9" name="Shape 7"/>
+          <p:cNvSpPr/>
+          <p:nvPr/>
+        </p:nvSpPr>
+        <p:spPr>
+          <a:xfrm>
+            <a:off x="822960" y="3822192"/>
+            <a:ext cx="73152" cy="841248"/>
           </a:xfrm>
           <a:prstGeom prst="rect">
             <a:avLst/>
@@ -13235,14 +12759,14 @@
       </p:sp>
       <p:sp>
         <p:nvSpPr>
-          <p:cNvPr id="9" name="Shape 7"/>
-          <p:cNvSpPr/>
-          <p:nvPr/>
-        </p:nvSpPr>
-        <p:spPr>
-          <a:xfrm>
-            <a:off x="822960" y="6382512"/>
-            <a:ext cx="2011680" cy="45720"/>
+          <p:cNvPr id="10" name="Shape 8"/>
+          <p:cNvSpPr/>
+          <p:nvPr/>
+        </p:nvSpPr>
+        <p:spPr>
+          <a:xfrm>
+            <a:off x="822960" y="4864608"/>
+            <a:ext cx="73152" cy="841248"/>
           </a:xfrm>
           <a:prstGeom prst="rect">
             <a:avLst/>
@@ -13262,43 +12786,14 @@
       </p:sp>
       <p:sp>
         <p:nvSpPr>
-          <p:cNvPr id="10" name="Shape 8"/>
-          <p:cNvSpPr/>
-          <p:nvPr/>
-        </p:nvSpPr>
-        <p:spPr>
-          <a:xfrm>
-            <a:off x="6080760" y="1389888"/>
-            <a:ext cx="22860" cy="4846320"/>
-          </a:xfrm>
-          <a:prstGeom prst="rect">
-            <a:avLst/>
-          </a:prstGeom>
-          <a:solidFill>
-            <a:srgbClr val="D5DCE7">
-              <a:alpha val="90000"/>
-            </a:srgbClr>
-          </a:solidFill>
-          <a:ln w="12700">
-            <a:solidFill>
-              <a:srgbClr val="D5DCE7">
-                <a:alpha val="0"/>
-              </a:srgbClr>
-            </a:solidFill>
-            <a:prstDash val="solid"/>
-          </a:ln>
-        </p:spPr>
-      </p:sp>
-      <p:sp>
-        <p:nvSpPr>
           <p:cNvPr id="11" name="Shape 9"/>
           <p:cNvSpPr/>
           <p:nvPr/>
         </p:nvSpPr>
         <p:spPr>
           <a:xfrm>
-            <a:off x="822960" y="1389888"/>
-            <a:ext cx="73152" cy="566928"/>
+            <a:off x="6272784" y="1737360"/>
+            <a:ext cx="73152" cy="841248"/>
           </a:xfrm>
           <a:prstGeom prst="rect">
             <a:avLst/>
@@ -13324,8 +12819,8 @@
         </p:nvSpPr>
         <p:spPr>
           <a:xfrm>
-            <a:off x="822960" y="2103120"/>
-            <a:ext cx="73152" cy="566928"/>
+            <a:off x="6272784" y="2779776"/>
+            <a:ext cx="73152" cy="841248"/>
           </a:xfrm>
           <a:prstGeom prst="rect">
             <a:avLst/>
@@ -13351,8 +12846,8 @@
         </p:nvSpPr>
         <p:spPr>
           <a:xfrm>
-            <a:off x="822960" y="2816352"/>
-            <a:ext cx="73152" cy="566928"/>
+            <a:off x="6272784" y="3822192"/>
+            <a:ext cx="73152" cy="841248"/>
           </a:xfrm>
           <a:prstGeom prst="rect">
             <a:avLst/>
@@ -13378,8 +12873,8 @@
         </p:nvSpPr>
         <p:spPr>
           <a:xfrm>
-            <a:off x="822960" y="3529584"/>
-            <a:ext cx="73152" cy="566928"/>
+            <a:off x="6272784" y="4864608"/>
+            <a:ext cx="73152" cy="841248"/>
           </a:xfrm>
           <a:prstGeom prst="rect">
             <a:avLst/>
@@ -13399,277 +12894,7 @@
       </p:sp>
       <p:sp>
         <p:nvSpPr>
-          <p:cNvPr id="15" name="Shape 13"/>
-          <p:cNvSpPr/>
-          <p:nvPr/>
-        </p:nvSpPr>
-        <p:spPr>
-          <a:xfrm>
-            <a:off x="822960" y="4242816"/>
-            <a:ext cx="73152" cy="566928"/>
-          </a:xfrm>
-          <a:prstGeom prst="rect">
-            <a:avLst/>
-          </a:prstGeom>
-          <a:solidFill>
-            <a:srgbClr val="4F6F8F"/>
-          </a:solidFill>
-          <a:ln w="12700">
-            <a:solidFill>
-              <a:srgbClr val="4F6F8F">
-                <a:alpha val="0"/>
-              </a:srgbClr>
-            </a:solidFill>
-            <a:prstDash val="solid"/>
-          </a:ln>
-        </p:spPr>
-      </p:sp>
-      <p:sp>
-        <p:nvSpPr>
-          <p:cNvPr id="16" name="Shape 14"/>
-          <p:cNvSpPr/>
-          <p:nvPr/>
-        </p:nvSpPr>
-        <p:spPr>
-          <a:xfrm>
-            <a:off x="822960" y="4956048"/>
-            <a:ext cx="73152" cy="566928"/>
-          </a:xfrm>
-          <a:prstGeom prst="rect">
-            <a:avLst/>
-          </a:prstGeom>
-          <a:solidFill>
-            <a:srgbClr val="CBD5E1"/>
-          </a:solidFill>
-          <a:ln w="12700">
-            <a:solidFill>
-              <a:srgbClr val="CBD5E1">
-                <a:alpha val="0"/>
-              </a:srgbClr>
-            </a:solidFill>
-            <a:prstDash val="solid"/>
-          </a:ln>
-        </p:spPr>
-      </p:sp>
-      <p:sp>
-        <p:nvSpPr>
-          <p:cNvPr id="17" name="Shape 15"/>
-          <p:cNvSpPr/>
-          <p:nvPr/>
-        </p:nvSpPr>
-        <p:spPr>
-          <a:xfrm>
-            <a:off x="822960" y="5669280"/>
-            <a:ext cx="73152" cy="566928"/>
-          </a:xfrm>
-          <a:prstGeom prst="rect">
-            <a:avLst/>
-          </a:prstGeom>
-          <a:solidFill>
-            <a:srgbClr val="4F6F8F"/>
-          </a:solidFill>
-          <a:ln w="12700">
-            <a:solidFill>
-              <a:srgbClr val="4F6F8F">
-                <a:alpha val="0"/>
-              </a:srgbClr>
-            </a:solidFill>
-            <a:prstDash val="solid"/>
-          </a:ln>
-        </p:spPr>
-      </p:sp>
-      <p:sp>
-        <p:nvSpPr>
-          <p:cNvPr id="18" name="Shape 16"/>
-          <p:cNvSpPr/>
-          <p:nvPr/>
-        </p:nvSpPr>
-        <p:spPr>
-          <a:xfrm>
-            <a:off x="6272784" y="1389888"/>
-            <a:ext cx="73152" cy="566928"/>
-          </a:xfrm>
-          <a:prstGeom prst="rect">
-            <a:avLst/>
-          </a:prstGeom>
-          <a:solidFill>
-            <a:srgbClr val="CBD5E1"/>
-          </a:solidFill>
-          <a:ln w="12700">
-            <a:solidFill>
-              <a:srgbClr val="CBD5E1">
-                <a:alpha val="0"/>
-              </a:srgbClr>
-            </a:solidFill>
-            <a:prstDash val="solid"/>
-          </a:ln>
-        </p:spPr>
-      </p:sp>
-      <p:sp>
-        <p:nvSpPr>
-          <p:cNvPr id="19" name="Shape 17"/>
-          <p:cNvSpPr/>
-          <p:nvPr/>
-        </p:nvSpPr>
-        <p:spPr>
-          <a:xfrm>
-            <a:off x="6272784" y="2103120"/>
-            <a:ext cx="73152" cy="566928"/>
-          </a:xfrm>
-          <a:prstGeom prst="rect">
-            <a:avLst/>
-          </a:prstGeom>
-          <a:solidFill>
-            <a:srgbClr val="4F6F8F"/>
-          </a:solidFill>
-          <a:ln w="12700">
-            <a:solidFill>
-              <a:srgbClr val="4F6F8F">
-                <a:alpha val="0"/>
-              </a:srgbClr>
-            </a:solidFill>
-            <a:prstDash val="solid"/>
-          </a:ln>
-        </p:spPr>
-      </p:sp>
-      <p:sp>
-        <p:nvSpPr>
-          <p:cNvPr id="20" name="Shape 18"/>
-          <p:cNvSpPr/>
-          <p:nvPr/>
-        </p:nvSpPr>
-        <p:spPr>
-          <a:xfrm>
-            <a:off x="6272784" y="2816352"/>
-            <a:ext cx="73152" cy="566928"/>
-          </a:xfrm>
-          <a:prstGeom prst="rect">
-            <a:avLst/>
-          </a:prstGeom>
-          <a:solidFill>
-            <a:srgbClr val="CBD5E1"/>
-          </a:solidFill>
-          <a:ln w="12700">
-            <a:solidFill>
-              <a:srgbClr val="CBD5E1">
-                <a:alpha val="0"/>
-              </a:srgbClr>
-            </a:solidFill>
-            <a:prstDash val="solid"/>
-          </a:ln>
-        </p:spPr>
-      </p:sp>
-      <p:sp>
-        <p:nvSpPr>
-          <p:cNvPr id="21" name="Shape 19"/>
-          <p:cNvSpPr/>
-          <p:nvPr/>
-        </p:nvSpPr>
-        <p:spPr>
-          <a:xfrm>
-            <a:off x="6272784" y="3529584"/>
-            <a:ext cx="73152" cy="566928"/>
-          </a:xfrm>
-          <a:prstGeom prst="rect">
-            <a:avLst/>
-          </a:prstGeom>
-          <a:solidFill>
-            <a:srgbClr val="4F6F8F"/>
-          </a:solidFill>
-          <a:ln w="12700">
-            <a:solidFill>
-              <a:srgbClr val="4F6F8F">
-                <a:alpha val="0"/>
-              </a:srgbClr>
-            </a:solidFill>
-            <a:prstDash val="solid"/>
-          </a:ln>
-        </p:spPr>
-      </p:sp>
-      <p:sp>
-        <p:nvSpPr>
-          <p:cNvPr id="22" name="Shape 20"/>
-          <p:cNvSpPr/>
-          <p:nvPr/>
-        </p:nvSpPr>
-        <p:spPr>
-          <a:xfrm>
-            <a:off x="6272784" y="4242816"/>
-            <a:ext cx="73152" cy="566928"/>
-          </a:xfrm>
-          <a:prstGeom prst="rect">
-            <a:avLst/>
-          </a:prstGeom>
-          <a:solidFill>
-            <a:srgbClr val="CBD5E1"/>
-          </a:solidFill>
-          <a:ln w="12700">
-            <a:solidFill>
-              <a:srgbClr val="CBD5E1">
-                <a:alpha val="0"/>
-              </a:srgbClr>
-            </a:solidFill>
-            <a:prstDash val="solid"/>
-          </a:ln>
-        </p:spPr>
-      </p:sp>
-      <p:sp>
-        <p:nvSpPr>
-          <p:cNvPr id="23" name="Shape 21"/>
-          <p:cNvSpPr/>
-          <p:nvPr/>
-        </p:nvSpPr>
-        <p:spPr>
-          <a:xfrm>
-            <a:off x="6272784" y="4956048"/>
-            <a:ext cx="73152" cy="566928"/>
-          </a:xfrm>
-          <a:prstGeom prst="rect">
-            <a:avLst/>
-          </a:prstGeom>
-          <a:solidFill>
-            <a:srgbClr val="4F6F8F"/>
-          </a:solidFill>
-          <a:ln w="12700">
-            <a:solidFill>
-              <a:srgbClr val="4F6F8F">
-                <a:alpha val="0"/>
-              </a:srgbClr>
-            </a:solidFill>
-            <a:prstDash val="solid"/>
-          </a:ln>
-        </p:spPr>
-      </p:sp>
-      <p:sp>
-        <p:nvSpPr>
-          <p:cNvPr id="24" name="Shape 22"/>
-          <p:cNvSpPr/>
-          <p:nvPr/>
-        </p:nvSpPr>
-        <p:spPr>
-          <a:xfrm>
-            <a:off x="6272784" y="5669280"/>
-            <a:ext cx="73152" cy="566928"/>
-          </a:xfrm>
-          <a:prstGeom prst="rect">
-            <a:avLst/>
-          </a:prstGeom>
-          <a:solidFill>
-            <a:srgbClr val="CBD5E1"/>
-          </a:solidFill>
-          <a:ln w="12700">
-            <a:solidFill>
-              <a:srgbClr val="CBD5E1">
-                <a:alpha val="0"/>
-              </a:srgbClr>
-            </a:solidFill>
-            <a:prstDash val="solid"/>
-          </a:ln>
-        </p:spPr>
-      </p:sp>
-      <p:sp>
-        <p:nvSpPr>
-          <p:cNvPr id="25" name="mdpr:1-2-0772f8:title:__title:1-2-0772f8"/>
+          <p:cNvPr id="15" name="mdpr:1-2-0772f8:title:__title:1-2-0772f8"/>
           <p:cNvSpPr txBox="1"/>
           <p:nvPr/>
         </p:nvSpPr>
@@ -13711,14 +12936,14 @@
       </p:sp>
       <p:sp>
         <p:nvSpPr>
-          <p:cNvPr id="26" name="mdpr:1-2-0772f8:toc-item-1:toc-item-1"/>
+          <p:cNvPr id="16" name="mdpr:1-2-0772f8:toc-item-1:toc-item-1"/>
           <p:cNvSpPr txBox="1"/>
           <p:nvPr/>
         </p:nvSpPr>
         <p:spPr>
           <a:xfrm>
-            <a:off x="1042416" y="1481328"/>
-            <a:ext cx="4645152" cy="384048"/>
+            <a:off x="1042416" y="1828800"/>
+            <a:ext cx="4645152" cy="658368"/>
           </a:xfrm>
           <a:prstGeom prst="rect">
             <a:avLst/>
@@ -13753,14 +12978,14 @@
       </p:sp>
       <p:sp>
         <p:nvSpPr>
-          <p:cNvPr id="27" name="mdpr:1-2-0772f8:toc-item-2:toc-item-2"/>
+          <p:cNvPr id="17" name="mdpr:1-2-0772f8:toc-item-2:toc-item-2"/>
           <p:cNvSpPr txBox="1"/>
           <p:nvPr/>
         </p:nvSpPr>
         <p:spPr>
           <a:xfrm>
-            <a:off x="1042416" y="2194560"/>
-            <a:ext cx="4645152" cy="384048"/>
+            <a:off x="1042416" y="2871216"/>
+            <a:ext cx="4645152" cy="658368"/>
           </a:xfrm>
           <a:prstGeom prst="rect">
             <a:avLst/>
@@ -13795,14 +13020,14 @@
       </p:sp>
       <p:sp>
         <p:nvSpPr>
-          <p:cNvPr id="28" name="mdpr:1-2-0772f8:toc-item-3:toc-item-3"/>
+          <p:cNvPr id="18" name="mdpr:1-2-0772f8:toc-item-3:toc-item-3"/>
           <p:cNvSpPr txBox="1"/>
           <p:nvPr/>
         </p:nvSpPr>
         <p:spPr>
           <a:xfrm>
-            <a:off x="1042416" y="2907792"/>
-            <a:ext cx="4645152" cy="384048"/>
+            <a:off x="1042416" y="3913632"/>
+            <a:ext cx="4645152" cy="658368"/>
           </a:xfrm>
           <a:prstGeom prst="rect">
             <a:avLst/>
@@ -13837,14 +13062,14 @@
       </p:sp>
       <p:sp>
         <p:nvSpPr>
-          <p:cNvPr id="29" name="mdpr:1-2-0772f8:toc-item-4:toc-item-4"/>
+          <p:cNvPr id="19" name="mdpr:1-2-0772f8:toc-item-4:toc-item-4"/>
           <p:cNvSpPr txBox="1"/>
           <p:nvPr/>
         </p:nvSpPr>
         <p:spPr>
           <a:xfrm>
-            <a:off x="1042416" y="3621024"/>
-            <a:ext cx="4645152" cy="384048"/>
+            <a:off x="1042416" y="4956048"/>
+            <a:ext cx="4645152" cy="658368"/>
           </a:xfrm>
           <a:prstGeom prst="rect">
             <a:avLst/>
@@ -13879,14 +13104,14 @@
       </p:sp>
       <p:sp>
         <p:nvSpPr>
-          <p:cNvPr id="30" name="mdpr:1-2-0772f8:toc-item-5:toc-item-5"/>
+          <p:cNvPr id="20" name="mdpr:1-2-0772f8:toc-item-5:toc-item-5"/>
           <p:cNvSpPr txBox="1"/>
           <p:nvPr/>
         </p:nvSpPr>
         <p:spPr>
           <a:xfrm>
-            <a:off x="1042416" y="4334256"/>
-            <a:ext cx="4645152" cy="384048"/>
+            <a:off x="6492240" y="1828800"/>
+            <a:ext cx="4645152" cy="658368"/>
           </a:xfrm>
           <a:prstGeom prst="rect">
             <a:avLst/>
@@ -13921,14 +13146,14 @@
       </p:sp>
       <p:sp>
         <p:nvSpPr>
-          <p:cNvPr id="31" name="mdpr:1-2-0772f8:toc-item-6:toc-item-6"/>
+          <p:cNvPr id="21" name="mdpr:1-2-0772f8:toc-item-6:toc-item-6"/>
           <p:cNvSpPr txBox="1"/>
           <p:nvPr/>
         </p:nvSpPr>
         <p:spPr>
           <a:xfrm>
-            <a:off x="1042416" y="5047488"/>
-            <a:ext cx="4645152" cy="384048"/>
+            <a:off x="6492240" y="2871216"/>
+            <a:ext cx="4645152" cy="658368"/>
           </a:xfrm>
           <a:prstGeom prst="rect">
             <a:avLst/>
@@ -13963,14 +13188,14 @@
       </p:sp>
       <p:sp>
         <p:nvSpPr>
-          <p:cNvPr id="32" name="mdpr:1-2-0772f8:toc-item-7:toc-item-7"/>
+          <p:cNvPr id="22" name="mdpr:1-2-0772f8:toc-item-7:toc-item-7"/>
           <p:cNvSpPr txBox="1"/>
           <p:nvPr/>
         </p:nvSpPr>
         <p:spPr>
           <a:xfrm>
-            <a:off x="1042416" y="5760720"/>
-            <a:ext cx="4645152" cy="384048"/>
+            <a:off x="6492240" y="3913632"/>
+            <a:ext cx="4645152" cy="658368"/>
           </a:xfrm>
           <a:prstGeom prst="rect">
             <a:avLst/>
@@ -14005,14 +13230,14 @@
       </p:sp>
       <p:sp>
         <p:nvSpPr>
-          <p:cNvPr id="33" name="mdpr:1-2-0772f8:toc-item-8:toc-item-8"/>
+          <p:cNvPr id="23" name="mdpr:1-2-0772f8:toc-item-8:toc-item-8"/>
           <p:cNvSpPr txBox="1"/>
           <p:nvPr/>
         </p:nvSpPr>
         <p:spPr>
           <a:xfrm>
-            <a:off x="6492240" y="1481328"/>
-            <a:ext cx="4645152" cy="384048"/>
+            <a:off x="6492240" y="4956048"/>
+            <a:ext cx="4645152" cy="658368"/>
           </a:xfrm>
           <a:prstGeom prst="rect">
             <a:avLst/>
@@ -14040,258 +13265,6 @@
                 <a:cs typeface="Pretendard" pitchFamily="34" charset="-120"/>
               </a:rPr>
               <a:t>08  Chart and Table Pair</a:t>
-            </a:r>
-            <a:endParaRPr lang="en-US" sz="1800" dirty="0"/>
-          </a:p>
-        </p:txBody>
-      </p:sp>
-      <p:sp>
-        <p:nvSpPr>
-          <p:cNvPr id="34" name="mdpr:1-2-0772f8:toc-item-9:toc-item-9"/>
-          <p:cNvSpPr txBox="1"/>
-          <p:nvPr/>
-        </p:nvSpPr>
-        <p:spPr>
-          <a:xfrm>
-            <a:off x="6492240" y="2194560"/>
-            <a:ext cx="4645152" cy="384048"/>
-          </a:xfrm>
-          <a:prstGeom prst="rect">
-            <a:avLst/>
-          </a:prstGeom>
-          <a:noFill/>
-          <a:ln/>
-        </p:spPr>
-        <p:txBody>
-          <a:bodyPr wrap="square" lIns="0" tIns="25400" rIns="25400" bIns="0" rtlCol="0" anchor="ctr"/>
-          <a:lstStyle/>
-          <a:p>
-            <a:pPr algn="ctr" indent="0" marL="0">
-              <a:lnSpc>
-                <a:spcPct val="120000"/>
-              </a:lnSpc>
-              <a:buNone/>
-            </a:pPr>
-            <a:r>
-              <a:rPr lang="en-US" sz="1800" dirty="0">
-                <a:solidFill>
-                  <a:srgbClr val="111111"/>
-                </a:solidFill>
-                <a:latin typeface="Pretendard" pitchFamily="34" charset="0"/>
-                <a:ea typeface="Pretendard" pitchFamily="34" charset="-122"/>
-                <a:cs typeface="Pretendard" pitchFamily="34" charset="-120"/>
-              </a:rPr>
-              <a:t>09  Editable Proof Objects</a:t>
-            </a:r>
-            <a:endParaRPr lang="en-US" sz="1800" dirty="0"/>
-          </a:p>
-        </p:txBody>
-      </p:sp>
-      <p:sp>
-        <p:nvSpPr>
-          <p:cNvPr id="35" name="mdpr:1-2-0772f8:toc-item-10:toc-item-10"/>
-          <p:cNvSpPr txBox="1"/>
-          <p:nvPr/>
-        </p:nvSpPr>
-        <p:spPr>
-          <a:xfrm>
-            <a:off x="6492240" y="2907792"/>
-            <a:ext cx="4645152" cy="384048"/>
-          </a:xfrm>
-          <a:prstGeom prst="rect">
-            <a:avLst/>
-          </a:prstGeom>
-          <a:noFill/>
-          <a:ln/>
-        </p:spPr>
-        <p:txBody>
-          <a:bodyPr wrap="square" lIns="0" tIns="25400" rIns="25400" bIns="0" rtlCol="0" anchor="ctr"/>
-          <a:lstStyle/>
-          <a:p>
-            <a:pPr algn="ctr" indent="0" marL="0">
-              <a:lnSpc>
-                <a:spcPct val="120000"/>
-              </a:lnSpc>
-              <a:buNone/>
-            </a:pPr>
-            <a:r>
-              <a:rPr lang="en-US" sz="1800" dirty="0">
-                <a:solidFill>
-                  <a:srgbClr val="111111"/>
-                </a:solidFill>
-                <a:latin typeface="Pretendard" pitchFamily="34" charset="0"/>
-                <a:ea typeface="Pretendard" pitchFamily="34" charset="-122"/>
-                <a:cs typeface="Pretendard" pitchFamily="34" charset="-120"/>
-              </a:rPr>
-              <a:t>10  Object Shape Grammar</a:t>
-            </a:r>
-            <a:endParaRPr lang="en-US" sz="1800" dirty="0"/>
-          </a:p>
-        </p:txBody>
-      </p:sp>
-      <p:sp>
-        <p:nvSpPr>
-          <p:cNvPr id="36" name="mdpr:1-2-0772f8:toc-item-11:toc-item-11"/>
-          <p:cNvSpPr txBox="1"/>
-          <p:nvPr/>
-        </p:nvSpPr>
-        <p:spPr>
-          <a:xfrm>
-            <a:off x="6492240" y="3621024"/>
-            <a:ext cx="4645152" cy="384048"/>
-          </a:xfrm>
-          <a:prstGeom prst="rect">
-            <a:avLst/>
-          </a:prstGeom>
-          <a:noFill/>
-          <a:ln/>
-        </p:spPr>
-        <p:txBody>
-          <a:bodyPr wrap="square" lIns="0" tIns="25400" rIns="25400" bIns="0" rtlCol="0" anchor="ctr"/>
-          <a:lstStyle/>
-          <a:p>
-            <a:pPr algn="ctr" indent="0" marL="0">
-              <a:lnSpc>
-                <a:spcPct val="120000"/>
-              </a:lnSpc>
-              <a:buNone/>
-            </a:pPr>
-            <a:r>
-              <a:rPr lang="en-US" sz="1800" dirty="0">
-                <a:solidFill>
-                  <a:srgbClr val="111111"/>
-                </a:solidFill>
-                <a:latin typeface="Pretendard" pitchFamily="34" charset="0"/>
-                <a:ea typeface="Pretendard" pitchFamily="34" charset="-122"/>
-                <a:cs typeface="Pretendard" pitchFamily="34" charset="-120"/>
-              </a:rPr>
-              <a:t>11  Icon and Text Aside</a:t>
-            </a:r>
-            <a:endParaRPr lang="en-US" sz="1800" dirty="0"/>
-          </a:p>
-        </p:txBody>
-      </p:sp>
-      <p:sp>
-        <p:nvSpPr>
-          <p:cNvPr id="37" name="mdpr:1-2-0772f8:toc-item-12:toc-item-12"/>
-          <p:cNvSpPr txBox="1"/>
-          <p:nvPr/>
-        </p:nvSpPr>
-        <p:spPr>
-          <a:xfrm>
-            <a:off x="6492240" y="4334256"/>
-            <a:ext cx="4645152" cy="384048"/>
-          </a:xfrm>
-          <a:prstGeom prst="rect">
-            <a:avLst/>
-          </a:prstGeom>
-          <a:noFill/>
-          <a:ln/>
-        </p:spPr>
-        <p:txBody>
-          <a:bodyPr wrap="square" lIns="0" tIns="25400" rIns="25400" bIns="0" rtlCol="0" anchor="ctr"/>
-          <a:lstStyle/>
-          <a:p>
-            <a:pPr algn="ctr" indent="0" marL="0">
-              <a:lnSpc>
-                <a:spcPct val="120000"/>
-              </a:lnSpc>
-              <a:buNone/>
-            </a:pPr>
-            <a:r>
-              <a:rPr lang="en-US" sz="1800" dirty="0">
-                <a:solidFill>
-                  <a:srgbClr val="111111"/>
-                </a:solidFill>
-                <a:latin typeface="Pretendard" pitchFamily="34" charset="0"/>
-                <a:ea typeface="Pretendard" pitchFamily="34" charset="-122"/>
-                <a:cs typeface="Pretendard" pitchFamily="34" charset="-120"/>
-              </a:rPr>
-              <a:t>12  Overflow Guard</a:t>
-            </a:r>
-            <a:endParaRPr lang="en-US" sz="1800" dirty="0"/>
-          </a:p>
-        </p:txBody>
-      </p:sp>
-      <p:sp>
-        <p:nvSpPr>
-          <p:cNvPr id="38" name="mdpr:1-2-0772f8:toc-item-13:toc-item-13"/>
-          <p:cNvSpPr txBox="1"/>
-          <p:nvPr/>
-        </p:nvSpPr>
-        <p:spPr>
-          <a:xfrm>
-            <a:off x="6492240" y="5047488"/>
-            <a:ext cx="4645152" cy="384048"/>
-          </a:xfrm>
-          <a:prstGeom prst="rect">
-            <a:avLst/>
-          </a:prstGeom>
-          <a:noFill/>
-          <a:ln/>
-        </p:spPr>
-        <p:txBody>
-          <a:bodyPr wrap="square" lIns="0" tIns="25400" rIns="25400" bIns="0" rtlCol="0" anchor="ctr"/>
-          <a:lstStyle/>
-          <a:p>
-            <a:pPr algn="ctr" indent="0" marL="0">
-              <a:lnSpc>
-                <a:spcPct val="120000"/>
-              </a:lnSpc>
-              <a:buNone/>
-            </a:pPr>
-            <a:r>
-              <a:rPr lang="en-US" sz="1800" dirty="0">
-                <a:solidFill>
-                  <a:srgbClr val="111111"/>
-                </a:solidFill>
-                <a:latin typeface="Pretendard" pitchFamily="34" charset="0"/>
-                <a:ea typeface="Pretendard" pitchFamily="34" charset="-122"/>
-                <a:cs typeface="Pretendard" pitchFamily="34" charset="-120"/>
-              </a:rPr>
-              <a:t>13  Image Safe Frame</a:t>
-            </a:r>
-            <a:endParaRPr lang="en-US" sz="1800" dirty="0"/>
-          </a:p>
-        </p:txBody>
-      </p:sp>
-      <p:sp>
-        <p:nvSpPr>
-          <p:cNvPr id="39" name="mdpr:1-2-0772f8:toc-item-14:toc-item-14"/>
-          <p:cNvSpPr txBox="1"/>
-          <p:nvPr/>
-        </p:nvSpPr>
-        <p:spPr>
-          <a:xfrm>
-            <a:off x="6492240" y="5760720"/>
-            <a:ext cx="4645152" cy="384048"/>
-          </a:xfrm>
-          <a:prstGeom prst="rect">
-            <a:avLst/>
-          </a:prstGeom>
-          <a:noFill/>
-          <a:ln/>
-        </p:spPr>
-        <p:txBody>
-          <a:bodyPr wrap="square" lIns="0" tIns="25400" rIns="25400" bIns="0" rtlCol="0" anchor="ctr"/>
-          <a:lstStyle/>
-          <a:p>
-            <a:pPr algn="ctr" indent="0" marL="0">
-              <a:lnSpc>
-                <a:spcPct val="120000"/>
-              </a:lnSpc>
-              <a:buNone/>
-            </a:pPr>
-            <a:r>
-              <a:rPr lang="en-US" sz="1800" dirty="0">
-                <a:solidFill>
-                  <a:srgbClr val="111111"/>
-                </a:solidFill>
-                <a:latin typeface="Pretendard" pitchFamily="34" charset="0"/>
-                <a:ea typeface="Pretendard" pitchFamily="34" charset="-122"/>
-                <a:cs typeface="Pretendard" pitchFamily="34" charset="-120"/>
-              </a:rPr>
-              <a:t>14  Mixed Object Packing</a:t>
             </a:r>
             <a:endParaRPr lang="en-US" sz="1800" dirty="0"/>
           </a:p>
@@ -14495,8 +13468,8 @@
         </p:nvSpPr>
         <p:spPr>
           <a:xfrm>
-            <a:off x="731520" y="1207008"/>
-            <a:ext cx="1325880" cy="54864"/>
+            <a:off x="914400" y="1463040"/>
+            <a:ext cx="10241280" cy="73152"/>
           </a:xfrm>
           <a:prstGeom prst="rect">
             <a:avLst/>
@@ -14516,61 +13489,7 @@
       </p:sp>
       <p:sp>
         <p:nvSpPr>
-          <p:cNvPr id="8" name="Shape 6"/>
-          <p:cNvSpPr/>
-          <p:nvPr/>
-        </p:nvSpPr>
-        <p:spPr>
-          <a:xfrm>
-            <a:off x="822960" y="1554480"/>
-            <a:ext cx="4937760" cy="73152"/>
-          </a:xfrm>
-          <a:prstGeom prst="rect">
-            <a:avLst/>
-          </a:prstGeom>
-          <a:solidFill>
-            <a:srgbClr val="4F6F8F"/>
-          </a:solidFill>
-          <a:ln w="12700">
-            <a:solidFill>
-              <a:srgbClr val="4F6F8F">
-                <a:alpha val="0"/>
-              </a:srgbClr>
-            </a:solidFill>
-            <a:prstDash val="solid"/>
-          </a:ln>
-        </p:spPr>
-      </p:sp>
-      <p:sp>
-        <p:nvSpPr>
-          <p:cNvPr id="9" name="Shape 7"/>
-          <p:cNvSpPr/>
-          <p:nvPr/>
-        </p:nvSpPr>
-        <p:spPr>
-          <a:xfrm>
-            <a:off x="6400800" y="1554480"/>
-            <a:ext cx="4937760" cy="73152"/>
-          </a:xfrm>
-          <a:prstGeom prst="rect">
-            <a:avLst/>
-          </a:prstGeom>
-          <a:solidFill>
-            <a:srgbClr val="4F6F8F"/>
-          </a:solidFill>
-          <a:ln w="12700">
-            <a:solidFill>
-              <a:srgbClr val="4F6F8F">
-                <a:alpha val="0"/>
-              </a:srgbClr>
-            </a:solidFill>
-            <a:prstDash val="solid"/>
-          </a:ln>
-        </p:spPr>
-      </p:sp>
-      <p:sp>
-        <p:nvSpPr>
-          <p:cNvPr id="10" name="mdpr:2-2-4f71ba:title:__title:2-2-4f71ba"/>
+          <p:cNvPr id="8" name="mdpr:2-2-4f71ba:title:__title:2-2-4f71ba"/>
           <p:cNvSpPr txBox="1"/>
           <p:nvPr/>
         </p:nvSpPr>
@@ -14604,7 +13523,24 @@
                 <a:ea typeface="Pretendard" pitchFamily="34" charset="-122"/>
                 <a:cs typeface="Pretendard" pitchFamily="34" charset="-120"/>
               </a:rPr>
-              <a:t>Object Shape Grammar (Cont. 2/2)</a:t>
+              <a:t>Object Shape Grammar</a:t>
+            </a:r>
+            <a:pPr algn="ctr" indent="0" marL="0">
+              <a:lnSpc>
+                <a:spcPct val="120000"/>
+              </a:lnSpc>
+              <a:buNone/>
+            </a:pPr>
+            <a:r>
+              <a:rPr lang="en-US" sz="2000" dirty="0">
+                <a:solidFill>
+                  <a:srgbClr val="898989"/>
+                </a:solidFill>
+                <a:latin typeface="Pretendard" pitchFamily="34" charset="0"/>
+                <a:ea typeface="Pretendard" pitchFamily="34" charset="-122"/>
+                <a:cs typeface="Pretendard" pitchFamily="34" charset="-120"/>
+              </a:rPr>
+              <a:t> (Cont. 2/2)</a:t>
             </a:r>
             <a:endParaRPr lang="en-US" sz="3400" dirty="0"/>
           </a:p>
@@ -14612,14 +13548,14 @@
       </p:sp>
       <p:sp>
         <p:nvSpPr>
-          <p:cNvPr id="11" name="mdpr:2-2-4f71ba:left:block-27-chunk-2"/>
+          <p:cNvPr id="9" name="mdpr:2-2-4f71ba:body:block-27-chunk-2"/>
           <p:cNvSpPr txBox="1"/>
           <p:nvPr/>
         </p:nvSpPr>
         <p:spPr>
           <a:xfrm>
-            <a:off x="896112" y="1664208"/>
-            <a:ext cx="4791456" cy="4169664"/>
+            <a:off x="987552" y="1572768"/>
+            <a:ext cx="10094976" cy="4261104"/>
           </a:xfrm>
           <a:prstGeom prst="rect">
             <a:avLst/>
@@ -14667,28 +13603,6 @@
             </a:r>
             <a:endParaRPr lang="en-US" sz="2200" dirty="0"/>
           </a:p>
-        </p:txBody>
-      </p:sp>
-      <p:sp>
-        <p:nvSpPr>
-          <p:cNvPr id="12" name="mdpr:2-2-4f71ba:right:block-27-chunk-2"/>
-          <p:cNvSpPr txBox="1"/>
-          <p:nvPr/>
-        </p:nvSpPr>
-        <p:spPr>
-          <a:xfrm>
-            <a:off x="6473952" y="1664208"/>
-            <a:ext cx="4791456" cy="4169664"/>
-          </a:xfrm>
-          <a:prstGeom prst="rect">
-            <a:avLst/>
-          </a:prstGeom>
-          <a:noFill/>
-          <a:ln/>
-        </p:spPr>
-        <p:txBody>
-          <a:bodyPr wrap="square" lIns="0" tIns="25400" rIns="25400" bIns="0" rtlCol="0" anchor="t"/>
-          <a:lstStyle/>
           <a:p>
             <a:pPr algn="l" indent="0" marL="0">
               <a:lnSpc>
@@ -14707,6 +13621,9 @@
               </a:rPr>
               <a:t>- Rounded panel</a:t>
             </a:r>
+            <a:endParaRPr lang="en-US" sz="2200" dirty="0"/>
+          </a:p>
+          <a:p>
             <a:pPr algn="l" indent="0" marL="0">
               <a:lnSpc>
                 <a:spcPct val="120000"/>
@@ -14926,33 +13843,6 @@
         </p:nvSpPr>
         <p:spPr>
           <a:xfrm>
-            <a:off x="731520" y="1207008"/>
-            <a:ext cx="1325880" cy="54864"/>
-          </a:xfrm>
-          <a:prstGeom prst="rect">
-            <a:avLst/>
-          </a:prstGeom>
-          <a:solidFill>
-            <a:srgbClr val="4F6F8F"/>
-          </a:solidFill>
-          <a:ln w="12700">
-            <a:solidFill>
-              <a:srgbClr val="4F6F8F">
-                <a:alpha val="0"/>
-              </a:srgbClr>
-            </a:solidFill>
-            <a:prstDash val="solid"/>
-          </a:ln>
-        </p:spPr>
-      </p:sp>
-      <p:sp>
-        <p:nvSpPr>
-          <p:cNvPr id="8" name="Shape 6"/>
-          <p:cNvSpPr/>
-          <p:nvPr/>
-        </p:nvSpPr>
-        <p:spPr>
-          <a:xfrm>
             <a:off x="864108" y="1513332"/>
             <a:ext cx="5029200" cy="1920240"/>
           </a:xfrm>
@@ -14985,7 +13875,7 @@
       </p:sp>
       <p:sp>
         <p:nvSpPr>
-          <p:cNvPr id="9" name="Shape 7"/>
+          <p:cNvPr id="8" name="Shape 6"/>
           <p:cNvSpPr/>
           <p:nvPr/>
         </p:nvSpPr>
@@ -15023,7 +13913,7 @@
       </p:sp>
       <p:sp>
         <p:nvSpPr>
-          <p:cNvPr id="10" name="Shape 8"/>
+          <p:cNvPr id="9" name="Shape 7"/>
           <p:cNvSpPr/>
           <p:nvPr/>
         </p:nvSpPr>
@@ -15054,7 +13944,7 @@
       </p:sp>
       <p:pic>
         <p:nvPicPr>
-          <p:cNvPr id="11" name="Image 0" descr="preencoded.png">    </p:cNvPr>
+          <p:cNvPr id="10" name="Image 0" descr="preencoded.png">    </p:cNvPr>
           <p:cNvPicPr>
             <a:picLocks noChangeAspect="1"/>
           </p:cNvPicPr>
@@ -15084,7 +13974,7 @@
       </p:pic>
       <p:sp>
         <p:nvSpPr>
-          <p:cNvPr id="12" name="Shape 9"/>
+          <p:cNvPr id="11" name="Shape 8"/>
           <p:cNvSpPr/>
           <p:nvPr/>
         </p:nvSpPr>
@@ -15122,7 +14012,7 @@
       </p:sp>
       <p:sp>
         <p:nvSpPr>
-          <p:cNvPr id="13" name="Shape 10"/>
+          <p:cNvPr id="12" name="Shape 9"/>
           <p:cNvSpPr/>
           <p:nvPr/>
         </p:nvSpPr>
@@ -15160,7 +14050,7 @@
       </p:sp>
       <p:sp>
         <p:nvSpPr>
-          <p:cNvPr id="14" name="Shape 11"/>
+          <p:cNvPr id="13" name="Shape 10"/>
           <p:cNvSpPr/>
           <p:nvPr/>
         </p:nvSpPr>
@@ -15191,7 +14081,7 @@
       </p:sp>
       <p:pic>
         <p:nvPicPr>
-          <p:cNvPr id="15" name="Image 1" descr="preencoded.png">    </p:cNvPr>
+          <p:cNvPr id="14" name="Image 1" descr="preencoded.png">    </p:cNvPr>
           <p:cNvPicPr>
             <a:picLocks noChangeAspect="1"/>
           </p:cNvPicPr>
@@ -15221,7 +14111,7 @@
       </p:pic>
       <p:sp>
         <p:nvSpPr>
-          <p:cNvPr id="16" name="Shape 12"/>
+          <p:cNvPr id="15" name="Shape 11"/>
           <p:cNvSpPr/>
           <p:nvPr/>
         </p:nvSpPr>
@@ -15259,7 +14149,7 @@
       </p:sp>
       <p:sp>
         <p:nvSpPr>
-          <p:cNvPr id="17" name="Shape 13"/>
+          <p:cNvPr id="16" name="Shape 12"/>
           <p:cNvSpPr/>
           <p:nvPr/>
         </p:nvSpPr>
@@ -15297,7 +14187,7 @@
       </p:sp>
       <p:sp>
         <p:nvSpPr>
-          <p:cNvPr id="18" name="Shape 14"/>
+          <p:cNvPr id="17" name="Shape 13"/>
           <p:cNvSpPr/>
           <p:nvPr/>
         </p:nvSpPr>
@@ -15328,7 +14218,7 @@
       </p:sp>
       <p:pic>
         <p:nvPicPr>
-          <p:cNvPr id="19" name="Image 2" descr="preencoded.png">    </p:cNvPr>
+          <p:cNvPr id="18" name="Image 2" descr="preencoded.png">    </p:cNvPr>
           <p:cNvPicPr>
             <a:picLocks noChangeAspect="1"/>
           </p:cNvPicPr>
@@ -15358,7 +14248,7 @@
       </p:pic>
       <p:sp>
         <p:nvSpPr>
-          <p:cNvPr id="20" name="Shape 15"/>
+          <p:cNvPr id="19" name="Shape 14"/>
           <p:cNvSpPr/>
           <p:nvPr/>
         </p:nvSpPr>
@@ -15396,7 +14286,7 @@
       </p:sp>
       <p:sp>
         <p:nvSpPr>
-          <p:cNvPr id="21" name="Shape 16"/>
+          <p:cNvPr id="20" name="Shape 15"/>
           <p:cNvSpPr/>
           <p:nvPr/>
         </p:nvSpPr>
@@ -15434,7 +14324,7 @@
       </p:sp>
       <p:sp>
         <p:nvSpPr>
-          <p:cNvPr id="22" name="Shape 17"/>
+          <p:cNvPr id="21" name="Shape 16"/>
           <p:cNvSpPr/>
           <p:nvPr/>
         </p:nvSpPr>
@@ -15465,7 +14355,7 @@
       </p:sp>
       <p:pic>
         <p:nvPicPr>
-          <p:cNvPr id="23" name="Image 3" descr="preencoded.png">    </p:cNvPr>
+          <p:cNvPr id="22" name="Image 3" descr="preencoded.png">    </p:cNvPr>
           <p:cNvPicPr>
             <a:picLocks noChangeAspect="1"/>
           </p:cNvPicPr>
@@ -15495,7 +14385,7 @@
       </p:pic>
       <p:sp>
         <p:nvSpPr>
-          <p:cNvPr id="24" name="Shape 18"/>
+          <p:cNvPr id="23" name="Shape 17"/>
           <p:cNvSpPr/>
           <p:nvPr/>
         </p:nvSpPr>
@@ -15522,7 +14412,7 @@
       </p:sp>
       <p:sp>
         <p:nvSpPr>
-          <p:cNvPr id="25" name="Shape 19"/>
+          <p:cNvPr id="24" name="Shape 18"/>
           <p:cNvSpPr/>
           <p:nvPr/>
         </p:nvSpPr>
@@ -15549,7 +14439,7 @@
       </p:sp>
       <p:sp>
         <p:nvSpPr>
-          <p:cNvPr id="26" name="Shape 20"/>
+          <p:cNvPr id="25" name="Shape 19"/>
           <p:cNvSpPr/>
           <p:nvPr/>
         </p:nvSpPr>
@@ -15576,7 +14466,7 @@
       </p:sp>
       <p:sp>
         <p:nvSpPr>
-          <p:cNvPr id="27" name="Shape 21"/>
+          <p:cNvPr id="26" name="Shape 20"/>
           <p:cNvSpPr/>
           <p:nvPr/>
         </p:nvSpPr>
@@ -15603,7 +14493,7 @@
       </p:sp>
       <p:sp>
         <p:nvSpPr>
-          <p:cNvPr id="28" name="mdpr:icon-and-text-aside-8429fc:title:__title:icon-and-text-aside-8429fc"/>
+          <p:cNvPr id="27" name="mdpr:icon-and-text-aside-8429fc:title:__title:icon-and-text-aside-8429fc"/>
           <p:cNvSpPr txBox="1"/>
           <p:nvPr/>
         </p:nvSpPr>
@@ -15645,7 +14535,7 @@
       </p:sp>
       <p:sp>
         <p:nvSpPr>
-          <p:cNvPr id="29" name="mdpr:icon-and-text-aside-8429fc:item-1:block-29"/>
+          <p:cNvPr id="28" name="mdpr:icon-and-text-aside-8429fc:item-1:block-29"/>
           <p:cNvSpPr txBox="1"/>
           <p:nvPr/>
         </p:nvSpPr>
@@ -15704,7 +14594,7 @@
       </p:sp>
       <p:sp>
         <p:nvSpPr>
-          <p:cNvPr id="30" name="mdpr:icon-and-text-aside-8429fc:item-2:block-29"/>
+          <p:cNvPr id="29" name="mdpr:icon-and-text-aside-8429fc:item-2:block-29"/>
           <p:cNvSpPr txBox="1"/>
           <p:nvPr/>
         </p:nvSpPr>
@@ -15763,7 +14653,7 @@
       </p:sp>
       <p:sp>
         <p:nvSpPr>
-          <p:cNvPr id="31" name="mdpr:icon-and-text-aside-8429fc:item-3:block-29"/>
+          <p:cNvPr id="30" name="mdpr:icon-and-text-aside-8429fc:item-3:block-29"/>
           <p:cNvSpPr txBox="1"/>
           <p:nvPr/>
         </p:nvSpPr>
@@ -15822,7 +14712,7 @@
       </p:sp>
       <p:sp>
         <p:nvSpPr>
-          <p:cNvPr id="32" name="mdpr:icon-and-text-aside-8429fc:item-4:block-29"/>
+          <p:cNvPr id="31" name="mdpr:icon-and-text-aside-8429fc:item-4:block-29"/>
           <p:cNvSpPr txBox="1"/>
           <p:nvPr/>
         </p:nvSpPr>
@@ -16077,33 +14967,6 @@
         </p:nvSpPr>
         <p:spPr>
           <a:xfrm>
-            <a:off x="731520" y="1207008"/>
-            <a:ext cx="1325880" cy="54864"/>
-          </a:xfrm>
-          <a:prstGeom prst="rect">
-            <a:avLst/>
-          </a:prstGeom>
-          <a:solidFill>
-            <a:srgbClr val="4F6F8F"/>
-          </a:solidFill>
-          <a:ln w="12700">
-            <a:solidFill>
-              <a:srgbClr val="4F6F8F">
-                <a:alpha val="0"/>
-              </a:srgbClr>
-            </a:solidFill>
-            <a:prstDash val="solid"/>
-          </a:ln>
-        </p:spPr>
-      </p:sp>
-      <p:sp>
-        <p:nvSpPr>
-          <p:cNvPr id="8" name="Shape 6"/>
-          <p:cNvSpPr/>
-          <p:nvPr/>
-        </p:nvSpPr>
-        <p:spPr>
-          <a:xfrm>
             <a:off x="864108" y="1513332"/>
             <a:ext cx="5029200" cy="1920240"/>
           </a:xfrm>
@@ -16136,7 +14999,7 @@
       </p:sp>
       <p:sp>
         <p:nvSpPr>
-          <p:cNvPr id="9" name="Shape 7"/>
+          <p:cNvPr id="8" name="Shape 6"/>
           <p:cNvSpPr/>
           <p:nvPr/>
         </p:nvSpPr>
@@ -16174,7 +15037,7 @@
       </p:sp>
       <p:sp>
         <p:nvSpPr>
-          <p:cNvPr id="10" name="Shape 8"/>
+          <p:cNvPr id="9" name="Shape 7"/>
           <p:cNvSpPr/>
           <p:nvPr/>
         </p:nvSpPr>
@@ -16205,7 +15068,7 @@
       </p:sp>
       <p:pic>
         <p:nvPicPr>
-          <p:cNvPr id="11" name="Image 0" descr="preencoded.png">    </p:cNvPr>
+          <p:cNvPr id="10" name="Image 0" descr="preencoded.png">    </p:cNvPr>
           <p:cNvPicPr>
             <a:picLocks noChangeAspect="1"/>
           </p:cNvPicPr>
@@ -16235,7 +15098,7 @@
       </p:pic>
       <p:sp>
         <p:nvSpPr>
-          <p:cNvPr id="12" name="Shape 9"/>
+          <p:cNvPr id="11" name="Shape 8"/>
           <p:cNvSpPr/>
           <p:nvPr/>
         </p:nvSpPr>
@@ -16273,7 +15136,7 @@
       </p:sp>
       <p:sp>
         <p:nvSpPr>
-          <p:cNvPr id="13" name="Shape 10"/>
+          <p:cNvPr id="12" name="Shape 9"/>
           <p:cNvSpPr/>
           <p:nvPr/>
         </p:nvSpPr>
@@ -16311,7 +15174,7 @@
       </p:sp>
       <p:sp>
         <p:nvSpPr>
-          <p:cNvPr id="14" name="Shape 11"/>
+          <p:cNvPr id="13" name="Shape 10"/>
           <p:cNvSpPr/>
           <p:nvPr/>
         </p:nvSpPr>
@@ -16342,7 +15205,7 @@
       </p:sp>
       <p:pic>
         <p:nvPicPr>
-          <p:cNvPr id="15" name="Image 1" descr="preencoded.png">    </p:cNvPr>
+          <p:cNvPr id="14" name="Image 1" descr="preencoded.png">    </p:cNvPr>
           <p:cNvPicPr>
             <a:picLocks noChangeAspect="1"/>
           </p:cNvPicPr>
@@ -16372,7 +15235,7 @@
       </p:pic>
       <p:sp>
         <p:nvSpPr>
-          <p:cNvPr id="16" name="Shape 12"/>
+          <p:cNvPr id="15" name="Shape 11"/>
           <p:cNvSpPr/>
           <p:nvPr/>
         </p:nvSpPr>
@@ -16410,7 +15273,7 @@
       </p:sp>
       <p:sp>
         <p:nvSpPr>
-          <p:cNvPr id="17" name="Shape 13"/>
+          <p:cNvPr id="16" name="Shape 12"/>
           <p:cNvSpPr/>
           <p:nvPr/>
         </p:nvSpPr>
@@ -16448,7 +15311,7 @@
       </p:sp>
       <p:sp>
         <p:nvSpPr>
-          <p:cNvPr id="18" name="Shape 14"/>
+          <p:cNvPr id="17" name="Shape 13"/>
           <p:cNvSpPr/>
           <p:nvPr/>
         </p:nvSpPr>
@@ -16479,7 +15342,7 @@
       </p:sp>
       <p:pic>
         <p:nvPicPr>
-          <p:cNvPr id="19" name="Image 2" descr="preencoded.png">    </p:cNvPr>
+          <p:cNvPr id="18" name="Image 2" descr="preencoded.png">    </p:cNvPr>
           <p:cNvPicPr>
             <a:picLocks noChangeAspect="1"/>
           </p:cNvPicPr>
@@ -16509,7 +15372,7 @@
       </p:pic>
       <p:sp>
         <p:nvSpPr>
-          <p:cNvPr id="20" name="Shape 15"/>
+          <p:cNvPr id="19" name="Shape 14"/>
           <p:cNvSpPr/>
           <p:nvPr/>
         </p:nvSpPr>
@@ -16547,7 +15410,7 @@
       </p:sp>
       <p:sp>
         <p:nvSpPr>
-          <p:cNvPr id="21" name="Shape 16"/>
+          <p:cNvPr id="20" name="Shape 15"/>
           <p:cNvSpPr/>
           <p:nvPr/>
         </p:nvSpPr>
@@ -16585,7 +15448,7 @@
       </p:sp>
       <p:sp>
         <p:nvSpPr>
-          <p:cNvPr id="22" name="Shape 17"/>
+          <p:cNvPr id="21" name="Shape 16"/>
           <p:cNvSpPr/>
           <p:nvPr/>
         </p:nvSpPr>
@@ -16616,7 +15479,7 @@
       </p:sp>
       <p:pic>
         <p:nvPicPr>
-          <p:cNvPr id="23" name="Image 3" descr="preencoded.png">    </p:cNvPr>
+          <p:cNvPr id="22" name="Image 3" descr="preencoded.png">    </p:cNvPr>
           <p:cNvPicPr>
             <a:picLocks noChangeAspect="1"/>
           </p:cNvPicPr>
@@ -16646,7 +15509,7 @@
       </p:pic>
       <p:sp>
         <p:nvSpPr>
-          <p:cNvPr id="24" name="Shape 18"/>
+          <p:cNvPr id="23" name="Shape 17"/>
           <p:cNvSpPr/>
           <p:nvPr/>
         </p:nvSpPr>
@@ -16673,7 +15536,7 @@
       </p:sp>
       <p:sp>
         <p:nvSpPr>
-          <p:cNvPr id="25" name="Shape 19"/>
+          <p:cNvPr id="24" name="Shape 18"/>
           <p:cNvSpPr/>
           <p:nvPr/>
         </p:nvSpPr>
@@ -16700,7 +15563,7 @@
       </p:sp>
       <p:sp>
         <p:nvSpPr>
-          <p:cNvPr id="26" name="Shape 20"/>
+          <p:cNvPr id="25" name="Shape 19"/>
           <p:cNvSpPr/>
           <p:nvPr/>
         </p:nvSpPr>
@@ -16727,7 +15590,7 @@
       </p:sp>
       <p:sp>
         <p:nvSpPr>
-          <p:cNvPr id="27" name="Shape 21"/>
+          <p:cNvPr id="26" name="Shape 20"/>
           <p:cNvSpPr/>
           <p:nvPr/>
         </p:nvSpPr>
@@ -16754,7 +15617,7 @@
       </p:sp>
       <p:sp>
         <p:nvSpPr>
-          <p:cNvPr id="28" name="mdpr:overflow-guard-f8d03e:title:__title:overflow-guard-f8d03e"/>
+          <p:cNvPr id="27" name="mdpr:overflow-guard-f8d03e:title:__title:overflow-guard-f8d03e"/>
           <p:cNvSpPr txBox="1"/>
           <p:nvPr/>
         </p:nvSpPr>
@@ -16796,7 +15659,7 @@
       </p:sp>
       <p:sp>
         <p:nvSpPr>
-          <p:cNvPr id="29" name="mdpr:overflow-guard-f8d03e:item-1:block-31"/>
+          <p:cNvPr id="28" name="mdpr:overflow-guard-f8d03e:item-1:block-31"/>
           <p:cNvSpPr txBox="1"/>
           <p:nvPr/>
         </p:nvSpPr>
@@ -16855,7 +15718,7 @@
       </p:sp>
       <p:sp>
         <p:nvSpPr>
-          <p:cNvPr id="30" name="mdpr:overflow-guard-f8d03e:item-2:block-31"/>
+          <p:cNvPr id="29" name="mdpr:overflow-guard-f8d03e:item-2:block-31"/>
           <p:cNvSpPr txBox="1"/>
           <p:nvPr/>
         </p:nvSpPr>
@@ -16914,7 +15777,7 @@
       </p:sp>
       <p:sp>
         <p:nvSpPr>
-          <p:cNvPr id="31" name="mdpr:overflow-guard-f8d03e:item-3:block-31"/>
+          <p:cNvPr id="30" name="mdpr:overflow-guard-f8d03e:item-3:block-31"/>
           <p:cNvSpPr txBox="1"/>
           <p:nvPr/>
         </p:nvSpPr>
@@ -16973,7 +15836,7 @@
       </p:sp>
       <p:sp>
         <p:nvSpPr>
-          <p:cNvPr id="32" name="mdpr:overflow-guard-f8d03e:item-4:block-31"/>
+          <p:cNvPr id="31" name="mdpr:overflow-guard-f8d03e:item-4:block-31"/>
           <p:cNvSpPr txBox="1"/>
           <p:nvPr/>
         </p:nvSpPr>
@@ -17228,33 +16091,6 @@
         </p:nvSpPr>
         <p:spPr>
           <a:xfrm>
-            <a:off x="731520" y="1207008"/>
-            <a:ext cx="1325880" cy="54864"/>
-          </a:xfrm>
-          <a:prstGeom prst="rect">
-            <a:avLst/>
-          </a:prstGeom>
-          <a:solidFill>
-            <a:srgbClr val="4F6F8F"/>
-          </a:solidFill>
-          <a:ln w="12700">
-            <a:solidFill>
-              <a:srgbClr val="4F6F8F">
-                <a:alpha val="0"/>
-              </a:srgbClr>
-            </a:solidFill>
-            <a:prstDash val="solid"/>
-          </a:ln>
-        </p:spPr>
-      </p:sp>
-      <p:sp>
-        <p:nvSpPr>
-          <p:cNvPr id="8" name="Shape 6"/>
-          <p:cNvSpPr/>
-          <p:nvPr/>
-        </p:nvSpPr>
-        <p:spPr>
-          <a:xfrm>
             <a:off x="6853428" y="1513332"/>
             <a:ext cx="4434840" cy="4526280"/>
           </a:xfrm>
@@ -17287,7 +16123,7 @@
       </p:sp>
       <p:sp>
         <p:nvSpPr>
-          <p:cNvPr id="9" name="Shape 7"/>
+          <p:cNvPr id="8" name="Shape 6"/>
           <p:cNvSpPr/>
           <p:nvPr/>
         </p:nvSpPr>
@@ -17325,7 +16161,7 @@
       </p:sp>
       <p:sp>
         <p:nvSpPr>
-          <p:cNvPr id="10" name="Shape 8"/>
+          <p:cNvPr id="9" name="Shape 7"/>
           <p:cNvSpPr/>
           <p:nvPr/>
         </p:nvSpPr>
@@ -17356,7 +16192,7 @@
       </p:sp>
       <p:pic>
         <p:nvPicPr>
-          <p:cNvPr id="11" name="Image 0" descr="preencoded.png">    </p:cNvPr>
+          <p:cNvPr id="10" name="Image 0" descr="preencoded.png">    </p:cNvPr>
           <p:cNvPicPr>
             <a:picLocks noChangeAspect="1"/>
           </p:cNvPicPr>
@@ -17386,7 +16222,7 @@
       </p:pic>
       <p:sp>
         <p:nvSpPr>
-          <p:cNvPr id="12" name="Shape 9"/>
+          <p:cNvPr id="11" name="Shape 8"/>
           <p:cNvSpPr/>
           <p:nvPr/>
         </p:nvSpPr>
@@ -17413,7 +16249,7 @@
       </p:sp>
       <p:sp>
         <p:nvSpPr>
-          <p:cNvPr id="13" name="mdpr:image-safe-frame-d4d6a4:title:__title:image-safe-frame-d4d6a4"/>
+          <p:cNvPr id="12" name="mdpr:image-safe-frame-d4d6a4:title:__title:image-safe-frame-d4d6a4"/>
           <p:cNvSpPr txBox="1"/>
           <p:nvPr/>
         </p:nvSpPr>
@@ -17455,7 +16291,7 @@
       </p:sp>
       <p:sp>
         <p:nvSpPr>
-          <p:cNvPr id="14" name="mdpr:image-safe-frame-d4d6a4:body:block-33-block-33-block-33"/>
+          <p:cNvPr id="13" name="mdpr:image-safe-frame-d4d6a4:body:block-33-block-33-block-33"/>
           <p:cNvSpPr txBox="1"/>
           <p:nvPr/>
         </p:nvSpPr>
@@ -17594,7 +16430,7 @@
       </p:sp>
       <p:pic>
         <p:nvPicPr>
-          <p:cNvPr id="15" name="mdpr:image-safe-frame-d4d6a4:image-1:block-34" descr="{&quot;mdpr&quot;:{&quot;slideId&quot;:&quot;image-safe-frame-d4d6a4&quot;,&quot;layoutSlideId&quot;:&quot;layout-image-safe-frame-d4d6a4&quot;,&quot;regionId&quot;:&quot;image-1&quot;,&quot;blockIds&quot;:[&quot;block-34&quot;],&quot;objectKind&quot;:&quot;native-image&quot;,&quot;role&quot;:&quot;image&quot;,&quot;editable&quot;:false}}">    </p:cNvPr>
+          <p:cNvPr id="14" name="mdpr:image-safe-frame-d4d6a4:image-1:block-34" descr="{&quot;mdpr&quot;:{&quot;slideId&quot;:&quot;image-safe-frame-d4d6a4&quot;,&quot;layoutSlideId&quot;:&quot;layout-image-safe-frame-d4d6a4&quot;,&quot;regionId&quot;:&quot;image-1&quot;,&quot;blockIds&quot;:[&quot;block-34&quot;],&quot;objectKind&quot;:&quot;native-image&quot;,&quot;role&quot;:&quot;image&quot;,&quot;editable&quot;:false}}">    </p:cNvPr>
           <p:cNvPicPr>
             <a:picLocks noChangeAspect="1"/>
           </p:cNvPicPr>
@@ -17820,33 +16656,6 @@
         </p:nvSpPr>
         <p:spPr>
           <a:xfrm>
-            <a:off x="731520" y="1207008"/>
-            <a:ext cx="1325880" cy="54864"/>
-          </a:xfrm>
-          <a:prstGeom prst="rect">
-            <a:avLst/>
-          </a:prstGeom>
-          <a:solidFill>
-            <a:srgbClr val="4F6F8F"/>
-          </a:solidFill>
-          <a:ln w="12700">
-            <a:solidFill>
-              <a:srgbClr val="4F6F8F">
-                <a:alpha val="0"/>
-              </a:srgbClr>
-            </a:solidFill>
-            <a:prstDash val="solid"/>
-          </a:ln>
-        </p:spPr>
-      </p:sp>
-      <p:sp>
-        <p:nvSpPr>
-          <p:cNvPr id="8" name="Shape 6"/>
-          <p:cNvSpPr/>
-          <p:nvPr/>
-        </p:nvSpPr>
-        <p:spPr>
-          <a:xfrm>
             <a:off x="790956" y="1495044"/>
             <a:ext cx="4617720" cy="2359152"/>
           </a:xfrm>
@@ -17879,7 +16688,7 @@
       </p:sp>
       <p:sp>
         <p:nvSpPr>
-          <p:cNvPr id="9" name="Shape 7"/>
+          <p:cNvPr id="8" name="Shape 6"/>
           <p:cNvSpPr/>
           <p:nvPr/>
         </p:nvSpPr>
@@ -17917,7 +16726,7 @@
       </p:sp>
       <p:sp>
         <p:nvSpPr>
-          <p:cNvPr id="10" name="Shape 8"/>
+          <p:cNvPr id="9" name="Shape 7"/>
           <p:cNvSpPr/>
           <p:nvPr/>
         </p:nvSpPr>
@@ -17948,7 +16757,7 @@
       </p:sp>
       <p:pic>
         <p:nvPicPr>
-          <p:cNvPr id="11" name="Image 0" descr="preencoded.png">    </p:cNvPr>
+          <p:cNvPr id="10" name="Image 0" descr="preencoded.png">    </p:cNvPr>
           <p:cNvPicPr>
             <a:picLocks noChangeAspect="1"/>
           </p:cNvPicPr>
@@ -17978,7 +16787,7 @@
       </p:pic>
       <p:sp>
         <p:nvSpPr>
-          <p:cNvPr id="12" name="Shape 9"/>
+          <p:cNvPr id="11" name="Shape 8"/>
           <p:cNvSpPr/>
           <p:nvPr/>
         </p:nvSpPr>
@@ -18016,7 +16825,7 @@
       </p:sp>
       <p:sp>
         <p:nvSpPr>
-          <p:cNvPr id="13" name="Shape 10"/>
+          <p:cNvPr id="12" name="Shape 9"/>
           <p:cNvSpPr/>
           <p:nvPr/>
         </p:nvSpPr>
@@ -18054,7 +16863,7 @@
       </p:sp>
       <p:sp>
         <p:nvSpPr>
-          <p:cNvPr id="14" name="Shape 11"/>
+          <p:cNvPr id="13" name="Shape 10"/>
           <p:cNvSpPr/>
           <p:nvPr/>
         </p:nvSpPr>
@@ -18085,7 +16894,7 @@
       </p:sp>
       <p:pic>
         <p:nvPicPr>
-          <p:cNvPr id="15" name="Image 1" descr="preencoded.png">    </p:cNvPr>
+          <p:cNvPr id="14" name="Image 1" descr="preencoded.png">    </p:cNvPr>
           <p:cNvPicPr>
             <a:picLocks noChangeAspect="1"/>
           </p:cNvPicPr>
@@ -18115,7 +16924,7 @@
       </p:pic>
       <p:sp>
         <p:nvSpPr>
-          <p:cNvPr id="16" name="Shape 12"/>
+          <p:cNvPr id="15" name="Shape 11"/>
           <p:cNvSpPr/>
           <p:nvPr/>
         </p:nvSpPr>
@@ -18153,7 +16962,7 @@
       </p:sp>
       <p:sp>
         <p:nvSpPr>
-          <p:cNvPr id="17" name="Shape 13"/>
+          <p:cNvPr id="16" name="Shape 12"/>
           <p:cNvSpPr/>
           <p:nvPr/>
         </p:nvSpPr>
@@ -18191,7 +17000,7 @@
       </p:sp>
       <p:sp>
         <p:nvSpPr>
-          <p:cNvPr id="18" name="Shape 14"/>
+          <p:cNvPr id="17" name="Shape 13"/>
           <p:cNvSpPr/>
           <p:nvPr/>
         </p:nvSpPr>
@@ -18222,7 +17031,7 @@
       </p:sp>
       <p:pic>
         <p:nvPicPr>
-          <p:cNvPr id="19" name="Image 2" descr="preencoded.png">    </p:cNvPr>
+          <p:cNvPr id="18" name="Image 2" descr="preencoded.png">    </p:cNvPr>
           <p:cNvPicPr>
             <a:picLocks noChangeAspect="1"/>
           </p:cNvPicPr>
@@ -18252,7 +17061,7 @@
       </p:pic>
       <p:sp>
         <p:nvSpPr>
-          <p:cNvPr id="20" name="Shape 15"/>
+          <p:cNvPr id="19" name="Shape 14"/>
           <p:cNvSpPr/>
           <p:nvPr/>
         </p:nvSpPr>
@@ -18279,7 +17088,7 @@
       </p:sp>
       <p:sp>
         <p:nvSpPr>
-          <p:cNvPr id="21" name="mdpr:mixed-object-packing-438299:title:__title:mixed-object-packing-438299"/>
+          <p:cNvPr id="20" name="mdpr:mixed-object-packing-438299:title:__title:mixed-object-packing-438299"/>
           <p:cNvSpPr txBox="1"/>
           <p:nvPr/>
         </p:nvSpPr>
@@ -18321,7 +17130,7 @@
       </p:sp>
       <p:graphicFrame>
         <p:nvGraphicFramePr>
-          <p:cNvPr id="22" name="Chart 0" descr=""/>
+          <p:cNvPr id="21" name="Chart 0" descr=""/>
           <p:cNvGraphicFramePr/>
           <p:nvPr/>
         </p:nvGraphicFramePr>
@@ -18779,7 +17588,7 @@
       </p:graphicFrame>
       <p:sp>
         <p:nvSpPr>
-          <p:cNvPr id="24" name="mdpr:mixed-object-packing-438299:body:block-36"/>
+          <p:cNvPr id="23" name="mdpr:mixed-object-packing-438299:body:block-36"/>
           <p:cNvSpPr txBox="1"/>
           <p:nvPr/>
         </p:nvSpPr>
@@ -18878,7 +17687,7 @@
       </p:sp>
       <p:pic>
         <p:nvPicPr>
-          <p:cNvPr id="25" name="mdpr:mixed-object-packing-438299:image-1:block-39" descr="{&quot;mdpr&quot;:{&quot;slideId&quot;:&quot;mixed-object-packing-438299&quot;,&quot;layoutSlideId&quot;:&quot;layout-mixed-object-packing-438299&quot;,&quot;regionId&quot;:&quot;image-1&quot;,&quot;blockIds&quot;:[&quot;block-39&quot;],&quot;objectKind&quot;:&quot;native-image&quot;,&quot;role&quot;:&quot;image&quot;,&quot;editable&quot;:false}}">    </p:cNvPr>
+          <p:cNvPr id="24" name="mdpr:mixed-object-packing-438299:image-1:block-39" descr="{&quot;mdpr&quot;:{&quot;slideId&quot;:&quot;mixed-object-packing-438299&quot;,&quot;layoutSlideId&quot;:&quot;layout-mixed-object-packing-438299&quot;,&quot;regionId&quot;:&quot;image-1&quot;,&quot;blockIds&quot;:[&quot;block-39&quot;],&quot;objectKind&quot;:&quot;native-image&quot;,&quot;role&quot;:&quot;image&quot;,&quot;editable&quot;:false}}">    </p:cNvPr>
           <p:cNvPicPr>
             <a:picLocks noChangeAspect="1"/>
           </p:cNvPicPr>
@@ -19104,8 +17913,8 @@
         </p:nvSpPr>
         <p:spPr>
           <a:xfrm>
-            <a:off x="731520" y="1207008"/>
-            <a:ext cx="1325880" cy="54864"/>
+            <a:off x="822960" y="1938528"/>
+            <a:ext cx="73152" cy="2514600"/>
           </a:xfrm>
           <a:prstGeom prst="rect">
             <a:avLst/>
@@ -19131,427 +17940,14 @@
         </p:nvSpPr>
         <p:spPr>
           <a:xfrm>
-            <a:off x="955548" y="1915668"/>
-            <a:ext cx="10241280" cy="1024128"/>
-          </a:xfrm>
-          <a:prstGeom prst="roundRect">
-            <a:avLst>
-              <a:gd name="adj" fmla="val 5357"/>
-            </a:avLst>
-          </a:prstGeom>
-          <a:solidFill>
-            <a:srgbClr val="B8C3D2">
-              <a:alpha val="26000"/>
-            </a:srgbClr>
-          </a:solidFill>
-          <a:ln w="12700">
-            <a:solidFill>
-              <a:srgbClr val="D5DCE7">
-                <a:alpha val="0"/>
-              </a:srgbClr>
-            </a:solidFill>
-            <a:prstDash val="solid"/>
-          </a:ln>
-          <a:effectLst>
-            <a:outerShdw sx="100000" sy="100000" kx="0" ky="0" algn="bl" rotWithShape="0" blurRad="13970" dist="50800" dir="2700000">
-              <a:srgbClr val="AAB5C4">
-                <a:alpha val="20000"/>
-              </a:srgbClr>
-            </a:outerShdw>
-          </a:effectLst>
-        </p:spPr>
-      </p:sp>
-      <p:sp>
-        <p:nvSpPr>
-          <p:cNvPr id="9" name="Shape 7"/>
-          <p:cNvSpPr/>
-          <p:nvPr/>
-        </p:nvSpPr>
-        <p:spPr>
-          <a:xfrm>
-            <a:off x="882396" y="1833372"/>
-            <a:ext cx="10241280" cy="1024128"/>
-          </a:xfrm>
-          <a:prstGeom prst="roundRect">
-            <a:avLst>
-              <a:gd name="adj" fmla="val 5357"/>
-            </a:avLst>
-          </a:prstGeom>
-          <a:solidFill>
-            <a:srgbClr val="FFFFFF">
-              <a:alpha val="42000"/>
-            </a:srgbClr>
-          </a:solidFill>
-          <a:ln w="12700">
-            <a:solidFill>
-              <a:srgbClr val="FFFFFF">
-                <a:alpha val="0"/>
-              </a:srgbClr>
-            </a:solidFill>
-            <a:prstDash val="solid"/>
-          </a:ln>
-          <a:effectLst>
-            <a:outerShdw sx="100000" sy="100000" kx="0" ky="0" algn="bl" rotWithShape="0" blurRad="10160" dist="50800" dir="13500000">
-              <a:srgbClr val="FFFFFF">
-                <a:alpha val="36000"/>
-              </a:srgbClr>
-            </a:outerShdw>
-          </a:effectLst>
-        </p:spPr>
-      </p:sp>
-      <p:sp>
-        <p:nvSpPr>
-          <p:cNvPr id="10" name="Shape 8"/>
-          <p:cNvSpPr/>
-          <p:nvPr/>
-        </p:nvSpPr>
-        <p:spPr>
-          <a:xfrm>
-            <a:off x="914400" y="1865376"/>
-            <a:ext cx="10241280" cy="1024128"/>
-          </a:xfrm>
-          <a:prstGeom prst="roundRect">
-            <a:avLst>
-              <a:gd name="adj" fmla="val 5357"/>
-            </a:avLst>
-          </a:prstGeom>
-          <a:solidFill>
-            <a:srgbClr val="E9EEF5">
-              <a:alpha val="6000"/>
-            </a:srgbClr>
-          </a:solidFill>
-          <a:ln w="12700">
-            <a:solidFill>
-              <a:srgbClr val="FFFFFF">
-                <a:alpha val="28000"/>
-              </a:srgbClr>
-            </a:solidFill>
-            <a:prstDash val="solid"/>
-          </a:ln>
-        </p:spPr>
-      </p:sp>
-      <p:pic>
-        <p:nvPicPr>
-          <p:cNvPr id="11" name="Image 0" descr="preencoded.png">    </p:cNvPr>
-          <p:cNvPicPr>
-            <a:picLocks noChangeAspect="1"/>
-          </p:cNvPicPr>
-          <p:nvPr/>
-        </p:nvPicPr>
-        <p:blipFill>
-          <a:blip r:embed="rId1">
-            <a:extLst>
-              <a:ext uri="{96DAC541-7B7A-43D3-8B79-37D633B846F1}">
-                <asvg:svgBlip xmlns:asvg="http://schemas.microsoft.com/office/drawing/2016/SVG/main" r:embed="rId2"/>
-              </a:ext>
-            </a:extLst>
-          </a:blip>
-          <a:stretch>
-            <a:fillRect/>
-          </a:stretch>
-        </p:blipFill>
-        <p:spPr>
-          <a:xfrm>
-            <a:off x="914400" y="1865376"/>
-            <a:ext cx="10241280" cy="1024128"/>
+            <a:off x="4343400" y="1938528"/>
+            <a:ext cx="73152" cy="2514600"/>
           </a:xfrm>
           <a:prstGeom prst="rect">
             <a:avLst/>
           </a:prstGeom>
-        </p:spPr>
-      </p:pic>
-      <p:sp>
-        <p:nvSpPr>
-          <p:cNvPr id="12" name="Shape 9"/>
-          <p:cNvSpPr/>
-          <p:nvPr/>
-        </p:nvSpPr>
-        <p:spPr>
-          <a:xfrm>
-            <a:off x="955548" y="3241548"/>
-            <a:ext cx="10241280" cy="1024128"/>
-          </a:xfrm>
-          <a:prstGeom prst="roundRect">
-            <a:avLst>
-              <a:gd name="adj" fmla="val 5357"/>
-            </a:avLst>
-          </a:prstGeom>
-          <a:solidFill>
-            <a:srgbClr val="B8C3D2">
-              <a:alpha val="26000"/>
-            </a:srgbClr>
-          </a:solidFill>
-          <a:ln w="12700">
-            <a:solidFill>
-              <a:srgbClr val="D5DCE7">
-                <a:alpha val="0"/>
-              </a:srgbClr>
-            </a:solidFill>
-            <a:prstDash val="solid"/>
-          </a:ln>
-          <a:effectLst>
-            <a:outerShdw sx="100000" sy="100000" kx="0" ky="0" algn="bl" rotWithShape="0" blurRad="13970" dist="50800" dir="2700000">
-              <a:srgbClr val="AAB5C4">
-                <a:alpha val="20000"/>
-              </a:srgbClr>
-            </a:outerShdw>
-          </a:effectLst>
-        </p:spPr>
-      </p:sp>
-      <p:sp>
-        <p:nvSpPr>
-          <p:cNvPr id="13" name="Shape 10"/>
-          <p:cNvSpPr/>
-          <p:nvPr/>
-        </p:nvSpPr>
-        <p:spPr>
-          <a:xfrm>
-            <a:off x="882396" y="3159252"/>
-            <a:ext cx="10241280" cy="1024128"/>
-          </a:xfrm>
-          <a:prstGeom prst="roundRect">
-            <a:avLst>
-              <a:gd name="adj" fmla="val 5357"/>
-            </a:avLst>
-          </a:prstGeom>
-          <a:solidFill>
-            <a:srgbClr val="FFFFFF">
-              <a:alpha val="42000"/>
-            </a:srgbClr>
-          </a:solidFill>
-          <a:ln w="12700">
-            <a:solidFill>
-              <a:srgbClr val="FFFFFF">
-                <a:alpha val="0"/>
-              </a:srgbClr>
-            </a:solidFill>
-            <a:prstDash val="solid"/>
-          </a:ln>
-          <a:effectLst>
-            <a:outerShdw sx="100000" sy="100000" kx="0" ky="0" algn="bl" rotWithShape="0" blurRad="10160" dist="50800" dir="13500000">
-              <a:srgbClr val="FFFFFF">
-                <a:alpha val="36000"/>
-              </a:srgbClr>
-            </a:outerShdw>
-          </a:effectLst>
-        </p:spPr>
-      </p:sp>
-      <p:sp>
-        <p:nvSpPr>
-          <p:cNvPr id="14" name="Shape 11"/>
-          <p:cNvSpPr/>
-          <p:nvPr/>
-        </p:nvSpPr>
-        <p:spPr>
-          <a:xfrm>
-            <a:off x="914400" y="3191256"/>
-            <a:ext cx="10241280" cy="1024128"/>
-          </a:xfrm>
-          <a:prstGeom prst="roundRect">
-            <a:avLst>
-              <a:gd name="adj" fmla="val 5357"/>
-            </a:avLst>
-          </a:prstGeom>
-          <a:solidFill>
-            <a:srgbClr val="E9EEF5">
-              <a:alpha val="6000"/>
-            </a:srgbClr>
-          </a:solidFill>
-          <a:ln w="12700">
-            <a:solidFill>
-              <a:srgbClr val="FFFFFF">
-                <a:alpha val="28000"/>
-              </a:srgbClr>
-            </a:solidFill>
-            <a:prstDash val="solid"/>
-          </a:ln>
-        </p:spPr>
-      </p:sp>
-      <p:pic>
-        <p:nvPicPr>
-          <p:cNvPr id="15" name="Image 1" descr="preencoded.png">    </p:cNvPr>
-          <p:cNvPicPr>
-            <a:picLocks noChangeAspect="1"/>
-          </p:cNvPicPr>
-          <p:nvPr/>
-        </p:nvPicPr>
-        <p:blipFill>
-          <a:blip r:embed="rId3">
-            <a:extLst>
-              <a:ext uri="{96DAC541-7B7A-43D3-8B79-37D633B846F1}">
-                <asvg:svgBlip xmlns:asvg="http://schemas.microsoft.com/office/drawing/2016/SVG/main" r:embed="rId4"/>
-              </a:ext>
-            </a:extLst>
-          </a:blip>
-          <a:stretch>
-            <a:fillRect/>
-          </a:stretch>
-        </p:blipFill>
-        <p:spPr>
-          <a:xfrm>
-            <a:off x="914400" y="3191256"/>
-            <a:ext cx="10241280" cy="1024128"/>
-          </a:xfrm>
-          <a:prstGeom prst="rect">
-            <a:avLst/>
-          </a:prstGeom>
-        </p:spPr>
-      </p:pic>
-      <p:sp>
-        <p:nvSpPr>
-          <p:cNvPr id="16" name="Shape 12"/>
-          <p:cNvSpPr/>
-          <p:nvPr/>
-        </p:nvSpPr>
-        <p:spPr>
-          <a:xfrm>
-            <a:off x="955548" y="4558284"/>
-            <a:ext cx="10241280" cy="1024128"/>
-          </a:xfrm>
-          <a:prstGeom prst="roundRect">
-            <a:avLst>
-              <a:gd name="adj" fmla="val 5357"/>
-            </a:avLst>
-          </a:prstGeom>
-          <a:solidFill>
-            <a:srgbClr val="B8C3D2">
-              <a:alpha val="26000"/>
-            </a:srgbClr>
-          </a:solidFill>
-          <a:ln w="12700">
-            <a:solidFill>
-              <a:srgbClr val="D5DCE7">
-                <a:alpha val="0"/>
-              </a:srgbClr>
-            </a:solidFill>
-            <a:prstDash val="solid"/>
-          </a:ln>
-          <a:effectLst>
-            <a:outerShdw sx="100000" sy="100000" kx="0" ky="0" algn="bl" rotWithShape="0" blurRad="13970" dist="50800" dir="2700000">
-              <a:srgbClr val="AAB5C4">
-                <a:alpha val="20000"/>
-              </a:srgbClr>
-            </a:outerShdw>
-          </a:effectLst>
-        </p:spPr>
-      </p:sp>
-      <p:sp>
-        <p:nvSpPr>
-          <p:cNvPr id="17" name="Shape 13"/>
-          <p:cNvSpPr/>
-          <p:nvPr/>
-        </p:nvSpPr>
-        <p:spPr>
-          <a:xfrm>
-            <a:off x="882396" y="4475988"/>
-            <a:ext cx="10241280" cy="1024128"/>
-          </a:xfrm>
-          <a:prstGeom prst="roundRect">
-            <a:avLst>
-              <a:gd name="adj" fmla="val 5357"/>
-            </a:avLst>
-          </a:prstGeom>
-          <a:solidFill>
-            <a:srgbClr val="FFFFFF">
-              <a:alpha val="42000"/>
-            </a:srgbClr>
-          </a:solidFill>
-          <a:ln w="12700">
-            <a:solidFill>
-              <a:srgbClr val="FFFFFF">
-                <a:alpha val="0"/>
-              </a:srgbClr>
-            </a:solidFill>
-            <a:prstDash val="solid"/>
-          </a:ln>
-          <a:effectLst>
-            <a:outerShdw sx="100000" sy="100000" kx="0" ky="0" algn="bl" rotWithShape="0" blurRad="10160" dist="50800" dir="13500000">
-              <a:srgbClr val="FFFFFF">
-                <a:alpha val="36000"/>
-              </a:srgbClr>
-            </a:outerShdw>
-          </a:effectLst>
-        </p:spPr>
-      </p:sp>
-      <p:sp>
-        <p:nvSpPr>
-          <p:cNvPr id="18" name="Shape 14"/>
-          <p:cNvSpPr/>
-          <p:nvPr/>
-        </p:nvSpPr>
-        <p:spPr>
-          <a:xfrm>
-            <a:off x="914400" y="4507992"/>
-            <a:ext cx="10241280" cy="1024128"/>
-          </a:xfrm>
-          <a:prstGeom prst="roundRect">
-            <a:avLst>
-              <a:gd name="adj" fmla="val 5357"/>
-            </a:avLst>
-          </a:prstGeom>
-          <a:solidFill>
-            <a:srgbClr val="E9EEF5">
-              <a:alpha val="6000"/>
-            </a:srgbClr>
-          </a:solidFill>
-          <a:ln w="12700">
-            <a:solidFill>
-              <a:srgbClr val="FFFFFF">
-                <a:alpha val="28000"/>
-              </a:srgbClr>
-            </a:solidFill>
-            <a:prstDash val="solid"/>
-          </a:ln>
-        </p:spPr>
-      </p:sp>
-      <p:pic>
-        <p:nvPicPr>
-          <p:cNvPr id="19" name="Image 2" descr="preencoded.png">    </p:cNvPr>
-          <p:cNvPicPr>
-            <a:picLocks noChangeAspect="1"/>
-          </p:cNvPicPr>
-          <p:nvPr/>
-        </p:nvPicPr>
-        <p:blipFill>
-          <a:blip r:embed="rId5">
-            <a:extLst>
-              <a:ext uri="{96DAC541-7B7A-43D3-8B79-37D633B846F1}">
-                <asvg:svgBlip xmlns:asvg="http://schemas.microsoft.com/office/drawing/2016/SVG/main" r:embed="rId6"/>
-              </a:ext>
-            </a:extLst>
-          </a:blip>
-          <a:stretch>
-            <a:fillRect/>
-          </a:stretch>
-        </p:blipFill>
-        <p:spPr>
-          <a:xfrm>
-            <a:off x="914400" y="4507992"/>
-            <a:ext cx="10241280" cy="1024128"/>
-          </a:xfrm>
-          <a:prstGeom prst="rect">
-            <a:avLst/>
-          </a:prstGeom>
-        </p:spPr>
-      </p:pic>
-      <p:sp>
-        <p:nvSpPr>
-          <p:cNvPr id="20" name="Shape 15"/>
-          <p:cNvSpPr/>
-          <p:nvPr/>
-        </p:nvSpPr>
-        <p:spPr>
-          <a:xfrm>
-            <a:off x="786384" y="1956816"/>
-            <a:ext cx="32004" cy="3483864"/>
-          </a:xfrm>
-          <a:prstGeom prst="rect">
-            <a:avLst/>
-          </a:prstGeom>
-          <a:solidFill>
-            <a:srgbClr val="CBD5E1">
-              <a:alpha val="80000"/>
-            </a:srgbClr>
+          <a:solidFill>
+            <a:srgbClr val="CBD5E1"/>
           </a:solidFill>
           <a:ln w="12700">
             <a:solidFill>
@@ -19565,14 +17961,14 @@
       </p:sp>
       <p:sp>
         <p:nvSpPr>
-          <p:cNvPr id="21" name="Shape 16"/>
-          <p:cNvSpPr/>
-          <p:nvPr/>
-        </p:nvSpPr>
-        <p:spPr>
-          <a:xfrm>
-            <a:off x="914400" y="1865376"/>
-            <a:ext cx="73152" cy="1024128"/>
+          <p:cNvPr id="9" name="Shape 7"/>
+          <p:cNvSpPr/>
+          <p:nvPr/>
+        </p:nvSpPr>
+        <p:spPr>
+          <a:xfrm>
+            <a:off x="7863840" y="1938528"/>
+            <a:ext cx="73152" cy="2514600"/>
           </a:xfrm>
           <a:prstGeom prst="rect">
             <a:avLst/>
@@ -19592,61 +17988,7 @@
       </p:sp>
       <p:sp>
         <p:nvSpPr>
-          <p:cNvPr id="22" name="Shape 17"/>
-          <p:cNvSpPr/>
-          <p:nvPr/>
-        </p:nvSpPr>
-        <p:spPr>
-          <a:xfrm>
-            <a:off x="914400" y="3191256"/>
-            <a:ext cx="73152" cy="1024128"/>
-          </a:xfrm>
-          <a:prstGeom prst="rect">
-            <a:avLst/>
-          </a:prstGeom>
-          <a:solidFill>
-            <a:srgbClr val="CBD5E1"/>
-          </a:solidFill>
-          <a:ln w="12700">
-            <a:solidFill>
-              <a:srgbClr val="CBD5E1">
-                <a:alpha val="0"/>
-              </a:srgbClr>
-            </a:solidFill>
-            <a:prstDash val="solid"/>
-          </a:ln>
-        </p:spPr>
-      </p:sp>
-      <p:sp>
-        <p:nvSpPr>
-          <p:cNvPr id="23" name="Shape 18"/>
-          <p:cNvSpPr/>
-          <p:nvPr/>
-        </p:nvSpPr>
-        <p:spPr>
-          <a:xfrm>
-            <a:off x="914400" y="4507992"/>
-            <a:ext cx="73152" cy="1024128"/>
-          </a:xfrm>
-          <a:prstGeom prst="rect">
-            <a:avLst/>
-          </a:prstGeom>
-          <a:solidFill>
-            <a:srgbClr val="4F6F8F"/>
-          </a:solidFill>
-          <a:ln w="12700">
-            <a:solidFill>
-              <a:srgbClr val="4F6F8F">
-                <a:alpha val="0"/>
-              </a:srgbClr>
-            </a:solidFill>
-            <a:prstDash val="solid"/>
-          </a:ln>
-        </p:spPr>
-      </p:sp>
-      <p:sp>
-        <p:nvSpPr>
-          <p:cNvPr id="24" name="mdpr:actions-output-review-326e07:title:__title:actions-output-review-326e07"/>
+          <p:cNvPr id="10" name="mdpr:actions-output-review-326e07:title:__title:actions-output-review-326e07"/>
           <p:cNvSpPr txBox="1"/>
           <p:nvPr/>
         </p:nvSpPr>
@@ -19688,14 +18030,14 @@
       </p:sp>
       <p:sp>
         <p:nvSpPr>
-          <p:cNvPr id="25" name="mdpr:actions-output-review-326e07:item-1:block-41"/>
+          <p:cNvPr id="11" name="mdpr:actions-output-review-326e07:item-1:block-41"/>
           <p:cNvSpPr txBox="1"/>
           <p:nvPr/>
         </p:nvSpPr>
         <p:spPr>
           <a:xfrm>
-            <a:off x="1133856" y="1957548"/>
-            <a:ext cx="9820656" cy="839785"/>
+            <a:off x="1042416" y="2103120"/>
+            <a:ext cx="2825496" cy="2185416"/>
           </a:xfrm>
           <a:prstGeom prst="rect">
             <a:avLst/>
@@ -19747,14 +18089,14 @@
       </p:sp>
       <p:sp>
         <p:nvSpPr>
-          <p:cNvPr id="26" name="mdpr:actions-output-review-326e07:item-2:block-41"/>
+          <p:cNvPr id="12" name="mdpr:actions-output-review-326e07:item-2:block-41"/>
           <p:cNvSpPr txBox="1"/>
           <p:nvPr/>
         </p:nvSpPr>
         <p:spPr>
           <a:xfrm>
-            <a:off x="1133856" y="3283428"/>
-            <a:ext cx="9820656" cy="839785"/>
+            <a:off x="4562856" y="2103120"/>
+            <a:ext cx="2825496" cy="2185416"/>
           </a:xfrm>
           <a:prstGeom prst="rect">
             <a:avLst/>
@@ -19806,14 +18148,14 @@
       </p:sp>
       <p:sp>
         <p:nvSpPr>
-          <p:cNvPr id="27" name="mdpr:actions-output-review-326e07:item-3:block-41"/>
+          <p:cNvPr id="13" name="mdpr:actions-output-review-326e07:item-3:block-41"/>
           <p:cNvSpPr txBox="1"/>
           <p:nvPr/>
         </p:nvSpPr>
         <p:spPr>
           <a:xfrm>
-            <a:off x="1133856" y="4600164"/>
-            <a:ext cx="9820656" cy="839785"/>
+            <a:off x="8083296" y="2103120"/>
+            <a:ext cx="2825496" cy="2185416"/>
           </a:xfrm>
           <a:prstGeom prst="rect">
             <a:avLst/>
@@ -20061,8 +18403,8 @@
         </p:nvSpPr>
         <p:spPr>
           <a:xfrm>
-            <a:off x="731520" y="1207008"/>
-            <a:ext cx="1325880" cy="54864"/>
+            <a:off x="822960" y="1737360"/>
+            <a:ext cx="73152" cy="841248"/>
           </a:xfrm>
           <a:prstGeom prst="rect">
             <a:avLst/>
@@ -20088,8 +18430,35 @@
         </p:nvSpPr>
         <p:spPr>
           <a:xfrm>
-            <a:off x="822960" y="3099816"/>
-            <a:ext cx="10515600" cy="45720"/>
+            <a:off x="822960" y="2779776"/>
+            <a:ext cx="73152" cy="841248"/>
+          </a:xfrm>
+          <a:prstGeom prst="rect">
+            <a:avLst/>
+          </a:prstGeom>
+          <a:solidFill>
+            <a:srgbClr val="CBD5E1"/>
+          </a:solidFill>
+          <a:ln w="12700">
+            <a:solidFill>
+              <a:srgbClr val="CBD5E1">
+                <a:alpha val="0"/>
+              </a:srgbClr>
+            </a:solidFill>
+            <a:prstDash val="solid"/>
+          </a:ln>
+        </p:spPr>
+      </p:sp>
+      <p:sp>
+        <p:nvSpPr>
+          <p:cNvPr id="9" name="Shape 7"/>
+          <p:cNvSpPr/>
+          <p:nvPr/>
+        </p:nvSpPr>
+        <p:spPr>
+          <a:xfrm>
+            <a:off x="822960" y="3822192"/>
+            <a:ext cx="73152" cy="841248"/>
           </a:xfrm>
           <a:prstGeom prst="rect">
             <a:avLst/>
@@ -20109,14 +18478,14 @@
       </p:sp>
       <p:sp>
         <p:nvSpPr>
-          <p:cNvPr id="9" name="Shape 7"/>
-          <p:cNvSpPr/>
-          <p:nvPr/>
-        </p:nvSpPr>
-        <p:spPr>
-          <a:xfrm>
-            <a:off x="822960" y="4288536"/>
-            <a:ext cx="2011680" cy="45720"/>
+          <p:cNvPr id="10" name="Shape 8"/>
+          <p:cNvSpPr/>
+          <p:nvPr/>
+        </p:nvSpPr>
+        <p:spPr>
+          <a:xfrm>
+            <a:off x="822960" y="4864608"/>
+            <a:ext cx="73152" cy="841248"/>
           </a:xfrm>
           <a:prstGeom prst="rect">
             <a:avLst/>
@@ -20136,13 +18505,13 @@
       </p:sp>
       <p:sp>
         <p:nvSpPr>
-          <p:cNvPr id="10" name="Shape 8"/>
-          <p:cNvSpPr/>
-          <p:nvPr/>
-        </p:nvSpPr>
-        <p:spPr>
-          <a:xfrm>
-            <a:off x="822960" y="3300984"/>
+          <p:cNvPr id="11" name="Shape 9"/>
+          <p:cNvSpPr/>
+          <p:nvPr/>
+        </p:nvSpPr>
+        <p:spPr>
+          <a:xfrm>
+            <a:off x="6272784" y="1737360"/>
             <a:ext cx="73152" cy="841248"/>
           </a:xfrm>
           <a:prstGeom prst="rect">
@@ -20163,7 +18532,61 @@
       </p:sp>
       <p:sp>
         <p:nvSpPr>
-          <p:cNvPr id="11" name="mdpr:2-2-7bfb60:title:__title:2-2-7bfb60"/>
+          <p:cNvPr id="12" name="Shape 10"/>
+          <p:cNvSpPr/>
+          <p:nvPr/>
+        </p:nvSpPr>
+        <p:spPr>
+          <a:xfrm>
+            <a:off x="6272784" y="2779776"/>
+            <a:ext cx="73152" cy="841248"/>
+          </a:xfrm>
+          <a:prstGeom prst="rect">
+            <a:avLst/>
+          </a:prstGeom>
+          <a:solidFill>
+            <a:srgbClr val="CBD5E1"/>
+          </a:solidFill>
+          <a:ln w="12700">
+            <a:solidFill>
+              <a:srgbClr val="CBD5E1">
+                <a:alpha val="0"/>
+              </a:srgbClr>
+            </a:solidFill>
+            <a:prstDash val="solid"/>
+          </a:ln>
+        </p:spPr>
+      </p:sp>
+      <p:sp>
+        <p:nvSpPr>
+          <p:cNvPr id="13" name="Shape 11"/>
+          <p:cNvSpPr/>
+          <p:nvPr/>
+        </p:nvSpPr>
+        <p:spPr>
+          <a:xfrm>
+            <a:off x="6272784" y="3822192"/>
+            <a:ext cx="73152" cy="841248"/>
+          </a:xfrm>
+          <a:prstGeom prst="rect">
+            <a:avLst/>
+          </a:prstGeom>
+          <a:solidFill>
+            <a:srgbClr val="4F6F8F"/>
+          </a:solidFill>
+          <a:ln w="12700">
+            <a:solidFill>
+              <a:srgbClr val="4F6F8F">
+                <a:alpha val="0"/>
+              </a:srgbClr>
+            </a:solidFill>
+            <a:prstDash val="solid"/>
+          </a:ln>
+        </p:spPr>
+      </p:sp>
+      <p:sp>
+        <p:nvSpPr>
+          <p:cNvPr id="14" name="mdpr:2-2-7bfb60:title:__title:2-2-7bfb60"/>
           <p:cNvSpPr txBox="1"/>
           <p:nvPr/>
         </p:nvSpPr>
@@ -20197,7 +18620,24 @@
                 <a:ea typeface="Pretendard" pitchFamily="34" charset="-122"/>
                 <a:cs typeface="Pretendard" pitchFamily="34" charset="-120"/>
               </a:rPr>
-              <a:t>Agenda (Cont. 2/2)</a:t>
+              <a:t>Agenda</a:t>
+            </a:r>
+            <a:pPr algn="ctr" indent="0" marL="0">
+              <a:lnSpc>
+                <a:spcPct val="120000"/>
+              </a:lnSpc>
+              <a:buNone/>
+            </a:pPr>
+            <a:r>
+              <a:rPr lang="en-US" sz="2300" dirty="0">
+                <a:solidFill>
+                  <a:srgbClr val="898989"/>
+                </a:solidFill>
+                <a:latin typeface="Pretendard" pitchFamily="34" charset="0"/>
+                <a:ea typeface="Pretendard" pitchFamily="34" charset="-122"/>
+                <a:cs typeface="Pretendard" pitchFamily="34" charset="-120"/>
+              </a:rPr>
+              <a:t> (Cont. 2/2)</a:t>
             </a:r>
             <a:endParaRPr lang="en-US" sz="3800" dirty="0"/>
           </a:p>
@@ -20205,14 +18645,14 @@
       </p:sp>
       <p:sp>
         <p:nvSpPr>
-          <p:cNvPr id="12" name="mdpr:2-2-7bfb60:toc-item-1:toc-item-15"/>
+          <p:cNvPr id="15" name="mdpr:2-2-7bfb60:toc-item-1:toc-item-9"/>
           <p:cNvSpPr txBox="1"/>
           <p:nvPr/>
         </p:nvSpPr>
         <p:spPr>
           <a:xfrm>
-            <a:off x="1042416" y="3392424"/>
-            <a:ext cx="10094976" cy="658368"/>
+            <a:off x="1042416" y="1828800"/>
+            <a:ext cx="4645152" cy="658368"/>
           </a:xfrm>
           <a:prstGeom prst="rect">
             <a:avLst/>
@@ -20231,7 +18671,7 @@
               <a:buNone/>
             </a:pPr>
             <a:r>
-              <a:rPr lang="en-US" sz="2200" dirty="0">
+              <a:rPr lang="en-US" sz="1800" dirty="0">
                 <a:solidFill>
                   <a:srgbClr val="111111"/>
                 </a:solidFill>
@@ -20239,9 +18679,261 @@
                 <a:ea typeface="Pretendard" pitchFamily="34" charset="-122"/>
                 <a:cs typeface="Pretendard" pitchFamily="34" charset="-120"/>
               </a:rPr>
-              <a:t>01  Actions Output Review</a:t>
+              <a:t>09  Editable Proof Objects</a:t>
             </a:r>
-            <a:endParaRPr lang="en-US" sz="2200" dirty="0"/>
+            <a:endParaRPr lang="en-US" sz="1800" dirty="0"/>
+          </a:p>
+        </p:txBody>
+      </p:sp>
+      <p:sp>
+        <p:nvSpPr>
+          <p:cNvPr id="16" name="mdpr:2-2-7bfb60:toc-item-2:toc-item-10"/>
+          <p:cNvSpPr txBox="1"/>
+          <p:nvPr/>
+        </p:nvSpPr>
+        <p:spPr>
+          <a:xfrm>
+            <a:off x="1042416" y="2871216"/>
+            <a:ext cx="4645152" cy="658368"/>
+          </a:xfrm>
+          <a:prstGeom prst="rect">
+            <a:avLst/>
+          </a:prstGeom>
+          <a:noFill/>
+          <a:ln/>
+        </p:spPr>
+        <p:txBody>
+          <a:bodyPr wrap="square" lIns="0" tIns="25400" rIns="25400" bIns="0" rtlCol="0" anchor="ctr"/>
+          <a:lstStyle/>
+          <a:p>
+            <a:pPr algn="ctr" indent="0" marL="0">
+              <a:lnSpc>
+                <a:spcPct val="120000"/>
+              </a:lnSpc>
+              <a:buNone/>
+            </a:pPr>
+            <a:r>
+              <a:rPr lang="en-US" sz="1800" dirty="0">
+                <a:solidFill>
+                  <a:srgbClr val="111111"/>
+                </a:solidFill>
+                <a:latin typeface="Pretendard" pitchFamily="34" charset="0"/>
+                <a:ea typeface="Pretendard" pitchFamily="34" charset="-122"/>
+                <a:cs typeface="Pretendard" pitchFamily="34" charset="-120"/>
+              </a:rPr>
+              <a:t>10  Object Shape Grammar</a:t>
+            </a:r>
+            <a:endParaRPr lang="en-US" sz="1800" dirty="0"/>
+          </a:p>
+        </p:txBody>
+      </p:sp>
+      <p:sp>
+        <p:nvSpPr>
+          <p:cNvPr id="17" name="mdpr:2-2-7bfb60:toc-item-3:toc-item-11"/>
+          <p:cNvSpPr txBox="1"/>
+          <p:nvPr/>
+        </p:nvSpPr>
+        <p:spPr>
+          <a:xfrm>
+            <a:off x="1042416" y="3913632"/>
+            <a:ext cx="4645152" cy="658368"/>
+          </a:xfrm>
+          <a:prstGeom prst="rect">
+            <a:avLst/>
+          </a:prstGeom>
+          <a:noFill/>
+          <a:ln/>
+        </p:spPr>
+        <p:txBody>
+          <a:bodyPr wrap="square" lIns="0" tIns="25400" rIns="25400" bIns="0" rtlCol="0" anchor="ctr"/>
+          <a:lstStyle/>
+          <a:p>
+            <a:pPr algn="ctr" indent="0" marL="0">
+              <a:lnSpc>
+                <a:spcPct val="120000"/>
+              </a:lnSpc>
+              <a:buNone/>
+            </a:pPr>
+            <a:r>
+              <a:rPr lang="en-US" sz="1800" dirty="0">
+                <a:solidFill>
+                  <a:srgbClr val="111111"/>
+                </a:solidFill>
+                <a:latin typeface="Pretendard" pitchFamily="34" charset="0"/>
+                <a:ea typeface="Pretendard" pitchFamily="34" charset="-122"/>
+                <a:cs typeface="Pretendard" pitchFamily="34" charset="-120"/>
+              </a:rPr>
+              <a:t>11  Icon and Text Aside</a:t>
+            </a:r>
+            <a:endParaRPr lang="en-US" sz="1800" dirty="0"/>
+          </a:p>
+        </p:txBody>
+      </p:sp>
+      <p:sp>
+        <p:nvSpPr>
+          <p:cNvPr id="18" name="mdpr:2-2-7bfb60:toc-item-4:toc-item-12"/>
+          <p:cNvSpPr txBox="1"/>
+          <p:nvPr/>
+        </p:nvSpPr>
+        <p:spPr>
+          <a:xfrm>
+            <a:off x="1042416" y="4956048"/>
+            <a:ext cx="4645152" cy="658368"/>
+          </a:xfrm>
+          <a:prstGeom prst="rect">
+            <a:avLst/>
+          </a:prstGeom>
+          <a:noFill/>
+          <a:ln/>
+        </p:spPr>
+        <p:txBody>
+          <a:bodyPr wrap="square" lIns="0" tIns="25400" rIns="25400" bIns="0" rtlCol="0" anchor="ctr"/>
+          <a:lstStyle/>
+          <a:p>
+            <a:pPr algn="ctr" indent="0" marL="0">
+              <a:lnSpc>
+                <a:spcPct val="120000"/>
+              </a:lnSpc>
+              <a:buNone/>
+            </a:pPr>
+            <a:r>
+              <a:rPr lang="en-US" sz="1800" dirty="0">
+                <a:solidFill>
+                  <a:srgbClr val="111111"/>
+                </a:solidFill>
+                <a:latin typeface="Pretendard" pitchFamily="34" charset="0"/>
+                <a:ea typeface="Pretendard" pitchFamily="34" charset="-122"/>
+                <a:cs typeface="Pretendard" pitchFamily="34" charset="-120"/>
+              </a:rPr>
+              <a:t>12  Overflow Guard</a:t>
+            </a:r>
+            <a:endParaRPr lang="en-US" sz="1800" dirty="0"/>
+          </a:p>
+        </p:txBody>
+      </p:sp>
+      <p:sp>
+        <p:nvSpPr>
+          <p:cNvPr id="19" name="mdpr:2-2-7bfb60:toc-item-5:toc-item-13"/>
+          <p:cNvSpPr txBox="1"/>
+          <p:nvPr/>
+        </p:nvSpPr>
+        <p:spPr>
+          <a:xfrm>
+            <a:off x="6492240" y="1828800"/>
+            <a:ext cx="4645152" cy="658368"/>
+          </a:xfrm>
+          <a:prstGeom prst="rect">
+            <a:avLst/>
+          </a:prstGeom>
+          <a:noFill/>
+          <a:ln/>
+        </p:spPr>
+        <p:txBody>
+          <a:bodyPr wrap="square" lIns="0" tIns="25400" rIns="25400" bIns="0" rtlCol="0" anchor="ctr"/>
+          <a:lstStyle/>
+          <a:p>
+            <a:pPr algn="ctr" indent="0" marL="0">
+              <a:lnSpc>
+                <a:spcPct val="120000"/>
+              </a:lnSpc>
+              <a:buNone/>
+            </a:pPr>
+            <a:r>
+              <a:rPr lang="en-US" sz="1800" dirty="0">
+                <a:solidFill>
+                  <a:srgbClr val="111111"/>
+                </a:solidFill>
+                <a:latin typeface="Pretendard" pitchFamily="34" charset="0"/>
+                <a:ea typeface="Pretendard" pitchFamily="34" charset="-122"/>
+                <a:cs typeface="Pretendard" pitchFamily="34" charset="-120"/>
+              </a:rPr>
+              <a:t>13  Image Safe Frame</a:t>
+            </a:r>
+            <a:endParaRPr lang="en-US" sz="1800" dirty="0"/>
+          </a:p>
+        </p:txBody>
+      </p:sp>
+      <p:sp>
+        <p:nvSpPr>
+          <p:cNvPr id="20" name="mdpr:2-2-7bfb60:toc-item-6:toc-item-14"/>
+          <p:cNvSpPr txBox="1"/>
+          <p:nvPr/>
+        </p:nvSpPr>
+        <p:spPr>
+          <a:xfrm>
+            <a:off x="6492240" y="2871216"/>
+            <a:ext cx="4645152" cy="658368"/>
+          </a:xfrm>
+          <a:prstGeom prst="rect">
+            <a:avLst/>
+          </a:prstGeom>
+          <a:noFill/>
+          <a:ln/>
+        </p:spPr>
+        <p:txBody>
+          <a:bodyPr wrap="square" lIns="0" tIns="25400" rIns="25400" bIns="0" rtlCol="0" anchor="ctr"/>
+          <a:lstStyle/>
+          <a:p>
+            <a:pPr algn="ctr" indent="0" marL="0">
+              <a:lnSpc>
+                <a:spcPct val="120000"/>
+              </a:lnSpc>
+              <a:buNone/>
+            </a:pPr>
+            <a:r>
+              <a:rPr lang="en-US" sz="1800" dirty="0">
+                <a:solidFill>
+                  <a:srgbClr val="111111"/>
+                </a:solidFill>
+                <a:latin typeface="Pretendard" pitchFamily="34" charset="0"/>
+                <a:ea typeface="Pretendard" pitchFamily="34" charset="-122"/>
+                <a:cs typeface="Pretendard" pitchFamily="34" charset="-120"/>
+              </a:rPr>
+              <a:t>14  Mixed Object Packing</a:t>
+            </a:r>
+            <a:endParaRPr lang="en-US" sz="1800" dirty="0"/>
+          </a:p>
+        </p:txBody>
+      </p:sp>
+      <p:sp>
+        <p:nvSpPr>
+          <p:cNvPr id="21" name="mdpr:2-2-7bfb60:toc-item-7:toc-item-15"/>
+          <p:cNvSpPr txBox="1"/>
+          <p:nvPr/>
+        </p:nvSpPr>
+        <p:spPr>
+          <a:xfrm>
+            <a:off x="6492240" y="3913632"/>
+            <a:ext cx="4645152" cy="658368"/>
+          </a:xfrm>
+          <a:prstGeom prst="rect">
+            <a:avLst/>
+          </a:prstGeom>
+          <a:noFill/>
+          <a:ln/>
+        </p:spPr>
+        <p:txBody>
+          <a:bodyPr wrap="square" lIns="0" tIns="25400" rIns="25400" bIns="0" rtlCol="0" anchor="ctr"/>
+          <a:lstStyle/>
+          <a:p>
+            <a:pPr algn="ctr" indent="0" marL="0">
+              <a:lnSpc>
+                <a:spcPct val="120000"/>
+              </a:lnSpc>
+              <a:buNone/>
+            </a:pPr>
+            <a:r>
+              <a:rPr lang="en-US" sz="1800" dirty="0">
+                <a:solidFill>
+                  <a:srgbClr val="111111"/>
+                </a:solidFill>
+                <a:latin typeface="Pretendard" pitchFamily="34" charset="0"/>
+                <a:ea typeface="Pretendard" pitchFamily="34" charset="-122"/>
+                <a:cs typeface="Pretendard" pitchFamily="34" charset="-120"/>
+              </a:rPr>
+              <a:t>15  Actions Output Review</a:t>
+            </a:r>
+            <a:endParaRPr lang="en-US" sz="1800" dirty="0"/>
           </a:p>
         </p:txBody>
       </p:sp>
@@ -20443,33 +19135,6 @@
         </p:nvSpPr>
         <p:spPr>
           <a:xfrm>
-            <a:off x="731520" y="1207008"/>
-            <a:ext cx="1325880" cy="54864"/>
-          </a:xfrm>
-          <a:prstGeom prst="rect">
-            <a:avLst/>
-          </a:prstGeom>
-          <a:solidFill>
-            <a:srgbClr val="4F6F8F"/>
-          </a:solidFill>
-          <a:ln w="12700">
-            <a:solidFill>
-              <a:srgbClr val="4F6F8F">
-                <a:alpha val="0"/>
-              </a:srgbClr>
-            </a:solidFill>
-            <a:prstDash val="solid"/>
-          </a:ln>
-        </p:spPr>
-      </p:sp>
-      <p:sp>
-        <p:nvSpPr>
-          <p:cNvPr id="8" name="Shape 6"/>
-          <p:cNvSpPr/>
-          <p:nvPr/>
-        </p:nvSpPr>
-        <p:spPr>
-          <a:xfrm>
             <a:off x="955548" y="1467612"/>
             <a:ext cx="10241280" cy="1325880"/>
           </a:xfrm>
@@ -20502,7 +19167,7 @@
       </p:sp>
       <p:sp>
         <p:nvSpPr>
-          <p:cNvPr id="9" name="Shape 7"/>
+          <p:cNvPr id="8" name="Shape 6"/>
           <p:cNvSpPr/>
           <p:nvPr/>
         </p:nvSpPr>
@@ -20540,7 +19205,7 @@
       </p:sp>
       <p:sp>
         <p:nvSpPr>
-          <p:cNvPr id="10" name="Shape 8"/>
+          <p:cNvPr id="9" name="Shape 7"/>
           <p:cNvSpPr/>
           <p:nvPr/>
         </p:nvSpPr>
@@ -20571,7 +19236,7 @@
       </p:sp>
       <p:pic>
         <p:nvPicPr>
-          <p:cNvPr id="11" name="Image 0" descr="preencoded.png">    </p:cNvPr>
+          <p:cNvPr id="10" name="Image 0" descr="preencoded.png">    </p:cNvPr>
           <p:cNvPicPr>
             <a:picLocks noChangeAspect="1"/>
           </p:cNvPicPr>
@@ -20601,7 +19266,7 @@
       </p:pic>
       <p:sp>
         <p:nvSpPr>
-          <p:cNvPr id="12" name="Shape 9"/>
+          <p:cNvPr id="11" name="Shape 8"/>
           <p:cNvSpPr/>
           <p:nvPr/>
         </p:nvSpPr>
@@ -20630,7 +19295,7 @@
       </p:sp>
       <p:sp>
         <p:nvSpPr>
-          <p:cNvPr id="13" name="Shape 10"/>
+          <p:cNvPr id="12" name="Shape 9"/>
           <p:cNvSpPr/>
           <p:nvPr/>
         </p:nvSpPr>
@@ -20657,7 +19322,7 @@
       </p:sp>
       <p:sp>
         <p:nvSpPr>
-          <p:cNvPr id="14" name="mdpr:teaser-summary-7731dc:title:__title:teaser-summary-7731dc"/>
+          <p:cNvPr id="13" name="mdpr:teaser-summary-7731dc:title:__title:teaser-summary-7731dc"/>
           <p:cNvSpPr txBox="1"/>
           <p:nvPr/>
         </p:nvSpPr>
@@ -20699,7 +19364,7 @@
       </p:sp>
       <p:sp>
         <p:nvSpPr>
-          <p:cNvPr id="15" name="mdpr:teaser-summary-7731dc:key-message:block-3"/>
+          <p:cNvPr id="14" name="mdpr:teaser-summary-7731dc:key-message:block-3"/>
           <p:cNvSpPr txBox="1"/>
           <p:nvPr/>
         </p:nvSpPr>
@@ -20741,7 +19406,7 @@
       </p:sp>
       <p:sp>
         <p:nvSpPr>
-          <p:cNvPr id="16" name="mdpr:teaser-summary-7731dc:body:block-4"/>
+          <p:cNvPr id="15" name="mdpr:teaser-summary-7731dc:body:block-4"/>
           <p:cNvSpPr txBox="1"/>
           <p:nvPr/>
         </p:nvSpPr>
@@ -21116,8 +19781,8 @@
         </p:nvSpPr>
         <p:spPr>
           <a:xfrm>
-            <a:off x="731520" y="1207008"/>
-            <a:ext cx="1325880" cy="54864"/>
+            <a:off x="822960" y="1938528"/>
+            <a:ext cx="73152" cy="2514600"/>
           </a:xfrm>
           <a:prstGeom prst="rect">
             <a:avLst/>
@@ -21143,427 +19808,14 @@
         </p:nvSpPr>
         <p:spPr>
           <a:xfrm>
-            <a:off x="955548" y="1915668"/>
-            <a:ext cx="10241280" cy="1024128"/>
-          </a:xfrm>
-          <a:prstGeom prst="roundRect">
-            <a:avLst>
-              <a:gd name="adj" fmla="val 5357"/>
-            </a:avLst>
-          </a:prstGeom>
-          <a:solidFill>
-            <a:srgbClr val="B8C3D2">
-              <a:alpha val="26000"/>
-            </a:srgbClr>
-          </a:solidFill>
-          <a:ln w="12700">
-            <a:solidFill>
-              <a:srgbClr val="D5DCE7">
-                <a:alpha val="0"/>
-              </a:srgbClr>
-            </a:solidFill>
-            <a:prstDash val="solid"/>
-          </a:ln>
-          <a:effectLst>
-            <a:outerShdw sx="100000" sy="100000" kx="0" ky="0" algn="bl" rotWithShape="0" blurRad="13970" dist="50800" dir="2700000">
-              <a:srgbClr val="AAB5C4">
-                <a:alpha val="20000"/>
-              </a:srgbClr>
-            </a:outerShdw>
-          </a:effectLst>
-        </p:spPr>
-      </p:sp>
-      <p:sp>
-        <p:nvSpPr>
-          <p:cNvPr id="9" name="Shape 7"/>
-          <p:cNvSpPr/>
-          <p:nvPr/>
-        </p:nvSpPr>
-        <p:spPr>
-          <a:xfrm>
-            <a:off x="882396" y="1833372"/>
-            <a:ext cx="10241280" cy="1024128"/>
-          </a:xfrm>
-          <a:prstGeom prst="roundRect">
-            <a:avLst>
-              <a:gd name="adj" fmla="val 5357"/>
-            </a:avLst>
-          </a:prstGeom>
-          <a:solidFill>
-            <a:srgbClr val="FFFFFF">
-              <a:alpha val="42000"/>
-            </a:srgbClr>
-          </a:solidFill>
-          <a:ln w="12700">
-            <a:solidFill>
-              <a:srgbClr val="FFFFFF">
-                <a:alpha val="0"/>
-              </a:srgbClr>
-            </a:solidFill>
-            <a:prstDash val="solid"/>
-          </a:ln>
-          <a:effectLst>
-            <a:outerShdw sx="100000" sy="100000" kx="0" ky="0" algn="bl" rotWithShape="0" blurRad="10160" dist="50800" dir="13500000">
-              <a:srgbClr val="FFFFFF">
-                <a:alpha val="36000"/>
-              </a:srgbClr>
-            </a:outerShdw>
-          </a:effectLst>
-        </p:spPr>
-      </p:sp>
-      <p:sp>
-        <p:nvSpPr>
-          <p:cNvPr id="10" name="Shape 8"/>
-          <p:cNvSpPr/>
-          <p:nvPr/>
-        </p:nvSpPr>
-        <p:spPr>
-          <a:xfrm>
-            <a:off x="914400" y="1865376"/>
-            <a:ext cx="10241280" cy="1024128"/>
-          </a:xfrm>
-          <a:prstGeom prst="roundRect">
-            <a:avLst>
-              <a:gd name="adj" fmla="val 5357"/>
-            </a:avLst>
-          </a:prstGeom>
-          <a:solidFill>
-            <a:srgbClr val="E9EEF5">
-              <a:alpha val="6000"/>
-            </a:srgbClr>
-          </a:solidFill>
-          <a:ln w="12700">
-            <a:solidFill>
-              <a:srgbClr val="FFFFFF">
-                <a:alpha val="28000"/>
-              </a:srgbClr>
-            </a:solidFill>
-            <a:prstDash val="solid"/>
-          </a:ln>
-        </p:spPr>
-      </p:sp>
-      <p:pic>
-        <p:nvPicPr>
-          <p:cNvPr id="11" name="Image 0" descr="preencoded.png">    </p:cNvPr>
-          <p:cNvPicPr>
-            <a:picLocks noChangeAspect="1"/>
-          </p:cNvPicPr>
-          <p:nvPr/>
-        </p:nvPicPr>
-        <p:blipFill>
-          <a:blip r:embed="rId1">
-            <a:extLst>
-              <a:ext uri="{96DAC541-7B7A-43D3-8B79-37D633B846F1}">
-                <asvg:svgBlip xmlns:asvg="http://schemas.microsoft.com/office/drawing/2016/SVG/main" r:embed="rId2"/>
-              </a:ext>
-            </a:extLst>
-          </a:blip>
-          <a:stretch>
-            <a:fillRect/>
-          </a:stretch>
-        </p:blipFill>
-        <p:spPr>
-          <a:xfrm>
-            <a:off x="914400" y="1865376"/>
-            <a:ext cx="10241280" cy="1024128"/>
+            <a:off x="4343400" y="1938528"/>
+            <a:ext cx="73152" cy="2514600"/>
           </a:xfrm>
           <a:prstGeom prst="rect">
             <a:avLst/>
           </a:prstGeom>
-        </p:spPr>
-      </p:pic>
-      <p:sp>
-        <p:nvSpPr>
-          <p:cNvPr id="12" name="Shape 9"/>
-          <p:cNvSpPr/>
-          <p:nvPr/>
-        </p:nvSpPr>
-        <p:spPr>
-          <a:xfrm>
-            <a:off x="955548" y="3241548"/>
-            <a:ext cx="10241280" cy="1024128"/>
-          </a:xfrm>
-          <a:prstGeom prst="roundRect">
-            <a:avLst>
-              <a:gd name="adj" fmla="val 5357"/>
-            </a:avLst>
-          </a:prstGeom>
-          <a:solidFill>
-            <a:srgbClr val="B8C3D2">
-              <a:alpha val="26000"/>
-            </a:srgbClr>
-          </a:solidFill>
-          <a:ln w="12700">
-            <a:solidFill>
-              <a:srgbClr val="D5DCE7">
-                <a:alpha val="0"/>
-              </a:srgbClr>
-            </a:solidFill>
-            <a:prstDash val="solid"/>
-          </a:ln>
-          <a:effectLst>
-            <a:outerShdw sx="100000" sy="100000" kx="0" ky="0" algn="bl" rotWithShape="0" blurRad="13970" dist="50800" dir="2700000">
-              <a:srgbClr val="AAB5C4">
-                <a:alpha val="20000"/>
-              </a:srgbClr>
-            </a:outerShdw>
-          </a:effectLst>
-        </p:spPr>
-      </p:sp>
-      <p:sp>
-        <p:nvSpPr>
-          <p:cNvPr id="13" name="Shape 10"/>
-          <p:cNvSpPr/>
-          <p:nvPr/>
-        </p:nvSpPr>
-        <p:spPr>
-          <a:xfrm>
-            <a:off x="882396" y="3159252"/>
-            <a:ext cx="10241280" cy="1024128"/>
-          </a:xfrm>
-          <a:prstGeom prst="roundRect">
-            <a:avLst>
-              <a:gd name="adj" fmla="val 5357"/>
-            </a:avLst>
-          </a:prstGeom>
-          <a:solidFill>
-            <a:srgbClr val="FFFFFF">
-              <a:alpha val="42000"/>
-            </a:srgbClr>
-          </a:solidFill>
-          <a:ln w="12700">
-            <a:solidFill>
-              <a:srgbClr val="FFFFFF">
-                <a:alpha val="0"/>
-              </a:srgbClr>
-            </a:solidFill>
-            <a:prstDash val="solid"/>
-          </a:ln>
-          <a:effectLst>
-            <a:outerShdw sx="100000" sy="100000" kx="0" ky="0" algn="bl" rotWithShape="0" blurRad="10160" dist="50800" dir="13500000">
-              <a:srgbClr val="FFFFFF">
-                <a:alpha val="36000"/>
-              </a:srgbClr>
-            </a:outerShdw>
-          </a:effectLst>
-        </p:spPr>
-      </p:sp>
-      <p:sp>
-        <p:nvSpPr>
-          <p:cNvPr id="14" name="Shape 11"/>
-          <p:cNvSpPr/>
-          <p:nvPr/>
-        </p:nvSpPr>
-        <p:spPr>
-          <a:xfrm>
-            <a:off x="914400" y="3191256"/>
-            <a:ext cx="10241280" cy="1024128"/>
-          </a:xfrm>
-          <a:prstGeom prst="roundRect">
-            <a:avLst>
-              <a:gd name="adj" fmla="val 5357"/>
-            </a:avLst>
-          </a:prstGeom>
-          <a:solidFill>
-            <a:srgbClr val="E9EEF5">
-              <a:alpha val="6000"/>
-            </a:srgbClr>
-          </a:solidFill>
-          <a:ln w="12700">
-            <a:solidFill>
-              <a:srgbClr val="FFFFFF">
-                <a:alpha val="28000"/>
-              </a:srgbClr>
-            </a:solidFill>
-            <a:prstDash val="solid"/>
-          </a:ln>
-        </p:spPr>
-      </p:sp>
-      <p:pic>
-        <p:nvPicPr>
-          <p:cNvPr id="15" name="Image 1" descr="preencoded.png">    </p:cNvPr>
-          <p:cNvPicPr>
-            <a:picLocks noChangeAspect="1"/>
-          </p:cNvPicPr>
-          <p:nvPr/>
-        </p:nvPicPr>
-        <p:blipFill>
-          <a:blip r:embed="rId3">
-            <a:extLst>
-              <a:ext uri="{96DAC541-7B7A-43D3-8B79-37D633B846F1}">
-                <asvg:svgBlip xmlns:asvg="http://schemas.microsoft.com/office/drawing/2016/SVG/main" r:embed="rId4"/>
-              </a:ext>
-            </a:extLst>
-          </a:blip>
-          <a:stretch>
-            <a:fillRect/>
-          </a:stretch>
-        </p:blipFill>
-        <p:spPr>
-          <a:xfrm>
-            <a:off x="914400" y="3191256"/>
-            <a:ext cx="10241280" cy="1024128"/>
-          </a:xfrm>
-          <a:prstGeom prst="rect">
-            <a:avLst/>
-          </a:prstGeom>
-        </p:spPr>
-      </p:pic>
-      <p:sp>
-        <p:nvSpPr>
-          <p:cNvPr id="16" name="Shape 12"/>
-          <p:cNvSpPr/>
-          <p:nvPr/>
-        </p:nvSpPr>
-        <p:spPr>
-          <a:xfrm>
-            <a:off x="955548" y="4558284"/>
-            <a:ext cx="10241280" cy="1024128"/>
-          </a:xfrm>
-          <a:prstGeom prst="roundRect">
-            <a:avLst>
-              <a:gd name="adj" fmla="val 5357"/>
-            </a:avLst>
-          </a:prstGeom>
-          <a:solidFill>
-            <a:srgbClr val="B8C3D2">
-              <a:alpha val="26000"/>
-            </a:srgbClr>
-          </a:solidFill>
-          <a:ln w="12700">
-            <a:solidFill>
-              <a:srgbClr val="D5DCE7">
-                <a:alpha val="0"/>
-              </a:srgbClr>
-            </a:solidFill>
-            <a:prstDash val="solid"/>
-          </a:ln>
-          <a:effectLst>
-            <a:outerShdw sx="100000" sy="100000" kx="0" ky="0" algn="bl" rotWithShape="0" blurRad="13970" dist="50800" dir="2700000">
-              <a:srgbClr val="AAB5C4">
-                <a:alpha val="20000"/>
-              </a:srgbClr>
-            </a:outerShdw>
-          </a:effectLst>
-        </p:spPr>
-      </p:sp>
-      <p:sp>
-        <p:nvSpPr>
-          <p:cNvPr id="17" name="Shape 13"/>
-          <p:cNvSpPr/>
-          <p:nvPr/>
-        </p:nvSpPr>
-        <p:spPr>
-          <a:xfrm>
-            <a:off x="882396" y="4475988"/>
-            <a:ext cx="10241280" cy="1024128"/>
-          </a:xfrm>
-          <a:prstGeom prst="roundRect">
-            <a:avLst>
-              <a:gd name="adj" fmla="val 5357"/>
-            </a:avLst>
-          </a:prstGeom>
-          <a:solidFill>
-            <a:srgbClr val="FFFFFF">
-              <a:alpha val="42000"/>
-            </a:srgbClr>
-          </a:solidFill>
-          <a:ln w="12700">
-            <a:solidFill>
-              <a:srgbClr val="FFFFFF">
-                <a:alpha val="0"/>
-              </a:srgbClr>
-            </a:solidFill>
-            <a:prstDash val="solid"/>
-          </a:ln>
-          <a:effectLst>
-            <a:outerShdw sx="100000" sy="100000" kx="0" ky="0" algn="bl" rotWithShape="0" blurRad="10160" dist="50800" dir="13500000">
-              <a:srgbClr val="FFFFFF">
-                <a:alpha val="36000"/>
-              </a:srgbClr>
-            </a:outerShdw>
-          </a:effectLst>
-        </p:spPr>
-      </p:sp>
-      <p:sp>
-        <p:nvSpPr>
-          <p:cNvPr id="18" name="Shape 14"/>
-          <p:cNvSpPr/>
-          <p:nvPr/>
-        </p:nvSpPr>
-        <p:spPr>
-          <a:xfrm>
-            <a:off x="914400" y="4507992"/>
-            <a:ext cx="10241280" cy="1024128"/>
-          </a:xfrm>
-          <a:prstGeom prst="roundRect">
-            <a:avLst>
-              <a:gd name="adj" fmla="val 5357"/>
-            </a:avLst>
-          </a:prstGeom>
-          <a:solidFill>
-            <a:srgbClr val="E9EEF5">
-              <a:alpha val="6000"/>
-            </a:srgbClr>
-          </a:solidFill>
-          <a:ln w="12700">
-            <a:solidFill>
-              <a:srgbClr val="FFFFFF">
-                <a:alpha val="28000"/>
-              </a:srgbClr>
-            </a:solidFill>
-            <a:prstDash val="solid"/>
-          </a:ln>
-        </p:spPr>
-      </p:sp>
-      <p:pic>
-        <p:nvPicPr>
-          <p:cNvPr id="19" name="Image 2" descr="preencoded.png">    </p:cNvPr>
-          <p:cNvPicPr>
-            <a:picLocks noChangeAspect="1"/>
-          </p:cNvPicPr>
-          <p:nvPr/>
-        </p:nvPicPr>
-        <p:blipFill>
-          <a:blip r:embed="rId5">
-            <a:extLst>
-              <a:ext uri="{96DAC541-7B7A-43D3-8B79-37D633B846F1}">
-                <asvg:svgBlip xmlns:asvg="http://schemas.microsoft.com/office/drawing/2016/SVG/main" r:embed="rId6"/>
-              </a:ext>
-            </a:extLst>
-          </a:blip>
-          <a:stretch>
-            <a:fillRect/>
-          </a:stretch>
-        </p:blipFill>
-        <p:spPr>
-          <a:xfrm>
-            <a:off x="914400" y="4507992"/>
-            <a:ext cx="10241280" cy="1024128"/>
-          </a:xfrm>
-          <a:prstGeom prst="rect">
-            <a:avLst/>
-          </a:prstGeom>
-        </p:spPr>
-      </p:pic>
-      <p:sp>
-        <p:nvSpPr>
-          <p:cNvPr id="20" name="Shape 15"/>
-          <p:cNvSpPr/>
-          <p:nvPr/>
-        </p:nvSpPr>
-        <p:spPr>
-          <a:xfrm>
-            <a:off x="786384" y="1956816"/>
-            <a:ext cx="32004" cy="3483864"/>
-          </a:xfrm>
-          <a:prstGeom prst="rect">
-            <a:avLst/>
-          </a:prstGeom>
-          <a:solidFill>
-            <a:srgbClr val="CBD5E1">
-              <a:alpha val="80000"/>
-            </a:srgbClr>
+          <a:solidFill>
+            <a:srgbClr val="CBD5E1"/>
           </a:solidFill>
           <a:ln w="12700">
             <a:solidFill>
@@ -21577,14 +19829,14 @@
       </p:sp>
       <p:sp>
         <p:nvSpPr>
-          <p:cNvPr id="21" name="Shape 16"/>
-          <p:cNvSpPr/>
-          <p:nvPr/>
-        </p:nvSpPr>
-        <p:spPr>
-          <a:xfrm>
-            <a:off x="914400" y="1865376"/>
-            <a:ext cx="73152" cy="1024128"/>
+          <p:cNvPr id="9" name="Shape 7"/>
+          <p:cNvSpPr/>
+          <p:nvPr/>
+        </p:nvSpPr>
+        <p:spPr>
+          <a:xfrm>
+            <a:off x="7863840" y="1938528"/>
+            <a:ext cx="73152" cy="2514600"/>
           </a:xfrm>
           <a:prstGeom prst="rect">
             <a:avLst/>
@@ -21604,61 +19856,7 @@
       </p:sp>
       <p:sp>
         <p:nvSpPr>
-          <p:cNvPr id="22" name="Shape 17"/>
-          <p:cNvSpPr/>
-          <p:nvPr/>
-        </p:nvSpPr>
-        <p:spPr>
-          <a:xfrm>
-            <a:off x="914400" y="3191256"/>
-            <a:ext cx="73152" cy="1024128"/>
-          </a:xfrm>
-          <a:prstGeom prst="rect">
-            <a:avLst/>
-          </a:prstGeom>
-          <a:solidFill>
-            <a:srgbClr val="CBD5E1"/>
-          </a:solidFill>
-          <a:ln w="12700">
-            <a:solidFill>
-              <a:srgbClr val="CBD5E1">
-                <a:alpha val="0"/>
-              </a:srgbClr>
-            </a:solidFill>
-            <a:prstDash val="solid"/>
-          </a:ln>
-        </p:spPr>
-      </p:sp>
-      <p:sp>
-        <p:nvSpPr>
-          <p:cNvPr id="23" name="Shape 18"/>
-          <p:cNvSpPr/>
-          <p:nvPr/>
-        </p:nvSpPr>
-        <p:spPr>
-          <a:xfrm>
-            <a:off x="914400" y="4507992"/>
-            <a:ext cx="73152" cy="1024128"/>
-          </a:xfrm>
-          <a:prstGeom prst="rect">
-            <a:avLst/>
-          </a:prstGeom>
-          <a:solidFill>
-            <a:srgbClr val="4F6F8F"/>
-          </a:solidFill>
-          <a:ln w="12700">
-            <a:solidFill>
-              <a:srgbClr val="4F6F8F">
-                <a:alpha val="0"/>
-              </a:srgbClr>
-            </a:solidFill>
-            <a:prstDash val="solid"/>
-          </a:ln>
-        </p:spPr>
-      </p:sp>
-      <p:sp>
-        <p:nvSpPr>
-          <p:cNvPr id="24" name="mdpr:1-2-32ac08:title:__title:1-2-32ac08"/>
+          <p:cNvPr id="10" name="mdpr:1-2-32ac08:title:__title:1-2-32ac08"/>
           <p:cNvSpPr txBox="1"/>
           <p:nvPr/>
         </p:nvSpPr>
@@ -21700,14 +19898,14 @@
       </p:sp>
       <p:sp>
         <p:nvSpPr>
-          <p:cNvPr id="25" name="mdpr:1-2-32ac08:item-1:block-6-chunk-1"/>
+          <p:cNvPr id="11" name="mdpr:1-2-32ac08:item-1:block-6-chunk-1"/>
           <p:cNvSpPr txBox="1"/>
           <p:nvPr/>
         </p:nvSpPr>
         <p:spPr>
           <a:xfrm>
-            <a:off x="1133856" y="1957548"/>
-            <a:ext cx="9820656" cy="839785"/>
+            <a:off x="1042416" y="2103120"/>
+            <a:ext cx="2825496" cy="2185416"/>
           </a:xfrm>
           <a:prstGeom prst="rect">
             <a:avLst/>
@@ -21759,14 +19957,14 @@
       </p:sp>
       <p:sp>
         <p:nvSpPr>
-          <p:cNvPr id="26" name="mdpr:1-2-32ac08:item-2:block-6-chunk-1"/>
+          <p:cNvPr id="12" name="mdpr:1-2-32ac08:item-2:block-6-chunk-1"/>
           <p:cNvSpPr txBox="1"/>
           <p:nvPr/>
         </p:nvSpPr>
         <p:spPr>
           <a:xfrm>
-            <a:off x="1133856" y="3283428"/>
-            <a:ext cx="9820656" cy="839785"/>
+            <a:off x="4562856" y="2103120"/>
+            <a:ext cx="2825496" cy="2185416"/>
           </a:xfrm>
           <a:prstGeom prst="rect">
             <a:avLst/>
@@ -21818,14 +20016,14 @@
       </p:sp>
       <p:sp>
         <p:nvSpPr>
-          <p:cNvPr id="27" name="mdpr:1-2-32ac08:item-3:block-6-chunk-1"/>
+          <p:cNvPr id="13" name="mdpr:1-2-32ac08:item-3:block-6-chunk-1"/>
           <p:cNvSpPr txBox="1"/>
           <p:nvPr/>
         </p:nvSpPr>
         <p:spPr>
           <a:xfrm>
-            <a:off x="1133856" y="4600164"/>
-            <a:ext cx="9820656" cy="839785"/>
+            <a:off x="8083296" y="2103120"/>
+            <a:ext cx="2825496" cy="2185416"/>
           </a:xfrm>
           <a:prstGeom prst="rect">
             <a:avLst/>
@@ -22067,88 +20265,7 @@
       </p:sp>
       <p:sp>
         <p:nvSpPr>
-          <p:cNvPr id="7" name="Shape 5"/>
-          <p:cNvSpPr/>
-          <p:nvPr/>
-        </p:nvSpPr>
-        <p:spPr>
-          <a:xfrm>
-            <a:off x="731520" y="1207008"/>
-            <a:ext cx="1325880" cy="54864"/>
-          </a:xfrm>
-          <a:prstGeom prst="rect">
-            <a:avLst/>
-          </a:prstGeom>
-          <a:solidFill>
-            <a:srgbClr val="4F6F8F"/>
-          </a:solidFill>
-          <a:ln w="12700">
-            <a:solidFill>
-              <a:srgbClr val="4F6F8F">
-                <a:alpha val="0"/>
-              </a:srgbClr>
-            </a:solidFill>
-            <a:prstDash val="solid"/>
-          </a:ln>
-        </p:spPr>
-      </p:sp>
-      <p:sp>
-        <p:nvSpPr>
-          <p:cNvPr id="8" name="Shape 6"/>
-          <p:cNvSpPr/>
-          <p:nvPr/>
-        </p:nvSpPr>
-        <p:spPr>
-          <a:xfrm>
-            <a:off x="822960" y="1554480"/>
-            <a:ext cx="4937760" cy="73152"/>
-          </a:xfrm>
-          <a:prstGeom prst="rect">
-            <a:avLst/>
-          </a:prstGeom>
-          <a:solidFill>
-            <a:srgbClr val="4F6F8F"/>
-          </a:solidFill>
-          <a:ln w="12700">
-            <a:solidFill>
-              <a:srgbClr val="4F6F8F">
-                <a:alpha val="0"/>
-              </a:srgbClr>
-            </a:solidFill>
-            <a:prstDash val="solid"/>
-          </a:ln>
-        </p:spPr>
-      </p:sp>
-      <p:sp>
-        <p:nvSpPr>
-          <p:cNvPr id="9" name="Shape 7"/>
-          <p:cNvSpPr/>
-          <p:nvPr/>
-        </p:nvSpPr>
-        <p:spPr>
-          <a:xfrm>
-            <a:off x="6400800" y="1554480"/>
-            <a:ext cx="4937760" cy="73152"/>
-          </a:xfrm>
-          <a:prstGeom prst="rect">
-            <a:avLst/>
-          </a:prstGeom>
-          <a:solidFill>
-            <a:srgbClr val="4F6F8F"/>
-          </a:solidFill>
-          <a:ln w="12700">
-            <a:solidFill>
-              <a:srgbClr val="4F6F8F">
-                <a:alpha val="0"/>
-              </a:srgbClr>
-            </a:solidFill>
-            <a:prstDash val="solid"/>
-          </a:ln>
-        </p:spPr>
-      </p:sp>
-      <p:sp>
-        <p:nvSpPr>
-          <p:cNvPr id="10" name="mdpr:2-2-14f8eb:title:__title:2-2-14f8eb"/>
+          <p:cNvPr id="7" name="mdpr:2-2-14f8eb:title:__title:2-2-14f8eb"/>
           <p:cNvSpPr txBox="1"/>
           <p:nvPr/>
         </p:nvSpPr>
@@ -22182,7 +20299,24 @@
                 <a:ea typeface="Pretendard" pitchFamily="34" charset="-122"/>
                 <a:cs typeface="Pretendard" pitchFamily="34" charset="-120"/>
               </a:rPr>
-              <a:t>Composition Contract (Cont. 2/2)</a:t>
+              <a:t>Composition Contract</a:t>
+            </a:r>
+            <a:pPr algn="ctr" indent="0" marL="0">
+              <a:lnSpc>
+                <a:spcPct val="120000"/>
+              </a:lnSpc>
+              <a:buNone/>
+            </a:pPr>
+            <a:r>
+              <a:rPr lang="en-US" sz="2000" dirty="0">
+                <a:solidFill>
+                  <a:srgbClr val="898989"/>
+                </a:solidFill>
+                <a:latin typeface="Pretendard" pitchFamily="34" charset="0"/>
+                <a:ea typeface="Pretendard" pitchFamily="34" charset="-122"/>
+                <a:cs typeface="Pretendard" pitchFamily="34" charset="-120"/>
+              </a:rPr>
+              <a:t> (Cont. 2/2)</a:t>
             </a:r>
             <a:endParaRPr lang="en-US" sz="3400" dirty="0"/>
           </a:p>
@@ -22190,14 +20324,14 @@
       </p:sp>
       <p:sp>
         <p:nvSpPr>
-          <p:cNvPr id="11" name="mdpr:2-2-14f8eb:left:block-6-chunk-2"/>
+          <p:cNvPr id="8" name="mdpr:2-2-14f8eb:left:block-6-chunk-2"/>
           <p:cNvSpPr txBox="1"/>
           <p:nvPr/>
         </p:nvSpPr>
         <p:spPr>
           <a:xfrm>
-            <a:off x="896112" y="1664208"/>
-            <a:ext cx="4791456" cy="4169664"/>
+            <a:off x="896112" y="1463040"/>
+            <a:ext cx="4791456" cy="4261104"/>
           </a:xfrm>
           <a:prstGeom prst="rect">
             <a:avLst/>
@@ -22249,14 +20383,14 @@
       </p:sp>
       <p:sp>
         <p:nvSpPr>
-          <p:cNvPr id="12" name="mdpr:2-2-14f8eb:right:block-6-chunk-2"/>
+          <p:cNvPr id="9" name="mdpr:2-2-14f8eb:right:block-6-chunk-2"/>
           <p:cNvSpPr txBox="1"/>
           <p:nvPr/>
         </p:nvSpPr>
         <p:spPr>
           <a:xfrm>
-            <a:off x="6473952" y="1664208"/>
-            <a:ext cx="4791456" cy="4169664"/>
+            <a:off x="6473952" y="1463040"/>
+            <a:ext cx="4791456" cy="4261104"/>
           </a:xfrm>
           <a:prstGeom prst="rect">
             <a:avLst/>
@@ -22504,8 +20638,8 @@
         </p:nvSpPr>
         <p:spPr>
           <a:xfrm>
-            <a:off x="731520" y="1207008"/>
-            <a:ext cx="1325880" cy="54864"/>
+            <a:off x="822960" y="1938528"/>
+            <a:ext cx="73152" cy="2514600"/>
           </a:xfrm>
           <a:prstGeom prst="rect">
             <a:avLst/>
@@ -22531,427 +20665,14 @@
         </p:nvSpPr>
         <p:spPr>
           <a:xfrm>
-            <a:off x="955548" y="1915668"/>
-            <a:ext cx="10241280" cy="1024128"/>
-          </a:xfrm>
-          <a:prstGeom prst="roundRect">
-            <a:avLst>
-              <a:gd name="adj" fmla="val 5357"/>
-            </a:avLst>
-          </a:prstGeom>
-          <a:solidFill>
-            <a:srgbClr val="B8C3D2">
-              <a:alpha val="26000"/>
-            </a:srgbClr>
-          </a:solidFill>
-          <a:ln w="12700">
-            <a:solidFill>
-              <a:srgbClr val="D5DCE7">
-                <a:alpha val="0"/>
-              </a:srgbClr>
-            </a:solidFill>
-            <a:prstDash val="solid"/>
-          </a:ln>
-          <a:effectLst>
-            <a:outerShdw sx="100000" sy="100000" kx="0" ky="0" algn="bl" rotWithShape="0" blurRad="13970" dist="50800" dir="2700000">
-              <a:srgbClr val="AAB5C4">
-                <a:alpha val="20000"/>
-              </a:srgbClr>
-            </a:outerShdw>
-          </a:effectLst>
-        </p:spPr>
-      </p:sp>
-      <p:sp>
-        <p:nvSpPr>
-          <p:cNvPr id="9" name="Shape 7"/>
-          <p:cNvSpPr/>
-          <p:nvPr/>
-        </p:nvSpPr>
-        <p:spPr>
-          <a:xfrm>
-            <a:off x="882396" y="1833372"/>
-            <a:ext cx="10241280" cy="1024128"/>
-          </a:xfrm>
-          <a:prstGeom prst="roundRect">
-            <a:avLst>
-              <a:gd name="adj" fmla="val 5357"/>
-            </a:avLst>
-          </a:prstGeom>
-          <a:solidFill>
-            <a:srgbClr val="FFFFFF">
-              <a:alpha val="42000"/>
-            </a:srgbClr>
-          </a:solidFill>
-          <a:ln w="12700">
-            <a:solidFill>
-              <a:srgbClr val="FFFFFF">
-                <a:alpha val="0"/>
-              </a:srgbClr>
-            </a:solidFill>
-            <a:prstDash val="solid"/>
-          </a:ln>
-          <a:effectLst>
-            <a:outerShdw sx="100000" sy="100000" kx="0" ky="0" algn="bl" rotWithShape="0" blurRad="10160" dist="50800" dir="13500000">
-              <a:srgbClr val="FFFFFF">
-                <a:alpha val="36000"/>
-              </a:srgbClr>
-            </a:outerShdw>
-          </a:effectLst>
-        </p:spPr>
-      </p:sp>
-      <p:sp>
-        <p:nvSpPr>
-          <p:cNvPr id="10" name="Shape 8"/>
-          <p:cNvSpPr/>
-          <p:nvPr/>
-        </p:nvSpPr>
-        <p:spPr>
-          <a:xfrm>
-            <a:off x="914400" y="1865376"/>
-            <a:ext cx="10241280" cy="1024128"/>
-          </a:xfrm>
-          <a:prstGeom prst="roundRect">
-            <a:avLst>
-              <a:gd name="adj" fmla="val 5357"/>
-            </a:avLst>
-          </a:prstGeom>
-          <a:solidFill>
-            <a:srgbClr val="E9EEF5">
-              <a:alpha val="6000"/>
-            </a:srgbClr>
-          </a:solidFill>
-          <a:ln w="12700">
-            <a:solidFill>
-              <a:srgbClr val="FFFFFF">
-                <a:alpha val="28000"/>
-              </a:srgbClr>
-            </a:solidFill>
-            <a:prstDash val="solid"/>
-          </a:ln>
-        </p:spPr>
-      </p:sp>
-      <p:pic>
-        <p:nvPicPr>
-          <p:cNvPr id="11" name="Image 0" descr="preencoded.png">    </p:cNvPr>
-          <p:cNvPicPr>
-            <a:picLocks noChangeAspect="1"/>
-          </p:cNvPicPr>
-          <p:nvPr/>
-        </p:nvPicPr>
-        <p:blipFill>
-          <a:blip r:embed="rId1">
-            <a:extLst>
-              <a:ext uri="{96DAC541-7B7A-43D3-8B79-37D633B846F1}">
-                <asvg:svgBlip xmlns:asvg="http://schemas.microsoft.com/office/drawing/2016/SVG/main" r:embed="rId2"/>
-              </a:ext>
-            </a:extLst>
-          </a:blip>
-          <a:stretch>
-            <a:fillRect/>
-          </a:stretch>
-        </p:blipFill>
-        <p:spPr>
-          <a:xfrm>
-            <a:off x="914400" y="1865376"/>
-            <a:ext cx="10241280" cy="1024128"/>
+            <a:off x="4343400" y="1938528"/>
+            <a:ext cx="73152" cy="2514600"/>
           </a:xfrm>
           <a:prstGeom prst="rect">
             <a:avLst/>
           </a:prstGeom>
-        </p:spPr>
-      </p:pic>
-      <p:sp>
-        <p:nvSpPr>
-          <p:cNvPr id="12" name="Shape 9"/>
-          <p:cNvSpPr/>
-          <p:nvPr/>
-        </p:nvSpPr>
-        <p:spPr>
-          <a:xfrm>
-            <a:off x="955548" y="3241548"/>
-            <a:ext cx="10241280" cy="1024128"/>
-          </a:xfrm>
-          <a:prstGeom prst="roundRect">
-            <a:avLst>
-              <a:gd name="adj" fmla="val 5357"/>
-            </a:avLst>
-          </a:prstGeom>
-          <a:solidFill>
-            <a:srgbClr val="B8C3D2">
-              <a:alpha val="26000"/>
-            </a:srgbClr>
-          </a:solidFill>
-          <a:ln w="12700">
-            <a:solidFill>
-              <a:srgbClr val="D5DCE7">
-                <a:alpha val="0"/>
-              </a:srgbClr>
-            </a:solidFill>
-            <a:prstDash val="solid"/>
-          </a:ln>
-          <a:effectLst>
-            <a:outerShdw sx="100000" sy="100000" kx="0" ky="0" algn="bl" rotWithShape="0" blurRad="13970" dist="50800" dir="2700000">
-              <a:srgbClr val="AAB5C4">
-                <a:alpha val="20000"/>
-              </a:srgbClr>
-            </a:outerShdw>
-          </a:effectLst>
-        </p:spPr>
-      </p:sp>
-      <p:sp>
-        <p:nvSpPr>
-          <p:cNvPr id="13" name="Shape 10"/>
-          <p:cNvSpPr/>
-          <p:nvPr/>
-        </p:nvSpPr>
-        <p:spPr>
-          <a:xfrm>
-            <a:off x="882396" y="3159252"/>
-            <a:ext cx="10241280" cy="1024128"/>
-          </a:xfrm>
-          <a:prstGeom prst="roundRect">
-            <a:avLst>
-              <a:gd name="adj" fmla="val 5357"/>
-            </a:avLst>
-          </a:prstGeom>
-          <a:solidFill>
-            <a:srgbClr val="FFFFFF">
-              <a:alpha val="42000"/>
-            </a:srgbClr>
-          </a:solidFill>
-          <a:ln w="12700">
-            <a:solidFill>
-              <a:srgbClr val="FFFFFF">
-                <a:alpha val="0"/>
-              </a:srgbClr>
-            </a:solidFill>
-            <a:prstDash val="solid"/>
-          </a:ln>
-          <a:effectLst>
-            <a:outerShdw sx="100000" sy="100000" kx="0" ky="0" algn="bl" rotWithShape="0" blurRad="10160" dist="50800" dir="13500000">
-              <a:srgbClr val="FFFFFF">
-                <a:alpha val="36000"/>
-              </a:srgbClr>
-            </a:outerShdw>
-          </a:effectLst>
-        </p:spPr>
-      </p:sp>
-      <p:sp>
-        <p:nvSpPr>
-          <p:cNvPr id="14" name="Shape 11"/>
-          <p:cNvSpPr/>
-          <p:nvPr/>
-        </p:nvSpPr>
-        <p:spPr>
-          <a:xfrm>
-            <a:off x="914400" y="3191256"/>
-            <a:ext cx="10241280" cy="1024128"/>
-          </a:xfrm>
-          <a:prstGeom prst="roundRect">
-            <a:avLst>
-              <a:gd name="adj" fmla="val 5357"/>
-            </a:avLst>
-          </a:prstGeom>
-          <a:solidFill>
-            <a:srgbClr val="E9EEF5">
-              <a:alpha val="6000"/>
-            </a:srgbClr>
-          </a:solidFill>
-          <a:ln w="12700">
-            <a:solidFill>
-              <a:srgbClr val="FFFFFF">
-                <a:alpha val="28000"/>
-              </a:srgbClr>
-            </a:solidFill>
-            <a:prstDash val="solid"/>
-          </a:ln>
-        </p:spPr>
-      </p:sp>
-      <p:pic>
-        <p:nvPicPr>
-          <p:cNvPr id="15" name="Image 1" descr="preencoded.png">    </p:cNvPr>
-          <p:cNvPicPr>
-            <a:picLocks noChangeAspect="1"/>
-          </p:cNvPicPr>
-          <p:nvPr/>
-        </p:nvPicPr>
-        <p:blipFill>
-          <a:blip r:embed="rId3">
-            <a:extLst>
-              <a:ext uri="{96DAC541-7B7A-43D3-8B79-37D633B846F1}">
-                <asvg:svgBlip xmlns:asvg="http://schemas.microsoft.com/office/drawing/2016/SVG/main" r:embed="rId4"/>
-              </a:ext>
-            </a:extLst>
-          </a:blip>
-          <a:stretch>
-            <a:fillRect/>
-          </a:stretch>
-        </p:blipFill>
-        <p:spPr>
-          <a:xfrm>
-            <a:off x="914400" y="3191256"/>
-            <a:ext cx="10241280" cy="1024128"/>
-          </a:xfrm>
-          <a:prstGeom prst="rect">
-            <a:avLst/>
-          </a:prstGeom>
-        </p:spPr>
-      </p:pic>
-      <p:sp>
-        <p:nvSpPr>
-          <p:cNvPr id="16" name="Shape 12"/>
-          <p:cNvSpPr/>
-          <p:nvPr/>
-        </p:nvSpPr>
-        <p:spPr>
-          <a:xfrm>
-            <a:off x="955548" y="4558284"/>
-            <a:ext cx="10241280" cy="1024128"/>
-          </a:xfrm>
-          <a:prstGeom prst="roundRect">
-            <a:avLst>
-              <a:gd name="adj" fmla="val 5357"/>
-            </a:avLst>
-          </a:prstGeom>
-          <a:solidFill>
-            <a:srgbClr val="B8C3D2">
-              <a:alpha val="26000"/>
-            </a:srgbClr>
-          </a:solidFill>
-          <a:ln w="12700">
-            <a:solidFill>
-              <a:srgbClr val="D5DCE7">
-                <a:alpha val="0"/>
-              </a:srgbClr>
-            </a:solidFill>
-            <a:prstDash val="solid"/>
-          </a:ln>
-          <a:effectLst>
-            <a:outerShdw sx="100000" sy="100000" kx="0" ky="0" algn="bl" rotWithShape="0" blurRad="13970" dist="50800" dir="2700000">
-              <a:srgbClr val="AAB5C4">
-                <a:alpha val="20000"/>
-              </a:srgbClr>
-            </a:outerShdw>
-          </a:effectLst>
-        </p:spPr>
-      </p:sp>
-      <p:sp>
-        <p:nvSpPr>
-          <p:cNvPr id="17" name="Shape 13"/>
-          <p:cNvSpPr/>
-          <p:nvPr/>
-        </p:nvSpPr>
-        <p:spPr>
-          <a:xfrm>
-            <a:off x="882396" y="4475988"/>
-            <a:ext cx="10241280" cy="1024128"/>
-          </a:xfrm>
-          <a:prstGeom prst="roundRect">
-            <a:avLst>
-              <a:gd name="adj" fmla="val 5357"/>
-            </a:avLst>
-          </a:prstGeom>
-          <a:solidFill>
-            <a:srgbClr val="FFFFFF">
-              <a:alpha val="42000"/>
-            </a:srgbClr>
-          </a:solidFill>
-          <a:ln w="12700">
-            <a:solidFill>
-              <a:srgbClr val="FFFFFF">
-                <a:alpha val="0"/>
-              </a:srgbClr>
-            </a:solidFill>
-            <a:prstDash val="solid"/>
-          </a:ln>
-          <a:effectLst>
-            <a:outerShdw sx="100000" sy="100000" kx="0" ky="0" algn="bl" rotWithShape="0" blurRad="10160" dist="50800" dir="13500000">
-              <a:srgbClr val="FFFFFF">
-                <a:alpha val="36000"/>
-              </a:srgbClr>
-            </a:outerShdw>
-          </a:effectLst>
-        </p:spPr>
-      </p:sp>
-      <p:sp>
-        <p:nvSpPr>
-          <p:cNvPr id="18" name="Shape 14"/>
-          <p:cNvSpPr/>
-          <p:nvPr/>
-        </p:nvSpPr>
-        <p:spPr>
-          <a:xfrm>
-            <a:off x="914400" y="4507992"/>
-            <a:ext cx="10241280" cy="1024128"/>
-          </a:xfrm>
-          <a:prstGeom prst="roundRect">
-            <a:avLst>
-              <a:gd name="adj" fmla="val 5357"/>
-            </a:avLst>
-          </a:prstGeom>
-          <a:solidFill>
-            <a:srgbClr val="E9EEF5">
-              <a:alpha val="6000"/>
-            </a:srgbClr>
-          </a:solidFill>
-          <a:ln w="12700">
-            <a:solidFill>
-              <a:srgbClr val="FFFFFF">
-                <a:alpha val="28000"/>
-              </a:srgbClr>
-            </a:solidFill>
-            <a:prstDash val="solid"/>
-          </a:ln>
-        </p:spPr>
-      </p:sp>
-      <p:pic>
-        <p:nvPicPr>
-          <p:cNvPr id="19" name="Image 2" descr="preencoded.png">    </p:cNvPr>
-          <p:cNvPicPr>
-            <a:picLocks noChangeAspect="1"/>
-          </p:cNvPicPr>
-          <p:nvPr/>
-        </p:nvPicPr>
-        <p:blipFill>
-          <a:blip r:embed="rId5">
-            <a:extLst>
-              <a:ext uri="{96DAC541-7B7A-43D3-8B79-37D633B846F1}">
-                <asvg:svgBlip xmlns:asvg="http://schemas.microsoft.com/office/drawing/2016/SVG/main" r:embed="rId6"/>
-              </a:ext>
-            </a:extLst>
-          </a:blip>
-          <a:stretch>
-            <a:fillRect/>
-          </a:stretch>
-        </p:blipFill>
-        <p:spPr>
-          <a:xfrm>
-            <a:off x="914400" y="4507992"/>
-            <a:ext cx="10241280" cy="1024128"/>
-          </a:xfrm>
-          <a:prstGeom prst="rect">
-            <a:avLst/>
-          </a:prstGeom>
-        </p:spPr>
-      </p:pic>
-      <p:sp>
-        <p:nvSpPr>
-          <p:cNvPr id="20" name="Shape 15"/>
-          <p:cNvSpPr/>
-          <p:nvPr/>
-        </p:nvSpPr>
-        <p:spPr>
-          <a:xfrm>
-            <a:off x="786384" y="1956816"/>
-            <a:ext cx="32004" cy="3483864"/>
-          </a:xfrm>
-          <a:prstGeom prst="rect">
-            <a:avLst/>
-          </a:prstGeom>
-          <a:solidFill>
-            <a:srgbClr val="CBD5E1">
-              <a:alpha val="80000"/>
-            </a:srgbClr>
+          <a:solidFill>
+            <a:srgbClr val="CBD5E1"/>
           </a:solidFill>
           <a:ln w="12700">
             <a:solidFill>
@@ -22965,14 +20686,14 @@
       </p:sp>
       <p:sp>
         <p:nvSpPr>
-          <p:cNvPr id="21" name="Shape 16"/>
-          <p:cNvSpPr/>
-          <p:nvPr/>
-        </p:nvSpPr>
-        <p:spPr>
-          <a:xfrm>
-            <a:off x="914400" y="1865376"/>
-            <a:ext cx="73152" cy="1024128"/>
+          <p:cNvPr id="9" name="Shape 7"/>
+          <p:cNvSpPr/>
+          <p:nvPr/>
+        </p:nvSpPr>
+        <p:spPr>
+          <a:xfrm>
+            <a:off x="7863840" y="1938528"/>
+            <a:ext cx="73152" cy="2514600"/>
           </a:xfrm>
           <a:prstGeom prst="rect">
             <a:avLst/>
@@ -22992,61 +20713,7 @@
       </p:sp>
       <p:sp>
         <p:nvSpPr>
-          <p:cNvPr id="22" name="Shape 17"/>
-          <p:cNvSpPr/>
-          <p:nvPr/>
-        </p:nvSpPr>
-        <p:spPr>
-          <a:xfrm>
-            <a:off x="914400" y="3191256"/>
-            <a:ext cx="73152" cy="1024128"/>
-          </a:xfrm>
-          <a:prstGeom prst="rect">
-            <a:avLst/>
-          </a:prstGeom>
-          <a:solidFill>
-            <a:srgbClr val="CBD5E1"/>
-          </a:solidFill>
-          <a:ln w="12700">
-            <a:solidFill>
-              <a:srgbClr val="CBD5E1">
-                <a:alpha val="0"/>
-              </a:srgbClr>
-            </a:solidFill>
-            <a:prstDash val="solid"/>
-          </a:ln>
-        </p:spPr>
-      </p:sp>
-      <p:sp>
-        <p:nvSpPr>
-          <p:cNvPr id="23" name="Shape 18"/>
-          <p:cNvSpPr/>
-          <p:nvPr/>
-        </p:nvSpPr>
-        <p:spPr>
-          <a:xfrm>
-            <a:off x="914400" y="4507992"/>
-            <a:ext cx="73152" cy="1024128"/>
-          </a:xfrm>
-          <a:prstGeom prst="rect">
-            <a:avLst/>
-          </a:prstGeom>
-          <a:solidFill>
-            <a:srgbClr val="4F6F8F"/>
-          </a:solidFill>
-          <a:ln w="12700">
-            <a:solidFill>
-              <a:srgbClr val="4F6F8F">
-                <a:alpha val="0"/>
-              </a:srgbClr>
-            </a:solidFill>
-            <a:prstDash val="solid"/>
-          </a:ln>
-        </p:spPr>
-      </p:sp>
-      <p:sp>
-        <p:nvSpPr>
-          <p:cNvPr id="24" name="mdpr:1-2-dfa474:title:__title:1-2-dfa474"/>
+          <p:cNvPr id="10" name="mdpr:1-2-dfa474:title:__title:1-2-dfa474"/>
           <p:cNvSpPr txBox="1"/>
           <p:nvPr/>
         </p:nvSpPr>
@@ -23088,14 +20755,14 @@
       </p:sp>
       <p:sp>
         <p:nvSpPr>
-          <p:cNvPr id="25" name="mdpr:1-2-dfa474:item-1:block-8-chunk-1"/>
+          <p:cNvPr id="11" name="mdpr:1-2-dfa474:item-1:block-8-chunk-1"/>
           <p:cNvSpPr txBox="1"/>
           <p:nvPr/>
         </p:nvSpPr>
         <p:spPr>
           <a:xfrm>
-            <a:off x="1133856" y="1957548"/>
-            <a:ext cx="9820656" cy="839785"/>
+            <a:off x="1042416" y="2103120"/>
+            <a:ext cx="2825496" cy="2185416"/>
           </a:xfrm>
           <a:prstGeom prst="rect">
             <a:avLst/>
@@ -23147,14 +20814,14 @@
       </p:sp>
       <p:sp>
         <p:nvSpPr>
-          <p:cNvPr id="26" name="mdpr:1-2-dfa474:item-2:block-8-chunk-1"/>
+          <p:cNvPr id="12" name="mdpr:1-2-dfa474:item-2:block-8-chunk-1"/>
           <p:cNvSpPr txBox="1"/>
           <p:nvPr/>
         </p:nvSpPr>
         <p:spPr>
           <a:xfrm>
-            <a:off x="1133856" y="3283428"/>
-            <a:ext cx="9820656" cy="839785"/>
+            <a:off x="4562856" y="2103120"/>
+            <a:ext cx="2825496" cy="2185416"/>
           </a:xfrm>
           <a:prstGeom prst="rect">
             <a:avLst/>
@@ -23206,14 +20873,14 @@
       </p:sp>
       <p:sp>
         <p:nvSpPr>
-          <p:cNvPr id="27" name="mdpr:1-2-dfa474:item-3:block-8-chunk-1"/>
+          <p:cNvPr id="13" name="mdpr:1-2-dfa474:item-3:block-8-chunk-1"/>
           <p:cNvSpPr txBox="1"/>
           <p:nvPr/>
         </p:nvSpPr>
         <p:spPr>
           <a:xfrm>
-            <a:off x="1133856" y="4600164"/>
-            <a:ext cx="9820656" cy="839785"/>
+            <a:off x="8083296" y="2103120"/>
+            <a:ext cx="2825496" cy="2185416"/>
           </a:xfrm>
           <a:prstGeom prst="rect">
             <a:avLst/>
@@ -23455,88 +21122,7 @@
       </p:sp>
       <p:sp>
         <p:nvSpPr>
-          <p:cNvPr id="7" name="Shape 5"/>
-          <p:cNvSpPr/>
-          <p:nvPr/>
-        </p:nvSpPr>
-        <p:spPr>
-          <a:xfrm>
-            <a:off x="731520" y="1207008"/>
-            <a:ext cx="1325880" cy="54864"/>
-          </a:xfrm>
-          <a:prstGeom prst="rect">
-            <a:avLst/>
-          </a:prstGeom>
-          <a:solidFill>
-            <a:srgbClr val="4F6F8F"/>
-          </a:solidFill>
-          <a:ln w="12700">
-            <a:solidFill>
-              <a:srgbClr val="4F6F8F">
-                <a:alpha val="0"/>
-              </a:srgbClr>
-            </a:solidFill>
-            <a:prstDash val="solid"/>
-          </a:ln>
-        </p:spPr>
-      </p:sp>
-      <p:sp>
-        <p:nvSpPr>
-          <p:cNvPr id="8" name="Shape 6"/>
-          <p:cNvSpPr/>
-          <p:nvPr/>
-        </p:nvSpPr>
-        <p:spPr>
-          <a:xfrm>
-            <a:off x="822960" y="1554480"/>
-            <a:ext cx="4937760" cy="73152"/>
-          </a:xfrm>
-          <a:prstGeom prst="rect">
-            <a:avLst/>
-          </a:prstGeom>
-          <a:solidFill>
-            <a:srgbClr val="4F6F8F"/>
-          </a:solidFill>
-          <a:ln w="12700">
-            <a:solidFill>
-              <a:srgbClr val="4F6F8F">
-                <a:alpha val="0"/>
-              </a:srgbClr>
-            </a:solidFill>
-            <a:prstDash val="solid"/>
-          </a:ln>
-        </p:spPr>
-      </p:sp>
-      <p:sp>
-        <p:nvSpPr>
-          <p:cNvPr id="9" name="Shape 7"/>
-          <p:cNvSpPr/>
-          <p:nvPr/>
-        </p:nvSpPr>
-        <p:spPr>
-          <a:xfrm>
-            <a:off x="6400800" y="1554480"/>
-            <a:ext cx="4937760" cy="73152"/>
-          </a:xfrm>
-          <a:prstGeom prst="rect">
-            <a:avLst/>
-          </a:prstGeom>
-          <a:solidFill>
-            <a:srgbClr val="4F6F8F"/>
-          </a:solidFill>
-          <a:ln w="12700">
-            <a:solidFill>
-              <a:srgbClr val="4F6F8F">
-                <a:alpha val="0"/>
-              </a:srgbClr>
-            </a:solidFill>
-            <a:prstDash val="solid"/>
-          </a:ln>
-        </p:spPr>
-      </p:sp>
-      <p:sp>
-        <p:nvSpPr>
-          <p:cNvPr id="10" name="mdpr:2-2-149bde:title:__title:2-2-149bde"/>
+          <p:cNvPr id="7" name="mdpr:2-2-149bde:title:__title:2-2-149bde"/>
           <p:cNvSpPr txBox="1"/>
           <p:nvPr/>
         </p:nvSpPr>
@@ -23570,7 +21156,24 @@
                 <a:ea typeface="Pretendard" pitchFamily="34" charset="-122"/>
                 <a:cs typeface="Pretendard" pitchFamily="34" charset="-120"/>
               </a:rPr>
-              <a:t>Pruned Style Families (Cont. 2/2)</a:t>
+              <a:t>Pruned Style Families</a:t>
+            </a:r>
+            <a:pPr algn="ctr" indent="0" marL="0">
+              <a:lnSpc>
+                <a:spcPct val="120000"/>
+              </a:lnSpc>
+              <a:buNone/>
+            </a:pPr>
+            <a:r>
+              <a:rPr lang="en-US" sz="2000" dirty="0">
+                <a:solidFill>
+                  <a:srgbClr val="898989"/>
+                </a:solidFill>
+                <a:latin typeface="Pretendard" pitchFamily="34" charset="0"/>
+                <a:ea typeface="Pretendard" pitchFamily="34" charset="-122"/>
+                <a:cs typeface="Pretendard" pitchFamily="34" charset="-120"/>
+              </a:rPr>
+              <a:t> (Cont. 2/2)</a:t>
             </a:r>
             <a:endParaRPr lang="en-US" sz="3400" dirty="0"/>
           </a:p>
@@ -23578,14 +21181,14 @@
       </p:sp>
       <p:sp>
         <p:nvSpPr>
-          <p:cNvPr id="11" name="mdpr:2-2-149bde:left:block-8-chunk-2"/>
+          <p:cNvPr id="8" name="mdpr:2-2-149bde:left:block-8-chunk-2"/>
           <p:cNvSpPr txBox="1"/>
           <p:nvPr/>
         </p:nvSpPr>
         <p:spPr>
           <a:xfrm>
-            <a:off x="896112" y="1664208"/>
-            <a:ext cx="4791456" cy="4169664"/>
+            <a:off x="896112" y="1463040"/>
+            <a:ext cx="4791456" cy="4261104"/>
           </a:xfrm>
           <a:prstGeom prst="rect">
             <a:avLst/>
@@ -23637,14 +21240,14 @@
       </p:sp>
       <p:sp>
         <p:nvSpPr>
-          <p:cNvPr id="12" name="mdpr:2-2-149bde:right:block-8-chunk-2"/>
+          <p:cNvPr id="9" name="mdpr:2-2-149bde:right:block-8-chunk-2"/>
           <p:cNvSpPr txBox="1"/>
           <p:nvPr/>
         </p:nvSpPr>
         <p:spPr>
           <a:xfrm>
-            <a:off x="6473952" y="1664208"/>
-            <a:ext cx="4791456" cy="4169664"/>
+            <a:off x="6473952" y="1463040"/>
+            <a:ext cx="4791456" cy="4261104"/>
           </a:xfrm>
           <a:prstGeom prst="rect">
             <a:avLst/>
@@ -23892,8 +21495,282 @@
         </p:nvSpPr>
         <p:spPr>
           <a:xfrm>
-            <a:off x="731520" y="1207008"/>
-            <a:ext cx="1325880" cy="54864"/>
+            <a:off x="955548" y="2574036"/>
+            <a:ext cx="10241280" cy="1024128"/>
+          </a:xfrm>
+          <a:prstGeom prst="roundRect">
+            <a:avLst>
+              <a:gd name="adj" fmla="val 5357"/>
+            </a:avLst>
+          </a:prstGeom>
+          <a:solidFill>
+            <a:srgbClr val="B8C3D2">
+              <a:alpha val="26000"/>
+            </a:srgbClr>
+          </a:solidFill>
+          <a:ln w="12700">
+            <a:solidFill>
+              <a:srgbClr val="D5DCE7">
+                <a:alpha val="0"/>
+              </a:srgbClr>
+            </a:solidFill>
+            <a:prstDash val="solid"/>
+          </a:ln>
+          <a:effectLst>
+            <a:outerShdw sx="100000" sy="100000" kx="0" ky="0" algn="bl" rotWithShape="0" blurRad="13970" dist="50800" dir="2700000">
+              <a:srgbClr val="AAB5C4">
+                <a:alpha val="20000"/>
+              </a:srgbClr>
+            </a:outerShdw>
+          </a:effectLst>
+        </p:spPr>
+      </p:sp>
+      <p:sp>
+        <p:nvSpPr>
+          <p:cNvPr id="8" name="Shape 6"/>
+          <p:cNvSpPr/>
+          <p:nvPr/>
+        </p:nvSpPr>
+        <p:spPr>
+          <a:xfrm>
+            <a:off x="882396" y="2491740"/>
+            <a:ext cx="10241280" cy="1024128"/>
+          </a:xfrm>
+          <a:prstGeom prst="roundRect">
+            <a:avLst>
+              <a:gd name="adj" fmla="val 5357"/>
+            </a:avLst>
+          </a:prstGeom>
+          <a:solidFill>
+            <a:srgbClr val="FFFFFF">
+              <a:alpha val="42000"/>
+            </a:srgbClr>
+          </a:solidFill>
+          <a:ln w="12700">
+            <a:solidFill>
+              <a:srgbClr val="FFFFFF">
+                <a:alpha val="0"/>
+              </a:srgbClr>
+            </a:solidFill>
+            <a:prstDash val="solid"/>
+          </a:ln>
+          <a:effectLst>
+            <a:outerShdw sx="100000" sy="100000" kx="0" ky="0" algn="bl" rotWithShape="0" blurRad="10160" dist="50800" dir="13500000">
+              <a:srgbClr val="FFFFFF">
+                <a:alpha val="36000"/>
+              </a:srgbClr>
+            </a:outerShdw>
+          </a:effectLst>
+        </p:spPr>
+      </p:sp>
+      <p:sp>
+        <p:nvSpPr>
+          <p:cNvPr id="9" name="Shape 7"/>
+          <p:cNvSpPr/>
+          <p:nvPr/>
+        </p:nvSpPr>
+        <p:spPr>
+          <a:xfrm>
+            <a:off x="914400" y="2523744"/>
+            <a:ext cx="10241280" cy="1024128"/>
+          </a:xfrm>
+          <a:prstGeom prst="roundRect">
+            <a:avLst>
+              <a:gd name="adj" fmla="val 5357"/>
+            </a:avLst>
+          </a:prstGeom>
+          <a:solidFill>
+            <a:srgbClr val="E9EEF5">
+              <a:alpha val="6000"/>
+            </a:srgbClr>
+          </a:solidFill>
+          <a:ln w="12700">
+            <a:solidFill>
+              <a:srgbClr val="FFFFFF">
+                <a:alpha val="28000"/>
+              </a:srgbClr>
+            </a:solidFill>
+            <a:prstDash val="solid"/>
+          </a:ln>
+        </p:spPr>
+      </p:sp>
+      <p:pic>
+        <p:nvPicPr>
+          <p:cNvPr id="10" name="Image 0" descr="preencoded.png">    </p:cNvPr>
+          <p:cNvPicPr>
+            <a:picLocks noChangeAspect="1"/>
+          </p:cNvPicPr>
+          <p:nvPr/>
+        </p:nvPicPr>
+        <p:blipFill>
+          <a:blip r:embed="rId1">
+            <a:extLst>
+              <a:ext uri="{96DAC541-7B7A-43D3-8B79-37D633B846F1}">
+                <asvg:svgBlip xmlns:asvg="http://schemas.microsoft.com/office/drawing/2016/SVG/main" r:embed="rId2"/>
+              </a:ext>
+            </a:extLst>
+          </a:blip>
+          <a:stretch>
+            <a:fillRect/>
+          </a:stretch>
+        </p:blipFill>
+        <p:spPr>
+          <a:xfrm>
+            <a:off x="914400" y="2523744"/>
+            <a:ext cx="10241280" cy="1024128"/>
+          </a:xfrm>
+          <a:prstGeom prst="rect">
+            <a:avLst/>
+          </a:prstGeom>
+        </p:spPr>
+      </p:pic>
+      <p:sp>
+        <p:nvSpPr>
+          <p:cNvPr id="11" name="Shape 8"/>
+          <p:cNvSpPr/>
+          <p:nvPr/>
+        </p:nvSpPr>
+        <p:spPr>
+          <a:xfrm>
+            <a:off x="955548" y="3899916"/>
+            <a:ext cx="10241280" cy="1024128"/>
+          </a:xfrm>
+          <a:prstGeom prst="roundRect">
+            <a:avLst>
+              <a:gd name="adj" fmla="val 5357"/>
+            </a:avLst>
+          </a:prstGeom>
+          <a:solidFill>
+            <a:srgbClr val="B8C3D2">
+              <a:alpha val="26000"/>
+            </a:srgbClr>
+          </a:solidFill>
+          <a:ln w="12700">
+            <a:solidFill>
+              <a:srgbClr val="D5DCE7">
+                <a:alpha val="0"/>
+              </a:srgbClr>
+            </a:solidFill>
+            <a:prstDash val="solid"/>
+          </a:ln>
+          <a:effectLst>
+            <a:outerShdw sx="100000" sy="100000" kx="0" ky="0" algn="bl" rotWithShape="0" blurRad="13970" dist="50800" dir="2700000">
+              <a:srgbClr val="AAB5C4">
+                <a:alpha val="20000"/>
+              </a:srgbClr>
+            </a:outerShdw>
+          </a:effectLst>
+        </p:spPr>
+      </p:sp>
+      <p:sp>
+        <p:nvSpPr>
+          <p:cNvPr id="12" name="Shape 9"/>
+          <p:cNvSpPr/>
+          <p:nvPr/>
+        </p:nvSpPr>
+        <p:spPr>
+          <a:xfrm>
+            <a:off x="882396" y="3817620"/>
+            <a:ext cx="10241280" cy="1024128"/>
+          </a:xfrm>
+          <a:prstGeom prst="roundRect">
+            <a:avLst>
+              <a:gd name="adj" fmla="val 5357"/>
+            </a:avLst>
+          </a:prstGeom>
+          <a:solidFill>
+            <a:srgbClr val="FFFFFF">
+              <a:alpha val="42000"/>
+            </a:srgbClr>
+          </a:solidFill>
+          <a:ln w="12700">
+            <a:solidFill>
+              <a:srgbClr val="FFFFFF">
+                <a:alpha val="0"/>
+              </a:srgbClr>
+            </a:solidFill>
+            <a:prstDash val="solid"/>
+          </a:ln>
+          <a:effectLst>
+            <a:outerShdw sx="100000" sy="100000" kx="0" ky="0" algn="bl" rotWithShape="0" blurRad="10160" dist="50800" dir="13500000">
+              <a:srgbClr val="FFFFFF">
+                <a:alpha val="36000"/>
+              </a:srgbClr>
+            </a:outerShdw>
+          </a:effectLst>
+        </p:spPr>
+      </p:sp>
+      <p:sp>
+        <p:nvSpPr>
+          <p:cNvPr id="13" name="Shape 10"/>
+          <p:cNvSpPr/>
+          <p:nvPr/>
+        </p:nvSpPr>
+        <p:spPr>
+          <a:xfrm>
+            <a:off x="914400" y="3849624"/>
+            <a:ext cx="10241280" cy="1024128"/>
+          </a:xfrm>
+          <a:prstGeom prst="roundRect">
+            <a:avLst>
+              <a:gd name="adj" fmla="val 5357"/>
+            </a:avLst>
+          </a:prstGeom>
+          <a:solidFill>
+            <a:srgbClr val="E9EEF5">
+              <a:alpha val="6000"/>
+            </a:srgbClr>
+          </a:solidFill>
+          <a:ln w="12700">
+            <a:solidFill>
+              <a:srgbClr val="FFFFFF">
+                <a:alpha val="28000"/>
+              </a:srgbClr>
+            </a:solidFill>
+            <a:prstDash val="solid"/>
+          </a:ln>
+        </p:spPr>
+      </p:sp>
+      <p:pic>
+        <p:nvPicPr>
+          <p:cNvPr id="14" name="Image 1" descr="preencoded.png">    </p:cNvPr>
+          <p:cNvPicPr>
+            <a:picLocks noChangeAspect="1"/>
+          </p:cNvPicPr>
+          <p:nvPr/>
+        </p:nvPicPr>
+        <p:blipFill>
+          <a:blip r:embed="rId3">
+            <a:extLst>
+              <a:ext uri="{96DAC541-7B7A-43D3-8B79-37D633B846F1}">
+                <asvg:svgBlip xmlns:asvg="http://schemas.microsoft.com/office/drawing/2016/SVG/main" r:embed="rId4"/>
+              </a:ext>
+            </a:extLst>
+          </a:blip>
+          <a:stretch>
+            <a:fillRect/>
+          </a:stretch>
+        </p:blipFill>
+        <p:spPr>
+          <a:xfrm>
+            <a:off x="914400" y="3849624"/>
+            <a:ext cx="10241280" cy="1024128"/>
+          </a:xfrm>
+          <a:prstGeom prst="rect">
+            <a:avLst/>
+          </a:prstGeom>
+        </p:spPr>
+      </p:pic>
+      <p:sp>
+        <p:nvSpPr>
+          <p:cNvPr id="15" name="Shape 11"/>
+          <p:cNvSpPr/>
+          <p:nvPr/>
+        </p:nvSpPr>
+        <p:spPr>
+          <a:xfrm>
+            <a:off x="914400" y="2523744"/>
+            <a:ext cx="73152" cy="1024128"/>
           </a:xfrm>
           <a:prstGeom prst="rect">
             <a:avLst/>
@@ -23913,24 +21790,24 @@
       </p:sp>
       <p:sp>
         <p:nvSpPr>
-          <p:cNvPr id="8" name="Shape 6"/>
-          <p:cNvSpPr/>
-          <p:nvPr/>
-        </p:nvSpPr>
-        <p:spPr>
-          <a:xfrm>
-            <a:off x="822960" y="1554480"/>
-            <a:ext cx="4937760" cy="73152"/>
+          <p:cNvPr id="16" name="Shape 12"/>
+          <p:cNvSpPr/>
+          <p:nvPr/>
+        </p:nvSpPr>
+        <p:spPr>
+          <a:xfrm>
+            <a:off x="914400" y="3849624"/>
+            <a:ext cx="73152" cy="1024128"/>
           </a:xfrm>
           <a:prstGeom prst="rect">
             <a:avLst/>
           </a:prstGeom>
           <a:solidFill>
-            <a:srgbClr val="4F6F8F"/>
-          </a:solidFill>
-          <a:ln w="12700">
-            <a:solidFill>
-              <a:srgbClr val="4F6F8F">
+            <a:srgbClr val="CBD5E1"/>
+          </a:solidFill>
+          <a:ln w="12700">
+            <a:solidFill>
+              <a:srgbClr val="CBD5E1">
                 <a:alpha val="0"/>
               </a:srgbClr>
             </a:solidFill>
@@ -23940,34 +21817,7 @@
       </p:sp>
       <p:sp>
         <p:nvSpPr>
-          <p:cNvPr id="9" name="Shape 7"/>
-          <p:cNvSpPr/>
-          <p:nvPr/>
-        </p:nvSpPr>
-        <p:spPr>
-          <a:xfrm>
-            <a:off x="6400800" y="1554480"/>
-            <a:ext cx="4937760" cy="73152"/>
-          </a:xfrm>
-          <a:prstGeom prst="rect">
-            <a:avLst/>
-          </a:prstGeom>
-          <a:solidFill>
-            <a:srgbClr val="4F6F8F"/>
-          </a:solidFill>
-          <a:ln w="12700">
-            <a:solidFill>
-              <a:srgbClr val="4F6F8F">
-                <a:alpha val="0"/>
-              </a:srgbClr>
-            </a:solidFill>
-            <a:prstDash val="solid"/>
-          </a:ln>
-        </p:spPr>
-      </p:sp>
-      <p:sp>
-        <p:nvSpPr>
-          <p:cNvPr id="10" name="mdpr:1-2-5a84f1:title:__title:1-2-5a84f1"/>
+          <p:cNvPr id="17" name="mdpr:1-2-5a84f1:title:__title:1-2-5a84f1"/>
           <p:cNvSpPr txBox="1"/>
           <p:nvPr/>
         </p:nvSpPr>
@@ -24009,14 +21859,14 @@
       </p:sp>
       <p:sp>
         <p:nvSpPr>
-          <p:cNvPr id="11" name="mdpr:1-2-5a84f1:left:block-10-chunk-1"/>
+          <p:cNvPr id="18" name="mdpr:1-2-5a84f1:item-1:block-10-chunk-1"/>
           <p:cNvSpPr txBox="1"/>
           <p:nvPr/>
         </p:nvSpPr>
         <p:spPr>
           <a:xfrm>
-            <a:off x="896112" y="1664208"/>
-            <a:ext cx="4791456" cy="4169664"/>
+            <a:off x="1133856" y="2615916"/>
+            <a:ext cx="9820656" cy="839785"/>
           </a:xfrm>
           <a:prstGeom prst="rect">
             <a:avLst/>
@@ -24025,7 +21875,7 @@
           <a:ln/>
         </p:spPr>
         <p:txBody>
-          <a:bodyPr wrap="square" lIns="0" tIns="25400" rIns="25400" bIns="0" rtlCol="0" anchor="t"/>
+          <a:bodyPr wrap="square" lIns="0" tIns="25400" rIns="25400" bIns="0" rtlCol="0" anchor="ctr"/>
           <a:lstStyle/>
           <a:p>
             <a:pPr algn="l" indent="0" marL="0">
@@ -24043,7 +21893,7 @@
                 <a:ea typeface="Pretendard" pitchFamily="34" charset="-122"/>
                 <a:cs typeface="Pretendard" pitchFamily="34" charset="-120"/>
               </a:rPr>
-              <a:t>- Headings</a:t>
+              <a:t>Headings</a:t>
             </a:r>
             <a:pPr algn="l" indent="0" marL="0">
               <a:lnSpc>
@@ -24068,14 +21918,14 @@
       </p:sp>
       <p:sp>
         <p:nvSpPr>
-          <p:cNvPr id="12" name="mdpr:1-2-5a84f1:right:block-10-chunk-1"/>
+          <p:cNvPr id="19" name="mdpr:1-2-5a84f1:item-2:block-10-chunk-1"/>
           <p:cNvSpPr txBox="1"/>
           <p:nvPr/>
         </p:nvSpPr>
         <p:spPr>
           <a:xfrm>
-            <a:off x="6473952" y="1664208"/>
-            <a:ext cx="4791456" cy="4169664"/>
+            <a:off x="1133856" y="3941796"/>
+            <a:ext cx="9820656" cy="839785"/>
           </a:xfrm>
           <a:prstGeom prst="rect">
             <a:avLst/>
@@ -24084,7 +21934,7 @@
           <a:ln/>
         </p:spPr>
         <p:txBody>
-          <a:bodyPr wrap="square" lIns="0" tIns="25400" rIns="25400" bIns="0" rtlCol="0" anchor="t"/>
+          <a:bodyPr wrap="square" lIns="0" tIns="25400" rIns="25400" bIns="0" rtlCol="0" anchor="ctr"/>
           <a:lstStyle/>
           <a:p>
             <a:pPr algn="l" indent="0" marL="0">
@@ -24102,7 +21952,7 @@
                 <a:ea typeface="Pretendard" pitchFamily="34" charset="-122"/>
                 <a:cs typeface="Pretendard" pitchFamily="34" charset="-120"/>
               </a:rPr>
-              <a:t>- Lists</a:t>
+              <a:t>Lists</a:t>
             </a:r>
             <a:pPr algn="l" indent="0" marL="0">
               <a:lnSpc>
